--- a/docs/curso/slides/m05-comercial.pptx
+++ b/docs/curso/slides/m05-comercial.pptx
@@ -3419,6 +3419,54 @@
           <a:chExt cx="0" cy="0"/>
         </a:xfrm>
       </p:grpSpPr>
+      <p:sp>
+        <p:nvSpPr>
+          <p:cNvPr id="25" name="Slide Number Placeholder 0"/>
+          <p:cNvSpPr>
+            <a:spLocks noGrp="1"/>
+          </p:cNvSpPr>
+          <p:nvPr>
+            <p:ph type="sldNum" sz="quarter" idx="4294967295"/>
+          </p:nvPr>
+        </p:nvSpPr>
+        <p:spPr>
+          <a:xfrm>
+            <a:off x="11292840" y="6556248"/>
+            <a:ext cx="548640" cy="256032"/>
+          </a:xfrm>
+          <a:prstGeom prst="rect">
+            <a:avLst/>
+          </a:prstGeom>
+          <a:extLst>
+            <a:ext uri="{C572A759-6A51-4108-AA02-DFA0A04FC94B}">
+              <ma14:wrappingTextBoxFlag xmlns:ma14="http://schemas.microsoft.com/office/mac/drawingml/2011/main" val="0"/>
+            </a:ext>
+          </a:extLst>
+        </p:spPr>
+        <p:txBody>
+          <a:bodyPr/>
+          <a:lstStyle>
+            <a:lvl1pPr>
+              <a:defRPr sz="900">
+                <a:solidFill>
+                  <a:srgbClr val="1B3A6B"/>
+                </a:solidFill>
+                <a:latin typeface="Arial"/>
+                <a:ea typeface="Arial"/>
+                <a:cs typeface="Arial"/>
+              </a:defRPr>
+            </a:lvl1pPr>
+          </a:lstStyle>
+          <a:p>
+            <a:pPr algn="r"/>
+            <a:fld id="{F7021451-1387-4CA6-816F-3879F97B5CBC}" type="slidenum">
+              <a:rPr b="1" lang="en-US"/>
+              <a:t>1000</a:t>
+            </a:fld>
+            <a:endParaRPr lang="en-US"/>
+          </a:p>
+        </p:txBody>
+      </p:sp>
     </p:spTree>
   </p:cSld>
   <p:clrMapOvr>
@@ -3444,6 +3492,54 @@
           <a:chExt cx="0" cy="0"/>
         </a:xfrm>
       </p:grpSpPr>
+      <p:sp>
+        <p:nvSpPr>
+          <p:cNvPr id="25" name="Slide Number Placeholder 0"/>
+          <p:cNvSpPr>
+            <a:spLocks noGrp="1"/>
+          </p:cNvSpPr>
+          <p:nvPr>
+            <p:ph type="sldNum" sz="quarter" idx="4294967295"/>
+          </p:nvPr>
+        </p:nvSpPr>
+        <p:spPr>
+          <a:xfrm>
+            <a:off x="11292840" y="6556248"/>
+            <a:ext cx="548640" cy="256032"/>
+          </a:xfrm>
+          <a:prstGeom prst="rect">
+            <a:avLst/>
+          </a:prstGeom>
+          <a:extLst>
+            <a:ext uri="{C572A759-6A51-4108-AA02-DFA0A04FC94B}">
+              <ma14:wrappingTextBoxFlag xmlns:ma14="http://schemas.microsoft.com/office/mac/drawingml/2011/main" val="0"/>
+            </a:ext>
+          </a:extLst>
+        </p:spPr>
+        <p:txBody>
+          <a:bodyPr/>
+          <a:lstStyle>
+            <a:lvl1pPr>
+              <a:defRPr sz="900">
+                <a:solidFill>
+                  <a:srgbClr val="1B3A6B"/>
+                </a:solidFill>
+                <a:latin typeface="Arial"/>
+                <a:ea typeface="Arial"/>
+                <a:cs typeface="Arial"/>
+              </a:defRPr>
+            </a:lvl1pPr>
+          </a:lstStyle>
+          <a:p>
+            <a:pPr algn="r"/>
+            <a:fld id="{F7021451-1387-4CA6-816F-3879F97B5CBC}" type="slidenum">
+              <a:rPr b="1" lang="en-US"/>
+              <a:t>null</a:t>
+            </a:fld>
+            <a:endParaRPr lang="en-US"/>
+          </a:p>
+        </p:txBody>
+      </p:sp>
     </p:spTree>
   </p:cSld>
   <p:clrMap bg1="lt1" tx1="dk1" bg2="lt2" tx2="dk2" accent1="accent1" accent2="accent2" accent3="accent3" accent4="accent4" accent5="accent5" accent6="accent6" hlink="hlink" folHlink="folHlink"/>
@@ -4277,7 +4373,7 @@
         </p:blipFill>
         <p:spPr>
           <a:xfrm>
-            <a:off x="411480" y="6547104"/>
+            <a:off x="548640" y="6547104"/>
             <a:ext cx="274320" cy="274320"/>
           </a:xfrm>
           <a:prstGeom prst="rect">
@@ -4293,7 +4389,7 @@
         </p:nvSpPr>
         <p:spPr>
           <a:xfrm>
-            <a:off x="749808" y="6528816"/>
+            <a:off x="886968" y="6528816"/>
             <a:ext cx="6400800" cy="310896"/>
           </a:xfrm>
           <a:prstGeom prst="rect">
@@ -4333,7 +4429,7 @@
         <p:spPr>
           <a:xfrm>
             <a:off x="7132320" y="6528816"/>
-            <a:ext cx="4663440" cy="310896"/>
+            <a:ext cx="4023360" cy="310896"/>
           </a:xfrm>
           <a:prstGeom prst="rect">
             <a:avLst/>
@@ -4371,7 +4467,7 @@
         </p:nvSpPr>
         <p:spPr>
           <a:xfrm>
-            <a:off x="411480" y="384048"/>
+            <a:off x="548640" y="384048"/>
             <a:ext cx="82296" cy="658368"/>
           </a:xfrm>
           <a:prstGeom prst="rect">
@@ -4391,7 +4487,7 @@
         </p:nvSpPr>
         <p:spPr>
           <a:xfrm>
-            <a:off x="640080" y="292608"/>
+            <a:off x="777240" y="292608"/>
             <a:ext cx="10972800" cy="274320"/>
           </a:xfrm>
           <a:prstGeom prst="rect">
@@ -4430,8 +4526,8 @@
         </p:nvSpPr>
         <p:spPr>
           <a:xfrm>
-            <a:off x="640080" y="530352"/>
-            <a:ext cx="11155680" cy="566928"/>
+            <a:off x="777240" y="530352"/>
+            <a:ext cx="10881360" cy="566928"/>
           </a:xfrm>
           <a:prstGeom prst="rect">
             <a:avLst/>
@@ -4471,8 +4567,8 @@
         </p:nvSpPr>
         <p:spPr>
           <a:xfrm>
-            <a:off x="411480" y="1325880"/>
-            <a:ext cx="11384280" cy="4937760"/>
+            <a:off x="548640" y="1325880"/>
+            <a:ext cx="11091672" cy="4937760"/>
           </a:xfrm>
           <a:prstGeom prst="roundRect">
             <a:avLst>
@@ -4493,8 +4589,8 @@
         </p:nvSpPr>
         <p:spPr>
           <a:xfrm>
-            <a:off x="777240" y="1554480"/>
-            <a:ext cx="10652760" cy="4480560"/>
+            <a:off x="914400" y="1554480"/>
+            <a:ext cx="10360152" cy="4480560"/>
           </a:xfrm>
           <a:prstGeom prst="rect">
             <a:avLst/>
@@ -4515,7 +4611,7 @@
               <a:buNone/>
             </a:pPr>
             <a:r>
-              <a:rPr lang="en-US" sz="1600" b="1" dirty="0">
+              <a:rPr lang="en-US" sz="2400" b="1" dirty="0">
                 <a:solidFill>
                   <a:srgbClr val="FFFFFF"/>
                 </a:solidFill>
@@ -4525,7 +4621,7 @@
               </a:rPr>
               <a:t>Hoje: 4.000 kWh × R$ 1,039 ≈ R$ 4.156/mês</a:t>
             </a:r>
-            <a:endParaRPr lang="en-US" sz="1600" dirty="0"/>
+            <a:endParaRPr lang="en-US" sz="2400" dirty="0"/>
           </a:p>
           <a:p>
             <a:pPr indent="0" marL="0">
@@ -4535,7 +4631,7 @@
               <a:buNone/>
             </a:pPr>
             <a:r>
-              <a:rPr lang="en-US" sz="1600" dirty="0">
+              <a:rPr lang="en-US" sz="2400" dirty="0">
                 <a:solidFill>
                   <a:srgbClr val="FFFFFF"/>
                 </a:solidFill>
@@ -4545,7 +4641,7 @@
               </a:rPr>
               <a:t>Com assinatura: distribuidora ≈ R$ 306 (295 kWh fora da cota) + R$ 577 (Fio B não compensado) = R$ 884 · sua cobrança ≈ R$ 2.618</a:t>
             </a:r>
-            <a:endParaRPr lang="en-US" sz="1600" dirty="0"/>
+            <a:endParaRPr lang="en-US" sz="2400" dirty="0"/>
           </a:p>
           <a:p>
             <a:pPr indent="0" marL="0">
@@ -4555,7 +4651,7 @@
               <a:buNone/>
             </a:pPr>
             <a:r>
-              <a:rPr lang="en-US" sz="1600" b="1" dirty="0">
+              <a:rPr lang="en-US" sz="2400" b="1" dirty="0">
                 <a:solidFill>
                   <a:srgbClr val="F7A23B"/>
                 </a:solidFill>
@@ -4565,7 +4661,55 @@
               </a:rPr>
               <a:t>Total ≈ R$ 3.501 → economia ≈ R$ 654/mês ≈ R$ 7.850/ano (≈ 16% da conta)</a:t>
             </a:r>
-            <a:endParaRPr lang="en-US" sz="1600" dirty="0"/>
+            <a:endParaRPr lang="en-US" sz="2400" dirty="0"/>
+          </a:p>
+        </p:txBody>
+      </p:sp>
+      <p:sp>
+        <p:nvSpPr>
+          <p:cNvPr id="25" name="Slide Number Placeholder 0"/>
+          <p:cNvSpPr>
+            <a:spLocks noGrp="1"/>
+          </p:cNvSpPr>
+          <p:nvPr>
+            <p:ph type="sldNum" sz="quarter" idx="4294967295"/>
+          </p:nvPr>
+        </p:nvSpPr>
+        <p:spPr>
+          <a:xfrm>
+            <a:off x="11292840" y="6556248"/>
+            <a:ext cx="548640" cy="256032"/>
+          </a:xfrm>
+          <a:prstGeom prst="rect">
+            <a:avLst/>
+          </a:prstGeom>
+          <a:extLst>
+            <a:ext uri="{C572A759-6A51-4108-AA02-DFA0A04FC94B}">
+              <ma14:wrappingTextBoxFlag xmlns:ma14="http://schemas.microsoft.com/office/mac/drawingml/2011/main" val="0"/>
+            </a:ext>
+          </a:extLst>
+        </p:spPr>
+        <p:txBody>
+          <a:bodyPr/>
+          <a:lstStyle>
+            <a:lvl1pPr>
+              <a:defRPr sz="900">
+                <a:solidFill>
+                  <a:srgbClr val="1B3A6B"/>
+                </a:solidFill>
+                <a:latin typeface="Arial"/>
+                <a:ea typeface="Arial"/>
+                <a:cs typeface="Arial"/>
+              </a:defRPr>
+            </a:lvl1pPr>
+          </a:lstStyle>
+          <a:p>
+            <a:pPr algn="r"/>
+            <a:fld id="{F7021451-1387-4CA6-816F-3879F97B5CBC}" type="slidenum">
+              <a:rPr b="1" lang="en-US"/>
+              <a:t>10</a:t>
+            </a:fld>
+            <a:endParaRPr lang="en-US"/>
           </a:p>
         </p:txBody>
       </p:sp>
@@ -4642,7 +4786,7 @@
         </p:blipFill>
         <p:spPr>
           <a:xfrm>
-            <a:off x="411480" y="6547104"/>
+            <a:off x="548640" y="6547104"/>
             <a:ext cx="274320" cy="274320"/>
           </a:xfrm>
           <a:prstGeom prst="rect">
@@ -4658,7 +4802,7 @@
         </p:nvSpPr>
         <p:spPr>
           <a:xfrm>
-            <a:off x="749808" y="6528816"/>
+            <a:off x="886968" y="6528816"/>
             <a:ext cx="6400800" cy="310896"/>
           </a:xfrm>
           <a:prstGeom prst="rect">
@@ -4698,7 +4842,7 @@
         <p:spPr>
           <a:xfrm>
             <a:off x="7132320" y="6528816"/>
-            <a:ext cx="4663440" cy="310896"/>
+            <a:ext cx="4023360" cy="310896"/>
           </a:xfrm>
           <a:prstGeom prst="rect">
             <a:avLst/>
@@ -4736,7 +4880,7 @@
         </p:nvSpPr>
         <p:spPr>
           <a:xfrm>
-            <a:off x="411480" y="384048"/>
+            <a:off x="548640" y="384048"/>
             <a:ext cx="82296" cy="658368"/>
           </a:xfrm>
           <a:prstGeom prst="rect">
@@ -4756,7 +4900,7 @@
         </p:nvSpPr>
         <p:spPr>
           <a:xfrm>
-            <a:off x="640080" y="292608"/>
+            <a:off x="777240" y="292608"/>
             <a:ext cx="10972800" cy="274320"/>
           </a:xfrm>
           <a:prstGeom prst="rect">
@@ -4795,8 +4939,8 @@
         </p:nvSpPr>
         <p:spPr>
           <a:xfrm>
-            <a:off x="640080" y="530352"/>
-            <a:ext cx="11155680" cy="566928"/>
+            <a:off x="777240" y="530352"/>
+            <a:ext cx="10881360" cy="566928"/>
           </a:xfrm>
           <a:prstGeom prst="rect">
             <a:avLst/>
@@ -4836,12 +4980,12 @@
         </p:nvSpPr>
         <p:spPr>
           <a:xfrm>
-            <a:off x="411480" y="1325880"/>
-            <a:ext cx="3642360" cy="4892040"/>
+            <a:off x="548640" y="1325880"/>
+            <a:ext cx="3544824" cy="4892040"/>
           </a:xfrm>
           <a:prstGeom prst="roundRect">
             <a:avLst>
-              <a:gd name="adj" fmla="val 2008"/>
+              <a:gd name="adj" fmla="val 2064"/>
             </a:avLst>
           </a:prstGeom>
           <a:solidFill>
@@ -4870,7 +5014,7 @@
         </p:nvSpPr>
         <p:spPr>
           <a:xfrm>
-            <a:off x="594360" y="1508760"/>
+            <a:off x="731520" y="1508760"/>
             <a:ext cx="457200" cy="457200"/>
           </a:xfrm>
           <a:prstGeom prst="ellipse">
@@ -4890,7 +5034,7 @@
         </p:nvSpPr>
         <p:spPr>
           <a:xfrm>
-            <a:off x="594360" y="1508760"/>
+            <a:off x="731520" y="1508760"/>
             <a:ext cx="457200" cy="457200"/>
           </a:xfrm>
           <a:prstGeom prst="rect">
@@ -4929,8 +5073,8 @@
         </p:nvSpPr>
         <p:spPr>
           <a:xfrm>
-            <a:off x="1188720" y="1435608"/>
-            <a:ext cx="2727960" cy="4672584"/>
+            <a:off x="1325880" y="1435608"/>
+            <a:ext cx="2630424" cy="4672584"/>
           </a:xfrm>
           <a:prstGeom prst="rect">
             <a:avLst/>
@@ -4970,12 +5114,12 @@
         </p:nvSpPr>
         <p:spPr>
           <a:xfrm>
-            <a:off x="4282440" y="1325880"/>
-            <a:ext cx="3642360" cy="4892040"/>
+            <a:off x="4322064" y="1325880"/>
+            <a:ext cx="3544824" cy="4892040"/>
           </a:xfrm>
           <a:prstGeom prst="roundRect">
             <a:avLst>
-              <a:gd name="adj" fmla="val 2008"/>
+              <a:gd name="adj" fmla="val 2064"/>
             </a:avLst>
           </a:prstGeom>
           <a:solidFill>
@@ -5004,7 +5148,7 @@
         </p:nvSpPr>
         <p:spPr>
           <a:xfrm>
-            <a:off x="4465320" y="1508760"/>
+            <a:off x="4504944" y="1508760"/>
             <a:ext cx="457200" cy="457200"/>
           </a:xfrm>
           <a:prstGeom prst="ellipse">
@@ -5024,7 +5168,7 @@
         </p:nvSpPr>
         <p:spPr>
           <a:xfrm>
-            <a:off x="4465320" y="1508760"/>
+            <a:off x="4504944" y="1508760"/>
             <a:ext cx="457200" cy="457200"/>
           </a:xfrm>
           <a:prstGeom prst="rect">
@@ -5063,8 +5207,8 @@
         </p:nvSpPr>
         <p:spPr>
           <a:xfrm>
-            <a:off x="5059680" y="1435608"/>
-            <a:ext cx="2727960" cy="4672584"/>
+            <a:off x="5099304" y="1435608"/>
+            <a:ext cx="2630424" cy="4672584"/>
           </a:xfrm>
           <a:prstGeom prst="rect">
             <a:avLst/>
@@ -5104,12 +5248,12 @@
         </p:nvSpPr>
         <p:spPr>
           <a:xfrm>
-            <a:off x="8153400" y="1325880"/>
-            <a:ext cx="3642360" cy="4892040"/>
+            <a:off x="8095488" y="1325880"/>
+            <a:ext cx="3544824" cy="4892040"/>
           </a:xfrm>
           <a:prstGeom prst="roundRect">
             <a:avLst>
-              <a:gd name="adj" fmla="val 2008"/>
+              <a:gd name="adj" fmla="val 2064"/>
             </a:avLst>
           </a:prstGeom>
           <a:solidFill>
@@ -5138,7 +5282,7 @@
         </p:nvSpPr>
         <p:spPr>
           <a:xfrm>
-            <a:off x="8336280" y="1508760"/>
+            <a:off x="8278368" y="1508760"/>
             <a:ext cx="457200" cy="457200"/>
           </a:xfrm>
           <a:prstGeom prst="ellipse">
@@ -5158,7 +5302,7 @@
         </p:nvSpPr>
         <p:spPr>
           <a:xfrm>
-            <a:off x="8336280" y="1508760"/>
+            <a:off x="8278368" y="1508760"/>
             <a:ext cx="457200" cy="457200"/>
           </a:xfrm>
           <a:prstGeom prst="rect">
@@ -5197,8 +5341,8 @@
         </p:nvSpPr>
         <p:spPr>
           <a:xfrm>
-            <a:off x="8930640" y="1435608"/>
-            <a:ext cx="2727960" cy="4672584"/>
+            <a:off x="8872728" y="1435608"/>
+            <a:ext cx="2630424" cy="4672584"/>
           </a:xfrm>
           <a:prstGeom prst="rect">
             <a:avLst/>
@@ -5227,6 +5371,54 @@
               <a:t>Cliente com sistema próprio parcial → cota sobre o consumo que sobra</a:t>
             </a:r>
             <a:endParaRPr lang="en-US" sz="1800" dirty="0"/>
+          </a:p>
+        </p:txBody>
+      </p:sp>
+      <p:sp>
+        <p:nvSpPr>
+          <p:cNvPr id="25" name="Slide Number Placeholder 0"/>
+          <p:cNvSpPr>
+            <a:spLocks noGrp="1"/>
+          </p:cNvSpPr>
+          <p:nvPr>
+            <p:ph type="sldNum" sz="quarter" idx="4294967295"/>
+          </p:nvPr>
+        </p:nvSpPr>
+        <p:spPr>
+          <a:xfrm>
+            <a:off x="11292840" y="6556248"/>
+            <a:ext cx="548640" cy="256032"/>
+          </a:xfrm>
+          <a:prstGeom prst="rect">
+            <a:avLst/>
+          </a:prstGeom>
+          <a:extLst>
+            <a:ext uri="{C572A759-6A51-4108-AA02-DFA0A04FC94B}">
+              <ma14:wrappingTextBoxFlag xmlns:ma14="http://schemas.microsoft.com/office/mac/drawingml/2011/main" val="0"/>
+            </a:ext>
+          </a:extLst>
+        </p:spPr>
+        <p:txBody>
+          <a:bodyPr/>
+          <a:lstStyle>
+            <a:lvl1pPr>
+              <a:defRPr sz="900">
+                <a:solidFill>
+                  <a:srgbClr val="1B3A6B"/>
+                </a:solidFill>
+                <a:latin typeface="Arial"/>
+                <a:ea typeface="Arial"/>
+                <a:cs typeface="Arial"/>
+              </a:defRPr>
+            </a:lvl1pPr>
+          </a:lstStyle>
+          <a:p>
+            <a:pPr algn="r"/>
+            <a:fld id="{F7021451-1387-4CA6-816F-3879F97B5CBC}" type="slidenum">
+              <a:rPr b="1" lang="en-US"/>
+              <a:t>11</a:t>
+            </a:fld>
+            <a:endParaRPr lang="en-US"/>
           </a:p>
         </p:txBody>
       </p:sp>
@@ -5303,7 +5495,7 @@
         </p:blipFill>
         <p:spPr>
           <a:xfrm>
-            <a:off x="411480" y="6547104"/>
+            <a:off x="548640" y="6547104"/>
             <a:ext cx="274320" cy="274320"/>
           </a:xfrm>
           <a:prstGeom prst="rect">
@@ -5319,7 +5511,7 @@
         </p:nvSpPr>
         <p:spPr>
           <a:xfrm>
-            <a:off x="749808" y="6528816"/>
+            <a:off x="886968" y="6528816"/>
             <a:ext cx="6400800" cy="310896"/>
           </a:xfrm>
           <a:prstGeom prst="rect">
@@ -5359,7 +5551,7 @@
         <p:spPr>
           <a:xfrm>
             <a:off x="7132320" y="6528816"/>
-            <a:ext cx="4663440" cy="310896"/>
+            <a:ext cx="4023360" cy="310896"/>
           </a:xfrm>
           <a:prstGeom prst="rect">
             <a:avLst/>
@@ -5397,7 +5589,7 @@
         </p:nvSpPr>
         <p:spPr>
           <a:xfrm>
-            <a:off x="411480" y="384048"/>
+            <a:off x="548640" y="384048"/>
             <a:ext cx="82296" cy="658368"/>
           </a:xfrm>
           <a:prstGeom prst="rect">
@@ -5417,7 +5609,7 @@
         </p:nvSpPr>
         <p:spPr>
           <a:xfrm>
-            <a:off x="640080" y="292608"/>
+            <a:off x="777240" y="292608"/>
             <a:ext cx="10972800" cy="274320"/>
           </a:xfrm>
           <a:prstGeom prst="rect">
@@ -5456,8 +5648,8 @@
         </p:nvSpPr>
         <p:spPr>
           <a:xfrm>
-            <a:off x="640080" y="530352"/>
-            <a:ext cx="11155680" cy="566928"/>
+            <a:off x="777240" y="530352"/>
+            <a:ext cx="10881360" cy="566928"/>
           </a:xfrm>
           <a:prstGeom prst="rect">
             <a:avLst/>
@@ -5497,8 +5689,8 @@
         </p:nvSpPr>
         <p:spPr>
           <a:xfrm>
-            <a:off x="411480" y="1325880"/>
-            <a:ext cx="11384280" cy="4892040"/>
+            <a:off x="548640" y="1325880"/>
+            <a:ext cx="11091672" cy="4892040"/>
           </a:xfrm>
           <a:prstGeom prst="roundRect">
             <a:avLst>
@@ -5531,7 +5723,7 @@
         </p:nvSpPr>
         <p:spPr>
           <a:xfrm>
-            <a:off x="594360" y="1508760"/>
+            <a:off x="731520" y="1508760"/>
             <a:ext cx="457200" cy="457200"/>
           </a:xfrm>
           <a:prstGeom prst="ellipse">
@@ -5551,7 +5743,7 @@
         </p:nvSpPr>
         <p:spPr>
           <a:xfrm>
-            <a:off x="594360" y="1508760"/>
+            <a:off x="731520" y="1508760"/>
             <a:ext cx="457200" cy="457200"/>
           </a:xfrm>
           <a:prstGeom prst="rect">
@@ -5590,8 +5782,8 @@
         </p:nvSpPr>
         <p:spPr>
           <a:xfrm>
-            <a:off x="1188720" y="1435608"/>
-            <a:ext cx="10469880" cy="4672584"/>
+            <a:off x="1325880" y="1435608"/>
+            <a:ext cx="10177272" cy="4672584"/>
           </a:xfrm>
           <a:prstGeom prst="rect">
             <a:avLst/>
@@ -5620,6 +5812,54 @@
               <a:t>Histórico de 12 meses → cota com margem → economia em R$ na conta total</a:t>
             </a:r>
             <a:endParaRPr lang="en-US" sz="1800" dirty="0"/>
+          </a:p>
+        </p:txBody>
+      </p:sp>
+      <p:sp>
+        <p:nvSpPr>
+          <p:cNvPr id="25" name="Slide Number Placeholder 0"/>
+          <p:cNvSpPr>
+            <a:spLocks noGrp="1"/>
+          </p:cNvSpPr>
+          <p:nvPr>
+            <p:ph type="sldNum" sz="quarter" idx="4294967295"/>
+          </p:nvPr>
+        </p:nvSpPr>
+        <p:spPr>
+          <a:xfrm>
+            <a:off x="11292840" y="6556248"/>
+            <a:ext cx="548640" cy="256032"/>
+          </a:xfrm>
+          <a:prstGeom prst="rect">
+            <a:avLst/>
+          </a:prstGeom>
+          <a:extLst>
+            <a:ext uri="{C572A759-6A51-4108-AA02-DFA0A04FC94B}">
+              <ma14:wrappingTextBoxFlag xmlns:ma14="http://schemas.microsoft.com/office/mac/drawingml/2011/main" val="0"/>
+            </a:ext>
+          </a:extLst>
+        </p:spPr>
+        <p:txBody>
+          <a:bodyPr/>
+          <a:lstStyle>
+            <a:lvl1pPr>
+              <a:defRPr sz="900">
+                <a:solidFill>
+                  <a:srgbClr val="1B3A6B"/>
+                </a:solidFill>
+                <a:latin typeface="Arial"/>
+                <a:ea typeface="Arial"/>
+                <a:cs typeface="Arial"/>
+              </a:defRPr>
+            </a:lvl1pPr>
+          </a:lstStyle>
+          <a:p>
+            <a:pPr algn="r"/>
+            <a:fld id="{F7021451-1387-4CA6-816F-3879F97B5CBC}" type="slidenum">
+              <a:rPr b="1" lang="en-US"/>
+              <a:t>12</a:t>
+            </a:fld>
+            <a:endParaRPr lang="en-US"/>
           </a:p>
         </p:txBody>
       </p:sp>
@@ -5683,6 +5923,45 @@
         </p:nvSpPr>
         <p:spPr>
           <a:xfrm>
+            <a:off x="457200" y="548640"/>
+            <a:ext cx="3474720" cy="1737360"/>
+          </a:xfrm>
+          <a:prstGeom prst="rect">
+            <a:avLst/>
+          </a:prstGeom>
+          <a:noFill/>
+          <a:ln/>
+        </p:spPr>
+        <p:txBody>
+          <a:bodyPr wrap="square" rtlCol="0" anchor="ctr"/>
+          <a:lstStyle/>
+          <a:p>
+            <a:pPr indent="0" marL="0">
+              <a:buNone/>
+            </a:pPr>
+            <a:r>
+              <a:rPr lang="en-US" sz="11000" b="1" dirty="0">
+                <a:solidFill>
+                  <a:srgbClr val="11396F"/>
+                </a:solidFill>
+                <a:latin typeface="Arial" pitchFamily="34" charset="0"/>
+                <a:ea typeface="Arial" pitchFamily="34" charset="-122"/>
+                <a:cs typeface="Arial" pitchFamily="34" charset="-120"/>
+              </a:rPr>
+              <a:t>03</a:t>
+            </a:r>
+            <a:endParaRPr lang="en-US" sz="11000" dirty="0"/>
+          </a:p>
+        </p:txBody>
+      </p:sp>
+      <p:sp>
+        <p:nvSpPr>
+          <p:cNvPr id="4" name="Text 2"/>
+          <p:cNvSpPr/>
+          <p:nvPr/>
+        </p:nvSpPr>
+        <p:spPr>
+          <a:xfrm>
             <a:off x="548640" y="2194560"/>
             <a:ext cx="3291840" cy="548640"/>
           </a:xfrm>
@@ -5716,7 +5995,46 @@
       </p:sp>
       <p:sp>
         <p:nvSpPr>
-          <p:cNvPr id="4" name="Text 2"/>
+          <p:cNvPr id="5" name="Text 3"/>
+          <p:cNvSpPr/>
+          <p:nvPr/>
+        </p:nvSpPr>
+        <p:spPr>
+          <a:xfrm>
+            <a:off x="548640" y="3200400"/>
+            <a:ext cx="3383280" cy="457200"/>
+          </a:xfrm>
+          <a:prstGeom prst="rect">
+            <a:avLst/>
+          </a:prstGeom>
+          <a:noFill/>
+          <a:ln/>
+        </p:spPr>
+        <p:txBody>
+          <a:bodyPr wrap="square" rtlCol="0" anchor="ctr"/>
+          <a:lstStyle/>
+          <a:p>
+            <a:pPr indent="0" marL="0">
+              <a:buNone/>
+            </a:pPr>
+            <a:r>
+              <a:rPr lang="en-US" sz="1100" dirty="0">
+                <a:solidFill>
+                  <a:srgbClr val="C7D2E3"/>
+                </a:solidFill>
+                <a:latin typeface="Arial" pitchFamily="34" charset="0"/>
+                <a:ea typeface="Arial" pitchFamily="34" charset="-122"/>
+                <a:cs typeface="Arial" pitchFamily="34" charset="-120"/>
+              </a:rPr>
+              <a:t>M5 · Etapa 3 · Operação ponta a ponta</a:t>
+            </a:r>
+            <a:endParaRPr lang="en-US" sz="1100" dirty="0"/>
+          </a:p>
+        </p:txBody>
+      </p:sp>
+      <p:sp>
+        <p:nvSpPr>
+          <p:cNvPr id="6" name="Text 4"/>
           <p:cNvSpPr/>
           <p:nvPr/>
         </p:nvSpPr>
@@ -5755,7 +6073,7 @@
       </p:sp>
       <p:pic>
         <p:nvPicPr>
-          <p:cNvPr id="5" name="Image 0" descr="/www/wwwroot/rexar/gdsolar/docs/curso/slides/assets/logo-gdsolar.png">    </p:cNvPr>
+          <p:cNvPr id="7" name="Image 0" descr="/www/wwwroot/rexar/gdsolar/docs/curso/slides/assets/logo-gdsolar.png">    </p:cNvPr>
           <p:cNvPicPr>
             <a:picLocks noChangeAspect="1"/>
           </p:cNvPicPr>
@@ -5779,7 +6097,7 @@
       </p:pic>
       <p:sp>
         <p:nvSpPr>
-          <p:cNvPr id="6" name="Text 3"/>
+          <p:cNvPr id="8" name="Text 5"/>
           <p:cNvSpPr/>
           <p:nvPr/>
         </p:nvSpPr>
@@ -5820,7 +6138,7 @@
       </p:sp>
       <p:sp>
         <p:nvSpPr>
-          <p:cNvPr id="7" name="Text 4"/>
+          <p:cNvPr id="9" name="Text 6"/>
           <p:cNvSpPr/>
           <p:nvPr/>
         </p:nvSpPr>
@@ -5861,7 +6179,7 @@
       </p:sp>
       <p:sp>
         <p:nvSpPr>
-          <p:cNvPr id="8" name="Text 5"/>
+          <p:cNvPr id="10" name="Text 7"/>
           <p:cNvSpPr/>
           <p:nvPr/>
         </p:nvSpPr>
@@ -6040,7 +6358,7 @@
         </p:blipFill>
         <p:spPr>
           <a:xfrm>
-            <a:off x="411480" y="6547104"/>
+            <a:off x="548640" y="6547104"/>
             <a:ext cx="274320" cy="274320"/>
           </a:xfrm>
           <a:prstGeom prst="rect">
@@ -6056,7 +6374,7 @@
         </p:nvSpPr>
         <p:spPr>
           <a:xfrm>
-            <a:off x="749808" y="6528816"/>
+            <a:off x="886968" y="6528816"/>
             <a:ext cx="6400800" cy="310896"/>
           </a:xfrm>
           <a:prstGeom prst="rect">
@@ -6096,7 +6414,7 @@
         <p:spPr>
           <a:xfrm>
             <a:off x="7132320" y="6528816"/>
-            <a:ext cx="4663440" cy="310896"/>
+            <a:ext cx="4023360" cy="310896"/>
           </a:xfrm>
           <a:prstGeom prst="rect">
             <a:avLst/>
@@ -6134,7 +6452,7 @@
         </p:nvSpPr>
         <p:spPr>
           <a:xfrm>
-            <a:off x="411480" y="384048"/>
+            <a:off x="548640" y="384048"/>
             <a:ext cx="82296" cy="658368"/>
           </a:xfrm>
           <a:prstGeom prst="rect">
@@ -6154,7 +6472,7 @@
         </p:nvSpPr>
         <p:spPr>
           <a:xfrm>
-            <a:off x="640080" y="292608"/>
+            <a:off x="777240" y="292608"/>
             <a:ext cx="10972800" cy="274320"/>
           </a:xfrm>
           <a:prstGeom prst="rect">
@@ -6193,8 +6511,8 @@
         </p:nvSpPr>
         <p:spPr>
           <a:xfrm>
-            <a:off x="640080" y="530352"/>
-            <a:ext cx="11155680" cy="566928"/>
+            <a:off x="777240" y="530352"/>
+            <a:ext cx="10881360" cy="566928"/>
           </a:xfrm>
           <a:prstGeom prst="rect">
             <a:avLst/>
@@ -6234,8 +6552,8 @@
         </p:nvSpPr>
         <p:spPr>
           <a:xfrm>
-            <a:off x="411480" y="1325880"/>
-            <a:ext cx="5554980" cy="4937760"/>
+            <a:off x="548640" y="1325880"/>
+            <a:ext cx="5408676" cy="4937760"/>
           </a:xfrm>
           <a:prstGeom prst="roundRect">
             <a:avLst>
@@ -6268,8 +6586,8 @@
         </p:nvSpPr>
         <p:spPr>
           <a:xfrm>
-            <a:off x="411480" y="1325880"/>
-            <a:ext cx="5554980" cy="109728"/>
+            <a:off x="548640" y="1325880"/>
+            <a:ext cx="5408676" cy="109728"/>
           </a:xfrm>
           <a:prstGeom prst="rect">
             <a:avLst/>
@@ -6288,8 +6606,8 @@
         </p:nvSpPr>
         <p:spPr>
           <a:xfrm>
-            <a:off x="685800" y="1554480"/>
-            <a:ext cx="5006340" cy="685800"/>
+            <a:off x="822960" y="1554480"/>
+            <a:ext cx="4860036" cy="685800"/>
           </a:xfrm>
           <a:prstGeom prst="rect">
             <a:avLst/>
@@ -6329,8 +6647,8 @@
         </p:nvSpPr>
         <p:spPr>
           <a:xfrm>
-            <a:off x="685800" y="2286000"/>
-            <a:ext cx="5006340" cy="3749040"/>
+            <a:off x="822960" y="2286000"/>
+            <a:ext cx="4860036" cy="3749040"/>
           </a:xfrm>
           <a:prstGeom prst="rect">
             <a:avLst/>
@@ -6351,7 +6669,7 @@
               <a:buNone/>
             </a:pPr>
             <a:r>
-              <a:rPr lang="en-US" sz="1300" dirty="0">
+              <a:rPr lang="en-US" sz="1700" dirty="0">
                 <a:solidFill>
                   <a:srgbClr val="1F2937"/>
                 </a:solidFill>
@@ -6361,7 +6679,7 @@
               </a:rPr>
               <a:t>1. Quanto eu economizo? → economia em R$/mês e R$/ano</a:t>
             </a:r>
-            <a:endParaRPr lang="en-US" sz="1300" dirty="0"/>
+            <a:endParaRPr lang="en-US" sz="1700" dirty="0"/>
           </a:p>
           <a:p>
             <a:pPr indent="0" marL="0">
@@ -6371,7 +6689,7 @@
               <a:buNone/>
             </a:pPr>
             <a:r>
-              <a:rPr lang="en-US" sz="1300" dirty="0">
+              <a:rPr lang="en-US" sz="1700" dirty="0">
                 <a:solidFill>
                   <a:srgbClr val="1F2937"/>
                 </a:solidFill>
@@ -6381,7 +6699,7 @@
               </a:rPr>
               <a:t>2. Quanto eu invisto? → zero, sem obra, sem trocar medidor</a:t>
             </a:r>
-            <a:endParaRPr lang="en-US" sz="1300" dirty="0"/>
+            <a:endParaRPr lang="en-US" sz="1700" dirty="0"/>
           </a:p>
           <a:p>
             <a:pPr indent="0" marL="0">
@@ -6391,7 +6709,7 @@
               <a:buNone/>
             </a:pPr>
             <a:r>
-              <a:rPr lang="en-US" sz="1300" dirty="0">
+              <a:rPr lang="en-US" sz="1700" dirty="0">
                 <a:solidFill>
                   <a:srgbClr val="1F2937"/>
                 </a:solidFill>
@@ -6401,7 +6719,7 @@
               </a:rPr>
               <a:t>3. Como funciona? → usina + créditos + duas contas</a:t>
             </a:r>
-            <a:endParaRPr lang="en-US" sz="1300" dirty="0"/>
+            <a:endParaRPr lang="en-US" sz="1700" dirty="0"/>
           </a:p>
           <a:p>
             <a:pPr indent="0" marL="0">
@@ -6411,7 +6729,7 @@
               <a:buNone/>
             </a:pPr>
             <a:r>
-              <a:rPr lang="en-US" sz="1300" dirty="0">
+              <a:rPr lang="en-US" sz="1700" dirty="0">
                 <a:solidFill>
                   <a:srgbClr val="1F2937"/>
                 </a:solidFill>
@@ -6421,7 +6739,7 @@
               </a:rPr>
               <a:t>4. É seguro? → Lei 14.300, empresa, contrato</a:t>
             </a:r>
-            <a:endParaRPr lang="en-US" sz="1300" dirty="0"/>
+            <a:endParaRPr lang="en-US" sz="1700" dirty="0"/>
           </a:p>
           <a:p>
             <a:pPr indent="0" marL="0">
@@ -6431,7 +6749,7 @@
               <a:buNone/>
             </a:pPr>
             <a:r>
-              <a:rPr lang="en-US" sz="1300" dirty="0">
+              <a:rPr lang="en-US" sz="1700" dirty="0">
                 <a:solidFill>
                   <a:srgbClr val="1F2937"/>
                 </a:solidFill>
@@ -6441,7 +6759,7 @@
               </a:rPr>
               <a:t>5. O que eu preciso fazer? → documentos e próximo passo</a:t>
             </a:r>
-            <a:endParaRPr lang="en-US" sz="1300" dirty="0"/>
+            <a:endParaRPr lang="en-US" sz="1700" dirty="0"/>
           </a:p>
         </p:txBody>
       </p:sp>
@@ -6453,8 +6771,8 @@
         </p:nvSpPr>
         <p:spPr>
           <a:xfrm>
-            <a:off x="6240780" y="1325880"/>
-            <a:ext cx="5554980" cy="4937760"/>
+            <a:off x="6231636" y="1325880"/>
+            <a:ext cx="5408676" cy="4937760"/>
           </a:xfrm>
           <a:prstGeom prst="roundRect">
             <a:avLst>
@@ -6487,8 +6805,8 @@
         </p:nvSpPr>
         <p:spPr>
           <a:xfrm>
-            <a:off x="6240780" y="1325880"/>
-            <a:ext cx="5554980" cy="109728"/>
+            <a:off x="6231636" y="1325880"/>
+            <a:ext cx="5408676" cy="109728"/>
           </a:xfrm>
           <a:prstGeom prst="rect">
             <a:avLst/>
@@ -6507,8 +6825,8 @@
         </p:nvSpPr>
         <p:spPr>
           <a:xfrm>
-            <a:off x="6515100" y="1554480"/>
-            <a:ext cx="5006340" cy="685800"/>
+            <a:off x="6505956" y="1554480"/>
+            <a:ext cx="4860036" cy="685800"/>
           </a:xfrm>
           <a:prstGeom prst="rect">
             <a:avLst/>
@@ -6548,8 +6866,8 @@
         </p:nvSpPr>
         <p:spPr>
           <a:xfrm>
-            <a:off x="6515100" y="2286000"/>
-            <a:ext cx="5006340" cy="3749040"/>
+            <a:off x="6505956" y="2286000"/>
+            <a:ext cx="4860036" cy="3749040"/>
           </a:xfrm>
           <a:prstGeom prst="rect">
             <a:avLst/>
@@ -6624,6 +6942,54 @@
               <a:t>Soma menor = economia</a:t>
             </a:r>
             <a:endParaRPr lang="en-US" sz="1700" dirty="0"/>
+          </a:p>
+        </p:txBody>
+      </p:sp>
+      <p:sp>
+        <p:nvSpPr>
+          <p:cNvPr id="25" name="Slide Number Placeholder 0"/>
+          <p:cNvSpPr>
+            <a:spLocks noGrp="1"/>
+          </p:cNvSpPr>
+          <p:nvPr>
+            <p:ph type="sldNum" sz="quarter" idx="4294967295"/>
+          </p:nvPr>
+        </p:nvSpPr>
+        <p:spPr>
+          <a:xfrm>
+            <a:off x="11292840" y="6556248"/>
+            <a:ext cx="548640" cy="256032"/>
+          </a:xfrm>
+          <a:prstGeom prst="rect">
+            <a:avLst/>
+          </a:prstGeom>
+          <a:extLst>
+            <a:ext uri="{C572A759-6A51-4108-AA02-DFA0A04FC94B}">
+              <ma14:wrappingTextBoxFlag xmlns:ma14="http://schemas.microsoft.com/office/mac/drawingml/2011/main" val="0"/>
+            </a:ext>
+          </a:extLst>
+        </p:spPr>
+        <p:txBody>
+          <a:bodyPr/>
+          <a:lstStyle>
+            <a:lvl1pPr>
+              <a:defRPr sz="900">
+                <a:solidFill>
+                  <a:srgbClr val="1B3A6B"/>
+                </a:solidFill>
+                <a:latin typeface="Arial"/>
+                <a:ea typeface="Arial"/>
+                <a:cs typeface="Arial"/>
+              </a:defRPr>
+            </a:lvl1pPr>
+          </a:lstStyle>
+          <a:p>
+            <a:pPr algn="r"/>
+            <a:fld id="{F7021451-1387-4CA6-816F-3879F97B5CBC}" type="slidenum">
+              <a:rPr b="1" lang="en-US"/>
+              <a:t>14</a:t>
+            </a:fld>
+            <a:endParaRPr lang="en-US"/>
           </a:p>
         </p:txBody>
       </p:sp>
@@ -6700,7 +7066,7 @@
         </p:blipFill>
         <p:spPr>
           <a:xfrm>
-            <a:off x="411480" y="6547104"/>
+            <a:off x="548640" y="6547104"/>
             <a:ext cx="274320" cy="274320"/>
           </a:xfrm>
           <a:prstGeom prst="rect">
@@ -6716,7 +7082,7 @@
         </p:nvSpPr>
         <p:spPr>
           <a:xfrm>
-            <a:off x="749808" y="6528816"/>
+            <a:off x="886968" y="6528816"/>
             <a:ext cx="6400800" cy="310896"/>
           </a:xfrm>
           <a:prstGeom prst="rect">
@@ -6756,7 +7122,7 @@
         <p:spPr>
           <a:xfrm>
             <a:off x="7132320" y="6528816"/>
-            <a:ext cx="4663440" cy="310896"/>
+            <a:ext cx="4023360" cy="310896"/>
           </a:xfrm>
           <a:prstGeom prst="rect">
             <a:avLst/>
@@ -6794,7 +7160,7 @@
         </p:nvSpPr>
         <p:spPr>
           <a:xfrm>
-            <a:off x="411480" y="384048"/>
+            <a:off x="548640" y="384048"/>
             <a:ext cx="82296" cy="658368"/>
           </a:xfrm>
           <a:prstGeom prst="rect">
@@ -6814,7 +7180,7 @@
         </p:nvSpPr>
         <p:spPr>
           <a:xfrm>
-            <a:off x="640080" y="292608"/>
+            <a:off x="777240" y="292608"/>
             <a:ext cx="10972800" cy="274320"/>
           </a:xfrm>
           <a:prstGeom prst="rect">
@@ -6853,8 +7219,8 @@
         </p:nvSpPr>
         <p:spPr>
           <a:xfrm>
-            <a:off x="640080" y="530352"/>
-            <a:ext cx="11155680" cy="566928"/>
+            <a:off x="777240" y="530352"/>
+            <a:ext cx="10881360" cy="566928"/>
           </a:xfrm>
           <a:prstGeom prst="rect">
             <a:avLst/>
@@ -6894,8 +7260,8 @@
         </p:nvSpPr>
         <p:spPr>
           <a:xfrm>
-            <a:off x="411480" y="1325880"/>
-            <a:ext cx="3642360" cy="2331720"/>
+            <a:off x="548640" y="1325880"/>
+            <a:ext cx="3544824" cy="2331720"/>
           </a:xfrm>
           <a:prstGeom prst="roundRect">
             <a:avLst>
@@ -6928,7 +7294,7 @@
         </p:nvSpPr>
         <p:spPr>
           <a:xfrm>
-            <a:off x="594360" y="1508760"/>
+            <a:off x="731520" y="1508760"/>
             <a:ext cx="457200" cy="457200"/>
           </a:xfrm>
           <a:prstGeom prst="ellipse">
@@ -6948,7 +7314,7 @@
         </p:nvSpPr>
         <p:spPr>
           <a:xfrm>
-            <a:off x="594360" y="1508760"/>
+            <a:off x="731520" y="1508760"/>
             <a:ext cx="457200" cy="457200"/>
           </a:xfrm>
           <a:prstGeom prst="rect">
@@ -6987,8 +7353,8 @@
         </p:nvSpPr>
         <p:spPr>
           <a:xfrm>
-            <a:off x="1188720" y="1435608"/>
-            <a:ext cx="2727960" cy="2112264"/>
+            <a:off x="1325880" y="1435608"/>
+            <a:ext cx="2630424" cy="2112264"/>
           </a:xfrm>
           <a:prstGeom prst="rect">
             <a:avLst/>
@@ -7028,8 +7394,8 @@
         </p:nvSpPr>
         <p:spPr>
           <a:xfrm>
-            <a:off x="4282440" y="1325880"/>
-            <a:ext cx="3642360" cy="2331720"/>
+            <a:off x="4322064" y="1325880"/>
+            <a:ext cx="3544824" cy="2331720"/>
           </a:xfrm>
           <a:prstGeom prst="roundRect">
             <a:avLst>
@@ -7062,7 +7428,7 @@
         </p:nvSpPr>
         <p:spPr>
           <a:xfrm>
-            <a:off x="4465320" y="1508760"/>
+            <a:off x="4504944" y="1508760"/>
             <a:ext cx="457200" cy="457200"/>
           </a:xfrm>
           <a:prstGeom prst="ellipse">
@@ -7082,7 +7448,7 @@
         </p:nvSpPr>
         <p:spPr>
           <a:xfrm>
-            <a:off x="4465320" y="1508760"/>
+            <a:off x="4504944" y="1508760"/>
             <a:ext cx="457200" cy="457200"/>
           </a:xfrm>
           <a:prstGeom prst="rect">
@@ -7121,8 +7487,8 @@
         </p:nvSpPr>
         <p:spPr>
           <a:xfrm>
-            <a:off x="5059680" y="1435608"/>
-            <a:ext cx="2727960" cy="2112264"/>
+            <a:off x="5099304" y="1435608"/>
+            <a:ext cx="2630424" cy="2112264"/>
           </a:xfrm>
           <a:prstGeom prst="rect">
             <a:avLst/>
@@ -7162,8 +7528,8 @@
         </p:nvSpPr>
         <p:spPr>
           <a:xfrm>
-            <a:off x="8153400" y="1325880"/>
-            <a:ext cx="3642360" cy="2331720"/>
+            <a:off x="8095488" y="1325880"/>
+            <a:ext cx="3544824" cy="2331720"/>
           </a:xfrm>
           <a:prstGeom prst="roundRect">
             <a:avLst>
@@ -7196,7 +7562,7 @@
         </p:nvSpPr>
         <p:spPr>
           <a:xfrm>
-            <a:off x="8336280" y="1508760"/>
+            <a:off x="8278368" y="1508760"/>
             <a:ext cx="457200" cy="457200"/>
           </a:xfrm>
           <a:prstGeom prst="ellipse">
@@ -7216,7 +7582,7 @@
         </p:nvSpPr>
         <p:spPr>
           <a:xfrm>
-            <a:off x="8336280" y="1508760"/>
+            <a:off x="8278368" y="1508760"/>
             <a:ext cx="457200" cy="457200"/>
           </a:xfrm>
           <a:prstGeom prst="rect">
@@ -7255,8 +7621,8 @@
         </p:nvSpPr>
         <p:spPr>
           <a:xfrm>
-            <a:off x="8930640" y="1435608"/>
-            <a:ext cx="2727960" cy="2112264"/>
+            <a:off x="8872728" y="1435608"/>
+            <a:ext cx="2630424" cy="2112264"/>
           </a:xfrm>
           <a:prstGeom prst="rect">
             <a:avLst/>
@@ -7296,8 +7662,8 @@
         </p:nvSpPr>
         <p:spPr>
           <a:xfrm>
-            <a:off x="411480" y="3886200"/>
-            <a:ext cx="3642360" cy="2331720"/>
+            <a:off x="548640" y="3886200"/>
+            <a:ext cx="3544824" cy="2331720"/>
           </a:xfrm>
           <a:prstGeom prst="roundRect">
             <a:avLst>
@@ -7330,7 +7696,7 @@
         </p:nvSpPr>
         <p:spPr>
           <a:xfrm>
-            <a:off x="594360" y="4069080"/>
+            <a:off x="731520" y="4069080"/>
             <a:ext cx="457200" cy="457200"/>
           </a:xfrm>
           <a:prstGeom prst="ellipse">
@@ -7350,7 +7716,7 @@
         </p:nvSpPr>
         <p:spPr>
           <a:xfrm>
-            <a:off x="594360" y="4069080"/>
+            <a:off x="731520" y="4069080"/>
             <a:ext cx="457200" cy="457200"/>
           </a:xfrm>
           <a:prstGeom prst="rect">
@@ -7389,8 +7755,8 @@
         </p:nvSpPr>
         <p:spPr>
           <a:xfrm>
-            <a:off x="1188720" y="3995928"/>
-            <a:ext cx="2727960" cy="2112264"/>
+            <a:off x="1325880" y="3995928"/>
+            <a:ext cx="2630424" cy="2112264"/>
           </a:xfrm>
           <a:prstGeom prst="rect">
             <a:avLst/>
@@ -7430,8 +7796,8 @@
         </p:nvSpPr>
         <p:spPr>
           <a:xfrm>
-            <a:off x="4282440" y="3886200"/>
-            <a:ext cx="3642360" cy="2331720"/>
+            <a:off x="4322064" y="3886200"/>
+            <a:ext cx="3544824" cy="2331720"/>
           </a:xfrm>
           <a:prstGeom prst="roundRect">
             <a:avLst>
@@ -7464,7 +7830,7 @@
         </p:nvSpPr>
         <p:spPr>
           <a:xfrm>
-            <a:off x="4465320" y="4069080"/>
+            <a:off x="4504944" y="4069080"/>
             <a:ext cx="457200" cy="457200"/>
           </a:xfrm>
           <a:prstGeom prst="ellipse">
@@ -7484,7 +7850,7 @@
         </p:nvSpPr>
         <p:spPr>
           <a:xfrm>
-            <a:off x="4465320" y="4069080"/>
+            <a:off x="4504944" y="4069080"/>
             <a:ext cx="457200" cy="457200"/>
           </a:xfrm>
           <a:prstGeom prst="rect">
@@ -7523,8 +7889,8 @@
         </p:nvSpPr>
         <p:spPr>
           <a:xfrm>
-            <a:off x="5059680" y="3995928"/>
-            <a:ext cx="2727960" cy="2112264"/>
+            <a:off x="5099304" y="3995928"/>
+            <a:ext cx="2630424" cy="2112264"/>
           </a:xfrm>
           <a:prstGeom prst="rect">
             <a:avLst/>
@@ -7564,8 +7930,8 @@
         </p:nvSpPr>
         <p:spPr>
           <a:xfrm>
-            <a:off x="8153400" y="3886200"/>
-            <a:ext cx="3642360" cy="2331720"/>
+            <a:off x="8095488" y="3886200"/>
+            <a:ext cx="3544824" cy="2331720"/>
           </a:xfrm>
           <a:prstGeom prst="roundRect">
             <a:avLst>
@@ -7598,7 +7964,7 @@
         </p:nvSpPr>
         <p:spPr>
           <a:xfrm>
-            <a:off x="8336280" y="4069080"/>
+            <a:off x="8278368" y="4069080"/>
             <a:ext cx="457200" cy="457200"/>
           </a:xfrm>
           <a:prstGeom prst="ellipse">
@@ -7618,7 +7984,7 @@
         </p:nvSpPr>
         <p:spPr>
           <a:xfrm>
-            <a:off x="8336280" y="4069080"/>
+            <a:off x="8278368" y="4069080"/>
             <a:ext cx="457200" cy="457200"/>
           </a:xfrm>
           <a:prstGeom prst="rect">
@@ -7657,8 +8023,8 @@
         </p:nvSpPr>
         <p:spPr>
           <a:xfrm>
-            <a:off x="8930640" y="3995928"/>
-            <a:ext cx="2727960" cy="2112264"/>
+            <a:off x="8872728" y="3995928"/>
+            <a:ext cx="2630424" cy="2112264"/>
           </a:xfrm>
           <a:prstGeom prst="rect">
             <a:avLst/>
@@ -7687,6 +8053,54 @@
               <a:t>validade da proposta</a:t>
             </a:r>
             <a:endParaRPr lang="en-US" sz="1800" dirty="0"/>
+          </a:p>
+        </p:txBody>
+      </p:sp>
+      <p:sp>
+        <p:nvSpPr>
+          <p:cNvPr id="25" name="Slide Number Placeholder 0"/>
+          <p:cNvSpPr>
+            <a:spLocks noGrp="1"/>
+          </p:cNvSpPr>
+          <p:nvPr>
+            <p:ph type="sldNum" sz="quarter" idx="4294967295"/>
+          </p:nvPr>
+        </p:nvSpPr>
+        <p:spPr>
+          <a:xfrm>
+            <a:off x="11292840" y="6556248"/>
+            <a:ext cx="548640" cy="256032"/>
+          </a:xfrm>
+          <a:prstGeom prst="rect">
+            <a:avLst/>
+          </a:prstGeom>
+          <a:extLst>
+            <a:ext uri="{C572A759-6A51-4108-AA02-DFA0A04FC94B}">
+              <ma14:wrappingTextBoxFlag xmlns:ma14="http://schemas.microsoft.com/office/mac/drawingml/2011/main" val="0"/>
+            </a:ext>
+          </a:extLst>
+        </p:spPr>
+        <p:txBody>
+          <a:bodyPr/>
+          <a:lstStyle>
+            <a:lvl1pPr>
+              <a:defRPr sz="900">
+                <a:solidFill>
+                  <a:srgbClr val="1B3A6B"/>
+                </a:solidFill>
+                <a:latin typeface="Arial"/>
+                <a:ea typeface="Arial"/>
+                <a:cs typeface="Arial"/>
+              </a:defRPr>
+            </a:lvl1pPr>
+          </a:lstStyle>
+          <a:p>
+            <a:pPr algn="r"/>
+            <a:fld id="{F7021451-1387-4CA6-816F-3879F97B5CBC}" type="slidenum">
+              <a:rPr b="1" lang="en-US"/>
+              <a:t>15</a:t>
+            </a:fld>
+            <a:endParaRPr lang="en-US"/>
           </a:p>
         </p:txBody>
       </p:sp>
@@ -7763,7 +8177,7 @@
         </p:blipFill>
         <p:spPr>
           <a:xfrm>
-            <a:off x="411480" y="6547104"/>
+            <a:off x="548640" y="6547104"/>
             <a:ext cx="274320" cy="274320"/>
           </a:xfrm>
           <a:prstGeom prst="rect">
@@ -7779,7 +8193,7 @@
         </p:nvSpPr>
         <p:spPr>
           <a:xfrm>
-            <a:off x="749808" y="6528816"/>
+            <a:off x="886968" y="6528816"/>
             <a:ext cx="6400800" cy="310896"/>
           </a:xfrm>
           <a:prstGeom prst="rect">
@@ -7819,7 +8233,7 @@
         <p:spPr>
           <a:xfrm>
             <a:off x="7132320" y="6528816"/>
-            <a:ext cx="4663440" cy="310896"/>
+            <a:ext cx="4023360" cy="310896"/>
           </a:xfrm>
           <a:prstGeom prst="rect">
             <a:avLst/>
@@ -7857,7 +8271,7 @@
         </p:nvSpPr>
         <p:spPr>
           <a:xfrm>
-            <a:off x="411480" y="384048"/>
+            <a:off x="548640" y="384048"/>
             <a:ext cx="82296" cy="658368"/>
           </a:xfrm>
           <a:prstGeom prst="rect">
@@ -7877,7 +8291,7 @@
         </p:nvSpPr>
         <p:spPr>
           <a:xfrm>
-            <a:off x="640080" y="292608"/>
+            <a:off x="777240" y="292608"/>
             <a:ext cx="10972800" cy="274320"/>
           </a:xfrm>
           <a:prstGeom prst="rect">
@@ -7916,8 +8330,8 @@
         </p:nvSpPr>
         <p:spPr>
           <a:xfrm>
-            <a:off x="640080" y="530352"/>
-            <a:ext cx="11155680" cy="566928"/>
+            <a:off x="777240" y="530352"/>
+            <a:ext cx="10881360" cy="566928"/>
           </a:xfrm>
           <a:prstGeom prst="rect">
             <a:avLst/>
@@ -7957,8 +8371,8 @@
         </p:nvSpPr>
         <p:spPr>
           <a:xfrm>
-            <a:off x="411480" y="1325880"/>
-            <a:ext cx="3642360" cy="2331720"/>
+            <a:off x="548640" y="1325880"/>
+            <a:ext cx="3544824" cy="2331720"/>
           </a:xfrm>
           <a:prstGeom prst="roundRect">
             <a:avLst>
@@ -7991,7 +8405,7 @@
         </p:nvSpPr>
         <p:spPr>
           <a:xfrm>
-            <a:off x="594360" y="1508760"/>
+            <a:off x="731520" y="1508760"/>
             <a:ext cx="457200" cy="457200"/>
           </a:xfrm>
           <a:prstGeom prst="ellipse">
@@ -8011,7 +8425,7 @@
         </p:nvSpPr>
         <p:spPr>
           <a:xfrm>
-            <a:off x="594360" y="1508760"/>
+            <a:off x="731520" y="1508760"/>
             <a:ext cx="457200" cy="457200"/>
           </a:xfrm>
           <a:prstGeom prst="rect">
@@ -8050,8 +8464,8 @@
         </p:nvSpPr>
         <p:spPr>
           <a:xfrm>
-            <a:off x="1188720" y="1435608"/>
-            <a:ext cx="2727960" cy="2112264"/>
+            <a:off x="1325880" y="1435608"/>
+            <a:ext cx="2630424" cy="2112264"/>
           </a:xfrm>
           <a:prstGeom prst="rect">
             <a:avLst/>
@@ -8091,8 +8505,8 @@
         </p:nvSpPr>
         <p:spPr>
           <a:xfrm>
-            <a:off x="4282440" y="1325880"/>
-            <a:ext cx="3642360" cy="2331720"/>
+            <a:off x="4322064" y="1325880"/>
+            <a:ext cx="3544824" cy="2331720"/>
           </a:xfrm>
           <a:prstGeom prst="roundRect">
             <a:avLst>
@@ -8125,7 +8539,7 @@
         </p:nvSpPr>
         <p:spPr>
           <a:xfrm>
-            <a:off x="4465320" y="1508760"/>
+            <a:off x="4504944" y="1508760"/>
             <a:ext cx="457200" cy="457200"/>
           </a:xfrm>
           <a:prstGeom prst="ellipse">
@@ -8145,7 +8559,7 @@
         </p:nvSpPr>
         <p:spPr>
           <a:xfrm>
-            <a:off x="4465320" y="1508760"/>
+            <a:off x="4504944" y="1508760"/>
             <a:ext cx="457200" cy="457200"/>
           </a:xfrm>
           <a:prstGeom prst="rect">
@@ -8184,8 +8598,8 @@
         </p:nvSpPr>
         <p:spPr>
           <a:xfrm>
-            <a:off x="5059680" y="1435608"/>
-            <a:ext cx="2727960" cy="2112264"/>
+            <a:off x="5099304" y="1435608"/>
+            <a:ext cx="2630424" cy="2112264"/>
           </a:xfrm>
           <a:prstGeom prst="rect">
             <a:avLst/>
@@ -8225,8 +8639,8 @@
         </p:nvSpPr>
         <p:spPr>
           <a:xfrm>
-            <a:off x="8153400" y="1325880"/>
-            <a:ext cx="3642360" cy="2331720"/>
+            <a:off x="8095488" y="1325880"/>
+            <a:ext cx="3544824" cy="2331720"/>
           </a:xfrm>
           <a:prstGeom prst="roundRect">
             <a:avLst>
@@ -8259,7 +8673,7 @@
         </p:nvSpPr>
         <p:spPr>
           <a:xfrm>
-            <a:off x="8336280" y="1508760"/>
+            <a:off x="8278368" y="1508760"/>
             <a:ext cx="457200" cy="457200"/>
           </a:xfrm>
           <a:prstGeom prst="ellipse">
@@ -8279,7 +8693,7 @@
         </p:nvSpPr>
         <p:spPr>
           <a:xfrm>
-            <a:off x="8336280" y="1508760"/>
+            <a:off x="8278368" y="1508760"/>
             <a:ext cx="457200" cy="457200"/>
           </a:xfrm>
           <a:prstGeom prst="rect">
@@ -8318,8 +8732,8 @@
         </p:nvSpPr>
         <p:spPr>
           <a:xfrm>
-            <a:off x="8930640" y="1435608"/>
-            <a:ext cx="2727960" cy="2112264"/>
+            <a:off x="8872728" y="1435608"/>
+            <a:ext cx="2630424" cy="2112264"/>
           </a:xfrm>
           <a:prstGeom prst="rect">
             <a:avLst/>
@@ -8359,8 +8773,8 @@
         </p:nvSpPr>
         <p:spPr>
           <a:xfrm>
-            <a:off x="411480" y="3886200"/>
-            <a:ext cx="3642360" cy="2331720"/>
+            <a:off x="548640" y="3886200"/>
+            <a:ext cx="3544824" cy="2331720"/>
           </a:xfrm>
           <a:prstGeom prst="roundRect">
             <a:avLst>
@@ -8393,7 +8807,7 @@
         </p:nvSpPr>
         <p:spPr>
           <a:xfrm>
-            <a:off x="594360" y="4069080"/>
+            <a:off x="731520" y="4069080"/>
             <a:ext cx="457200" cy="457200"/>
           </a:xfrm>
           <a:prstGeom prst="ellipse">
@@ -8413,7 +8827,7 @@
         </p:nvSpPr>
         <p:spPr>
           <a:xfrm>
-            <a:off x="594360" y="4069080"/>
+            <a:off x="731520" y="4069080"/>
             <a:ext cx="457200" cy="457200"/>
           </a:xfrm>
           <a:prstGeom prst="rect">
@@ -8452,8 +8866,8 @@
         </p:nvSpPr>
         <p:spPr>
           <a:xfrm>
-            <a:off x="1188720" y="3995928"/>
-            <a:ext cx="2727960" cy="2112264"/>
+            <a:off x="1325880" y="3995928"/>
+            <a:ext cx="2630424" cy="2112264"/>
           </a:xfrm>
           <a:prstGeom prst="rect">
             <a:avLst/>
@@ -8493,8 +8907,8 @@
         </p:nvSpPr>
         <p:spPr>
           <a:xfrm>
-            <a:off x="4282440" y="3886200"/>
-            <a:ext cx="3642360" cy="2331720"/>
+            <a:off x="4322064" y="3886200"/>
+            <a:ext cx="3544824" cy="2331720"/>
           </a:xfrm>
           <a:prstGeom prst="roundRect">
             <a:avLst>
@@ -8527,7 +8941,7 @@
         </p:nvSpPr>
         <p:spPr>
           <a:xfrm>
-            <a:off x="4465320" y="4069080"/>
+            <a:off x="4504944" y="4069080"/>
             <a:ext cx="457200" cy="457200"/>
           </a:xfrm>
           <a:prstGeom prst="ellipse">
@@ -8547,7 +8961,7 @@
         </p:nvSpPr>
         <p:spPr>
           <a:xfrm>
-            <a:off x="4465320" y="4069080"/>
+            <a:off x="4504944" y="4069080"/>
             <a:ext cx="457200" cy="457200"/>
           </a:xfrm>
           <a:prstGeom prst="rect">
@@ -8586,8 +9000,8 @@
         </p:nvSpPr>
         <p:spPr>
           <a:xfrm>
-            <a:off x="5059680" y="3995928"/>
-            <a:ext cx="2727960" cy="2112264"/>
+            <a:off x="5099304" y="3995928"/>
+            <a:ext cx="2630424" cy="2112264"/>
           </a:xfrm>
           <a:prstGeom prst="rect">
             <a:avLst/>
@@ -8616,6 +9030,54 @@
               <a:t>13–15 min: próximo passo e documentos</a:t>
             </a:r>
             <a:endParaRPr lang="en-US" sz="1800" dirty="0"/>
+          </a:p>
+        </p:txBody>
+      </p:sp>
+      <p:sp>
+        <p:nvSpPr>
+          <p:cNvPr id="25" name="Slide Number Placeholder 0"/>
+          <p:cNvSpPr>
+            <a:spLocks noGrp="1"/>
+          </p:cNvSpPr>
+          <p:nvPr>
+            <p:ph type="sldNum" sz="quarter" idx="4294967295"/>
+          </p:nvPr>
+        </p:nvSpPr>
+        <p:spPr>
+          <a:xfrm>
+            <a:off x="11292840" y="6556248"/>
+            <a:ext cx="548640" cy="256032"/>
+          </a:xfrm>
+          <a:prstGeom prst="rect">
+            <a:avLst/>
+          </a:prstGeom>
+          <a:extLst>
+            <a:ext uri="{C572A759-6A51-4108-AA02-DFA0A04FC94B}">
+              <ma14:wrappingTextBoxFlag xmlns:ma14="http://schemas.microsoft.com/office/mac/drawingml/2011/main" val="0"/>
+            </a:ext>
+          </a:extLst>
+        </p:spPr>
+        <p:txBody>
+          <a:bodyPr/>
+          <a:lstStyle>
+            <a:lvl1pPr>
+              <a:defRPr sz="900">
+                <a:solidFill>
+                  <a:srgbClr val="1B3A6B"/>
+                </a:solidFill>
+                <a:latin typeface="Arial"/>
+                <a:ea typeface="Arial"/>
+                <a:cs typeface="Arial"/>
+              </a:defRPr>
+            </a:lvl1pPr>
+          </a:lstStyle>
+          <a:p>
+            <a:pPr algn="r"/>
+            <a:fld id="{F7021451-1387-4CA6-816F-3879F97B5CBC}" type="slidenum">
+              <a:rPr b="1" lang="en-US"/>
+              <a:t>16</a:t>
+            </a:fld>
+            <a:endParaRPr lang="en-US"/>
           </a:p>
         </p:txBody>
       </p:sp>
@@ -8692,7 +9154,7 @@
         </p:blipFill>
         <p:spPr>
           <a:xfrm>
-            <a:off x="411480" y="6547104"/>
+            <a:off x="548640" y="6547104"/>
             <a:ext cx="274320" cy="274320"/>
           </a:xfrm>
           <a:prstGeom prst="rect">
@@ -8708,7 +9170,7 @@
         </p:nvSpPr>
         <p:spPr>
           <a:xfrm>
-            <a:off x="749808" y="6528816"/>
+            <a:off x="886968" y="6528816"/>
             <a:ext cx="6400800" cy="310896"/>
           </a:xfrm>
           <a:prstGeom prst="rect">
@@ -8748,7 +9210,7 @@
         <p:spPr>
           <a:xfrm>
             <a:off x="7132320" y="6528816"/>
-            <a:ext cx="4663440" cy="310896"/>
+            <a:ext cx="4023360" cy="310896"/>
           </a:xfrm>
           <a:prstGeom prst="rect">
             <a:avLst/>
@@ -8786,7 +9248,7 @@
         </p:nvSpPr>
         <p:spPr>
           <a:xfrm>
-            <a:off x="411480" y="384048"/>
+            <a:off x="548640" y="384048"/>
             <a:ext cx="82296" cy="658368"/>
           </a:xfrm>
           <a:prstGeom prst="rect">
@@ -8806,7 +9268,7 @@
         </p:nvSpPr>
         <p:spPr>
           <a:xfrm>
-            <a:off x="640080" y="292608"/>
+            <a:off x="777240" y="292608"/>
             <a:ext cx="10972800" cy="274320"/>
           </a:xfrm>
           <a:prstGeom prst="rect">
@@ -8845,8 +9307,8 @@
         </p:nvSpPr>
         <p:spPr>
           <a:xfrm>
-            <a:off x="640080" y="530352"/>
-            <a:ext cx="11155680" cy="566928"/>
+            <a:off x="777240" y="530352"/>
+            <a:ext cx="10881360" cy="566928"/>
           </a:xfrm>
           <a:prstGeom prst="rect">
             <a:avLst/>
@@ -8886,8 +9348,8 @@
         </p:nvSpPr>
         <p:spPr>
           <a:xfrm>
-            <a:off x="411480" y="1325880"/>
-            <a:ext cx="5577840" cy="2331720"/>
+            <a:off x="548640" y="1325880"/>
+            <a:ext cx="5431536" cy="2331720"/>
           </a:xfrm>
           <a:prstGeom prst="roundRect">
             <a:avLst>
@@ -8920,7 +9382,7 @@
         </p:nvSpPr>
         <p:spPr>
           <a:xfrm>
-            <a:off x="594360" y="1508760"/>
+            <a:off x="731520" y="1508760"/>
             <a:ext cx="457200" cy="457200"/>
           </a:xfrm>
           <a:prstGeom prst="ellipse">
@@ -8940,7 +9402,7 @@
         </p:nvSpPr>
         <p:spPr>
           <a:xfrm>
-            <a:off x="594360" y="1508760"/>
+            <a:off x="731520" y="1508760"/>
             <a:ext cx="457200" cy="457200"/>
           </a:xfrm>
           <a:prstGeom prst="rect">
@@ -8979,8 +9441,8 @@
         </p:nvSpPr>
         <p:spPr>
           <a:xfrm>
-            <a:off x="1188720" y="1435608"/>
-            <a:ext cx="4663440" cy="2112264"/>
+            <a:off x="1325880" y="1435608"/>
+            <a:ext cx="4517136" cy="2112264"/>
           </a:xfrm>
           <a:prstGeom prst="rect">
             <a:avLst/>
@@ -9020,8 +9482,8 @@
         </p:nvSpPr>
         <p:spPr>
           <a:xfrm>
-            <a:off x="6217920" y="1325880"/>
-            <a:ext cx="5577840" cy="2331720"/>
+            <a:off x="6208776" y="1325880"/>
+            <a:ext cx="5431536" cy="2331720"/>
           </a:xfrm>
           <a:prstGeom prst="roundRect">
             <a:avLst>
@@ -9054,7 +9516,7 @@
         </p:nvSpPr>
         <p:spPr>
           <a:xfrm>
-            <a:off x="6400800" y="1508760"/>
+            <a:off x="6391656" y="1508760"/>
             <a:ext cx="457200" cy="457200"/>
           </a:xfrm>
           <a:prstGeom prst="ellipse">
@@ -9074,7 +9536,7 @@
         </p:nvSpPr>
         <p:spPr>
           <a:xfrm>
-            <a:off x="6400800" y="1508760"/>
+            <a:off x="6391656" y="1508760"/>
             <a:ext cx="457200" cy="457200"/>
           </a:xfrm>
           <a:prstGeom prst="rect">
@@ -9113,8 +9575,8 @@
         </p:nvSpPr>
         <p:spPr>
           <a:xfrm>
-            <a:off x="6995160" y="1435608"/>
-            <a:ext cx="4663440" cy="2112264"/>
+            <a:off x="6986016" y="1435608"/>
+            <a:ext cx="4517136" cy="2112264"/>
           </a:xfrm>
           <a:prstGeom prst="rect">
             <a:avLst/>
@@ -9154,8 +9616,8 @@
         </p:nvSpPr>
         <p:spPr>
           <a:xfrm>
-            <a:off x="411480" y="3886200"/>
-            <a:ext cx="5577840" cy="2331720"/>
+            <a:off x="548640" y="3886200"/>
+            <a:ext cx="5431536" cy="2331720"/>
           </a:xfrm>
           <a:prstGeom prst="roundRect">
             <a:avLst>
@@ -9188,7 +9650,7 @@
         </p:nvSpPr>
         <p:spPr>
           <a:xfrm>
-            <a:off x="594360" y="4069080"/>
+            <a:off x="731520" y="4069080"/>
             <a:ext cx="457200" cy="457200"/>
           </a:xfrm>
           <a:prstGeom prst="ellipse">
@@ -9208,7 +9670,7 @@
         </p:nvSpPr>
         <p:spPr>
           <a:xfrm>
-            <a:off x="594360" y="4069080"/>
+            <a:off x="731520" y="4069080"/>
             <a:ext cx="457200" cy="457200"/>
           </a:xfrm>
           <a:prstGeom prst="rect">
@@ -9247,8 +9709,8 @@
         </p:nvSpPr>
         <p:spPr>
           <a:xfrm>
-            <a:off x="1188720" y="3995928"/>
-            <a:ext cx="4663440" cy="2112264"/>
+            <a:off x="1325880" y="3995928"/>
+            <a:ext cx="4517136" cy="2112264"/>
           </a:xfrm>
           <a:prstGeom prst="rect">
             <a:avLst/>
@@ -9288,8 +9750,8 @@
         </p:nvSpPr>
         <p:spPr>
           <a:xfrm>
-            <a:off x="6217920" y="3886200"/>
-            <a:ext cx="5577840" cy="2331720"/>
+            <a:off x="6208776" y="3886200"/>
+            <a:ext cx="5431536" cy="2331720"/>
           </a:xfrm>
           <a:prstGeom prst="roundRect">
             <a:avLst>
@@ -9322,7 +9784,7 @@
         </p:nvSpPr>
         <p:spPr>
           <a:xfrm>
-            <a:off x="6400800" y="4069080"/>
+            <a:off x="6391656" y="4069080"/>
             <a:ext cx="457200" cy="457200"/>
           </a:xfrm>
           <a:prstGeom prst="ellipse">
@@ -9342,7 +9804,7 @@
         </p:nvSpPr>
         <p:spPr>
           <a:xfrm>
-            <a:off x="6400800" y="4069080"/>
+            <a:off x="6391656" y="4069080"/>
             <a:ext cx="457200" cy="457200"/>
           </a:xfrm>
           <a:prstGeom prst="rect">
@@ -9381,8 +9843,8 @@
         </p:nvSpPr>
         <p:spPr>
           <a:xfrm>
-            <a:off x="6995160" y="3995928"/>
-            <a:ext cx="4663440" cy="2112264"/>
+            <a:off x="6986016" y="3995928"/>
+            <a:ext cx="4517136" cy="2112264"/>
           </a:xfrm>
           <a:prstGeom prst="rect">
             <a:avLst/>
@@ -9411,6 +9873,54 @@
               <a:t>reunião de 15 min com próximo passo</a:t>
             </a:r>
             <a:endParaRPr lang="en-US" sz="1800" dirty="0"/>
+          </a:p>
+        </p:txBody>
+      </p:sp>
+      <p:sp>
+        <p:nvSpPr>
+          <p:cNvPr id="25" name="Slide Number Placeholder 0"/>
+          <p:cNvSpPr>
+            <a:spLocks noGrp="1"/>
+          </p:cNvSpPr>
+          <p:nvPr>
+            <p:ph type="sldNum" sz="quarter" idx="4294967295"/>
+          </p:nvPr>
+        </p:nvSpPr>
+        <p:spPr>
+          <a:xfrm>
+            <a:off x="11292840" y="6556248"/>
+            <a:ext cx="548640" cy="256032"/>
+          </a:xfrm>
+          <a:prstGeom prst="rect">
+            <a:avLst/>
+          </a:prstGeom>
+          <a:extLst>
+            <a:ext uri="{C572A759-6A51-4108-AA02-DFA0A04FC94B}">
+              <ma14:wrappingTextBoxFlag xmlns:ma14="http://schemas.microsoft.com/office/mac/drawingml/2011/main" val="0"/>
+            </a:ext>
+          </a:extLst>
+        </p:spPr>
+        <p:txBody>
+          <a:bodyPr/>
+          <a:lstStyle>
+            <a:lvl1pPr>
+              <a:defRPr sz="900">
+                <a:solidFill>
+                  <a:srgbClr val="1B3A6B"/>
+                </a:solidFill>
+                <a:latin typeface="Arial"/>
+                <a:ea typeface="Arial"/>
+                <a:cs typeface="Arial"/>
+              </a:defRPr>
+            </a:lvl1pPr>
+          </a:lstStyle>
+          <a:p>
+            <a:pPr algn="r"/>
+            <a:fld id="{F7021451-1387-4CA6-816F-3879F97B5CBC}" type="slidenum">
+              <a:rPr b="1" lang="en-US"/>
+              <a:t>17</a:t>
+            </a:fld>
+            <a:endParaRPr lang="en-US"/>
           </a:p>
         </p:txBody>
       </p:sp>
@@ -9474,6 +9984,45 @@
         </p:nvSpPr>
         <p:spPr>
           <a:xfrm>
+            <a:off x="457200" y="548640"/>
+            <a:ext cx="3474720" cy="1737360"/>
+          </a:xfrm>
+          <a:prstGeom prst="rect">
+            <a:avLst/>
+          </a:prstGeom>
+          <a:noFill/>
+          <a:ln/>
+        </p:spPr>
+        <p:txBody>
+          <a:bodyPr wrap="square" rtlCol="0" anchor="ctr"/>
+          <a:lstStyle/>
+          <a:p>
+            <a:pPr indent="0" marL="0">
+              <a:buNone/>
+            </a:pPr>
+            <a:r>
+              <a:rPr lang="en-US" sz="11000" b="1" dirty="0">
+                <a:solidFill>
+                  <a:srgbClr val="11396F"/>
+                </a:solidFill>
+                <a:latin typeface="Arial" pitchFamily="34" charset="0"/>
+                <a:ea typeface="Arial" pitchFamily="34" charset="-122"/>
+                <a:cs typeface="Arial" pitchFamily="34" charset="-120"/>
+              </a:rPr>
+              <a:t>04</a:t>
+            </a:r>
+            <a:endParaRPr lang="en-US" sz="11000" dirty="0"/>
+          </a:p>
+        </p:txBody>
+      </p:sp>
+      <p:sp>
+        <p:nvSpPr>
+          <p:cNvPr id="4" name="Text 2"/>
+          <p:cNvSpPr/>
+          <p:nvPr/>
+        </p:nvSpPr>
+        <p:spPr>
+          <a:xfrm>
             <a:off x="548640" y="2194560"/>
             <a:ext cx="3291840" cy="548640"/>
           </a:xfrm>
@@ -9507,7 +10056,46 @@
       </p:sp>
       <p:sp>
         <p:nvSpPr>
-          <p:cNvPr id="4" name="Text 2"/>
+          <p:cNvPr id="5" name="Text 3"/>
+          <p:cNvSpPr/>
+          <p:nvPr/>
+        </p:nvSpPr>
+        <p:spPr>
+          <a:xfrm>
+            <a:off x="548640" y="3200400"/>
+            <a:ext cx="3383280" cy="457200"/>
+          </a:xfrm>
+          <a:prstGeom prst="rect">
+            <a:avLst/>
+          </a:prstGeom>
+          <a:noFill/>
+          <a:ln/>
+        </p:spPr>
+        <p:txBody>
+          <a:bodyPr wrap="square" rtlCol="0" anchor="ctr"/>
+          <a:lstStyle/>
+          <a:p>
+            <a:pPr indent="0" marL="0">
+              <a:buNone/>
+            </a:pPr>
+            <a:r>
+              <a:rPr lang="en-US" sz="1100" dirty="0">
+                <a:solidFill>
+                  <a:srgbClr val="C7D2E3"/>
+                </a:solidFill>
+                <a:latin typeface="Arial" pitchFamily="34" charset="0"/>
+                <a:ea typeface="Arial" pitchFamily="34" charset="-122"/>
+                <a:cs typeface="Arial" pitchFamily="34" charset="-120"/>
+              </a:rPr>
+              <a:t>M5 · Etapa 3 · Operação ponta a ponta</a:t>
+            </a:r>
+            <a:endParaRPr lang="en-US" sz="1100" dirty="0"/>
+          </a:p>
+        </p:txBody>
+      </p:sp>
+      <p:sp>
+        <p:nvSpPr>
+          <p:cNvPr id="6" name="Text 4"/>
           <p:cNvSpPr/>
           <p:nvPr/>
         </p:nvSpPr>
@@ -9546,7 +10134,7 @@
       </p:sp>
       <p:pic>
         <p:nvPicPr>
-          <p:cNvPr id="5" name="Image 0" descr="/www/wwwroot/rexar/gdsolar/docs/curso/slides/assets/logo-gdsolar.png">    </p:cNvPr>
+          <p:cNvPr id="7" name="Image 0" descr="/www/wwwroot/rexar/gdsolar/docs/curso/slides/assets/logo-gdsolar.png">    </p:cNvPr>
           <p:cNvPicPr>
             <a:picLocks noChangeAspect="1"/>
           </p:cNvPicPr>
@@ -9570,7 +10158,7 @@
       </p:pic>
       <p:sp>
         <p:nvSpPr>
-          <p:cNvPr id="6" name="Text 3"/>
+          <p:cNvPr id="8" name="Text 5"/>
           <p:cNvSpPr/>
           <p:nvPr/>
         </p:nvSpPr>
@@ -9611,7 +10199,7 @@
       </p:sp>
       <p:sp>
         <p:nvSpPr>
-          <p:cNvPr id="7" name="Text 4"/>
+          <p:cNvPr id="9" name="Text 6"/>
           <p:cNvSpPr/>
           <p:nvPr/>
         </p:nvSpPr>
@@ -9652,7 +10240,7 @@
       </p:sp>
       <p:sp>
         <p:nvSpPr>
-          <p:cNvPr id="8" name="Text 5"/>
+          <p:cNvPr id="10" name="Text 7"/>
           <p:cNvSpPr/>
           <p:nvPr/>
         </p:nvSpPr>
@@ -9831,7 +10419,7 @@
         </p:blipFill>
         <p:spPr>
           <a:xfrm>
-            <a:off x="411480" y="6547104"/>
+            <a:off x="548640" y="6547104"/>
             <a:ext cx="274320" cy="274320"/>
           </a:xfrm>
           <a:prstGeom prst="rect">
@@ -9847,7 +10435,7 @@
         </p:nvSpPr>
         <p:spPr>
           <a:xfrm>
-            <a:off x="749808" y="6528816"/>
+            <a:off x="886968" y="6528816"/>
             <a:ext cx="6400800" cy="310896"/>
           </a:xfrm>
           <a:prstGeom prst="rect">
@@ -9887,7 +10475,7 @@
         <p:spPr>
           <a:xfrm>
             <a:off x="7132320" y="6528816"/>
-            <a:ext cx="4663440" cy="310896"/>
+            <a:ext cx="4023360" cy="310896"/>
           </a:xfrm>
           <a:prstGeom prst="rect">
             <a:avLst/>
@@ -9925,7 +10513,7 @@
         </p:nvSpPr>
         <p:spPr>
           <a:xfrm>
-            <a:off x="411480" y="384048"/>
+            <a:off x="548640" y="384048"/>
             <a:ext cx="82296" cy="658368"/>
           </a:xfrm>
           <a:prstGeom prst="rect">
@@ -9945,7 +10533,7 @@
         </p:nvSpPr>
         <p:spPr>
           <a:xfrm>
-            <a:off x="640080" y="292608"/>
+            <a:off x="777240" y="292608"/>
             <a:ext cx="10972800" cy="274320"/>
           </a:xfrm>
           <a:prstGeom prst="rect">
@@ -9984,8 +10572,8 @@
         </p:nvSpPr>
         <p:spPr>
           <a:xfrm>
-            <a:off x="640080" y="530352"/>
-            <a:ext cx="11155680" cy="566928"/>
+            <a:off x="777240" y="530352"/>
+            <a:ext cx="10881360" cy="566928"/>
           </a:xfrm>
           <a:prstGeom prst="rect">
             <a:avLst/>
@@ -10098,6 +10686,54 @@
               <a:t>3. 'Preciso trocar medidor ou fazer obra?' → Não. Nada muda na sua instalação.</a:t>
             </a:r>
             <a:endParaRPr lang="en-US" sz="1400" dirty="0"/>
+          </a:p>
+        </p:txBody>
+      </p:sp>
+      <p:sp>
+        <p:nvSpPr>
+          <p:cNvPr id="25" name="Slide Number Placeholder 0"/>
+          <p:cNvSpPr>
+            <a:spLocks noGrp="1"/>
+          </p:cNvSpPr>
+          <p:nvPr>
+            <p:ph type="sldNum" sz="quarter" idx="4294967295"/>
+          </p:nvPr>
+        </p:nvSpPr>
+        <p:spPr>
+          <a:xfrm>
+            <a:off x="11292840" y="6556248"/>
+            <a:ext cx="548640" cy="256032"/>
+          </a:xfrm>
+          <a:prstGeom prst="rect">
+            <a:avLst/>
+          </a:prstGeom>
+          <a:extLst>
+            <a:ext uri="{C572A759-6A51-4108-AA02-DFA0A04FC94B}">
+              <ma14:wrappingTextBoxFlag xmlns:ma14="http://schemas.microsoft.com/office/mac/drawingml/2011/main" val="0"/>
+            </a:ext>
+          </a:extLst>
+        </p:spPr>
+        <p:txBody>
+          <a:bodyPr/>
+          <a:lstStyle>
+            <a:lvl1pPr>
+              <a:defRPr sz="900">
+                <a:solidFill>
+                  <a:srgbClr val="1B3A6B"/>
+                </a:solidFill>
+                <a:latin typeface="Arial"/>
+                <a:ea typeface="Arial"/>
+                <a:cs typeface="Arial"/>
+              </a:defRPr>
+            </a:lvl1pPr>
+          </a:lstStyle>
+          <a:p>
+            <a:pPr algn="r"/>
+            <a:fld id="{F7021451-1387-4CA6-816F-3879F97B5CBC}" type="slidenum">
+              <a:rPr b="1" lang="en-US"/>
+              <a:t>19</a:t>
+            </a:fld>
+            <a:endParaRPr lang="en-US"/>
           </a:p>
         </p:txBody>
       </p:sp>
@@ -10161,6 +10797,45 @@
         </p:nvSpPr>
         <p:spPr>
           <a:xfrm>
+            <a:off x="457200" y="548640"/>
+            <a:ext cx="3474720" cy="1737360"/>
+          </a:xfrm>
+          <a:prstGeom prst="rect">
+            <a:avLst/>
+          </a:prstGeom>
+          <a:noFill/>
+          <a:ln/>
+        </p:spPr>
+        <p:txBody>
+          <a:bodyPr wrap="square" rtlCol="0" anchor="ctr"/>
+          <a:lstStyle/>
+          <a:p>
+            <a:pPr indent="0" marL="0">
+              <a:buNone/>
+            </a:pPr>
+            <a:r>
+              <a:rPr lang="en-US" sz="11000" b="1" dirty="0">
+                <a:solidFill>
+                  <a:srgbClr val="11396F"/>
+                </a:solidFill>
+                <a:latin typeface="Arial" pitchFamily="34" charset="0"/>
+                <a:ea typeface="Arial" pitchFamily="34" charset="-122"/>
+                <a:cs typeface="Arial" pitchFamily="34" charset="-120"/>
+              </a:rPr>
+              <a:t>01</a:t>
+            </a:r>
+            <a:endParaRPr lang="en-US" sz="11000" dirty="0"/>
+          </a:p>
+        </p:txBody>
+      </p:sp>
+      <p:sp>
+        <p:nvSpPr>
+          <p:cNvPr id="4" name="Text 2"/>
+          <p:cNvSpPr/>
+          <p:nvPr/>
+        </p:nvSpPr>
+        <p:spPr>
+          <a:xfrm>
             <a:off x="548640" y="2194560"/>
             <a:ext cx="3291840" cy="548640"/>
           </a:xfrm>
@@ -10194,7 +10869,46 @@
       </p:sp>
       <p:sp>
         <p:nvSpPr>
-          <p:cNvPr id="4" name="Text 2"/>
+          <p:cNvPr id="5" name="Text 3"/>
+          <p:cNvSpPr/>
+          <p:nvPr/>
+        </p:nvSpPr>
+        <p:spPr>
+          <a:xfrm>
+            <a:off x="548640" y="3200400"/>
+            <a:ext cx="3383280" cy="457200"/>
+          </a:xfrm>
+          <a:prstGeom prst="rect">
+            <a:avLst/>
+          </a:prstGeom>
+          <a:noFill/>
+          <a:ln/>
+        </p:spPr>
+        <p:txBody>
+          <a:bodyPr wrap="square" rtlCol="0" anchor="ctr"/>
+          <a:lstStyle/>
+          <a:p>
+            <a:pPr indent="0" marL="0">
+              <a:buNone/>
+            </a:pPr>
+            <a:r>
+              <a:rPr lang="en-US" sz="1100" dirty="0">
+                <a:solidFill>
+                  <a:srgbClr val="C7D2E3"/>
+                </a:solidFill>
+                <a:latin typeface="Arial" pitchFamily="34" charset="0"/>
+                <a:ea typeface="Arial" pitchFamily="34" charset="-122"/>
+                <a:cs typeface="Arial" pitchFamily="34" charset="-120"/>
+              </a:rPr>
+              <a:t>M5 · Etapa 3 · Operação ponta a ponta</a:t>
+            </a:r>
+            <a:endParaRPr lang="en-US" sz="1100" dirty="0"/>
+          </a:p>
+        </p:txBody>
+      </p:sp>
+      <p:sp>
+        <p:nvSpPr>
+          <p:cNvPr id="6" name="Text 4"/>
           <p:cNvSpPr/>
           <p:nvPr/>
         </p:nvSpPr>
@@ -10233,7 +10947,7 @@
       </p:sp>
       <p:pic>
         <p:nvPicPr>
-          <p:cNvPr id="5" name="Image 0" descr="/www/wwwroot/rexar/gdsolar/docs/curso/slides/assets/logo-gdsolar.png">    </p:cNvPr>
+          <p:cNvPr id="7" name="Image 0" descr="/www/wwwroot/rexar/gdsolar/docs/curso/slides/assets/logo-gdsolar.png">    </p:cNvPr>
           <p:cNvPicPr>
             <a:picLocks noChangeAspect="1"/>
           </p:cNvPicPr>
@@ -10257,7 +10971,7 @@
       </p:pic>
       <p:sp>
         <p:nvSpPr>
-          <p:cNvPr id="6" name="Text 3"/>
+          <p:cNvPr id="8" name="Text 5"/>
           <p:cNvSpPr/>
           <p:nvPr/>
         </p:nvSpPr>
@@ -10298,7 +11012,7 @@
       </p:sp>
       <p:sp>
         <p:nvSpPr>
-          <p:cNvPr id="7" name="Text 4"/>
+          <p:cNvPr id="9" name="Text 6"/>
           <p:cNvSpPr/>
           <p:nvPr/>
         </p:nvSpPr>
@@ -10339,7 +11053,7 @@
       </p:sp>
       <p:sp>
         <p:nvSpPr>
-          <p:cNvPr id="8" name="Text 5"/>
+          <p:cNvPr id="10" name="Text 7"/>
           <p:cNvSpPr/>
           <p:nvPr/>
         </p:nvSpPr>
@@ -10518,7 +11232,7 @@
         </p:blipFill>
         <p:spPr>
           <a:xfrm>
-            <a:off x="411480" y="6547104"/>
+            <a:off x="548640" y="6547104"/>
             <a:ext cx="274320" cy="274320"/>
           </a:xfrm>
           <a:prstGeom prst="rect">
@@ -10534,7 +11248,7 @@
         </p:nvSpPr>
         <p:spPr>
           <a:xfrm>
-            <a:off x="749808" y="6528816"/>
+            <a:off x="886968" y="6528816"/>
             <a:ext cx="6400800" cy="310896"/>
           </a:xfrm>
           <a:prstGeom prst="rect">
@@ -10574,7 +11288,7 @@
         <p:spPr>
           <a:xfrm>
             <a:off x="7132320" y="6528816"/>
-            <a:ext cx="4663440" cy="310896"/>
+            <a:ext cx="4023360" cy="310896"/>
           </a:xfrm>
           <a:prstGeom prst="rect">
             <a:avLst/>
@@ -10612,7 +11326,7 @@
         </p:nvSpPr>
         <p:spPr>
           <a:xfrm>
-            <a:off x="411480" y="384048"/>
+            <a:off x="548640" y="384048"/>
             <a:ext cx="82296" cy="658368"/>
           </a:xfrm>
           <a:prstGeom prst="rect">
@@ -10632,7 +11346,7 @@
         </p:nvSpPr>
         <p:spPr>
           <a:xfrm>
-            <a:off x="640080" y="292608"/>
+            <a:off x="777240" y="292608"/>
             <a:ext cx="10972800" cy="274320"/>
           </a:xfrm>
           <a:prstGeom prst="rect">
@@ -10671,8 +11385,8 @@
         </p:nvSpPr>
         <p:spPr>
           <a:xfrm>
-            <a:off x="640080" y="530352"/>
-            <a:ext cx="11155680" cy="566928"/>
+            <a:off x="777240" y="530352"/>
+            <a:ext cx="10881360" cy="566928"/>
           </a:xfrm>
           <a:prstGeom prst="rect">
             <a:avLst/>
@@ -10785,6 +11499,54 @@
               <a:t>6. 'E se a usina gerar menos?' → Você recebe proporcionalmente menos créditos e paga proporcionalmente menos para nós; nunca paga por energia que não recebeu.</a:t>
             </a:r>
             <a:endParaRPr lang="en-US" sz="1300" dirty="0"/>
+          </a:p>
+        </p:txBody>
+      </p:sp>
+      <p:sp>
+        <p:nvSpPr>
+          <p:cNvPr id="25" name="Slide Number Placeholder 0"/>
+          <p:cNvSpPr>
+            <a:spLocks noGrp="1"/>
+          </p:cNvSpPr>
+          <p:nvPr>
+            <p:ph type="sldNum" sz="quarter" idx="4294967295"/>
+          </p:nvPr>
+        </p:nvSpPr>
+        <p:spPr>
+          <a:xfrm>
+            <a:off x="11292840" y="6556248"/>
+            <a:ext cx="548640" cy="256032"/>
+          </a:xfrm>
+          <a:prstGeom prst="rect">
+            <a:avLst/>
+          </a:prstGeom>
+          <a:extLst>
+            <a:ext uri="{C572A759-6A51-4108-AA02-DFA0A04FC94B}">
+              <ma14:wrappingTextBoxFlag xmlns:ma14="http://schemas.microsoft.com/office/mac/drawingml/2011/main" val="0"/>
+            </a:ext>
+          </a:extLst>
+        </p:spPr>
+        <p:txBody>
+          <a:bodyPr/>
+          <a:lstStyle>
+            <a:lvl1pPr>
+              <a:defRPr sz="900">
+                <a:solidFill>
+                  <a:srgbClr val="1B3A6B"/>
+                </a:solidFill>
+                <a:latin typeface="Arial"/>
+                <a:ea typeface="Arial"/>
+                <a:cs typeface="Arial"/>
+              </a:defRPr>
+            </a:lvl1pPr>
+          </a:lstStyle>
+          <a:p>
+            <a:pPr algn="r"/>
+            <a:fld id="{F7021451-1387-4CA6-816F-3879F97B5CBC}" type="slidenum">
+              <a:rPr b="1" lang="en-US"/>
+              <a:t>20</a:t>
+            </a:fld>
+            <a:endParaRPr lang="en-US"/>
           </a:p>
         </p:txBody>
       </p:sp>
@@ -10861,7 +11623,7 @@
         </p:blipFill>
         <p:spPr>
           <a:xfrm>
-            <a:off x="411480" y="6547104"/>
+            <a:off x="548640" y="6547104"/>
             <a:ext cx="274320" cy="274320"/>
           </a:xfrm>
           <a:prstGeom prst="rect">
@@ -10877,7 +11639,7 @@
         </p:nvSpPr>
         <p:spPr>
           <a:xfrm>
-            <a:off x="749808" y="6528816"/>
+            <a:off x="886968" y="6528816"/>
             <a:ext cx="6400800" cy="310896"/>
           </a:xfrm>
           <a:prstGeom prst="rect">
@@ -10917,7 +11679,7 @@
         <p:spPr>
           <a:xfrm>
             <a:off x="7132320" y="6528816"/>
-            <a:ext cx="4663440" cy="310896"/>
+            <a:ext cx="4023360" cy="310896"/>
           </a:xfrm>
           <a:prstGeom prst="rect">
             <a:avLst/>
@@ -10955,7 +11717,7 @@
         </p:nvSpPr>
         <p:spPr>
           <a:xfrm>
-            <a:off x="411480" y="384048"/>
+            <a:off x="548640" y="384048"/>
             <a:ext cx="82296" cy="658368"/>
           </a:xfrm>
           <a:prstGeom prst="rect">
@@ -10975,7 +11737,7 @@
         </p:nvSpPr>
         <p:spPr>
           <a:xfrm>
-            <a:off x="640080" y="292608"/>
+            <a:off x="777240" y="292608"/>
             <a:ext cx="10972800" cy="274320"/>
           </a:xfrm>
           <a:prstGeom prst="rect">
@@ -11014,8 +11776,8 @@
         </p:nvSpPr>
         <p:spPr>
           <a:xfrm>
-            <a:off x="640080" y="530352"/>
-            <a:ext cx="11155680" cy="566928"/>
+            <a:off x="777240" y="530352"/>
+            <a:ext cx="10881360" cy="566928"/>
           </a:xfrm>
           <a:prstGeom prst="rect">
             <a:avLst/>
@@ -11128,6 +11890,54 @@
               <a:t>9. 'E essa história de Fio B / mudança de regra?' → A economia acompanha as regras e a tarifa; mostramos a conta; contrato prevê o ajuste.</a:t>
             </a:r>
             <a:endParaRPr lang="en-US" sz="1400" dirty="0"/>
+          </a:p>
+        </p:txBody>
+      </p:sp>
+      <p:sp>
+        <p:nvSpPr>
+          <p:cNvPr id="25" name="Slide Number Placeholder 0"/>
+          <p:cNvSpPr>
+            <a:spLocks noGrp="1"/>
+          </p:cNvSpPr>
+          <p:nvPr>
+            <p:ph type="sldNum" sz="quarter" idx="4294967295"/>
+          </p:nvPr>
+        </p:nvSpPr>
+        <p:spPr>
+          <a:xfrm>
+            <a:off x="11292840" y="6556248"/>
+            <a:ext cx="548640" cy="256032"/>
+          </a:xfrm>
+          <a:prstGeom prst="rect">
+            <a:avLst/>
+          </a:prstGeom>
+          <a:extLst>
+            <a:ext uri="{C572A759-6A51-4108-AA02-DFA0A04FC94B}">
+              <ma14:wrappingTextBoxFlag xmlns:ma14="http://schemas.microsoft.com/office/mac/drawingml/2011/main" val="0"/>
+            </a:ext>
+          </a:extLst>
+        </p:spPr>
+        <p:txBody>
+          <a:bodyPr/>
+          <a:lstStyle>
+            <a:lvl1pPr>
+              <a:defRPr sz="900">
+                <a:solidFill>
+                  <a:srgbClr val="1B3A6B"/>
+                </a:solidFill>
+                <a:latin typeface="Arial"/>
+                <a:ea typeface="Arial"/>
+                <a:cs typeface="Arial"/>
+              </a:defRPr>
+            </a:lvl1pPr>
+          </a:lstStyle>
+          <a:p>
+            <a:pPr algn="r"/>
+            <a:fld id="{F7021451-1387-4CA6-816F-3879F97B5CBC}" type="slidenum">
+              <a:rPr b="1" lang="en-US"/>
+              <a:t>21</a:t>
+            </a:fld>
+            <a:endParaRPr lang="en-US"/>
           </a:p>
         </p:txBody>
       </p:sp>
@@ -11204,7 +12014,7 @@
         </p:blipFill>
         <p:spPr>
           <a:xfrm>
-            <a:off x="411480" y="6547104"/>
+            <a:off x="548640" y="6547104"/>
             <a:ext cx="274320" cy="274320"/>
           </a:xfrm>
           <a:prstGeom prst="rect">
@@ -11220,7 +12030,7 @@
         </p:nvSpPr>
         <p:spPr>
           <a:xfrm>
-            <a:off x="749808" y="6528816"/>
+            <a:off x="886968" y="6528816"/>
             <a:ext cx="6400800" cy="310896"/>
           </a:xfrm>
           <a:prstGeom prst="rect">
@@ -11260,7 +12070,7 @@
         <p:spPr>
           <a:xfrm>
             <a:off x="7132320" y="6528816"/>
-            <a:ext cx="4663440" cy="310896"/>
+            <a:ext cx="4023360" cy="310896"/>
           </a:xfrm>
           <a:prstGeom prst="rect">
             <a:avLst/>
@@ -11298,7 +12108,7 @@
         </p:nvSpPr>
         <p:spPr>
           <a:xfrm>
-            <a:off x="411480" y="384048"/>
+            <a:off x="548640" y="384048"/>
             <a:ext cx="82296" cy="658368"/>
           </a:xfrm>
           <a:prstGeom prst="rect">
@@ -11318,7 +12128,7 @@
         </p:nvSpPr>
         <p:spPr>
           <a:xfrm>
-            <a:off x="640080" y="292608"/>
+            <a:off x="777240" y="292608"/>
             <a:ext cx="10972800" cy="274320"/>
           </a:xfrm>
           <a:prstGeom prst="rect">
@@ -11357,8 +12167,8 @@
         </p:nvSpPr>
         <p:spPr>
           <a:xfrm>
-            <a:off x="640080" y="530352"/>
-            <a:ext cx="11155680" cy="566928"/>
+            <a:off x="777240" y="530352"/>
+            <a:ext cx="10881360" cy="566928"/>
           </a:xfrm>
           <a:prstGeom prst="rect">
             <a:avLst/>
@@ -11398,8 +12208,8 @@
         </p:nvSpPr>
         <p:spPr>
           <a:xfrm>
-            <a:off x="411480" y="2651760"/>
-            <a:ext cx="5779008" cy="1463040"/>
+            <a:off x="548640" y="2651760"/>
+            <a:ext cx="5596128" cy="1463040"/>
           </a:xfrm>
           <a:prstGeom prst="chevron">
             <a:avLst/>
@@ -11423,8 +12233,8 @@
         </p:nvSpPr>
         <p:spPr>
           <a:xfrm>
-            <a:off x="731520" y="2651760"/>
-            <a:ext cx="5257800" cy="1463040"/>
+            <a:off x="868680" y="2651760"/>
+            <a:ext cx="5074920" cy="1463040"/>
           </a:xfrm>
           <a:prstGeom prst="rect">
             <a:avLst/>
@@ -11464,8 +12274,8 @@
         </p:nvSpPr>
         <p:spPr>
           <a:xfrm>
-            <a:off x="6080760" y="2651760"/>
-            <a:ext cx="5779008" cy="1463040"/>
+            <a:off x="6035040" y="2651760"/>
+            <a:ext cx="5596128" cy="1463040"/>
           </a:xfrm>
           <a:prstGeom prst="chevron">
             <a:avLst/>
@@ -11489,8 +12299,8 @@
         </p:nvSpPr>
         <p:spPr>
           <a:xfrm>
-            <a:off x="6400800" y="2651760"/>
-            <a:ext cx="5257800" cy="1463040"/>
+            <a:off x="6355080" y="2651760"/>
+            <a:ext cx="5074920" cy="1463040"/>
           </a:xfrm>
           <a:prstGeom prst="rect">
             <a:avLst/>
@@ -11519,6 +12329,54 @@
               <a:t>'Claro. O que falta para decidir?' + data de retorno + resumo por escrito com a economia anual.</a:t>
             </a:r>
             <a:endParaRPr lang="en-US" sz="1500" dirty="0"/>
+          </a:p>
+        </p:txBody>
+      </p:sp>
+      <p:sp>
+        <p:nvSpPr>
+          <p:cNvPr id="25" name="Slide Number Placeholder 0"/>
+          <p:cNvSpPr>
+            <a:spLocks noGrp="1"/>
+          </p:cNvSpPr>
+          <p:nvPr>
+            <p:ph type="sldNum" sz="quarter" idx="4294967295"/>
+          </p:nvPr>
+        </p:nvSpPr>
+        <p:spPr>
+          <a:xfrm>
+            <a:off x="11292840" y="6556248"/>
+            <a:ext cx="548640" cy="256032"/>
+          </a:xfrm>
+          <a:prstGeom prst="rect">
+            <a:avLst/>
+          </a:prstGeom>
+          <a:extLst>
+            <a:ext uri="{C572A759-6A51-4108-AA02-DFA0A04FC94B}">
+              <ma14:wrappingTextBoxFlag xmlns:ma14="http://schemas.microsoft.com/office/mac/drawingml/2011/main" val="0"/>
+            </a:ext>
+          </a:extLst>
+        </p:spPr>
+        <p:txBody>
+          <a:bodyPr/>
+          <a:lstStyle>
+            <a:lvl1pPr>
+              <a:defRPr sz="900">
+                <a:solidFill>
+                  <a:srgbClr val="1B3A6B"/>
+                </a:solidFill>
+                <a:latin typeface="Arial"/>
+                <a:ea typeface="Arial"/>
+                <a:cs typeface="Arial"/>
+              </a:defRPr>
+            </a:lvl1pPr>
+          </a:lstStyle>
+          <a:p>
+            <a:pPr algn="r"/>
+            <a:fld id="{F7021451-1387-4CA6-816F-3879F97B5CBC}" type="slidenum">
+              <a:rPr b="1" lang="en-US"/>
+              <a:t>22</a:t>
+            </a:fld>
+            <a:endParaRPr lang="en-US"/>
           </a:p>
         </p:txBody>
       </p:sp>
@@ -11595,7 +12453,7 @@
         </p:blipFill>
         <p:spPr>
           <a:xfrm>
-            <a:off x="411480" y="6547104"/>
+            <a:off x="548640" y="6547104"/>
             <a:ext cx="274320" cy="274320"/>
           </a:xfrm>
           <a:prstGeom prst="rect">
@@ -11611,7 +12469,7 @@
         </p:nvSpPr>
         <p:spPr>
           <a:xfrm>
-            <a:off x="749808" y="6528816"/>
+            <a:off x="886968" y="6528816"/>
             <a:ext cx="6400800" cy="310896"/>
           </a:xfrm>
           <a:prstGeom prst="rect">
@@ -11651,7 +12509,7 @@
         <p:spPr>
           <a:xfrm>
             <a:off x="7132320" y="6528816"/>
-            <a:ext cx="4663440" cy="310896"/>
+            <a:ext cx="4023360" cy="310896"/>
           </a:xfrm>
           <a:prstGeom prst="rect">
             <a:avLst/>
@@ -11689,7 +12547,7 @@
         </p:nvSpPr>
         <p:spPr>
           <a:xfrm>
-            <a:off x="411480" y="384048"/>
+            <a:off x="548640" y="384048"/>
             <a:ext cx="82296" cy="658368"/>
           </a:xfrm>
           <a:prstGeom prst="rect">
@@ -11709,7 +12567,7 @@
         </p:nvSpPr>
         <p:spPr>
           <a:xfrm>
-            <a:off x="640080" y="292608"/>
+            <a:off x="777240" y="292608"/>
             <a:ext cx="10972800" cy="274320"/>
           </a:xfrm>
           <a:prstGeom prst="rect">
@@ -11748,8 +12606,8 @@
         </p:nvSpPr>
         <p:spPr>
           <a:xfrm>
-            <a:off x="640080" y="530352"/>
-            <a:ext cx="11155680" cy="566928"/>
+            <a:off x="777240" y="530352"/>
+            <a:ext cx="10881360" cy="566928"/>
           </a:xfrm>
           <a:prstGeom prst="rect">
             <a:avLst/>
@@ -11789,8 +12647,8 @@
         </p:nvSpPr>
         <p:spPr>
           <a:xfrm>
-            <a:off x="411480" y="1325880"/>
-            <a:ext cx="5577840" cy="2331720"/>
+            <a:off x="548640" y="1325880"/>
+            <a:ext cx="5431536" cy="2331720"/>
           </a:xfrm>
           <a:prstGeom prst="roundRect">
             <a:avLst>
@@ -11823,7 +12681,7 @@
         </p:nvSpPr>
         <p:spPr>
           <a:xfrm>
-            <a:off x="594360" y="1508760"/>
+            <a:off x="731520" y="1508760"/>
             <a:ext cx="457200" cy="457200"/>
           </a:xfrm>
           <a:prstGeom prst="ellipse">
@@ -11843,7 +12701,7 @@
         </p:nvSpPr>
         <p:spPr>
           <a:xfrm>
-            <a:off x="594360" y="1508760"/>
+            <a:off x="731520" y="1508760"/>
             <a:ext cx="457200" cy="457200"/>
           </a:xfrm>
           <a:prstGeom prst="rect">
@@ -11882,8 +12740,8 @@
         </p:nvSpPr>
         <p:spPr>
           <a:xfrm>
-            <a:off x="1188720" y="1435608"/>
-            <a:ext cx="4663440" cy="2112264"/>
+            <a:off x="1325880" y="1435608"/>
+            <a:ext cx="4517136" cy="2112264"/>
           </a:xfrm>
           <a:prstGeom prst="rect">
             <a:avLst/>
@@ -11923,8 +12781,8 @@
         </p:nvSpPr>
         <p:spPr>
           <a:xfrm>
-            <a:off x="6217920" y="1325880"/>
-            <a:ext cx="5577840" cy="2331720"/>
+            <a:off x="6208776" y="1325880"/>
+            <a:ext cx="5431536" cy="2331720"/>
           </a:xfrm>
           <a:prstGeom prst="roundRect">
             <a:avLst>
@@ -11957,7 +12815,7 @@
         </p:nvSpPr>
         <p:spPr>
           <a:xfrm>
-            <a:off x="6400800" y="1508760"/>
+            <a:off x="6391656" y="1508760"/>
             <a:ext cx="457200" cy="457200"/>
           </a:xfrm>
           <a:prstGeom prst="ellipse">
@@ -11977,7 +12835,7 @@
         </p:nvSpPr>
         <p:spPr>
           <a:xfrm>
-            <a:off x="6400800" y="1508760"/>
+            <a:off x="6391656" y="1508760"/>
             <a:ext cx="457200" cy="457200"/>
           </a:xfrm>
           <a:prstGeom prst="rect">
@@ -12016,8 +12874,8 @@
         </p:nvSpPr>
         <p:spPr>
           <a:xfrm>
-            <a:off x="6995160" y="1435608"/>
-            <a:ext cx="4663440" cy="2112264"/>
+            <a:off x="6986016" y="1435608"/>
+            <a:ext cx="4517136" cy="2112264"/>
           </a:xfrm>
           <a:prstGeom prst="rect">
             <a:avLst/>
@@ -12057,8 +12915,8 @@
         </p:nvSpPr>
         <p:spPr>
           <a:xfrm>
-            <a:off x="411480" y="3886200"/>
-            <a:ext cx="5577840" cy="2331720"/>
+            <a:off x="548640" y="3886200"/>
+            <a:ext cx="5431536" cy="2331720"/>
           </a:xfrm>
           <a:prstGeom prst="roundRect">
             <a:avLst>
@@ -12091,7 +12949,7 @@
         </p:nvSpPr>
         <p:spPr>
           <a:xfrm>
-            <a:off x="594360" y="4069080"/>
+            <a:off x="731520" y="4069080"/>
             <a:ext cx="457200" cy="457200"/>
           </a:xfrm>
           <a:prstGeom prst="ellipse">
@@ -12111,7 +12969,7 @@
         </p:nvSpPr>
         <p:spPr>
           <a:xfrm>
-            <a:off x="594360" y="4069080"/>
+            <a:off x="731520" y="4069080"/>
             <a:ext cx="457200" cy="457200"/>
           </a:xfrm>
           <a:prstGeom prst="rect">
@@ -12150,8 +13008,8 @@
         </p:nvSpPr>
         <p:spPr>
           <a:xfrm>
-            <a:off x="1188720" y="3995928"/>
-            <a:ext cx="4663440" cy="2112264"/>
+            <a:off x="1325880" y="3995928"/>
+            <a:ext cx="4517136" cy="2112264"/>
           </a:xfrm>
           <a:prstGeom prst="rect">
             <a:avLst/>
@@ -12191,8 +13049,8 @@
         </p:nvSpPr>
         <p:spPr>
           <a:xfrm>
-            <a:off x="6217920" y="3886200"/>
-            <a:ext cx="5577840" cy="2331720"/>
+            <a:off x="6208776" y="3886200"/>
+            <a:ext cx="5431536" cy="2331720"/>
           </a:xfrm>
           <a:prstGeom prst="roundRect">
             <a:avLst>
@@ -12225,7 +13083,7 @@
         </p:nvSpPr>
         <p:spPr>
           <a:xfrm>
-            <a:off x="6400800" y="4069080"/>
+            <a:off x="6391656" y="4069080"/>
             <a:ext cx="457200" cy="457200"/>
           </a:xfrm>
           <a:prstGeom prst="ellipse">
@@ -12245,7 +13103,7 @@
         </p:nvSpPr>
         <p:spPr>
           <a:xfrm>
-            <a:off x="6400800" y="4069080"/>
+            <a:off x="6391656" y="4069080"/>
             <a:ext cx="457200" cy="457200"/>
           </a:xfrm>
           <a:prstGeom prst="rect">
@@ -12284,8 +13142,8 @@
         </p:nvSpPr>
         <p:spPr>
           <a:xfrm>
-            <a:off x="6995160" y="3995928"/>
-            <a:ext cx="4663440" cy="2112264"/>
+            <a:off x="6986016" y="3995928"/>
+            <a:ext cx="4517136" cy="2112264"/>
           </a:xfrm>
           <a:prstGeom prst="rect">
             <a:avLst/>
@@ -12314,6 +13172,54 @@
               <a:t>timing — respostas curtas, verdadeiras e com o número do cliente</a:t>
             </a:r>
             <a:endParaRPr lang="en-US" sz="1800" dirty="0"/>
+          </a:p>
+        </p:txBody>
+      </p:sp>
+      <p:sp>
+        <p:nvSpPr>
+          <p:cNvPr id="25" name="Slide Number Placeholder 0"/>
+          <p:cNvSpPr>
+            <a:spLocks noGrp="1"/>
+          </p:cNvSpPr>
+          <p:nvPr>
+            <p:ph type="sldNum" sz="quarter" idx="4294967295"/>
+          </p:nvPr>
+        </p:nvSpPr>
+        <p:spPr>
+          <a:xfrm>
+            <a:off x="11292840" y="6556248"/>
+            <a:ext cx="548640" cy="256032"/>
+          </a:xfrm>
+          <a:prstGeom prst="rect">
+            <a:avLst/>
+          </a:prstGeom>
+          <a:extLst>
+            <a:ext uri="{C572A759-6A51-4108-AA02-DFA0A04FC94B}">
+              <ma14:wrappingTextBoxFlag xmlns:ma14="http://schemas.microsoft.com/office/mac/drawingml/2011/main" val="0"/>
+            </a:ext>
+          </a:extLst>
+        </p:spPr>
+        <p:txBody>
+          <a:bodyPr/>
+          <a:lstStyle>
+            <a:lvl1pPr>
+              <a:defRPr sz="900">
+                <a:solidFill>
+                  <a:srgbClr val="1B3A6B"/>
+                </a:solidFill>
+                <a:latin typeface="Arial"/>
+                <a:ea typeface="Arial"/>
+                <a:cs typeface="Arial"/>
+              </a:defRPr>
+            </a:lvl1pPr>
+          </a:lstStyle>
+          <a:p>
+            <a:pPr algn="r"/>
+            <a:fld id="{F7021451-1387-4CA6-816F-3879F97B5CBC}" type="slidenum">
+              <a:rPr b="1" lang="en-US"/>
+              <a:t>23</a:t>
+            </a:fld>
+            <a:endParaRPr lang="en-US"/>
           </a:p>
         </p:txBody>
       </p:sp>
@@ -12377,6 +13283,45 @@
         </p:nvSpPr>
         <p:spPr>
           <a:xfrm>
+            <a:off x="457200" y="548640"/>
+            <a:ext cx="3474720" cy="1737360"/>
+          </a:xfrm>
+          <a:prstGeom prst="rect">
+            <a:avLst/>
+          </a:prstGeom>
+          <a:noFill/>
+          <a:ln/>
+        </p:spPr>
+        <p:txBody>
+          <a:bodyPr wrap="square" rtlCol="0" anchor="ctr"/>
+          <a:lstStyle/>
+          <a:p>
+            <a:pPr indent="0" marL="0">
+              <a:buNone/>
+            </a:pPr>
+            <a:r>
+              <a:rPr lang="en-US" sz="11000" b="1" dirty="0">
+                <a:solidFill>
+                  <a:srgbClr val="11396F"/>
+                </a:solidFill>
+                <a:latin typeface="Arial" pitchFamily="34" charset="0"/>
+                <a:ea typeface="Arial" pitchFamily="34" charset="-122"/>
+                <a:cs typeface="Arial" pitchFamily="34" charset="-120"/>
+              </a:rPr>
+              <a:t>05</a:t>
+            </a:r>
+            <a:endParaRPr lang="en-US" sz="11000" dirty="0"/>
+          </a:p>
+        </p:txBody>
+      </p:sp>
+      <p:sp>
+        <p:nvSpPr>
+          <p:cNvPr id="4" name="Text 2"/>
+          <p:cNvSpPr/>
+          <p:nvPr/>
+        </p:nvSpPr>
+        <p:spPr>
+          <a:xfrm>
             <a:off x="548640" y="2194560"/>
             <a:ext cx="3291840" cy="548640"/>
           </a:xfrm>
@@ -12410,7 +13355,46 @@
       </p:sp>
       <p:sp>
         <p:nvSpPr>
-          <p:cNvPr id="4" name="Text 2"/>
+          <p:cNvPr id="5" name="Text 3"/>
+          <p:cNvSpPr/>
+          <p:nvPr/>
+        </p:nvSpPr>
+        <p:spPr>
+          <a:xfrm>
+            <a:off x="548640" y="3200400"/>
+            <a:ext cx="3383280" cy="457200"/>
+          </a:xfrm>
+          <a:prstGeom prst="rect">
+            <a:avLst/>
+          </a:prstGeom>
+          <a:noFill/>
+          <a:ln/>
+        </p:spPr>
+        <p:txBody>
+          <a:bodyPr wrap="square" rtlCol="0" anchor="ctr"/>
+          <a:lstStyle/>
+          <a:p>
+            <a:pPr indent="0" marL="0">
+              <a:buNone/>
+            </a:pPr>
+            <a:r>
+              <a:rPr lang="en-US" sz="1100" dirty="0">
+                <a:solidFill>
+                  <a:srgbClr val="C7D2E3"/>
+                </a:solidFill>
+                <a:latin typeface="Arial" pitchFamily="34" charset="0"/>
+                <a:ea typeface="Arial" pitchFamily="34" charset="-122"/>
+                <a:cs typeface="Arial" pitchFamily="34" charset="-120"/>
+              </a:rPr>
+              <a:t>M5 · Etapa 3 · Operação ponta a ponta</a:t>
+            </a:r>
+            <a:endParaRPr lang="en-US" sz="1100" dirty="0"/>
+          </a:p>
+        </p:txBody>
+      </p:sp>
+      <p:sp>
+        <p:nvSpPr>
+          <p:cNvPr id="6" name="Text 4"/>
           <p:cNvSpPr/>
           <p:nvPr/>
         </p:nvSpPr>
@@ -12449,7 +13433,7 @@
       </p:sp>
       <p:pic>
         <p:nvPicPr>
-          <p:cNvPr id="5" name="Image 0" descr="/www/wwwroot/rexar/gdsolar/docs/curso/slides/assets/logo-gdsolar.png">    </p:cNvPr>
+          <p:cNvPr id="7" name="Image 0" descr="/www/wwwroot/rexar/gdsolar/docs/curso/slides/assets/logo-gdsolar.png">    </p:cNvPr>
           <p:cNvPicPr>
             <a:picLocks noChangeAspect="1"/>
           </p:cNvPicPr>
@@ -12473,7 +13457,7 @@
       </p:pic>
       <p:sp>
         <p:nvSpPr>
-          <p:cNvPr id="6" name="Text 3"/>
+          <p:cNvPr id="8" name="Text 5"/>
           <p:cNvSpPr/>
           <p:nvPr/>
         </p:nvSpPr>
@@ -12514,7 +13498,7 @@
       </p:sp>
       <p:sp>
         <p:nvSpPr>
-          <p:cNvPr id="7" name="Text 4"/>
+          <p:cNvPr id="9" name="Text 6"/>
           <p:cNvSpPr/>
           <p:nvPr/>
         </p:nvSpPr>
@@ -12555,7 +13539,7 @@
       </p:sp>
       <p:sp>
         <p:nvSpPr>
-          <p:cNvPr id="8" name="Text 5"/>
+          <p:cNvPr id="10" name="Text 7"/>
           <p:cNvSpPr/>
           <p:nvPr/>
         </p:nvSpPr>
@@ -12734,7 +13718,7 @@
         </p:blipFill>
         <p:spPr>
           <a:xfrm>
-            <a:off x="411480" y="6547104"/>
+            <a:off x="548640" y="6547104"/>
             <a:ext cx="274320" cy="274320"/>
           </a:xfrm>
           <a:prstGeom prst="rect">
@@ -12750,7 +13734,7 @@
         </p:nvSpPr>
         <p:spPr>
           <a:xfrm>
-            <a:off x="749808" y="6528816"/>
+            <a:off x="886968" y="6528816"/>
             <a:ext cx="6400800" cy="310896"/>
           </a:xfrm>
           <a:prstGeom prst="rect">
@@ -12790,7 +13774,7 @@
         <p:spPr>
           <a:xfrm>
             <a:off x="7132320" y="6528816"/>
-            <a:ext cx="4663440" cy="310896"/>
+            <a:ext cx="4023360" cy="310896"/>
           </a:xfrm>
           <a:prstGeom prst="rect">
             <a:avLst/>
@@ -12828,7 +13812,7 @@
         </p:nvSpPr>
         <p:spPr>
           <a:xfrm>
-            <a:off x="411480" y="384048"/>
+            <a:off x="548640" y="384048"/>
             <a:ext cx="82296" cy="658368"/>
           </a:xfrm>
           <a:prstGeom prst="rect">
@@ -12848,7 +13832,7 @@
         </p:nvSpPr>
         <p:spPr>
           <a:xfrm>
-            <a:off x="640080" y="292608"/>
+            <a:off x="777240" y="292608"/>
             <a:ext cx="10972800" cy="274320"/>
           </a:xfrm>
           <a:prstGeom prst="rect">
@@ -12887,8 +13871,8 @@
         </p:nvSpPr>
         <p:spPr>
           <a:xfrm>
-            <a:off x="640080" y="530352"/>
-            <a:ext cx="11155680" cy="566928"/>
+            <a:off x="777240" y="530352"/>
+            <a:ext cx="10881360" cy="566928"/>
           </a:xfrm>
           <a:prstGeom prst="rect">
             <a:avLst/>
@@ -12928,8 +13912,8 @@
         </p:nvSpPr>
         <p:spPr>
           <a:xfrm>
-            <a:off x="411480" y="2651760"/>
-            <a:ext cx="1999488" cy="1463040"/>
+            <a:off x="548640" y="2651760"/>
+            <a:ext cx="1938528" cy="1463040"/>
           </a:xfrm>
           <a:prstGeom prst="chevron">
             <a:avLst/>
@@ -12953,8 +13937,8 @@
         </p:nvSpPr>
         <p:spPr>
           <a:xfrm>
-            <a:off x="731520" y="2651760"/>
-            <a:ext cx="1478280" cy="1463040"/>
+            <a:off x="868680" y="2651760"/>
+            <a:ext cx="1417320" cy="1463040"/>
           </a:xfrm>
           <a:prstGeom prst="rect">
             <a:avLst/>
@@ -12994,8 +13978,8 @@
         </p:nvSpPr>
         <p:spPr>
           <a:xfrm>
-            <a:off x="2301240" y="2651760"/>
-            <a:ext cx="1999488" cy="1463040"/>
+            <a:off x="2377440" y="2651760"/>
+            <a:ext cx="1938528" cy="1463040"/>
           </a:xfrm>
           <a:prstGeom prst="chevron">
             <a:avLst/>
@@ -13019,8 +14003,8 @@
         </p:nvSpPr>
         <p:spPr>
           <a:xfrm>
-            <a:off x="2621280" y="2651760"/>
-            <a:ext cx="1478280" cy="1463040"/>
+            <a:off x="2697480" y="2651760"/>
+            <a:ext cx="1417320" cy="1463040"/>
           </a:xfrm>
           <a:prstGeom prst="rect">
             <a:avLst/>
@@ -13060,8 +14044,8 @@
         </p:nvSpPr>
         <p:spPr>
           <a:xfrm>
-            <a:off x="4191000" y="2651760"/>
-            <a:ext cx="1999488" cy="1463040"/>
+            <a:off x="4206240" y="2651760"/>
+            <a:ext cx="1938528" cy="1463040"/>
           </a:xfrm>
           <a:prstGeom prst="chevron">
             <a:avLst/>
@@ -13085,8 +14069,8 @@
         </p:nvSpPr>
         <p:spPr>
           <a:xfrm>
-            <a:off x="4511040" y="2651760"/>
-            <a:ext cx="1478280" cy="1463040"/>
+            <a:off x="4526280" y="2651760"/>
+            <a:ext cx="1417320" cy="1463040"/>
           </a:xfrm>
           <a:prstGeom prst="rect">
             <a:avLst/>
@@ -13126,8 +14110,8 @@
         </p:nvSpPr>
         <p:spPr>
           <a:xfrm>
-            <a:off x="6080760" y="2651760"/>
-            <a:ext cx="1999488" cy="1463040"/>
+            <a:off x="6035040" y="2651760"/>
+            <a:ext cx="1938528" cy="1463040"/>
           </a:xfrm>
           <a:prstGeom prst="chevron">
             <a:avLst/>
@@ -13151,8 +14135,8 @@
         </p:nvSpPr>
         <p:spPr>
           <a:xfrm>
-            <a:off x="6400800" y="2651760"/>
-            <a:ext cx="1478280" cy="1463040"/>
+            <a:off x="6355080" y="2651760"/>
+            <a:ext cx="1417320" cy="1463040"/>
           </a:xfrm>
           <a:prstGeom prst="rect">
             <a:avLst/>
@@ -13192,8 +14176,8 @@
         </p:nvSpPr>
         <p:spPr>
           <a:xfrm>
-            <a:off x="7970520" y="2651760"/>
-            <a:ext cx="1999488" cy="1463040"/>
+            <a:off x="7863840" y="2651760"/>
+            <a:ext cx="1938528" cy="1463040"/>
           </a:xfrm>
           <a:prstGeom prst="chevron">
             <a:avLst/>
@@ -13217,8 +14201,8 @@
         </p:nvSpPr>
         <p:spPr>
           <a:xfrm>
-            <a:off x="8290560" y="2651760"/>
-            <a:ext cx="1478280" cy="1463040"/>
+            <a:off x="8183880" y="2651760"/>
+            <a:ext cx="1417320" cy="1463040"/>
           </a:xfrm>
           <a:prstGeom prst="rect">
             <a:avLst/>
@@ -13258,8 +14242,8 @@
         </p:nvSpPr>
         <p:spPr>
           <a:xfrm>
-            <a:off x="9860280" y="2651760"/>
-            <a:ext cx="1999488" cy="1463040"/>
+            <a:off x="9692640" y="2651760"/>
+            <a:ext cx="1938528" cy="1463040"/>
           </a:xfrm>
           <a:prstGeom prst="chevron">
             <a:avLst/>
@@ -13283,8 +14267,8 @@
         </p:nvSpPr>
         <p:spPr>
           <a:xfrm>
-            <a:off x="10180320" y="2651760"/>
-            <a:ext cx="1478280" cy="1463040"/>
+            <a:off x="10012680" y="2651760"/>
+            <a:ext cx="1417320" cy="1463040"/>
           </a:xfrm>
           <a:prstGeom prst="rect">
             <a:avLst/>
@@ -13313,6 +14297,54 @@
               <a:t>No rateio</a:t>
             </a:r>
             <a:endParaRPr lang="en-US" sz="1200" dirty="0"/>
+          </a:p>
+        </p:txBody>
+      </p:sp>
+      <p:sp>
+        <p:nvSpPr>
+          <p:cNvPr id="25" name="Slide Number Placeholder 0"/>
+          <p:cNvSpPr>
+            <a:spLocks noGrp="1"/>
+          </p:cNvSpPr>
+          <p:nvPr>
+            <p:ph type="sldNum" sz="quarter" idx="4294967295"/>
+          </p:nvPr>
+        </p:nvSpPr>
+        <p:spPr>
+          <a:xfrm>
+            <a:off x="11292840" y="6556248"/>
+            <a:ext cx="548640" cy="256032"/>
+          </a:xfrm>
+          <a:prstGeom prst="rect">
+            <a:avLst/>
+          </a:prstGeom>
+          <a:extLst>
+            <a:ext uri="{C572A759-6A51-4108-AA02-DFA0A04FC94B}">
+              <ma14:wrappingTextBoxFlag xmlns:ma14="http://schemas.microsoft.com/office/mac/drawingml/2011/main" val="0"/>
+            </a:ext>
+          </a:extLst>
+        </p:spPr>
+        <p:txBody>
+          <a:bodyPr/>
+          <a:lstStyle>
+            <a:lvl1pPr>
+              <a:defRPr sz="900">
+                <a:solidFill>
+                  <a:srgbClr val="1B3A6B"/>
+                </a:solidFill>
+                <a:latin typeface="Arial"/>
+                <a:ea typeface="Arial"/>
+                <a:cs typeface="Arial"/>
+              </a:defRPr>
+            </a:lvl1pPr>
+          </a:lstStyle>
+          <a:p>
+            <a:pPr algn="r"/>
+            <a:fld id="{F7021451-1387-4CA6-816F-3879F97B5CBC}" type="slidenum">
+              <a:rPr b="1" lang="en-US"/>
+              <a:t>25</a:t>
+            </a:fld>
+            <a:endParaRPr lang="en-US"/>
           </a:p>
         </p:txBody>
       </p:sp>
@@ -13389,7 +14421,7 @@
         </p:blipFill>
         <p:spPr>
           <a:xfrm>
-            <a:off x="411480" y="6547104"/>
+            <a:off x="548640" y="6547104"/>
             <a:ext cx="274320" cy="274320"/>
           </a:xfrm>
           <a:prstGeom prst="rect">
@@ -13405,7 +14437,7 @@
         </p:nvSpPr>
         <p:spPr>
           <a:xfrm>
-            <a:off x="749808" y="6528816"/>
+            <a:off x="886968" y="6528816"/>
             <a:ext cx="6400800" cy="310896"/>
           </a:xfrm>
           <a:prstGeom prst="rect">
@@ -13445,7 +14477,7 @@
         <p:spPr>
           <a:xfrm>
             <a:off x="7132320" y="6528816"/>
-            <a:ext cx="4663440" cy="310896"/>
+            <a:ext cx="4023360" cy="310896"/>
           </a:xfrm>
           <a:prstGeom prst="rect">
             <a:avLst/>
@@ -13483,7 +14515,7 @@
         </p:nvSpPr>
         <p:spPr>
           <a:xfrm>
-            <a:off x="411480" y="384048"/>
+            <a:off x="548640" y="384048"/>
             <a:ext cx="82296" cy="658368"/>
           </a:xfrm>
           <a:prstGeom prst="rect">
@@ -13503,7 +14535,7 @@
         </p:nvSpPr>
         <p:spPr>
           <a:xfrm>
-            <a:off x="640080" y="292608"/>
+            <a:off x="777240" y="292608"/>
             <a:ext cx="10972800" cy="274320"/>
           </a:xfrm>
           <a:prstGeom prst="rect">
@@ -13542,8 +14574,8 @@
         </p:nvSpPr>
         <p:spPr>
           <a:xfrm>
-            <a:off x="640080" y="530352"/>
-            <a:ext cx="11155680" cy="566928"/>
+            <a:off x="777240" y="530352"/>
+            <a:ext cx="10881360" cy="566928"/>
           </a:xfrm>
           <a:prstGeom prst="rect">
             <a:avLst/>
@@ -13583,8 +14615,8 @@
         </p:nvSpPr>
         <p:spPr>
           <a:xfrm>
-            <a:off x="411480" y="1325880"/>
-            <a:ext cx="11384280" cy="4937760"/>
+            <a:off x="548640" y="1325880"/>
+            <a:ext cx="11091672" cy="4937760"/>
           </a:xfrm>
           <a:prstGeom prst="roundRect">
             <a:avLst>
@@ -13605,8 +14637,8 @@
         </p:nvSpPr>
         <p:spPr>
           <a:xfrm>
-            <a:off x="777240" y="1554480"/>
-            <a:ext cx="10652760" cy="4480560"/>
+            <a:off x="914400" y="1554480"/>
+            <a:ext cx="10360152" cy="4480560"/>
           </a:xfrm>
           <a:prstGeom prst="rect">
             <a:avLst/>
@@ -13627,7 +14659,7 @@
               <a:buNone/>
             </a:pPr>
             <a:r>
-              <a:rPr lang="en-US" sz="1800" b="1" dirty="0">
+              <a:rPr lang="en-US" sz="2400" b="1" dirty="0">
                 <a:solidFill>
                   <a:srgbClr val="FFFFFF"/>
                 </a:solidFill>
@@ -13637,7 +14669,7 @@
               </a:rPr>
               <a:t>Meta: 540 clientes em 18 meses → 30 clientes/mês</a:t>
             </a:r>
-            <a:endParaRPr lang="en-US" sz="1800" dirty="0"/>
+            <a:endParaRPr lang="en-US" sz="2400" dirty="0"/>
           </a:p>
           <a:p>
             <a:pPr indent="0" marL="0">
@@ -13647,7 +14679,7 @@
               <a:buNone/>
             </a:pPr>
             <a:r>
-              <a:rPr lang="en-US" sz="1800" dirty="0">
+              <a:rPr lang="en-US" sz="2400" dirty="0">
                 <a:solidFill>
                   <a:srgbClr val="FFFFFF"/>
                 </a:solidFill>
@@ -13657,7 +14689,7 @@
               </a:rPr>
               <a:t>Conversão lead → cliente ≈ 14% → ~215 leads/mês</a:t>
             </a:r>
-            <a:endParaRPr lang="en-US" sz="1800" dirty="0"/>
+            <a:endParaRPr lang="en-US" sz="2400" dirty="0"/>
           </a:p>
           <a:p>
             <a:pPr indent="0" marL="0">
@@ -13667,7 +14699,7 @@
               <a:buNone/>
             </a:pPr>
             <a:r>
-              <a:rPr lang="en-US" sz="1800" b="1" dirty="0">
+              <a:rPr lang="en-US" sz="2400" b="1" dirty="0">
                 <a:solidFill>
                   <a:srgbClr val="F7A23B"/>
                 </a:solidFill>
@@ -13677,7 +14709,55 @@
               </a:rPr>
               <a:t>Por consultor (6 clientes/mês) → 5 consultores</a:t>
             </a:r>
-            <a:endParaRPr lang="en-US" sz="1800" dirty="0"/>
+            <a:endParaRPr lang="en-US" sz="2400" dirty="0"/>
+          </a:p>
+        </p:txBody>
+      </p:sp>
+      <p:sp>
+        <p:nvSpPr>
+          <p:cNvPr id="25" name="Slide Number Placeholder 0"/>
+          <p:cNvSpPr>
+            <a:spLocks noGrp="1"/>
+          </p:cNvSpPr>
+          <p:nvPr>
+            <p:ph type="sldNum" sz="quarter" idx="4294967295"/>
+          </p:nvPr>
+        </p:nvSpPr>
+        <p:spPr>
+          <a:xfrm>
+            <a:off x="11292840" y="6556248"/>
+            <a:ext cx="548640" cy="256032"/>
+          </a:xfrm>
+          <a:prstGeom prst="rect">
+            <a:avLst/>
+          </a:prstGeom>
+          <a:extLst>
+            <a:ext uri="{C572A759-6A51-4108-AA02-DFA0A04FC94B}">
+              <ma14:wrappingTextBoxFlag xmlns:ma14="http://schemas.microsoft.com/office/mac/drawingml/2011/main" val="0"/>
+            </a:ext>
+          </a:extLst>
+        </p:spPr>
+        <p:txBody>
+          <a:bodyPr/>
+          <a:lstStyle>
+            <a:lvl1pPr>
+              <a:defRPr sz="900">
+                <a:solidFill>
+                  <a:srgbClr val="1B3A6B"/>
+                </a:solidFill>
+                <a:latin typeface="Arial"/>
+                <a:ea typeface="Arial"/>
+                <a:cs typeface="Arial"/>
+              </a:defRPr>
+            </a:lvl1pPr>
+          </a:lstStyle>
+          <a:p>
+            <a:pPr algn="r"/>
+            <a:fld id="{F7021451-1387-4CA6-816F-3879F97B5CBC}" type="slidenum">
+              <a:rPr b="1" lang="en-US"/>
+              <a:t>26</a:t>
+            </a:fld>
+            <a:endParaRPr lang="en-US"/>
           </a:p>
         </p:txBody>
       </p:sp>
@@ -13754,7 +14834,7 @@
         </p:blipFill>
         <p:spPr>
           <a:xfrm>
-            <a:off x="411480" y="6547104"/>
+            <a:off x="548640" y="6547104"/>
             <a:ext cx="274320" cy="274320"/>
           </a:xfrm>
           <a:prstGeom prst="rect">
@@ -13770,7 +14850,7 @@
         </p:nvSpPr>
         <p:spPr>
           <a:xfrm>
-            <a:off x="749808" y="6528816"/>
+            <a:off x="886968" y="6528816"/>
             <a:ext cx="6400800" cy="310896"/>
           </a:xfrm>
           <a:prstGeom prst="rect">
@@ -13810,7 +14890,7 @@
         <p:spPr>
           <a:xfrm>
             <a:off x="7132320" y="6528816"/>
-            <a:ext cx="4663440" cy="310896"/>
+            <a:ext cx="4023360" cy="310896"/>
           </a:xfrm>
           <a:prstGeom prst="rect">
             <a:avLst/>
@@ -13848,7 +14928,7 @@
         </p:nvSpPr>
         <p:spPr>
           <a:xfrm>
-            <a:off x="411480" y="384048"/>
+            <a:off x="548640" y="384048"/>
             <a:ext cx="82296" cy="658368"/>
           </a:xfrm>
           <a:prstGeom prst="rect">
@@ -13868,7 +14948,7 @@
         </p:nvSpPr>
         <p:spPr>
           <a:xfrm>
-            <a:off x="640080" y="292608"/>
+            <a:off x="777240" y="292608"/>
             <a:ext cx="10972800" cy="274320"/>
           </a:xfrm>
           <a:prstGeom prst="rect">
@@ -13907,8 +14987,8 @@
         </p:nvSpPr>
         <p:spPr>
           <a:xfrm>
-            <a:off x="640080" y="530352"/>
-            <a:ext cx="11155680" cy="566928"/>
+            <a:off x="777240" y="530352"/>
+            <a:ext cx="10881360" cy="566928"/>
           </a:xfrm>
           <a:prstGeom prst="rect">
             <a:avLst/>
@@ -14003,6 +15083,54 @@
               <a:t>✓ Comissão após a 1ª cobrança paga (ex.: 1 mensalidade) + pequena recorrência enquanto o cliente fica (ex.: 2–5% da taxa)</a:t>
             </a:r>
             <a:endParaRPr lang="en-US" sz="1800" dirty="0"/>
+          </a:p>
+        </p:txBody>
+      </p:sp>
+      <p:sp>
+        <p:nvSpPr>
+          <p:cNvPr id="25" name="Slide Number Placeholder 0"/>
+          <p:cNvSpPr>
+            <a:spLocks noGrp="1"/>
+          </p:cNvSpPr>
+          <p:nvPr>
+            <p:ph type="sldNum" sz="quarter" idx="4294967295"/>
+          </p:nvPr>
+        </p:nvSpPr>
+        <p:spPr>
+          <a:xfrm>
+            <a:off x="11292840" y="6556248"/>
+            <a:ext cx="548640" cy="256032"/>
+          </a:xfrm>
+          <a:prstGeom prst="rect">
+            <a:avLst/>
+          </a:prstGeom>
+          <a:extLst>
+            <a:ext uri="{C572A759-6A51-4108-AA02-DFA0A04FC94B}">
+              <ma14:wrappingTextBoxFlag xmlns:ma14="http://schemas.microsoft.com/office/mac/drawingml/2011/main" val="0"/>
+            </a:ext>
+          </a:extLst>
+        </p:spPr>
+        <p:txBody>
+          <a:bodyPr/>
+          <a:lstStyle>
+            <a:lvl1pPr>
+              <a:defRPr sz="900">
+                <a:solidFill>
+                  <a:srgbClr val="1B3A6B"/>
+                </a:solidFill>
+                <a:latin typeface="Arial"/>
+                <a:ea typeface="Arial"/>
+                <a:cs typeface="Arial"/>
+              </a:defRPr>
+            </a:lvl1pPr>
+          </a:lstStyle>
+          <a:p>
+            <a:pPr algn="r"/>
+            <a:fld id="{F7021451-1387-4CA6-816F-3879F97B5CBC}" type="slidenum">
+              <a:rPr b="1" lang="en-US"/>
+              <a:t>27</a:t>
+            </a:fld>
+            <a:endParaRPr lang="en-US"/>
           </a:p>
         </p:txBody>
       </p:sp>
@@ -14079,7 +15207,7 @@
         </p:blipFill>
         <p:spPr>
           <a:xfrm>
-            <a:off x="411480" y="6547104"/>
+            <a:off x="548640" y="6547104"/>
             <a:ext cx="274320" cy="274320"/>
           </a:xfrm>
           <a:prstGeom prst="rect">
@@ -14095,7 +15223,7 @@
         </p:nvSpPr>
         <p:spPr>
           <a:xfrm>
-            <a:off x="749808" y="6528816"/>
+            <a:off x="886968" y="6528816"/>
             <a:ext cx="6400800" cy="310896"/>
           </a:xfrm>
           <a:prstGeom prst="rect">
@@ -14135,7 +15263,7 @@
         <p:spPr>
           <a:xfrm>
             <a:off x="7132320" y="6528816"/>
-            <a:ext cx="4663440" cy="310896"/>
+            <a:ext cx="4023360" cy="310896"/>
           </a:xfrm>
           <a:prstGeom prst="rect">
             <a:avLst/>
@@ -14173,7 +15301,7 @@
         </p:nvSpPr>
         <p:spPr>
           <a:xfrm>
-            <a:off x="411480" y="384048"/>
+            <a:off x="548640" y="384048"/>
             <a:ext cx="82296" cy="658368"/>
           </a:xfrm>
           <a:prstGeom prst="rect">
@@ -14193,7 +15321,7 @@
         </p:nvSpPr>
         <p:spPr>
           <a:xfrm>
-            <a:off x="640080" y="292608"/>
+            <a:off x="777240" y="292608"/>
             <a:ext cx="10972800" cy="274320"/>
           </a:xfrm>
           <a:prstGeom prst="rect">
@@ -14232,8 +15360,8 @@
         </p:nvSpPr>
         <p:spPr>
           <a:xfrm>
-            <a:off x="640080" y="530352"/>
-            <a:ext cx="11155680" cy="566928"/>
+            <a:off x="777240" y="530352"/>
+            <a:ext cx="10881360" cy="566928"/>
           </a:xfrm>
           <a:prstGeom prst="rect">
             <a:avLst/>
@@ -14273,8 +15401,8 @@
         </p:nvSpPr>
         <p:spPr>
           <a:xfrm>
-            <a:off x="411480" y="1325880"/>
-            <a:ext cx="11384280" cy="4937760"/>
+            <a:off x="548640" y="1325880"/>
+            <a:ext cx="11091672" cy="4937760"/>
           </a:xfrm>
           <a:prstGeom prst="roundRect">
             <a:avLst>
@@ -14300,7 +15428,7 @@
         </p:nvSpPr>
         <p:spPr>
           <a:xfrm>
-            <a:off x="594360" y="1508760"/>
+            <a:off x="731520" y="1508760"/>
             <a:ext cx="822960" cy="384048"/>
           </a:xfrm>
           <a:prstGeom prst="roundRect">
@@ -14322,7 +15450,7 @@
         </p:nvSpPr>
         <p:spPr>
           <a:xfrm>
-            <a:off x="594360" y="1508760"/>
+            <a:off x="731520" y="1508760"/>
             <a:ext cx="822960" cy="384048"/>
           </a:xfrm>
           <a:prstGeom prst="rect">
@@ -14361,8 +15489,8 @@
         </p:nvSpPr>
         <p:spPr>
           <a:xfrm>
-            <a:off x="1508760" y="1463040"/>
-            <a:ext cx="10149840" cy="502920"/>
+            <a:off x="1645920" y="1463040"/>
+            <a:ext cx="9857232" cy="502920"/>
           </a:xfrm>
           <a:prstGeom prst="rect">
             <a:avLst/>
@@ -14402,8 +15530,8 @@
         </p:nvSpPr>
         <p:spPr>
           <a:xfrm>
-            <a:off x="640080" y="2057400"/>
-            <a:ext cx="10927080" cy="4069080"/>
+            <a:off x="777240" y="2057400"/>
+            <a:ext cx="10634472" cy="4069080"/>
           </a:xfrm>
           <a:prstGeom prst="rect">
             <a:avLst/>
@@ -14449,6 +15577,54 @@
               <a:t>status da proposta = etapa do funil</a:t>
             </a:r>
             <a:endParaRPr lang="en-US" sz="1500" dirty="0"/>
+          </a:p>
+        </p:txBody>
+      </p:sp>
+      <p:sp>
+        <p:nvSpPr>
+          <p:cNvPr id="25" name="Slide Number Placeholder 0"/>
+          <p:cNvSpPr>
+            <a:spLocks noGrp="1"/>
+          </p:cNvSpPr>
+          <p:nvPr>
+            <p:ph type="sldNum" sz="quarter" idx="4294967295"/>
+          </p:nvPr>
+        </p:nvSpPr>
+        <p:spPr>
+          <a:xfrm>
+            <a:off x="11292840" y="6556248"/>
+            <a:ext cx="548640" cy="256032"/>
+          </a:xfrm>
+          <a:prstGeom prst="rect">
+            <a:avLst/>
+          </a:prstGeom>
+          <a:extLst>
+            <a:ext uri="{C572A759-6A51-4108-AA02-DFA0A04FC94B}">
+              <ma14:wrappingTextBoxFlag xmlns:ma14="http://schemas.microsoft.com/office/mac/drawingml/2011/main" val="0"/>
+            </a:ext>
+          </a:extLst>
+        </p:spPr>
+        <p:txBody>
+          <a:bodyPr/>
+          <a:lstStyle>
+            <a:lvl1pPr>
+              <a:defRPr sz="900">
+                <a:solidFill>
+                  <a:srgbClr val="1B3A6B"/>
+                </a:solidFill>
+                <a:latin typeface="Arial"/>
+                <a:ea typeface="Arial"/>
+                <a:cs typeface="Arial"/>
+              </a:defRPr>
+            </a:lvl1pPr>
+          </a:lstStyle>
+          <a:p>
+            <a:pPr algn="r"/>
+            <a:fld id="{F7021451-1387-4CA6-816F-3879F97B5CBC}" type="slidenum">
+              <a:rPr b="1" lang="en-US"/>
+              <a:t>28</a:t>
+            </a:fld>
+            <a:endParaRPr lang="en-US"/>
           </a:p>
         </p:txBody>
       </p:sp>
@@ -14525,7 +15701,7 @@
         </p:blipFill>
         <p:spPr>
           <a:xfrm>
-            <a:off x="411480" y="6547104"/>
+            <a:off x="548640" y="6547104"/>
             <a:ext cx="274320" cy="274320"/>
           </a:xfrm>
           <a:prstGeom prst="rect">
@@ -14541,7 +15717,7 @@
         </p:nvSpPr>
         <p:spPr>
           <a:xfrm>
-            <a:off x="749808" y="6528816"/>
+            <a:off x="886968" y="6528816"/>
             <a:ext cx="6400800" cy="310896"/>
           </a:xfrm>
           <a:prstGeom prst="rect">
@@ -14581,7 +15757,7 @@
         <p:spPr>
           <a:xfrm>
             <a:off x="7132320" y="6528816"/>
-            <a:ext cx="4663440" cy="310896"/>
+            <a:ext cx="4023360" cy="310896"/>
           </a:xfrm>
           <a:prstGeom prst="rect">
             <a:avLst/>
@@ -14619,7 +15795,7 @@
         </p:nvSpPr>
         <p:spPr>
           <a:xfrm>
-            <a:off x="411480" y="384048"/>
+            <a:off x="548640" y="384048"/>
             <a:ext cx="82296" cy="658368"/>
           </a:xfrm>
           <a:prstGeom prst="rect">
@@ -14639,7 +15815,7 @@
         </p:nvSpPr>
         <p:spPr>
           <a:xfrm>
-            <a:off x="640080" y="292608"/>
+            <a:off x="777240" y="292608"/>
             <a:ext cx="10972800" cy="274320"/>
           </a:xfrm>
           <a:prstGeom prst="rect">
@@ -14678,8 +15854,8 @@
         </p:nvSpPr>
         <p:spPr>
           <a:xfrm>
-            <a:off x="640080" y="530352"/>
-            <a:ext cx="11155680" cy="566928"/>
+            <a:off x="777240" y="530352"/>
+            <a:ext cx="10881360" cy="566928"/>
           </a:xfrm>
           <a:prstGeom prst="rect">
             <a:avLst/>
@@ -14719,8 +15895,8 @@
         </p:nvSpPr>
         <p:spPr>
           <a:xfrm>
-            <a:off x="411480" y="1325880"/>
-            <a:ext cx="5577840" cy="2331720"/>
+            <a:off x="548640" y="1325880"/>
+            <a:ext cx="5431536" cy="2331720"/>
           </a:xfrm>
           <a:prstGeom prst="roundRect">
             <a:avLst>
@@ -14753,7 +15929,7 @@
         </p:nvSpPr>
         <p:spPr>
           <a:xfrm>
-            <a:off x="594360" y="1508760"/>
+            <a:off x="731520" y="1508760"/>
             <a:ext cx="457200" cy="457200"/>
           </a:xfrm>
           <a:prstGeom prst="ellipse">
@@ -14773,7 +15949,7 @@
         </p:nvSpPr>
         <p:spPr>
           <a:xfrm>
-            <a:off x="594360" y="1508760"/>
+            <a:off x="731520" y="1508760"/>
             <a:ext cx="457200" cy="457200"/>
           </a:xfrm>
           <a:prstGeom prst="rect">
@@ -14812,8 +15988,8 @@
         </p:nvSpPr>
         <p:spPr>
           <a:xfrm>
-            <a:off x="1188720" y="1435608"/>
-            <a:ext cx="4663440" cy="2112264"/>
+            <a:off x="1325880" y="1435608"/>
+            <a:ext cx="4517136" cy="2112264"/>
           </a:xfrm>
           <a:prstGeom prst="rect">
             <a:avLst/>
@@ -14853,8 +16029,8 @@
         </p:nvSpPr>
         <p:spPr>
           <a:xfrm>
-            <a:off x="6217920" y="1325880"/>
-            <a:ext cx="5577840" cy="2331720"/>
+            <a:off x="6208776" y="1325880"/>
+            <a:ext cx="5431536" cy="2331720"/>
           </a:xfrm>
           <a:prstGeom prst="roundRect">
             <a:avLst>
@@ -14887,7 +16063,7 @@
         </p:nvSpPr>
         <p:spPr>
           <a:xfrm>
-            <a:off x="6400800" y="1508760"/>
+            <a:off x="6391656" y="1508760"/>
             <a:ext cx="457200" cy="457200"/>
           </a:xfrm>
           <a:prstGeom prst="ellipse">
@@ -14907,7 +16083,7 @@
         </p:nvSpPr>
         <p:spPr>
           <a:xfrm>
-            <a:off x="6400800" y="1508760"/>
+            <a:off x="6391656" y="1508760"/>
             <a:ext cx="457200" cy="457200"/>
           </a:xfrm>
           <a:prstGeom prst="rect">
@@ -14946,8 +16122,8 @@
         </p:nvSpPr>
         <p:spPr>
           <a:xfrm>
-            <a:off x="6995160" y="1435608"/>
-            <a:ext cx="4663440" cy="2112264"/>
+            <a:off x="6986016" y="1435608"/>
+            <a:ext cx="4517136" cy="2112264"/>
           </a:xfrm>
           <a:prstGeom prst="rect">
             <a:avLst/>
@@ -14987,8 +16163,8 @@
         </p:nvSpPr>
         <p:spPr>
           <a:xfrm>
-            <a:off x="411480" y="3886200"/>
-            <a:ext cx="5577840" cy="2331720"/>
+            <a:off x="548640" y="3886200"/>
+            <a:ext cx="5431536" cy="2331720"/>
           </a:xfrm>
           <a:prstGeom prst="roundRect">
             <a:avLst>
@@ -15021,7 +16197,7 @@
         </p:nvSpPr>
         <p:spPr>
           <a:xfrm>
-            <a:off x="594360" y="4069080"/>
+            <a:off x="731520" y="4069080"/>
             <a:ext cx="457200" cy="457200"/>
           </a:xfrm>
           <a:prstGeom prst="ellipse">
@@ -15041,7 +16217,7 @@
         </p:nvSpPr>
         <p:spPr>
           <a:xfrm>
-            <a:off x="594360" y="4069080"/>
+            <a:off x="731520" y="4069080"/>
             <a:ext cx="457200" cy="457200"/>
           </a:xfrm>
           <a:prstGeom prst="rect">
@@ -15080,8 +16256,8 @@
         </p:nvSpPr>
         <p:spPr>
           <a:xfrm>
-            <a:off x="1188720" y="3995928"/>
-            <a:ext cx="4663440" cy="2112264"/>
+            <a:off x="1325880" y="3995928"/>
+            <a:ext cx="4517136" cy="2112264"/>
           </a:xfrm>
           <a:prstGeom prst="rect">
             <a:avLst/>
@@ -15121,8 +16297,8 @@
         </p:nvSpPr>
         <p:spPr>
           <a:xfrm>
-            <a:off x="6217920" y="3886200"/>
-            <a:ext cx="5577840" cy="2331720"/>
+            <a:off x="6208776" y="3886200"/>
+            <a:ext cx="5431536" cy="2331720"/>
           </a:xfrm>
           <a:prstGeom prst="roundRect">
             <a:avLst>
@@ -15155,7 +16331,7 @@
         </p:nvSpPr>
         <p:spPr>
           <a:xfrm>
-            <a:off x="6400800" y="4069080"/>
+            <a:off x="6391656" y="4069080"/>
             <a:ext cx="457200" cy="457200"/>
           </a:xfrm>
           <a:prstGeom prst="ellipse">
@@ -15175,7 +16351,7 @@
         </p:nvSpPr>
         <p:spPr>
           <a:xfrm>
-            <a:off x="6400800" y="4069080"/>
+            <a:off x="6391656" y="4069080"/>
             <a:ext cx="457200" cy="457200"/>
           </a:xfrm>
           <a:prstGeom prst="rect">
@@ -15214,8 +16390,8 @@
         </p:nvSpPr>
         <p:spPr>
           <a:xfrm>
-            <a:off x="6995160" y="3995928"/>
-            <a:ext cx="4663440" cy="2112264"/>
+            <a:off x="6986016" y="3995928"/>
+            <a:ext cx="4517136" cy="2112264"/>
           </a:xfrm>
           <a:prstGeom prst="rect">
             <a:avLst/>
@@ -15244,6 +16420,54 @@
               <a:t>revisão semanal</a:t>
             </a:r>
             <a:endParaRPr lang="en-US" sz="1800" dirty="0"/>
+          </a:p>
+        </p:txBody>
+      </p:sp>
+      <p:sp>
+        <p:nvSpPr>
+          <p:cNvPr id="25" name="Slide Number Placeholder 0"/>
+          <p:cNvSpPr>
+            <a:spLocks noGrp="1"/>
+          </p:cNvSpPr>
+          <p:nvPr>
+            <p:ph type="sldNum" sz="quarter" idx="4294967295"/>
+          </p:nvPr>
+        </p:nvSpPr>
+        <p:spPr>
+          <a:xfrm>
+            <a:off x="11292840" y="6556248"/>
+            <a:ext cx="548640" cy="256032"/>
+          </a:xfrm>
+          <a:prstGeom prst="rect">
+            <a:avLst/>
+          </a:prstGeom>
+          <a:extLst>
+            <a:ext uri="{C572A759-6A51-4108-AA02-DFA0A04FC94B}">
+              <ma14:wrappingTextBoxFlag xmlns:ma14="http://schemas.microsoft.com/office/mac/drawingml/2011/main" val="0"/>
+            </a:ext>
+          </a:extLst>
+        </p:spPr>
+        <p:txBody>
+          <a:bodyPr/>
+          <a:lstStyle>
+            <a:lvl1pPr>
+              <a:defRPr sz="900">
+                <a:solidFill>
+                  <a:srgbClr val="1B3A6B"/>
+                </a:solidFill>
+                <a:latin typeface="Arial"/>
+                <a:ea typeface="Arial"/>
+                <a:cs typeface="Arial"/>
+              </a:defRPr>
+            </a:lvl1pPr>
+          </a:lstStyle>
+          <a:p>
+            <a:pPr algn="r"/>
+            <a:fld id="{F7021451-1387-4CA6-816F-3879F97B5CBC}" type="slidenum">
+              <a:rPr b="1" lang="en-US"/>
+              <a:t>29</a:t>
+            </a:fld>
+            <a:endParaRPr lang="en-US"/>
           </a:p>
         </p:txBody>
       </p:sp>
@@ -15320,7 +16544,7 @@
         </p:blipFill>
         <p:spPr>
           <a:xfrm>
-            <a:off x="411480" y="6547104"/>
+            <a:off x="548640" y="6547104"/>
             <a:ext cx="274320" cy="274320"/>
           </a:xfrm>
           <a:prstGeom prst="rect">
@@ -15336,7 +16560,7 @@
         </p:nvSpPr>
         <p:spPr>
           <a:xfrm>
-            <a:off x="749808" y="6528816"/>
+            <a:off x="886968" y="6528816"/>
             <a:ext cx="6400800" cy="310896"/>
           </a:xfrm>
           <a:prstGeom prst="rect">
@@ -15376,7 +16600,7 @@
         <p:spPr>
           <a:xfrm>
             <a:off x="7132320" y="6528816"/>
-            <a:ext cx="4663440" cy="310896"/>
+            <a:ext cx="4023360" cy="310896"/>
           </a:xfrm>
           <a:prstGeom prst="rect">
             <a:avLst/>
@@ -15414,7 +16638,7 @@
         </p:nvSpPr>
         <p:spPr>
           <a:xfrm>
-            <a:off x="411480" y="384048"/>
+            <a:off x="548640" y="384048"/>
             <a:ext cx="82296" cy="658368"/>
           </a:xfrm>
           <a:prstGeom prst="rect">
@@ -15434,7 +16658,7 @@
         </p:nvSpPr>
         <p:spPr>
           <a:xfrm>
-            <a:off x="640080" y="292608"/>
+            <a:off x="777240" y="292608"/>
             <a:ext cx="10972800" cy="274320"/>
           </a:xfrm>
           <a:prstGeom prst="rect">
@@ -15473,8 +16697,8 @@
         </p:nvSpPr>
         <p:spPr>
           <a:xfrm>
-            <a:off x="640080" y="530352"/>
-            <a:ext cx="11155680" cy="566928"/>
+            <a:off x="777240" y="530352"/>
+            <a:ext cx="10881360" cy="566928"/>
           </a:xfrm>
           <a:prstGeom prst="rect">
             <a:avLst/>
@@ -15514,8 +16738,8 @@
         </p:nvSpPr>
         <p:spPr>
           <a:xfrm>
-            <a:off x="411480" y="1325880"/>
-            <a:ext cx="3642360" cy="2331720"/>
+            <a:off x="548640" y="1325880"/>
+            <a:ext cx="3544824" cy="2331720"/>
           </a:xfrm>
           <a:prstGeom prst="roundRect">
             <a:avLst>
@@ -15548,7 +16772,7 @@
         </p:nvSpPr>
         <p:spPr>
           <a:xfrm>
-            <a:off x="594360" y="1508760"/>
+            <a:off x="731520" y="1508760"/>
             <a:ext cx="457200" cy="457200"/>
           </a:xfrm>
           <a:prstGeom prst="ellipse">
@@ -15568,7 +16792,7 @@
         </p:nvSpPr>
         <p:spPr>
           <a:xfrm>
-            <a:off x="594360" y="1508760"/>
+            <a:off x="731520" y="1508760"/>
             <a:ext cx="457200" cy="457200"/>
           </a:xfrm>
           <a:prstGeom prst="rect">
@@ -15607,8 +16831,8 @@
         </p:nvSpPr>
         <p:spPr>
           <a:xfrm>
-            <a:off x="1188720" y="1435608"/>
-            <a:ext cx="2727960" cy="2112264"/>
+            <a:off x="1325880" y="1435608"/>
+            <a:ext cx="2630424" cy="2112264"/>
           </a:xfrm>
           <a:prstGeom prst="rect">
             <a:avLst/>
@@ -15648,8 +16872,8 @@
         </p:nvSpPr>
         <p:spPr>
           <a:xfrm>
-            <a:off x="4282440" y="1325880"/>
-            <a:ext cx="3642360" cy="2331720"/>
+            <a:off x="4322064" y="1325880"/>
+            <a:ext cx="3544824" cy="2331720"/>
           </a:xfrm>
           <a:prstGeom prst="roundRect">
             <a:avLst>
@@ -15682,7 +16906,7 @@
         </p:nvSpPr>
         <p:spPr>
           <a:xfrm>
-            <a:off x="4465320" y="1508760"/>
+            <a:off x="4504944" y="1508760"/>
             <a:ext cx="457200" cy="457200"/>
           </a:xfrm>
           <a:prstGeom prst="ellipse">
@@ -15702,7 +16926,7 @@
         </p:nvSpPr>
         <p:spPr>
           <a:xfrm>
-            <a:off x="4465320" y="1508760"/>
+            <a:off x="4504944" y="1508760"/>
             <a:ext cx="457200" cy="457200"/>
           </a:xfrm>
           <a:prstGeom prst="rect">
@@ -15741,8 +16965,8 @@
         </p:nvSpPr>
         <p:spPr>
           <a:xfrm>
-            <a:off x="5059680" y="1435608"/>
-            <a:ext cx="2727960" cy="2112264"/>
+            <a:off x="5099304" y="1435608"/>
+            <a:ext cx="2630424" cy="2112264"/>
           </a:xfrm>
           <a:prstGeom prst="rect">
             <a:avLst/>
@@ -15782,8 +17006,8 @@
         </p:nvSpPr>
         <p:spPr>
           <a:xfrm>
-            <a:off x="8153400" y="1325880"/>
-            <a:ext cx="3642360" cy="2331720"/>
+            <a:off x="8095488" y="1325880"/>
+            <a:ext cx="3544824" cy="2331720"/>
           </a:xfrm>
           <a:prstGeom prst="roundRect">
             <a:avLst>
@@ -15816,7 +17040,7 @@
         </p:nvSpPr>
         <p:spPr>
           <a:xfrm>
-            <a:off x="8336280" y="1508760"/>
+            <a:off x="8278368" y="1508760"/>
             <a:ext cx="457200" cy="457200"/>
           </a:xfrm>
           <a:prstGeom prst="ellipse">
@@ -15836,7 +17060,7 @@
         </p:nvSpPr>
         <p:spPr>
           <a:xfrm>
-            <a:off x="8336280" y="1508760"/>
+            <a:off x="8278368" y="1508760"/>
             <a:ext cx="457200" cy="457200"/>
           </a:xfrm>
           <a:prstGeom prst="rect">
@@ -15875,8 +17099,8 @@
         </p:nvSpPr>
         <p:spPr>
           <a:xfrm>
-            <a:off x="8930640" y="1435608"/>
-            <a:ext cx="2727960" cy="2112264"/>
+            <a:off x="8872728" y="1435608"/>
+            <a:ext cx="2630424" cy="2112264"/>
           </a:xfrm>
           <a:prstGeom prst="rect">
             <a:avLst/>
@@ -15916,8 +17140,8 @@
         </p:nvSpPr>
         <p:spPr>
           <a:xfrm>
-            <a:off x="411480" y="3886200"/>
-            <a:ext cx="3642360" cy="2331720"/>
+            <a:off x="548640" y="3886200"/>
+            <a:ext cx="3544824" cy="2331720"/>
           </a:xfrm>
           <a:prstGeom prst="roundRect">
             <a:avLst>
@@ -15950,7 +17174,7 @@
         </p:nvSpPr>
         <p:spPr>
           <a:xfrm>
-            <a:off x="594360" y="4069080"/>
+            <a:off x="731520" y="4069080"/>
             <a:ext cx="457200" cy="457200"/>
           </a:xfrm>
           <a:prstGeom prst="ellipse">
@@ -15970,7 +17194,7 @@
         </p:nvSpPr>
         <p:spPr>
           <a:xfrm>
-            <a:off x="594360" y="4069080"/>
+            <a:off x="731520" y="4069080"/>
             <a:ext cx="457200" cy="457200"/>
           </a:xfrm>
           <a:prstGeom prst="rect">
@@ -16009,8 +17233,8 @@
         </p:nvSpPr>
         <p:spPr>
           <a:xfrm>
-            <a:off x="1188720" y="3995928"/>
-            <a:ext cx="2727960" cy="2112264"/>
+            <a:off x="1325880" y="3995928"/>
+            <a:ext cx="2630424" cy="2112264"/>
           </a:xfrm>
           <a:prstGeom prst="rect">
             <a:avLst/>
@@ -16050,8 +17274,8 @@
         </p:nvSpPr>
         <p:spPr>
           <a:xfrm>
-            <a:off x="4282440" y="3886200"/>
-            <a:ext cx="3642360" cy="2331720"/>
+            <a:off x="4322064" y="3886200"/>
+            <a:ext cx="3544824" cy="2331720"/>
           </a:xfrm>
           <a:prstGeom prst="roundRect">
             <a:avLst>
@@ -16084,7 +17308,7 @@
         </p:nvSpPr>
         <p:spPr>
           <a:xfrm>
-            <a:off x="4465320" y="4069080"/>
+            <a:off x="4504944" y="4069080"/>
             <a:ext cx="457200" cy="457200"/>
           </a:xfrm>
           <a:prstGeom prst="ellipse">
@@ -16104,7 +17328,7 @@
         </p:nvSpPr>
         <p:spPr>
           <a:xfrm>
-            <a:off x="4465320" y="4069080"/>
+            <a:off x="4504944" y="4069080"/>
             <a:ext cx="457200" cy="457200"/>
           </a:xfrm>
           <a:prstGeom prst="rect">
@@ -16143,8 +17367,8 @@
         </p:nvSpPr>
         <p:spPr>
           <a:xfrm>
-            <a:off x="5059680" y="3995928"/>
-            <a:ext cx="2727960" cy="2112264"/>
+            <a:off x="5099304" y="3995928"/>
+            <a:ext cx="2630424" cy="2112264"/>
           </a:xfrm>
           <a:prstGeom prst="rect">
             <a:avLst/>
@@ -16173,6 +17397,54 @@
               <a:t>Decisor acessível</a:t>
             </a:r>
             <a:endParaRPr lang="en-US" sz="1800" dirty="0"/>
+          </a:p>
+        </p:txBody>
+      </p:sp>
+      <p:sp>
+        <p:nvSpPr>
+          <p:cNvPr id="25" name="Slide Number Placeholder 0"/>
+          <p:cNvSpPr>
+            <a:spLocks noGrp="1"/>
+          </p:cNvSpPr>
+          <p:nvPr>
+            <p:ph type="sldNum" sz="quarter" idx="4294967295"/>
+          </p:nvPr>
+        </p:nvSpPr>
+        <p:spPr>
+          <a:xfrm>
+            <a:off x="11292840" y="6556248"/>
+            <a:ext cx="548640" cy="256032"/>
+          </a:xfrm>
+          <a:prstGeom prst="rect">
+            <a:avLst/>
+          </a:prstGeom>
+          <a:extLst>
+            <a:ext uri="{C572A759-6A51-4108-AA02-DFA0A04FC94B}">
+              <ma14:wrappingTextBoxFlag xmlns:ma14="http://schemas.microsoft.com/office/mac/drawingml/2011/main" val="0"/>
+            </a:ext>
+          </a:extLst>
+        </p:spPr>
+        <p:txBody>
+          <a:bodyPr/>
+          <a:lstStyle>
+            <a:lvl1pPr>
+              <a:defRPr sz="900">
+                <a:solidFill>
+                  <a:srgbClr val="1B3A6B"/>
+                </a:solidFill>
+                <a:latin typeface="Arial"/>
+                <a:ea typeface="Arial"/>
+                <a:cs typeface="Arial"/>
+              </a:defRPr>
+            </a:lvl1pPr>
+          </a:lstStyle>
+          <a:p>
+            <a:pPr algn="r"/>
+            <a:fld id="{F7021451-1387-4CA6-816F-3879F97B5CBC}" type="slidenum">
+              <a:rPr b="1" lang="en-US"/>
+              <a:t>3</a:t>
+            </a:fld>
+            <a:endParaRPr lang="en-US"/>
           </a:p>
         </p:txBody>
       </p:sp>
@@ -16236,6 +17508,45 @@
         </p:nvSpPr>
         <p:spPr>
           <a:xfrm>
+            <a:off x="457200" y="548640"/>
+            <a:ext cx="3474720" cy="1737360"/>
+          </a:xfrm>
+          <a:prstGeom prst="rect">
+            <a:avLst/>
+          </a:prstGeom>
+          <a:noFill/>
+          <a:ln/>
+        </p:spPr>
+        <p:txBody>
+          <a:bodyPr wrap="square" rtlCol="0" anchor="ctr"/>
+          <a:lstStyle/>
+          <a:p>
+            <a:pPr indent="0" marL="0">
+              <a:buNone/>
+            </a:pPr>
+            <a:r>
+              <a:rPr lang="en-US" sz="11000" b="1" dirty="0">
+                <a:solidFill>
+                  <a:srgbClr val="11396F"/>
+                </a:solidFill>
+                <a:latin typeface="Arial" pitchFamily="34" charset="0"/>
+                <a:ea typeface="Arial" pitchFamily="34" charset="-122"/>
+                <a:cs typeface="Arial" pitchFamily="34" charset="-120"/>
+              </a:rPr>
+              <a:t>06</a:t>
+            </a:r>
+            <a:endParaRPr lang="en-US" sz="11000" dirty="0"/>
+          </a:p>
+        </p:txBody>
+      </p:sp>
+      <p:sp>
+        <p:nvSpPr>
+          <p:cNvPr id="4" name="Text 2"/>
+          <p:cNvSpPr/>
+          <p:nvPr/>
+        </p:nvSpPr>
+        <p:spPr>
+          <a:xfrm>
             <a:off x="548640" y="2194560"/>
             <a:ext cx="3291840" cy="548640"/>
           </a:xfrm>
@@ -16269,7 +17580,46 @@
       </p:sp>
       <p:sp>
         <p:nvSpPr>
-          <p:cNvPr id="4" name="Text 2"/>
+          <p:cNvPr id="5" name="Text 3"/>
+          <p:cNvSpPr/>
+          <p:nvPr/>
+        </p:nvSpPr>
+        <p:spPr>
+          <a:xfrm>
+            <a:off x="548640" y="3200400"/>
+            <a:ext cx="3383280" cy="457200"/>
+          </a:xfrm>
+          <a:prstGeom prst="rect">
+            <a:avLst/>
+          </a:prstGeom>
+          <a:noFill/>
+          <a:ln/>
+        </p:spPr>
+        <p:txBody>
+          <a:bodyPr wrap="square" rtlCol="0" anchor="ctr"/>
+          <a:lstStyle/>
+          <a:p>
+            <a:pPr indent="0" marL="0">
+              <a:buNone/>
+            </a:pPr>
+            <a:r>
+              <a:rPr lang="en-US" sz="1100" dirty="0">
+                <a:solidFill>
+                  <a:srgbClr val="C7D2E3"/>
+                </a:solidFill>
+                <a:latin typeface="Arial" pitchFamily="34" charset="0"/>
+                <a:ea typeface="Arial" pitchFamily="34" charset="-122"/>
+                <a:cs typeface="Arial" pitchFamily="34" charset="-120"/>
+              </a:rPr>
+              <a:t>M5 · Etapa 3 · Operação ponta a ponta</a:t>
+            </a:r>
+            <a:endParaRPr lang="en-US" sz="1100" dirty="0"/>
+          </a:p>
+        </p:txBody>
+      </p:sp>
+      <p:sp>
+        <p:nvSpPr>
+          <p:cNvPr id="6" name="Text 4"/>
           <p:cNvSpPr/>
           <p:nvPr/>
         </p:nvSpPr>
@@ -16308,7 +17658,7 @@
       </p:sp>
       <p:pic>
         <p:nvPicPr>
-          <p:cNvPr id="5" name="Image 0" descr="/www/wwwroot/rexar/gdsolar/docs/curso/slides/assets/logo-gdsolar.png">    </p:cNvPr>
+          <p:cNvPr id="7" name="Image 0" descr="/www/wwwroot/rexar/gdsolar/docs/curso/slides/assets/logo-gdsolar.png">    </p:cNvPr>
           <p:cNvPicPr>
             <a:picLocks noChangeAspect="1"/>
           </p:cNvPicPr>
@@ -16332,7 +17682,7 @@
       </p:pic>
       <p:sp>
         <p:nvSpPr>
-          <p:cNvPr id="6" name="Text 3"/>
+          <p:cNvPr id="8" name="Text 5"/>
           <p:cNvSpPr/>
           <p:nvPr/>
         </p:nvSpPr>
@@ -16373,7 +17723,7 @@
       </p:sp>
       <p:sp>
         <p:nvSpPr>
-          <p:cNvPr id="7" name="Text 4"/>
+          <p:cNvPr id="9" name="Text 6"/>
           <p:cNvSpPr/>
           <p:nvPr/>
         </p:nvSpPr>
@@ -16414,7 +17764,7 @@
       </p:sp>
       <p:sp>
         <p:nvSpPr>
-          <p:cNvPr id="8" name="Text 5"/>
+          <p:cNvPr id="10" name="Text 7"/>
           <p:cNvSpPr/>
           <p:nvPr/>
         </p:nvSpPr>
@@ -16530,7 +17880,7 @@
         </p:blipFill>
         <p:spPr>
           <a:xfrm>
-            <a:off x="411480" y="6547104"/>
+            <a:off x="548640" y="6547104"/>
             <a:ext cx="274320" cy="274320"/>
           </a:xfrm>
           <a:prstGeom prst="rect">
@@ -16546,7 +17896,7 @@
         </p:nvSpPr>
         <p:spPr>
           <a:xfrm>
-            <a:off x="749808" y="6528816"/>
+            <a:off x="886968" y="6528816"/>
             <a:ext cx="6400800" cy="310896"/>
           </a:xfrm>
           <a:prstGeom prst="rect">
@@ -16586,7 +17936,7 @@
         <p:spPr>
           <a:xfrm>
             <a:off x="7132320" y="6528816"/>
-            <a:ext cx="4663440" cy="310896"/>
+            <a:ext cx="4023360" cy="310896"/>
           </a:xfrm>
           <a:prstGeom prst="rect">
             <a:avLst/>
@@ -16624,7 +17974,7 @@
         </p:nvSpPr>
         <p:spPr>
           <a:xfrm>
-            <a:off x="411480" y="384048"/>
+            <a:off x="548640" y="384048"/>
             <a:ext cx="82296" cy="658368"/>
           </a:xfrm>
           <a:prstGeom prst="rect">
@@ -16644,7 +17994,7 @@
         </p:nvSpPr>
         <p:spPr>
           <a:xfrm>
-            <a:off x="640080" y="292608"/>
+            <a:off x="777240" y="292608"/>
             <a:ext cx="10972800" cy="274320"/>
           </a:xfrm>
           <a:prstGeom prst="rect">
@@ -16683,8 +18033,8 @@
         </p:nvSpPr>
         <p:spPr>
           <a:xfrm>
-            <a:off x="640080" y="530352"/>
-            <a:ext cx="11155680" cy="566928"/>
+            <a:off x="777240" y="530352"/>
+            <a:ext cx="10881360" cy="566928"/>
           </a:xfrm>
           <a:prstGeom prst="rect">
             <a:avLst/>
@@ -17038,6 +18388,54 @@
               <a:t>PDF com a marca da sua empresa · link temporário · envio por WhatsApp/e-mail</a:t>
             </a:r>
             <a:endParaRPr lang="en-US" sz="1500" dirty="0"/>
+          </a:p>
+        </p:txBody>
+      </p:sp>
+      <p:sp>
+        <p:nvSpPr>
+          <p:cNvPr id="25" name="Slide Number Placeholder 0"/>
+          <p:cNvSpPr>
+            <a:spLocks noGrp="1"/>
+          </p:cNvSpPr>
+          <p:nvPr>
+            <p:ph type="sldNum" sz="quarter" idx="4294967295"/>
+          </p:nvPr>
+        </p:nvSpPr>
+        <p:spPr>
+          <a:xfrm>
+            <a:off x="11292840" y="6556248"/>
+            <a:ext cx="548640" cy="256032"/>
+          </a:xfrm>
+          <a:prstGeom prst="rect">
+            <a:avLst/>
+          </a:prstGeom>
+          <a:extLst>
+            <a:ext uri="{C572A759-6A51-4108-AA02-DFA0A04FC94B}">
+              <ma14:wrappingTextBoxFlag xmlns:ma14="http://schemas.microsoft.com/office/mac/drawingml/2011/main" val="0"/>
+            </a:ext>
+          </a:extLst>
+        </p:spPr>
+        <p:txBody>
+          <a:bodyPr/>
+          <a:lstStyle>
+            <a:lvl1pPr>
+              <a:defRPr sz="900">
+                <a:solidFill>
+                  <a:srgbClr val="1B3A6B"/>
+                </a:solidFill>
+                <a:latin typeface="Arial"/>
+                <a:ea typeface="Arial"/>
+                <a:cs typeface="Arial"/>
+              </a:defRPr>
+            </a:lvl1pPr>
+          </a:lstStyle>
+          <a:p>
+            <a:pPr algn="r"/>
+            <a:fld id="{F7021451-1387-4CA6-816F-3879F97B5CBC}" type="slidenum">
+              <a:rPr b="1" lang="en-US"/>
+              <a:t>31</a:t>
+            </a:fld>
+            <a:endParaRPr lang="en-US"/>
           </a:p>
         </p:txBody>
       </p:sp>
@@ -17114,7 +18512,7 @@
         </p:blipFill>
         <p:spPr>
           <a:xfrm>
-            <a:off x="411480" y="6547104"/>
+            <a:off x="548640" y="6547104"/>
             <a:ext cx="274320" cy="274320"/>
           </a:xfrm>
           <a:prstGeom prst="rect">
@@ -17130,7 +18528,7 @@
         </p:nvSpPr>
         <p:spPr>
           <a:xfrm>
-            <a:off x="749808" y="6528816"/>
+            <a:off x="886968" y="6528816"/>
             <a:ext cx="6400800" cy="310896"/>
           </a:xfrm>
           <a:prstGeom prst="rect">
@@ -17170,7 +18568,7 @@
         <p:spPr>
           <a:xfrm>
             <a:off x="7132320" y="6528816"/>
-            <a:ext cx="4663440" cy="310896"/>
+            <a:ext cx="4023360" cy="310896"/>
           </a:xfrm>
           <a:prstGeom prst="rect">
             <a:avLst/>
@@ -17208,7 +18606,7 @@
         </p:nvSpPr>
         <p:spPr>
           <a:xfrm>
-            <a:off x="411480" y="384048"/>
+            <a:off x="548640" y="384048"/>
             <a:ext cx="82296" cy="658368"/>
           </a:xfrm>
           <a:prstGeom prst="rect">
@@ -17228,7 +18626,7 @@
         </p:nvSpPr>
         <p:spPr>
           <a:xfrm>
-            <a:off x="640080" y="292608"/>
+            <a:off x="777240" y="292608"/>
             <a:ext cx="10972800" cy="274320"/>
           </a:xfrm>
           <a:prstGeom prst="rect">
@@ -17267,8 +18665,8 @@
         </p:nvSpPr>
         <p:spPr>
           <a:xfrm>
-            <a:off x="640080" y="530352"/>
-            <a:ext cx="11155680" cy="566928"/>
+            <a:off x="777240" y="530352"/>
+            <a:ext cx="10881360" cy="566928"/>
           </a:xfrm>
           <a:prstGeom prst="rect">
             <a:avLst/>
@@ -17358,6 +18756,54 @@
           </a:prstGeom>
         </p:spPr>
       </p:pic>
+      <p:sp>
+        <p:nvSpPr>
+          <p:cNvPr id="25" name="Slide Number Placeholder 0"/>
+          <p:cNvSpPr>
+            <a:spLocks noGrp="1"/>
+          </p:cNvSpPr>
+          <p:nvPr>
+            <p:ph type="sldNum" sz="quarter" idx="4294967295"/>
+          </p:nvPr>
+        </p:nvSpPr>
+        <p:spPr>
+          <a:xfrm>
+            <a:off x="11292840" y="6556248"/>
+            <a:ext cx="548640" cy="256032"/>
+          </a:xfrm>
+          <a:prstGeom prst="rect">
+            <a:avLst/>
+          </a:prstGeom>
+          <a:extLst>
+            <a:ext uri="{C572A759-6A51-4108-AA02-DFA0A04FC94B}">
+              <ma14:wrappingTextBoxFlag xmlns:ma14="http://schemas.microsoft.com/office/mac/drawingml/2011/main" val="0"/>
+            </a:ext>
+          </a:extLst>
+        </p:spPr>
+        <p:txBody>
+          <a:bodyPr/>
+          <a:lstStyle>
+            <a:lvl1pPr>
+              <a:defRPr sz="900">
+                <a:solidFill>
+                  <a:srgbClr val="1B3A6B"/>
+                </a:solidFill>
+                <a:latin typeface="Arial"/>
+                <a:ea typeface="Arial"/>
+                <a:cs typeface="Arial"/>
+              </a:defRPr>
+            </a:lvl1pPr>
+          </a:lstStyle>
+          <a:p>
+            <a:pPr algn="r"/>
+            <a:fld id="{F7021451-1387-4CA6-816F-3879F97B5CBC}" type="slidenum">
+              <a:rPr b="1" lang="en-US"/>
+              <a:t>32</a:t>
+            </a:fld>
+            <a:endParaRPr lang="en-US"/>
+          </a:p>
+        </p:txBody>
+      </p:sp>
     </p:spTree>
   </p:cSld>
   <p:clrMapOvr>
@@ -17431,7 +18877,7 @@
         </p:blipFill>
         <p:spPr>
           <a:xfrm>
-            <a:off x="411480" y="6547104"/>
+            <a:off x="548640" y="6547104"/>
             <a:ext cx="274320" cy="274320"/>
           </a:xfrm>
           <a:prstGeom prst="rect">
@@ -17447,7 +18893,7 @@
         </p:nvSpPr>
         <p:spPr>
           <a:xfrm>
-            <a:off x="749808" y="6528816"/>
+            <a:off x="886968" y="6528816"/>
             <a:ext cx="6400800" cy="310896"/>
           </a:xfrm>
           <a:prstGeom prst="rect">
@@ -17487,7 +18933,7 @@
         <p:spPr>
           <a:xfrm>
             <a:off x="7132320" y="6528816"/>
-            <a:ext cx="4663440" cy="310896"/>
+            <a:ext cx="4023360" cy="310896"/>
           </a:xfrm>
           <a:prstGeom prst="rect">
             <a:avLst/>
@@ -17525,7 +18971,7 @@
         </p:nvSpPr>
         <p:spPr>
           <a:xfrm>
-            <a:off x="411480" y="384048"/>
+            <a:off x="548640" y="384048"/>
             <a:ext cx="82296" cy="658368"/>
           </a:xfrm>
           <a:prstGeom prst="rect">
@@ -17545,7 +18991,7 @@
         </p:nvSpPr>
         <p:spPr>
           <a:xfrm>
-            <a:off x="640080" y="292608"/>
+            <a:off x="777240" y="292608"/>
             <a:ext cx="10972800" cy="274320"/>
           </a:xfrm>
           <a:prstGeom prst="rect">
@@ -17584,8 +19030,8 @@
         </p:nvSpPr>
         <p:spPr>
           <a:xfrm>
-            <a:off x="640080" y="530352"/>
-            <a:ext cx="11155680" cy="566928"/>
+            <a:off x="777240" y="530352"/>
+            <a:ext cx="10881360" cy="566928"/>
           </a:xfrm>
           <a:prstGeom prst="rect">
             <a:avLst/>
@@ -17625,8 +19071,8 @@
         </p:nvSpPr>
         <p:spPr>
           <a:xfrm>
-            <a:off x="411480" y="1325880"/>
-            <a:ext cx="5577840" cy="411480"/>
+            <a:off x="548640" y="1325880"/>
+            <a:ext cx="5394960" cy="411480"/>
           </a:xfrm>
           <a:prstGeom prst="rect">
             <a:avLst/>
@@ -17664,8 +19110,8 @@
         </p:nvSpPr>
         <p:spPr>
           <a:xfrm>
-            <a:off x="411480" y="1783080"/>
-            <a:ext cx="5577840" cy="4480560"/>
+            <a:off x="548640" y="1783080"/>
+            <a:ext cx="5394960" cy="4480560"/>
           </a:xfrm>
           <a:prstGeom prst="rect">
             <a:avLst/>
@@ -17748,8 +19194,8 @@
         </p:nvSpPr>
         <p:spPr>
           <a:xfrm>
-            <a:off x="6309360" y="1325880"/>
-            <a:ext cx="5486400" cy="4937760"/>
+            <a:off x="6172200" y="1325880"/>
+            <a:ext cx="5468112" cy="4937760"/>
           </a:xfrm>
           <a:prstGeom prst="roundRect">
             <a:avLst>
@@ -17770,8 +19216,8 @@
         </p:nvSpPr>
         <p:spPr>
           <a:xfrm>
-            <a:off x="6629400" y="1554480"/>
-            <a:ext cx="4846320" cy="4480560"/>
+            <a:off x="6492240" y="1554480"/>
+            <a:ext cx="4828032" cy="4480560"/>
           </a:xfrm>
           <a:prstGeom prst="rect">
             <a:avLst/>
@@ -17815,6 +19261,54 @@
               <a:t>Primeiros clientes da minha empresa: 5 clientes fictícios do seu ICP cadastrados com UC e proposta (pelo menos 2 empresas B3 e 2 residências), com cota calculada e economia estimada; e o roteiro de abordagem do seu vendedor (uma página).</a:t>
             </a:r>
             <a:endParaRPr lang="en-US" sz="1300" dirty="0"/>
+          </a:p>
+        </p:txBody>
+      </p:sp>
+      <p:sp>
+        <p:nvSpPr>
+          <p:cNvPr id="25" name="Slide Number Placeholder 0"/>
+          <p:cNvSpPr>
+            <a:spLocks noGrp="1"/>
+          </p:cNvSpPr>
+          <p:nvPr>
+            <p:ph type="sldNum" sz="quarter" idx="4294967295"/>
+          </p:nvPr>
+        </p:nvSpPr>
+        <p:spPr>
+          <a:xfrm>
+            <a:off x="11292840" y="6556248"/>
+            <a:ext cx="548640" cy="256032"/>
+          </a:xfrm>
+          <a:prstGeom prst="rect">
+            <a:avLst/>
+          </a:prstGeom>
+          <a:extLst>
+            <a:ext uri="{C572A759-6A51-4108-AA02-DFA0A04FC94B}">
+              <ma14:wrappingTextBoxFlag xmlns:ma14="http://schemas.microsoft.com/office/mac/drawingml/2011/main" val="0"/>
+            </a:ext>
+          </a:extLst>
+        </p:spPr>
+        <p:txBody>
+          <a:bodyPr/>
+          <a:lstStyle>
+            <a:lvl1pPr>
+              <a:defRPr sz="900">
+                <a:solidFill>
+                  <a:srgbClr val="1B3A6B"/>
+                </a:solidFill>
+                <a:latin typeface="Arial"/>
+                <a:ea typeface="Arial"/>
+                <a:cs typeface="Arial"/>
+              </a:defRPr>
+            </a:lvl1pPr>
+          </a:lstStyle>
+          <a:p>
+            <a:pPr algn="r"/>
+            <a:fld id="{F7021451-1387-4CA6-816F-3879F97B5CBC}" type="slidenum">
+              <a:rPr b="1" lang="en-US"/>
+              <a:t>33</a:t>
+            </a:fld>
+            <a:endParaRPr lang="en-US"/>
           </a:p>
         </p:txBody>
       </p:sp>
@@ -17891,7 +19385,7 @@
         </p:blipFill>
         <p:spPr>
           <a:xfrm>
-            <a:off x="411480" y="6547104"/>
+            <a:off x="548640" y="6547104"/>
             <a:ext cx="274320" cy="274320"/>
           </a:xfrm>
           <a:prstGeom prst="rect">
@@ -17907,7 +19401,7 @@
         </p:nvSpPr>
         <p:spPr>
           <a:xfrm>
-            <a:off x="749808" y="6528816"/>
+            <a:off x="886968" y="6528816"/>
             <a:ext cx="6400800" cy="310896"/>
           </a:xfrm>
           <a:prstGeom prst="rect">
@@ -17947,7 +19441,7 @@
         <p:spPr>
           <a:xfrm>
             <a:off x="7132320" y="6528816"/>
-            <a:ext cx="4663440" cy="310896"/>
+            <a:ext cx="4023360" cy="310896"/>
           </a:xfrm>
           <a:prstGeom prst="rect">
             <a:avLst/>
@@ -17985,7 +19479,7 @@
         </p:nvSpPr>
         <p:spPr>
           <a:xfrm>
-            <a:off x="411480" y="384048"/>
+            <a:off x="548640" y="384048"/>
             <a:ext cx="82296" cy="658368"/>
           </a:xfrm>
           <a:prstGeom prst="rect">
@@ -18005,7 +19499,7 @@
         </p:nvSpPr>
         <p:spPr>
           <a:xfrm>
-            <a:off x="640080" y="292608"/>
+            <a:off x="777240" y="292608"/>
             <a:ext cx="10972800" cy="274320"/>
           </a:xfrm>
           <a:prstGeom prst="rect">
@@ -18044,8 +19538,8 @@
         </p:nvSpPr>
         <p:spPr>
           <a:xfrm>
-            <a:off x="640080" y="530352"/>
-            <a:ext cx="11155680" cy="566928"/>
+            <a:off x="777240" y="530352"/>
+            <a:ext cx="10881360" cy="566928"/>
           </a:xfrm>
           <a:prstGeom prst="rect">
             <a:avLst/>
@@ -18086,7 +19580,7 @@
         <p:spPr>
           <a:xfrm>
             <a:off x="548640" y="1325880"/>
-            <a:ext cx="11155680" cy="4937760"/>
+            <a:ext cx="5486400" cy="4937760"/>
           </a:xfrm>
           <a:prstGeom prst="rect">
             <a:avLst/>
@@ -18225,6 +19719,30 @@
             </a:r>
             <a:endParaRPr lang="en-US" sz="1800" dirty="0"/>
           </a:p>
+        </p:txBody>
+      </p:sp>
+      <p:sp>
+        <p:nvSpPr>
+          <p:cNvPr id="10" name="Text 7"/>
+          <p:cNvSpPr/>
+          <p:nvPr/>
+        </p:nvSpPr>
+        <p:spPr>
+          <a:xfrm>
+            <a:off x="6263640" y="1325880"/>
+            <a:ext cx="5486400" cy="4937760"/>
+          </a:xfrm>
+          <a:prstGeom prst="rect">
+            <a:avLst/>
+          </a:prstGeom>
+          <a:noFill/>
+          <a:ln/>
+        </p:spPr>
+        <p:txBody>
+          <a:bodyPr wrap="square" rtlCol="0" anchor="t">
+            <a:normAutofit/>
+          </a:bodyPr>
+          <a:lstStyle/>
           <a:p>
             <a:pPr marL="342900" indent="-342900">
               <a:spcAft>
@@ -18329,6 +19847,54 @@
               <a:t>residências de alto consumo</a:t>
             </a:r>
             <a:endParaRPr lang="en-US" sz="1800" dirty="0"/>
+          </a:p>
+        </p:txBody>
+      </p:sp>
+      <p:sp>
+        <p:nvSpPr>
+          <p:cNvPr id="25" name="Slide Number Placeholder 0"/>
+          <p:cNvSpPr>
+            <a:spLocks noGrp="1"/>
+          </p:cNvSpPr>
+          <p:nvPr>
+            <p:ph type="sldNum" sz="quarter" idx="4294967295"/>
+          </p:nvPr>
+        </p:nvSpPr>
+        <p:spPr>
+          <a:xfrm>
+            <a:off x="11292840" y="6556248"/>
+            <a:ext cx="548640" cy="256032"/>
+          </a:xfrm>
+          <a:prstGeom prst="rect">
+            <a:avLst/>
+          </a:prstGeom>
+          <a:extLst>
+            <a:ext uri="{C572A759-6A51-4108-AA02-DFA0A04FC94B}">
+              <ma14:wrappingTextBoxFlag xmlns:ma14="http://schemas.microsoft.com/office/mac/drawingml/2011/main" val="0"/>
+            </a:ext>
+          </a:extLst>
+        </p:spPr>
+        <p:txBody>
+          <a:bodyPr/>
+          <a:lstStyle>
+            <a:lvl1pPr>
+              <a:defRPr sz="900">
+                <a:solidFill>
+                  <a:srgbClr val="1B3A6B"/>
+                </a:solidFill>
+                <a:latin typeface="Arial"/>
+                <a:ea typeface="Arial"/>
+                <a:cs typeface="Arial"/>
+              </a:defRPr>
+            </a:lvl1pPr>
+          </a:lstStyle>
+          <a:p>
+            <a:pPr algn="r"/>
+            <a:fld id="{F7021451-1387-4CA6-816F-3879F97B5CBC}" type="slidenum">
+              <a:rPr b="1" lang="en-US"/>
+              <a:t>4</a:t>
+            </a:fld>
+            <a:endParaRPr lang="en-US"/>
           </a:p>
         </p:txBody>
       </p:sp>
@@ -18405,7 +19971,7 @@
         </p:blipFill>
         <p:spPr>
           <a:xfrm>
-            <a:off x="411480" y="6547104"/>
+            <a:off x="548640" y="6547104"/>
             <a:ext cx="274320" cy="274320"/>
           </a:xfrm>
           <a:prstGeom prst="rect">
@@ -18421,7 +19987,7 @@
         </p:nvSpPr>
         <p:spPr>
           <a:xfrm>
-            <a:off x="749808" y="6528816"/>
+            <a:off x="886968" y="6528816"/>
             <a:ext cx="6400800" cy="310896"/>
           </a:xfrm>
           <a:prstGeom prst="rect">
@@ -18461,7 +20027,7 @@
         <p:spPr>
           <a:xfrm>
             <a:off x="7132320" y="6528816"/>
-            <a:ext cx="4663440" cy="310896"/>
+            <a:ext cx="4023360" cy="310896"/>
           </a:xfrm>
           <a:prstGeom prst="rect">
             <a:avLst/>
@@ -18499,7 +20065,7 @@
         </p:nvSpPr>
         <p:spPr>
           <a:xfrm>
-            <a:off x="411480" y="384048"/>
+            <a:off x="548640" y="384048"/>
             <a:ext cx="82296" cy="658368"/>
           </a:xfrm>
           <a:prstGeom prst="rect">
@@ -18519,7 +20085,7 @@
         </p:nvSpPr>
         <p:spPr>
           <a:xfrm>
-            <a:off x="640080" y="292608"/>
+            <a:off x="777240" y="292608"/>
             <a:ext cx="10972800" cy="274320"/>
           </a:xfrm>
           <a:prstGeom prst="rect">
@@ -18558,8 +20124,8 @@
         </p:nvSpPr>
         <p:spPr>
           <a:xfrm>
-            <a:off x="640080" y="530352"/>
-            <a:ext cx="11155680" cy="566928"/>
+            <a:off x="777240" y="530352"/>
+            <a:ext cx="10881360" cy="566928"/>
           </a:xfrm>
           <a:prstGeom prst="rect">
             <a:avLst/>
@@ -18599,8 +20165,8 @@
         </p:nvSpPr>
         <p:spPr>
           <a:xfrm>
-            <a:off x="411480" y="1325880"/>
-            <a:ext cx="5554980" cy="4937760"/>
+            <a:off x="548640" y="1325880"/>
+            <a:ext cx="5408676" cy="4937760"/>
           </a:xfrm>
           <a:prstGeom prst="roundRect">
             <a:avLst>
@@ -18633,8 +20199,8 @@
         </p:nvSpPr>
         <p:spPr>
           <a:xfrm>
-            <a:off x="411480" y="1325880"/>
-            <a:ext cx="5554980" cy="109728"/>
+            <a:off x="548640" y="1325880"/>
+            <a:ext cx="5408676" cy="109728"/>
           </a:xfrm>
           <a:prstGeom prst="rect">
             <a:avLst/>
@@ -18653,8 +20219,8 @@
         </p:nvSpPr>
         <p:spPr>
           <a:xfrm>
-            <a:off x="685800" y="1554480"/>
-            <a:ext cx="5006340" cy="685800"/>
+            <a:off x="822960" y="1554480"/>
+            <a:ext cx="4860036" cy="685800"/>
           </a:xfrm>
           <a:prstGeom prst="rect">
             <a:avLst/>
@@ -18694,8 +20260,8 @@
         </p:nvSpPr>
         <p:spPr>
           <a:xfrm>
-            <a:off x="685800" y="2286000"/>
-            <a:ext cx="5006340" cy="3749040"/>
+            <a:off x="822960" y="2286000"/>
+            <a:ext cx="4860036" cy="3749040"/>
           </a:xfrm>
           <a:prstGeom prst="rect">
             <a:avLst/>
@@ -18717,7 +20283,7 @@
               <a:buChar char="●"/>
             </a:pPr>
             <a:r>
-              <a:rPr lang="en-US" sz="1600" dirty="0">
+              <a:rPr lang="en-US" sz="1700" dirty="0">
                 <a:solidFill>
                   <a:srgbClr val="1F2937"/>
                 </a:solidFill>
@@ -18727,7 +20293,7 @@
               </a:rPr>
               <a:t>Consumo muito baixo</a:t>
             </a:r>
-            <a:endParaRPr lang="en-US" sz="1600" dirty="0"/>
+            <a:endParaRPr lang="en-US" sz="1700" dirty="0"/>
           </a:p>
           <a:p>
             <a:pPr marL="342900" indent="-342900">
@@ -18738,7 +20304,7 @@
               <a:buChar char="●"/>
             </a:pPr>
             <a:r>
-              <a:rPr lang="en-US" sz="1600" dirty="0">
+              <a:rPr lang="en-US" sz="1700" dirty="0">
                 <a:solidFill>
                   <a:srgbClr val="1F2937"/>
                 </a:solidFill>
@@ -18748,7 +20314,7 @@
               </a:rPr>
               <a:t>tarifa social (avaliar caso a caso)</a:t>
             </a:r>
-            <a:endParaRPr lang="en-US" sz="1600" dirty="0"/>
+            <a:endParaRPr lang="en-US" sz="1700" dirty="0"/>
           </a:p>
           <a:p>
             <a:pPr marL="342900" indent="-342900">
@@ -18759,7 +20325,7 @@
               <a:buChar char="●"/>
             </a:pPr>
             <a:r>
-              <a:rPr lang="en-US" sz="1600" dirty="0">
+              <a:rPr lang="en-US" sz="1700" dirty="0">
                 <a:solidFill>
                   <a:srgbClr val="1F2937"/>
                 </a:solidFill>
@@ -18769,7 +20335,7 @@
               </a:rPr>
               <a:t>grupo A (proposta complexa)</a:t>
             </a:r>
-            <a:endParaRPr lang="en-US" sz="1600" dirty="0"/>
+            <a:endParaRPr lang="en-US" sz="1700" dirty="0"/>
           </a:p>
           <a:p>
             <a:pPr marL="342900" indent="-342900">
@@ -18780,7 +20346,7 @@
               <a:buChar char="●"/>
             </a:pPr>
             <a:r>
-              <a:rPr lang="en-US" sz="1600" dirty="0">
+              <a:rPr lang="en-US" sz="1700" dirty="0">
                 <a:solidFill>
                   <a:srgbClr val="1F2937"/>
                 </a:solidFill>
@@ -18790,7 +20356,7 @@
               </a:rPr>
               <a:t>quem vai mudar</a:t>
             </a:r>
-            <a:endParaRPr lang="en-US" sz="1600" dirty="0"/>
+            <a:endParaRPr lang="en-US" sz="1700" dirty="0"/>
           </a:p>
           <a:p>
             <a:pPr marL="342900" indent="-342900">
@@ -18801,7 +20367,7 @@
               <a:buChar char="●"/>
             </a:pPr>
             <a:r>
-              <a:rPr lang="en-US" sz="1600" dirty="0">
+              <a:rPr lang="en-US" sz="1700" dirty="0">
                 <a:solidFill>
                   <a:srgbClr val="1F2937"/>
                 </a:solidFill>
@@ -18811,7 +20377,7 @@
               </a:rPr>
               <a:t>quem já tem sistema próprio dimensionado</a:t>
             </a:r>
-            <a:endParaRPr lang="en-US" sz="1600" dirty="0"/>
+            <a:endParaRPr lang="en-US" sz="1700" dirty="0"/>
           </a:p>
         </p:txBody>
       </p:sp>
@@ -18823,8 +20389,8 @@
         </p:nvSpPr>
         <p:spPr>
           <a:xfrm>
-            <a:off x="6240780" y="1325880"/>
-            <a:ext cx="5554980" cy="4937760"/>
+            <a:off x="6231636" y="1325880"/>
+            <a:ext cx="5408676" cy="4937760"/>
           </a:xfrm>
           <a:prstGeom prst="roundRect">
             <a:avLst>
@@ -18857,8 +20423,8 @@
         </p:nvSpPr>
         <p:spPr>
           <a:xfrm>
-            <a:off x="6240780" y="1325880"/>
-            <a:ext cx="5554980" cy="109728"/>
+            <a:off x="6231636" y="1325880"/>
+            <a:ext cx="5408676" cy="109728"/>
           </a:xfrm>
           <a:prstGeom prst="rect">
             <a:avLst/>
@@ -18877,8 +20443,8 @@
         </p:nvSpPr>
         <p:spPr>
           <a:xfrm>
-            <a:off x="6515100" y="1554480"/>
-            <a:ext cx="5006340" cy="685800"/>
+            <a:off x="6505956" y="1554480"/>
+            <a:ext cx="4860036" cy="685800"/>
           </a:xfrm>
           <a:prstGeom prst="rect">
             <a:avLst/>
@@ -18918,8 +20484,8 @@
         </p:nvSpPr>
         <p:spPr>
           <a:xfrm>
-            <a:off x="6515100" y="2286000"/>
-            <a:ext cx="5006340" cy="3749040"/>
+            <a:off x="6505956" y="2286000"/>
+            <a:ext cx="4860036" cy="3749040"/>
           </a:xfrm>
           <a:prstGeom prst="rect">
             <a:avLst/>
@@ -18941,7 +20507,7 @@
               <a:buChar char="●"/>
             </a:pPr>
             <a:r>
-              <a:rPr lang="en-US" sz="1600" dirty="0">
+              <a:rPr lang="en-US" sz="1700" dirty="0">
                 <a:solidFill>
                   <a:srgbClr val="1F2937"/>
                 </a:solidFill>
@@ -18951,7 +20517,7 @@
               </a:rPr>
               <a:t>Indicação</a:t>
             </a:r>
-            <a:endParaRPr lang="en-US" sz="1600" dirty="0"/>
+            <a:endParaRPr lang="en-US" sz="1700" dirty="0"/>
           </a:p>
           <a:p>
             <a:pPr marL="342900" indent="-342900">
@@ -18962,7 +20528,7 @@
               <a:buChar char="●"/>
             </a:pPr>
             <a:r>
-              <a:rPr lang="en-US" sz="1600" dirty="0">
+              <a:rPr lang="en-US" sz="1700" dirty="0">
                 <a:solidFill>
                   <a:srgbClr val="1F2937"/>
                 </a:solidFill>
@@ -18972,7 +20538,7 @@
               </a:rPr>
               <a:t>parceiros (contadores, associações comerciais, imobiliárias)</a:t>
             </a:r>
-            <a:endParaRPr lang="en-US" sz="1600" dirty="0"/>
+            <a:endParaRPr lang="en-US" sz="1700" dirty="0"/>
           </a:p>
           <a:p>
             <a:pPr marL="342900" indent="-342900">
@@ -18983,7 +20549,7 @@
               <a:buChar char="●"/>
             </a:pPr>
             <a:r>
-              <a:rPr lang="en-US" sz="1600" dirty="0">
+              <a:rPr lang="en-US" sz="1700" dirty="0">
                 <a:solidFill>
                   <a:srgbClr val="1F2937"/>
                 </a:solidFill>
@@ -18993,7 +20559,7 @@
               </a:rPr>
               <a:t>porta a porta no comércio</a:t>
             </a:r>
-            <a:endParaRPr lang="en-US" sz="1600" dirty="0"/>
+            <a:endParaRPr lang="en-US" sz="1700" dirty="0"/>
           </a:p>
           <a:p>
             <a:pPr marL="342900" indent="-342900">
@@ -19004,7 +20570,7 @@
               <a:buChar char="●"/>
             </a:pPr>
             <a:r>
-              <a:rPr lang="en-US" sz="1600" dirty="0">
+              <a:rPr lang="en-US" sz="1700" dirty="0">
                 <a:solidFill>
                   <a:srgbClr val="1F2937"/>
                 </a:solidFill>
@@ -19014,7 +20580,7 @@
               </a:rPr>
               <a:t>anúncios locais</a:t>
             </a:r>
-            <a:endParaRPr lang="en-US" sz="1600" dirty="0"/>
+            <a:endParaRPr lang="en-US" sz="1700" dirty="0"/>
           </a:p>
           <a:p>
             <a:pPr marL="342900" indent="-342900">
@@ -19025,7 +20591,7 @@
               <a:buChar char="●"/>
             </a:pPr>
             <a:r>
-              <a:rPr lang="en-US" sz="1600" dirty="0">
+              <a:rPr lang="en-US" sz="1700" dirty="0">
                 <a:solidFill>
                   <a:srgbClr val="1F2937"/>
                 </a:solidFill>
@@ -19035,7 +20601,55 @@
               </a:rPr>
               <a:t>⭐ leads de sistema solar que não compraram</a:t>
             </a:r>
-            <a:endParaRPr lang="en-US" sz="1600" dirty="0"/>
+            <a:endParaRPr lang="en-US" sz="1700" dirty="0"/>
+          </a:p>
+        </p:txBody>
+      </p:sp>
+      <p:sp>
+        <p:nvSpPr>
+          <p:cNvPr id="25" name="Slide Number Placeholder 0"/>
+          <p:cNvSpPr>
+            <a:spLocks noGrp="1"/>
+          </p:cNvSpPr>
+          <p:nvPr>
+            <p:ph type="sldNum" sz="quarter" idx="4294967295"/>
+          </p:nvPr>
+        </p:nvSpPr>
+        <p:spPr>
+          <a:xfrm>
+            <a:off x="11292840" y="6556248"/>
+            <a:ext cx="548640" cy="256032"/>
+          </a:xfrm>
+          <a:prstGeom prst="rect">
+            <a:avLst/>
+          </a:prstGeom>
+          <a:extLst>
+            <a:ext uri="{C572A759-6A51-4108-AA02-DFA0A04FC94B}">
+              <ma14:wrappingTextBoxFlag xmlns:ma14="http://schemas.microsoft.com/office/mac/drawingml/2011/main" val="0"/>
+            </a:ext>
+          </a:extLst>
+        </p:spPr>
+        <p:txBody>
+          <a:bodyPr/>
+          <a:lstStyle>
+            <a:lvl1pPr>
+              <a:defRPr sz="900">
+                <a:solidFill>
+                  <a:srgbClr val="1B3A6B"/>
+                </a:solidFill>
+                <a:latin typeface="Arial"/>
+                <a:ea typeface="Arial"/>
+                <a:cs typeface="Arial"/>
+              </a:defRPr>
+            </a:lvl1pPr>
+          </a:lstStyle>
+          <a:p>
+            <a:pPr algn="r"/>
+            <a:fld id="{F7021451-1387-4CA6-816F-3879F97B5CBC}" type="slidenum">
+              <a:rPr b="1" lang="en-US"/>
+              <a:t>5</a:t>
+            </a:fld>
+            <a:endParaRPr lang="en-US"/>
           </a:p>
         </p:txBody>
       </p:sp>
@@ -19112,7 +20726,7 @@
         </p:blipFill>
         <p:spPr>
           <a:xfrm>
-            <a:off x="411480" y="6547104"/>
+            <a:off x="548640" y="6547104"/>
             <a:ext cx="274320" cy="274320"/>
           </a:xfrm>
           <a:prstGeom prst="rect">
@@ -19128,7 +20742,7 @@
         </p:nvSpPr>
         <p:spPr>
           <a:xfrm>
-            <a:off x="749808" y="6528816"/>
+            <a:off x="886968" y="6528816"/>
             <a:ext cx="6400800" cy="310896"/>
           </a:xfrm>
           <a:prstGeom prst="rect">
@@ -19168,7 +20782,7 @@
         <p:spPr>
           <a:xfrm>
             <a:off x="7132320" y="6528816"/>
-            <a:ext cx="4663440" cy="310896"/>
+            <a:ext cx="4023360" cy="310896"/>
           </a:xfrm>
           <a:prstGeom prst="rect">
             <a:avLst/>
@@ -19206,7 +20820,7 @@
         </p:nvSpPr>
         <p:spPr>
           <a:xfrm>
-            <a:off x="411480" y="384048"/>
+            <a:off x="548640" y="384048"/>
             <a:ext cx="82296" cy="658368"/>
           </a:xfrm>
           <a:prstGeom prst="rect">
@@ -19226,7 +20840,7 @@
         </p:nvSpPr>
         <p:spPr>
           <a:xfrm>
-            <a:off x="640080" y="292608"/>
+            <a:off x="777240" y="292608"/>
             <a:ext cx="10972800" cy="274320"/>
           </a:xfrm>
           <a:prstGeom prst="rect">
@@ -19265,8 +20879,8 @@
         </p:nvSpPr>
         <p:spPr>
           <a:xfrm>
-            <a:off x="640080" y="530352"/>
-            <a:ext cx="11155680" cy="566928"/>
+            <a:off x="777240" y="530352"/>
+            <a:ext cx="10881360" cy="566928"/>
           </a:xfrm>
           <a:prstGeom prst="rect">
             <a:avLst/>
@@ -19306,12 +20920,12 @@
         </p:nvSpPr>
         <p:spPr>
           <a:xfrm>
-            <a:off x="411480" y="1325880"/>
-            <a:ext cx="3642360" cy="4892040"/>
+            <a:off x="548640" y="1325880"/>
+            <a:ext cx="3544824" cy="4892040"/>
           </a:xfrm>
           <a:prstGeom prst="roundRect">
             <a:avLst>
-              <a:gd name="adj" fmla="val 2008"/>
+              <a:gd name="adj" fmla="val 2064"/>
             </a:avLst>
           </a:prstGeom>
           <a:solidFill>
@@ -19340,7 +20954,7 @@
         </p:nvSpPr>
         <p:spPr>
           <a:xfrm>
-            <a:off x="594360" y="1508760"/>
+            <a:off x="731520" y="1508760"/>
             <a:ext cx="457200" cy="457200"/>
           </a:xfrm>
           <a:prstGeom prst="ellipse">
@@ -19360,7 +20974,7 @@
         </p:nvSpPr>
         <p:spPr>
           <a:xfrm>
-            <a:off x="594360" y="1508760"/>
+            <a:off x="731520" y="1508760"/>
             <a:ext cx="457200" cy="457200"/>
           </a:xfrm>
           <a:prstGeom prst="rect">
@@ -19399,8 +21013,8 @@
         </p:nvSpPr>
         <p:spPr>
           <a:xfrm>
-            <a:off x="1188720" y="1435608"/>
-            <a:ext cx="2727960" cy="4672584"/>
+            <a:off x="1325880" y="1435608"/>
+            <a:ext cx="2630424" cy="4672584"/>
           </a:xfrm>
           <a:prstGeom prst="rect">
             <a:avLst/>
@@ -19440,12 +21054,12 @@
         </p:nvSpPr>
         <p:spPr>
           <a:xfrm>
-            <a:off x="4282440" y="1325880"/>
-            <a:ext cx="3642360" cy="4892040"/>
+            <a:off x="4322064" y="1325880"/>
+            <a:ext cx="3544824" cy="4892040"/>
           </a:xfrm>
           <a:prstGeom prst="roundRect">
             <a:avLst>
-              <a:gd name="adj" fmla="val 2008"/>
+              <a:gd name="adj" fmla="val 2064"/>
             </a:avLst>
           </a:prstGeom>
           <a:solidFill>
@@ -19474,7 +21088,7 @@
         </p:nvSpPr>
         <p:spPr>
           <a:xfrm>
-            <a:off x="4465320" y="1508760"/>
+            <a:off x="4504944" y="1508760"/>
             <a:ext cx="457200" cy="457200"/>
           </a:xfrm>
           <a:prstGeom prst="ellipse">
@@ -19494,7 +21108,7 @@
         </p:nvSpPr>
         <p:spPr>
           <a:xfrm>
-            <a:off x="4465320" y="1508760"/>
+            <a:off x="4504944" y="1508760"/>
             <a:ext cx="457200" cy="457200"/>
           </a:xfrm>
           <a:prstGeom prst="rect">
@@ -19533,8 +21147,8 @@
         </p:nvSpPr>
         <p:spPr>
           <a:xfrm>
-            <a:off x="5059680" y="1435608"/>
-            <a:ext cx="2727960" cy="4672584"/>
+            <a:off x="5099304" y="1435608"/>
+            <a:ext cx="2630424" cy="4672584"/>
           </a:xfrm>
           <a:prstGeom prst="rect">
             <a:avLst/>
@@ -19574,12 +21188,12 @@
         </p:nvSpPr>
         <p:spPr>
           <a:xfrm>
-            <a:off x="8153400" y="1325880"/>
-            <a:ext cx="3642360" cy="4892040"/>
+            <a:off x="8095488" y="1325880"/>
+            <a:ext cx="3544824" cy="4892040"/>
           </a:xfrm>
           <a:prstGeom prst="roundRect">
             <a:avLst>
-              <a:gd name="adj" fmla="val 2008"/>
+              <a:gd name="adj" fmla="val 2064"/>
             </a:avLst>
           </a:prstGeom>
           <a:solidFill>
@@ -19608,7 +21222,7 @@
         </p:nvSpPr>
         <p:spPr>
           <a:xfrm>
-            <a:off x="8336280" y="1508760"/>
+            <a:off x="8278368" y="1508760"/>
             <a:ext cx="457200" cy="457200"/>
           </a:xfrm>
           <a:prstGeom prst="ellipse">
@@ -19628,7 +21242,7 @@
         </p:nvSpPr>
         <p:spPr>
           <a:xfrm>
-            <a:off x="8336280" y="1508760"/>
+            <a:off x="8278368" y="1508760"/>
             <a:ext cx="457200" cy="457200"/>
           </a:xfrm>
           <a:prstGeom prst="rect">
@@ -19667,8 +21281,8 @@
         </p:nvSpPr>
         <p:spPr>
           <a:xfrm>
-            <a:off x="8930640" y="1435608"/>
-            <a:ext cx="2727960" cy="4672584"/>
+            <a:off x="8872728" y="1435608"/>
+            <a:ext cx="2630424" cy="4672584"/>
           </a:xfrm>
           <a:prstGeom prst="rect">
             <a:avLst/>
@@ -19697,6 +21311,54 @@
               <a:t>indicação e leads perdidos</a:t>
             </a:r>
             <a:endParaRPr lang="en-US" sz="1800" dirty="0"/>
+          </a:p>
+        </p:txBody>
+      </p:sp>
+      <p:sp>
+        <p:nvSpPr>
+          <p:cNvPr id="25" name="Slide Number Placeholder 0"/>
+          <p:cNvSpPr>
+            <a:spLocks noGrp="1"/>
+          </p:cNvSpPr>
+          <p:nvPr>
+            <p:ph type="sldNum" sz="quarter" idx="4294967295"/>
+          </p:nvPr>
+        </p:nvSpPr>
+        <p:spPr>
+          <a:xfrm>
+            <a:off x="11292840" y="6556248"/>
+            <a:ext cx="548640" cy="256032"/>
+          </a:xfrm>
+          <a:prstGeom prst="rect">
+            <a:avLst/>
+          </a:prstGeom>
+          <a:extLst>
+            <a:ext uri="{C572A759-6A51-4108-AA02-DFA0A04FC94B}">
+              <ma14:wrappingTextBoxFlag xmlns:ma14="http://schemas.microsoft.com/office/mac/drawingml/2011/main" val="0"/>
+            </a:ext>
+          </a:extLst>
+        </p:spPr>
+        <p:txBody>
+          <a:bodyPr/>
+          <a:lstStyle>
+            <a:lvl1pPr>
+              <a:defRPr sz="900">
+                <a:solidFill>
+                  <a:srgbClr val="1B3A6B"/>
+                </a:solidFill>
+                <a:latin typeface="Arial"/>
+                <a:ea typeface="Arial"/>
+                <a:cs typeface="Arial"/>
+              </a:defRPr>
+            </a:lvl1pPr>
+          </a:lstStyle>
+          <a:p>
+            <a:pPr algn="r"/>
+            <a:fld id="{F7021451-1387-4CA6-816F-3879F97B5CBC}" type="slidenum">
+              <a:rPr b="1" lang="en-US"/>
+              <a:t>6</a:t>
+            </a:fld>
+            <a:endParaRPr lang="en-US"/>
           </a:p>
         </p:txBody>
       </p:sp>
@@ -19760,6 +21422,45 @@
         </p:nvSpPr>
         <p:spPr>
           <a:xfrm>
+            <a:off x="457200" y="548640"/>
+            <a:ext cx="3474720" cy="1737360"/>
+          </a:xfrm>
+          <a:prstGeom prst="rect">
+            <a:avLst/>
+          </a:prstGeom>
+          <a:noFill/>
+          <a:ln/>
+        </p:spPr>
+        <p:txBody>
+          <a:bodyPr wrap="square" rtlCol="0" anchor="ctr"/>
+          <a:lstStyle/>
+          <a:p>
+            <a:pPr indent="0" marL="0">
+              <a:buNone/>
+            </a:pPr>
+            <a:r>
+              <a:rPr lang="en-US" sz="11000" b="1" dirty="0">
+                <a:solidFill>
+                  <a:srgbClr val="11396F"/>
+                </a:solidFill>
+                <a:latin typeface="Arial" pitchFamily="34" charset="0"/>
+                <a:ea typeface="Arial" pitchFamily="34" charset="-122"/>
+                <a:cs typeface="Arial" pitchFamily="34" charset="-120"/>
+              </a:rPr>
+              <a:t>02</a:t>
+            </a:r>
+            <a:endParaRPr lang="en-US" sz="11000" dirty="0"/>
+          </a:p>
+        </p:txBody>
+      </p:sp>
+      <p:sp>
+        <p:nvSpPr>
+          <p:cNvPr id="4" name="Text 2"/>
+          <p:cNvSpPr/>
+          <p:nvPr/>
+        </p:nvSpPr>
+        <p:spPr>
+          <a:xfrm>
             <a:off x="548640" y="2194560"/>
             <a:ext cx="3291840" cy="548640"/>
           </a:xfrm>
@@ -19793,7 +21494,46 @@
       </p:sp>
       <p:sp>
         <p:nvSpPr>
-          <p:cNvPr id="4" name="Text 2"/>
+          <p:cNvPr id="5" name="Text 3"/>
+          <p:cNvSpPr/>
+          <p:nvPr/>
+        </p:nvSpPr>
+        <p:spPr>
+          <a:xfrm>
+            <a:off x="548640" y="3200400"/>
+            <a:ext cx="3383280" cy="457200"/>
+          </a:xfrm>
+          <a:prstGeom prst="rect">
+            <a:avLst/>
+          </a:prstGeom>
+          <a:noFill/>
+          <a:ln/>
+        </p:spPr>
+        <p:txBody>
+          <a:bodyPr wrap="square" rtlCol="0" anchor="ctr"/>
+          <a:lstStyle/>
+          <a:p>
+            <a:pPr indent="0" marL="0">
+              <a:buNone/>
+            </a:pPr>
+            <a:r>
+              <a:rPr lang="en-US" sz="1100" dirty="0">
+                <a:solidFill>
+                  <a:srgbClr val="C7D2E3"/>
+                </a:solidFill>
+                <a:latin typeface="Arial" pitchFamily="34" charset="0"/>
+                <a:ea typeface="Arial" pitchFamily="34" charset="-122"/>
+                <a:cs typeface="Arial" pitchFamily="34" charset="-120"/>
+              </a:rPr>
+              <a:t>M5 · Etapa 3 · Operação ponta a ponta</a:t>
+            </a:r>
+            <a:endParaRPr lang="en-US" sz="1100" dirty="0"/>
+          </a:p>
+        </p:txBody>
+      </p:sp>
+      <p:sp>
+        <p:nvSpPr>
+          <p:cNvPr id="6" name="Text 4"/>
           <p:cNvSpPr/>
           <p:nvPr/>
         </p:nvSpPr>
@@ -19832,7 +21572,7 @@
       </p:sp>
       <p:pic>
         <p:nvPicPr>
-          <p:cNvPr id="5" name="Image 0" descr="/www/wwwroot/rexar/gdsolar/docs/curso/slides/assets/logo-gdsolar.png">    </p:cNvPr>
+          <p:cNvPr id="7" name="Image 0" descr="/www/wwwroot/rexar/gdsolar/docs/curso/slides/assets/logo-gdsolar.png">    </p:cNvPr>
           <p:cNvPicPr>
             <a:picLocks noChangeAspect="1"/>
           </p:cNvPicPr>
@@ -19856,7 +21596,7 @@
       </p:pic>
       <p:sp>
         <p:nvSpPr>
-          <p:cNvPr id="6" name="Text 3"/>
+          <p:cNvPr id="8" name="Text 5"/>
           <p:cNvSpPr/>
           <p:nvPr/>
         </p:nvSpPr>
@@ -19897,7 +21637,7 @@
       </p:sp>
       <p:sp>
         <p:nvSpPr>
-          <p:cNvPr id="7" name="Text 4"/>
+          <p:cNvPr id="9" name="Text 6"/>
           <p:cNvSpPr/>
           <p:nvPr/>
         </p:nvSpPr>
@@ -19938,7 +21678,7 @@
       </p:sp>
       <p:sp>
         <p:nvSpPr>
-          <p:cNvPr id="8" name="Text 5"/>
+          <p:cNvPr id="10" name="Text 7"/>
           <p:cNvSpPr/>
           <p:nvPr/>
         </p:nvSpPr>
@@ -20117,7 +21857,7 @@
         </p:blipFill>
         <p:spPr>
           <a:xfrm>
-            <a:off x="411480" y="6547104"/>
+            <a:off x="548640" y="6547104"/>
             <a:ext cx="274320" cy="274320"/>
           </a:xfrm>
           <a:prstGeom prst="rect">
@@ -20133,7 +21873,7 @@
         </p:nvSpPr>
         <p:spPr>
           <a:xfrm>
-            <a:off x="749808" y="6528816"/>
+            <a:off x="886968" y="6528816"/>
             <a:ext cx="6400800" cy="310896"/>
           </a:xfrm>
           <a:prstGeom prst="rect">
@@ -20173,7 +21913,7 @@
         <p:spPr>
           <a:xfrm>
             <a:off x="7132320" y="6528816"/>
-            <a:ext cx="4663440" cy="310896"/>
+            <a:ext cx="4023360" cy="310896"/>
           </a:xfrm>
           <a:prstGeom prst="rect">
             <a:avLst/>
@@ -20211,7 +21951,7 @@
         </p:nvSpPr>
         <p:spPr>
           <a:xfrm>
-            <a:off x="411480" y="384048"/>
+            <a:off x="548640" y="384048"/>
             <a:ext cx="82296" cy="658368"/>
           </a:xfrm>
           <a:prstGeom prst="rect">
@@ -20231,7 +21971,7 @@
         </p:nvSpPr>
         <p:spPr>
           <a:xfrm>
-            <a:off x="640080" y="292608"/>
+            <a:off x="777240" y="292608"/>
             <a:ext cx="10972800" cy="274320"/>
           </a:xfrm>
           <a:prstGeom prst="rect">
@@ -20270,8 +22010,8 @@
         </p:nvSpPr>
         <p:spPr>
           <a:xfrm>
-            <a:off x="640080" y="530352"/>
-            <a:ext cx="11155680" cy="566928"/>
+            <a:off x="777240" y="530352"/>
+            <a:ext cx="10881360" cy="566928"/>
           </a:xfrm>
           <a:prstGeom prst="rect">
             <a:avLst/>
@@ -20311,8 +22051,8 @@
         </p:nvSpPr>
         <p:spPr>
           <a:xfrm>
-            <a:off x="411480" y="1325880"/>
-            <a:ext cx="3642360" cy="2331720"/>
+            <a:off x="548640" y="1325880"/>
+            <a:ext cx="3544824" cy="2331720"/>
           </a:xfrm>
           <a:prstGeom prst="roundRect">
             <a:avLst>
@@ -20345,7 +22085,7 @@
         </p:nvSpPr>
         <p:spPr>
           <a:xfrm>
-            <a:off x="594360" y="1508760"/>
+            <a:off x="731520" y="1508760"/>
             <a:ext cx="457200" cy="457200"/>
           </a:xfrm>
           <a:prstGeom prst="ellipse">
@@ -20365,7 +22105,7 @@
         </p:nvSpPr>
         <p:spPr>
           <a:xfrm>
-            <a:off x="594360" y="1508760"/>
+            <a:off x="731520" y="1508760"/>
             <a:ext cx="457200" cy="457200"/>
           </a:xfrm>
           <a:prstGeom prst="rect">
@@ -20404,8 +22144,8 @@
         </p:nvSpPr>
         <p:spPr>
           <a:xfrm>
-            <a:off x="1188720" y="1435608"/>
-            <a:ext cx="2727960" cy="2112264"/>
+            <a:off x="1325880" y="1435608"/>
+            <a:ext cx="2630424" cy="2112264"/>
           </a:xfrm>
           <a:prstGeom prst="rect">
             <a:avLst/>
@@ -20445,8 +22185,8 @@
         </p:nvSpPr>
         <p:spPr>
           <a:xfrm>
-            <a:off x="4282440" y="1325880"/>
-            <a:ext cx="3642360" cy="2331720"/>
+            <a:off x="4322064" y="1325880"/>
+            <a:ext cx="3544824" cy="2331720"/>
           </a:xfrm>
           <a:prstGeom prst="roundRect">
             <a:avLst>
@@ -20479,7 +22219,7 @@
         </p:nvSpPr>
         <p:spPr>
           <a:xfrm>
-            <a:off x="4465320" y="1508760"/>
+            <a:off x="4504944" y="1508760"/>
             <a:ext cx="457200" cy="457200"/>
           </a:xfrm>
           <a:prstGeom prst="ellipse">
@@ -20499,7 +22239,7 @@
         </p:nvSpPr>
         <p:spPr>
           <a:xfrm>
-            <a:off x="4465320" y="1508760"/>
+            <a:off x="4504944" y="1508760"/>
             <a:ext cx="457200" cy="457200"/>
           </a:xfrm>
           <a:prstGeom prst="rect">
@@ -20538,8 +22278,8 @@
         </p:nvSpPr>
         <p:spPr>
           <a:xfrm>
-            <a:off x="5059680" y="1435608"/>
-            <a:ext cx="2727960" cy="2112264"/>
+            <a:off x="5099304" y="1435608"/>
+            <a:ext cx="2630424" cy="2112264"/>
           </a:xfrm>
           <a:prstGeom prst="rect">
             <a:avLst/>
@@ -20579,8 +22319,8 @@
         </p:nvSpPr>
         <p:spPr>
           <a:xfrm>
-            <a:off x="8153400" y="1325880"/>
-            <a:ext cx="3642360" cy="2331720"/>
+            <a:off x="8095488" y="1325880"/>
+            <a:ext cx="3544824" cy="2331720"/>
           </a:xfrm>
           <a:prstGeom prst="roundRect">
             <a:avLst>
@@ -20613,7 +22353,7 @@
         </p:nvSpPr>
         <p:spPr>
           <a:xfrm>
-            <a:off x="8336280" y="1508760"/>
+            <a:off x="8278368" y="1508760"/>
             <a:ext cx="457200" cy="457200"/>
           </a:xfrm>
           <a:prstGeom prst="ellipse">
@@ -20633,7 +22373,7 @@
         </p:nvSpPr>
         <p:spPr>
           <a:xfrm>
-            <a:off x="8336280" y="1508760"/>
+            <a:off x="8278368" y="1508760"/>
             <a:ext cx="457200" cy="457200"/>
           </a:xfrm>
           <a:prstGeom prst="rect">
@@ -20672,8 +22412,8 @@
         </p:nvSpPr>
         <p:spPr>
           <a:xfrm>
-            <a:off x="8930640" y="1435608"/>
-            <a:ext cx="2727960" cy="2112264"/>
+            <a:off x="8872728" y="1435608"/>
+            <a:ext cx="2630424" cy="2112264"/>
           </a:xfrm>
           <a:prstGeom prst="rect">
             <a:avLst/>
@@ -20713,8 +22453,8 @@
         </p:nvSpPr>
         <p:spPr>
           <a:xfrm>
-            <a:off x="411480" y="3886200"/>
-            <a:ext cx="3642360" cy="2331720"/>
+            <a:off x="548640" y="3886200"/>
+            <a:ext cx="3544824" cy="2331720"/>
           </a:xfrm>
           <a:prstGeom prst="roundRect">
             <a:avLst>
@@ -20747,7 +22487,7 @@
         </p:nvSpPr>
         <p:spPr>
           <a:xfrm>
-            <a:off x="594360" y="4069080"/>
+            <a:off x="731520" y="4069080"/>
             <a:ext cx="457200" cy="457200"/>
           </a:xfrm>
           <a:prstGeom prst="ellipse">
@@ -20767,7 +22507,7 @@
         </p:nvSpPr>
         <p:spPr>
           <a:xfrm>
-            <a:off x="594360" y="4069080"/>
+            <a:off x="731520" y="4069080"/>
             <a:ext cx="457200" cy="457200"/>
           </a:xfrm>
           <a:prstGeom prst="rect">
@@ -20806,8 +22546,8 @@
         </p:nvSpPr>
         <p:spPr>
           <a:xfrm>
-            <a:off x="1188720" y="3995928"/>
-            <a:ext cx="2727960" cy="2112264"/>
+            <a:off x="1325880" y="3995928"/>
+            <a:ext cx="2630424" cy="2112264"/>
           </a:xfrm>
           <a:prstGeom prst="rect">
             <a:avLst/>
@@ -20847,8 +22587,8 @@
         </p:nvSpPr>
         <p:spPr>
           <a:xfrm>
-            <a:off x="4282440" y="3886200"/>
-            <a:ext cx="3642360" cy="2331720"/>
+            <a:off x="4322064" y="3886200"/>
+            <a:ext cx="3544824" cy="2331720"/>
           </a:xfrm>
           <a:prstGeom prst="roundRect">
             <a:avLst>
@@ -20881,7 +22621,7 @@
         </p:nvSpPr>
         <p:spPr>
           <a:xfrm>
-            <a:off x="4465320" y="4069080"/>
+            <a:off x="4504944" y="4069080"/>
             <a:ext cx="457200" cy="457200"/>
           </a:xfrm>
           <a:prstGeom prst="ellipse">
@@ -20901,7 +22641,7 @@
         </p:nvSpPr>
         <p:spPr>
           <a:xfrm>
-            <a:off x="4465320" y="4069080"/>
+            <a:off x="4504944" y="4069080"/>
             <a:ext cx="457200" cy="457200"/>
           </a:xfrm>
           <a:prstGeom prst="rect">
@@ -20940,8 +22680,8 @@
         </p:nvSpPr>
         <p:spPr>
           <a:xfrm>
-            <a:off x="5059680" y="3995928"/>
-            <a:ext cx="2727960" cy="2112264"/>
+            <a:off x="5099304" y="3995928"/>
+            <a:ext cx="2630424" cy="2112264"/>
           </a:xfrm>
           <a:prstGeom prst="rect">
             <a:avLst/>
@@ -20981,8 +22721,8 @@
         </p:nvSpPr>
         <p:spPr>
           <a:xfrm>
-            <a:off x="8153400" y="3886200"/>
-            <a:ext cx="3642360" cy="2331720"/>
+            <a:off x="8095488" y="3886200"/>
+            <a:ext cx="3544824" cy="2331720"/>
           </a:xfrm>
           <a:prstGeom prst="roundRect">
             <a:avLst>
@@ -21015,7 +22755,7 @@
         </p:nvSpPr>
         <p:spPr>
           <a:xfrm>
-            <a:off x="8336280" y="4069080"/>
+            <a:off x="8278368" y="4069080"/>
             <a:ext cx="457200" cy="457200"/>
           </a:xfrm>
           <a:prstGeom prst="ellipse">
@@ -21035,7 +22775,7 @@
         </p:nvSpPr>
         <p:spPr>
           <a:xfrm>
-            <a:off x="8336280" y="4069080"/>
+            <a:off x="8278368" y="4069080"/>
             <a:ext cx="457200" cy="457200"/>
           </a:xfrm>
           <a:prstGeom prst="rect">
@@ -21074,8 +22814,8 @@
         </p:nvSpPr>
         <p:spPr>
           <a:xfrm>
-            <a:off x="8930640" y="3995928"/>
-            <a:ext cx="2727960" cy="2112264"/>
+            <a:off x="8872728" y="3995928"/>
+            <a:ext cx="2630424" cy="2112264"/>
           </a:xfrm>
           <a:prstGeom prst="rect">
             <a:avLst/>
@@ -21104,6 +22844,54 @@
               <a:t>valor e tarifa</a:t>
             </a:r>
             <a:endParaRPr lang="en-US" sz="1800" dirty="0"/>
+          </a:p>
+        </p:txBody>
+      </p:sp>
+      <p:sp>
+        <p:nvSpPr>
+          <p:cNvPr id="25" name="Slide Number Placeholder 0"/>
+          <p:cNvSpPr>
+            <a:spLocks noGrp="1"/>
+          </p:cNvSpPr>
+          <p:nvPr>
+            <p:ph type="sldNum" sz="quarter" idx="4294967295"/>
+          </p:nvPr>
+        </p:nvSpPr>
+        <p:spPr>
+          <a:xfrm>
+            <a:off x="11292840" y="6556248"/>
+            <a:ext cx="548640" cy="256032"/>
+          </a:xfrm>
+          <a:prstGeom prst="rect">
+            <a:avLst/>
+          </a:prstGeom>
+          <a:extLst>
+            <a:ext uri="{C572A759-6A51-4108-AA02-DFA0A04FC94B}">
+              <ma14:wrappingTextBoxFlag xmlns:ma14="http://schemas.microsoft.com/office/mac/drawingml/2011/main" val="0"/>
+            </a:ext>
+          </a:extLst>
+        </p:spPr>
+        <p:txBody>
+          <a:bodyPr/>
+          <a:lstStyle>
+            <a:lvl1pPr>
+              <a:defRPr sz="900">
+                <a:solidFill>
+                  <a:srgbClr val="1B3A6B"/>
+                </a:solidFill>
+                <a:latin typeface="Arial"/>
+                <a:ea typeface="Arial"/>
+                <a:cs typeface="Arial"/>
+              </a:defRPr>
+            </a:lvl1pPr>
+          </a:lstStyle>
+          <a:p>
+            <a:pPr algn="r"/>
+            <a:fld id="{F7021451-1387-4CA6-816F-3879F97B5CBC}" type="slidenum">
+              <a:rPr b="1" lang="en-US"/>
+              <a:t>8</a:t>
+            </a:fld>
+            <a:endParaRPr lang="en-US"/>
           </a:p>
         </p:txBody>
       </p:sp>
@@ -21180,7 +22968,7 @@
         </p:blipFill>
         <p:spPr>
           <a:xfrm>
-            <a:off x="411480" y="6547104"/>
+            <a:off x="548640" y="6547104"/>
             <a:ext cx="274320" cy="274320"/>
           </a:xfrm>
           <a:prstGeom prst="rect">
@@ -21196,7 +22984,7 @@
         </p:nvSpPr>
         <p:spPr>
           <a:xfrm>
-            <a:off x="749808" y="6528816"/>
+            <a:off x="886968" y="6528816"/>
             <a:ext cx="6400800" cy="310896"/>
           </a:xfrm>
           <a:prstGeom prst="rect">
@@ -21236,7 +23024,7 @@
         <p:spPr>
           <a:xfrm>
             <a:off x="7132320" y="6528816"/>
-            <a:ext cx="4663440" cy="310896"/>
+            <a:ext cx="4023360" cy="310896"/>
           </a:xfrm>
           <a:prstGeom prst="rect">
             <a:avLst/>
@@ -21274,7 +23062,7 @@
         </p:nvSpPr>
         <p:spPr>
           <a:xfrm>
-            <a:off x="411480" y="384048"/>
+            <a:off x="548640" y="384048"/>
             <a:ext cx="82296" cy="658368"/>
           </a:xfrm>
           <a:prstGeom prst="rect">
@@ -21294,7 +23082,7 @@
         </p:nvSpPr>
         <p:spPr>
           <a:xfrm>
-            <a:off x="640080" y="292608"/>
+            <a:off x="777240" y="292608"/>
             <a:ext cx="10972800" cy="274320"/>
           </a:xfrm>
           <a:prstGeom prst="rect">
@@ -21333,8 +23121,8 @@
         </p:nvSpPr>
         <p:spPr>
           <a:xfrm>
-            <a:off x="640080" y="530352"/>
-            <a:ext cx="11155680" cy="566928"/>
+            <a:off x="777240" y="530352"/>
+            <a:ext cx="10881360" cy="566928"/>
           </a:xfrm>
           <a:prstGeom prst="rect">
             <a:avLst/>
@@ -21374,8 +23162,8 @@
         </p:nvSpPr>
         <p:spPr>
           <a:xfrm>
-            <a:off x="411480" y="1325880"/>
-            <a:ext cx="11384280" cy="4937760"/>
+            <a:off x="548640" y="1325880"/>
+            <a:ext cx="11091672" cy="4937760"/>
           </a:xfrm>
           <a:prstGeom prst="roundRect">
             <a:avLst>
@@ -21396,8 +23184,8 @@
         </p:nvSpPr>
         <p:spPr>
           <a:xfrm>
-            <a:off x="777240" y="1554480"/>
-            <a:ext cx="10652760" cy="4480560"/>
+            <a:off x="914400" y="1554480"/>
+            <a:ext cx="10360152" cy="4480560"/>
           </a:xfrm>
           <a:prstGeom prst="rect">
             <a:avLst/>
@@ -21418,7 +23206,7 @@
               <a:buNone/>
             </a:pPr>
             <a:r>
-              <a:rPr lang="en-US" sz="1800" b="1" dirty="0">
+              <a:rPr lang="en-US" sz="2400" b="1" dirty="0">
                 <a:solidFill>
                   <a:srgbClr val="FFFFFF"/>
                 </a:solidFill>
@@ -21428,7 +23216,7 @@
               </a:rPr>
               <a:t>Clínica (trifásica): média 12 meses = 4.000 kWh</a:t>
             </a:r>
-            <a:endParaRPr lang="en-US" sz="1800" dirty="0"/>
+            <a:endParaRPr lang="en-US" sz="2400" dirty="0"/>
           </a:p>
           <a:p>
             <a:pPr indent="0" marL="0">
@@ -21438,7 +23226,7 @@
               <a:buNone/>
             </a:pPr>
             <a:r>
-              <a:rPr lang="en-US" sz="1800" dirty="0">
+              <a:rPr lang="en-US" sz="2400" dirty="0">
                 <a:solidFill>
                   <a:srgbClr val="FFFFFF"/>
                 </a:solidFill>
@@ -21448,7 +23236,7 @@
               </a:rPr>
               <a:t>Cota = (4.000 − 100) × 95% ≈ 3.705 kWh/mês</a:t>
             </a:r>
-            <a:endParaRPr lang="en-US" sz="1800" dirty="0"/>
+            <a:endParaRPr lang="en-US" sz="2400" dirty="0"/>
           </a:p>
           <a:p>
             <a:pPr indent="0" marL="0">
@@ -21458,7 +23246,7 @@
               <a:buNone/>
             </a:pPr>
             <a:r>
-              <a:rPr lang="en-US" sz="1800" b="1" dirty="0">
+              <a:rPr lang="en-US" sz="2400" b="1" dirty="0">
                 <a:solidFill>
                   <a:srgbClr val="F7A23B"/>
                 </a:solidFill>
@@ -21468,7 +23256,55 @@
               </a:rPr>
               <a:t>% na Sol Nascente I = 3.705 ÷ 60.000 ≈ 6,2%</a:t>
             </a:r>
-            <a:endParaRPr lang="en-US" sz="1800" dirty="0"/>
+            <a:endParaRPr lang="en-US" sz="2400" dirty="0"/>
+          </a:p>
+        </p:txBody>
+      </p:sp>
+      <p:sp>
+        <p:nvSpPr>
+          <p:cNvPr id="25" name="Slide Number Placeholder 0"/>
+          <p:cNvSpPr>
+            <a:spLocks noGrp="1"/>
+          </p:cNvSpPr>
+          <p:nvPr>
+            <p:ph type="sldNum" sz="quarter" idx="4294967295"/>
+          </p:nvPr>
+        </p:nvSpPr>
+        <p:spPr>
+          <a:xfrm>
+            <a:off x="11292840" y="6556248"/>
+            <a:ext cx="548640" cy="256032"/>
+          </a:xfrm>
+          <a:prstGeom prst="rect">
+            <a:avLst/>
+          </a:prstGeom>
+          <a:extLst>
+            <a:ext uri="{C572A759-6A51-4108-AA02-DFA0A04FC94B}">
+              <ma14:wrappingTextBoxFlag xmlns:ma14="http://schemas.microsoft.com/office/mac/drawingml/2011/main" val="0"/>
+            </a:ext>
+          </a:extLst>
+        </p:spPr>
+        <p:txBody>
+          <a:bodyPr/>
+          <a:lstStyle>
+            <a:lvl1pPr>
+              <a:defRPr sz="900">
+                <a:solidFill>
+                  <a:srgbClr val="1B3A6B"/>
+                </a:solidFill>
+                <a:latin typeface="Arial"/>
+                <a:ea typeface="Arial"/>
+                <a:cs typeface="Arial"/>
+              </a:defRPr>
+            </a:lvl1pPr>
+          </a:lstStyle>
+          <a:p>
+            <a:pPr algn="r"/>
+            <a:fld id="{F7021451-1387-4CA6-816F-3879F97B5CBC}" type="slidenum">
+              <a:rPr b="1" lang="en-US"/>
+              <a:t>9</a:t>
+            </a:fld>
+            <a:endParaRPr lang="en-US"/>
           </a:p>
         </p:txBody>
       </p:sp>

--- a/docs/curso/slides/m05-comercial.pptx
+++ b/docs/curso/slides/m05-comercial.pptx
@@ -38,9 +38,13 @@
     <p:sldId id="286" r:id="rId32"/>
     <p:sldId id="287" r:id="rId33"/>
     <p:sldId id="288" r:id="rId34"/>
+    <p:sldId id="289" r:id="rId35"/>
+    <p:sldId id="290" r:id="rId36"/>
+    <p:sldId id="291" r:id="rId37"/>
+    <p:sldId id="292" r:id="rId38"/>
   </p:sldIdLst>
   <p:notesMasterIdLst>
-    <p:notesMasterId r:id="rId35"/>
+    <p:notesMasterId r:id="rId39"/>
   </p:notesMasterIdLst>
   <p:sldSz cx="12192000" cy="6858000"/>
   <p:notesSz cx="6858000" cy="12192000"/>
@@ -622,7 +626,7 @@
           <a:p>
             <a:r>
               <a:rPr lang="en-US" dirty="0"/>
-              <a:t>Agora, a economia — na conta total, como aprendemos no módulo 3. Hoje, a clínica paga perto de quatro mil, cento e cinquenta e seis reais por mês. Com a assinatura, ela vai pagar duas coisas. Para a distribuidora: o consumo que ficou fora da cota — duzentos e noventa e cinco quilowatts-hora, o que já cobre o mínimo trifásico — e a parcela do Fio B que não é compensada sobre os quilowatts-hora compensados. E, para a sua empresa, o valor da energia compensada com o desconto. A calculadora do curso faz essa conta com os valores da sua distribuidora; aqui, com os números ilustrativos, a distribuidora fica em uns oitocentos e oitenta reais, a sua cobrança em uns dois mil, seiscentos e vinte, e a soma em torno de três mil e quinhentos reais: uma economia de uns seiscentos e cinquenta reais por mês, quase sete mil e novecentos reais por ano, cerca de dezesseis por cento da conta. Para um dono de clínica, "quase oito mil reais por ano, sem investir nada e sem obra" é uma frase muito mais forte do que "vinte por cento de desconto". Use sempre o valor em reais, por mês e por ano. E nunca arredonde para cima: prometa o que a conta mostra.</a:t>
+              <a:t>Na conta total, a clínica economiza cerca de seiscentos e cinquenta reais por mês, quase oito mil por ano. Fale sempre em reais, por mês e por ano, e nunca arredonde para cima.</a:t>
             </a:r>
             <a:endParaRPr lang="en-US" dirty="0"/>
           </a:p>
@@ -710,7 +714,7 @@
           <a:p>
             <a:r>
               <a:rPr lang="en-US" dirty="0"/>
-              <a:t>Alguns casos especiais. Cliente com várias unidades consumidoras, como uma rede de farmácias: cada unidade tem a sua cota e o seu percentual no rateio, e a plataforma trata cada uma separadamente. Cliente que está crescendo: dimensione pelo histórico e combine uma revisão em seis meses — aumentar a cota depois é fácil, reduzir pode gerar atrito. E cliente que já tem um sistema solar próprio que cobre só uma parte do consumo: a cota é sobre o que sobra, olhando o consumo líquido nas contas.</a:t>
+              <a:t>Para os casos especiais da tela, a regra é a mesma: dimensione pelo histórico e combine revisões.</a:t>
             </a:r>
             <a:endParaRPr lang="en-US" dirty="0"/>
           </a:p>
@@ -798,7 +802,7 @@
           <a:p>
             <a:r>
               <a:rPr lang="en-US" dirty="0"/>
-              <a:t>Resumindo: peça a conta, pegue o histórico de doze meses, calcule a cota com margem de segurança e apresente a economia em reais, na conta total, por mês e por ano. Na próxima aula, vamos colocar isso numa proposta que convence.</a:t>
+              <a:t/>
             </a:r>
             <a:endParaRPr lang="en-US" dirty="0"/>
           </a:p>
@@ -974,8 +978,8 @@
           <a:p>
             <a:r>
               <a:rPr lang="en-US" dirty="0"/>
-              <a:t>Toda boa proposta responde a cinco perguntas, nesta ordem. Primeira: quanto eu economizo? Em reais, por mês e por ano, como você calculou. Segunda: quanto eu preciso investir? Zero — sem obra, sem painel, sem trocar o medidor. Terceira: como funciona? Uma usina na região injeta energia na rede, os créditos vão para a conta do cliente e ele passa a pagar duas contas menores em vez de uma maior. Quarta: é seguro? Explique que é regulado por lei, que o fornecimento continua com a distribuidora, apresente a sua empresa e o contrato. Quinta: o que eu preciso fazer? A lista de documentos e o próximo passo, com data.
-A maior fonte de confusão, e de cancelamento nos primeiros meses, é o cliente não entender que vai pagar duas contas. Ele recebe a conta da distribuidora bem menor, fica feliz, e depois chega a cobrança da sua empresa e ele pensa: "mas eu não ia economizar?". Por isso, a proposta precisa mostrar isso visualmente. Hoje, uma conta de quatro mil, cento e cinquenta e seis reais. Depois, duas contas: a da distribuidora, de uns oitocentos e oitenta, e a da sua empresa, de uns dois mil e seiscentos. A soma, três mil e quinhentos, é menor. A diferença, perto de seiscentos e cinquenta reais por mês, é a economia. Repita isso na reunião, coloque na proposta e repita no e-mail de boas-vindas. Cliente que entende as duas contas não cancela por susto.</a:t>
+              <a:t>Ela responde, nessa ordem, às cinco perguntas da tela.
+O ponto mais importante é explicar as duas contas. O cliente passa a pagar duas contas menores que, somadas, ficam abaixo da de hoje. Quem não entende isso cancela no primeiro mês por susto. Repita na proposta, na reunião e nas boas-vindas.</a:t>
             </a:r>
             <a:endParaRPr lang="en-US" dirty="0"/>
           </a:p>
@@ -1063,7 +1067,7 @@
           <a:p>
             <a:r>
               <a:rPr lang="en-US" dirty="0"/>
-              <a:t>Algumas condições precisam aparecer na proposta, sem letras miúdas. O prazo do contrato. A data prevista para os créditos começarem — normalmente um a três ciclos de faturamento depois da assinatura, porque depende da lista de rateio na distribuidora. Como o valor da sua cobrança é calculado todo mês: a energia compensada na fatura, com o desconto contratado. Que o valor do crédito acompanha a tarifa e as regras da distribuidora. As condições de cancelamento. E a validade da proposta. Transparência na proposta evita reclamação depois.</a:t>
+              <a:t>As condições da tela precisam estar escritas, sem letras miúdas.</a:t>
             </a:r>
             <a:endParaRPr lang="en-US" dirty="0"/>
           </a:p>
@@ -1151,7 +1155,7 @@
           <a:p>
             <a:r>
               <a:rPr lang="en-US" dirty="0"/>
-              <a:t>A proposta é apresentada, não só enviada. Um roteiro de quinze minutos funciona bem. Nos três primeiros, fale da conta dele hoje: quanto paga, quanto pagou no ano — deixe ele sentir o tamanho do gasto. Do minuto três ao sete, explique como funciona e as duas contas. Do sete ao dez, mostre a economia em reais e as provas: a lei, a sua empresa, os clientes que você já atende. Do dez ao treze, dúvidas e objeções, que é o tema da próxima aula. E nos dois últimos, o próximo passo: quais documentos, quando assina, quando começam os créditos. Saia da reunião sempre com um próximo passo marcado.</a:t>
+              <a:t>Apresente a proposta em quinze minutos, seguindo o roteiro da tela, e saia sempre com o próximo passo marcado.</a:t>
             </a:r>
             <a:endParaRPr lang="en-US" dirty="0"/>
           </a:p>
@@ -1239,7 +1243,7 @@
           <a:p>
             <a:r>
               <a:rPr lang="en-US" dirty="0"/>
-              <a:t>Resumindo: a proposta responde às cinco perguntas, mostra as duas contas, deixa as condições claras e é apresentada numa reunião curta, com próximo passo. A plataforma gera o PDF com os números; você vai fazer isso no laboratório desta etapa. Na próxima aula, as objeções.</a:t>
+              <a:t/>
             </a:r>
             <a:endParaRPr lang="en-US" dirty="0"/>
           </a:p>
@@ -1415,7 +1419,7 @@
           <a:p>
             <a:r>
               <a:rPr lang="en-US" dirty="0"/>
-              <a:t>O primeiro bloco é de confiança. "Isso é golpe?" A resposta: é um modelo previsto em lei, a Lei 14.300 de 2022; você continua cliente da distribuidora, recebendo a conta dela normalmente; nós somos uma empresa com CNPJ, com contrato por escrito; e aqui estão clientes que já atendemos — se puder, dê o contato de um cliente que aceite ser referência. "A distribuidora vai cortar a minha luz?" Não. O fornecimento continua exatamente o mesmo, pela mesma rede. A única diferença é que parte da sua energia passa a ser compensada por créditos de uma usina. "Preciso trocar o medidor ou fazer alguma obra?" Não. Nada muda na sua casa ou no seu estabelecimento.</a:t>
+              <a:t>Nas objeções de confiança, apoie-se na lei, no contrato e em clientes de referência. O fornecimento continua o mesmo e nada muda na instalação.</a:t>
             </a:r>
             <a:endParaRPr lang="en-US" dirty="0"/>
           </a:p>
@@ -1591,7 +1595,7 @@
           <a:p>
             <a:r>
               <a:rPr lang="en-US" dirty="0"/>
-              <a:t>O segundo bloco é de entendimento. "Vou pagar duas contas?" Sim — e é por isso que você vai economizar: duas contas menores que, somadas, ficam abaixo da de hoje. Mostre a conta, com os números dele. "Por que não vinte por cento na conta toda?" Porque o desconto é sobre a energia compensada; uma parte da conta continua sendo da distribuidora — o mínimo e o uso da rede —, e a sua economia real é de tantos reais por mês. Seja direto e mostre o número. "E se a usina gerar menos num mês?" Você recebe proporcionalmente menos créditos e paga proporcionalmente menos para nós, porque a cobrança é calculada sobre o que foi efetivamente compensado na sua fatura. Você nunca paga por energia que não recebeu. Essa resposta é verdadeira por causa da forma como a cobrança é calculada na plataforma: ela parte da energia compensada na fatura da distribuidora.</a:t>
+              <a:t>Nas de entendimento, mostre a conta do próprio cliente. E lembre: ele nunca paga por energia que não recebeu, porque a cobrança parte do que foi compensado na fatura.</a:t>
             </a:r>
             <a:endParaRPr lang="en-US" dirty="0"/>
           </a:p>
@@ -1679,7 +1683,7 @@
           <a:p>
             <a:r>
               <a:rPr lang="en-US" dirty="0"/>
-              <a:t>O terceiro bloco é de compromisso. "Tem fidelidade? E multa?" Responda exatamente o que o seu contrato diz: o prazo, o aviso prévio para cancelar, e se há alguma condição. Contratos com cancelamento simples, com aviso prévio de um ou dois ciclos, para que dê tempo de ajustar o rateio, vendem mais e geram menos reclamação do que multas pesadas. "E se eu mudar de endereço?" Se o novo endereço estiver na área da mesma distribuidora, a cota pode ser transferida para a nova unidade consumidora; se não, o contrato é encerrado nas condições previstas. "E essa história de Fio B, de mudança de regra?" Seja honesto: a economia acompanha as regras e a tarifa da distribuidora; a lei prevê uma transição, e nós mostramos a conta todo mês no seu relatório de economia; o contrato prevê como funciona um eventual ajuste.</a:t>
+              <a:t>Nas de compromisso, responda exatamente o que o contrato diz. Cancelamento simples, com aviso prévio, vende mais que multa pesada.</a:t>
             </a:r>
             <a:endParaRPr lang="en-US" dirty="0"/>
           </a:p>
@@ -1767,7 +1771,7 @@
           <a:p>
             <a:r>
               <a:rPr lang="en-US" dirty="0"/>
-              <a:t>E a décima, a mais comum: "vou pensar". Não pressione, mas descubra o que falta: "Claro. Para eu te ajudar: o que falta para você decidir?" Muitas vezes, a resposta revela a objeção real — confiança, entendimento, sócio que precisa aprovar. Combine uma data de retorno e envie um resumo por escrito, com a economia anual em destaque. A frase "você está deixando de economizar tantos reais por mês" funciona melhor do que qualquer pressão.</a:t>
+              <a:t>E no vou pensar, pergunte o que falta para decidir, combine um retorno e envie a economia anual por escrito.</a:t>
             </a:r>
             <a:endParaRPr lang="en-US" dirty="0"/>
           </a:p>
@@ -1855,7 +1859,7 @@
           <a:p>
             <a:r>
               <a:rPr lang="en-US" dirty="0"/>
-              <a:t>Resumindo: as objeções se dividem em confiança, entendimento, compromisso e timing. Responda curto, com verdade e com o número do cliente na mão. A lista completa, com as respostas, está nos materiais: adapte ao seu contrato e treine com o seu time. Na próxima aula, como organizar o funil e a carteira dos vendedores.</a:t>
+              <a:t/>
             </a:r>
             <a:endParaRPr lang="en-US" dirty="0"/>
           </a:p>
@@ -2031,7 +2035,7 @@
           <a:p>
             <a:r>
               <a:rPr lang="en-US" dirty="0"/>
-              <a:t>O funil da assinatura tem estas etapas. O lead, que é o contato inicial. A conta de luz recebida — esse é o primeiro sinal real de interesse. A proposta apresentada. O aceite. O contrato assinado com os documentos. A inclusão no rateio da usina. E a primeira cobrança paga, que é quando a venda de fato aconteceu. Os percentuais na tela são ilustrativos, mas mostram uma lógica: de cada cem leads, talvez metade envie a conta, e, no fim, uns catorze viram clientes pagantes. Meça as suas taxas reais desde o primeiro mês; elas vão dizer onde o funil está vazando.</a:t>
+              <a:t>Meça cada etapa do funil desde o primeiro mês. As taxas reais mostram onde ele vaza.</a:t>
             </a:r>
             <a:endParaRPr lang="en-US" dirty="0"/>
           </a:p>
@@ -2119,7 +2123,7 @@
           <a:p>
             <a:r>
               <a:rPr lang="en-US" dirty="0"/>
-              <a:t>Agora, ligue o funil ao seu plano. No módulo 3, o ponto de equilíbrio do exemplo era de uns quinhentos e quarenta clientes. Se você quer chegar lá em dezoito meses, precisa de trinta clientes novos por mês. Com uma conversão de catorze por cento, são cerca de duzentos e quinze leads por mês. Se um consultor fecha, em média, seis clientes por mês, você precisa de cinco consultores. Esses números mostram, logo de cara, se o seu plano é realista e quanto você precisa investir em marketing e em equipe. E lembre: clientes empresariais trazem mais quilowatts-hora por venda, o que reduz o número de vendas necessárias.</a:t>
+              <a:t>Ligue o funil ao plano: do ponto de equilíbrio sai a meta de clientes, e dela os leads e o número de consultores.</a:t>
             </a:r>
             <a:endParaRPr lang="en-US" dirty="0"/>
           </a:p>
@@ -2207,7 +2211,7 @@
           <a:p>
             <a:r>
               <a:rPr lang="en-US" dirty="0"/>
-              <a:t>A comissão define o comportamento do time. Se você paga por contrato assinado, o vendedor fecha qualquer cliente — o que consome pouco, o que vai mudar, o que não entendeu as duas contas. Se você paga depois da primeira cobrança paga, ele se preocupa com o cliente certo e com a explicação correta. Um modelo que funciona bem: uma comissão equivalente a uma mensalidade depois da primeira cobrança paga, mais uma pequena recorrência enquanto o cliente permanecer ativo. Assim, o vendedor também ganha com a retenção.</a:t>
+              <a:t>Pague comissão depois da primeira cobrança paga. Assim o vendedor busca o cliente certo e explica direito.</a:t>
             </a:r>
             <a:endParaRPr lang="en-US" dirty="0"/>
           </a:p>
@@ -2295,7 +2299,7 @@
           <a:p>
             <a:r>
               <a:rPr lang="en-US" dirty="0"/>
-              <a:t>Na plataforma, cada consultor trabalha na própria carteira: vê só os clientes, produtores e propostas dele. As propostas têm status — rascunho, emitida, enviada, aprovada, recusada, expirada, convertida —, que correspondem às etapas do funil. Toda semana, olhe com cada consultor as propostas enviadas e não respondidas e as que vão expirar. Como administrador, você vê todos os consultores, e os relatórios mostram o desempenho de cada um.</a:t>
+              <a:t>Cada consultor vê só a própria carteira status da proposta = etapa do funil</a:t>
             </a:r>
             <a:endParaRPr lang="en-US" dirty="0"/>
           </a:p>
@@ -2383,7 +2387,7 @@
           <a:p>
             <a:r>
               <a:rPr lang="en-US" dirty="0"/>
-              <a:t>Resumindo: meça o funil, derive a meta de vendas do seu ponto de equilíbrio, pague comissão sobre cliente pagante e faça a revisão semanal das propostas. No laboratório a seguir, você cadastra os primeiros clientes e as propostas da sua empresa.</a:t>
+              <a:t/>
             </a:r>
             <a:endParaRPr lang="en-US" dirty="0"/>
           </a:p>
@@ -2471,7 +2475,7 @@
           <a:p>
             <a:r>
               <a:rPr lang="en-US" dirty="0"/>
-              <a:t>São cinco critérios. Primeiro, ser do grupo B e estar na área da sua distribuidora, porque é lá que a sua usina está. Segundo, consumo alto e estável. No comércio e nos serviços, algo entre mil e dez mil quilowatts-hora por mês é a faixa ideal: uma venda já ocupa uma boa fatia da usina. Nas residências, a partir de uns trezentos quilowatts-hora; abaixo disso, a economia em reais é pequena, o cliente dá o mesmo trabalho e a sua margem por cliente cai muito. Terceiro, ser bom pagador: um negócio estabelecido há anos, uma família com histórico. Quarto, não ter planos de mudar de endereço ou de instalar um sistema próprio no curto prazo. E quinto, decisor acessível: no comércio, o dono; não um processo de compras de três meses.</a:t>
+              <a:t>Os cinco critérios estão na tela. O mais decisivo é consumo alto e estável: uma venda boa ocupa uma boa fatia da usina.</a:t>
             </a:r>
             <a:endParaRPr lang="en-US" dirty="0"/>
           </a:p>
@@ -2647,10 +2651,10 @@
           <a:p>
             <a:r>
               <a:rPr lang="en-US" dirty="0"/>
-              <a:t>Abra Cliente Consumidor e depois Clientes. Clique para cadastrar um novo cliente. Vamos usar uma academia fictícia: pessoa jurídica, com o CNPJ da lista de documentos do curso. Preencha a razão social, o nome fantasia e os contatos — e-mail e celular são importantes, porque é por eles que o cliente vai receber o convite do portal e os avisos de cobrança. Salve. O cliente recebe um código e já entra com o desconto padrão da sua empresa, aquele que você configurou no módulo 3. Como no produtor, a plataforma valida os dígitos do CPF ou CNPJ e não deixa cadastrar o mesmo documento duas vezes.
-Agora, a unidade consumidora. Na ficha do cliente, abra a aba de unidades consumidoras e cadastre uma nova. O código da UC é o número da instalação que aparece na conta de luz; pode digitar com pontos e traços, a plataforma guarda só os dígitos. Dê um rótulo que ajude a identificar, como "Academia — Centro". Escolha a concessionária — a mesma da sua usina. E informe o consumo previsto mensal: a média de doze meses, seis mil e duzentos quilowatts-hora. Salve. Repare: a combinação de código da UC e concessionária é única no sistema. Se alguém tentar cadastrar a mesma UC de novo, a plataforma impede. Isso é fundamental, porque é pela UC que as faturas da distribuidora vão ser associadas ao cliente certo no módulo 7.
-Agora abra Cliente Consumidor, Propostas, e crie uma nova. Selecione a academia. Escolha a concessionária e a unidade consumidora. Informe a média de consumo e o valor médio da conta, em reais — é com eles que a proposta calcula a economia. A taxa de redução já vem com o desconto do cliente; ajuste se você negociou algo diferente. Preencha o prazo e a validade da proposta e, nas observações, o que for específico, como a data prevista de início dos créditos. Salve. A proposta nasce com o status de emitida. Quando você enviar ao cliente, mude para enviada; quando ele aceitar, aprovada. Esses status alimentam o funil que você viu na aula anterior.
-Gere o PDF. A proposta sai com a identidade visual da sua empresa, a economia estimada e as condições. Confira os números com a sua calculadora: se a economia mostrada for diferente da que você calculou na conta total, entenda o porquê antes de enviar — por exemplo, se o valor médio informado inclui iluminação pública ou bandeira. O link do PDF é temporário; para enviar, baixe o arquivo ou use a opção de enviar ao cliente, que gera uma mensagem pronta no WhatsApp com o seu número de consultor. O envio continua sendo um clique humano: nada sai sozinho.</a:t>
+              <a:t>Em Cliente Consumidor, Clientes, crie uma academia como pessoa jurídica, com CNPJ fictício e contatos. Ela já recebe o desconto padrão.
+Na aba de unidades consumidoras, cadastre a UC: código da instalação, rótulo, concessionária e consumo previsto.
+Em Propostas, crie a proposta: cliente, UC, média de consumo, valor médio, desconto, prazo e validade.
+Gere o PDF e confira a economia com a calculadora. O envio por WhatsApp é com um clique, pelo consultor.</a:t>
             </a:r>
             <a:endParaRPr lang="en-US" dirty="0"/>
           </a:p>
@@ -2868,6 +2872,358 @@
 </p:notes>
 </file>
 
+<file path=ppt/notesSlides/notesSlide34.xml><?xml version="1.0" encoding="utf-8"?>
+<p:notes xmlns:a="http://schemas.openxmlformats.org/drawingml/2006/main" xmlns:r="http://schemas.openxmlformats.org/officeDocument/2006/relationships" xmlns:p="http://schemas.openxmlformats.org/presentationml/2006/main">
+  <p:cSld>
+    <p:spTree>
+      <p:nvGrpSpPr>
+        <p:cNvPr id="1" name=""/>
+        <p:cNvGrpSpPr/>
+        <p:nvPr/>
+      </p:nvGrpSpPr>
+      <p:grpSpPr>
+        <a:xfrm>
+          <a:off x="0" y="0"/>
+          <a:ext cx="0" cy="0"/>
+          <a:chOff x="0" y="0"/>
+          <a:chExt cx="0" cy="0"/>
+        </a:xfrm>
+      </p:grpSpPr>
+      <p:sp>
+        <p:nvSpPr>
+          <p:cNvPr id="2" name="Slide Image Placeholder 1"/>
+          <p:cNvSpPr>
+            <a:spLocks noGrp="1" noRot="1" noChangeAspect="1"/>
+          </p:cNvSpPr>
+          <p:nvPr>
+            <p:ph type="sldImg"/>
+          </p:nvPr>
+        </p:nvSpPr>
+        <p:spPr/>
+      </p:sp>
+      <p:sp>
+        <p:nvSpPr>
+          <p:cNvPr id="3" name="Notes Placeholder 2"/>
+          <p:cNvSpPr>
+            <a:spLocks noGrp="1"/>
+          </p:cNvSpPr>
+          <p:nvPr>
+            <p:ph type="body" idx="1"/>
+          </p:nvPr>
+        </p:nvSpPr>
+        <p:spPr/>
+        <p:txBody>
+          <a:bodyPr/>
+          <a:lstStyle/>
+          <a:p>
+            <a:r>
+              <a:rPr lang="en-US" dirty="0"/>
+              <a:t/>
+            </a:r>
+            <a:endParaRPr lang="en-US" dirty="0"/>
+          </a:p>
+        </p:txBody>
+      </p:sp>
+      <p:sp>
+        <p:nvSpPr>
+          <p:cNvPr id="4" name="Slide Number Placeholder 3"/>
+          <p:cNvSpPr>
+            <a:spLocks noGrp="1"/>
+          </p:cNvSpPr>
+          <p:nvPr>
+            <p:ph type="sldNum" sz="quarter" idx="10"/>
+          </p:nvPr>
+        </p:nvSpPr>
+        <p:spPr/>
+        <p:txBody>
+          <a:bodyPr/>
+          <a:lstStyle/>
+          <a:p>
+            <a:fld id="{F7021451-1387-4CA6-816F-3879F97B5CBC}" type="slidenum">
+              <a:rPr lang="en-US"/>
+              <a:t>34</a:t>
+            </a:fld>
+            <a:endParaRPr lang="en-US"/>
+          </a:p>
+        </p:txBody>
+      </p:sp>
+    </p:spTree>
+    <p:extLst>
+      <p:ext uri="{BB962C8B-B14F-4D97-AF65-F5344CB8AC3E}">
+        <p14:creationId xmlns:p14="http://schemas.microsoft.com/office/powerpoint/2010/main" val="1024086991"/>
+      </p:ext>
+    </p:extLst>
+  </p:cSld>
+  <p:clrMapOvr>
+    <a:masterClrMapping/>
+  </p:clrMapOvr>
+</p:notes>
+</file>
+
+<file path=ppt/notesSlides/notesSlide35.xml><?xml version="1.0" encoding="utf-8"?>
+<p:notes xmlns:a="http://schemas.openxmlformats.org/drawingml/2006/main" xmlns:r="http://schemas.openxmlformats.org/officeDocument/2006/relationships" xmlns:p="http://schemas.openxmlformats.org/presentationml/2006/main">
+  <p:cSld>
+    <p:spTree>
+      <p:nvGrpSpPr>
+        <p:cNvPr id="1" name=""/>
+        <p:cNvGrpSpPr/>
+        <p:nvPr/>
+      </p:nvGrpSpPr>
+      <p:grpSpPr>
+        <a:xfrm>
+          <a:off x="0" y="0"/>
+          <a:ext cx="0" cy="0"/>
+          <a:chOff x="0" y="0"/>
+          <a:chExt cx="0" cy="0"/>
+        </a:xfrm>
+      </p:grpSpPr>
+      <p:sp>
+        <p:nvSpPr>
+          <p:cNvPr id="2" name="Slide Image Placeholder 1"/>
+          <p:cNvSpPr>
+            <a:spLocks noGrp="1" noRot="1" noChangeAspect="1"/>
+          </p:cNvSpPr>
+          <p:nvPr>
+            <p:ph type="sldImg"/>
+          </p:nvPr>
+        </p:nvSpPr>
+        <p:spPr/>
+      </p:sp>
+      <p:sp>
+        <p:nvSpPr>
+          <p:cNvPr id="3" name="Notes Placeholder 2"/>
+          <p:cNvSpPr>
+            <a:spLocks noGrp="1"/>
+          </p:cNvSpPr>
+          <p:nvPr>
+            <p:ph type="body" idx="1"/>
+          </p:nvPr>
+        </p:nvSpPr>
+        <p:spPr/>
+        <p:txBody>
+          <a:bodyPr/>
+          <a:lstStyle/>
+          <a:p>
+            <a:r>
+              <a:rPr lang="en-US" dirty="0"/>
+              <a:t/>
+            </a:r>
+            <a:endParaRPr lang="en-US" dirty="0"/>
+          </a:p>
+        </p:txBody>
+      </p:sp>
+      <p:sp>
+        <p:nvSpPr>
+          <p:cNvPr id="4" name="Slide Number Placeholder 3"/>
+          <p:cNvSpPr>
+            <a:spLocks noGrp="1"/>
+          </p:cNvSpPr>
+          <p:nvPr>
+            <p:ph type="sldNum" sz="quarter" idx="10"/>
+          </p:nvPr>
+        </p:nvSpPr>
+        <p:spPr/>
+        <p:txBody>
+          <a:bodyPr/>
+          <a:lstStyle/>
+          <a:p>
+            <a:fld id="{F7021451-1387-4CA6-816F-3879F97B5CBC}" type="slidenum">
+              <a:rPr lang="en-US"/>
+              <a:t>35</a:t>
+            </a:fld>
+            <a:endParaRPr lang="en-US"/>
+          </a:p>
+        </p:txBody>
+      </p:sp>
+    </p:spTree>
+    <p:extLst>
+      <p:ext uri="{BB962C8B-B14F-4D97-AF65-F5344CB8AC3E}">
+        <p14:creationId xmlns:p14="http://schemas.microsoft.com/office/powerpoint/2010/main" val="1024086991"/>
+      </p:ext>
+    </p:extLst>
+  </p:cSld>
+  <p:clrMapOvr>
+    <a:masterClrMapping/>
+  </p:clrMapOvr>
+</p:notes>
+</file>
+
+<file path=ppt/notesSlides/notesSlide36.xml><?xml version="1.0" encoding="utf-8"?>
+<p:notes xmlns:a="http://schemas.openxmlformats.org/drawingml/2006/main" xmlns:r="http://schemas.openxmlformats.org/officeDocument/2006/relationships" xmlns:p="http://schemas.openxmlformats.org/presentationml/2006/main">
+  <p:cSld>
+    <p:spTree>
+      <p:nvGrpSpPr>
+        <p:cNvPr id="1" name=""/>
+        <p:cNvGrpSpPr/>
+        <p:nvPr/>
+      </p:nvGrpSpPr>
+      <p:grpSpPr>
+        <a:xfrm>
+          <a:off x="0" y="0"/>
+          <a:ext cx="0" cy="0"/>
+          <a:chOff x="0" y="0"/>
+          <a:chExt cx="0" cy="0"/>
+        </a:xfrm>
+      </p:grpSpPr>
+      <p:sp>
+        <p:nvSpPr>
+          <p:cNvPr id="2" name="Slide Image Placeholder 1"/>
+          <p:cNvSpPr>
+            <a:spLocks noGrp="1" noRot="1" noChangeAspect="1"/>
+          </p:cNvSpPr>
+          <p:nvPr>
+            <p:ph type="sldImg"/>
+          </p:nvPr>
+        </p:nvSpPr>
+        <p:spPr/>
+      </p:sp>
+      <p:sp>
+        <p:nvSpPr>
+          <p:cNvPr id="3" name="Notes Placeholder 2"/>
+          <p:cNvSpPr>
+            <a:spLocks noGrp="1"/>
+          </p:cNvSpPr>
+          <p:nvPr>
+            <p:ph type="body" idx="1"/>
+          </p:nvPr>
+        </p:nvSpPr>
+        <p:spPr/>
+        <p:txBody>
+          <a:bodyPr/>
+          <a:lstStyle/>
+          <a:p>
+            <a:r>
+              <a:rPr lang="en-US" dirty="0"/>
+              <a:t/>
+            </a:r>
+            <a:endParaRPr lang="en-US" dirty="0"/>
+          </a:p>
+        </p:txBody>
+      </p:sp>
+      <p:sp>
+        <p:nvSpPr>
+          <p:cNvPr id="4" name="Slide Number Placeholder 3"/>
+          <p:cNvSpPr>
+            <a:spLocks noGrp="1"/>
+          </p:cNvSpPr>
+          <p:nvPr>
+            <p:ph type="sldNum" sz="quarter" idx="10"/>
+          </p:nvPr>
+        </p:nvSpPr>
+        <p:spPr/>
+        <p:txBody>
+          <a:bodyPr/>
+          <a:lstStyle/>
+          <a:p>
+            <a:fld id="{F7021451-1387-4CA6-816F-3879F97B5CBC}" type="slidenum">
+              <a:rPr lang="en-US"/>
+              <a:t>36</a:t>
+            </a:fld>
+            <a:endParaRPr lang="en-US"/>
+          </a:p>
+        </p:txBody>
+      </p:sp>
+    </p:spTree>
+    <p:extLst>
+      <p:ext uri="{BB962C8B-B14F-4D97-AF65-F5344CB8AC3E}">
+        <p14:creationId xmlns:p14="http://schemas.microsoft.com/office/powerpoint/2010/main" val="1024086991"/>
+      </p:ext>
+    </p:extLst>
+  </p:cSld>
+  <p:clrMapOvr>
+    <a:masterClrMapping/>
+  </p:clrMapOvr>
+</p:notes>
+</file>
+
+<file path=ppt/notesSlides/notesSlide37.xml><?xml version="1.0" encoding="utf-8"?>
+<p:notes xmlns:a="http://schemas.openxmlformats.org/drawingml/2006/main" xmlns:r="http://schemas.openxmlformats.org/officeDocument/2006/relationships" xmlns:p="http://schemas.openxmlformats.org/presentationml/2006/main">
+  <p:cSld>
+    <p:spTree>
+      <p:nvGrpSpPr>
+        <p:cNvPr id="1" name=""/>
+        <p:cNvGrpSpPr/>
+        <p:nvPr/>
+      </p:nvGrpSpPr>
+      <p:grpSpPr>
+        <a:xfrm>
+          <a:off x="0" y="0"/>
+          <a:ext cx="0" cy="0"/>
+          <a:chOff x="0" y="0"/>
+          <a:chExt cx="0" cy="0"/>
+        </a:xfrm>
+      </p:grpSpPr>
+      <p:sp>
+        <p:nvSpPr>
+          <p:cNvPr id="2" name="Slide Image Placeholder 1"/>
+          <p:cNvSpPr>
+            <a:spLocks noGrp="1" noRot="1" noChangeAspect="1"/>
+          </p:cNvSpPr>
+          <p:nvPr>
+            <p:ph type="sldImg"/>
+          </p:nvPr>
+        </p:nvSpPr>
+        <p:spPr/>
+      </p:sp>
+      <p:sp>
+        <p:nvSpPr>
+          <p:cNvPr id="3" name="Notes Placeholder 2"/>
+          <p:cNvSpPr>
+            <a:spLocks noGrp="1"/>
+          </p:cNvSpPr>
+          <p:nvPr>
+            <p:ph type="body" idx="1"/>
+          </p:nvPr>
+        </p:nvSpPr>
+        <p:spPr/>
+        <p:txBody>
+          <a:bodyPr/>
+          <a:lstStyle/>
+          <a:p>
+            <a:r>
+              <a:rPr lang="en-US" dirty="0"/>
+              <a:t/>
+            </a:r>
+            <a:endParaRPr lang="en-US" dirty="0"/>
+          </a:p>
+        </p:txBody>
+      </p:sp>
+      <p:sp>
+        <p:nvSpPr>
+          <p:cNvPr id="4" name="Slide Number Placeholder 3"/>
+          <p:cNvSpPr>
+            <a:spLocks noGrp="1"/>
+          </p:cNvSpPr>
+          <p:nvPr>
+            <p:ph type="sldNum" sz="quarter" idx="10"/>
+          </p:nvPr>
+        </p:nvSpPr>
+        <p:spPr/>
+        <p:txBody>
+          <a:bodyPr/>
+          <a:lstStyle/>
+          <a:p>
+            <a:fld id="{F7021451-1387-4CA6-816F-3879F97B5CBC}" type="slidenum">
+              <a:rPr lang="en-US"/>
+              <a:t>37</a:t>
+            </a:fld>
+            <a:endParaRPr lang="en-US"/>
+          </a:p>
+        </p:txBody>
+      </p:sp>
+    </p:spTree>
+    <p:extLst>
+      <p:ext uri="{BB962C8B-B14F-4D97-AF65-F5344CB8AC3E}">
+        <p14:creationId xmlns:p14="http://schemas.microsoft.com/office/powerpoint/2010/main" val="1024086991"/>
+      </p:ext>
+    </p:extLst>
+  </p:cSld>
+  <p:clrMapOvr>
+    <a:masterClrMapping/>
+  </p:clrMapOvr>
+</p:notes>
+</file>
+
 <file path=ppt/notesSlides/notesSlide4.xml><?xml version="1.0" encoding="utf-8"?>
 <p:notes xmlns:a="http://schemas.openxmlformats.org/drawingml/2006/main" xmlns:r="http://schemas.openxmlformats.org/officeDocument/2006/relationships" xmlns:p="http://schemas.openxmlformats.org/presentationml/2006/main">
   <p:cSld>
@@ -2914,7 +3270,7 @@
           <a:p>
             <a:r>
               <a:rPr lang="en-US" dirty="0"/>
-              <a:t>Na prática, alguns segmentos funcionam muito bem: padarias e restaurantes, com fornos e refrigeração; clínicas e consultórios, com ar-condicionado e equipamentos; academias; escolas particulares; farmácias; pousadas; escritórios; mercados de bairro; igrejas. E residências de alto consumo, com ar-condicionado e piscina. Escolha dois ou três segmentos para começar e fique especialista neles: você aprende a linguagem, as objeções e o consumo típico, e um cliente indica outro do mesmo setor.</a:t>
+              <a:t>Escolha dois ou três segmentos da lista e fique especialista neles. Um cliente indica outro do mesmo setor.</a:t>
             </a:r>
             <a:endParaRPr lang="en-US" dirty="0"/>
           </a:p>
@@ -3002,8 +3358,8 @@
           <a:p>
             <a:r>
               <a:rPr lang="en-US" dirty="0"/>
-              <a:t>E quem evitar, pelo menos no começo? Clientes com consumo muito baixo. Famílias com tarifa social, que já têm desconto na tarifa e podem ter uma economia pequena — avalie caso a caso. Clientes do grupo A, cuja proposta é mais complexa, por causa da demanda; deixe para quando a operação estiver madura. Quem vai mudar de endereço em breve. E quem já tem um sistema solar próprio que cobre o consumo.
-Agora, onde encontrar esses clientes. Indicação é o canal mais barato: cada cliente satisfeito conhece outros. Crie um programa de indicação desde o primeiro dia. Parceiros: contadores, que conhecem as contas de luz dos clientes; associações comerciais; imobiliárias. Prospecção ativa no comércio, com visita e a conta de luz na mão. Anúncios locais, segmentados por região. E aqui vai um ouro para quem já tem empresa solar: os leads que não compraram sistema. Pense em quantos orçamentos você fez para gente que não tinha telhado adequado, que mora de aluguel, que não tinha capital ou não conseguiu financiamento. Todos eles queriam economizar na conta de luz. Para eles, a assinatura é a resposta perfeita: economia sem investimento e sem obra. A sua base de orçamentos perdidos pode ser a sua primeira carteira de assinantes.</a:t>
+              <a:t>Evite, no começo, os perfis da tela. Eles dão trabalho e trazem pouca margem.
+O canal mais barato é a indicação. E, se você já tem empresa solar, os orçamentos que não fecharam por falta de telhado ou de capital são a sua primeira carteira de assinantes.</a:t>
             </a:r>
             <a:endParaRPr lang="en-US" dirty="0"/>
           </a:p>
@@ -3091,7 +3447,7 @@
           <a:p>
             <a:r>
               <a:rPr lang="en-US" dirty="0"/>
-              <a:t>Resumindo: o cliente ideal é do grupo B, na sua distribuidora, com consumo alto e estável, bom pagador e decisor acessível. Escolha dois ou três segmentos e use indicação, parceiros e, se você já é do setor solar, os seus leads perdidos. Defina o seu ICP no entregável. Na próxima aula, vamos dimensionar a cota de cada cliente.</a:t>
+              <a:t/>
             </a:r>
             <a:endParaRPr lang="en-US" dirty="0"/>
           </a:p>
@@ -3267,7 +3623,7 @@
           <a:p>
             <a:r>
               <a:rPr lang="en-US" dirty="0"/>
-              <a:t>Da conta de luz mais recente, você tira: o número da unidade consumidora, o titular, a classe, o tipo de ligação e, principalmente, o histórico de consumo dos últimos doze meses, que quase toda distribuidora imprime na conta, em gráfico ou tabela. Se o histórico não aparece, peça as doze últimas contas, ou o cliente pode baixá-las no aplicativo da distribuidora. Confirme também que o titular da conta é quem vai assinar o contrato. Se a conta está no nome do antigo inquilino ou de um parente, resolva isso antes: a troca de titularidade na distribuidora é responsabilidade do cliente.</a:t>
+              <a:t>Da conta, você tira os dados da tela, principalmente o histórico de doze meses. Confirme também que o titular da conta é quem vai assinar.</a:t>
             </a:r>
             <a:endParaRPr lang="en-US" dirty="0"/>
           </a:p>
@@ -3355,7 +3711,7 @@
           <a:p>
             <a:r>
               <a:rPr lang="en-US" dirty="0"/>
-              <a:t>Com o histórico, calcule a média de doze meses. A clínica do nosso exemplo tem média de quatro mil quilowatts-hora e é trifásica. A cota é a média menos o custo de disponibilidade, cem quilowatts-hora, vezes uma margem de segurança de noventa e cinco por cento: cerca de três mil, setecentos e cinco quilowatts-hora por mês. Na usina Sol Nascente I, isso representa seis vírgula dois por cento da geração. Olhe também o mês a mês: se a clínica tem um pico no verão por causa do ar-condicionado e consome bem menos no inverno, confirme que a cota não vai gerar sobras recorrentes nos meses baixos.</a:t>
+              <a:t>Calcule a cota com a fórmula da tela e olhe o mês a mês para não gerar sobras nos meses de consumo baixo.</a:t>
             </a:r>
             <a:endParaRPr lang="en-US" dirty="0"/>
           </a:p>
@@ -4568,11 +4924,11 @@
         <p:spPr>
           <a:xfrm>
             <a:off x="548640" y="1325880"/>
-            <a:ext cx="11091672" cy="4937760"/>
+            <a:ext cx="11091672" cy="3977640"/>
           </a:xfrm>
           <a:prstGeom prst="roundRect">
             <a:avLst>
-              <a:gd name="adj" fmla="val 1852"/>
+              <a:gd name="adj" fmla="val 2299"/>
             </a:avLst>
           </a:prstGeom>
           <a:solidFill>
@@ -4590,7 +4946,7 @@
         <p:spPr>
           <a:xfrm>
             <a:off x="914400" y="1554480"/>
-            <a:ext cx="10360152" cy="4480560"/>
+            <a:ext cx="10360152" cy="3520440"/>
           </a:xfrm>
           <a:prstGeom prst="rect">
             <a:avLst/>
@@ -4662,6 +5018,92 @@
               <a:t>Total ≈ R$ 3.501 → economia ≈ R$ 654/mês ≈ R$ 7.850/ano (≈ 16% da conta)</a:t>
             </a:r>
             <a:endParaRPr lang="en-US" sz="2400" dirty="0"/>
+          </a:p>
+        </p:txBody>
+      </p:sp>
+      <p:sp>
+        <p:nvSpPr>
+          <p:cNvPr id="11" name="Shape 8"/>
+          <p:cNvSpPr/>
+          <p:nvPr/>
+        </p:nvSpPr>
+        <p:spPr>
+          <a:xfrm>
+            <a:off x="548640" y="5413248"/>
+            <a:ext cx="11091672" cy="868680"/>
+          </a:xfrm>
+          <a:prstGeom prst="roundRect">
+            <a:avLst>
+              <a:gd name="adj" fmla="val 8421"/>
+            </a:avLst>
+          </a:prstGeom>
+          <a:solidFill>
+            <a:srgbClr val="EEF3FA"/>
+          </a:solidFill>
+          <a:ln w="6350">
+            <a:solidFill>
+              <a:srgbClr val="D8E0EC"/>
+            </a:solidFill>
+            <a:prstDash val="solid"/>
+          </a:ln>
+        </p:spPr>
+      </p:sp>
+      <p:sp>
+        <p:nvSpPr>
+          <p:cNvPr id="12" name="Shape 9"/>
+          <p:cNvSpPr/>
+          <p:nvPr/>
+        </p:nvSpPr>
+        <p:spPr>
+          <a:xfrm>
+            <a:off x="548640" y="5413248"/>
+            <a:ext cx="91440" cy="868680"/>
+          </a:xfrm>
+          <a:prstGeom prst="rect">
+            <a:avLst/>
+          </a:prstGeom>
+          <a:solidFill>
+            <a:srgbClr val="F7A23B"/>
+          </a:solidFill>
+          <a:ln/>
+        </p:spPr>
+      </p:sp>
+      <p:sp>
+        <p:nvSpPr>
+          <p:cNvPr id="13" name="Text 10"/>
+          <p:cNvSpPr/>
+          <p:nvPr/>
+        </p:nvSpPr>
+        <p:spPr>
+          <a:xfrm>
+            <a:off x="777240" y="5458968"/>
+            <a:ext cx="10744200" cy="777240"/>
+          </a:xfrm>
+          <a:prstGeom prst="rect">
+            <a:avLst/>
+          </a:prstGeom>
+          <a:noFill/>
+          <a:ln/>
+        </p:spPr>
+        <p:txBody>
+          <a:bodyPr wrap="square" rtlCol="0" anchor="ctr"/>
+          <a:lstStyle/>
+          <a:p>
+            <a:pPr indent="0" marL="0">
+              <a:buNone/>
+            </a:pPr>
+            <a:r>
+              <a:rPr lang="en-US" sz="1500" dirty="0">
+                <a:solidFill>
+                  <a:srgbClr val="1F2937"/>
+                </a:solidFill>
+                <a:latin typeface="Arial" pitchFamily="34" charset="0"/>
+                <a:ea typeface="Arial" pitchFamily="34" charset="-122"/>
+                <a:cs typeface="Arial" pitchFamily="34" charset="-120"/>
+              </a:rPr>
+              <a:t>Na conta total, a clínica economiza cerca de seiscentos e cinquenta reais por mês, quase oito mil por ano. Fale sempre em reais, por mês e por ano, e nunca arredonde para cima.</a:t>
+            </a:r>
+            <a:endParaRPr lang="en-US" sz="1500" dirty="0"/>
           </a:p>
         </p:txBody>
       </p:sp>
@@ -4981,7 +5423,7 @@
         <p:spPr>
           <a:xfrm>
             <a:off x="548640" y="1325880"/>
-            <a:ext cx="3544824" cy="4892040"/>
+            <a:ext cx="3544824" cy="3977640"/>
           </a:xfrm>
           <a:prstGeom prst="roundRect">
             <a:avLst>
@@ -5074,7 +5516,7 @@
         <p:spPr>
           <a:xfrm>
             <a:off x="1325880" y="1435608"/>
-            <a:ext cx="2630424" cy="4672584"/>
+            <a:ext cx="2630424" cy="3758184"/>
           </a:xfrm>
           <a:prstGeom prst="rect">
             <a:avLst/>
@@ -5115,7 +5557,7 @@
         <p:spPr>
           <a:xfrm>
             <a:off x="4322064" y="1325880"/>
-            <a:ext cx="3544824" cy="4892040"/>
+            <a:ext cx="3544824" cy="3977640"/>
           </a:xfrm>
           <a:prstGeom prst="roundRect">
             <a:avLst>
@@ -5208,7 +5650,7 @@
         <p:spPr>
           <a:xfrm>
             <a:off x="5099304" y="1435608"/>
-            <a:ext cx="2630424" cy="4672584"/>
+            <a:ext cx="2630424" cy="3758184"/>
           </a:xfrm>
           <a:prstGeom prst="rect">
             <a:avLst/>
@@ -5249,7 +5691,7 @@
         <p:spPr>
           <a:xfrm>
             <a:off x="8095488" y="1325880"/>
-            <a:ext cx="3544824" cy="4892040"/>
+            <a:ext cx="3544824" cy="3977640"/>
           </a:xfrm>
           <a:prstGeom prst="roundRect">
             <a:avLst>
@@ -5342,7 +5784,7 @@
         <p:spPr>
           <a:xfrm>
             <a:off x="8872728" y="1435608"/>
-            <a:ext cx="2630424" cy="4672584"/>
+            <a:ext cx="2630424" cy="3758184"/>
           </a:xfrm>
           <a:prstGeom prst="rect">
             <a:avLst/>
@@ -5371,6 +5813,92 @@
               <a:t>Cliente com sistema próprio parcial → cota sobre o consumo que sobra</a:t>
             </a:r>
             <a:endParaRPr lang="en-US" sz="1800" dirty="0"/>
+          </a:p>
+        </p:txBody>
+      </p:sp>
+      <p:sp>
+        <p:nvSpPr>
+          <p:cNvPr id="21" name="Shape 18"/>
+          <p:cNvSpPr/>
+          <p:nvPr/>
+        </p:nvSpPr>
+        <p:spPr>
+          <a:xfrm>
+            <a:off x="548640" y="5413248"/>
+            <a:ext cx="11091672" cy="868680"/>
+          </a:xfrm>
+          <a:prstGeom prst="roundRect">
+            <a:avLst>
+              <a:gd name="adj" fmla="val 8421"/>
+            </a:avLst>
+          </a:prstGeom>
+          <a:solidFill>
+            <a:srgbClr val="EEF3FA"/>
+          </a:solidFill>
+          <a:ln w="6350">
+            <a:solidFill>
+              <a:srgbClr val="D8E0EC"/>
+            </a:solidFill>
+            <a:prstDash val="solid"/>
+          </a:ln>
+        </p:spPr>
+      </p:sp>
+      <p:sp>
+        <p:nvSpPr>
+          <p:cNvPr id="22" name="Shape 19"/>
+          <p:cNvSpPr/>
+          <p:nvPr/>
+        </p:nvSpPr>
+        <p:spPr>
+          <a:xfrm>
+            <a:off x="548640" y="5413248"/>
+            <a:ext cx="91440" cy="868680"/>
+          </a:xfrm>
+          <a:prstGeom prst="rect">
+            <a:avLst/>
+          </a:prstGeom>
+          <a:solidFill>
+            <a:srgbClr val="F7A23B"/>
+          </a:solidFill>
+          <a:ln/>
+        </p:spPr>
+      </p:sp>
+      <p:sp>
+        <p:nvSpPr>
+          <p:cNvPr id="23" name="Text 20"/>
+          <p:cNvSpPr/>
+          <p:nvPr/>
+        </p:nvSpPr>
+        <p:spPr>
+          <a:xfrm>
+            <a:off x="777240" y="5458968"/>
+            <a:ext cx="10744200" cy="777240"/>
+          </a:xfrm>
+          <a:prstGeom prst="rect">
+            <a:avLst/>
+          </a:prstGeom>
+          <a:noFill/>
+          <a:ln/>
+        </p:spPr>
+        <p:txBody>
+          <a:bodyPr wrap="square" rtlCol="0" anchor="ctr"/>
+          <a:lstStyle/>
+          <a:p>
+            <a:pPr indent="0" marL="0">
+              <a:buNone/>
+            </a:pPr>
+            <a:r>
+              <a:rPr lang="en-US" sz="1500" dirty="0">
+                <a:solidFill>
+                  <a:srgbClr val="1F2937"/>
+                </a:solidFill>
+                <a:latin typeface="Arial" pitchFamily="34" charset="0"/>
+                <a:ea typeface="Arial" pitchFamily="34" charset="-122"/>
+                <a:cs typeface="Arial" pitchFamily="34" charset="-120"/>
+              </a:rPr>
+              <a:t>Para os casos especiais da tela, a regra é a mesma: dimensione pelo histórico e combine revisões.</a:t>
+            </a:r>
+            <a:endParaRPr lang="en-US" sz="1500" dirty="0"/>
           </a:p>
         </p:txBody>
       </p:sp>
@@ -6648,7 +7176,7 @@
         <p:spPr>
           <a:xfrm>
             <a:off x="822960" y="2286000"/>
-            <a:ext cx="4860036" cy="3749040"/>
+            <a:ext cx="4860036" cy="2286000"/>
           </a:xfrm>
           <a:prstGeom prst="rect">
             <a:avLst/>
@@ -6669,7 +7197,7 @@
               <a:buNone/>
             </a:pPr>
             <a:r>
-              <a:rPr lang="en-US" sz="1700" dirty="0">
+              <a:rPr lang="en-US" sz="1300" dirty="0">
                 <a:solidFill>
                   <a:srgbClr val="1F2937"/>
                 </a:solidFill>
@@ -6679,7 +7207,7 @@
               </a:rPr>
               <a:t>1. Quanto eu economizo? → economia em R$/mês e R$/ano</a:t>
             </a:r>
-            <a:endParaRPr lang="en-US" sz="1700" dirty="0"/>
+            <a:endParaRPr lang="en-US" sz="1300" dirty="0"/>
           </a:p>
           <a:p>
             <a:pPr indent="0" marL="0">
@@ -6689,7 +7217,7 @@
               <a:buNone/>
             </a:pPr>
             <a:r>
-              <a:rPr lang="en-US" sz="1700" dirty="0">
+              <a:rPr lang="en-US" sz="1300" dirty="0">
                 <a:solidFill>
                   <a:srgbClr val="1F2937"/>
                 </a:solidFill>
@@ -6699,7 +7227,7 @@
               </a:rPr>
               <a:t>2. Quanto eu invisto? → zero, sem obra, sem trocar medidor</a:t>
             </a:r>
-            <a:endParaRPr lang="en-US" sz="1700" dirty="0"/>
+            <a:endParaRPr lang="en-US" sz="1300" dirty="0"/>
           </a:p>
           <a:p>
             <a:pPr indent="0" marL="0">
@@ -6709,7 +7237,7 @@
               <a:buNone/>
             </a:pPr>
             <a:r>
-              <a:rPr lang="en-US" sz="1700" dirty="0">
+              <a:rPr lang="en-US" sz="1300" dirty="0">
                 <a:solidFill>
                   <a:srgbClr val="1F2937"/>
                 </a:solidFill>
@@ -6719,7 +7247,7 @@
               </a:rPr>
               <a:t>3. Como funciona? → usina + créditos + duas contas</a:t>
             </a:r>
-            <a:endParaRPr lang="en-US" sz="1700" dirty="0"/>
+            <a:endParaRPr lang="en-US" sz="1300" dirty="0"/>
           </a:p>
           <a:p>
             <a:pPr indent="0" marL="0">
@@ -6729,7 +7257,7 @@
               <a:buNone/>
             </a:pPr>
             <a:r>
-              <a:rPr lang="en-US" sz="1700" dirty="0">
+              <a:rPr lang="en-US" sz="1300" dirty="0">
                 <a:solidFill>
                   <a:srgbClr val="1F2937"/>
                 </a:solidFill>
@@ -6739,7 +7267,7 @@
               </a:rPr>
               <a:t>4. É seguro? → Lei 14.300, empresa, contrato</a:t>
             </a:r>
-            <a:endParaRPr lang="en-US" sz="1700" dirty="0"/>
+            <a:endParaRPr lang="en-US" sz="1300" dirty="0"/>
           </a:p>
           <a:p>
             <a:pPr indent="0" marL="0">
@@ -6749,7 +7277,7 @@
               <a:buNone/>
             </a:pPr>
             <a:r>
-              <a:rPr lang="en-US" sz="1700" dirty="0">
+              <a:rPr lang="en-US" sz="1300" dirty="0">
                 <a:solidFill>
                   <a:srgbClr val="1F2937"/>
                 </a:solidFill>
@@ -6759,13 +7287,72 @@
               </a:rPr>
               <a:t>5. O que eu preciso fazer? → documentos e próximo passo</a:t>
             </a:r>
-            <a:endParaRPr lang="en-US" sz="1700" dirty="0"/>
+            <a:endParaRPr lang="en-US" sz="1300" dirty="0"/>
           </a:p>
         </p:txBody>
       </p:sp>
       <p:sp>
         <p:nvSpPr>
           <p:cNvPr id="13" name="Shape 10"/>
+          <p:cNvSpPr/>
+          <p:nvPr/>
+        </p:nvSpPr>
+        <p:spPr>
+          <a:xfrm>
+            <a:off x="822960" y="4663440"/>
+            <a:ext cx="4860036" cy="18288"/>
+          </a:xfrm>
+          <a:prstGeom prst="rect">
+            <a:avLst/>
+          </a:prstGeom>
+          <a:solidFill>
+            <a:srgbClr val="D8E0EC"/>
+          </a:solidFill>
+          <a:ln/>
+        </p:spPr>
+      </p:sp>
+      <p:sp>
+        <p:nvSpPr>
+          <p:cNvPr id="14" name="Text 11"/>
+          <p:cNvSpPr/>
+          <p:nvPr/>
+        </p:nvSpPr>
+        <p:spPr>
+          <a:xfrm>
+            <a:off x="822960" y="4754880"/>
+            <a:ext cx="4860036" cy="1371600"/>
+          </a:xfrm>
+          <a:prstGeom prst="rect">
+            <a:avLst/>
+          </a:prstGeom>
+          <a:noFill/>
+          <a:ln/>
+        </p:spPr>
+        <p:txBody>
+          <a:bodyPr wrap="square" rtlCol="0" anchor="t"/>
+          <a:lstStyle/>
+          <a:p>
+            <a:pPr indent="0" marL="0">
+              <a:buNone/>
+            </a:pPr>
+            <a:r>
+              <a:rPr lang="en-US" sz="1300" i="1" dirty="0">
+                <a:solidFill>
+                  <a:srgbClr val="64748B"/>
+                </a:solidFill>
+                <a:latin typeface="Arial" pitchFamily="34" charset="0"/>
+                <a:ea typeface="Arial" pitchFamily="34" charset="-122"/>
+                <a:cs typeface="Arial" pitchFamily="34" charset="-120"/>
+              </a:rPr>
+              <a:t>Ela responde, nessa ordem, às cinco perguntas da tela.</a:t>
+            </a:r>
+            <a:endParaRPr lang="en-US" sz="1300" dirty="0"/>
+          </a:p>
+        </p:txBody>
+      </p:sp>
+      <p:sp>
+        <p:nvSpPr>
+          <p:cNvPr id="15" name="Shape 12"/>
           <p:cNvSpPr/>
           <p:nvPr/>
         </p:nvSpPr>
@@ -6799,7 +7386,7 @@
       </p:sp>
       <p:sp>
         <p:nvSpPr>
-          <p:cNvPr id="14" name="Shape 11"/>
+          <p:cNvPr id="16" name="Shape 13"/>
           <p:cNvSpPr/>
           <p:nvPr/>
         </p:nvSpPr>
@@ -6819,7 +7406,7 @@
       </p:sp>
       <p:sp>
         <p:nvSpPr>
-          <p:cNvPr id="15" name="Text 12"/>
+          <p:cNvPr id="17" name="Text 14"/>
           <p:cNvSpPr/>
           <p:nvPr/>
         </p:nvSpPr>
@@ -6860,14 +7447,14 @@
       </p:sp>
       <p:sp>
         <p:nvSpPr>
-          <p:cNvPr id="16" name="Text 13"/>
+          <p:cNvPr id="18" name="Text 15"/>
           <p:cNvSpPr/>
           <p:nvPr/>
         </p:nvSpPr>
         <p:spPr>
           <a:xfrm>
             <a:off x="6505956" y="2286000"/>
-            <a:ext cx="4860036" cy="3749040"/>
+            <a:ext cx="4860036" cy="2286000"/>
           </a:xfrm>
           <a:prstGeom prst="rect">
             <a:avLst/>
@@ -6942,6 +7529,65 @@
               <a:t>Soma menor = economia</a:t>
             </a:r>
             <a:endParaRPr lang="en-US" sz="1700" dirty="0"/>
+          </a:p>
+        </p:txBody>
+      </p:sp>
+      <p:sp>
+        <p:nvSpPr>
+          <p:cNvPr id="19" name="Shape 16"/>
+          <p:cNvSpPr/>
+          <p:nvPr/>
+        </p:nvSpPr>
+        <p:spPr>
+          <a:xfrm>
+            <a:off x="6505956" y="4663440"/>
+            <a:ext cx="4860036" cy="18288"/>
+          </a:xfrm>
+          <a:prstGeom prst="rect">
+            <a:avLst/>
+          </a:prstGeom>
+          <a:solidFill>
+            <a:srgbClr val="D8E0EC"/>
+          </a:solidFill>
+          <a:ln/>
+        </p:spPr>
+      </p:sp>
+      <p:sp>
+        <p:nvSpPr>
+          <p:cNvPr id="20" name="Text 17"/>
+          <p:cNvSpPr/>
+          <p:nvPr/>
+        </p:nvSpPr>
+        <p:spPr>
+          <a:xfrm>
+            <a:off x="6505956" y="4754880"/>
+            <a:ext cx="4860036" cy="1371600"/>
+          </a:xfrm>
+          <a:prstGeom prst="rect">
+            <a:avLst/>
+          </a:prstGeom>
+          <a:noFill/>
+          <a:ln/>
+        </p:spPr>
+        <p:txBody>
+          <a:bodyPr wrap="square" rtlCol="0" anchor="t"/>
+          <a:lstStyle/>
+          <a:p>
+            <a:pPr indent="0" marL="0">
+              <a:buNone/>
+            </a:pPr>
+            <a:r>
+              <a:rPr lang="en-US" sz="1300" i="1" dirty="0">
+                <a:solidFill>
+                  <a:srgbClr val="64748B"/>
+                </a:solidFill>
+                <a:latin typeface="Arial" pitchFamily="34" charset="0"/>
+                <a:ea typeface="Arial" pitchFamily="34" charset="-122"/>
+                <a:cs typeface="Arial" pitchFamily="34" charset="-120"/>
+              </a:rPr>
+              <a:t>O ponto mais importante é explicar as duas contas. O cliente passa a pagar duas contas menores que, somadas, ficam abaixo da de hoje. Quem não entende isso cancela no primeiro mês por susto. Repita na proposta, na reunião e nas boas-vindas.</a:t>
+            </a:r>
+            <a:endParaRPr lang="en-US" sz="1300" dirty="0"/>
           </a:p>
         </p:txBody>
       </p:sp>
@@ -7261,11 +7907,11 @@
         <p:spPr>
           <a:xfrm>
             <a:off x="548640" y="1325880"/>
-            <a:ext cx="3544824" cy="2331720"/>
+            <a:ext cx="3544824" cy="1874520"/>
           </a:xfrm>
           <a:prstGeom prst="roundRect">
             <a:avLst>
-              <a:gd name="adj" fmla="val 3137"/>
+              <a:gd name="adj" fmla="val 3902"/>
             </a:avLst>
           </a:prstGeom>
           <a:solidFill>
@@ -7354,7 +8000,7 @@
         <p:spPr>
           <a:xfrm>
             <a:off x="1325880" y="1435608"/>
-            <a:ext cx="2630424" cy="2112264"/>
+            <a:ext cx="2630424" cy="1655064"/>
           </a:xfrm>
           <a:prstGeom prst="rect">
             <a:avLst/>
@@ -7395,11 +8041,11 @@
         <p:spPr>
           <a:xfrm>
             <a:off x="4322064" y="1325880"/>
-            <a:ext cx="3544824" cy="2331720"/>
+            <a:ext cx="3544824" cy="1874520"/>
           </a:xfrm>
           <a:prstGeom prst="roundRect">
             <a:avLst>
-              <a:gd name="adj" fmla="val 3137"/>
+              <a:gd name="adj" fmla="val 3902"/>
             </a:avLst>
           </a:prstGeom>
           <a:solidFill>
@@ -7488,7 +8134,7 @@
         <p:spPr>
           <a:xfrm>
             <a:off x="5099304" y="1435608"/>
-            <a:ext cx="2630424" cy="2112264"/>
+            <a:ext cx="2630424" cy="1655064"/>
           </a:xfrm>
           <a:prstGeom prst="rect">
             <a:avLst/>
@@ -7529,11 +8175,11 @@
         <p:spPr>
           <a:xfrm>
             <a:off x="8095488" y="1325880"/>
-            <a:ext cx="3544824" cy="2331720"/>
+            <a:ext cx="3544824" cy="1874520"/>
           </a:xfrm>
           <a:prstGeom prst="roundRect">
             <a:avLst>
-              <a:gd name="adj" fmla="val 3137"/>
+              <a:gd name="adj" fmla="val 3902"/>
             </a:avLst>
           </a:prstGeom>
           <a:solidFill>
@@ -7622,7 +8268,7 @@
         <p:spPr>
           <a:xfrm>
             <a:off x="8872728" y="1435608"/>
-            <a:ext cx="2630424" cy="2112264"/>
+            <a:ext cx="2630424" cy="1655064"/>
           </a:xfrm>
           <a:prstGeom prst="rect">
             <a:avLst/>
@@ -7662,12 +8308,12 @@
         </p:nvSpPr>
         <p:spPr>
           <a:xfrm>
-            <a:off x="548640" y="3886200"/>
-            <a:ext cx="3544824" cy="2331720"/>
+            <a:off x="548640" y="3429000"/>
+            <a:ext cx="3544824" cy="1874520"/>
           </a:xfrm>
           <a:prstGeom prst="roundRect">
             <a:avLst>
-              <a:gd name="adj" fmla="val 3137"/>
+              <a:gd name="adj" fmla="val 3902"/>
             </a:avLst>
           </a:prstGeom>
           <a:solidFill>
@@ -7696,7 +8342,7 @@
         </p:nvSpPr>
         <p:spPr>
           <a:xfrm>
-            <a:off x="731520" y="4069080"/>
+            <a:off x="731520" y="3611880"/>
             <a:ext cx="457200" cy="457200"/>
           </a:xfrm>
           <a:prstGeom prst="ellipse">
@@ -7716,7 +8362,7 @@
         </p:nvSpPr>
         <p:spPr>
           <a:xfrm>
-            <a:off x="731520" y="4069080"/>
+            <a:off x="731520" y="3611880"/>
             <a:ext cx="457200" cy="457200"/>
           </a:xfrm>
           <a:prstGeom prst="rect">
@@ -7755,8 +8401,8 @@
         </p:nvSpPr>
         <p:spPr>
           <a:xfrm>
-            <a:off x="1325880" y="3995928"/>
-            <a:ext cx="2630424" cy="2112264"/>
+            <a:off x="1325880" y="3538728"/>
+            <a:ext cx="2630424" cy="1655064"/>
           </a:xfrm>
           <a:prstGeom prst="rect">
             <a:avLst/>
@@ -7796,12 +8442,12 @@
         </p:nvSpPr>
         <p:spPr>
           <a:xfrm>
-            <a:off x="4322064" y="3886200"/>
-            <a:ext cx="3544824" cy="2331720"/>
+            <a:off x="4322064" y="3429000"/>
+            <a:ext cx="3544824" cy="1874520"/>
           </a:xfrm>
           <a:prstGeom prst="roundRect">
             <a:avLst>
-              <a:gd name="adj" fmla="val 3137"/>
+              <a:gd name="adj" fmla="val 3902"/>
             </a:avLst>
           </a:prstGeom>
           <a:solidFill>
@@ -7830,7 +8476,7 @@
         </p:nvSpPr>
         <p:spPr>
           <a:xfrm>
-            <a:off x="4504944" y="4069080"/>
+            <a:off x="4504944" y="3611880"/>
             <a:ext cx="457200" cy="457200"/>
           </a:xfrm>
           <a:prstGeom prst="ellipse">
@@ -7850,7 +8496,7 @@
         </p:nvSpPr>
         <p:spPr>
           <a:xfrm>
-            <a:off x="4504944" y="4069080"/>
+            <a:off x="4504944" y="3611880"/>
             <a:ext cx="457200" cy="457200"/>
           </a:xfrm>
           <a:prstGeom prst="rect">
@@ -7889,8 +8535,8 @@
         </p:nvSpPr>
         <p:spPr>
           <a:xfrm>
-            <a:off x="5099304" y="3995928"/>
-            <a:ext cx="2630424" cy="2112264"/>
+            <a:off x="5099304" y="3538728"/>
+            <a:ext cx="2630424" cy="1655064"/>
           </a:xfrm>
           <a:prstGeom prst="rect">
             <a:avLst/>
@@ -7930,12 +8576,12 @@
         </p:nvSpPr>
         <p:spPr>
           <a:xfrm>
-            <a:off x="8095488" y="3886200"/>
-            <a:ext cx="3544824" cy="2331720"/>
+            <a:off x="8095488" y="3429000"/>
+            <a:ext cx="3544824" cy="1874520"/>
           </a:xfrm>
           <a:prstGeom prst="roundRect">
             <a:avLst>
-              <a:gd name="adj" fmla="val 3137"/>
+              <a:gd name="adj" fmla="val 3902"/>
             </a:avLst>
           </a:prstGeom>
           <a:solidFill>
@@ -7964,7 +8610,7 @@
         </p:nvSpPr>
         <p:spPr>
           <a:xfrm>
-            <a:off x="8278368" y="4069080"/>
+            <a:off x="8278368" y="3611880"/>
             <a:ext cx="457200" cy="457200"/>
           </a:xfrm>
           <a:prstGeom prst="ellipse">
@@ -7984,7 +8630,7 @@
         </p:nvSpPr>
         <p:spPr>
           <a:xfrm>
-            <a:off x="8278368" y="4069080"/>
+            <a:off x="8278368" y="3611880"/>
             <a:ext cx="457200" cy="457200"/>
           </a:xfrm>
           <a:prstGeom prst="rect">
@@ -8023,8 +8669,8 @@
         </p:nvSpPr>
         <p:spPr>
           <a:xfrm>
-            <a:off x="8872728" y="3995928"/>
-            <a:ext cx="2630424" cy="2112264"/>
+            <a:off x="8872728" y="3538728"/>
+            <a:ext cx="2630424" cy="1655064"/>
           </a:xfrm>
           <a:prstGeom prst="rect">
             <a:avLst/>
@@ -8053,6 +8699,92 @@
               <a:t>validade da proposta</a:t>
             </a:r>
             <a:endParaRPr lang="en-US" sz="1800" dirty="0"/>
+          </a:p>
+        </p:txBody>
+      </p:sp>
+      <p:sp>
+        <p:nvSpPr>
+          <p:cNvPr id="33" name="Shape 30"/>
+          <p:cNvSpPr/>
+          <p:nvPr/>
+        </p:nvSpPr>
+        <p:spPr>
+          <a:xfrm>
+            <a:off x="548640" y="5413248"/>
+            <a:ext cx="11091672" cy="868680"/>
+          </a:xfrm>
+          <a:prstGeom prst="roundRect">
+            <a:avLst>
+              <a:gd name="adj" fmla="val 8421"/>
+            </a:avLst>
+          </a:prstGeom>
+          <a:solidFill>
+            <a:srgbClr val="EEF3FA"/>
+          </a:solidFill>
+          <a:ln w="6350">
+            <a:solidFill>
+              <a:srgbClr val="D8E0EC"/>
+            </a:solidFill>
+            <a:prstDash val="solid"/>
+          </a:ln>
+        </p:spPr>
+      </p:sp>
+      <p:sp>
+        <p:nvSpPr>
+          <p:cNvPr id="34" name="Shape 31"/>
+          <p:cNvSpPr/>
+          <p:nvPr/>
+        </p:nvSpPr>
+        <p:spPr>
+          <a:xfrm>
+            <a:off x="548640" y="5413248"/>
+            <a:ext cx="91440" cy="868680"/>
+          </a:xfrm>
+          <a:prstGeom prst="rect">
+            <a:avLst/>
+          </a:prstGeom>
+          <a:solidFill>
+            <a:srgbClr val="F7A23B"/>
+          </a:solidFill>
+          <a:ln/>
+        </p:spPr>
+      </p:sp>
+      <p:sp>
+        <p:nvSpPr>
+          <p:cNvPr id="35" name="Text 32"/>
+          <p:cNvSpPr/>
+          <p:nvPr/>
+        </p:nvSpPr>
+        <p:spPr>
+          <a:xfrm>
+            <a:off x="777240" y="5458968"/>
+            <a:ext cx="10744200" cy="777240"/>
+          </a:xfrm>
+          <a:prstGeom prst="rect">
+            <a:avLst/>
+          </a:prstGeom>
+          <a:noFill/>
+          <a:ln/>
+        </p:spPr>
+        <p:txBody>
+          <a:bodyPr wrap="square" rtlCol="0" anchor="ctr"/>
+          <a:lstStyle/>
+          <a:p>
+            <a:pPr indent="0" marL="0">
+              <a:buNone/>
+            </a:pPr>
+            <a:r>
+              <a:rPr lang="en-US" sz="1500" dirty="0">
+                <a:solidFill>
+                  <a:srgbClr val="1F2937"/>
+                </a:solidFill>
+                <a:latin typeface="Arial" pitchFamily="34" charset="0"/>
+                <a:ea typeface="Arial" pitchFamily="34" charset="-122"/>
+                <a:cs typeface="Arial" pitchFamily="34" charset="-120"/>
+              </a:rPr>
+              <a:t>As condições da tela precisam estar escritas, sem letras miúdas.</a:t>
+            </a:r>
+            <a:endParaRPr lang="en-US" sz="1500" dirty="0"/>
           </a:p>
         </p:txBody>
       </p:sp>
@@ -8372,11 +9104,11 @@
         <p:spPr>
           <a:xfrm>
             <a:off x="548640" y="1325880"/>
-            <a:ext cx="3544824" cy="2331720"/>
+            <a:ext cx="3544824" cy="1874520"/>
           </a:xfrm>
           <a:prstGeom prst="roundRect">
             <a:avLst>
-              <a:gd name="adj" fmla="val 3137"/>
+              <a:gd name="adj" fmla="val 3902"/>
             </a:avLst>
           </a:prstGeom>
           <a:solidFill>
@@ -8465,7 +9197,7 @@
         <p:spPr>
           <a:xfrm>
             <a:off x="1325880" y="1435608"/>
-            <a:ext cx="2630424" cy="2112264"/>
+            <a:ext cx="2630424" cy="1655064"/>
           </a:xfrm>
           <a:prstGeom prst="rect">
             <a:avLst/>
@@ -8506,11 +9238,11 @@
         <p:spPr>
           <a:xfrm>
             <a:off x="4322064" y="1325880"/>
-            <a:ext cx="3544824" cy="2331720"/>
+            <a:ext cx="3544824" cy="1874520"/>
           </a:xfrm>
           <a:prstGeom prst="roundRect">
             <a:avLst>
-              <a:gd name="adj" fmla="val 3137"/>
+              <a:gd name="adj" fmla="val 3902"/>
             </a:avLst>
           </a:prstGeom>
           <a:solidFill>
@@ -8599,7 +9331,7 @@
         <p:spPr>
           <a:xfrm>
             <a:off x="5099304" y="1435608"/>
-            <a:ext cx="2630424" cy="2112264"/>
+            <a:ext cx="2630424" cy="1655064"/>
           </a:xfrm>
           <a:prstGeom prst="rect">
             <a:avLst/>
@@ -8640,11 +9372,11 @@
         <p:spPr>
           <a:xfrm>
             <a:off x="8095488" y="1325880"/>
-            <a:ext cx="3544824" cy="2331720"/>
+            <a:ext cx="3544824" cy="1874520"/>
           </a:xfrm>
           <a:prstGeom prst="roundRect">
             <a:avLst>
-              <a:gd name="adj" fmla="val 3137"/>
+              <a:gd name="adj" fmla="val 3902"/>
             </a:avLst>
           </a:prstGeom>
           <a:solidFill>
@@ -8733,7 +9465,7 @@
         <p:spPr>
           <a:xfrm>
             <a:off x="8872728" y="1435608"/>
-            <a:ext cx="2630424" cy="2112264"/>
+            <a:ext cx="2630424" cy="1655064"/>
           </a:xfrm>
           <a:prstGeom prst="rect">
             <a:avLst/>
@@ -8773,12 +9505,12 @@
         </p:nvSpPr>
         <p:spPr>
           <a:xfrm>
-            <a:off x="548640" y="3886200"/>
-            <a:ext cx="3544824" cy="2331720"/>
+            <a:off x="548640" y="3429000"/>
+            <a:ext cx="3544824" cy="1874520"/>
           </a:xfrm>
           <a:prstGeom prst="roundRect">
             <a:avLst>
-              <a:gd name="adj" fmla="val 3137"/>
+              <a:gd name="adj" fmla="val 3902"/>
             </a:avLst>
           </a:prstGeom>
           <a:solidFill>
@@ -8807,7 +9539,7 @@
         </p:nvSpPr>
         <p:spPr>
           <a:xfrm>
-            <a:off x="731520" y="4069080"/>
+            <a:off x="731520" y="3611880"/>
             <a:ext cx="457200" cy="457200"/>
           </a:xfrm>
           <a:prstGeom prst="ellipse">
@@ -8827,7 +9559,7 @@
         </p:nvSpPr>
         <p:spPr>
           <a:xfrm>
-            <a:off x="731520" y="4069080"/>
+            <a:off x="731520" y="3611880"/>
             <a:ext cx="457200" cy="457200"/>
           </a:xfrm>
           <a:prstGeom prst="rect">
@@ -8866,8 +9598,8 @@
         </p:nvSpPr>
         <p:spPr>
           <a:xfrm>
-            <a:off x="1325880" y="3995928"/>
-            <a:ext cx="2630424" cy="2112264"/>
+            <a:off x="1325880" y="3538728"/>
+            <a:ext cx="2630424" cy="1655064"/>
           </a:xfrm>
           <a:prstGeom prst="rect">
             <a:avLst/>
@@ -8907,12 +9639,12 @@
         </p:nvSpPr>
         <p:spPr>
           <a:xfrm>
-            <a:off x="4322064" y="3886200"/>
-            <a:ext cx="3544824" cy="2331720"/>
+            <a:off x="4322064" y="3429000"/>
+            <a:ext cx="3544824" cy="1874520"/>
           </a:xfrm>
           <a:prstGeom prst="roundRect">
             <a:avLst>
-              <a:gd name="adj" fmla="val 3137"/>
+              <a:gd name="adj" fmla="val 3902"/>
             </a:avLst>
           </a:prstGeom>
           <a:solidFill>
@@ -8941,7 +9673,7 @@
         </p:nvSpPr>
         <p:spPr>
           <a:xfrm>
-            <a:off x="4504944" y="4069080"/>
+            <a:off x="4504944" y="3611880"/>
             <a:ext cx="457200" cy="457200"/>
           </a:xfrm>
           <a:prstGeom prst="ellipse">
@@ -8961,7 +9693,7 @@
         </p:nvSpPr>
         <p:spPr>
           <a:xfrm>
-            <a:off x="4504944" y="4069080"/>
+            <a:off x="4504944" y="3611880"/>
             <a:ext cx="457200" cy="457200"/>
           </a:xfrm>
           <a:prstGeom prst="rect">
@@ -9000,8 +9732,8 @@
         </p:nvSpPr>
         <p:spPr>
           <a:xfrm>
-            <a:off x="5099304" y="3995928"/>
-            <a:ext cx="2630424" cy="2112264"/>
+            <a:off x="5099304" y="3538728"/>
+            <a:ext cx="2630424" cy="1655064"/>
           </a:xfrm>
           <a:prstGeom prst="rect">
             <a:avLst/>
@@ -9030,6 +9762,92 @@
               <a:t>13–15 min: próximo passo e documentos</a:t>
             </a:r>
             <a:endParaRPr lang="en-US" sz="1800" dirty="0"/>
+          </a:p>
+        </p:txBody>
+      </p:sp>
+      <p:sp>
+        <p:nvSpPr>
+          <p:cNvPr id="29" name="Shape 26"/>
+          <p:cNvSpPr/>
+          <p:nvPr/>
+        </p:nvSpPr>
+        <p:spPr>
+          <a:xfrm>
+            <a:off x="548640" y="5413248"/>
+            <a:ext cx="11091672" cy="868680"/>
+          </a:xfrm>
+          <a:prstGeom prst="roundRect">
+            <a:avLst>
+              <a:gd name="adj" fmla="val 8421"/>
+            </a:avLst>
+          </a:prstGeom>
+          <a:solidFill>
+            <a:srgbClr val="EEF3FA"/>
+          </a:solidFill>
+          <a:ln w="6350">
+            <a:solidFill>
+              <a:srgbClr val="D8E0EC"/>
+            </a:solidFill>
+            <a:prstDash val="solid"/>
+          </a:ln>
+        </p:spPr>
+      </p:sp>
+      <p:sp>
+        <p:nvSpPr>
+          <p:cNvPr id="30" name="Shape 27"/>
+          <p:cNvSpPr/>
+          <p:nvPr/>
+        </p:nvSpPr>
+        <p:spPr>
+          <a:xfrm>
+            <a:off x="548640" y="5413248"/>
+            <a:ext cx="91440" cy="868680"/>
+          </a:xfrm>
+          <a:prstGeom prst="rect">
+            <a:avLst/>
+          </a:prstGeom>
+          <a:solidFill>
+            <a:srgbClr val="F7A23B"/>
+          </a:solidFill>
+          <a:ln/>
+        </p:spPr>
+      </p:sp>
+      <p:sp>
+        <p:nvSpPr>
+          <p:cNvPr id="31" name="Text 28"/>
+          <p:cNvSpPr/>
+          <p:nvPr/>
+        </p:nvSpPr>
+        <p:spPr>
+          <a:xfrm>
+            <a:off x="777240" y="5458968"/>
+            <a:ext cx="10744200" cy="777240"/>
+          </a:xfrm>
+          <a:prstGeom prst="rect">
+            <a:avLst/>
+          </a:prstGeom>
+          <a:noFill/>
+          <a:ln/>
+        </p:spPr>
+        <p:txBody>
+          <a:bodyPr wrap="square" rtlCol="0" anchor="ctr"/>
+          <a:lstStyle/>
+          <a:p>
+            <a:pPr indent="0" marL="0">
+              <a:buNone/>
+            </a:pPr>
+            <a:r>
+              <a:rPr lang="en-US" sz="1500" dirty="0">
+                <a:solidFill>
+                  <a:srgbClr val="1F2937"/>
+                </a:solidFill>
+                <a:latin typeface="Arial" pitchFamily="34" charset="0"/>
+                <a:ea typeface="Arial" pitchFamily="34" charset="-122"/>
+                <a:cs typeface="Arial" pitchFamily="34" charset="-120"/>
+              </a:rPr>
+              <a:t>Apresente a proposta em quinze minutos, seguindo o roteiro da tela, e saia sempre com o próximo passo marcado.</a:t>
+            </a:r>
+            <a:endParaRPr lang="en-US" sz="1500" dirty="0"/>
           </a:p>
         </p:txBody>
       </p:sp>
@@ -10614,7 +11432,7 @@
         <p:spPr>
           <a:xfrm>
             <a:off x="548640" y="1325880"/>
-            <a:ext cx="11155680" cy="4937760"/>
+            <a:ext cx="11155680" cy="3977640"/>
           </a:xfrm>
           <a:prstGeom prst="rect">
             <a:avLst/>
@@ -10686,6 +11504,92 @@
               <a:t>3. 'Preciso trocar medidor ou fazer obra?' → Não. Nada muda na sua instalação.</a:t>
             </a:r>
             <a:endParaRPr lang="en-US" sz="1400" dirty="0"/>
+          </a:p>
+        </p:txBody>
+      </p:sp>
+      <p:sp>
+        <p:nvSpPr>
+          <p:cNvPr id="10" name="Shape 7"/>
+          <p:cNvSpPr/>
+          <p:nvPr/>
+        </p:nvSpPr>
+        <p:spPr>
+          <a:xfrm>
+            <a:off x="548640" y="5413248"/>
+            <a:ext cx="11091672" cy="868680"/>
+          </a:xfrm>
+          <a:prstGeom prst="roundRect">
+            <a:avLst>
+              <a:gd name="adj" fmla="val 8421"/>
+            </a:avLst>
+          </a:prstGeom>
+          <a:solidFill>
+            <a:srgbClr val="EEF3FA"/>
+          </a:solidFill>
+          <a:ln w="6350">
+            <a:solidFill>
+              <a:srgbClr val="D8E0EC"/>
+            </a:solidFill>
+            <a:prstDash val="solid"/>
+          </a:ln>
+        </p:spPr>
+      </p:sp>
+      <p:sp>
+        <p:nvSpPr>
+          <p:cNvPr id="11" name="Shape 8"/>
+          <p:cNvSpPr/>
+          <p:nvPr/>
+        </p:nvSpPr>
+        <p:spPr>
+          <a:xfrm>
+            <a:off x="548640" y="5413248"/>
+            <a:ext cx="91440" cy="868680"/>
+          </a:xfrm>
+          <a:prstGeom prst="rect">
+            <a:avLst/>
+          </a:prstGeom>
+          <a:solidFill>
+            <a:srgbClr val="F7A23B"/>
+          </a:solidFill>
+          <a:ln/>
+        </p:spPr>
+      </p:sp>
+      <p:sp>
+        <p:nvSpPr>
+          <p:cNvPr id="12" name="Text 9"/>
+          <p:cNvSpPr/>
+          <p:nvPr/>
+        </p:nvSpPr>
+        <p:spPr>
+          <a:xfrm>
+            <a:off x="777240" y="5458968"/>
+            <a:ext cx="10744200" cy="777240"/>
+          </a:xfrm>
+          <a:prstGeom prst="rect">
+            <a:avLst/>
+          </a:prstGeom>
+          <a:noFill/>
+          <a:ln/>
+        </p:spPr>
+        <p:txBody>
+          <a:bodyPr wrap="square" rtlCol="0" anchor="ctr"/>
+          <a:lstStyle/>
+          <a:p>
+            <a:pPr indent="0" marL="0">
+              <a:buNone/>
+            </a:pPr>
+            <a:r>
+              <a:rPr lang="en-US" sz="1500" dirty="0">
+                <a:solidFill>
+                  <a:srgbClr val="1F2937"/>
+                </a:solidFill>
+                <a:latin typeface="Arial" pitchFamily="34" charset="0"/>
+                <a:ea typeface="Arial" pitchFamily="34" charset="-122"/>
+                <a:cs typeface="Arial" pitchFamily="34" charset="-120"/>
+              </a:rPr>
+              <a:t>Nas objeções de confiança, apoie-se na lei, no contrato e em clientes de referência. O fornecimento continua o mesmo e nada muda na instalação.</a:t>
+            </a:r>
+            <a:endParaRPr lang="en-US" sz="1500" dirty="0"/>
           </a:p>
         </p:txBody>
       </p:sp>
@@ -11427,7 +12331,7 @@
         <p:spPr>
           <a:xfrm>
             <a:off x="548640" y="1325880"/>
-            <a:ext cx="11155680" cy="4937760"/>
+            <a:ext cx="11155680" cy="3977640"/>
           </a:xfrm>
           <a:prstGeom prst="rect">
             <a:avLst/>
@@ -11499,6 +12403,92 @@
               <a:t>6. 'E se a usina gerar menos?' → Você recebe proporcionalmente menos créditos e paga proporcionalmente menos para nós; nunca paga por energia que não recebeu.</a:t>
             </a:r>
             <a:endParaRPr lang="en-US" sz="1300" dirty="0"/>
+          </a:p>
+        </p:txBody>
+      </p:sp>
+      <p:sp>
+        <p:nvSpPr>
+          <p:cNvPr id="10" name="Shape 7"/>
+          <p:cNvSpPr/>
+          <p:nvPr/>
+        </p:nvSpPr>
+        <p:spPr>
+          <a:xfrm>
+            <a:off x="548640" y="5413248"/>
+            <a:ext cx="11091672" cy="868680"/>
+          </a:xfrm>
+          <a:prstGeom prst="roundRect">
+            <a:avLst>
+              <a:gd name="adj" fmla="val 8421"/>
+            </a:avLst>
+          </a:prstGeom>
+          <a:solidFill>
+            <a:srgbClr val="EEF3FA"/>
+          </a:solidFill>
+          <a:ln w="6350">
+            <a:solidFill>
+              <a:srgbClr val="D8E0EC"/>
+            </a:solidFill>
+            <a:prstDash val="solid"/>
+          </a:ln>
+        </p:spPr>
+      </p:sp>
+      <p:sp>
+        <p:nvSpPr>
+          <p:cNvPr id="11" name="Shape 8"/>
+          <p:cNvSpPr/>
+          <p:nvPr/>
+        </p:nvSpPr>
+        <p:spPr>
+          <a:xfrm>
+            <a:off x="548640" y="5413248"/>
+            <a:ext cx="91440" cy="868680"/>
+          </a:xfrm>
+          <a:prstGeom prst="rect">
+            <a:avLst/>
+          </a:prstGeom>
+          <a:solidFill>
+            <a:srgbClr val="F7A23B"/>
+          </a:solidFill>
+          <a:ln/>
+        </p:spPr>
+      </p:sp>
+      <p:sp>
+        <p:nvSpPr>
+          <p:cNvPr id="12" name="Text 9"/>
+          <p:cNvSpPr/>
+          <p:nvPr/>
+        </p:nvSpPr>
+        <p:spPr>
+          <a:xfrm>
+            <a:off x="777240" y="5458968"/>
+            <a:ext cx="10744200" cy="777240"/>
+          </a:xfrm>
+          <a:prstGeom prst="rect">
+            <a:avLst/>
+          </a:prstGeom>
+          <a:noFill/>
+          <a:ln/>
+        </p:spPr>
+        <p:txBody>
+          <a:bodyPr wrap="square" rtlCol="0" anchor="ctr"/>
+          <a:lstStyle/>
+          <a:p>
+            <a:pPr indent="0" marL="0">
+              <a:buNone/>
+            </a:pPr>
+            <a:r>
+              <a:rPr lang="en-US" sz="1500" dirty="0">
+                <a:solidFill>
+                  <a:srgbClr val="1F2937"/>
+                </a:solidFill>
+                <a:latin typeface="Arial" pitchFamily="34" charset="0"/>
+                <a:ea typeface="Arial" pitchFamily="34" charset="-122"/>
+                <a:cs typeface="Arial" pitchFamily="34" charset="-120"/>
+              </a:rPr>
+              <a:t>Nas de entendimento, mostre a conta do próprio cliente. E lembre: ele nunca paga por energia que não recebeu, porque a cobrança parte do que foi compensado na fatura.</a:t>
+            </a:r>
+            <a:endParaRPr lang="en-US" sz="1500" dirty="0"/>
           </a:p>
         </p:txBody>
       </p:sp>
@@ -11818,7 +12808,7 @@
         <p:spPr>
           <a:xfrm>
             <a:off x="548640" y="1325880"/>
-            <a:ext cx="11155680" cy="4937760"/>
+            <a:ext cx="11155680" cy="3977640"/>
           </a:xfrm>
           <a:prstGeom prst="rect">
             <a:avLst/>
@@ -11890,6 +12880,92 @@
               <a:t>9. 'E essa história de Fio B / mudança de regra?' → A economia acompanha as regras e a tarifa; mostramos a conta; contrato prevê o ajuste.</a:t>
             </a:r>
             <a:endParaRPr lang="en-US" sz="1400" dirty="0"/>
+          </a:p>
+        </p:txBody>
+      </p:sp>
+      <p:sp>
+        <p:nvSpPr>
+          <p:cNvPr id="10" name="Shape 7"/>
+          <p:cNvSpPr/>
+          <p:nvPr/>
+        </p:nvSpPr>
+        <p:spPr>
+          <a:xfrm>
+            <a:off x="548640" y="5413248"/>
+            <a:ext cx="11091672" cy="868680"/>
+          </a:xfrm>
+          <a:prstGeom prst="roundRect">
+            <a:avLst>
+              <a:gd name="adj" fmla="val 8421"/>
+            </a:avLst>
+          </a:prstGeom>
+          <a:solidFill>
+            <a:srgbClr val="EEF3FA"/>
+          </a:solidFill>
+          <a:ln w="6350">
+            <a:solidFill>
+              <a:srgbClr val="D8E0EC"/>
+            </a:solidFill>
+            <a:prstDash val="solid"/>
+          </a:ln>
+        </p:spPr>
+      </p:sp>
+      <p:sp>
+        <p:nvSpPr>
+          <p:cNvPr id="11" name="Shape 8"/>
+          <p:cNvSpPr/>
+          <p:nvPr/>
+        </p:nvSpPr>
+        <p:spPr>
+          <a:xfrm>
+            <a:off x="548640" y="5413248"/>
+            <a:ext cx="91440" cy="868680"/>
+          </a:xfrm>
+          <a:prstGeom prst="rect">
+            <a:avLst/>
+          </a:prstGeom>
+          <a:solidFill>
+            <a:srgbClr val="F7A23B"/>
+          </a:solidFill>
+          <a:ln/>
+        </p:spPr>
+      </p:sp>
+      <p:sp>
+        <p:nvSpPr>
+          <p:cNvPr id="12" name="Text 9"/>
+          <p:cNvSpPr/>
+          <p:nvPr/>
+        </p:nvSpPr>
+        <p:spPr>
+          <a:xfrm>
+            <a:off x="777240" y="5458968"/>
+            <a:ext cx="10744200" cy="777240"/>
+          </a:xfrm>
+          <a:prstGeom prst="rect">
+            <a:avLst/>
+          </a:prstGeom>
+          <a:noFill/>
+          <a:ln/>
+        </p:spPr>
+        <p:txBody>
+          <a:bodyPr wrap="square" rtlCol="0" anchor="ctr"/>
+          <a:lstStyle/>
+          <a:p>
+            <a:pPr indent="0" marL="0">
+              <a:buNone/>
+            </a:pPr>
+            <a:r>
+              <a:rPr lang="en-US" sz="1500" dirty="0">
+                <a:solidFill>
+                  <a:srgbClr val="1F2937"/>
+                </a:solidFill>
+                <a:latin typeface="Arial" pitchFamily="34" charset="0"/>
+                <a:ea typeface="Arial" pitchFamily="34" charset="-122"/>
+                <a:cs typeface="Arial" pitchFamily="34" charset="-120"/>
+              </a:rPr>
+              <a:t>Nas de compromisso, responda exatamente o que o contrato diz. Cancelamento simples, com aviso prévio, vende mais que multa pesada.</a:t>
+            </a:r>
+            <a:endParaRPr lang="en-US" sz="1500" dirty="0"/>
           </a:p>
         </p:txBody>
       </p:sp>
@@ -12208,7 +13284,7 @@
         </p:nvSpPr>
         <p:spPr>
           <a:xfrm>
-            <a:off x="548640" y="2651760"/>
+            <a:off x="548640" y="2583180"/>
             <a:ext cx="5596128" cy="1463040"/>
           </a:xfrm>
           <a:prstGeom prst="chevron">
@@ -12233,7 +13309,7 @@
         </p:nvSpPr>
         <p:spPr>
           <a:xfrm>
-            <a:off x="868680" y="2651760"/>
+            <a:off x="868680" y="2583180"/>
             <a:ext cx="5074920" cy="1463040"/>
           </a:xfrm>
           <a:prstGeom prst="rect">
@@ -12274,7 +13350,7 @@
         </p:nvSpPr>
         <p:spPr>
           <a:xfrm>
-            <a:off x="6035040" y="2651760"/>
+            <a:off x="6035040" y="2583180"/>
             <a:ext cx="5596128" cy="1463040"/>
           </a:xfrm>
           <a:prstGeom prst="chevron">
@@ -12299,7 +13375,7 @@
         </p:nvSpPr>
         <p:spPr>
           <a:xfrm>
-            <a:off x="6355080" y="2651760"/>
+            <a:off x="6355080" y="2583180"/>
             <a:ext cx="5074920" cy="1463040"/>
           </a:xfrm>
           <a:prstGeom prst="rect">
@@ -12327,6 +13403,92 @@
                 <a:cs typeface="Arial" pitchFamily="34" charset="-120"/>
               </a:rPr>
               <a:t>'Claro. O que falta para decidir?' + data de retorno + resumo por escrito com a economia anual.</a:t>
+            </a:r>
+            <a:endParaRPr lang="en-US" sz="1500" dirty="0"/>
+          </a:p>
+        </p:txBody>
+      </p:sp>
+      <p:sp>
+        <p:nvSpPr>
+          <p:cNvPr id="13" name="Shape 10"/>
+          <p:cNvSpPr/>
+          <p:nvPr/>
+        </p:nvSpPr>
+        <p:spPr>
+          <a:xfrm>
+            <a:off x="548640" y="5413248"/>
+            <a:ext cx="11091672" cy="868680"/>
+          </a:xfrm>
+          <a:prstGeom prst="roundRect">
+            <a:avLst>
+              <a:gd name="adj" fmla="val 8421"/>
+            </a:avLst>
+          </a:prstGeom>
+          <a:solidFill>
+            <a:srgbClr val="EEF3FA"/>
+          </a:solidFill>
+          <a:ln w="6350">
+            <a:solidFill>
+              <a:srgbClr val="D8E0EC"/>
+            </a:solidFill>
+            <a:prstDash val="solid"/>
+          </a:ln>
+        </p:spPr>
+      </p:sp>
+      <p:sp>
+        <p:nvSpPr>
+          <p:cNvPr id="14" name="Shape 11"/>
+          <p:cNvSpPr/>
+          <p:nvPr/>
+        </p:nvSpPr>
+        <p:spPr>
+          <a:xfrm>
+            <a:off x="548640" y="5413248"/>
+            <a:ext cx="91440" cy="868680"/>
+          </a:xfrm>
+          <a:prstGeom prst="rect">
+            <a:avLst/>
+          </a:prstGeom>
+          <a:solidFill>
+            <a:srgbClr val="F7A23B"/>
+          </a:solidFill>
+          <a:ln/>
+        </p:spPr>
+      </p:sp>
+      <p:sp>
+        <p:nvSpPr>
+          <p:cNvPr id="15" name="Text 12"/>
+          <p:cNvSpPr/>
+          <p:nvPr/>
+        </p:nvSpPr>
+        <p:spPr>
+          <a:xfrm>
+            <a:off x="777240" y="5458968"/>
+            <a:ext cx="10744200" cy="777240"/>
+          </a:xfrm>
+          <a:prstGeom prst="rect">
+            <a:avLst/>
+          </a:prstGeom>
+          <a:noFill/>
+          <a:ln/>
+        </p:spPr>
+        <p:txBody>
+          <a:bodyPr wrap="square" rtlCol="0" anchor="ctr"/>
+          <a:lstStyle/>
+          <a:p>
+            <a:pPr indent="0" marL="0">
+              <a:buNone/>
+            </a:pPr>
+            <a:r>
+              <a:rPr lang="en-US" sz="1500" dirty="0">
+                <a:solidFill>
+                  <a:srgbClr val="1F2937"/>
+                </a:solidFill>
+                <a:latin typeface="Arial" pitchFamily="34" charset="0"/>
+                <a:ea typeface="Arial" pitchFamily="34" charset="-122"/>
+                <a:cs typeface="Arial" pitchFamily="34" charset="-120"/>
+              </a:rPr>
+              <a:t>E no vou pensar, pergunte o que falta para decidir, combine um retorno e envie a economia anual por escrito.</a:t>
             </a:r>
             <a:endParaRPr lang="en-US" sz="1500" dirty="0"/>
           </a:p>
@@ -13912,7 +15074,7 @@
         </p:nvSpPr>
         <p:spPr>
           <a:xfrm>
-            <a:off x="548640" y="2651760"/>
+            <a:off x="548640" y="2583180"/>
             <a:ext cx="1938528" cy="1463040"/>
           </a:xfrm>
           <a:prstGeom prst="chevron">
@@ -13937,7 +15099,7 @@
         </p:nvSpPr>
         <p:spPr>
           <a:xfrm>
-            <a:off x="868680" y="2651760"/>
+            <a:off x="868680" y="2583180"/>
             <a:ext cx="1417320" cy="1463040"/>
           </a:xfrm>
           <a:prstGeom prst="rect">
@@ -13978,7 +15140,7 @@
         </p:nvSpPr>
         <p:spPr>
           <a:xfrm>
-            <a:off x="2377440" y="2651760"/>
+            <a:off x="2377440" y="2583180"/>
             <a:ext cx="1938528" cy="1463040"/>
           </a:xfrm>
           <a:prstGeom prst="chevron">
@@ -14003,7 +15165,7 @@
         </p:nvSpPr>
         <p:spPr>
           <a:xfrm>
-            <a:off x="2697480" y="2651760"/>
+            <a:off x="2697480" y="2583180"/>
             <a:ext cx="1417320" cy="1463040"/>
           </a:xfrm>
           <a:prstGeom prst="rect">
@@ -14044,7 +15206,7 @@
         </p:nvSpPr>
         <p:spPr>
           <a:xfrm>
-            <a:off x="4206240" y="2651760"/>
+            <a:off x="4206240" y="2583180"/>
             <a:ext cx="1938528" cy="1463040"/>
           </a:xfrm>
           <a:prstGeom prst="chevron">
@@ -14069,7 +15231,7 @@
         </p:nvSpPr>
         <p:spPr>
           <a:xfrm>
-            <a:off x="4526280" y="2651760"/>
+            <a:off x="4526280" y="2583180"/>
             <a:ext cx="1417320" cy="1463040"/>
           </a:xfrm>
           <a:prstGeom prst="rect">
@@ -14110,7 +15272,7 @@
         </p:nvSpPr>
         <p:spPr>
           <a:xfrm>
-            <a:off x="6035040" y="2651760"/>
+            <a:off x="6035040" y="2583180"/>
             <a:ext cx="1938528" cy="1463040"/>
           </a:xfrm>
           <a:prstGeom prst="chevron">
@@ -14135,7 +15297,7 @@
         </p:nvSpPr>
         <p:spPr>
           <a:xfrm>
-            <a:off x="6355080" y="2651760"/>
+            <a:off x="6355080" y="2583180"/>
             <a:ext cx="1417320" cy="1463040"/>
           </a:xfrm>
           <a:prstGeom prst="rect">
@@ -14176,7 +15338,7 @@
         </p:nvSpPr>
         <p:spPr>
           <a:xfrm>
-            <a:off x="7863840" y="2651760"/>
+            <a:off x="7863840" y="2583180"/>
             <a:ext cx="1938528" cy="1463040"/>
           </a:xfrm>
           <a:prstGeom prst="chevron">
@@ -14201,7 +15363,7 @@
         </p:nvSpPr>
         <p:spPr>
           <a:xfrm>
-            <a:off x="8183880" y="2651760"/>
+            <a:off x="8183880" y="2583180"/>
             <a:ext cx="1417320" cy="1463040"/>
           </a:xfrm>
           <a:prstGeom prst="rect">
@@ -14242,7 +15404,7 @@
         </p:nvSpPr>
         <p:spPr>
           <a:xfrm>
-            <a:off x="9692640" y="2651760"/>
+            <a:off x="9692640" y="2583180"/>
             <a:ext cx="1938528" cy="1463040"/>
           </a:xfrm>
           <a:prstGeom prst="chevron">
@@ -14267,7 +15429,7 @@
         </p:nvSpPr>
         <p:spPr>
           <a:xfrm>
-            <a:off x="10012680" y="2651760"/>
+            <a:off x="10012680" y="2583180"/>
             <a:ext cx="1417320" cy="1463040"/>
           </a:xfrm>
           <a:prstGeom prst="rect">
@@ -14297,6 +15459,92 @@
               <a:t>No rateio</a:t>
             </a:r>
             <a:endParaRPr lang="en-US" sz="1200" dirty="0"/>
+          </a:p>
+        </p:txBody>
+      </p:sp>
+      <p:sp>
+        <p:nvSpPr>
+          <p:cNvPr id="21" name="Shape 18"/>
+          <p:cNvSpPr/>
+          <p:nvPr/>
+        </p:nvSpPr>
+        <p:spPr>
+          <a:xfrm>
+            <a:off x="548640" y="5413248"/>
+            <a:ext cx="11091672" cy="868680"/>
+          </a:xfrm>
+          <a:prstGeom prst="roundRect">
+            <a:avLst>
+              <a:gd name="adj" fmla="val 8421"/>
+            </a:avLst>
+          </a:prstGeom>
+          <a:solidFill>
+            <a:srgbClr val="EEF3FA"/>
+          </a:solidFill>
+          <a:ln w="6350">
+            <a:solidFill>
+              <a:srgbClr val="D8E0EC"/>
+            </a:solidFill>
+            <a:prstDash val="solid"/>
+          </a:ln>
+        </p:spPr>
+      </p:sp>
+      <p:sp>
+        <p:nvSpPr>
+          <p:cNvPr id="22" name="Shape 19"/>
+          <p:cNvSpPr/>
+          <p:nvPr/>
+        </p:nvSpPr>
+        <p:spPr>
+          <a:xfrm>
+            <a:off x="548640" y="5413248"/>
+            <a:ext cx="91440" cy="868680"/>
+          </a:xfrm>
+          <a:prstGeom prst="rect">
+            <a:avLst/>
+          </a:prstGeom>
+          <a:solidFill>
+            <a:srgbClr val="F7A23B"/>
+          </a:solidFill>
+          <a:ln/>
+        </p:spPr>
+      </p:sp>
+      <p:sp>
+        <p:nvSpPr>
+          <p:cNvPr id="23" name="Text 20"/>
+          <p:cNvSpPr/>
+          <p:nvPr/>
+        </p:nvSpPr>
+        <p:spPr>
+          <a:xfrm>
+            <a:off x="777240" y="5458968"/>
+            <a:ext cx="10744200" cy="777240"/>
+          </a:xfrm>
+          <a:prstGeom prst="rect">
+            <a:avLst/>
+          </a:prstGeom>
+          <a:noFill/>
+          <a:ln/>
+        </p:spPr>
+        <p:txBody>
+          <a:bodyPr wrap="square" rtlCol="0" anchor="ctr"/>
+          <a:lstStyle/>
+          <a:p>
+            <a:pPr indent="0" marL="0">
+              <a:buNone/>
+            </a:pPr>
+            <a:r>
+              <a:rPr lang="en-US" sz="1500" dirty="0">
+                <a:solidFill>
+                  <a:srgbClr val="1F2937"/>
+                </a:solidFill>
+                <a:latin typeface="Arial" pitchFamily="34" charset="0"/>
+                <a:ea typeface="Arial" pitchFamily="34" charset="-122"/>
+                <a:cs typeface="Arial" pitchFamily="34" charset="-120"/>
+              </a:rPr>
+              <a:t>Meça cada etapa do funil desde o primeiro mês. As taxas reais mostram onde ele vaza.</a:t>
+            </a:r>
+            <a:endParaRPr lang="en-US" sz="1500" dirty="0"/>
           </a:p>
         </p:txBody>
       </p:sp>
@@ -14616,11 +15864,11 @@
         <p:spPr>
           <a:xfrm>
             <a:off x="548640" y="1325880"/>
-            <a:ext cx="11091672" cy="4937760"/>
+            <a:ext cx="11091672" cy="3977640"/>
           </a:xfrm>
           <a:prstGeom prst="roundRect">
             <a:avLst>
-              <a:gd name="adj" fmla="val 1852"/>
+              <a:gd name="adj" fmla="val 2299"/>
             </a:avLst>
           </a:prstGeom>
           <a:solidFill>
@@ -14638,7 +15886,7 @@
         <p:spPr>
           <a:xfrm>
             <a:off x="914400" y="1554480"/>
-            <a:ext cx="10360152" cy="4480560"/>
+            <a:ext cx="10360152" cy="3520440"/>
           </a:xfrm>
           <a:prstGeom prst="rect">
             <a:avLst/>
@@ -14710,6 +15958,92 @@
               <a:t>Por consultor (6 clientes/mês) → 5 consultores</a:t>
             </a:r>
             <a:endParaRPr lang="en-US" sz="2400" dirty="0"/>
+          </a:p>
+        </p:txBody>
+      </p:sp>
+      <p:sp>
+        <p:nvSpPr>
+          <p:cNvPr id="11" name="Shape 8"/>
+          <p:cNvSpPr/>
+          <p:nvPr/>
+        </p:nvSpPr>
+        <p:spPr>
+          <a:xfrm>
+            <a:off x="548640" y="5413248"/>
+            <a:ext cx="11091672" cy="868680"/>
+          </a:xfrm>
+          <a:prstGeom prst="roundRect">
+            <a:avLst>
+              <a:gd name="adj" fmla="val 8421"/>
+            </a:avLst>
+          </a:prstGeom>
+          <a:solidFill>
+            <a:srgbClr val="EEF3FA"/>
+          </a:solidFill>
+          <a:ln w="6350">
+            <a:solidFill>
+              <a:srgbClr val="D8E0EC"/>
+            </a:solidFill>
+            <a:prstDash val="solid"/>
+          </a:ln>
+        </p:spPr>
+      </p:sp>
+      <p:sp>
+        <p:nvSpPr>
+          <p:cNvPr id="12" name="Shape 9"/>
+          <p:cNvSpPr/>
+          <p:nvPr/>
+        </p:nvSpPr>
+        <p:spPr>
+          <a:xfrm>
+            <a:off x="548640" y="5413248"/>
+            <a:ext cx="91440" cy="868680"/>
+          </a:xfrm>
+          <a:prstGeom prst="rect">
+            <a:avLst/>
+          </a:prstGeom>
+          <a:solidFill>
+            <a:srgbClr val="F7A23B"/>
+          </a:solidFill>
+          <a:ln/>
+        </p:spPr>
+      </p:sp>
+      <p:sp>
+        <p:nvSpPr>
+          <p:cNvPr id="13" name="Text 10"/>
+          <p:cNvSpPr/>
+          <p:nvPr/>
+        </p:nvSpPr>
+        <p:spPr>
+          <a:xfrm>
+            <a:off x="777240" y="5458968"/>
+            <a:ext cx="10744200" cy="777240"/>
+          </a:xfrm>
+          <a:prstGeom prst="rect">
+            <a:avLst/>
+          </a:prstGeom>
+          <a:noFill/>
+          <a:ln/>
+        </p:spPr>
+        <p:txBody>
+          <a:bodyPr wrap="square" rtlCol="0" anchor="ctr"/>
+          <a:lstStyle/>
+          <a:p>
+            <a:pPr indent="0" marL="0">
+              <a:buNone/>
+            </a:pPr>
+            <a:r>
+              <a:rPr lang="en-US" sz="1500" dirty="0">
+                <a:solidFill>
+                  <a:srgbClr val="1F2937"/>
+                </a:solidFill>
+                <a:latin typeface="Arial" pitchFamily="34" charset="0"/>
+                <a:ea typeface="Arial" pitchFamily="34" charset="-122"/>
+                <a:cs typeface="Arial" pitchFamily="34" charset="-120"/>
+              </a:rPr>
+              <a:t>Ligue o funil ao plano: do ponto de equilíbrio sai a meta de clientes, e dela os leads e o número de consultores.</a:t>
+            </a:r>
+            <a:endParaRPr lang="en-US" sz="1500" dirty="0"/>
           </a:p>
         </p:txBody>
       </p:sp>
@@ -15029,7 +16363,7 @@
         <p:spPr>
           <a:xfrm>
             <a:off x="548640" y="1325880"/>
-            <a:ext cx="11155680" cy="4937760"/>
+            <a:ext cx="11155680" cy="3977640"/>
           </a:xfrm>
           <a:prstGeom prst="rect">
             <a:avLst/>
@@ -15083,6 +16417,92 @@
               <a:t>✓ Comissão após a 1ª cobrança paga (ex.: 1 mensalidade) + pequena recorrência enquanto o cliente fica (ex.: 2–5% da taxa)</a:t>
             </a:r>
             <a:endParaRPr lang="en-US" sz="1800" dirty="0"/>
+          </a:p>
+        </p:txBody>
+      </p:sp>
+      <p:sp>
+        <p:nvSpPr>
+          <p:cNvPr id="10" name="Shape 7"/>
+          <p:cNvSpPr/>
+          <p:nvPr/>
+        </p:nvSpPr>
+        <p:spPr>
+          <a:xfrm>
+            <a:off x="548640" y="5413248"/>
+            <a:ext cx="11091672" cy="868680"/>
+          </a:xfrm>
+          <a:prstGeom prst="roundRect">
+            <a:avLst>
+              <a:gd name="adj" fmla="val 8421"/>
+            </a:avLst>
+          </a:prstGeom>
+          <a:solidFill>
+            <a:srgbClr val="EEF3FA"/>
+          </a:solidFill>
+          <a:ln w="6350">
+            <a:solidFill>
+              <a:srgbClr val="D8E0EC"/>
+            </a:solidFill>
+            <a:prstDash val="solid"/>
+          </a:ln>
+        </p:spPr>
+      </p:sp>
+      <p:sp>
+        <p:nvSpPr>
+          <p:cNvPr id="11" name="Shape 8"/>
+          <p:cNvSpPr/>
+          <p:nvPr/>
+        </p:nvSpPr>
+        <p:spPr>
+          <a:xfrm>
+            <a:off x="548640" y="5413248"/>
+            <a:ext cx="91440" cy="868680"/>
+          </a:xfrm>
+          <a:prstGeom prst="rect">
+            <a:avLst/>
+          </a:prstGeom>
+          <a:solidFill>
+            <a:srgbClr val="F7A23B"/>
+          </a:solidFill>
+          <a:ln/>
+        </p:spPr>
+      </p:sp>
+      <p:sp>
+        <p:nvSpPr>
+          <p:cNvPr id="12" name="Text 9"/>
+          <p:cNvSpPr/>
+          <p:nvPr/>
+        </p:nvSpPr>
+        <p:spPr>
+          <a:xfrm>
+            <a:off x="777240" y="5458968"/>
+            <a:ext cx="10744200" cy="777240"/>
+          </a:xfrm>
+          <a:prstGeom prst="rect">
+            <a:avLst/>
+          </a:prstGeom>
+          <a:noFill/>
+          <a:ln/>
+        </p:spPr>
+        <p:txBody>
+          <a:bodyPr wrap="square" rtlCol="0" anchor="ctr"/>
+          <a:lstStyle/>
+          <a:p>
+            <a:pPr indent="0" marL="0">
+              <a:buNone/>
+            </a:pPr>
+            <a:r>
+              <a:rPr lang="en-US" sz="1500" dirty="0">
+                <a:solidFill>
+                  <a:srgbClr val="1F2937"/>
+                </a:solidFill>
+                <a:latin typeface="Arial" pitchFamily="34" charset="0"/>
+                <a:ea typeface="Arial" pitchFamily="34" charset="-122"/>
+                <a:cs typeface="Arial" pitchFamily="34" charset="-120"/>
+              </a:rPr>
+              <a:t>Pague comissão depois da primeira cobrança paga. Assim o vendedor busca o cliente certo e explica direito.</a:t>
+            </a:r>
+            <a:endParaRPr lang="en-US" sz="1500" dirty="0"/>
           </a:p>
         </p:txBody>
       </p:sp>
@@ -16739,11 +18159,11 @@
         <p:spPr>
           <a:xfrm>
             <a:off x="548640" y="1325880"/>
-            <a:ext cx="3544824" cy="2331720"/>
+            <a:ext cx="3544824" cy="1874520"/>
           </a:xfrm>
           <a:prstGeom prst="roundRect">
             <a:avLst>
-              <a:gd name="adj" fmla="val 3137"/>
+              <a:gd name="adj" fmla="val 3902"/>
             </a:avLst>
           </a:prstGeom>
           <a:solidFill>
@@ -16832,7 +18252,7 @@
         <p:spPr>
           <a:xfrm>
             <a:off x="1325880" y="1435608"/>
-            <a:ext cx="2630424" cy="2112264"/>
+            <a:ext cx="2630424" cy="1655064"/>
           </a:xfrm>
           <a:prstGeom prst="rect">
             <a:avLst/>
@@ -16873,11 +18293,11 @@
         <p:spPr>
           <a:xfrm>
             <a:off x="4322064" y="1325880"/>
-            <a:ext cx="3544824" cy="2331720"/>
+            <a:ext cx="3544824" cy="1874520"/>
           </a:xfrm>
           <a:prstGeom prst="roundRect">
             <a:avLst>
-              <a:gd name="adj" fmla="val 3137"/>
+              <a:gd name="adj" fmla="val 3902"/>
             </a:avLst>
           </a:prstGeom>
           <a:solidFill>
@@ -16966,7 +18386,7 @@
         <p:spPr>
           <a:xfrm>
             <a:off x="5099304" y="1435608"/>
-            <a:ext cx="2630424" cy="2112264"/>
+            <a:ext cx="2630424" cy="1655064"/>
           </a:xfrm>
           <a:prstGeom prst="rect">
             <a:avLst/>
@@ -17007,11 +18427,11 @@
         <p:spPr>
           <a:xfrm>
             <a:off x="8095488" y="1325880"/>
-            <a:ext cx="3544824" cy="2331720"/>
+            <a:ext cx="3544824" cy="1874520"/>
           </a:xfrm>
           <a:prstGeom prst="roundRect">
             <a:avLst>
-              <a:gd name="adj" fmla="val 3137"/>
+              <a:gd name="adj" fmla="val 3902"/>
             </a:avLst>
           </a:prstGeom>
           <a:solidFill>
@@ -17100,7 +18520,7 @@
         <p:spPr>
           <a:xfrm>
             <a:off x="8872728" y="1435608"/>
-            <a:ext cx="2630424" cy="2112264"/>
+            <a:ext cx="2630424" cy="1655064"/>
           </a:xfrm>
           <a:prstGeom prst="rect">
             <a:avLst/>
@@ -17140,12 +18560,12 @@
         </p:nvSpPr>
         <p:spPr>
           <a:xfrm>
-            <a:off x="548640" y="3886200"/>
-            <a:ext cx="3544824" cy="2331720"/>
+            <a:off x="548640" y="3429000"/>
+            <a:ext cx="3544824" cy="1874520"/>
           </a:xfrm>
           <a:prstGeom prst="roundRect">
             <a:avLst>
-              <a:gd name="adj" fmla="val 3137"/>
+              <a:gd name="adj" fmla="val 3902"/>
             </a:avLst>
           </a:prstGeom>
           <a:solidFill>
@@ -17174,7 +18594,7 @@
         </p:nvSpPr>
         <p:spPr>
           <a:xfrm>
-            <a:off x="731520" y="4069080"/>
+            <a:off x="731520" y="3611880"/>
             <a:ext cx="457200" cy="457200"/>
           </a:xfrm>
           <a:prstGeom prst="ellipse">
@@ -17194,7 +18614,7 @@
         </p:nvSpPr>
         <p:spPr>
           <a:xfrm>
-            <a:off x="731520" y="4069080"/>
+            <a:off x="731520" y="3611880"/>
             <a:ext cx="457200" cy="457200"/>
           </a:xfrm>
           <a:prstGeom prst="rect">
@@ -17233,8 +18653,8 @@
         </p:nvSpPr>
         <p:spPr>
           <a:xfrm>
-            <a:off x="1325880" y="3995928"/>
-            <a:ext cx="2630424" cy="2112264"/>
+            <a:off x="1325880" y="3538728"/>
+            <a:ext cx="2630424" cy="1655064"/>
           </a:xfrm>
           <a:prstGeom prst="rect">
             <a:avLst/>
@@ -17274,12 +18694,12 @@
         </p:nvSpPr>
         <p:spPr>
           <a:xfrm>
-            <a:off x="4322064" y="3886200"/>
-            <a:ext cx="3544824" cy="2331720"/>
+            <a:off x="4322064" y="3429000"/>
+            <a:ext cx="3544824" cy="1874520"/>
           </a:xfrm>
           <a:prstGeom prst="roundRect">
             <a:avLst>
-              <a:gd name="adj" fmla="val 3137"/>
+              <a:gd name="adj" fmla="val 3902"/>
             </a:avLst>
           </a:prstGeom>
           <a:solidFill>
@@ -17308,7 +18728,7 @@
         </p:nvSpPr>
         <p:spPr>
           <a:xfrm>
-            <a:off x="4504944" y="4069080"/>
+            <a:off x="4504944" y="3611880"/>
             <a:ext cx="457200" cy="457200"/>
           </a:xfrm>
           <a:prstGeom prst="ellipse">
@@ -17328,7 +18748,7 @@
         </p:nvSpPr>
         <p:spPr>
           <a:xfrm>
-            <a:off x="4504944" y="4069080"/>
+            <a:off x="4504944" y="3611880"/>
             <a:ext cx="457200" cy="457200"/>
           </a:xfrm>
           <a:prstGeom prst="rect">
@@ -17367,8 +18787,8 @@
         </p:nvSpPr>
         <p:spPr>
           <a:xfrm>
-            <a:off x="5099304" y="3995928"/>
-            <a:ext cx="2630424" cy="2112264"/>
+            <a:off x="5099304" y="3538728"/>
+            <a:ext cx="2630424" cy="1655064"/>
           </a:xfrm>
           <a:prstGeom prst="rect">
             <a:avLst/>
@@ -17397,6 +18817,92 @@
               <a:t>Decisor acessível</a:t>
             </a:r>
             <a:endParaRPr lang="en-US" sz="1800" dirty="0"/>
+          </a:p>
+        </p:txBody>
+      </p:sp>
+      <p:sp>
+        <p:nvSpPr>
+          <p:cNvPr id="29" name="Shape 26"/>
+          <p:cNvSpPr/>
+          <p:nvPr/>
+        </p:nvSpPr>
+        <p:spPr>
+          <a:xfrm>
+            <a:off x="548640" y="5413248"/>
+            <a:ext cx="11091672" cy="868680"/>
+          </a:xfrm>
+          <a:prstGeom prst="roundRect">
+            <a:avLst>
+              <a:gd name="adj" fmla="val 8421"/>
+            </a:avLst>
+          </a:prstGeom>
+          <a:solidFill>
+            <a:srgbClr val="EEF3FA"/>
+          </a:solidFill>
+          <a:ln w="6350">
+            <a:solidFill>
+              <a:srgbClr val="D8E0EC"/>
+            </a:solidFill>
+            <a:prstDash val="solid"/>
+          </a:ln>
+        </p:spPr>
+      </p:sp>
+      <p:sp>
+        <p:nvSpPr>
+          <p:cNvPr id="30" name="Shape 27"/>
+          <p:cNvSpPr/>
+          <p:nvPr/>
+        </p:nvSpPr>
+        <p:spPr>
+          <a:xfrm>
+            <a:off x="548640" y="5413248"/>
+            <a:ext cx="91440" cy="868680"/>
+          </a:xfrm>
+          <a:prstGeom prst="rect">
+            <a:avLst/>
+          </a:prstGeom>
+          <a:solidFill>
+            <a:srgbClr val="F7A23B"/>
+          </a:solidFill>
+          <a:ln/>
+        </p:spPr>
+      </p:sp>
+      <p:sp>
+        <p:nvSpPr>
+          <p:cNvPr id="31" name="Text 28"/>
+          <p:cNvSpPr/>
+          <p:nvPr/>
+        </p:nvSpPr>
+        <p:spPr>
+          <a:xfrm>
+            <a:off x="777240" y="5458968"/>
+            <a:ext cx="10744200" cy="777240"/>
+          </a:xfrm>
+          <a:prstGeom prst="rect">
+            <a:avLst/>
+          </a:prstGeom>
+          <a:noFill/>
+          <a:ln/>
+        </p:spPr>
+        <p:txBody>
+          <a:bodyPr wrap="square" rtlCol="0" anchor="ctr"/>
+          <a:lstStyle/>
+          <a:p>
+            <a:pPr indent="0" marL="0">
+              <a:buNone/>
+            </a:pPr>
+            <a:r>
+              <a:rPr lang="en-US" sz="1500" dirty="0">
+                <a:solidFill>
+                  <a:srgbClr val="1F2937"/>
+                </a:solidFill>
+                <a:latin typeface="Arial" pitchFamily="34" charset="0"/>
+                <a:ea typeface="Arial" pitchFamily="34" charset="-122"/>
+                <a:cs typeface="Arial" pitchFamily="34" charset="-120"/>
+              </a:rPr>
+              <a:t>Os cinco critérios estão na tela. O mais decisivo é consumo alto e estável: uma venda boa ocupa uma boa fatia da usina.</a:t>
+            </a:r>
+            <a:endParaRPr lang="en-US" sz="1500" dirty="0"/>
           </a:p>
         </p:txBody>
       </p:sp>
@@ -18232,7 +19738,7 @@
                 <a:ea typeface="Arial" pitchFamily="34" charset="-122"/>
                 <a:cs typeface="Arial" pitchFamily="34" charset="-120"/>
               </a:rPr>
-              <a:t>Cliente Consumidor → Clientes → Novo · CPF/CNPJ validado · sem duplicidade</a:t>
+              <a:t>Em Cliente Consumidor, Clientes, crie uma academia como pessoa jurídica, com CNPJ fictício e contatos. Ela já recebe o desconto padrão.</a:t>
             </a:r>
             <a:endParaRPr lang="en-US" sz="1500" dirty="0"/>
           </a:p>
@@ -18283,7 +19789,7 @@
                 <a:ea typeface="Arial" pitchFamily="34" charset="-122"/>
                 <a:cs typeface="Arial" pitchFamily="34" charset="-120"/>
               </a:rPr>
-              <a:t>UC = número da instalação na conta · código + concessionária são únicos</a:t>
+              <a:t>Na aba de unidades consumidoras, cadastre a UC: código da instalação, rótulo, concessionária e consumo previsto.</a:t>
             </a:r>
             <a:endParaRPr lang="en-US" sz="1500" dirty="0"/>
           </a:p>
@@ -18334,7 +19840,7 @@
                 <a:ea typeface="Arial" pitchFamily="34" charset="-122"/>
                 <a:cs typeface="Arial" pitchFamily="34" charset="-120"/>
               </a:rPr>
-              <a:t>Propostas → Nova · Média de Consumo · Valor Médio · Taxa de Redução · Prazo · Validade</a:t>
+              <a:t>Em Propostas, crie a proposta: cliente, UC, média de consumo, valor médio, desconto, prazo e validade.</a:t>
             </a:r>
             <a:endParaRPr lang="en-US" sz="1500" dirty="0"/>
           </a:p>
@@ -18385,7 +19891,7 @@
                 <a:ea typeface="Arial" pitchFamily="34" charset="-122"/>
                 <a:cs typeface="Arial" pitchFamily="34" charset="-120"/>
               </a:rPr>
-              <a:t>PDF com a marca da sua empresa · link temporário · envio por WhatsApp/e-mail</a:t>
+              <a:t>Gere o PDF e confira a economia com a calculadora. O envio por WhatsApp é com um clique, pelo consultor.</a:t>
             </a:r>
             <a:endParaRPr lang="en-US" sz="1500" dirty="0"/>
           </a:p>
@@ -18957,7 +20463,7 @@
                 <a:ea typeface="Arial" pitchFamily="34" charset="-122"/>
                 <a:cs typeface="Arial" pitchFamily="34" charset="-120"/>
               </a:rPr>
-              <a:t>M5 · Fechamento</a:t>
+              <a:t>M5 · Teste rápido</a:t>
             </a:r>
             <a:endParaRPr lang="en-US" sz="900" dirty="0"/>
           </a:p>
@@ -19016,7 +20522,7 @@
                 <a:ea typeface="Arial" pitchFamily="34" charset="-122"/>
                 <a:cs typeface="Arial" pitchFamily="34" charset="-120"/>
               </a:rPr>
-              <a:t>FECHAMENTO DO MÓDULO</a:t>
+              <a:t>QUESTÕES 1–2 DE 6</a:t>
             </a:r>
             <a:endParaRPr lang="en-US" sz="1000" dirty="0"/>
           </a:p>
@@ -19057,7 +20563,7 @@
                 <a:ea typeface="Arial" pitchFamily="34" charset="-122"/>
                 <a:cs typeface="Arial" pitchFamily="34" charset="-120"/>
               </a:rPr>
-              <a:t>Pratique e entregue</a:t>
+              <a:t>Teste rápido</a:t>
             </a:r>
             <a:endParaRPr lang="en-US" sz="2600" dirty="0"/>
           </a:p>
@@ -19065,142 +20571,17 @@
       </p:sp>
       <p:sp>
         <p:nvSpPr>
-          <p:cNvPr id="9" name="Text 6"/>
+          <p:cNvPr id="9" name="Shape 6"/>
           <p:cNvSpPr/>
           <p:nvPr/>
         </p:nvSpPr>
         <p:spPr>
           <a:xfrm>
             <a:off x="548640" y="1325880"/>
-            <a:ext cx="5394960" cy="411480"/>
-          </a:xfrm>
-          <a:prstGeom prst="rect">
-            <a:avLst/>
-          </a:prstGeom>
-          <a:noFill/>
-          <a:ln/>
-        </p:spPr>
-        <p:txBody>
-          <a:bodyPr wrap="square" rtlCol="0" anchor="ctr"/>
-          <a:lstStyle/>
-          <a:p>
-            <a:pPr indent="0" marL="0">
-              <a:buNone/>
-            </a:pPr>
-            <a:r>
-              <a:rPr lang="en-US" sz="1600" b="1" dirty="0">
-                <a:solidFill>
-                  <a:srgbClr val="1B3A6B"/>
-                </a:solidFill>
-                <a:latin typeface="Arial" pitchFamily="34" charset="0"/>
-                <a:ea typeface="Arial" pitchFamily="34" charset="-122"/>
-                <a:cs typeface="Arial" pitchFamily="34" charset="-120"/>
-              </a:rPr>
-              <a:t>Exercícios</a:t>
-            </a:r>
-            <a:endParaRPr lang="en-US" sz="1600" dirty="0"/>
-          </a:p>
-        </p:txBody>
-      </p:sp>
-      <p:sp>
-        <p:nvSpPr>
-          <p:cNvPr id="10" name="Text 7"/>
-          <p:cNvSpPr/>
-          <p:nvPr/>
-        </p:nvSpPr>
-        <p:spPr>
-          <a:xfrm>
-            <a:off x="548640" y="1783080"/>
-            <a:ext cx="5394960" cy="4480560"/>
-          </a:xfrm>
-          <a:prstGeom prst="rect">
-            <a:avLst/>
-          </a:prstGeom>
-          <a:noFill/>
-          <a:ln/>
-        </p:spPr>
-        <p:txBody>
-          <a:bodyPr wrap="square" rtlCol="0" anchor="t">
-            <a:normAutofit/>
-          </a:bodyPr>
-          <a:lstStyle/>
-          <a:p>
-            <a:pPr indent="0" marL="0">
-              <a:spcAft>
-                <a:spcPts val="800"/>
-              </a:spcAft>
-              <a:buNone/>
-            </a:pPr>
-            <a:r>
-              <a:rPr lang="en-US" sz="1600" dirty="0">
-                <a:solidFill>
-                  <a:srgbClr val="1F2937"/>
-                </a:solidFill>
-                <a:latin typeface="Arial" pitchFamily="34" charset="0"/>
-                <a:ea typeface="Arial" pitchFamily="34" charset="-122"/>
-                <a:cs typeface="Arial" pitchFamily="34" charset="-120"/>
-              </a:rPr>
-              <a:t>1. Uma academia trifásica com média de 6.200 kWh/mês: cota ideal com margem de 95%? (R: (6.200 − 100) × 0,95 ≈ 5.795 kWh)</a:t>
-            </a:r>
-            <a:endParaRPr lang="en-US" sz="1600" dirty="0"/>
-          </a:p>
-          <a:p>
-            <a:pPr indent="0" marL="0">
-              <a:spcAft>
-                <a:spcPts val="800"/>
-              </a:spcAft>
-              <a:buNone/>
-            </a:pPr>
-            <a:r>
-              <a:rPr lang="en-US" sz="1600" dirty="0">
-                <a:solidFill>
-                  <a:srgbClr val="1F2937"/>
-                </a:solidFill>
-                <a:latin typeface="Arial" pitchFamily="34" charset="0"/>
-                <a:ea typeface="Arial" pitchFamily="34" charset="-122"/>
-                <a:cs typeface="Arial" pitchFamily="34" charset="-120"/>
-              </a:rPr>
-              <a:t>2. Quantas academias como essa cabem na Sol Nascente I (60.000 kWh)?</a:t>
-            </a:r>
-            <a:endParaRPr lang="en-US" sz="1600" dirty="0"/>
-          </a:p>
-          <a:p>
-            <a:pPr indent="0" marL="0">
-              <a:spcAft>
-                <a:spcPts val="800"/>
-              </a:spcAft>
-              <a:buNone/>
-            </a:pPr>
-            <a:r>
-              <a:rPr lang="en-US" sz="1600" dirty="0">
-                <a:solidFill>
-                  <a:srgbClr val="1F2937"/>
-                </a:solidFill>
-                <a:latin typeface="Arial" pitchFamily="34" charset="0"/>
-                <a:ea typeface="Arial" pitchFamily="34" charset="-122"/>
-                <a:cs typeface="Arial" pitchFamily="34" charset="-120"/>
-              </a:rPr>
-              <a:t>3. Escreva a resposta para a objeção "vou pagar duas contas?" em até 3 frases.</a:t>
-            </a:r>
-            <a:endParaRPr lang="en-US" sz="1600" dirty="0"/>
-          </a:p>
-        </p:txBody>
-      </p:sp>
-      <p:sp>
-        <p:nvSpPr>
-          <p:cNvPr id="11" name="Shape 8"/>
-          <p:cNvSpPr/>
-          <p:nvPr/>
-        </p:nvSpPr>
-        <p:spPr>
-          <a:xfrm>
-            <a:off x="6172200" y="1325880"/>
-            <a:ext cx="5468112" cy="4937760"/>
-          </a:xfrm>
-          <a:prstGeom prst="roundRect">
-            <a:avLst>
-              <a:gd name="adj" fmla="val 1852"/>
-            </a:avLst>
+            <a:ext cx="502920" cy="502920"/>
+          </a:xfrm>
+          <a:prstGeom prst="ellipse">
+            <a:avLst/>
           </a:prstGeom>
           <a:solidFill>
             <a:srgbClr val="1B3A6B"/>
@@ -19210,32 +20591,135 @@
       </p:sp>
       <p:sp>
         <p:nvSpPr>
-          <p:cNvPr id="12" name="Text 9"/>
-          <p:cNvSpPr/>
-          <p:nvPr/>
-        </p:nvSpPr>
-        <p:spPr>
-          <a:xfrm>
-            <a:off x="6492240" y="1554480"/>
-            <a:ext cx="4828032" cy="4480560"/>
-          </a:xfrm>
-          <a:prstGeom prst="rect">
-            <a:avLst/>
-          </a:prstGeom>
-          <a:noFill/>
-          <a:ln/>
-        </p:spPr>
-        <p:txBody>
-          <a:bodyPr wrap="square" rtlCol="0" anchor="t">
-            <a:normAutofit/>
-          </a:bodyPr>
+          <p:cNvPr id="10" name="Text 7"/>
+          <p:cNvSpPr/>
+          <p:nvPr/>
+        </p:nvSpPr>
+        <p:spPr>
+          <a:xfrm>
+            <a:off x="548640" y="1325880"/>
+            <a:ext cx="502920" cy="502920"/>
+          </a:xfrm>
+          <a:prstGeom prst="rect">
+            <a:avLst/>
+          </a:prstGeom>
+          <a:noFill/>
+          <a:ln/>
+        </p:spPr>
+        <p:txBody>
+          <a:bodyPr wrap="square" rtlCol="0" anchor="ctr"/>
+          <a:lstStyle/>
+          <a:p>
+            <a:pPr algn="ctr" indent="0" marL="0">
+              <a:buNone/>
+            </a:pPr>
+            <a:r>
+              <a:rPr lang="en-US" sz="1600" b="1" dirty="0">
+                <a:solidFill>
+                  <a:srgbClr val="FFFFFF"/>
+                </a:solidFill>
+                <a:latin typeface="Arial" pitchFamily="34" charset="0"/>
+                <a:ea typeface="Arial" pitchFamily="34" charset="-122"/>
+                <a:cs typeface="Arial" pitchFamily="34" charset="-120"/>
+              </a:rPr>
+              <a:t>1</a:t>
+            </a:r>
+            <a:endParaRPr lang="en-US" sz="1600" dirty="0"/>
+          </a:p>
+        </p:txBody>
+      </p:sp>
+      <p:sp>
+        <p:nvSpPr>
+          <p:cNvPr id="11" name="Text 8"/>
+          <p:cNvSpPr/>
+          <p:nvPr/>
+        </p:nvSpPr>
+        <p:spPr>
+          <a:xfrm>
+            <a:off x="1234440" y="1280160"/>
+            <a:ext cx="10424160" cy="640080"/>
+          </a:xfrm>
+          <a:prstGeom prst="rect">
+            <a:avLst/>
+          </a:prstGeom>
+          <a:noFill/>
+          <a:ln/>
+        </p:spPr>
+        <p:txBody>
+          <a:bodyPr wrap="square" rtlCol="0" anchor="ctr"/>
           <a:lstStyle/>
           <a:p>
             <a:pPr indent="0" marL="0">
               <a:buNone/>
             </a:pPr>
             <a:r>
-              <a:rPr lang="en-US" sz="1300" b="1" spc="100" kern="0" dirty="0">
+              <a:rPr lang="en-US" sz="1800" b="1" dirty="0">
+                <a:solidFill>
+                  <a:srgbClr val="1B3A6B"/>
+                </a:solidFill>
+                <a:latin typeface="Arial" pitchFamily="34" charset="0"/>
+                <a:ea typeface="Arial" pitchFamily="34" charset="-122"/>
+                <a:cs typeface="Arial" pitchFamily="34" charset="-120"/>
+              </a:rPr>
+              <a:t>Qual perfil costuma ser o melhor cliente inicial?</a:t>
+            </a:r>
+            <a:endParaRPr lang="en-US" sz="1800" dirty="0"/>
+          </a:p>
+        </p:txBody>
+      </p:sp>
+      <p:sp>
+        <p:nvSpPr>
+          <p:cNvPr id="12" name="Shape 9"/>
+          <p:cNvSpPr/>
+          <p:nvPr/>
+        </p:nvSpPr>
+        <p:spPr>
+          <a:xfrm>
+            <a:off x="548640" y="2057400"/>
+            <a:ext cx="2601468" cy="1463040"/>
+          </a:xfrm>
+          <a:prstGeom prst="roundRect">
+            <a:avLst>
+              <a:gd name="adj" fmla="val 5000"/>
+            </a:avLst>
+          </a:prstGeom>
+          <a:solidFill>
+            <a:srgbClr val="FFFFFF"/>
+          </a:solidFill>
+          <a:ln w="9525">
+            <a:solidFill>
+              <a:srgbClr val="D8E0EC"/>
+            </a:solidFill>
+            <a:prstDash val="solid"/>
+          </a:ln>
+        </p:spPr>
+      </p:sp>
+      <p:sp>
+        <p:nvSpPr>
+          <p:cNvPr id="13" name="Text 10"/>
+          <p:cNvSpPr/>
+          <p:nvPr/>
+        </p:nvSpPr>
+        <p:spPr>
+          <a:xfrm>
+            <a:off x="685800" y="2148840"/>
+            <a:ext cx="365760" cy="365760"/>
+          </a:xfrm>
+          <a:prstGeom prst="rect">
+            <a:avLst/>
+          </a:prstGeom>
+          <a:noFill/>
+          <a:ln/>
+        </p:spPr>
+        <p:txBody>
+          <a:bodyPr wrap="square" rtlCol="0" anchor="ctr"/>
+          <a:lstStyle/>
+          <a:p>
+            <a:pPr indent="0" marL="0">
+              <a:buNone/>
+            </a:pPr>
+            <a:r>
+              <a:rPr lang="en-US" sz="1400" b="1" dirty="0">
                 <a:solidFill>
                   <a:srgbClr val="F7A23B"/>
                 </a:solidFill>
@@ -19243,14 +20727,412 @@
                 <a:ea typeface="Arial" pitchFamily="34" charset="-122"/>
                 <a:cs typeface="Arial" pitchFamily="34" charset="-120"/>
               </a:rPr>
-              <a:t>ENTREGÁVEL DO MÓDULO
-</a:t>
-            </a:r>
+              <a:t>A</a:t>
+            </a:r>
+            <a:endParaRPr lang="en-US" sz="1400" dirty="0"/>
+          </a:p>
+        </p:txBody>
+      </p:sp>
+      <p:sp>
+        <p:nvSpPr>
+          <p:cNvPr id="14" name="Text 11"/>
+          <p:cNvSpPr/>
+          <p:nvPr/>
+        </p:nvSpPr>
+        <p:spPr>
+          <a:xfrm>
+            <a:off x="685800" y="2514600"/>
+            <a:ext cx="2327148" cy="914400"/>
+          </a:xfrm>
+          <a:prstGeom prst="rect">
+            <a:avLst/>
+          </a:prstGeom>
+          <a:noFill/>
+          <a:ln/>
+        </p:spPr>
+        <p:txBody>
+          <a:bodyPr wrap="square" rtlCol="0" anchor="t"/>
+          <a:lstStyle/>
+          <a:p>
             <a:pPr indent="0" marL="0">
               <a:buNone/>
             </a:pPr>
             <a:r>
-              <a:rPr lang="en-US" sz="1600" dirty="0">
+              <a:rPr lang="en-US" sz="1500" dirty="0">
+                <a:solidFill>
+                  <a:srgbClr val="1F2937"/>
+                </a:solidFill>
+                <a:latin typeface="Arial" pitchFamily="34" charset="0"/>
+                <a:ea typeface="Arial" pitchFamily="34" charset="-122"/>
+                <a:cs typeface="Arial" pitchFamily="34" charset="-120"/>
+              </a:rPr>
+              <a:t>Indústria do grupo A</a:t>
+            </a:r>
+            <a:endParaRPr lang="en-US" sz="1500" dirty="0"/>
+          </a:p>
+        </p:txBody>
+      </p:sp>
+      <p:sp>
+        <p:nvSpPr>
+          <p:cNvPr id="15" name="Shape 12"/>
+          <p:cNvSpPr/>
+          <p:nvPr/>
+        </p:nvSpPr>
+        <p:spPr>
+          <a:xfrm>
+            <a:off x="3378708" y="2057400"/>
+            <a:ext cx="2601468" cy="1463040"/>
+          </a:xfrm>
+          <a:prstGeom prst="roundRect">
+            <a:avLst>
+              <a:gd name="adj" fmla="val 5000"/>
+            </a:avLst>
+          </a:prstGeom>
+          <a:solidFill>
+            <a:srgbClr val="FFFFFF"/>
+          </a:solidFill>
+          <a:ln w="9525">
+            <a:solidFill>
+              <a:srgbClr val="D8E0EC"/>
+            </a:solidFill>
+            <a:prstDash val="solid"/>
+          </a:ln>
+        </p:spPr>
+      </p:sp>
+      <p:sp>
+        <p:nvSpPr>
+          <p:cNvPr id="16" name="Text 13"/>
+          <p:cNvSpPr/>
+          <p:nvPr/>
+        </p:nvSpPr>
+        <p:spPr>
+          <a:xfrm>
+            <a:off x="3515868" y="2148840"/>
+            <a:ext cx="365760" cy="365760"/>
+          </a:xfrm>
+          <a:prstGeom prst="rect">
+            <a:avLst/>
+          </a:prstGeom>
+          <a:noFill/>
+          <a:ln/>
+        </p:spPr>
+        <p:txBody>
+          <a:bodyPr wrap="square" rtlCol="0" anchor="ctr"/>
+          <a:lstStyle/>
+          <a:p>
+            <a:pPr indent="0" marL="0">
+              <a:buNone/>
+            </a:pPr>
+            <a:r>
+              <a:rPr lang="en-US" sz="1400" b="1" dirty="0">
+                <a:solidFill>
+                  <a:srgbClr val="F7A23B"/>
+                </a:solidFill>
+                <a:latin typeface="Arial" pitchFamily="34" charset="0"/>
+                <a:ea typeface="Arial" pitchFamily="34" charset="-122"/>
+                <a:cs typeface="Arial" pitchFamily="34" charset="-120"/>
+              </a:rPr>
+              <a:t>B</a:t>
+            </a:r>
+            <a:endParaRPr lang="en-US" sz="1400" dirty="0"/>
+          </a:p>
+        </p:txBody>
+      </p:sp>
+      <p:sp>
+        <p:nvSpPr>
+          <p:cNvPr id="17" name="Text 14"/>
+          <p:cNvSpPr/>
+          <p:nvPr/>
+        </p:nvSpPr>
+        <p:spPr>
+          <a:xfrm>
+            <a:off x="3515868" y="2514600"/>
+            <a:ext cx="2327148" cy="914400"/>
+          </a:xfrm>
+          <a:prstGeom prst="rect">
+            <a:avLst/>
+          </a:prstGeom>
+          <a:noFill/>
+          <a:ln/>
+        </p:spPr>
+        <p:txBody>
+          <a:bodyPr wrap="square" rtlCol="0" anchor="t"/>
+          <a:lstStyle/>
+          <a:p>
+            <a:pPr indent="0" marL="0">
+              <a:buNone/>
+            </a:pPr>
+            <a:r>
+              <a:rPr lang="en-US" sz="1500" dirty="0">
+                <a:solidFill>
+                  <a:srgbClr val="1F2937"/>
+                </a:solidFill>
+                <a:latin typeface="Arial" pitchFamily="34" charset="0"/>
+                <a:ea typeface="Arial" pitchFamily="34" charset="-122"/>
+                <a:cs typeface="Arial" pitchFamily="34" charset="-120"/>
+              </a:rPr>
+              <a:t>Comércio/serviço do grupo B com consumo alto e estável</a:t>
+            </a:r>
+            <a:endParaRPr lang="en-US" sz="1500" dirty="0"/>
+          </a:p>
+        </p:txBody>
+      </p:sp>
+      <p:sp>
+        <p:nvSpPr>
+          <p:cNvPr id="18" name="Shape 15"/>
+          <p:cNvSpPr/>
+          <p:nvPr/>
+        </p:nvSpPr>
+        <p:spPr>
+          <a:xfrm>
+            <a:off x="6208776" y="2057400"/>
+            <a:ext cx="2601468" cy="1463040"/>
+          </a:xfrm>
+          <a:prstGeom prst="roundRect">
+            <a:avLst>
+              <a:gd name="adj" fmla="val 5000"/>
+            </a:avLst>
+          </a:prstGeom>
+          <a:solidFill>
+            <a:srgbClr val="FFFFFF"/>
+          </a:solidFill>
+          <a:ln w="9525">
+            <a:solidFill>
+              <a:srgbClr val="D8E0EC"/>
+            </a:solidFill>
+            <a:prstDash val="solid"/>
+          </a:ln>
+        </p:spPr>
+      </p:sp>
+      <p:sp>
+        <p:nvSpPr>
+          <p:cNvPr id="19" name="Text 16"/>
+          <p:cNvSpPr/>
+          <p:nvPr/>
+        </p:nvSpPr>
+        <p:spPr>
+          <a:xfrm>
+            <a:off x="6345936" y="2148840"/>
+            <a:ext cx="365760" cy="365760"/>
+          </a:xfrm>
+          <a:prstGeom prst="rect">
+            <a:avLst/>
+          </a:prstGeom>
+          <a:noFill/>
+          <a:ln/>
+        </p:spPr>
+        <p:txBody>
+          <a:bodyPr wrap="square" rtlCol="0" anchor="ctr"/>
+          <a:lstStyle/>
+          <a:p>
+            <a:pPr indent="0" marL="0">
+              <a:buNone/>
+            </a:pPr>
+            <a:r>
+              <a:rPr lang="en-US" sz="1400" b="1" dirty="0">
+                <a:solidFill>
+                  <a:srgbClr val="F7A23B"/>
+                </a:solidFill>
+                <a:latin typeface="Arial" pitchFamily="34" charset="0"/>
+                <a:ea typeface="Arial" pitchFamily="34" charset="-122"/>
+                <a:cs typeface="Arial" pitchFamily="34" charset="-120"/>
+              </a:rPr>
+              <a:t>C</a:t>
+            </a:r>
+            <a:endParaRPr lang="en-US" sz="1400" dirty="0"/>
+          </a:p>
+        </p:txBody>
+      </p:sp>
+      <p:sp>
+        <p:nvSpPr>
+          <p:cNvPr id="20" name="Text 17"/>
+          <p:cNvSpPr/>
+          <p:nvPr/>
+        </p:nvSpPr>
+        <p:spPr>
+          <a:xfrm>
+            <a:off x="6345936" y="2514600"/>
+            <a:ext cx="2327148" cy="914400"/>
+          </a:xfrm>
+          <a:prstGeom prst="rect">
+            <a:avLst/>
+          </a:prstGeom>
+          <a:noFill/>
+          <a:ln/>
+        </p:spPr>
+        <p:txBody>
+          <a:bodyPr wrap="square" rtlCol="0" anchor="t"/>
+          <a:lstStyle/>
+          <a:p>
+            <a:pPr indent="0" marL="0">
+              <a:buNone/>
+            </a:pPr>
+            <a:r>
+              <a:rPr lang="en-US" sz="1500" dirty="0">
+                <a:solidFill>
+                  <a:srgbClr val="1F2937"/>
+                </a:solidFill>
+                <a:latin typeface="Arial" pitchFamily="34" charset="0"/>
+                <a:ea typeface="Arial" pitchFamily="34" charset="-122"/>
+                <a:cs typeface="Arial" pitchFamily="34" charset="-120"/>
+              </a:rPr>
+              <a:t>Cliente com tarifa social</a:t>
+            </a:r>
+            <a:endParaRPr lang="en-US" sz="1500" dirty="0"/>
+          </a:p>
+        </p:txBody>
+      </p:sp>
+      <p:sp>
+        <p:nvSpPr>
+          <p:cNvPr id="21" name="Shape 18"/>
+          <p:cNvSpPr/>
+          <p:nvPr/>
+        </p:nvSpPr>
+        <p:spPr>
+          <a:xfrm>
+            <a:off x="9038844" y="2057400"/>
+            <a:ext cx="2601468" cy="1463040"/>
+          </a:xfrm>
+          <a:prstGeom prst="roundRect">
+            <a:avLst>
+              <a:gd name="adj" fmla="val 5000"/>
+            </a:avLst>
+          </a:prstGeom>
+          <a:solidFill>
+            <a:srgbClr val="FFFFFF"/>
+          </a:solidFill>
+          <a:ln w="9525">
+            <a:solidFill>
+              <a:srgbClr val="D8E0EC"/>
+            </a:solidFill>
+            <a:prstDash val="solid"/>
+          </a:ln>
+        </p:spPr>
+      </p:sp>
+      <p:sp>
+        <p:nvSpPr>
+          <p:cNvPr id="22" name="Text 19"/>
+          <p:cNvSpPr/>
+          <p:nvPr/>
+        </p:nvSpPr>
+        <p:spPr>
+          <a:xfrm>
+            <a:off x="9176004" y="2148840"/>
+            <a:ext cx="365760" cy="365760"/>
+          </a:xfrm>
+          <a:prstGeom prst="rect">
+            <a:avLst/>
+          </a:prstGeom>
+          <a:noFill/>
+          <a:ln/>
+        </p:spPr>
+        <p:txBody>
+          <a:bodyPr wrap="square" rtlCol="0" anchor="ctr"/>
+          <a:lstStyle/>
+          <a:p>
+            <a:pPr indent="0" marL="0">
+              <a:buNone/>
+            </a:pPr>
+            <a:r>
+              <a:rPr lang="en-US" sz="1400" b="1" dirty="0">
+                <a:solidFill>
+                  <a:srgbClr val="F7A23B"/>
+                </a:solidFill>
+                <a:latin typeface="Arial" pitchFamily="34" charset="0"/>
+                <a:ea typeface="Arial" pitchFamily="34" charset="-122"/>
+                <a:cs typeface="Arial" pitchFamily="34" charset="-120"/>
+              </a:rPr>
+              <a:t>D</a:t>
+            </a:r>
+            <a:endParaRPr lang="en-US" sz="1400" dirty="0"/>
+          </a:p>
+        </p:txBody>
+      </p:sp>
+      <p:sp>
+        <p:nvSpPr>
+          <p:cNvPr id="23" name="Text 20"/>
+          <p:cNvSpPr/>
+          <p:nvPr/>
+        </p:nvSpPr>
+        <p:spPr>
+          <a:xfrm>
+            <a:off x="9176004" y="2514600"/>
+            <a:ext cx="2327148" cy="914400"/>
+          </a:xfrm>
+          <a:prstGeom prst="rect">
+            <a:avLst/>
+          </a:prstGeom>
+          <a:noFill/>
+          <a:ln/>
+        </p:spPr>
+        <p:txBody>
+          <a:bodyPr wrap="square" rtlCol="0" anchor="t"/>
+          <a:lstStyle/>
+          <a:p>
+            <a:pPr indent="0" marL="0">
+              <a:buNone/>
+            </a:pPr>
+            <a:r>
+              <a:rPr lang="en-US" sz="1500" dirty="0">
+                <a:solidFill>
+                  <a:srgbClr val="1F2937"/>
+                </a:solidFill>
+                <a:latin typeface="Arial" pitchFamily="34" charset="0"/>
+                <a:ea typeface="Arial" pitchFamily="34" charset="-122"/>
+                <a:cs typeface="Arial" pitchFamily="34" charset="-120"/>
+              </a:rPr>
+              <a:t>Quem já tem painel no telhado</a:t>
+            </a:r>
+            <a:endParaRPr lang="en-US" sz="1500" dirty="0"/>
+          </a:p>
+        </p:txBody>
+      </p:sp>
+      <p:sp>
+        <p:nvSpPr>
+          <p:cNvPr id="24" name="Shape 21"/>
+          <p:cNvSpPr/>
+          <p:nvPr/>
+        </p:nvSpPr>
+        <p:spPr>
+          <a:xfrm>
+            <a:off x="548640" y="3840480"/>
+            <a:ext cx="502920" cy="502920"/>
+          </a:xfrm>
+          <a:prstGeom prst="ellipse">
+            <a:avLst/>
+          </a:prstGeom>
+          <a:solidFill>
+            <a:srgbClr val="1B3A6B"/>
+          </a:solidFill>
+          <a:ln/>
+        </p:spPr>
+      </p:sp>
+      <p:sp>
+        <p:nvSpPr>
+          <p:cNvPr id="25" name="Text 22"/>
+          <p:cNvSpPr/>
+          <p:nvPr/>
+        </p:nvSpPr>
+        <p:spPr>
+          <a:xfrm>
+            <a:off x="548640" y="3840480"/>
+            <a:ext cx="502920" cy="502920"/>
+          </a:xfrm>
+          <a:prstGeom prst="rect">
+            <a:avLst/>
+          </a:prstGeom>
+          <a:noFill/>
+          <a:ln/>
+        </p:spPr>
+        <p:txBody>
+          <a:bodyPr wrap="square" rtlCol="0" anchor="ctr"/>
+          <a:lstStyle/>
+          <a:p>
+            <a:pPr algn="ctr" indent="0" marL="0">
+              <a:buNone/>
+            </a:pPr>
+            <a:r>
+              <a:rPr lang="en-US" sz="1600" b="1" dirty="0">
                 <a:solidFill>
                   <a:srgbClr val="FFFFFF"/>
                 </a:solidFill>
@@ -19258,9 +21140,468 @@
                 <a:ea typeface="Arial" pitchFamily="34" charset="-122"/>
                 <a:cs typeface="Arial" pitchFamily="34" charset="-120"/>
               </a:rPr>
-              <a:t>Primeiros clientes da minha empresa: 5 clientes fictícios do seu ICP cadastrados com UC e proposta (pelo menos 2 empresas B3 e 2 residências), com cota calculada e economia estimada; e o roteiro de abordagem do seu vendedor (uma página).</a:t>
-            </a:r>
-            <a:endParaRPr lang="en-US" sz="1300" dirty="0"/>
+              <a:t>2</a:t>
+            </a:r>
+            <a:endParaRPr lang="en-US" sz="1600" dirty="0"/>
+          </a:p>
+        </p:txBody>
+      </p:sp>
+      <p:sp>
+        <p:nvSpPr>
+          <p:cNvPr id="26" name="Text 23"/>
+          <p:cNvSpPr/>
+          <p:nvPr/>
+        </p:nvSpPr>
+        <p:spPr>
+          <a:xfrm>
+            <a:off x="1234440" y="3794760"/>
+            <a:ext cx="10424160" cy="640080"/>
+          </a:xfrm>
+          <a:prstGeom prst="rect">
+            <a:avLst/>
+          </a:prstGeom>
+          <a:noFill/>
+          <a:ln/>
+        </p:spPr>
+        <p:txBody>
+          <a:bodyPr wrap="square" rtlCol="0" anchor="ctr"/>
+          <a:lstStyle/>
+          <a:p>
+            <a:pPr indent="0" marL="0">
+              <a:buNone/>
+            </a:pPr>
+            <a:r>
+              <a:rPr lang="en-US" sz="1800" b="1" dirty="0">
+                <a:solidFill>
+                  <a:srgbClr val="1B3A6B"/>
+                </a:solidFill>
+                <a:latin typeface="Arial" pitchFamily="34" charset="0"/>
+                <a:ea typeface="Arial" pitchFamily="34" charset="-122"/>
+                <a:cs typeface="Arial" pitchFamily="34" charset="-120"/>
+              </a:rPr>
+              <a:t>Para quem já tem empresa solar, uma fonte valiosa de clientes de assinatura é:</a:t>
+            </a:r>
+            <a:endParaRPr lang="en-US" sz="1800" dirty="0"/>
+          </a:p>
+        </p:txBody>
+      </p:sp>
+      <p:sp>
+        <p:nvSpPr>
+          <p:cNvPr id="27" name="Shape 24"/>
+          <p:cNvSpPr/>
+          <p:nvPr/>
+        </p:nvSpPr>
+        <p:spPr>
+          <a:xfrm>
+            <a:off x="548640" y="4572000"/>
+            <a:ext cx="2601468" cy="1463040"/>
+          </a:xfrm>
+          <a:prstGeom prst="roundRect">
+            <a:avLst>
+              <a:gd name="adj" fmla="val 5000"/>
+            </a:avLst>
+          </a:prstGeom>
+          <a:solidFill>
+            <a:srgbClr val="FFFFFF"/>
+          </a:solidFill>
+          <a:ln w="9525">
+            <a:solidFill>
+              <a:srgbClr val="D8E0EC"/>
+            </a:solidFill>
+            <a:prstDash val="solid"/>
+          </a:ln>
+        </p:spPr>
+      </p:sp>
+      <p:sp>
+        <p:nvSpPr>
+          <p:cNvPr id="28" name="Text 25"/>
+          <p:cNvSpPr/>
+          <p:nvPr/>
+        </p:nvSpPr>
+        <p:spPr>
+          <a:xfrm>
+            <a:off x="685800" y="4663440"/>
+            <a:ext cx="365760" cy="365760"/>
+          </a:xfrm>
+          <a:prstGeom prst="rect">
+            <a:avLst/>
+          </a:prstGeom>
+          <a:noFill/>
+          <a:ln/>
+        </p:spPr>
+        <p:txBody>
+          <a:bodyPr wrap="square" rtlCol="0" anchor="ctr"/>
+          <a:lstStyle/>
+          <a:p>
+            <a:pPr indent="0" marL="0">
+              <a:buNone/>
+            </a:pPr>
+            <a:r>
+              <a:rPr lang="en-US" sz="1400" b="1" dirty="0">
+                <a:solidFill>
+                  <a:srgbClr val="F7A23B"/>
+                </a:solidFill>
+                <a:latin typeface="Arial" pitchFamily="34" charset="0"/>
+                <a:ea typeface="Arial" pitchFamily="34" charset="-122"/>
+                <a:cs typeface="Arial" pitchFamily="34" charset="-120"/>
+              </a:rPr>
+              <a:t>A</a:t>
+            </a:r>
+            <a:endParaRPr lang="en-US" sz="1400" dirty="0"/>
+          </a:p>
+        </p:txBody>
+      </p:sp>
+      <p:sp>
+        <p:nvSpPr>
+          <p:cNvPr id="29" name="Text 26"/>
+          <p:cNvSpPr/>
+          <p:nvPr/>
+        </p:nvSpPr>
+        <p:spPr>
+          <a:xfrm>
+            <a:off x="685800" y="5029200"/>
+            <a:ext cx="2327148" cy="914400"/>
+          </a:xfrm>
+          <a:prstGeom prst="rect">
+            <a:avLst/>
+          </a:prstGeom>
+          <a:noFill/>
+          <a:ln/>
+        </p:spPr>
+        <p:txBody>
+          <a:bodyPr wrap="square" rtlCol="0" anchor="t"/>
+          <a:lstStyle/>
+          <a:p>
+            <a:pPr indent="0" marL="0">
+              <a:buNone/>
+            </a:pPr>
+            <a:r>
+              <a:rPr lang="en-US" sz="1500" dirty="0">
+                <a:solidFill>
+                  <a:srgbClr val="1F2937"/>
+                </a:solidFill>
+                <a:latin typeface="Arial" pitchFamily="34" charset="0"/>
+                <a:ea typeface="Arial" pitchFamily="34" charset="-122"/>
+                <a:cs typeface="Arial" pitchFamily="34" charset="-120"/>
+              </a:rPr>
+              <a:t>leads que não compraram sistema por falta de telhado ou capital</a:t>
+            </a:r>
+            <a:endParaRPr lang="en-US" sz="1500" dirty="0"/>
+          </a:p>
+        </p:txBody>
+      </p:sp>
+      <p:sp>
+        <p:nvSpPr>
+          <p:cNvPr id="30" name="Shape 27"/>
+          <p:cNvSpPr/>
+          <p:nvPr/>
+        </p:nvSpPr>
+        <p:spPr>
+          <a:xfrm>
+            <a:off x="3378708" y="4572000"/>
+            <a:ext cx="2601468" cy="1463040"/>
+          </a:xfrm>
+          <a:prstGeom prst="roundRect">
+            <a:avLst>
+              <a:gd name="adj" fmla="val 5000"/>
+            </a:avLst>
+          </a:prstGeom>
+          <a:solidFill>
+            <a:srgbClr val="FFFFFF"/>
+          </a:solidFill>
+          <a:ln w="9525">
+            <a:solidFill>
+              <a:srgbClr val="D8E0EC"/>
+            </a:solidFill>
+            <a:prstDash val="solid"/>
+          </a:ln>
+        </p:spPr>
+      </p:sp>
+      <p:sp>
+        <p:nvSpPr>
+          <p:cNvPr id="31" name="Text 28"/>
+          <p:cNvSpPr/>
+          <p:nvPr/>
+        </p:nvSpPr>
+        <p:spPr>
+          <a:xfrm>
+            <a:off x="3515868" y="4663440"/>
+            <a:ext cx="365760" cy="365760"/>
+          </a:xfrm>
+          <a:prstGeom prst="rect">
+            <a:avLst/>
+          </a:prstGeom>
+          <a:noFill/>
+          <a:ln/>
+        </p:spPr>
+        <p:txBody>
+          <a:bodyPr wrap="square" rtlCol="0" anchor="ctr"/>
+          <a:lstStyle/>
+          <a:p>
+            <a:pPr indent="0" marL="0">
+              <a:buNone/>
+            </a:pPr>
+            <a:r>
+              <a:rPr lang="en-US" sz="1400" b="1" dirty="0">
+                <a:solidFill>
+                  <a:srgbClr val="F7A23B"/>
+                </a:solidFill>
+                <a:latin typeface="Arial" pitchFamily="34" charset="0"/>
+                <a:ea typeface="Arial" pitchFamily="34" charset="-122"/>
+                <a:cs typeface="Arial" pitchFamily="34" charset="-120"/>
+              </a:rPr>
+              <a:t>B</a:t>
+            </a:r>
+            <a:endParaRPr lang="en-US" sz="1400" dirty="0"/>
+          </a:p>
+        </p:txBody>
+      </p:sp>
+      <p:sp>
+        <p:nvSpPr>
+          <p:cNvPr id="32" name="Text 29"/>
+          <p:cNvSpPr/>
+          <p:nvPr/>
+        </p:nvSpPr>
+        <p:spPr>
+          <a:xfrm>
+            <a:off x="3515868" y="5029200"/>
+            <a:ext cx="2327148" cy="914400"/>
+          </a:xfrm>
+          <a:prstGeom prst="rect">
+            <a:avLst/>
+          </a:prstGeom>
+          <a:noFill/>
+          <a:ln/>
+        </p:spPr>
+        <p:txBody>
+          <a:bodyPr wrap="square" rtlCol="0" anchor="t"/>
+          <a:lstStyle/>
+          <a:p>
+            <a:pPr indent="0" marL="0">
+              <a:buNone/>
+            </a:pPr>
+            <a:r>
+              <a:rPr lang="en-US" sz="1500" dirty="0">
+                <a:solidFill>
+                  <a:srgbClr val="1F2937"/>
+                </a:solidFill>
+                <a:latin typeface="Arial" pitchFamily="34" charset="0"/>
+                <a:ea typeface="Arial" pitchFamily="34" charset="-122"/>
+                <a:cs typeface="Arial" pitchFamily="34" charset="-120"/>
+              </a:rPr>
+              <a:t>apenas clientes que já têm sistema</a:t>
+            </a:r>
+            <a:endParaRPr lang="en-US" sz="1500" dirty="0"/>
+          </a:p>
+        </p:txBody>
+      </p:sp>
+      <p:sp>
+        <p:nvSpPr>
+          <p:cNvPr id="33" name="Shape 30"/>
+          <p:cNvSpPr/>
+          <p:nvPr/>
+        </p:nvSpPr>
+        <p:spPr>
+          <a:xfrm>
+            <a:off x="6208776" y="4572000"/>
+            <a:ext cx="2601468" cy="1463040"/>
+          </a:xfrm>
+          <a:prstGeom prst="roundRect">
+            <a:avLst>
+              <a:gd name="adj" fmla="val 5000"/>
+            </a:avLst>
+          </a:prstGeom>
+          <a:solidFill>
+            <a:srgbClr val="FFFFFF"/>
+          </a:solidFill>
+          <a:ln w="9525">
+            <a:solidFill>
+              <a:srgbClr val="D8E0EC"/>
+            </a:solidFill>
+            <a:prstDash val="solid"/>
+          </a:ln>
+        </p:spPr>
+      </p:sp>
+      <p:sp>
+        <p:nvSpPr>
+          <p:cNvPr id="34" name="Text 31"/>
+          <p:cNvSpPr/>
+          <p:nvPr/>
+        </p:nvSpPr>
+        <p:spPr>
+          <a:xfrm>
+            <a:off x="6345936" y="4663440"/>
+            <a:ext cx="365760" cy="365760"/>
+          </a:xfrm>
+          <a:prstGeom prst="rect">
+            <a:avLst/>
+          </a:prstGeom>
+          <a:noFill/>
+          <a:ln/>
+        </p:spPr>
+        <p:txBody>
+          <a:bodyPr wrap="square" rtlCol="0" anchor="ctr"/>
+          <a:lstStyle/>
+          <a:p>
+            <a:pPr indent="0" marL="0">
+              <a:buNone/>
+            </a:pPr>
+            <a:r>
+              <a:rPr lang="en-US" sz="1400" b="1" dirty="0">
+                <a:solidFill>
+                  <a:srgbClr val="F7A23B"/>
+                </a:solidFill>
+                <a:latin typeface="Arial" pitchFamily="34" charset="0"/>
+                <a:ea typeface="Arial" pitchFamily="34" charset="-122"/>
+                <a:cs typeface="Arial" pitchFamily="34" charset="-120"/>
+              </a:rPr>
+              <a:t>C</a:t>
+            </a:r>
+            <a:endParaRPr lang="en-US" sz="1400" dirty="0"/>
+          </a:p>
+        </p:txBody>
+      </p:sp>
+      <p:sp>
+        <p:nvSpPr>
+          <p:cNvPr id="35" name="Text 32"/>
+          <p:cNvSpPr/>
+          <p:nvPr/>
+        </p:nvSpPr>
+        <p:spPr>
+          <a:xfrm>
+            <a:off x="6345936" y="5029200"/>
+            <a:ext cx="2327148" cy="914400"/>
+          </a:xfrm>
+          <a:prstGeom prst="rect">
+            <a:avLst/>
+          </a:prstGeom>
+          <a:noFill/>
+          <a:ln/>
+        </p:spPr>
+        <p:txBody>
+          <a:bodyPr wrap="square" rtlCol="0" anchor="t"/>
+          <a:lstStyle/>
+          <a:p>
+            <a:pPr indent="0" marL="0">
+              <a:buNone/>
+            </a:pPr>
+            <a:r>
+              <a:rPr lang="en-US" sz="1500" dirty="0">
+                <a:solidFill>
+                  <a:srgbClr val="1F2937"/>
+                </a:solidFill>
+                <a:latin typeface="Arial" pitchFamily="34" charset="0"/>
+                <a:ea typeface="Arial" pitchFamily="34" charset="-122"/>
+                <a:cs typeface="Arial" pitchFamily="34" charset="-120"/>
+              </a:rPr>
+              <a:t>indústrias</a:t>
+            </a:r>
+            <a:endParaRPr lang="en-US" sz="1500" dirty="0"/>
+          </a:p>
+        </p:txBody>
+      </p:sp>
+      <p:sp>
+        <p:nvSpPr>
+          <p:cNvPr id="36" name="Shape 33"/>
+          <p:cNvSpPr/>
+          <p:nvPr/>
+        </p:nvSpPr>
+        <p:spPr>
+          <a:xfrm>
+            <a:off x="9038844" y="4572000"/>
+            <a:ext cx="2601468" cy="1463040"/>
+          </a:xfrm>
+          <a:prstGeom prst="roundRect">
+            <a:avLst>
+              <a:gd name="adj" fmla="val 5000"/>
+            </a:avLst>
+          </a:prstGeom>
+          <a:solidFill>
+            <a:srgbClr val="FFFFFF"/>
+          </a:solidFill>
+          <a:ln w="9525">
+            <a:solidFill>
+              <a:srgbClr val="D8E0EC"/>
+            </a:solidFill>
+            <a:prstDash val="solid"/>
+          </a:ln>
+        </p:spPr>
+      </p:sp>
+      <p:sp>
+        <p:nvSpPr>
+          <p:cNvPr id="37" name="Text 34"/>
+          <p:cNvSpPr/>
+          <p:nvPr/>
+        </p:nvSpPr>
+        <p:spPr>
+          <a:xfrm>
+            <a:off x="9176004" y="4663440"/>
+            <a:ext cx="365760" cy="365760"/>
+          </a:xfrm>
+          <a:prstGeom prst="rect">
+            <a:avLst/>
+          </a:prstGeom>
+          <a:noFill/>
+          <a:ln/>
+        </p:spPr>
+        <p:txBody>
+          <a:bodyPr wrap="square" rtlCol="0" anchor="ctr"/>
+          <a:lstStyle/>
+          <a:p>
+            <a:pPr indent="0" marL="0">
+              <a:buNone/>
+            </a:pPr>
+            <a:r>
+              <a:rPr lang="en-US" sz="1400" b="1" dirty="0">
+                <a:solidFill>
+                  <a:srgbClr val="F7A23B"/>
+                </a:solidFill>
+                <a:latin typeface="Arial" pitchFamily="34" charset="0"/>
+                <a:ea typeface="Arial" pitchFamily="34" charset="-122"/>
+                <a:cs typeface="Arial" pitchFamily="34" charset="-120"/>
+              </a:rPr>
+              <a:t>D</a:t>
+            </a:r>
+            <a:endParaRPr lang="en-US" sz="1400" dirty="0"/>
+          </a:p>
+        </p:txBody>
+      </p:sp>
+      <p:sp>
+        <p:nvSpPr>
+          <p:cNvPr id="38" name="Text 35"/>
+          <p:cNvSpPr/>
+          <p:nvPr/>
+        </p:nvSpPr>
+        <p:spPr>
+          <a:xfrm>
+            <a:off x="9176004" y="5029200"/>
+            <a:ext cx="2327148" cy="914400"/>
+          </a:xfrm>
+          <a:prstGeom prst="rect">
+            <a:avLst/>
+          </a:prstGeom>
+          <a:noFill/>
+          <a:ln/>
+        </p:spPr>
+        <p:txBody>
+          <a:bodyPr wrap="square" rtlCol="0" anchor="t"/>
+          <a:lstStyle/>
+          <a:p>
+            <a:pPr indent="0" marL="0">
+              <a:buNone/>
+            </a:pPr>
+            <a:r>
+              <a:rPr lang="en-US" sz="1500" dirty="0">
+                <a:solidFill>
+                  <a:srgbClr val="1F2937"/>
+                </a:solidFill>
+                <a:latin typeface="Arial" pitchFamily="34" charset="0"/>
+                <a:ea typeface="Arial" pitchFamily="34" charset="-122"/>
+                <a:cs typeface="Arial" pitchFamily="34" charset="-120"/>
+              </a:rPr>
+              <a:t>concorrentes</a:t>
+            </a:r>
+            <a:endParaRPr lang="en-US" sz="1500" dirty="0"/>
           </a:p>
         </p:txBody>
       </p:sp>
@@ -19307,6 +21648,4311 @@
             <a:fld id="{F7021451-1387-4CA6-816F-3879F97B5CBC}" type="slidenum">
               <a:rPr b="1" lang="en-US"/>
               <a:t>33</a:t>
+            </a:fld>
+            <a:endParaRPr lang="en-US"/>
+          </a:p>
+        </p:txBody>
+      </p:sp>
+    </p:spTree>
+  </p:cSld>
+  <p:clrMapOvr>
+    <a:masterClrMapping/>
+  </p:clrMapOvr>
+</p:sld>
+</file>
+
+<file path=ppt/slides/slide34.xml><?xml version="1.0" encoding="utf-8"?>
+<p:sld xmlns:a="http://schemas.openxmlformats.org/drawingml/2006/main" xmlns:r="http://schemas.openxmlformats.org/officeDocument/2006/relationships" xmlns:p="http://schemas.openxmlformats.org/presentationml/2006/main">
+  <p:cSld name="Slide 34">
+    <p:bg>
+      <p:bgPr>
+        <a:solidFill>
+          <a:srgbClr val="F6F8FB"/>
+        </a:solidFill>
+      </p:bgPr>
+    </p:bg>
+    <p:spTree>
+      <p:nvGrpSpPr>
+        <p:cNvPr id="1" name=""/>
+        <p:cNvGrpSpPr/>
+        <p:nvPr/>
+      </p:nvGrpSpPr>
+      <p:grpSpPr>
+        <a:xfrm>
+          <a:off x="0" y="0"/>
+          <a:ext cx="0" cy="0"/>
+          <a:chOff x="0" y="0"/>
+          <a:chExt cx="0" cy="0"/>
+        </a:xfrm>
+      </p:grpSpPr>
+      <p:sp>
+        <p:nvSpPr>
+          <p:cNvPr id="2" name="Shape 0"/>
+          <p:cNvSpPr/>
+          <p:nvPr/>
+        </p:nvSpPr>
+        <p:spPr>
+          <a:xfrm>
+            <a:off x="0" y="6510528"/>
+            <a:ext cx="12191695" cy="347472"/>
+          </a:xfrm>
+          <a:prstGeom prst="rect">
+            <a:avLst/>
+          </a:prstGeom>
+          <a:solidFill>
+            <a:srgbClr val="FFFFFF"/>
+          </a:solidFill>
+          <a:ln w="6350">
+            <a:solidFill>
+              <a:srgbClr val="D8E0EC"/>
+            </a:solidFill>
+            <a:prstDash val="solid"/>
+          </a:ln>
+        </p:spPr>
+      </p:sp>
+      <p:pic>
+        <p:nvPicPr>
+          <p:cNvPr id="3" name="Image 0" descr="/www/wwwroot/rexar/gdsolar/docs/curso/slides/assets/logo-gdsolar.png">    </p:cNvPr>
+          <p:cNvPicPr>
+            <a:picLocks noChangeAspect="1"/>
+          </p:cNvPicPr>
+          <p:nvPr/>
+        </p:nvPicPr>
+        <p:blipFill>
+          <a:blip r:embed="rId1"/>
+          <a:stretch>
+            <a:fillRect/>
+          </a:stretch>
+        </p:blipFill>
+        <p:spPr>
+          <a:xfrm>
+            <a:off x="548640" y="6547104"/>
+            <a:ext cx="274320" cy="274320"/>
+          </a:xfrm>
+          <a:prstGeom prst="rect">
+            <a:avLst/>
+          </a:prstGeom>
+        </p:spPr>
+      </p:pic>
+      <p:sp>
+        <p:nvSpPr>
+          <p:cNvPr id="4" name="Text 1"/>
+          <p:cNvSpPr/>
+          <p:nvPr/>
+        </p:nvSpPr>
+        <p:spPr>
+          <a:xfrm>
+            <a:off x="886968" y="6528816"/>
+            <a:ext cx="6400800" cy="310896"/>
+          </a:xfrm>
+          <a:prstGeom prst="rect">
+            <a:avLst/>
+          </a:prstGeom>
+          <a:noFill/>
+          <a:ln/>
+        </p:spPr>
+        <p:txBody>
+          <a:bodyPr wrap="square" rtlCol="0" anchor="ctr"/>
+          <a:lstStyle/>
+          <a:p>
+            <a:pPr indent="0" marL="0">
+              <a:buNone/>
+            </a:pPr>
+            <a:r>
+              <a:rPr lang="en-US" sz="900" b="1" dirty="0">
+                <a:solidFill>
+                  <a:srgbClr val="64748B"/>
+                </a:solidFill>
+                <a:latin typeface="Arial" pitchFamily="34" charset="0"/>
+                <a:ea typeface="Arial" pitchFamily="34" charset="-122"/>
+                <a:cs typeface="Arial" pitchFamily="34" charset="-120"/>
+              </a:rPr>
+              <a:t>GD Solar  ·  Formação em Energia por Assinatura</a:t>
+            </a:r>
+            <a:endParaRPr lang="en-US" sz="900" dirty="0"/>
+          </a:p>
+        </p:txBody>
+      </p:sp>
+      <p:sp>
+        <p:nvSpPr>
+          <p:cNvPr id="5" name="Text 2"/>
+          <p:cNvSpPr/>
+          <p:nvPr/>
+        </p:nvSpPr>
+        <p:spPr>
+          <a:xfrm>
+            <a:off x="7132320" y="6528816"/>
+            <a:ext cx="4023360" cy="310896"/>
+          </a:xfrm>
+          <a:prstGeom prst="rect">
+            <a:avLst/>
+          </a:prstGeom>
+          <a:noFill/>
+          <a:ln/>
+        </p:spPr>
+        <p:txBody>
+          <a:bodyPr wrap="square" rtlCol="0" anchor="ctr"/>
+          <a:lstStyle/>
+          <a:p>
+            <a:pPr algn="r" indent="0" marL="0">
+              <a:buNone/>
+            </a:pPr>
+            <a:r>
+              <a:rPr lang="en-US" sz="900" dirty="0">
+                <a:solidFill>
+                  <a:srgbClr val="64748B"/>
+                </a:solidFill>
+                <a:latin typeface="Arial" pitchFamily="34" charset="0"/>
+                <a:ea typeface="Arial" pitchFamily="34" charset="-122"/>
+                <a:cs typeface="Arial" pitchFamily="34" charset="-120"/>
+              </a:rPr>
+              <a:t>M5 · Teste rápido</a:t>
+            </a:r>
+            <a:endParaRPr lang="en-US" sz="900" dirty="0"/>
+          </a:p>
+        </p:txBody>
+      </p:sp>
+      <p:sp>
+        <p:nvSpPr>
+          <p:cNvPr id="6" name="Shape 3"/>
+          <p:cNvSpPr/>
+          <p:nvPr/>
+        </p:nvSpPr>
+        <p:spPr>
+          <a:xfrm>
+            <a:off x="548640" y="384048"/>
+            <a:ext cx="82296" cy="658368"/>
+          </a:xfrm>
+          <a:prstGeom prst="rect">
+            <a:avLst/>
+          </a:prstGeom>
+          <a:solidFill>
+            <a:srgbClr val="F7A23B"/>
+          </a:solidFill>
+          <a:ln/>
+        </p:spPr>
+      </p:sp>
+      <p:sp>
+        <p:nvSpPr>
+          <p:cNvPr id="7" name="Text 4"/>
+          <p:cNvSpPr/>
+          <p:nvPr/>
+        </p:nvSpPr>
+        <p:spPr>
+          <a:xfrm>
+            <a:off x="777240" y="292608"/>
+            <a:ext cx="10972800" cy="274320"/>
+          </a:xfrm>
+          <a:prstGeom prst="rect">
+            <a:avLst/>
+          </a:prstGeom>
+          <a:noFill/>
+          <a:ln/>
+        </p:spPr>
+        <p:txBody>
+          <a:bodyPr wrap="square" rtlCol="0" anchor="ctr"/>
+          <a:lstStyle/>
+          <a:p>
+            <a:pPr indent="0" marL="0">
+              <a:buNone/>
+            </a:pPr>
+            <a:r>
+              <a:rPr lang="en-US" sz="1000" b="1" spc="100" kern="0" dirty="0">
+                <a:solidFill>
+                  <a:srgbClr val="F7A23B"/>
+                </a:solidFill>
+                <a:latin typeface="Arial" pitchFamily="34" charset="0"/>
+                <a:ea typeface="Arial" pitchFamily="34" charset="-122"/>
+                <a:cs typeface="Arial" pitchFamily="34" charset="-120"/>
+              </a:rPr>
+              <a:t>QUESTÕES 3–4 DE 6</a:t>
+            </a:r>
+            <a:endParaRPr lang="en-US" sz="1000" dirty="0"/>
+          </a:p>
+        </p:txBody>
+      </p:sp>
+      <p:sp>
+        <p:nvSpPr>
+          <p:cNvPr id="8" name="Text 5"/>
+          <p:cNvSpPr/>
+          <p:nvPr/>
+        </p:nvSpPr>
+        <p:spPr>
+          <a:xfrm>
+            <a:off x="777240" y="530352"/>
+            <a:ext cx="10881360" cy="566928"/>
+          </a:xfrm>
+          <a:prstGeom prst="rect">
+            <a:avLst/>
+          </a:prstGeom>
+          <a:noFill/>
+          <a:ln/>
+        </p:spPr>
+        <p:txBody>
+          <a:bodyPr wrap="square" rtlCol="0" anchor="ctr">
+            <a:normAutofit/>
+          </a:bodyPr>
+          <a:lstStyle/>
+          <a:p>
+            <a:pPr indent="0" marL="0">
+              <a:buNone/>
+            </a:pPr>
+            <a:r>
+              <a:rPr lang="en-US" sz="2600" b="1" dirty="0">
+                <a:solidFill>
+                  <a:srgbClr val="1B3A6B"/>
+                </a:solidFill>
+                <a:latin typeface="Arial" pitchFamily="34" charset="0"/>
+                <a:ea typeface="Arial" pitchFamily="34" charset="-122"/>
+                <a:cs typeface="Arial" pitchFamily="34" charset="-120"/>
+              </a:rPr>
+              <a:t>Teste rápido</a:t>
+            </a:r>
+            <a:endParaRPr lang="en-US" sz="2600" dirty="0"/>
+          </a:p>
+        </p:txBody>
+      </p:sp>
+      <p:sp>
+        <p:nvSpPr>
+          <p:cNvPr id="9" name="Shape 6"/>
+          <p:cNvSpPr/>
+          <p:nvPr/>
+        </p:nvSpPr>
+        <p:spPr>
+          <a:xfrm>
+            <a:off x="548640" y="1325880"/>
+            <a:ext cx="502920" cy="502920"/>
+          </a:xfrm>
+          <a:prstGeom prst="ellipse">
+            <a:avLst/>
+          </a:prstGeom>
+          <a:solidFill>
+            <a:srgbClr val="1B3A6B"/>
+          </a:solidFill>
+          <a:ln/>
+        </p:spPr>
+      </p:sp>
+      <p:sp>
+        <p:nvSpPr>
+          <p:cNvPr id="10" name="Text 7"/>
+          <p:cNvSpPr/>
+          <p:nvPr/>
+        </p:nvSpPr>
+        <p:spPr>
+          <a:xfrm>
+            <a:off x="548640" y="1325880"/>
+            <a:ext cx="502920" cy="502920"/>
+          </a:xfrm>
+          <a:prstGeom prst="rect">
+            <a:avLst/>
+          </a:prstGeom>
+          <a:noFill/>
+          <a:ln/>
+        </p:spPr>
+        <p:txBody>
+          <a:bodyPr wrap="square" rtlCol="0" anchor="ctr"/>
+          <a:lstStyle/>
+          <a:p>
+            <a:pPr algn="ctr" indent="0" marL="0">
+              <a:buNone/>
+            </a:pPr>
+            <a:r>
+              <a:rPr lang="en-US" sz="1600" b="1" dirty="0">
+                <a:solidFill>
+                  <a:srgbClr val="FFFFFF"/>
+                </a:solidFill>
+                <a:latin typeface="Arial" pitchFamily="34" charset="0"/>
+                <a:ea typeface="Arial" pitchFamily="34" charset="-122"/>
+                <a:cs typeface="Arial" pitchFamily="34" charset="-120"/>
+              </a:rPr>
+              <a:t>3</a:t>
+            </a:r>
+            <a:endParaRPr lang="en-US" sz="1600" dirty="0"/>
+          </a:p>
+        </p:txBody>
+      </p:sp>
+      <p:sp>
+        <p:nvSpPr>
+          <p:cNvPr id="11" name="Text 8"/>
+          <p:cNvSpPr/>
+          <p:nvPr/>
+        </p:nvSpPr>
+        <p:spPr>
+          <a:xfrm>
+            <a:off x="1234440" y="1280160"/>
+            <a:ext cx="10424160" cy="640080"/>
+          </a:xfrm>
+          <a:prstGeom prst="rect">
+            <a:avLst/>
+          </a:prstGeom>
+          <a:noFill/>
+          <a:ln/>
+        </p:spPr>
+        <p:txBody>
+          <a:bodyPr wrap="square" rtlCol="0" anchor="ctr"/>
+          <a:lstStyle/>
+          <a:p>
+            <a:pPr indent="0" marL="0">
+              <a:buNone/>
+            </a:pPr>
+            <a:r>
+              <a:rPr lang="en-US" sz="1800" b="1" dirty="0">
+                <a:solidFill>
+                  <a:srgbClr val="1B3A6B"/>
+                </a:solidFill>
+                <a:latin typeface="Arial" pitchFamily="34" charset="0"/>
+                <a:ea typeface="Arial" pitchFamily="34" charset="-122"/>
+                <a:cs typeface="Arial" pitchFamily="34" charset="-120"/>
+              </a:rPr>
+              <a:t>A economia apresentada na proposta deve considerar:</a:t>
+            </a:r>
+            <a:endParaRPr lang="en-US" sz="1800" dirty="0"/>
+          </a:p>
+        </p:txBody>
+      </p:sp>
+      <p:sp>
+        <p:nvSpPr>
+          <p:cNvPr id="12" name="Shape 9"/>
+          <p:cNvSpPr/>
+          <p:nvPr/>
+        </p:nvSpPr>
+        <p:spPr>
+          <a:xfrm>
+            <a:off x="548640" y="2057400"/>
+            <a:ext cx="2601468" cy="1463040"/>
+          </a:xfrm>
+          <a:prstGeom prst="roundRect">
+            <a:avLst>
+              <a:gd name="adj" fmla="val 5000"/>
+            </a:avLst>
+          </a:prstGeom>
+          <a:solidFill>
+            <a:srgbClr val="FFFFFF"/>
+          </a:solidFill>
+          <a:ln w="9525">
+            <a:solidFill>
+              <a:srgbClr val="D8E0EC"/>
+            </a:solidFill>
+            <a:prstDash val="solid"/>
+          </a:ln>
+        </p:spPr>
+      </p:sp>
+      <p:sp>
+        <p:nvSpPr>
+          <p:cNvPr id="13" name="Text 10"/>
+          <p:cNvSpPr/>
+          <p:nvPr/>
+        </p:nvSpPr>
+        <p:spPr>
+          <a:xfrm>
+            <a:off x="685800" y="2148840"/>
+            <a:ext cx="365760" cy="365760"/>
+          </a:xfrm>
+          <a:prstGeom prst="rect">
+            <a:avLst/>
+          </a:prstGeom>
+          <a:noFill/>
+          <a:ln/>
+        </p:spPr>
+        <p:txBody>
+          <a:bodyPr wrap="square" rtlCol="0" anchor="ctr"/>
+          <a:lstStyle/>
+          <a:p>
+            <a:pPr indent="0" marL="0">
+              <a:buNone/>
+            </a:pPr>
+            <a:r>
+              <a:rPr lang="en-US" sz="1400" b="1" dirty="0">
+                <a:solidFill>
+                  <a:srgbClr val="F7A23B"/>
+                </a:solidFill>
+                <a:latin typeface="Arial" pitchFamily="34" charset="0"/>
+                <a:ea typeface="Arial" pitchFamily="34" charset="-122"/>
+                <a:cs typeface="Arial" pitchFamily="34" charset="-120"/>
+              </a:rPr>
+              <a:t>A</a:t>
+            </a:r>
+            <a:endParaRPr lang="en-US" sz="1400" dirty="0"/>
+          </a:p>
+        </p:txBody>
+      </p:sp>
+      <p:sp>
+        <p:nvSpPr>
+          <p:cNvPr id="14" name="Text 11"/>
+          <p:cNvSpPr/>
+          <p:nvPr/>
+        </p:nvSpPr>
+        <p:spPr>
+          <a:xfrm>
+            <a:off x="685800" y="2514600"/>
+            <a:ext cx="2327148" cy="914400"/>
+          </a:xfrm>
+          <a:prstGeom prst="rect">
+            <a:avLst/>
+          </a:prstGeom>
+          <a:noFill/>
+          <a:ln/>
+        </p:spPr>
+        <p:txBody>
+          <a:bodyPr wrap="square" rtlCol="0" anchor="t"/>
+          <a:lstStyle/>
+          <a:p>
+            <a:pPr indent="0" marL="0">
+              <a:buNone/>
+            </a:pPr>
+            <a:r>
+              <a:rPr lang="en-US" sz="1500" dirty="0">
+                <a:solidFill>
+                  <a:srgbClr val="1F2937"/>
+                </a:solidFill>
+                <a:latin typeface="Arial" pitchFamily="34" charset="0"/>
+                <a:ea typeface="Arial" pitchFamily="34" charset="-122"/>
+                <a:cs typeface="Arial" pitchFamily="34" charset="-120"/>
+              </a:rPr>
+              <a:t>a conta total, incluindo o que continua sendo pago à distribuidora</a:t>
+            </a:r>
+            <a:endParaRPr lang="en-US" sz="1500" dirty="0"/>
+          </a:p>
+        </p:txBody>
+      </p:sp>
+      <p:sp>
+        <p:nvSpPr>
+          <p:cNvPr id="15" name="Shape 12"/>
+          <p:cNvSpPr/>
+          <p:nvPr/>
+        </p:nvSpPr>
+        <p:spPr>
+          <a:xfrm>
+            <a:off x="3378708" y="2057400"/>
+            <a:ext cx="2601468" cy="1463040"/>
+          </a:xfrm>
+          <a:prstGeom prst="roundRect">
+            <a:avLst>
+              <a:gd name="adj" fmla="val 5000"/>
+            </a:avLst>
+          </a:prstGeom>
+          <a:solidFill>
+            <a:srgbClr val="FFFFFF"/>
+          </a:solidFill>
+          <a:ln w="9525">
+            <a:solidFill>
+              <a:srgbClr val="D8E0EC"/>
+            </a:solidFill>
+            <a:prstDash val="solid"/>
+          </a:ln>
+        </p:spPr>
+      </p:sp>
+      <p:sp>
+        <p:nvSpPr>
+          <p:cNvPr id="16" name="Text 13"/>
+          <p:cNvSpPr/>
+          <p:nvPr/>
+        </p:nvSpPr>
+        <p:spPr>
+          <a:xfrm>
+            <a:off x="3515868" y="2148840"/>
+            <a:ext cx="365760" cy="365760"/>
+          </a:xfrm>
+          <a:prstGeom prst="rect">
+            <a:avLst/>
+          </a:prstGeom>
+          <a:noFill/>
+          <a:ln/>
+        </p:spPr>
+        <p:txBody>
+          <a:bodyPr wrap="square" rtlCol="0" anchor="ctr"/>
+          <a:lstStyle/>
+          <a:p>
+            <a:pPr indent="0" marL="0">
+              <a:buNone/>
+            </a:pPr>
+            <a:r>
+              <a:rPr lang="en-US" sz="1400" b="1" dirty="0">
+                <a:solidFill>
+                  <a:srgbClr val="F7A23B"/>
+                </a:solidFill>
+                <a:latin typeface="Arial" pitchFamily="34" charset="0"/>
+                <a:ea typeface="Arial" pitchFamily="34" charset="-122"/>
+                <a:cs typeface="Arial" pitchFamily="34" charset="-120"/>
+              </a:rPr>
+              <a:t>B</a:t>
+            </a:r>
+            <a:endParaRPr lang="en-US" sz="1400" dirty="0"/>
+          </a:p>
+        </p:txBody>
+      </p:sp>
+      <p:sp>
+        <p:nvSpPr>
+          <p:cNvPr id="17" name="Text 14"/>
+          <p:cNvSpPr/>
+          <p:nvPr/>
+        </p:nvSpPr>
+        <p:spPr>
+          <a:xfrm>
+            <a:off x="3515868" y="2514600"/>
+            <a:ext cx="2327148" cy="914400"/>
+          </a:xfrm>
+          <a:prstGeom prst="rect">
+            <a:avLst/>
+          </a:prstGeom>
+          <a:noFill/>
+          <a:ln/>
+        </p:spPr>
+        <p:txBody>
+          <a:bodyPr wrap="square" rtlCol="0" anchor="t"/>
+          <a:lstStyle/>
+          <a:p>
+            <a:pPr indent="0" marL="0">
+              <a:buNone/>
+            </a:pPr>
+            <a:r>
+              <a:rPr lang="en-US" sz="1500" dirty="0">
+                <a:solidFill>
+                  <a:srgbClr val="1F2937"/>
+                </a:solidFill>
+                <a:latin typeface="Arial" pitchFamily="34" charset="0"/>
+                <a:ea typeface="Arial" pitchFamily="34" charset="-122"/>
+                <a:cs typeface="Arial" pitchFamily="34" charset="-120"/>
+              </a:rPr>
+              <a:t>só o desconto sobre o crédito</a:t>
+            </a:r>
+            <a:endParaRPr lang="en-US" sz="1500" dirty="0"/>
+          </a:p>
+        </p:txBody>
+      </p:sp>
+      <p:sp>
+        <p:nvSpPr>
+          <p:cNvPr id="18" name="Shape 15"/>
+          <p:cNvSpPr/>
+          <p:nvPr/>
+        </p:nvSpPr>
+        <p:spPr>
+          <a:xfrm>
+            <a:off x="6208776" y="2057400"/>
+            <a:ext cx="2601468" cy="1463040"/>
+          </a:xfrm>
+          <a:prstGeom prst="roundRect">
+            <a:avLst>
+              <a:gd name="adj" fmla="val 5000"/>
+            </a:avLst>
+          </a:prstGeom>
+          <a:solidFill>
+            <a:srgbClr val="FFFFFF"/>
+          </a:solidFill>
+          <a:ln w="9525">
+            <a:solidFill>
+              <a:srgbClr val="D8E0EC"/>
+            </a:solidFill>
+            <a:prstDash val="solid"/>
+          </a:ln>
+        </p:spPr>
+      </p:sp>
+      <p:sp>
+        <p:nvSpPr>
+          <p:cNvPr id="19" name="Text 16"/>
+          <p:cNvSpPr/>
+          <p:nvPr/>
+        </p:nvSpPr>
+        <p:spPr>
+          <a:xfrm>
+            <a:off x="6345936" y="2148840"/>
+            <a:ext cx="365760" cy="365760"/>
+          </a:xfrm>
+          <a:prstGeom prst="rect">
+            <a:avLst/>
+          </a:prstGeom>
+          <a:noFill/>
+          <a:ln/>
+        </p:spPr>
+        <p:txBody>
+          <a:bodyPr wrap="square" rtlCol="0" anchor="ctr"/>
+          <a:lstStyle/>
+          <a:p>
+            <a:pPr indent="0" marL="0">
+              <a:buNone/>
+            </a:pPr>
+            <a:r>
+              <a:rPr lang="en-US" sz="1400" b="1" dirty="0">
+                <a:solidFill>
+                  <a:srgbClr val="F7A23B"/>
+                </a:solidFill>
+                <a:latin typeface="Arial" pitchFamily="34" charset="0"/>
+                <a:ea typeface="Arial" pitchFamily="34" charset="-122"/>
+                <a:cs typeface="Arial" pitchFamily="34" charset="-120"/>
+              </a:rPr>
+              <a:t>C</a:t>
+            </a:r>
+            <a:endParaRPr lang="en-US" sz="1400" dirty="0"/>
+          </a:p>
+        </p:txBody>
+      </p:sp>
+      <p:sp>
+        <p:nvSpPr>
+          <p:cNvPr id="20" name="Text 17"/>
+          <p:cNvSpPr/>
+          <p:nvPr/>
+        </p:nvSpPr>
+        <p:spPr>
+          <a:xfrm>
+            <a:off x="6345936" y="2514600"/>
+            <a:ext cx="2327148" cy="914400"/>
+          </a:xfrm>
+          <a:prstGeom prst="rect">
+            <a:avLst/>
+          </a:prstGeom>
+          <a:noFill/>
+          <a:ln/>
+        </p:spPr>
+        <p:txBody>
+          <a:bodyPr wrap="square" rtlCol="0" anchor="t"/>
+          <a:lstStyle/>
+          <a:p>
+            <a:pPr indent="0" marL="0">
+              <a:buNone/>
+            </a:pPr>
+            <a:r>
+              <a:rPr lang="en-US" sz="1500" dirty="0">
+                <a:solidFill>
+                  <a:srgbClr val="1F2937"/>
+                </a:solidFill>
+                <a:latin typeface="Arial" pitchFamily="34" charset="0"/>
+                <a:ea typeface="Arial" pitchFamily="34" charset="-122"/>
+                <a:cs typeface="Arial" pitchFamily="34" charset="-120"/>
+              </a:rPr>
+              <a:t>a tarifa cheia</a:t>
+            </a:r>
+            <a:endParaRPr lang="en-US" sz="1500" dirty="0"/>
+          </a:p>
+        </p:txBody>
+      </p:sp>
+      <p:sp>
+        <p:nvSpPr>
+          <p:cNvPr id="21" name="Shape 18"/>
+          <p:cNvSpPr/>
+          <p:nvPr/>
+        </p:nvSpPr>
+        <p:spPr>
+          <a:xfrm>
+            <a:off x="9038844" y="2057400"/>
+            <a:ext cx="2601468" cy="1463040"/>
+          </a:xfrm>
+          <a:prstGeom prst="roundRect">
+            <a:avLst>
+              <a:gd name="adj" fmla="val 5000"/>
+            </a:avLst>
+          </a:prstGeom>
+          <a:solidFill>
+            <a:srgbClr val="FFFFFF"/>
+          </a:solidFill>
+          <a:ln w="9525">
+            <a:solidFill>
+              <a:srgbClr val="D8E0EC"/>
+            </a:solidFill>
+            <a:prstDash val="solid"/>
+          </a:ln>
+        </p:spPr>
+      </p:sp>
+      <p:sp>
+        <p:nvSpPr>
+          <p:cNvPr id="22" name="Text 19"/>
+          <p:cNvSpPr/>
+          <p:nvPr/>
+        </p:nvSpPr>
+        <p:spPr>
+          <a:xfrm>
+            <a:off x="9176004" y="2148840"/>
+            <a:ext cx="365760" cy="365760"/>
+          </a:xfrm>
+          <a:prstGeom prst="rect">
+            <a:avLst/>
+          </a:prstGeom>
+          <a:noFill/>
+          <a:ln/>
+        </p:spPr>
+        <p:txBody>
+          <a:bodyPr wrap="square" rtlCol="0" anchor="ctr"/>
+          <a:lstStyle/>
+          <a:p>
+            <a:pPr indent="0" marL="0">
+              <a:buNone/>
+            </a:pPr>
+            <a:r>
+              <a:rPr lang="en-US" sz="1400" b="1" dirty="0">
+                <a:solidFill>
+                  <a:srgbClr val="F7A23B"/>
+                </a:solidFill>
+                <a:latin typeface="Arial" pitchFamily="34" charset="0"/>
+                <a:ea typeface="Arial" pitchFamily="34" charset="-122"/>
+                <a:cs typeface="Arial" pitchFamily="34" charset="-120"/>
+              </a:rPr>
+              <a:t>D</a:t>
+            </a:r>
+            <a:endParaRPr lang="en-US" sz="1400" dirty="0"/>
+          </a:p>
+        </p:txBody>
+      </p:sp>
+      <p:sp>
+        <p:nvSpPr>
+          <p:cNvPr id="23" name="Text 20"/>
+          <p:cNvSpPr/>
+          <p:nvPr/>
+        </p:nvSpPr>
+        <p:spPr>
+          <a:xfrm>
+            <a:off x="9176004" y="2514600"/>
+            <a:ext cx="2327148" cy="914400"/>
+          </a:xfrm>
+          <a:prstGeom prst="rect">
+            <a:avLst/>
+          </a:prstGeom>
+          <a:noFill/>
+          <a:ln/>
+        </p:spPr>
+        <p:txBody>
+          <a:bodyPr wrap="square" rtlCol="0" anchor="t"/>
+          <a:lstStyle/>
+          <a:p>
+            <a:pPr indent="0" marL="0">
+              <a:buNone/>
+            </a:pPr>
+            <a:r>
+              <a:rPr lang="en-US" sz="1500" dirty="0">
+                <a:solidFill>
+                  <a:srgbClr val="1F2937"/>
+                </a:solidFill>
+                <a:latin typeface="Arial" pitchFamily="34" charset="0"/>
+                <a:ea typeface="Arial" pitchFamily="34" charset="-122"/>
+                <a:cs typeface="Arial" pitchFamily="34" charset="-120"/>
+              </a:rPr>
+              <a:t>a bandeira vermelha</a:t>
+            </a:r>
+            <a:endParaRPr lang="en-US" sz="1500" dirty="0"/>
+          </a:p>
+        </p:txBody>
+      </p:sp>
+      <p:sp>
+        <p:nvSpPr>
+          <p:cNvPr id="24" name="Shape 21"/>
+          <p:cNvSpPr/>
+          <p:nvPr/>
+        </p:nvSpPr>
+        <p:spPr>
+          <a:xfrm>
+            <a:off x="548640" y="3840480"/>
+            <a:ext cx="502920" cy="502920"/>
+          </a:xfrm>
+          <a:prstGeom prst="ellipse">
+            <a:avLst/>
+          </a:prstGeom>
+          <a:solidFill>
+            <a:srgbClr val="1B3A6B"/>
+          </a:solidFill>
+          <a:ln/>
+        </p:spPr>
+      </p:sp>
+      <p:sp>
+        <p:nvSpPr>
+          <p:cNvPr id="25" name="Text 22"/>
+          <p:cNvSpPr/>
+          <p:nvPr/>
+        </p:nvSpPr>
+        <p:spPr>
+          <a:xfrm>
+            <a:off x="548640" y="3840480"/>
+            <a:ext cx="502920" cy="502920"/>
+          </a:xfrm>
+          <a:prstGeom prst="rect">
+            <a:avLst/>
+          </a:prstGeom>
+          <a:noFill/>
+          <a:ln/>
+        </p:spPr>
+        <p:txBody>
+          <a:bodyPr wrap="square" rtlCol="0" anchor="ctr"/>
+          <a:lstStyle/>
+          <a:p>
+            <a:pPr algn="ctr" indent="0" marL="0">
+              <a:buNone/>
+            </a:pPr>
+            <a:r>
+              <a:rPr lang="en-US" sz="1600" b="1" dirty="0">
+                <a:solidFill>
+                  <a:srgbClr val="FFFFFF"/>
+                </a:solidFill>
+                <a:latin typeface="Arial" pitchFamily="34" charset="0"/>
+                <a:ea typeface="Arial" pitchFamily="34" charset="-122"/>
+                <a:cs typeface="Arial" pitchFamily="34" charset="-120"/>
+              </a:rPr>
+              <a:t>4</a:t>
+            </a:r>
+            <a:endParaRPr lang="en-US" sz="1600" dirty="0"/>
+          </a:p>
+        </p:txBody>
+      </p:sp>
+      <p:sp>
+        <p:nvSpPr>
+          <p:cNvPr id="26" name="Text 23"/>
+          <p:cNvSpPr/>
+          <p:nvPr/>
+        </p:nvSpPr>
+        <p:spPr>
+          <a:xfrm>
+            <a:off x="1234440" y="3794760"/>
+            <a:ext cx="10424160" cy="640080"/>
+          </a:xfrm>
+          <a:prstGeom prst="rect">
+            <a:avLst/>
+          </a:prstGeom>
+          <a:noFill/>
+          <a:ln/>
+        </p:spPr>
+        <p:txBody>
+          <a:bodyPr wrap="square" rtlCol="0" anchor="ctr"/>
+          <a:lstStyle/>
+          <a:p>
+            <a:pPr indent="0" marL="0">
+              <a:buNone/>
+            </a:pPr>
+            <a:r>
+              <a:rPr lang="en-US" sz="1800" b="1" dirty="0">
+                <a:solidFill>
+                  <a:srgbClr val="1B3A6B"/>
+                </a:solidFill>
+                <a:latin typeface="Arial" pitchFamily="34" charset="0"/>
+                <a:ea typeface="Arial" pitchFamily="34" charset="-122"/>
+                <a:cs typeface="Arial" pitchFamily="34" charset="-120"/>
+              </a:rPr>
+              <a:t>"Preciso trocar o medidor ou fazer obra?" A resposta correta é:</a:t>
+            </a:r>
+            <a:endParaRPr lang="en-US" sz="1800" dirty="0"/>
+          </a:p>
+        </p:txBody>
+      </p:sp>
+      <p:sp>
+        <p:nvSpPr>
+          <p:cNvPr id="27" name="Shape 24"/>
+          <p:cNvSpPr/>
+          <p:nvPr/>
+        </p:nvSpPr>
+        <p:spPr>
+          <a:xfrm>
+            <a:off x="548640" y="4572000"/>
+            <a:ext cx="2601468" cy="1463040"/>
+          </a:xfrm>
+          <a:prstGeom prst="roundRect">
+            <a:avLst>
+              <a:gd name="adj" fmla="val 5000"/>
+            </a:avLst>
+          </a:prstGeom>
+          <a:solidFill>
+            <a:srgbClr val="FFFFFF"/>
+          </a:solidFill>
+          <a:ln w="9525">
+            <a:solidFill>
+              <a:srgbClr val="D8E0EC"/>
+            </a:solidFill>
+            <a:prstDash val="solid"/>
+          </a:ln>
+        </p:spPr>
+      </p:sp>
+      <p:sp>
+        <p:nvSpPr>
+          <p:cNvPr id="28" name="Text 25"/>
+          <p:cNvSpPr/>
+          <p:nvPr/>
+        </p:nvSpPr>
+        <p:spPr>
+          <a:xfrm>
+            <a:off x="685800" y="4663440"/>
+            <a:ext cx="365760" cy="365760"/>
+          </a:xfrm>
+          <a:prstGeom prst="rect">
+            <a:avLst/>
+          </a:prstGeom>
+          <a:noFill/>
+          <a:ln/>
+        </p:spPr>
+        <p:txBody>
+          <a:bodyPr wrap="square" rtlCol="0" anchor="ctr"/>
+          <a:lstStyle/>
+          <a:p>
+            <a:pPr indent="0" marL="0">
+              <a:buNone/>
+            </a:pPr>
+            <a:r>
+              <a:rPr lang="en-US" sz="1400" b="1" dirty="0">
+                <a:solidFill>
+                  <a:srgbClr val="F7A23B"/>
+                </a:solidFill>
+                <a:latin typeface="Arial" pitchFamily="34" charset="0"/>
+                <a:ea typeface="Arial" pitchFamily="34" charset="-122"/>
+                <a:cs typeface="Arial" pitchFamily="34" charset="-120"/>
+              </a:rPr>
+              <a:t>A</a:t>
+            </a:r>
+            <a:endParaRPr lang="en-US" sz="1400" dirty="0"/>
+          </a:p>
+        </p:txBody>
+      </p:sp>
+      <p:sp>
+        <p:nvSpPr>
+          <p:cNvPr id="29" name="Text 26"/>
+          <p:cNvSpPr/>
+          <p:nvPr/>
+        </p:nvSpPr>
+        <p:spPr>
+          <a:xfrm>
+            <a:off x="685800" y="5029200"/>
+            <a:ext cx="2327148" cy="914400"/>
+          </a:xfrm>
+          <a:prstGeom prst="rect">
+            <a:avLst/>
+          </a:prstGeom>
+          <a:noFill/>
+          <a:ln/>
+        </p:spPr>
+        <p:txBody>
+          <a:bodyPr wrap="square" rtlCol="0" anchor="t"/>
+          <a:lstStyle/>
+          <a:p>
+            <a:pPr indent="0" marL="0">
+              <a:buNone/>
+            </a:pPr>
+            <a:r>
+              <a:rPr lang="en-US" sz="1500" dirty="0">
+                <a:solidFill>
+                  <a:srgbClr val="1F2937"/>
+                </a:solidFill>
+                <a:latin typeface="Arial" pitchFamily="34" charset="0"/>
+                <a:ea typeface="Arial" pitchFamily="34" charset="-122"/>
+                <a:cs typeface="Arial" pitchFamily="34" charset="-120"/>
+              </a:rPr>
+              <a:t>sim, sempre</a:t>
+            </a:r>
+            <a:endParaRPr lang="en-US" sz="1500" dirty="0"/>
+          </a:p>
+        </p:txBody>
+      </p:sp>
+      <p:sp>
+        <p:nvSpPr>
+          <p:cNvPr id="30" name="Shape 27"/>
+          <p:cNvSpPr/>
+          <p:nvPr/>
+        </p:nvSpPr>
+        <p:spPr>
+          <a:xfrm>
+            <a:off x="3378708" y="4572000"/>
+            <a:ext cx="2601468" cy="1463040"/>
+          </a:xfrm>
+          <a:prstGeom prst="roundRect">
+            <a:avLst>
+              <a:gd name="adj" fmla="val 5000"/>
+            </a:avLst>
+          </a:prstGeom>
+          <a:solidFill>
+            <a:srgbClr val="FFFFFF"/>
+          </a:solidFill>
+          <a:ln w="9525">
+            <a:solidFill>
+              <a:srgbClr val="D8E0EC"/>
+            </a:solidFill>
+            <a:prstDash val="solid"/>
+          </a:ln>
+        </p:spPr>
+      </p:sp>
+      <p:sp>
+        <p:nvSpPr>
+          <p:cNvPr id="31" name="Text 28"/>
+          <p:cNvSpPr/>
+          <p:nvPr/>
+        </p:nvSpPr>
+        <p:spPr>
+          <a:xfrm>
+            <a:off x="3515868" y="4663440"/>
+            <a:ext cx="365760" cy="365760"/>
+          </a:xfrm>
+          <a:prstGeom prst="rect">
+            <a:avLst/>
+          </a:prstGeom>
+          <a:noFill/>
+          <a:ln/>
+        </p:spPr>
+        <p:txBody>
+          <a:bodyPr wrap="square" rtlCol="0" anchor="ctr"/>
+          <a:lstStyle/>
+          <a:p>
+            <a:pPr indent="0" marL="0">
+              <a:buNone/>
+            </a:pPr>
+            <a:r>
+              <a:rPr lang="en-US" sz="1400" b="1" dirty="0">
+                <a:solidFill>
+                  <a:srgbClr val="F7A23B"/>
+                </a:solidFill>
+                <a:latin typeface="Arial" pitchFamily="34" charset="0"/>
+                <a:ea typeface="Arial" pitchFamily="34" charset="-122"/>
+                <a:cs typeface="Arial" pitchFamily="34" charset="-120"/>
+              </a:rPr>
+              <a:t>B</a:t>
+            </a:r>
+            <a:endParaRPr lang="en-US" sz="1400" dirty="0"/>
+          </a:p>
+        </p:txBody>
+      </p:sp>
+      <p:sp>
+        <p:nvSpPr>
+          <p:cNvPr id="32" name="Text 29"/>
+          <p:cNvSpPr/>
+          <p:nvPr/>
+        </p:nvSpPr>
+        <p:spPr>
+          <a:xfrm>
+            <a:off x="3515868" y="5029200"/>
+            <a:ext cx="2327148" cy="914400"/>
+          </a:xfrm>
+          <a:prstGeom prst="rect">
+            <a:avLst/>
+          </a:prstGeom>
+          <a:noFill/>
+          <a:ln/>
+        </p:spPr>
+        <p:txBody>
+          <a:bodyPr wrap="square" rtlCol="0" anchor="t"/>
+          <a:lstStyle/>
+          <a:p>
+            <a:pPr indent="0" marL="0">
+              <a:buNone/>
+            </a:pPr>
+            <a:r>
+              <a:rPr lang="en-US" sz="1500" dirty="0">
+                <a:solidFill>
+                  <a:srgbClr val="1F2937"/>
+                </a:solidFill>
+                <a:latin typeface="Arial" pitchFamily="34" charset="0"/>
+                <a:ea typeface="Arial" pitchFamily="34" charset="-122"/>
+                <a:cs typeface="Arial" pitchFamily="34" charset="-120"/>
+              </a:rPr>
+              <a:t>não, o cliente continua na distribuidora e recebe créditos</a:t>
+            </a:r>
+            <a:endParaRPr lang="en-US" sz="1500" dirty="0"/>
+          </a:p>
+        </p:txBody>
+      </p:sp>
+      <p:sp>
+        <p:nvSpPr>
+          <p:cNvPr id="33" name="Shape 30"/>
+          <p:cNvSpPr/>
+          <p:nvPr/>
+        </p:nvSpPr>
+        <p:spPr>
+          <a:xfrm>
+            <a:off x="6208776" y="4572000"/>
+            <a:ext cx="2601468" cy="1463040"/>
+          </a:xfrm>
+          <a:prstGeom prst="roundRect">
+            <a:avLst>
+              <a:gd name="adj" fmla="val 5000"/>
+            </a:avLst>
+          </a:prstGeom>
+          <a:solidFill>
+            <a:srgbClr val="FFFFFF"/>
+          </a:solidFill>
+          <a:ln w="9525">
+            <a:solidFill>
+              <a:srgbClr val="D8E0EC"/>
+            </a:solidFill>
+            <a:prstDash val="solid"/>
+          </a:ln>
+        </p:spPr>
+      </p:sp>
+      <p:sp>
+        <p:nvSpPr>
+          <p:cNvPr id="34" name="Text 31"/>
+          <p:cNvSpPr/>
+          <p:nvPr/>
+        </p:nvSpPr>
+        <p:spPr>
+          <a:xfrm>
+            <a:off x="6345936" y="4663440"/>
+            <a:ext cx="365760" cy="365760"/>
+          </a:xfrm>
+          <a:prstGeom prst="rect">
+            <a:avLst/>
+          </a:prstGeom>
+          <a:noFill/>
+          <a:ln/>
+        </p:spPr>
+        <p:txBody>
+          <a:bodyPr wrap="square" rtlCol="0" anchor="ctr"/>
+          <a:lstStyle/>
+          <a:p>
+            <a:pPr indent="0" marL="0">
+              <a:buNone/>
+            </a:pPr>
+            <a:r>
+              <a:rPr lang="en-US" sz="1400" b="1" dirty="0">
+                <a:solidFill>
+                  <a:srgbClr val="F7A23B"/>
+                </a:solidFill>
+                <a:latin typeface="Arial" pitchFamily="34" charset="0"/>
+                <a:ea typeface="Arial" pitchFamily="34" charset="-122"/>
+                <a:cs typeface="Arial" pitchFamily="34" charset="-120"/>
+              </a:rPr>
+              <a:t>C</a:t>
+            </a:r>
+            <a:endParaRPr lang="en-US" sz="1400" dirty="0"/>
+          </a:p>
+        </p:txBody>
+      </p:sp>
+      <p:sp>
+        <p:nvSpPr>
+          <p:cNvPr id="35" name="Text 32"/>
+          <p:cNvSpPr/>
+          <p:nvPr/>
+        </p:nvSpPr>
+        <p:spPr>
+          <a:xfrm>
+            <a:off x="6345936" y="5029200"/>
+            <a:ext cx="2327148" cy="914400"/>
+          </a:xfrm>
+          <a:prstGeom prst="rect">
+            <a:avLst/>
+          </a:prstGeom>
+          <a:noFill/>
+          <a:ln/>
+        </p:spPr>
+        <p:txBody>
+          <a:bodyPr wrap="square" rtlCol="0" anchor="t"/>
+          <a:lstStyle/>
+          <a:p>
+            <a:pPr indent="0" marL="0">
+              <a:buNone/>
+            </a:pPr>
+            <a:r>
+              <a:rPr lang="en-US" sz="1500" dirty="0">
+                <a:solidFill>
+                  <a:srgbClr val="1F2937"/>
+                </a:solidFill>
+                <a:latin typeface="Arial" pitchFamily="34" charset="0"/>
+                <a:ea typeface="Arial" pitchFamily="34" charset="-122"/>
+                <a:cs typeface="Arial" pitchFamily="34" charset="-120"/>
+              </a:rPr>
+              <a:t>depende do inversor</a:t>
+            </a:r>
+            <a:endParaRPr lang="en-US" sz="1500" dirty="0"/>
+          </a:p>
+        </p:txBody>
+      </p:sp>
+      <p:sp>
+        <p:nvSpPr>
+          <p:cNvPr id="36" name="Shape 33"/>
+          <p:cNvSpPr/>
+          <p:nvPr/>
+        </p:nvSpPr>
+        <p:spPr>
+          <a:xfrm>
+            <a:off x="9038844" y="4572000"/>
+            <a:ext cx="2601468" cy="1463040"/>
+          </a:xfrm>
+          <a:prstGeom prst="roundRect">
+            <a:avLst>
+              <a:gd name="adj" fmla="val 5000"/>
+            </a:avLst>
+          </a:prstGeom>
+          <a:solidFill>
+            <a:srgbClr val="FFFFFF"/>
+          </a:solidFill>
+          <a:ln w="9525">
+            <a:solidFill>
+              <a:srgbClr val="D8E0EC"/>
+            </a:solidFill>
+            <a:prstDash val="solid"/>
+          </a:ln>
+        </p:spPr>
+      </p:sp>
+      <p:sp>
+        <p:nvSpPr>
+          <p:cNvPr id="37" name="Text 34"/>
+          <p:cNvSpPr/>
+          <p:nvPr/>
+        </p:nvSpPr>
+        <p:spPr>
+          <a:xfrm>
+            <a:off x="9176004" y="4663440"/>
+            <a:ext cx="365760" cy="365760"/>
+          </a:xfrm>
+          <a:prstGeom prst="rect">
+            <a:avLst/>
+          </a:prstGeom>
+          <a:noFill/>
+          <a:ln/>
+        </p:spPr>
+        <p:txBody>
+          <a:bodyPr wrap="square" rtlCol="0" anchor="ctr"/>
+          <a:lstStyle/>
+          <a:p>
+            <a:pPr indent="0" marL="0">
+              <a:buNone/>
+            </a:pPr>
+            <a:r>
+              <a:rPr lang="en-US" sz="1400" b="1" dirty="0">
+                <a:solidFill>
+                  <a:srgbClr val="F7A23B"/>
+                </a:solidFill>
+                <a:latin typeface="Arial" pitchFamily="34" charset="0"/>
+                <a:ea typeface="Arial" pitchFamily="34" charset="-122"/>
+                <a:cs typeface="Arial" pitchFamily="34" charset="-120"/>
+              </a:rPr>
+              <a:t>D</a:t>
+            </a:r>
+            <a:endParaRPr lang="en-US" sz="1400" dirty="0"/>
+          </a:p>
+        </p:txBody>
+      </p:sp>
+      <p:sp>
+        <p:nvSpPr>
+          <p:cNvPr id="38" name="Text 35"/>
+          <p:cNvSpPr/>
+          <p:nvPr/>
+        </p:nvSpPr>
+        <p:spPr>
+          <a:xfrm>
+            <a:off x="9176004" y="5029200"/>
+            <a:ext cx="2327148" cy="914400"/>
+          </a:xfrm>
+          <a:prstGeom prst="rect">
+            <a:avLst/>
+          </a:prstGeom>
+          <a:noFill/>
+          <a:ln/>
+        </p:spPr>
+        <p:txBody>
+          <a:bodyPr wrap="square" rtlCol="0" anchor="t"/>
+          <a:lstStyle/>
+          <a:p>
+            <a:pPr indent="0" marL="0">
+              <a:buNone/>
+            </a:pPr>
+            <a:r>
+              <a:rPr lang="en-US" sz="1500" dirty="0">
+                <a:solidFill>
+                  <a:srgbClr val="1F2937"/>
+                </a:solidFill>
+                <a:latin typeface="Arial" pitchFamily="34" charset="0"/>
+                <a:ea typeface="Arial" pitchFamily="34" charset="-122"/>
+                <a:cs typeface="Arial" pitchFamily="34" charset="-120"/>
+              </a:rPr>
+              <a:t>só para empresas</a:t>
+            </a:r>
+            <a:endParaRPr lang="en-US" sz="1500" dirty="0"/>
+          </a:p>
+        </p:txBody>
+      </p:sp>
+      <p:sp>
+        <p:nvSpPr>
+          <p:cNvPr id="25" name="Slide Number Placeholder 0"/>
+          <p:cNvSpPr>
+            <a:spLocks noGrp="1"/>
+          </p:cNvSpPr>
+          <p:nvPr>
+            <p:ph type="sldNum" sz="quarter" idx="4294967295"/>
+          </p:nvPr>
+        </p:nvSpPr>
+        <p:spPr>
+          <a:xfrm>
+            <a:off x="11292840" y="6556248"/>
+            <a:ext cx="548640" cy="256032"/>
+          </a:xfrm>
+          <a:prstGeom prst="rect">
+            <a:avLst/>
+          </a:prstGeom>
+          <a:extLst>
+            <a:ext uri="{C572A759-6A51-4108-AA02-DFA0A04FC94B}">
+              <ma14:wrappingTextBoxFlag xmlns:ma14="http://schemas.microsoft.com/office/mac/drawingml/2011/main" val="0"/>
+            </a:ext>
+          </a:extLst>
+        </p:spPr>
+        <p:txBody>
+          <a:bodyPr/>
+          <a:lstStyle>
+            <a:lvl1pPr>
+              <a:defRPr sz="900">
+                <a:solidFill>
+                  <a:srgbClr val="1B3A6B"/>
+                </a:solidFill>
+                <a:latin typeface="Arial"/>
+                <a:ea typeface="Arial"/>
+                <a:cs typeface="Arial"/>
+              </a:defRPr>
+            </a:lvl1pPr>
+          </a:lstStyle>
+          <a:p>
+            <a:pPr algn="r"/>
+            <a:fld id="{F7021451-1387-4CA6-816F-3879F97B5CBC}" type="slidenum">
+              <a:rPr b="1" lang="en-US"/>
+              <a:t>34</a:t>
+            </a:fld>
+            <a:endParaRPr lang="en-US"/>
+          </a:p>
+        </p:txBody>
+      </p:sp>
+    </p:spTree>
+  </p:cSld>
+  <p:clrMapOvr>
+    <a:masterClrMapping/>
+  </p:clrMapOvr>
+</p:sld>
+</file>
+
+<file path=ppt/slides/slide35.xml><?xml version="1.0" encoding="utf-8"?>
+<p:sld xmlns:a="http://schemas.openxmlformats.org/drawingml/2006/main" xmlns:r="http://schemas.openxmlformats.org/officeDocument/2006/relationships" xmlns:p="http://schemas.openxmlformats.org/presentationml/2006/main">
+  <p:cSld name="Slide 35">
+    <p:bg>
+      <p:bgPr>
+        <a:solidFill>
+          <a:srgbClr val="F6F8FB"/>
+        </a:solidFill>
+      </p:bgPr>
+    </p:bg>
+    <p:spTree>
+      <p:nvGrpSpPr>
+        <p:cNvPr id="1" name=""/>
+        <p:cNvGrpSpPr/>
+        <p:nvPr/>
+      </p:nvGrpSpPr>
+      <p:grpSpPr>
+        <a:xfrm>
+          <a:off x="0" y="0"/>
+          <a:ext cx="0" cy="0"/>
+          <a:chOff x="0" y="0"/>
+          <a:chExt cx="0" cy="0"/>
+        </a:xfrm>
+      </p:grpSpPr>
+      <p:sp>
+        <p:nvSpPr>
+          <p:cNvPr id="2" name="Shape 0"/>
+          <p:cNvSpPr/>
+          <p:nvPr/>
+        </p:nvSpPr>
+        <p:spPr>
+          <a:xfrm>
+            <a:off x="0" y="6510528"/>
+            <a:ext cx="12191695" cy="347472"/>
+          </a:xfrm>
+          <a:prstGeom prst="rect">
+            <a:avLst/>
+          </a:prstGeom>
+          <a:solidFill>
+            <a:srgbClr val="FFFFFF"/>
+          </a:solidFill>
+          <a:ln w="6350">
+            <a:solidFill>
+              <a:srgbClr val="D8E0EC"/>
+            </a:solidFill>
+            <a:prstDash val="solid"/>
+          </a:ln>
+        </p:spPr>
+      </p:sp>
+      <p:pic>
+        <p:nvPicPr>
+          <p:cNvPr id="3" name="Image 0" descr="/www/wwwroot/rexar/gdsolar/docs/curso/slides/assets/logo-gdsolar.png">    </p:cNvPr>
+          <p:cNvPicPr>
+            <a:picLocks noChangeAspect="1"/>
+          </p:cNvPicPr>
+          <p:nvPr/>
+        </p:nvPicPr>
+        <p:blipFill>
+          <a:blip r:embed="rId1"/>
+          <a:stretch>
+            <a:fillRect/>
+          </a:stretch>
+        </p:blipFill>
+        <p:spPr>
+          <a:xfrm>
+            <a:off x="548640" y="6547104"/>
+            <a:ext cx="274320" cy="274320"/>
+          </a:xfrm>
+          <a:prstGeom prst="rect">
+            <a:avLst/>
+          </a:prstGeom>
+        </p:spPr>
+      </p:pic>
+      <p:sp>
+        <p:nvSpPr>
+          <p:cNvPr id="4" name="Text 1"/>
+          <p:cNvSpPr/>
+          <p:nvPr/>
+        </p:nvSpPr>
+        <p:spPr>
+          <a:xfrm>
+            <a:off x="886968" y="6528816"/>
+            <a:ext cx="6400800" cy="310896"/>
+          </a:xfrm>
+          <a:prstGeom prst="rect">
+            <a:avLst/>
+          </a:prstGeom>
+          <a:noFill/>
+          <a:ln/>
+        </p:spPr>
+        <p:txBody>
+          <a:bodyPr wrap="square" rtlCol="0" anchor="ctr"/>
+          <a:lstStyle/>
+          <a:p>
+            <a:pPr indent="0" marL="0">
+              <a:buNone/>
+            </a:pPr>
+            <a:r>
+              <a:rPr lang="en-US" sz="900" b="1" dirty="0">
+                <a:solidFill>
+                  <a:srgbClr val="64748B"/>
+                </a:solidFill>
+                <a:latin typeface="Arial" pitchFamily="34" charset="0"/>
+                <a:ea typeface="Arial" pitchFamily="34" charset="-122"/>
+                <a:cs typeface="Arial" pitchFamily="34" charset="-120"/>
+              </a:rPr>
+              <a:t>GD Solar  ·  Formação em Energia por Assinatura</a:t>
+            </a:r>
+            <a:endParaRPr lang="en-US" sz="900" dirty="0"/>
+          </a:p>
+        </p:txBody>
+      </p:sp>
+      <p:sp>
+        <p:nvSpPr>
+          <p:cNvPr id="5" name="Text 2"/>
+          <p:cNvSpPr/>
+          <p:nvPr/>
+        </p:nvSpPr>
+        <p:spPr>
+          <a:xfrm>
+            <a:off x="7132320" y="6528816"/>
+            <a:ext cx="4023360" cy="310896"/>
+          </a:xfrm>
+          <a:prstGeom prst="rect">
+            <a:avLst/>
+          </a:prstGeom>
+          <a:noFill/>
+          <a:ln/>
+        </p:spPr>
+        <p:txBody>
+          <a:bodyPr wrap="square" rtlCol="0" anchor="ctr"/>
+          <a:lstStyle/>
+          <a:p>
+            <a:pPr algn="r" indent="0" marL="0">
+              <a:buNone/>
+            </a:pPr>
+            <a:r>
+              <a:rPr lang="en-US" sz="900" dirty="0">
+                <a:solidFill>
+                  <a:srgbClr val="64748B"/>
+                </a:solidFill>
+                <a:latin typeface="Arial" pitchFamily="34" charset="0"/>
+                <a:ea typeface="Arial" pitchFamily="34" charset="-122"/>
+                <a:cs typeface="Arial" pitchFamily="34" charset="-120"/>
+              </a:rPr>
+              <a:t>M5 · Teste rápido</a:t>
+            </a:r>
+            <a:endParaRPr lang="en-US" sz="900" dirty="0"/>
+          </a:p>
+        </p:txBody>
+      </p:sp>
+      <p:sp>
+        <p:nvSpPr>
+          <p:cNvPr id="6" name="Shape 3"/>
+          <p:cNvSpPr/>
+          <p:nvPr/>
+        </p:nvSpPr>
+        <p:spPr>
+          <a:xfrm>
+            <a:off x="548640" y="384048"/>
+            <a:ext cx="82296" cy="658368"/>
+          </a:xfrm>
+          <a:prstGeom prst="rect">
+            <a:avLst/>
+          </a:prstGeom>
+          <a:solidFill>
+            <a:srgbClr val="F7A23B"/>
+          </a:solidFill>
+          <a:ln/>
+        </p:spPr>
+      </p:sp>
+      <p:sp>
+        <p:nvSpPr>
+          <p:cNvPr id="7" name="Text 4"/>
+          <p:cNvSpPr/>
+          <p:nvPr/>
+        </p:nvSpPr>
+        <p:spPr>
+          <a:xfrm>
+            <a:off x="777240" y="292608"/>
+            <a:ext cx="10972800" cy="274320"/>
+          </a:xfrm>
+          <a:prstGeom prst="rect">
+            <a:avLst/>
+          </a:prstGeom>
+          <a:noFill/>
+          <a:ln/>
+        </p:spPr>
+        <p:txBody>
+          <a:bodyPr wrap="square" rtlCol="0" anchor="ctr"/>
+          <a:lstStyle/>
+          <a:p>
+            <a:pPr indent="0" marL="0">
+              <a:buNone/>
+            </a:pPr>
+            <a:r>
+              <a:rPr lang="en-US" sz="1000" b="1" spc="100" kern="0" dirty="0">
+                <a:solidFill>
+                  <a:srgbClr val="F7A23B"/>
+                </a:solidFill>
+                <a:latin typeface="Arial" pitchFamily="34" charset="0"/>
+                <a:ea typeface="Arial" pitchFamily="34" charset="-122"/>
+                <a:cs typeface="Arial" pitchFamily="34" charset="-120"/>
+              </a:rPr>
+              <a:t>QUESTÕES 5–6 DE 6</a:t>
+            </a:r>
+            <a:endParaRPr lang="en-US" sz="1000" dirty="0"/>
+          </a:p>
+        </p:txBody>
+      </p:sp>
+      <p:sp>
+        <p:nvSpPr>
+          <p:cNvPr id="8" name="Text 5"/>
+          <p:cNvSpPr/>
+          <p:nvPr/>
+        </p:nvSpPr>
+        <p:spPr>
+          <a:xfrm>
+            <a:off x="777240" y="530352"/>
+            <a:ext cx="10881360" cy="566928"/>
+          </a:xfrm>
+          <a:prstGeom prst="rect">
+            <a:avLst/>
+          </a:prstGeom>
+          <a:noFill/>
+          <a:ln/>
+        </p:spPr>
+        <p:txBody>
+          <a:bodyPr wrap="square" rtlCol="0" anchor="ctr">
+            <a:normAutofit/>
+          </a:bodyPr>
+          <a:lstStyle/>
+          <a:p>
+            <a:pPr indent="0" marL="0">
+              <a:buNone/>
+            </a:pPr>
+            <a:r>
+              <a:rPr lang="en-US" sz="2600" b="1" dirty="0">
+                <a:solidFill>
+                  <a:srgbClr val="1B3A6B"/>
+                </a:solidFill>
+                <a:latin typeface="Arial" pitchFamily="34" charset="0"/>
+                <a:ea typeface="Arial" pitchFamily="34" charset="-122"/>
+                <a:cs typeface="Arial" pitchFamily="34" charset="-120"/>
+              </a:rPr>
+              <a:t>Teste rápido</a:t>
+            </a:r>
+            <a:endParaRPr lang="en-US" sz="2600" dirty="0"/>
+          </a:p>
+        </p:txBody>
+      </p:sp>
+      <p:sp>
+        <p:nvSpPr>
+          <p:cNvPr id="9" name="Shape 6"/>
+          <p:cNvSpPr/>
+          <p:nvPr/>
+        </p:nvSpPr>
+        <p:spPr>
+          <a:xfrm>
+            <a:off x="548640" y="1325880"/>
+            <a:ext cx="502920" cy="502920"/>
+          </a:xfrm>
+          <a:prstGeom prst="ellipse">
+            <a:avLst/>
+          </a:prstGeom>
+          <a:solidFill>
+            <a:srgbClr val="1B3A6B"/>
+          </a:solidFill>
+          <a:ln/>
+        </p:spPr>
+      </p:sp>
+      <p:sp>
+        <p:nvSpPr>
+          <p:cNvPr id="10" name="Text 7"/>
+          <p:cNvSpPr/>
+          <p:nvPr/>
+        </p:nvSpPr>
+        <p:spPr>
+          <a:xfrm>
+            <a:off x="548640" y="1325880"/>
+            <a:ext cx="502920" cy="502920"/>
+          </a:xfrm>
+          <a:prstGeom prst="rect">
+            <a:avLst/>
+          </a:prstGeom>
+          <a:noFill/>
+          <a:ln/>
+        </p:spPr>
+        <p:txBody>
+          <a:bodyPr wrap="square" rtlCol="0" anchor="ctr"/>
+          <a:lstStyle/>
+          <a:p>
+            <a:pPr algn="ctr" indent="0" marL="0">
+              <a:buNone/>
+            </a:pPr>
+            <a:r>
+              <a:rPr lang="en-US" sz="1600" b="1" dirty="0">
+                <a:solidFill>
+                  <a:srgbClr val="FFFFFF"/>
+                </a:solidFill>
+                <a:latin typeface="Arial" pitchFamily="34" charset="0"/>
+                <a:ea typeface="Arial" pitchFamily="34" charset="-122"/>
+                <a:cs typeface="Arial" pitchFamily="34" charset="-120"/>
+              </a:rPr>
+              <a:t>5</a:t>
+            </a:r>
+            <a:endParaRPr lang="en-US" sz="1600" dirty="0"/>
+          </a:p>
+        </p:txBody>
+      </p:sp>
+      <p:sp>
+        <p:nvSpPr>
+          <p:cNvPr id="11" name="Text 8"/>
+          <p:cNvSpPr/>
+          <p:nvPr/>
+        </p:nvSpPr>
+        <p:spPr>
+          <a:xfrm>
+            <a:off x="1234440" y="1280160"/>
+            <a:ext cx="10424160" cy="640080"/>
+          </a:xfrm>
+          <a:prstGeom prst="rect">
+            <a:avLst/>
+          </a:prstGeom>
+          <a:noFill/>
+          <a:ln/>
+        </p:spPr>
+        <p:txBody>
+          <a:bodyPr wrap="square" rtlCol="0" anchor="ctr"/>
+          <a:lstStyle/>
+          <a:p>
+            <a:pPr indent="0" marL="0">
+              <a:buNone/>
+            </a:pPr>
+            <a:r>
+              <a:rPr lang="en-US" sz="1800" b="1" dirty="0">
+                <a:solidFill>
+                  <a:srgbClr val="1B3A6B"/>
+                </a:solidFill>
+                <a:latin typeface="Arial" pitchFamily="34" charset="0"/>
+                <a:ea typeface="Arial" pitchFamily="34" charset="-122"/>
+                <a:cs typeface="Arial" pitchFamily="34" charset="-120"/>
+              </a:rPr>
+              <a:t>A comissão do vendedor deve estar ligada preferencialmente a:</a:t>
+            </a:r>
+            <a:endParaRPr lang="en-US" sz="1800" dirty="0"/>
+          </a:p>
+        </p:txBody>
+      </p:sp>
+      <p:sp>
+        <p:nvSpPr>
+          <p:cNvPr id="12" name="Shape 9"/>
+          <p:cNvSpPr/>
+          <p:nvPr/>
+        </p:nvSpPr>
+        <p:spPr>
+          <a:xfrm>
+            <a:off x="548640" y="2057400"/>
+            <a:ext cx="2601468" cy="1463040"/>
+          </a:xfrm>
+          <a:prstGeom prst="roundRect">
+            <a:avLst>
+              <a:gd name="adj" fmla="val 5000"/>
+            </a:avLst>
+          </a:prstGeom>
+          <a:solidFill>
+            <a:srgbClr val="FFFFFF"/>
+          </a:solidFill>
+          <a:ln w="9525">
+            <a:solidFill>
+              <a:srgbClr val="D8E0EC"/>
+            </a:solidFill>
+            <a:prstDash val="solid"/>
+          </a:ln>
+        </p:spPr>
+      </p:sp>
+      <p:sp>
+        <p:nvSpPr>
+          <p:cNvPr id="13" name="Text 10"/>
+          <p:cNvSpPr/>
+          <p:nvPr/>
+        </p:nvSpPr>
+        <p:spPr>
+          <a:xfrm>
+            <a:off x="685800" y="2148840"/>
+            <a:ext cx="365760" cy="365760"/>
+          </a:xfrm>
+          <a:prstGeom prst="rect">
+            <a:avLst/>
+          </a:prstGeom>
+          <a:noFill/>
+          <a:ln/>
+        </p:spPr>
+        <p:txBody>
+          <a:bodyPr wrap="square" rtlCol="0" anchor="ctr"/>
+          <a:lstStyle/>
+          <a:p>
+            <a:pPr indent="0" marL="0">
+              <a:buNone/>
+            </a:pPr>
+            <a:r>
+              <a:rPr lang="en-US" sz="1400" b="1" dirty="0">
+                <a:solidFill>
+                  <a:srgbClr val="F7A23B"/>
+                </a:solidFill>
+                <a:latin typeface="Arial" pitchFamily="34" charset="0"/>
+                <a:ea typeface="Arial" pitchFamily="34" charset="-122"/>
+                <a:cs typeface="Arial" pitchFamily="34" charset="-120"/>
+              </a:rPr>
+              <a:t>A</a:t>
+            </a:r>
+            <a:endParaRPr lang="en-US" sz="1400" dirty="0"/>
+          </a:p>
+        </p:txBody>
+      </p:sp>
+      <p:sp>
+        <p:nvSpPr>
+          <p:cNvPr id="14" name="Text 11"/>
+          <p:cNvSpPr/>
+          <p:nvPr/>
+        </p:nvSpPr>
+        <p:spPr>
+          <a:xfrm>
+            <a:off x="685800" y="2514600"/>
+            <a:ext cx="2327148" cy="914400"/>
+          </a:xfrm>
+          <a:prstGeom prst="rect">
+            <a:avLst/>
+          </a:prstGeom>
+          <a:noFill/>
+          <a:ln/>
+        </p:spPr>
+        <p:txBody>
+          <a:bodyPr wrap="square" rtlCol="0" anchor="t"/>
+          <a:lstStyle/>
+          <a:p>
+            <a:pPr indent="0" marL="0">
+              <a:buNone/>
+            </a:pPr>
+            <a:r>
+              <a:rPr lang="en-US" sz="1500" dirty="0">
+                <a:solidFill>
+                  <a:srgbClr val="1F2937"/>
+                </a:solidFill>
+                <a:latin typeface="Arial" pitchFamily="34" charset="0"/>
+                <a:ea typeface="Arial" pitchFamily="34" charset="-122"/>
+                <a:cs typeface="Arial" pitchFamily="34" charset="-120"/>
+              </a:rPr>
+              <a:t>proposta enviada</a:t>
+            </a:r>
+            <a:endParaRPr lang="en-US" sz="1500" dirty="0"/>
+          </a:p>
+        </p:txBody>
+      </p:sp>
+      <p:sp>
+        <p:nvSpPr>
+          <p:cNvPr id="15" name="Shape 12"/>
+          <p:cNvSpPr/>
+          <p:nvPr/>
+        </p:nvSpPr>
+        <p:spPr>
+          <a:xfrm>
+            <a:off x="3378708" y="2057400"/>
+            <a:ext cx="2601468" cy="1463040"/>
+          </a:xfrm>
+          <a:prstGeom prst="roundRect">
+            <a:avLst>
+              <a:gd name="adj" fmla="val 5000"/>
+            </a:avLst>
+          </a:prstGeom>
+          <a:solidFill>
+            <a:srgbClr val="FFFFFF"/>
+          </a:solidFill>
+          <a:ln w="9525">
+            <a:solidFill>
+              <a:srgbClr val="D8E0EC"/>
+            </a:solidFill>
+            <a:prstDash val="solid"/>
+          </a:ln>
+        </p:spPr>
+      </p:sp>
+      <p:sp>
+        <p:nvSpPr>
+          <p:cNvPr id="16" name="Text 13"/>
+          <p:cNvSpPr/>
+          <p:nvPr/>
+        </p:nvSpPr>
+        <p:spPr>
+          <a:xfrm>
+            <a:off x="3515868" y="2148840"/>
+            <a:ext cx="365760" cy="365760"/>
+          </a:xfrm>
+          <a:prstGeom prst="rect">
+            <a:avLst/>
+          </a:prstGeom>
+          <a:noFill/>
+          <a:ln/>
+        </p:spPr>
+        <p:txBody>
+          <a:bodyPr wrap="square" rtlCol="0" anchor="ctr"/>
+          <a:lstStyle/>
+          <a:p>
+            <a:pPr indent="0" marL="0">
+              <a:buNone/>
+            </a:pPr>
+            <a:r>
+              <a:rPr lang="en-US" sz="1400" b="1" dirty="0">
+                <a:solidFill>
+                  <a:srgbClr val="F7A23B"/>
+                </a:solidFill>
+                <a:latin typeface="Arial" pitchFamily="34" charset="0"/>
+                <a:ea typeface="Arial" pitchFamily="34" charset="-122"/>
+                <a:cs typeface="Arial" pitchFamily="34" charset="-120"/>
+              </a:rPr>
+              <a:t>B</a:t>
+            </a:r>
+            <a:endParaRPr lang="en-US" sz="1400" dirty="0"/>
+          </a:p>
+        </p:txBody>
+      </p:sp>
+      <p:sp>
+        <p:nvSpPr>
+          <p:cNvPr id="17" name="Text 14"/>
+          <p:cNvSpPr/>
+          <p:nvPr/>
+        </p:nvSpPr>
+        <p:spPr>
+          <a:xfrm>
+            <a:off x="3515868" y="2514600"/>
+            <a:ext cx="2327148" cy="914400"/>
+          </a:xfrm>
+          <a:prstGeom prst="rect">
+            <a:avLst/>
+          </a:prstGeom>
+          <a:noFill/>
+          <a:ln/>
+        </p:spPr>
+        <p:txBody>
+          <a:bodyPr wrap="square" rtlCol="0" anchor="t"/>
+          <a:lstStyle/>
+          <a:p>
+            <a:pPr indent="0" marL="0">
+              <a:buNone/>
+            </a:pPr>
+            <a:r>
+              <a:rPr lang="en-US" sz="1500" dirty="0">
+                <a:solidFill>
+                  <a:srgbClr val="1F2937"/>
+                </a:solidFill>
+                <a:latin typeface="Arial" pitchFamily="34" charset="0"/>
+                <a:ea typeface="Arial" pitchFamily="34" charset="-122"/>
+                <a:cs typeface="Arial" pitchFamily="34" charset="-120"/>
+              </a:rPr>
+              <a:t>cliente ativo e pagando</a:t>
+            </a:r>
+            <a:endParaRPr lang="en-US" sz="1500" dirty="0"/>
+          </a:p>
+        </p:txBody>
+      </p:sp>
+      <p:sp>
+        <p:nvSpPr>
+          <p:cNvPr id="18" name="Shape 15"/>
+          <p:cNvSpPr/>
+          <p:nvPr/>
+        </p:nvSpPr>
+        <p:spPr>
+          <a:xfrm>
+            <a:off x="6208776" y="2057400"/>
+            <a:ext cx="2601468" cy="1463040"/>
+          </a:xfrm>
+          <a:prstGeom prst="roundRect">
+            <a:avLst>
+              <a:gd name="adj" fmla="val 5000"/>
+            </a:avLst>
+          </a:prstGeom>
+          <a:solidFill>
+            <a:srgbClr val="FFFFFF"/>
+          </a:solidFill>
+          <a:ln w="9525">
+            <a:solidFill>
+              <a:srgbClr val="D8E0EC"/>
+            </a:solidFill>
+            <a:prstDash val="solid"/>
+          </a:ln>
+        </p:spPr>
+      </p:sp>
+      <p:sp>
+        <p:nvSpPr>
+          <p:cNvPr id="19" name="Text 16"/>
+          <p:cNvSpPr/>
+          <p:nvPr/>
+        </p:nvSpPr>
+        <p:spPr>
+          <a:xfrm>
+            <a:off x="6345936" y="2148840"/>
+            <a:ext cx="365760" cy="365760"/>
+          </a:xfrm>
+          <a:prstGeom prst="rect">
+            <a:avLst/>
+          </a:prstGeom>
+          <a:noFill/>
+          <a:ln/>
+        </p:spPr>
+        <p:txBody>
+          <a:bodyPr wrap="square" rtlCol="0" anchor="ctr"/>
+          <a:lstStyle/>
+          <a:p>
+            <a:pPr indent="0" marL="0">
+              <a:buNone/>
+            </a:pPr>
+            <a:r>
+              <a:rPr lang="en-US" sz="1400" b="1" dirty="0">
+                <a:solidFill>
+                  <a:srgbClr val="F7A23B"/>
+                </a:solidFill>
+                <a:latin typeface="Arial" pitchFamily="34" charset="0"/>
+                <a:ea typeface="Arial" pitchFamily="34" charset="-122"/>
+                <a:cs typeface="Arial" pitchFamily="34" charset="-120"/>
+              </a:rPr>
+              <a:t>C</a:t>
+            </a:r>
+            <a:endParaRPr lang="en-US" sz="1400" dirty="0"/>
+          </a:p>
+        </p:txBody>
+      </p:sp>
+      <p:sp>
+        <p:nvSpPr>
+          <p:cNvPr id="20" name="Text 17"/>
+          <p:cNvSpPr/>
+          <p:nvPr/>
+        </p:nvSpPr>
+        <p:spPr>
+          <a:xfrm>
+            <a:off x="6345936" y="2514600"/>
+            <a:ext cx="2327148" cy="914400"/>
+          </a:xfrm>
+          <a:prstGeom prst="rect">
+            <a:avLst/>
+          </a:prstGeom>
+          <a:noFill/>
+          <a:ln/>
+        </p:spPr>
+        <p:txBody>
+          <a:bodyPr wrap="square" rtlCol="0" anchor="t"/>
+          <a:lstStyle/>
+          <a:p>
+            <a:pPr indent="0" marL="0">
+              <a:buNone/>
+            </a:pPr>
+            <a:r>
+              <a:rPr lang="en-US" sz="1500" dirty="0">
+                <a:solidFill>
+                  <a:srgbClr val="1F2937"/>
+                </a:solidFill>
+                <a:latin typeface="Arial" pitchFamily="34" charset="0"/>
+                <a:ea typeface="Arial" pitchFamily="34" charset="-122"/>
+                <a:cs typeface="Arial" pitchFamily="34" charset="-120"/>
+              </a:rPr>
+              <a:t>visita feita</a:t>
+            </a:r>
+            <a:endParaRPr lang="en-US" sz="1500" dirty="0"/>
+          </a:p>
+        </p:txBody>
+      </p:sp>
+      <p:sp>
+        <p:nvSpPr>
+          <p:cNvPr id="21" name="Shape 18"/>
+          <p:cNvSpPr/>
+          <p:nvPr/>
+        </p:nvSpPr>
+        <p:spPr>
+          <a:xfrm>
+            <a:off x="9038844" y="2057400"/>
+            <a:ext cx="2601468" cy="1463040"/>
+          </a:xfrm>
+          <a:prstGeom prst="roundRect">
+            <a:avLst>
+              <a:gd name="adj" fmla="val 5000"/>
+            </a:avLst>
+          </a:prstGeom>
+          <a:solidFill>
+            <a:srgbClr val="FFFFFF"/>
+          </a:solidFill>
+          <a:ln w="9525">
+            <a:solidFill>
+              <a:srgbClr val="D8E0EC"/>
+            </a:solidFill>
+            <a:prstDash val="solid"/>
+          </a:ln>
+        </p:spPr>
+      </p:sp>
+      <p:sp>
+        <p:nvSpPr>
+          <p:cNvPr id="22" name="Text 19"/>
+          <p:cNvSpPr/>
+          <p:nvPr/>
+        </p:nvSpPr>
+        <p:spPr>
+          <a:xfrm>
+            <a:off x="9176004" y="2148840"/>
+            <a:ext cx="365760" cy="365760"/>
+          </a:xfrm>
+          <a:prstGeom prst="rect">
+            <a:avLst/>
+          </a:prstGeom>
+          <a:noFill/>
+          <a:ln/>
+        </p:spPr>
+        <p:txBody>
+          <a:bodyPr wrap="square" rtlCol="0" anchor="ctr"/>
+          <a:lstStyle/>
+          <a:p>
+            <a:pPr indent="0" marL="0">
+              <a:buNone/>
+            </a:pPr>
+            <a:r>
+              <a:rPr lang="en-US" sz="1400" b="1" dirty="0">
+                <a:solidFill>
+                  <a:srgbClr val="F7A23B"/>
+                </a:solidFill>
+                <a:latin typeface="Arial" pitchFamily="34" charset="0"/>
+                <a:ea typeface="Arial" pitchFamily="34" charset="-122"/>
+                <a:cs typeface="Arial" pitchFamily="34" charset="-120"/>
+              </a:rPr>
+              <a:t>D</a:t>
+            </a:r>
+            <a:endParaRPr lang="en-US" sz="1400" dirty="0"/>
+          </a:p>
+        </p:txBody>
+      </p:sp>
+      <p:sp>
+        <p:nvSpPr>
+          <p:cNvPr id="23" name="Text 20"/>
+          <p:cNvSpPr/>
+          <p:nvPr/>
+        </p:nvSpPr>
+        <p:spPr>
+          <a:xfrm>
+            <a:off x="9176004" y="2514600"/>
+            <a:ext cx="2327148" cy="914400"/>
+          </a:xfrm>
+          <a:prstGeom prst="rect">
+            <a:avLst/>
+          </a:prstGeom>
+          <a:noFill/>
+          <a:ln/>
+        </p:spPr>
+        <p:txBody>
+          <a:bodyPr wrap="square" rtlCol="0" anchor="t"/>
+          <a:lstStyle/>
+          <a:p>
+            <a:pPr indent="0" marL="0">
+              <a:buNone/>
+            </a:pPr>
+            <a:r>
+              <a:rPr lang="en-US" sz="1500" dirty="0">
+                <a:solidFill>
+                  <a:srgbClr val="1F2937"/>
+                </a:solidFill>
+                <a:latin typeface="Arial" pitchFamily="34" charset="0"/>
+                <a:ea typeface="Arial" pitchFamily="34" charset="-122"/>
+                <a:cs typeface="Arial" pitchFamily="34" charset="-120"/>
+              </a:rPr>
+              <a:t>ligação feita</a:t>
+            </a:r>
+            <a:endParaRPr lang="en-US" sz="1500" dirty="0"/>
+          </a:p>
+        </p:txBody>
+      </p:sp>
+      <p:sp>
+        <p:nvSpPr>
+          <p:cNvPr id="24" name="Shape 21"/>
+          <p:cNvSpPr/>
+          <p:nvPr/>
+        </p:nvSpPr>
+        <p:spPr>
+          <a:xfrm>
+            <a:off x="548640" y="3840480"/>
+            <a:ext cx="502920" cy="502920"/>
+          </a:xfrm>
+          <a:prstGeom prst="ellipse">
+            <a:avLst/>
+          </a:prstGeom>
+          <a:solidFill>
+            <a:srgbClr val="1B3A6B"/>
+          </a:solidFill>
+          <a:ln/>
+        </p:spPr>
+      </p:sp>
+      <p:sp>
+        <p:nvSpPr>
+          <p:cNvPr id="25" name="Text 22"/>
+          <p:cNvSpPr/>
+          <p:nvPr/>
+        </p:nvSpPr>
+        <p:spPr>
+          <a:xfrm>
+            <a:off x="548640" y="3840480"/>
+            <a:ext cx="502920" cy="502920"/>
+          </a:xfrm>
+          <a:prstGeom prst="rect">
+            <a:avLst/>
+          </a:prstGeom>
+          <a:noFill/>
+          <a:ln/>
+        </p:spPr>
+        <p:txBody>
+          <a:bodyPr wrap="square" rtlCol="0" anchor="ctr"/>
+          <a:lstStyle/>
+          <a:p>
+            <a:pPr algn="ctr" indent="0" marL="0">
+              <a:buNone/>
+            </a:pPr>
+            <a:r>
+              <a:rPr lang="en-US" sz="1600" b="1" dirty="0">
+                <a:solidFill>
+                  <a:srgbClr val="FFFFFF"/>
+                </a:solidFill>
+                <a:latin typeface="Arial" pitchFamily="34" charset="0"/>
+                <a:ea typeface="Arial" pitchFamily="34" charset="-122"/>
+                <a:cs typeface="Arial" pitchFamily="34" charset="-120"/>
+              </a:rPr>
+              <a:t>6</a:t>
+            </a:r>
+            <a:endParaRPr lang="en-US" sz="1600" dirty="0"/>
+          </a:p>
+        </p:txBody>
+      </p:sp>
+      <p:sp>
+        <p:nvSpPr>
+          <p:cNvPr id="26" name="Text 23"/>
+          <p:cNvSpPr/>
+          <p:nvPr/>
+        </p:nvSpPr>
+        <p:spPr>
+          <a:xfrm>
+            <a:off x="1234440" y="3794760"/>
+            <a:ext cx="10424160" cy="640080"/>
+          </a:xfrm>
+          <a:prstGeom prst="rect">
+            <a:avLst/>
+          </a:prstGeom>
+          <a:noFill/>
+          <a:ln/>
+        </p:spPr>
+        <p:txBody>
+          <a:bodyPr wrap="square" rtlCol="0" anchor="ctr"/>
+          <a:lstStyle/>
+          <a:p>
+            <a:pPr indent="0" marL="0">
+              <a:buNone/>
+            </a:pPr>
+            <a:r>
+              <a:rPr lang="en-US" sz="1800" b="1" dirty="0">
+                <a:solidFill>
+                  <a:srgbClr val="1B3A6B"/>
+                </a:solidFill>
+                <a:latin typeface="Arial" pitchFamily="34" charset="0"/>
+                <a:ea typeface="Arial" pitchFamily="34" charset="-122"/>
+                <a:cs typeface="Arial" pitchFamily="34" charset="-120"/>
+              </a:rPr>
+              <a:t>Na plataforma, um consultor vê:</a:t>
+            </a:r>
+            <a:endParaRPr lang="en-US" sz="1800" dirty="0"/>
+          </a:p>
+        </p:txBody>
+      </p:sp>
+      <p:sp>
+        <p:nvSpPr>
+          <p:cNvPr id="27" name="Shape 24"/>
+          <p:cNvSpPr/>
+          <p:nvPr/>
+        </p:nvSpPr>
+        <p:spPr>
+          <a:xfrm>
+            <a:off x="548640" y="4572000"/>
+            <a:ext cx="2601468" cy="1463040"/>
+          </a:xfrm>
+          <a:prstGeom prst="roundRect">
+            <a:avLst>
+              <a:gd name="adj" fmla="val 5000"/>
+            </a:avLst>
+          </a:prstGeom>
+          <a:solidFill>
+            <a:srgbClr val="FFFFFF"/>
+          </a:solidFill>
+          <a:ln w="9525">
+            <a:solidFill>
+              <a:srgbClr val="D8E0EC"/>
+            </a:solidFill>
+            <a:prstDash val="solid"/>
+          </a:ln>
+        </p:spPr>
+      </p:sp>
+      <p:sp>
+        <p:nvSpPr>
+          <p:cNvPr id="28" name="Text 25"/>
+          <p:cNvSpPr/>
+          <p:nvPr/>
+        </p:nvSpPr>
+        <p:spPr>
+          <a:xfrm>
+            <a:off x="685800" y="4663440"/>
+            <a:ext cx="365760" cy="365760"/>
+          </a:xfrm>
+          <a:prstGeom prst="rect">
+            <a:avLst/>
+          </a:prstGeom>
+          <a:noFill/>
+          <a:ln/>
+        </p:spPr>
+        <p:txBody>
+          <a:bodyPr wrap="square" rtlCol="0" anchor="ctr"/>
+          <a:lstStyle/>
+          <a:p>
+            <a:pPr indent="0" marL="0">
+              <a:buNone/>
+            </a:pPr>
+            <a:r>
+              <a:rPr lang="en-US" sz="1400" b="1" dirty="0">
+                <a:solidFill>
+                  <a:srgbClr val="F7A23B"/>
+                </a:solidFill>
+                <a:latin typeface="Arial" pitchFamily="34" charset="0"/>
+                <a:ea typeface="Arial" pitchFamily="34" charset="-122"/>
+                <a:cs typeface="Arial" pitchFamily="34" charset="-120"/>
+              </a:rPr>
+              <a:t>A</a:t>
+            </a:r>
+            <a:endParaRPr lang="en-US" sz="1400" dirty="0"/>
+          </a:p>
+        </p:txBody>
+      </p:sp>
+      <p:sp>
+        <p:nvSpPr>
+          <p:cNvPr id="29" name="Text 26"/>
+          <p:cNvSpPr/>
+          <p:nvPr/>
+        </p:nvSpPr>
+        <p:spPr>
+          <a:xfrm>
+            <a:off x="685800" y="5029200"/>
+            <a:ext cx="2327148" cy="914400"/>
+          </a:xfrm>
+          <a:prstGeom prst="rect">
+            <a:avLst/>
+          </a:prstGeom>
+          <a:noFill/>
+          <a:ln/>
+        </p:spPr>
+        <p:txBody>
+          <a:bodyPr wrap="square" rtlCol="0" anchor="t"/>
+          <a:lstStyle/>
+          <a:p>
+            <a:pPr indent="0" marL="0">
+              <a:buNone/>
+            </a:pPr>
+            <a:r>
+              <a:rPr lang="en-US" sz="1500" dirty="0">
+                <a:solidFill>
+                  <a:srgbClr val="1F2937"/>
+                </a:solidFill>
+                <a:latin typeface="Arial" pitchFamily="34" charset="0"/>
+                <a:ea typeface="Arial" pitchFamily="34" charset="-122"/>
+                <a:cs typeface="Arial" pitchFamily="34" charset="-120"/>
+              </a:rPr>
+              <a:t>só a própria carteira</a:t>
+            </a:r>
+            <a:endParaRPr lang="en-US" sz="1500" dirty="0"/>
+          </a:p>
+        </p:txBody>
+      </p:sp>
+      <p:sp>
+        <p:nvSpPr>
+          <p:cNvPr id="30" name="Shape 27"/>
+          <p:cNvSpPr/>
+          <p:nvPr/>
+        </p:nvSpPr>
+        <p:spPr>
+          <a:xfrm>
+            <a:off x="3378708" y="4572000"/>
+            <a:ext cx="2601468" cy="1463040"/>
+          </a:xfrm>
+          <a:prstGeom prst="roundRect">
+            <a:avLst>
+              <a:gd name="adj" fmla="val 5000"/>
+            </a:avLst>
+          </a:prstGeom>
+          <a:solidFill>
+            <a:srgbClr val="FFFFFF"/>
+          </a:solidFill>
+          <a:ln w="9525">
+            <a:solidFill>
+              <a:srgbClr val="D8E0EC"/>
+            </a:solidFill>
+            <a:prstDash val="solid"/>
+          </a:ln>
+        </p:spPr>
+      </p:sp>
+      <p:sp>
+        <p:nvSpPr>
+          <p:cNvPr id="31" name="Text 28"/>
+          <p:cNvSpPr/>
+          <p:nvPr/>
+        </p:nvSpPr>
+        <p:spPr>
+          <a:xfrm>
+            <a:off x="3515868" y="4663440"/>
+            <a:ext cx="365760" cy="365760"/>
+          </a:xfrm>
+          <a:prstGeom prst="rect">
+            <a:avLst/>
+          </a:prstGeom>
+          <a:noFill/>
+          <a:ln/>
+        </p:spPr>
+        <p:txBody>
+          <a:bodyPr wrap="square" rtlCol="0" anchor="ctr"/>
+          <a:lstStyle/>
+          <a:p>
+            <a:pPr indent="0" marL="0">
+              <a:buNone/>
+            </a:pPr>
+            <a:r>
+              <a:rPr lang="en-US" sz="1400" b="1" dirty="0">
+                <a:solidFill>
+                  <a:srgbClr val="F7A23B"/>
+                </a:solidFill>
+                <a:latin typeface="Arial" pitchFamily="34" charset="0"/>
+                <a:ea typeface="Arial" pitchFamily="34" charset="-122"/>
+                <a:cs typeface="Arial" pitchFamily="34" charset="-120"/>
+              </a:rPr>
+              <a:t>B</a:t>
+            </a:r>
+            <a:endParaRPr lang="en-US" sz="1400" dirty="0"/>
+          </a:p>
+        </p:txBody>
+      </p:sp>
+      <p:sp>
+        <p:nvSpPr>
+          <p:cNvPr id="32" name="Text 29"/>
+          <p:cNvSpPr/>
+          <p:nvPr/>
+        </p:nvSpPr>
+        <p:spPr>
+          <a:xfrm>
+            <a:off x="3515868" y="5029200"/>
+            <a:ext cx="2327148" cy="914400"/>
+          </a:xfrm>
+          <a:prstGeom prst="rect">
+            <a:avLst/>
+          </a:prstGeom>
+          <a:noFill/>
+          <a:ln/>
+        </p:spPr>
+        <p:txBody>
+          <a:bodyPr wrap="square" rtlCol="0" anchor="t"/>
+          <a:lstStyle/>
+          <a:p>
+            <a:pPr indent="0" marL="0">
+              <a:buNone/>
+            </a:pPr>
+            <a:r>
+              <a:rPr lang="en-US" sz="1500" dirty="0">
+                <a:solidFill>
+                  <a:srgbClr val="1F2937"/>
+                </a:solidFill>
+                <a:latin typeface="Arial" pitchFamily="34" charset="0"/>
+                <a:ea typeface="Arial" pitchFamily="34" charset="-122"/>
+                <a:cs typeface="Arial" pitchFamily="34" charset="-120"/>
+              </a:rPr>
+              <a:t>todos os clientes</a:t>
+            </a:r>
+            <a:endParaRPr lang="en-US" sz="1500" dirty="0"/>
+          </a:p>
+        </p:txBody>
+      </p:sp>
+      <p:sp>
+        <p:nvSpPr>
+          <p:cNvPr id="33" name="Shape 30"/>
+          <p:cNvSpPr/>
+          <p:nvPr/>
+        </p:nvSpPr>
+        <p:spPr>
+          <a:xfrm>
+            <a:off x="6208776" y="4572000"/>
+            <a:ext cx="2601468" cy="1463040"/>
+          </a:xfrm>
+          <a:prstGeom prst="roundRect">
+            <a:avLst>
+              <a:gd name="adj" fmla="val 5000"/>
+            </a:avLst>
+          </a:prstGeom>
+          <a:solidFill>
+            <a:srgbClr val="FFFFFF"/>
+          </a:solidFill>
+          <a:ln w="9525">
+            <a:solidFill>
+              <a:srgbClr val="D8E0EC"/>
+            </a:solidFill>
+            <a:prstDash val="solid"/>
+          </a:ln>
+        </p:spPr>
+      </p:sp>
+      <p:sp>
+        <p:nvSpPr>
+          <p:cNvPr id="34" name="Text 31"/>
+          <p:cNvSpPr/>
+          <p:nvPr/>
+        </p:nvSpPr>
+        <p:spPr>
+          <a:xfrm>
+            <a:off x="6345936" y="4663440"/>
+            <a:ext cx="365760" cy="365760"/>
+          </a:xfrm>
+          <a:prstGeom prst="rect">
+            <a:avLst/>
+          </a:prstGeom>
+          <a:noFill/>
+          <a:ln/>
+        </p:spPr>
+        <p:txBody>
+          <a:bodyPr wrap="square" rtlCol="0" anchor="ctr"/>
+          <a:lstStyle/>
+          <a:p>
+            <a:pPr indent="0" marL="0">
+              <a:buNone/>
+            </a:pPr>
+            <a:r>
+              <a:rPr lang="en-US" sz="1400" b="1" dirty="0">
+                <a:solidFill>
+                  <a:srgbClr val="F7A23B"/>
+                </a:solidFill>
+                <a:latin typeface="Arial" pitchFamily="34" charset="0"/>
+                <a:ea typeface="Arial" pitchFamily="34" charset="-122"/>
+                <a:cs typeface="Arial" pitchFamily="34" charset="-120"/>
+              </a:rPr>
+              <a:t>C</a:t>
+            </a:r>
+            <a:endParaRPr lang="en-US" sz="1400" dirty="0"/>
+          </a:p>
+        </p:txBody>
+      </p:sp>
+      <p:sp>
+        <p:nvSpPr>
+          <p:cNvPr id="35" name="Text 32"/>
+          <p:cNvSpPr/>
+          <p:nvPr/>
+        </p:nvSpPr>
+        <p:spPr>
+          <a:xfrm>
+            <a:off x="6345936" y="5029200"/>
+            <a:ext cx="2327148" cy="914400"/>
+          </a:xfrm>
+          <a:prstGeom prst="rect">
+            <a:avLst/>
+          </a:prstGeom>
+          <a:noFill/>
+          <a:ln/>
+        </p:spPr>
+        <p:txBody>
+          <a:bodyPr wrap="square" rtlCol="0" anchor="t"/>
+          <a:lstStyle/>
+          <a:p>
+            <a:pPr indent="0" marL="0">
+              <a:buNone/>
+            </a:pPr>
+            <a:r>
+              <a:rPr lang="en-US" sz="1500" dirty="0">
+                <a:solidFill>
+                  <a:srgbClr val="1F2937"/>
+                </a:solidFill>
+                <a:latin typeface="Arial" pitchFamily="34" charset="0"/>
+                <a:ea typeface="Arial" pitchFamily="34" charset="-122"/>
+                <a:cs typeface="Arial" pitchFamily="34" charset="-120"/>
+              </a:rPr>
+              <a:t>só usinas</a:t>
+            </a:r>
+            <a:endParaRPr lang="en-US" sz="1500" dirty="0"/>
+          </a:p>
+        </p:txBody>
+      </p:sp>
+      <p:sp>
+        <p:nvSpPr>
+          <p:cNvPr id="36" name="Shape 33"/>
+          <p:cNvSpPr/>
+          <p:nvPr/>
+        </p:nvSpPr>
+        <p:spPr>
+          <a:xfrm>
+            <a:off x="9038844" y="4572000"/>
+            <a:ext cx="2601468" cy="1463040"/>
+          </a:xfrm>
+          <a:prstGeom prst="roundRect">
+            <a:avLst>
+              <a:gd name="adj" fmla="val 5000"/>
+            </a:avLst>
+          </a:prstGeom>
+          <a:solidFill>
+            <a:srgbClr val="FFFFFF"/>
+          </a:solidFill>
+          <a:ln w="9525">
+            <a:solidFill>
+              <a:srgbClr val="D8E0EC"/>
+            </a:solidFill>
+            <a:prstDash val="solid"/>
+          </a:ln>
+        </p:spPr>
+      </p:sp>
+      <p:sp>
+        <p:nvSpPr>
+          <p:cNvPr id="37" name="Text 34"/>
+          <p:cNvSpPr/>
+          <p:nvPr/>
+        </p:nvSpPr>
+        <p:spPr>
+          <a:xfrm>
+            <a:off x="9176004" y="4663440"/>
+            <a:ext cx="365760" cy="365760"/>
+          </a:xfrm>
+          <a:prstGeom prst="rect">
+            <a:avLst/>
+          </a:prstGeom>
+          <a:noFill/>
+          <a:ln/>
+        </p:spPr>
+        <p:txBody>
+          <a:bodyPr wrap="square" rtlCol="0" anchor="ctr"/>
+          <a:lstStyle/>
+          <a:p>
+            <a:pPr indent="0" marL="0">
+              <a:buNone/>
+            </a:pPr>
+            <a:r>
+              <a:rPr lang="en-US" sz="1400" b="1" dirty="0">
+                <a:solidFill>
+                  <a:srgbClr val="F7A23B"/>
+                </a:solidFill>
+                <a:latin typeface="Arial" pitchFamily="34" charset="0"/>
+                <a:ea typeface="Arial" pitchFamily="34" charset="-122"/>
+                <a:cs typeface="Arial" pitchFamily="34" charset="-120"/>
+              </a:rPr>
+              <a:t>D</a:t>
+            </a:r>
+            <a:endParaRPr lang="en-US" sz="1400" dirty="0"/>
+          </a:p>
+        </p:txBody>
+      </p:sp>
+      <p:sp>
+        <p:nvSpPr>
+          <p:cNvPr id="38" name="Text 35"/>
+          <p:cNvSpPr/>
+          <p:nvPr/>
+        </p:nvSpPr>
+        <p:spPr>
+          <a:xfrm>
+            <a:off x="9176004" y="5029200"/>
+            <a:ext cx="2327148" cy="914400"/>
+          </a:xfrm>
+          <a:prstGeom prst="rect">
+            <a:avLst/>
+          </a:prstGeom>
+          <a:noFill/>
+          <a:ln/>
+        </p:spPr>
+        <p:txBody>
+          <a:bodyPr wrap="square" rtlCol="0" anchor="t"/>
+          <a:lstStyle/>
+          <a:p>
+            <a:pPr indent="0" marL="0">
+              <a:buNone/>
+            </a:pPr>
+            <a:r>
+              <a:rPr lang="en-US" sz="1500" dirty="0">
+                <a:solidFill>
+                  <a:srgbClr val="1F2937"/>
+                </a:solidFill>
+                <a:latin typeface="Arial" pitchFamily="34" charset="0"/>
+                <a:ea typeface="Arial" pitchFamily="34" charset="-122"/>
+                <a:cs typeface="Arial" pitchFamily="34" charset="-120"/>
+              </a:rPr>
+              <a:t>só propostas</a:t>
+            </a:r>
+            <a:endParaRPr lang="en-US" sz="1500" dirty="0"/>
+          </a:p>
+        </p:txBody>
+      </p:sp>
+      <p:sp>
+        <p:nvSpPr>
+          <p:cNvPr id="25" name="Slide Number Placeholder 0"/>
+          <p:cNvSpPr>
+            <a:spLocks noGrp="1"/>
+          </p:cNvSpPr>
+          <p:nvPr>
+            <p:ph type="sldNum" sz="quarter" idx="4294967295"/>
+          </p:nvPr>
+        </p:nvSpPr>
+        <p:spPr>
+          <a:xfrm>
+            <a:off x="11292840" y="6556248"/>
+            <a:ext cx="548640" cy="256032"/>
+          </a:xfrm>
+          <a:prstGeom prst="rect">
+            <a:avLst/>
+          </a:prstGeom>
+          <a:extLst>
+            <a:ext uri="{C572A759-6A51-4108-AA02-DFA0A04FC94B}">
+              <ma14:wrappingTextBoxFlag xmlns:ma14="http://schemas.microsoft.com/office/mac/drawingml/2011/main" val="0"/>
+            </a:ext>
+          </a:extLst>
+        </p:spPr>
+        <p:txBody>
+          <a:bodyPr/>
+          <a:lstStyle>
+            <a:lvl1pPr>
+              <a:defRPr sz="900">
+                <a:solidFill>
+                  <a:srgbClr val="1B3A6B"/>
+                </a:solidFill>
+                <a:latin typeface="Arial"/>
+                <a:ea typeface="Arial"/>
+                <a:cs typeface="Arial"/>
+              </a:defRPr>
+            </a:lvl1pPr>
+          </a:lstStyle>
+          <a:p>
+            <a:pPr algn="r"/>
+            <a:fld id="{F7021451-1387-4CA6-816F-3879F97B5CBC}" type="slidenum">
+              <a:rPr b="1" lang="en-US"/>
+              <a:t>35</a:t>
+            </a:fld>
+            <a:endParaRPr lang="en-US"/>
+          </a:p>
+        </p:txBody>
+      </p:sp>
+    </p:spTree>
+  </p:cSld>
+  <p:clrMapOvr>
+    <a:masterClrMapping/>
+  </p:clrMapOvr>
+</p:sld>
+</file>
+
+<file path=ppt/slides/slide36.xml><?xml version="1.0" encoding="utf-8"?>
+<p:sld xmlns:a="http://schemas.openxmlformats.org/drawingml/2006/main" xmlns:r="http://schemas.openxmlformats.org/officeDocument/2006/relationships" xmlns:p="http://schemas.openxmlformats.org/presentationml/2006/main">
+  <p:cSld name="Slide 36">
+    <p:bg>
+      <p:bgPr>
+        <a:solidFill>
+          <a:srgbClr val="EEF3FA"/>
+        </a:solidFill>
+      </p:bgPr>
+    </p:bg>
+    <p:spTree>
+      <p:nvGrpSpPr>
+        <p:cNvPr id="1" name=""/>
+        <p:cNvGrpSpPr/>
+        <p:nvPr/>
+      </p:nvGrpSpPr>
+      <p:grpSpPr>
+        <a:xfrm>
+          <a:off x="0" y="0"/>
+          <a:ext cx="0" cy="0"/>
+          <a:chOff x="0" y="0"/>
+          <a:chExt cx="0" cy="0"/>
+        </a:xfrm>
+      </p:grpSpPr>
+      <p:sp>
+        <p:nvSpPr>
+          <p:cNvPr id="2" name="Shape 0"/>
+          <p:cNvSpPr/>
+          <p:nvPr/>
+        </p:nvSpPr>
+        <p:spPr>
+          <a:xfrm>
+            <a:off x="0" y="6510528"/>
+            <a:ext cx="12191695" cy="347472"/>
+          </a:xfrm>
+          <a:prstGeom prst="rect">
+            <a:avLst/>
+          </a:prstGeom>
+          <a:solidFill>
+            <a:srgbClr val="FFFFFF"/>
+          </a:solidFill>
+          <a:ln w="6350">
+            <a:solidFill>
+              <a:srgbClr val="D8E0EC"/>
+            </a:solidFill>
+            <a:prstDash val="solid"/>
+          </a:ln>
+        </p:spPr>
+      </p:sp>
+      <p:pic>
+        <p:nvPicPr>
+          <p:cNvPr id="3" name="Image 0" descr="/www/wwwroot/rexar/gdsolar/docs/curso/slides/assets/logo-gdsolar.png">    </p:cNvPr>
+          <p:cNvPicPr>
+            <a:picLocks noChangeAspect="1"/>
+          </p:cNvPicPr>
+          <p:nvPr/>
+        </p:nvPicPr>
+        <p:blipFill>
+          <a:blip r:embed="rId1"/>
+          <a:stretch>
+            <a:fillRect/>
+          </a:stretch>
+        </p:blipFill>
+        <p:spPr>
+          <a:xfrm>
+            <a:off x="548640" y="6547104"/>
+            <a:ext cx="274320" cy="274320"/>
+          </a:xfrm>
+          <a:prstGeom prst="rect">
+            <a:avLst/>
+          </a:prstGeom>
+        </p:spPr>
+      </p:pic>
+      <p:sp>
+        <p:nvSpPr>
+          <p:cNvPr id="4" name="Text 1"/>
+          <p:cNvSpPr/>
+          <p:nvPr/>
+        </p:nvSpPr>
+        <p:spPr>
+          <a:xfrm>
+            <a:off x="886968" y="6528816"/>
+            <a:ext cx="6400800" cy="310896"/>
+          </a:xfrm>
+          <a:prstGeom prst="rect">
+            <a:avLst/>
+          </a:prstGeom>
+          <a:noFill/>
+          <a:ln/>
+        </p:spPr>
+        <p:txBody>
+          <a:bodyPr wrap="square" rtlCol="0" anchor="ctr"/>
+          <a:lstStyle/>
+          <a:p>
+            <a:pPr indent="0" marL="0">
+              <a:buNone/>
+            </a:pPr>
+            <a:r>
+              <a:rPr lang="en-US" sz="900" b="1" dirty="0">
+                <a:solidFill>
+                  <a:srgbClr val="64748B"/>
+                </a:solidFill>
+                <a:latin typeface="Arial" pitchFamily="34" charset="0"/>
+                <a:ea typeface="Arial" pitchFamily="34" charset="-122"/>
+                <a:cs typeface="Arial" pitchFamily="34" charset="-120"/>
+              </a:rPr>
+              <a:t>GD Solar  ·  Formação em Energia por Assinatura</a:t>
+            </a:r>
+            <a:endParaRPr lang="en-US" sz="900" dirty="0"/>
+          </a:p>
+        </p:txBody>
+      </p:sp>
+      <p:sp>
+        <p:nvSpPr>
+          <p:cNvPr id="5" name="Text 2"/>
+          <p:cNvSpPr/>
+          <p:nvPr/>
+        </p:nvSpPr>
+        <p:spPr>
+          <a:xfrm>
+            <a:off x="7132320" y="6528816"/>
+            <a:ext cx="4023360" cy="310896"/>
+          </a:xfrm>
+          <a:prstGeom prst="rect">
+            <a:avLst/>
+          </a:prstGeom>
+          <a:noFill/>
+          <a:ln/>
+        </p:spPr>
+        <p:txBody>
+          <a:bodyPr wrap="square" rtlCol="0" anchor="ctr"/>
+          <a:lstStyle/>
+          <a:p>
+            <a:pPr algn="r" indent="0" marL="0">
+              <a:buNone/>
+            </a:pPr>
+            <a:r>
+              <a:rPr lang="en-US" sz="900" dirty="0">
+                <a:solidFill>
+                  <a:srgbClr val="64748B"/>
+                </a:solidFill>
+                <a:latin typeface="Arial" pitchFamily="34" charset="0"/>
+                <a:ea typeface="Arial" pitchFamily="34" charset="-122"/>
+                <a:cs typeface="Arial" pitchFamily="34" charset="-120"/>
+              </a:rPr>
+              <a:t>M5 · Teste rápido</a:t>
+            </a:r>
+            <a:endParaRPr lang="en-US" sz="900" dirty="0"/>
+          </a:p>
+        </p:txBody>
+      </p:sp>
+      <p:sp>
+        <p:nvSpPr>
+          <p:cNvPr id="6" name="Shape 3"/>
+          <p:cNvSpPr/>
+          <p:nvPr/>
+        </p:nvSpPr>
+        <p:spPr>
+          <a:xfrm>
+            <a:off x="548640" y="384048"/>
+            <a:ext cx="82296" cy="658368"/>
+          </a:xfrm>
+          <a:prstGeom prst="rect">
+            <a:avLst/>
+          </a:prstGeom>
+          <a:solidFill>
+            <a:srgbClr val="F7A23B"/>
+          </a:solidFill>
+          <a:ln/>
+        </p:spPr>
+      </p:sp>
+      <p:sp>
+        <p:nvSpPr>
+          <p:cNvPr id="7" name="Text 4"/>
+          <p:cNvSpPr/>
+          <p:nvPr/>
+        </p:nvSpPr>
+        <p:spPr>
+          <a:xfrm>
+            <a:off x="777240" y="292608"/>
+            <a:ext cx="10972800" cy="274320"/>
+          </a:xfrm>
+          <a:prstGeom prst="rect">
+            <a:avLst/>
+          </a:prstGeom>
+          <a:noFill/>
+          <a:ln/>
+        </p:spPr>
+        <p:txBody>
+          <a:bodyPr wrap="square" rtlCol="0" anchor="ctr"/>
+          <a:lstStyle/>
+          <a:p>
+            <a:pPr indent="0" marL="0">
+              <a:buNone/>
+            </a:pPr>
+            <a:r>
+              <a:rPr lang="en-US" sz="1000" b="1" spc="100" kern="0" dirty="0">
+                <a:solidFill>
+                  <a:srgbClr val="F7A23B"/>
+                </a:solidFill>
+                <a:latin typeface="Arial" pitchFamily="34" charset="0"/>
+                <a:ea typeface="Arial" pitchFamily="34" charset="-122"/>
+                <a:cs typeface="Arial" pitchFamily="34" charset="-120"/>
+              </a:rPr>
+              <a:t>CONFIRA SUAS RESPOSTAS</a:t>
+            </a:r>
+            <a:endParaRPr lang="en-US" sz="1000" dirty="0"/>
+          </a:p>
+        </p:txBody>
+      </p:sp>
+      <p:sp>
+        <p:nvSpPr>
+          <p:cNvPr id="8" name="Text 5"/>
+          <p:cNvSpPr/>
+          <p:nvPr/>
+        </p:nvSpPr>
+        <p:spPr>
+          <a:xfrm>
+            <a:off x="777240" y="530352"/>
+            <a:ext cx="10881360" cy="566928"/>
+          </a:xfrm>
+          <a:prstGeom prst="rect">
+            <a:avLst/>
+          </a:prstGeom>
+          <a:noFill/>
+          <a:ln/>
+        </p:spPr>
+        <p:txBody>
+          <a:bodyPr wrap="square" rtlCol="0" anchor="ctr">
+            <a:normAutofit/>
+          </a:bodyPr>
+          <a:lstStyle/>
+          <a:p>
+            <a:pPr indent="0" marL="0">
+              <a:buNone/>
+            </a:pPr>
+            <a:r>
+              <a:rPr lang="en-US" sz="2600" b="1" dirty="0">
+                <a:solidFill>
+                  <a:srgbClr val="1B3A6B"/>
+                </a:solidFill>
+                <a:latin typeface="Arial" pitchFamily="34" charset="0"/>
+                <a:ea typeface="Arial" pitchFamily="34" charset="-122"/>
+                <a:cs typeface="Arial" pitchFamily="34" charset="-120"/>
+              </a:rPr>
+              <a:t>Gabarito do teste rápido</a:t>
+            </a:r>
+            <a:endParaRPr lang="en-US" sz="2600" dirty="0"/>
+          </a:p>
+        </p:txBody>
+      </p:sp>
+      <p:sp>
+        <p:nvSpPr>
+          <p:cNvPr id="9" name="Shape 6"/>
+          <p:cNvSpPr/>
+          <p:nvPr/>
+        </p:nvSpPr>
+        <p:spPr>
+          <a:xfrm>
+            <a:off x="548640" y="1325880"/>
+            <a:ext cx="3544824" cy="2331720"/>
+          </a:xfrm>
+          <a:prstGeom prst="roundRect">
+            <a:avLst>
+              <a:gd name="adj" fmla="val 3137"/>
+            </a:avLst>
+          </a:prstGeom>
+          <a:solidFill>
+            <a:srgbClr val="FFFFFF"/>
+          </a:solidFill>
+          <a:ln w="9525">
+            <a:solidFill>
+              <a:srgbClr val="D8E0EC"/>
+            </a:solidFill>
+            <a:prstDash val="solid"/>
+          </a:ln>
+          <a:effectLst>
+            <a:outerShdw sx="100000" sy="100000" kx="0" ky="0" algn="bl" rotWithShape="0" blurRad="38100" dist="12700" dir="5400000">
+              <a:srgbClr val="000000">
+                <a:alpha val="8000"/>
+              </a:srgbClr>
+            </a:outerShdw>
+          </a:effectLst>
+        </p:spPr>
+      </p:sp>
+      <p:sp>
+        <p:nvSpPr>
+          <p:cNvPr id="10" name="Shape 7"/>
+          <p:cNvSpPr/>
+          <p:nvPr/>
+        </p:nvSpPr>
+        <p:spPr>
+          <a:xfrm>
+            <a:off x="731520" y="1508760"/>
+            <a:ext cx="457200" cy="457200"/>
+          </a:xfrm>
+          <a:prstGeom prst="ellipse">
+            <a:avLst/>
+          </a:prstGeom>
+          <a:solidFill>
+            <a:srgbClr val="1B3A6B"/>
+          </a:solidFill>
+          <a:ln/>
+        </p:spPr>
+      </p:sp>
+      <p:sp>
+        <p:nvSpPr>
+          <p:cNvPr id="11" name="Text 8"/>
+          <p:cNvSpPr/>
+          <p:nvPr/>
+        </p:nvSpPr>
+        <p:spPr>
+          <a:xfrm>
+            <a:off x="731520" y="1508760"/>
+            <a:ext cx="457200" cy="457200"/>
+          </a:xfrm>
+          <a:prstGeom prst="rect">
+            <a:avLst/>
+          </a:prstGeom>
+          <a:noFill/>
+          <a:ln/>
+        </p:spPr>
+        <p:txBody>
+          <a:bodyPr wrap="square" rtlCol="0" anchor="ctr"/>
+          <a:lstStyle/>
+          <a:p>
+            <a:pPr algn="ctr" indent="0" marL="0">
+              <a:buNone/>
+            </a:pPr>
+            <a:r>
+              <a:rPr lang="en-US" sz="1400" b="1" dirty="0">
+                <a:solidFill>
+                  <a:srgbClr val="FFFFFF"/>
+                </a:solidFill>
+                <a:latin typeface="Arial" pitchFamily="34" charset="0"/>
+                <a:ea typeface="Arial" pitchFamily="34" charset="-122"/>
+                <a:cs typeface="Arial" pitchFamily="34" charset="-120"/>
+              </a:rPr>
+              <a:t>1</a:t>
+            </a:r>
+            <a:endParaRPr lang="en-US" sz="1400" dirty="0"/>
+          </a:p>
+        </p:txBody>
+      </p:sp>
+      <p:sp>
+        <p:nvSpPr>
+          <p:cNvPr id="12" name="Text 9"/>
+          <p:cNvSpPr/>
+          <p:nvPr/>
+        </p:nvSpPr>
+        <p:spPr>
+          <a:xfrm>
+            <a:off x="1325880" y="1435608"/>
+            <a:ext cx="2630424" cy="2112264"/>
+          </a:xfrm>
+          <a:prstGeom prst="rect">
+            <a:avLst/>
+          </a:prstGeom>
+          <a:noFill/>
+          <a:ln/>
+        </p:spPr>
+        <p:txBody>
+          <a:bodyPr wrap="square" rtlCol="0" anchor="ctr">
+            <a:normAutofit/>
+          </a:bodyPr>
+          <a:lstStyle/>
+          <a:p>
+            <a:pPr indent="0" marL="0">
+              <a:buNone/>
+            </a:pPr>
+            <a:r>
+              <a:rPr lang="en-US" sz="1800" dirty="0">
+                <a:solidFill>
+                  <a:srgbClr val="1F2937"/>
+                </a:solidFill>
+                <a:latin typeface="Arial" pitchFamily="34" charset="0"/>
+                <a:ea typeface="Arial" pitchFamily="34" charset="-122"/>
+                <a:cs typeface="Arial" pitchFamily="34" charset="-120"/>
+              </a:rPr>
+              <a:t>B) Comércio/serviço do grupo B com consumo alto e estável</a:t>
+            </a:r>
+            <a:endParaRPr lang="en-US" sz="1800" dirty="0"/>
+          </a:p>
+        </p:txBody>
+      </p:sp>
+      <p:sp>
+        <p:nvSpPr>
+          <p:cNvPr id="13" name="Shape 10"/>
+          <p:cNvSpPr/>
+          <p:nvPr/>
+        </p:nvSpPr>
+        <p:spPr>
+          <a:xfrm>
+            <a:off x="4322064" y="1325880"/>
+            <a:ext cx="3544824" cy="2331720"/>
+          </a:xfrm>
+          <a:prstGeom prst="roundRect">
+            <a:avLst>
+              <a:gd name="adj" fmla="val 3137"/>
+            </a:avLst>
+          </a:prstGeom>
+          <a:solidFill>
+            <a:srgbClr val="FFFFFF"/>
+          </a:solidFill>
+          <a:ln w="9525">
+            <a:solidFill>
+              <a:srgbClr val="D8E0EC"/>
+            </a:solidFill>
+            <a:prstDash val="solid"/>
+          </a:ln>
+          <a:effectLst>
+            <a:outerShdw sx="100000" sy="100000" kx="0" ky="0" algn="bl" rotWithShape="0" blurRad="38100" dist="12700" dir="5400000">
+              <a:srgbClr val="000000">
+                <a:alpha val="8000"/>
+              </a:srgbClr>
+            </a:outerShdw>
+          </a:effectLst>
+        </p:spPr>
+      </p:sp>
+      <p:sp>
+        <p:nvSpPr>
+          <p:cNvPr id="14" name="Shape 11"/>
+          <p:cNvSpPr/>
+          <p:nvPr/>
+        </p:nvSpPr>
+        <p:spPr>
+          <a:xfrm>
+            <a:off x="4504944" y="1508760"/>
+            <a:ext cx="457200" cy="457200"/>
+          </a:xfrm>
+          <a:prstGeom prst="ellipse">
+            <a:avLst/>
+          </a:prstGeom>
+          <a:solidFill>
+            <a:srgbClr val="F7A23B"/>
+          </a:solidFill>
+          <a:ln/>
+        </p:spPr>
+      </p:sp>
+      <p:sp>
+        <p:nvSpPr>
+          <p:cNvPr id="15" name="Text 12"/>
+          <p:cNvSpPr/>
+          <p:nvPr/>
+        </p:nvSpPr>
+        <p:spPr>
+          <a:xfrm>
+            <a:off x="4504944" y="1508760"/>
+            <a:ext cx="457200" cy="457200"/>
+          </a:xfrm>
+          <a:prstGeom prst="rect">
+            <a:avLst/>
+          </a:prstGeom>
+          <a:noFill/>
+          <a:ln/>
+        </p:spPr>
+        <p:txBody>
+          <a:bodyPr wrap="square" rtlCol="0" anchor="ctr"/>
+          <a:lstStyle/>
+          <a:p>
+            <a:pPr algn="ctr" indent="0" marL="0">
+              <a:buNone/>
+            </a:pPr>
+            <a:r>
+              <a:rPr lang="en-US" sz="1400" b="1" dirty="0">
+                <a:solidFill>
+                  <a:srgbClr val="FFFFFF"/>
+                </a:solidFill>
+                <a:latin typeface="Arial" pitchFamily="34" charset="0"/>
+                <a:ea typeface="Arial" pitchFamily="34" charset="-122"/>
+                <a:cs typeface="Arial" pitchFamily="34" charset="-120"/>
+              </a:rPr>
+              <a:t>2</a:t>
+            </a:r>
+            <a:endParaRPr lang="en-US" sz="1400" dirty="0"/>
+          </a:p>
+        </p:txBody>
+      </p:sp>
+      <p:sp>
+        <p:nvSpPr>
+          <p:cNvPr id="16" name="Text 13"/>
+          <p:cNvSpPr/>
+          <p:nvPr/>
+        </p:nvSpPr>
+        <p:spPr>
+          <a:xfrm>
+            <a:off x="5099304" y="1435608"/>
+            <a:ext cx="2630424" cy="2112264"/>
+          </a:xfrm>
+          <a:prstGeom prst="rect">
+            <a:avLst/>
+          </a:prstGeom>
+          <a:noFill/>
+          <a:ln/>
+        </p:spPr>
+        <p:txBody>
+          <a:bodyPr wrap="square" rtlCol="0" anchor="ctr">
+            <a:normAutofit/>
+          </a:bodyPr>
+          <a:lstStyle/>
+          <a:p>
+            <a:pPr indent="0" marL="0">
+              <a:buNone/>
+            </a:pPr>
+            <a:r>
+              <a:rPr lang="en-US" sz="1800" dirty="0">
+                <a:solidFill>
+                  <a:srgbClr val="1F2937"/>
+                </a:solidFill>
+                <a:latin typeface="Arial" pitchFamily="34" charset="0"/>
+                <a:ea typeface="Arial" pitchFamily="34" charset="-122"/>
+                <a:cs typeface="Arial" pitchFamily="34" charset="-120"/>
+              </a:rPr>
+              <a:t>A) leads que não compraram sistema por falta de telhado ou capital</a:t>
+            </a:r>
+            <a:endParaRPr lang="en-US" sz="1800" dirty="0"/>
+          </a:p>
+        </p:txBody>
+      </p:sp>
+      <p:sp>
+        <p:nvSpPr>
+          <p:cNvPr id="17" name="Shape 14"/>
+          <p:cNvSpPr/>
+          <p:nvPr/>
+        </p:nvSpPr>
+        <p:spPr>
+          <a:xfrm>
+            <a:off x="8095488" y="1325880"/>
+            <a:ext cx="3544824" cy="2331720"/>
+          </a:xfrm>
+          <a:prstGeom prst="roundRect">
+            <a:avLst>
+              <a:gd name="adj" fmla="val 3137"/>
+            </a:avLst>
+          </a:prstGeom>
+          <a:solidFill>
+            <a:srgbClr val="FFFFFF"/>
+          </a:solidFill>
+          <a:ln w="9525">
+            <a:solidFill>
+              <a:srgbClr val="D8E0EC"/>
+            </a:solidFill>
+            <a:prstDash val="solid"/>
+          </a:ln>
+          <a:effectLst>
+            <a:outerShdw sx="100000" sy="100000" kx="0" ky="0" algn="bl" rotWithShape="0" blurRad="38100" dist="12700" dir="5400000">
+              <a:srgbClr val="000000">
+                <a:alpha val="8000"/>
+              </a:srgbClr>
+            </a:outerShdw>
+          </a:effectLst>
+        </p:spPr>
+      </p:sp>
+      <p:sp>
+        <p:nvSpPr>
+          <p:cNvPr id="18" name="Shape 15"/>
+          <p:cNvSpPr/>
+          <p:nvPr/>
+        </p:nvSpPr>
+        <p:spPr>
+          <a:xfrm>
+            <a:off x="8278368" y="1508760"/>
+            <a:ext cx="457200" cy="457200"/>
+          </a:xfrm>
+          <a:prstGeom prst="ellipse">
+            <a:avLst/>
+          </a:prstGeom>
+          <a:solidFill>
+            <a:srgbClr val="1B3A6B"/>
+          </a:solidFill>
+          <a:ln/>
+        </p:spPr>
+      </p:sp>
+      <p:sp>
+        <p:nvSpPr>
+          <p:cNvPr id="19" name="Text 16"/>
+          <p:cNvSpPr/>
+          <p:nvPr/>
+        </p:nvSpPr>
+        <p:spPr>
+          <a:xfrm>
+            <a:off x="8278368" y="1508760"/>
+            <a:ext cx="457200" cy="457200"/>
+          </a:xfrm>
+          <a:prstGeom prst="rect">
+            <a:avLst/>
+          </a:prstGeom>
+          <a:noFill/>
+          <a:ln/>
+        </p:spPr>
+        <p:txBody>
+          <a:bodyPr wrap="square" rtlCol="0" anchor="ctr"/>
+          <a:lstStyle/>
+          <a:p>
+            <a:pPr algn="ctr" indent="0" marL="0">
+              <a:buNone/>
+            </a:pPr>
+            <a:r>
+              <a:rPr lang="en-US" sz="1400" b="1" dirty="0">
+                <a:solidFill>
+                  <a:srgbClr val="FFFFFF"/>
+                </a:solidFill>
+                <a:latin typeface="Arial" pitchFamily="34" charset="0"/>
+                <a:ea typeface="Arial" pitchFamily="34" charset="-122"/>
+                <a:cs typeface="Arial" pitchFamily="34" charset="-120"/>
+              </a:rPr>
+              <a:t>3</a:t>
+            </a:r>
+            <a:endParaRPr lang="en-US" sz="1400" dirty="0"/>
+          </a:p>
+        </p:txBody>
+      </p:sp>
+      <p:sp>
+        <p:nvSpPr>
+          <p:cNvPr id="20" name="Text 17"/>
+          <p:cNvSpPr/>
+          <p:nvPr/>
+        </p:nvSpPr>
+        <p:spPr>
+          <a:xfrm>
+            <a:off x="8872728" y="1435608"/>
+            <a:ext cx="2630424" cy="2112264"/>
+          </a:xfrm>
+          <a:prstGeom prst="rect">
+            <a:avLst/>
+          </a:prstGeom>
+          <a:noFill/>
+          <a:ln/>
+        </p:spPr>
+        <p:txBody>
+          <a:bodyPr wrap="square" rtlCol="0" anchor="ctr">
+            <a:normAutofit/>
+          </a:bodyPr>
+          <a:lstStyle/>
+          <a:p>
+            <a:pPr indent="0" marL="0">
+              <a:buNone/>
+            </a:pPr>
+            <a:r>
+              <a:rPr lang="en-US" sz="1800" dirty="0">
+                <a:solidFill>
+                  <a:srgbClr val="1F2937"/>
+                </a:solidFill>
+                <a:latin typeface="Arial" pitchFamily="34" charset="0"/>
+                <a:ea typeface="Arial" pitchFamily="34" charset="-122"/>
+                <a:cs typeface="Arial" pitchFamily="34" charset="-120"/>
+              </a:rPr>
+              <a:t>A) a conta total, incluindo o que continua sendo pago à distribuidora</a:t>
+            </a:r>
+            <a:endParaRPr lang="en-US" sz="1800" dirty="0"/>
+          </a:p>
+        </p:txBody>
+      </p:sp>
+      <p:sp>
+        <p:nvSpPr>
+          <p:cNvPr id="21" name="Shape 18"/>
+          <p:cNvSpPr/>
+          <p:nvPr/>
+        </p:nvSpPr>
+        <p:spPr>
+          <a:xfrm>
+            <a:off x="548640" y="3886200"/>
+            <a:ext cx="3544824" cy="2331720"/>
+          </a:xfrm>
+          <a:prstGeom prst="roundRect">
+            <a:avLst>
+              <a:gd name="adj" fmla="val 3137"/>
+            </a:avLst>
+          </a:prstGeom>
+          <a:solidFill>
+            <a:srgbClr val="FFFFFF"/>
+          </a:solidFill>
+          <a:ln w="9525">
+            <a:solidFill>
+              <a:srgbClr val="D8E0EC"/>
+            </a:solidFill>
+            <a:prstDash val="solid"/>
+          </a:ln>
+          <a:effectLst>
+            <a:outerShdw sx="100000" sy="100000" kx="0" ky="0" algn="bl" rotWithShape="0" blurRad="38100" dist="12700" dir="5400000">
+              <a:srgbClr val="000000">
+                <a:alpha val="8000"/>
+              </a:srgbClr>
+            </a:outerShdw>
+          </a:effectLst>
+        </p:spPr>
+      </p:sp>
+      <p:sp>
+        <p:nvSpPr>
+          <p:cNvPr id="22" name="Shape 19"/>
+          <p:cNvSpPr/>
+          <p:nvPr/>
+        </p:nvSpPr>
+        <p:spPr>
+          <a:xfrm>
+            <a:off x="731520" y="4069080"/>
+            <a:ext cx="457200" cy="457200"/>
+          </a:xfrm>
+          <a:prstGeom prst="ellipse">
+            <a:avLst/>
+          </a:prstGeom>
+          <a:solidFill>
+            <a:srgbClr val="F7A23B"/>
+          </a:solidFill>
+          <a:ln/>
+        </p:spPr>
+      </p:sp>
+      <p:sp>
+        <p:nvSpPr>
+          <p:cNvPr id="23" name="Text 20"/>
+          <p:cNvSpPr/>
+          <p:nvPr/>
+        </p:nvSpPr>
+        <p:spPr>
+          <a:xfrm>
+            <a:off x="731520" y="4069080"/>
+            <a:ext cx="457200" cy="457200"/>
+          </a:xfrm>
+          <a:prstGeom prst="rect">
+            <a:avLst/>
+          </a:prstGeom>
+          <a:noFill/>
+          <a:ln/>
+        </p:spPr>
+        <p:txBody>
+          <a:bodyPr wrap="square" rtlCol="0" anchor="ctr"/>
+          <a:lstStyle/>
+          <a:p>
+            <a:pPr algn="ctr" indent="0" marL="0">
+              <a:buNone/>
+            </a:pPr>
+            <a:r>
+              <a:rPr lang="en-US" sz="1400" b="1" dirty="0">
+                <a:solidFill>
+                  <a:srgbClr val="FFFFFF"/>
+                </a:solidFill>
+                <a:latin typeface="Arial" pitchFamily="34" charset="0"/>
+                <a:ea typeface="Arial" pitchFamily="34" charset="-122"/>
+                <a:cs typeface="Arial" pitchFamily="34" charset="-120"/>
+              </a:rPr>
+              <a:t>4</a:t>
+            </a:r>
+            <a:endParaRPr lang="en-US" sz="1400" dirty="0"/>
+          </a:p>
+        </p:txBody>
+      </p:sp>
+      <p:sp>
+        <p:nvSpPr>
+          <p:cNvPr id="24" name="Text 21"/>
+          <p:cNvSpPr/>
+          <p:nvPr/>
+        </p:nvSpPr>
+        <p:spPr>
+          <a:xfrm>
+            <a:off x="1325880" y="3995928"/>
+            <a:ext cx="2630424" cy="2112264"/>
+          </a:xfrm>
+          <a:prstGeom prst="rect">
+            <a:avLst/>
+          </a:prstGeom>
+          <a:noFill/>
+          <a:ln/>
+        </p:spPr>
+        <p:txBody>
+          <a:bodyPr wrap="square" rtlCol="0" anchor="ctr">
+            <a:normAutofit/>
+          </a:bodyPr>
+          <a:lstStyle/>
+          <a:p>
+            <a:pPr indent="0" marL="0">
+              <a:buNone/>
+            </a:pPr>
+            <a:r>
+              <a:rPr lang="en-US" sz="1800" dirty="0">
+                <a:solidFill>
+                  <a:srgbClr val="1F2937"/>
+                </a:solidFill>
+                <a:latin typeface="Arial" pitchFamily="34" charset="0"/>
+                <a:ea typeface="Arial" pitchFamily="34" charset="-122"/>
+                <a:cs typeface="Arial" pitchFamily="34" charset="-120"/>
+              </a:rPr>
+              <a:t>B) não, o cliente continua na distribuidora e recebe créditos</a:t>
+            </a:r>
+            <a:endParaRPr lang="en-US" sz="1800" dirty="0"/>
+          </a:p>
+        </p:txBody>
+      </p:sp>
+      <p:sp>
+        <p:nvSpPr>
+          <p:cNvPr id="25" name="Shape 22"/>
+          <p:cNvSpPr/>
+          <p:nvPr/>
+        </p:nvSpPr>
+        <p:spPr>
+          <a:xfrm>
+            <a:off x="4322064" y="3886200"/>
+            <a:ext cx="3544824" cy="2331720"/>
+          </a:xfrm>
+          <a:prstGeom prst="roundRect">
+            <a:avLst>
+              <a:gd name="adj" fmla="val 3137"/>
+            </a:avLst>
+          </a:prstGeom>
+          <a:solidFill>
+            <a:srgbClr val="FFFFFF"/>
+          </a:solidFill>
+          <a:ln w="9525">
+            <a:solidFill>
+              <a:srgbClr val="D8E0EC"/>
+            </a:solidFill>
+            <a:prstDash val="solid"/>
+          </a:ln>
+          <a:effectLst>
+            <a:outerShdw sx="100000" sy="100000" kx="0" ky="0" algn="bl" rotWithShape="0" blurRad="38100" dist="12700" dir="5400000">
+              <a:srgbClr val="000000">
+                <a:alpha val="8000"/>
+              </a:srgbClr>
+            </a:outerShdw>
+          </a:effectLst>
+        </p:spPr>
+      </p:sp>
+      <p:sp>
+        <p:nvSpPr>
+          <p:cNvPr id="26" name="Shape 23"/>
+          <p:cNvSpPr/>
+          <p:nvPr/>
+        </p:nvSpPr>
+        <p:spPr>
+          <a:xfrm>
+            <a:off x="4504944" y="4069080"/>
+            <a:ext cx="457200" cy="457200"/>
+          </a:xfrm>
+          <a:prstGeom prst="ellipse">
+            <a:avLst/>
+          </a:prstGeom>
+          <a:solidFill>
+            <a:srgbClr val="1B3A6B"/>
+          </a:solidFill>
+          <a:ln/>
+        </p:spPr>
+      </p:sp>
+      <p:sp>
+        <p:nvSpPr>
+          <p:cNvPr id="27" name="Text 24"/>
+          <p:cNvSpPr/>
+          <p:nvPr/>
+        </p:nvSpPr>
+        <p:spPr>
+          <a:xfrm>
+            <a:off x="4504944" y="4069080"/>
+            <a:ext cx="457200" cy="457200"/>
+          </a:xfrm>
+          <a:prstGeom prst="rect">
+            <a:avLst/>
+          </a:prstGeom>
+          <a:noFill/>
+          <a:ln/>
+        </p:spPr>
+        <p:txBody>
+          <a:bodyPr wrap="square" rtlCol="0" anchor="ctr"/>
+          <a:lstStyle/>
+          <a:p>
+            <a:pPr algn="ctr" indent="0" marL="0">
+              <a:buNone/>
+            </a:pPr>
+            <a:r>
+              <a:rPr lang="en-US" sz="1400" b="1" dirty="0">
+                <a:solidFill>
+                  <a:srgbClr val="FFFFFF"/>
+                </a:solidFill>
+                <a:latin typeface="Arial" pitchFamily="34" charset="0"/>
+                <a:ea typeface="Arial" pitchFamily="34" charset="-122"/>
+                <a:cs typeface="Arial" pitchFamily="34" charset="-120"/>
+              </a:rPr>
+              <a:t>5</a:t>
+            </a:r>
+            <a:endParaRPr lang="en-US" sz="1400" dirty="0"/>
+          </a:p>
+        </p:txBody>
+      </p:sp>
+      <p:sp>
+        <p:nvSpPr>
+          <p:cNvPr id="28" name="Text 25"/>
+          <p:cNvSpPr/>
+          <p:nvPr/>
+        </p:nvSpPr>
+        <p:spPr>
+          <a:xfrm>
+            <a:off x="5099304" y="3995928"/>
+            <a:ext cx="2630424" cy="2112264"/>
+          </a:xfrm>
+          <a:prstGeom prst="rect">
+            <a:avLst/>
+          </a:prstGeom>
+          <a:noFill/>
+          <a:ln/>
+        </p:spPr>
+        <p:txBody>
+          <a:bodyPr wrap="square" rtlCol="0" anchor="ctr">
+            <a:normAutofit/>
+          </a:bodyPr>
+          <a:lstStyle/>
+          <a:p>
+            <a:pPr indent="0" marL="0">
+              <a:buNone/>
+            </a:pPr>
+            <a:r>
+              <a:rPr lang="en-US" sz="1800" dirty="0">
+                <a:solidFill>
+                  <a:srgbClr val="1F2937"/>
+                </a:solidFill>
+                <a:latin typeface="Arial" pitchFamily="34" charset="0"/>
+                <a:ea typeface="Arial" pitchFamily="34" charset="-122"/>
+                <a:cs typeface="Arial" pitchFamily="34" charset="-120"/>
+              </a:rPr>
+              <a:t>B) cliente ativo e pagando</a:t>
+            </a:r>
+            <a:endParaRPr lang="en-US" sz="1800" dirty="0"/>
+          </a:p>
+        </p:txBody>
+      </p:sp>
+      <p:sp>
+        <p:nvSpPr>
+          <p:cNvPr id="29" name="Shape 26"/>
+          <p:cNvSpPr/>
+          <p:nvPr/>
+        </p:nvSpPr>
+        <p:spPr>
+          <a:xfrm>
+            <a:off x="8095488" y="3886200"/>
+            <a:ext cx="3544824" cy="2331720"/>
+          </a:xfrm>
+          <a:prstGeom prst="roundRect">
+            <a:avLst>
+              <a:gd name="adj" fmla="val 3137"/>
+            </a:avLst>
+          </a:prstGeom>
+          <a:solidFill>
+            <a:srgbClr val="FFFFFF"/>
+          </a:solidFill>
+          <a:ln w="9525">
+            <a:solidFill>
+              <a:srgbClr val="D8E0EC"/>
+            </a:solidFill>
+            <a:prstDash val="solid"/>
+          </a:ln>
+          <a:effectLst>
+            <a:outerShdw sx="100000" sy="100000" kx="0" ky="0" algn="bl" rotWithShape="0" blurRad="38100" dist="12700" dir="5400000">
+              <a:srgbClr val="000000">
+                <a:alpha val="8000"/>
+              </a:srgbClr>
+            </a:outerShdw>
+          </a:effectLst>
+        </p:spPr>
+      </p:sp>
+      <p:sp>
+        <p:nvSpPr>
+          <p:cNvPr id="30" name="Shape 27"/>
+          <p:cNvSpPr/>
+          <p:nvPr/>
+        </p:nvSpPr>
+        <p:spPr>
+          <a:xfrm>
+            <a:off x="8278368" y="4069080"/>
+            <a:ext cx="457200" cy="457200"/>
+          </a:xfrm>
+          <a:prstGeom prst="ellipse">
+            <a:avLst/>
+          </a:prstGeom>
+          <a:solidFill>
+            <a:srgbClr val="F7A23B"/>
+          </a:solidFill>
+          <a:ln/>
+        </p:spPr>
+      </p:sp>
+      <p:sp>
+        <p:nvSpPr>
+          <p:cNvPr id="31" name="Text 28"/>
+          <p:cNvSpPr/>
+          <p:nvPr/>
+        </p:nvSpPr>
+        <p:spPr>
+          <a:xfrm>
+            <a:off x="8278368" y="4069080"/>
+            <a:ext cx="457200" cy="457200"/>
+          </a:xfrm>
+          <a:prstGeom prst="rect">
+            <a:avLst/>
+          </a:prstGeom>
+          <a:noFill/>
+          <a:ln/>
+        </p:spPr>
+        <p:txBody>
+          <a:bodyPr wrap="square" rtlCol="0" anchor="ctr"/>
+          <a:lstStyle/>
+          <a:p>
+            <a:pPr algn="ctr" indent="0" marL="0">
+              <a:buNone/>
+            </a:pPr>
+            <a:r>
+              <a:rPr lang="en-US" sz="1400" b="1" dirty="0">
+                <a:solidFill>
+                  <a:srgbClr val="FFFFFF"/>
+                </a:solidFill>
+                <a:latin typeface="Arial" pitchFamily="34" charset="0"/>
+                <a:ea typeface="Arial" pitchFamily="34" charset="-122"/>
+                <a:cs typeface="Arial" pitchFamily="34" charset="-120"/>
+              </a:rPr>
+              <a:t>6</a:t>
+            </a:r>
+            <a:endParaRPr lang="en-US" sz="1400" dirty="0"/>
+          </a:p>
+        </p:txBody>
+      </p:sp>
+      <p:sp>
+        <p:nvSpPr>
+          <p:cNvPr id="32" name="Text 29"/>
+          <p:cNvSpPr/>
+          <p:nvPr/>
+        </p:nvSpPr>
+        <p:spPr>
+          <a:xfrm>
+            <a:off x="8872728" y="3995928"/>
+            <a:ext cx="2630424" cy="2112264"/>
+          </a:xfrm>
+          <a:prstGeom prst="rect">
+            <a:avLst/>
+          </a:prstGeom>
+          <a:noFill/>
+          <a:ln/>
+        </p:spPr>
+        <p:txBody>
+          <a:bodyPr wrap="square" rtlCol="0" anchor="ctr">
+            <a:normAutofit/>
+          </a:bodyPr>
+          <a:lstStyle/>
+          <a:p>
+            <a:pPr indent="0" marL="0">
+              <a:buNone/>
+            </a:pPr>
+            <a:r>
+              <a:rPr lang="en-US" sz="1800" dirty="0">
+                <a:solidFill>
+                  <a:srgbClr val="1F2937"/>
+                </a:solidFill>
+                <a:latin typeface="Arial" pitchFamily="34" charset="0"/>
+                <a:ea typeface="Arial" pitchFamily="34" charset="-122"/>
+                <a:cs typeface="Arial" pitchFamily="34" charset="-120"/>
+              </a:rPr>
+              <a:t>A) só a própria carteira</a:t>
+            </a:r>
+            <a:endParaRPr lang="en-US" sz="1800" dirty="0"/>
+          </a:p>
+        </p:txBody>
+      </p:sp>
+      <p:sp>
+        <p:nvSpPr>
+          <p:cNvPr id="25" name="Slide Number Placeholder 0"/>
+          <p:cNvSpPr>
+            <a:spLocks noGrp="1"/>
+          </p:cNvSpPr>
+          <p:nvPr>
+            <p:ph type="sldNum" sz="quarter" idx="4294967295"/>
+          </p:nvPr>
+        </p:nvSpPr>
+        <p:spPr>
+          <a:xfrm>
+            <a:off x="11292840" y="6556248"/>
+            <a:ext cx="548640" cy="256032"/>
+          </a:xfrm>
+          <a:prstGeom prst="rect">
+            <a:avLst/>
+          </a:prstGeom>
+          <a:extLst>
+            <a:ext uri="{C572A759-6A51-4108-AA02-DFA0A04FC94B}">
+              <ma14:wrappingTextBoxFlag xmlns:ma14="http://schemas.microsoft.com/office/mac/drawingml/2011/main" val="0"/>
+            </a:ext>
+          </a:extLst>
+        </p:spPr>
+        <p:txBody>
+          <a:bodyPr/>
+          <a:lstStyle>
+            <a:lvl1pPr>
+              <a:defRPr sz="900">
+                <a:solidFill>
+                  <a:srgbClr val="1B3A6B"/>
+                </a:solidFill>
+                <a:latin typeface="Arial"/>
+                <a:ea typeface="Arial"/>
+                <a:cs typeface="Arial"/>
+              </a:defRPr>
+            </a:lvl1pPr>
+          </a:lstStyle>
+          <a:p>
+            <a:pPr algn="r"/>
+            <a:fld id="{F7021451-1387-4CA6-816F-3879F97B5CBC}" type="slidenum">
+              <a:rPr b="1" lang="en-US"/>
+              <a:t>36</a:t>
+            </a:fld>
+            <a:endParaRPr lang="en-US"/>
+          </a:p>
+        </p:txBody>
+      </p:sp>
+    </p:spTree>
+  </p:cSld>
+  <p:clrMapOvr>
+    <a:masterClrMapping/>
+  </p:clrMapOvr>
+</p:sld>
+</file>
+
+<file path=ppt/slides/slide37.xml><?xml version="1.0" encoding="utf-8"?>
+<p:sld xmlns:a="http://schemas.openxmlformats.org/drawingml/2006/main" xmlns:r="http://schemas.openxmlformats.org/officeDocument/2006/relationships" xmlns:p="http://schemas.openxmlformats.org/presentationml/2006/main">
+  <p:cSld name="Slide 37">
+    <p:bg>
+      <p:bgPr>
+        <a:solidFill>
+          <a:srgbClr val="F6F8FB"/>
+        </a:solidFill>
+      </p:bgPr>
+    </p:bg>
+    <p:spTree>
+      <p:nvGrpSpPr>
+        <p:cNvPr id="1" name=""/>
+        <p:cNvGrpSpPr/>
+        <p:nvPr/>
+      </p:nvGrpSpPr>
+      <p:grpSpPr>
+        <a:xfrm>
+          <a:off x="0" y="0"/>
+          <a:ext cx="0" cy="0"/>
+          <a:chOff x="0" y="0"/>
+          <a:chExt cx="0" cy="0"/>
+        </a:xfrm>
+      </p:grpSpPr>
+      <p:sp>
+        <p:nvSpPr>
+          <p:cNvPr id="2" name="Shape 0"/>
+          <p:cNvSpPr/>
+          <p:nvPr/>
+        </p:nvSpPr>
+        <p:spPr>
+          <a:xfrm>
+            <a:off x="0" y="6510528"/>
+            <a:ext cx="12191695" cy="347472"/>
+          </a:xfrm>
+          <a:prstGeom prst="rect">
+            <a:avLst/>
+          </a:prstGeom>
+          <a:solidFill>
+            <a:srgbClr val="FFFFFF"/>
+          </a:solidFill>
+          <a:ln w="6350">
+            <a:solidFill>
+              <a:srgbClr val="D8E0EC"/>
+            </a:solidFill>
+            <a:prstDash val="solid"/>
+          </a:ln>
+        </p:spPr>
+      </p:sp>
+      <p:pic>
+        <p:nvPicPr>
+          <p:cNvPr id="3" name="Image 0" descr="/www/wwwroot/rexar/gdsolar/docs/curso/slides/assets/logo-gdsolar.png">    </p:cNvPr>
+          <p:cNvPicPr>
+            <a:picLocks noChangeAspect="1"/>
+          </p:cNvPicPr>
+          <p:nvPr/>
+        </p:nvPicPr>
+        <p:blipFill>
+          <a:blip r:embed="rId1"/>
+          <a:stretch>
+            <a:fillRect/>
+          </a:stretch>
+        </p:blipFill>
+        <p:spPr>
+          <a:xfrm>
+            <a:off x="548640" y="6547104"/>
+            <a:ext cx="274320" cy="274320"/>
+          </a:xfrm>
+          <a:prstGeom prst="rect">
+            <a:avLst/>
+          </a:prstGeom>
+        </p:spPr>
+      </p:pic>
+      <p:sp>
+        <p:nvSpPr>
+          <p:cNvPr id="4" name="Text 1"/>
+          <p:cNvSpPr/>
+          <p:nvPr/>
+        </p:nvSpPr>
+        <p:spPr>
+          <a:xfrm>
+            <a:off x="886968" y="6528816"/>
+            <a:ext cx="6400800" cy="310896"/>
+          </a:xfrm>
+          <a:prstGeom prst="rect">
+            <a:avLst/>
+          </a:prstGeom>
+          <a:noFill/>
+          <a:ln/>
+        </p:spPr>
+        <p:txBody>
+          <a:bodyPr wrap="square" rtlCol="0" anchor="ctr"/>
+          <a:lstStyle/>
+          <a:p>
+            <a:pPr indent="0" marL="0">
+              <a:buNone/>
+            </a:pPr>
+            <a:r>
+              <a:rPr lang="en-US" sz="900" b="1" dirty="0">
+                <a:solidFill>
+                  <a:srgbClr val="64748B"/>
+                </a:solidFill>
+                <a:latin typeface="Arial" pitchFamily="34" charset="0"/>
+                <a:ea typeface="Arial" pitchFamily="34" charset="-122"/>
+                <a:cs typeface="Arial" pitchFamily="34" charset="-120"/>
+              </a:rPr>
+              <a:t>GD Solar  ·  Formação em Energia por Assinatura</a:t>
+            </a:r>
+            <a:endParaRPr lang="en-US" sz="900" dirty="0"/>
+          </a:p>
+        </p:txBody>
+      </p:sp>
+      <p:sp>
+        <p:nvSpPr>
+          <p:cNvPr id="5" name="Text 2"/>
+          <p:cNvSpPr/>
+          <p:nvPr/>
+        </p:nvSpPr>
+        <p:spPr>
+          <a:xfrm>
+            <a:off x="7132320" y="6528816"/>
+            <a:ext cx="4023360" cy="310896"/>
+          </a:xfrm>
+          <a:prstGeom prst="rect">
+            <a:avLst/>
+          </a:prstGeom>
+          <a:noFill/>
+          <a:ln/>
+        </p:spPr>
+        <p:txBody>
+          <a:bodyPr wrap="square" rtlCol="0" anchor="ctr"/>
+          <a:lstStyle/>
+          <a:p>
+            <a:pPr algn="r" indent="0" marL="0">
+              <a:buNone/>
+            </a:pPr>
+            <a:r>
+              <a:rPr lang="en-US" sz="900" dirty="0">
+                <a:solidFill>
+                  <a:srgbClr val="64748B"/>
+                </a:solidFill>
+                <a:latin typeface="Arial" pitchFamily="34" charset="0"/>
+                <a:ea typeface="Arial" pitchFamily="34" charset="-122"/>
+                <a:cs typeface="Arial" pitchFamily="34" charset="-120"/>
+              </a:rPr>
+              <a:t>M5 · Fechamento</a:t>
+            </a:r>
+            <a:endParaRPr lang="en-US" sz="900" dirty="0"/>
+          </a:p>
+        </p:txBody>
+      </p:sp>
+      <p:sp>
+        <p:nvSpPr>
+          <p:cNvPr id="6" name="Shape 3"/>
+          <p:cNvSpPr/>
+          <p:nvPr/>
+        </p:nvSpPr>
+        <p:spPr>
+          <a:xfrm>
+            <a:off x="548640" y="384048"/>
+            <a:ext cx="82296" cy="658368"/>
+          </a:xfrm>
+          <a:prstGeom prst="rect">
+            <a:avLst/>
+          </a:prstGeom>
+          <a:solidFill>
+            <a:srgbClr val="F7A23B"/>
+          </a:solidFill>
+          <a:ln/>
+        </p:spPr>
+      </p:sp>
+      <p:sp>
+        <p:nvSpPr>
+          <p:cNvPr id="7" name="Text 4"/>
+          <p:cNvSpPr/>
+          <p:nvPr/>
+        </p:nvSpPr>
+        <p:spPr>
+          <a:xfrm>
+            <a:off x="777240" y="292608"/>
+            <a:ext cx="10972800" cy="274320"/>
+          </a:xfrm>
+          <a:prstGeom prst="rect">
+            <a:avLst/>
+          </a:prstGeom>
+          <a:noFill/>
+          <a:ln/>
+        </p:spPr>
+        <p:txBody>
+          <a:bodyPr wrap="square" rtlCol="0" anchor="ctr"/>
+          <a:lstStyle/>
+          <a:p>
+            <a:pPr indent="0" marL="0">
+              <a:buNone/>
+            </a:pPr>
+            <a:r>
+              <a:rPr lang="en-US" sz="1000" b="1" spc="100" kern="0" dirty="0">
+                <a:solidFill>
+                  <a:srgbClr val="F7A23B"/>
+                </a:solidFill>
+                <a:latin typeface="Arial" pitchFamily="34" charset="0"/>
+                <a:ea typeface="Arial" pitchFamily="34" charset="-122"/>
+                <a:cs typeface="Arial" pitchFamily="34" charset="-120"/>
+              </a:rPr>
+              <a:t>FECHAMENTO DO MÓDULO</a:t>
+            </a:r>
+            <a:endParaRPr lang="en-US" sz="1000" dirty="0"/>
+          </a:p>
+        </p:txBody>
+      </p:sp>
+      <p:sp>
+        <p:nvSpPr>
+          <p:cNvPr id="8" name="Text 5"/>
+          <p:cNvSpPr/>
+          <p:nvPr/>
+        </p:nvSpPr>
+        <p:spPr>
+          <a:xfrm>
+            <a:off x="777240" y="530352"/>
+            <a:ext cx="10881360" cy="566928"/>
+          </a:xfrm>
+          <a:prstGeom prst="rect">
+            <a:avLst/>
+          </a:prstGeom>
+          <a:noFill/>
+          <a:ln/>
+        </p:spPr>
+        <p:txBody>
+          <a:bodyPr wrap="square" rtlCol="0" anchor="ctr">
+            <a:normAutofit/>
+          </a:bodyPr>
+          <a:lstStyle/>
+          <a:p>
+            <a:pPr indent="0" marL="0">
+              <a:buNone/>
+            </a:pPr>
+            <a:r>
+              <a:rPr lang="en-US" sz="2600" b="1" dirty="0">
+                <a:solidFill>
+                  <a:srgbClr val="1B3A6B"/>
+                </a:solidFill>
+                <a:latin typeface="Arial" pitchFamily="34" charset="0"/>
+                <a:ea typeface="Arial" pitchFamily="34" charset="-122"/>
+                <a:cs typeface="Arial" pitchFamily="34" charset="-120"/>
+              </a:rPr>
+              <a:t>Pratique e entregue</a:t>
+            </a:r>
+            <a:endParaRPr lang="en-US" sz="2600" dirty="0"/>
+          </a:p>
+        </p:txBody>
+      </p:sp>
+      <p:sp>
+        <p:nvSpPr>
+          <p:cNvPr id="9" name="Text 6"/>
+          <p:cNvSpPr/>
+          <p:nvPr/>
+        </p:nvSpPr>
+        <p:spPr>
+          <a:xfrm>
+            <a:off x="548640" y="1325880"/>
+            <a:ext cx="5394960" cy="411480"/>
+          </a:xfrm>
+          <a:prstGeom prst="rect">
+            <a:avLst/>
+          </a:prstGeom>
+          <a:noFill/>
+          <a:ln/>
+        </p:spPr>
+        <p:txBody>
+          <a:bodyPr wrap="square" rtlCol="0" anchor="ctr"/>
+          <a:lstStyle/>
+          <a:p>
+            <a:pPr indent="0" marL="0">
+              <a:buNone/>
+            </a:pPr>
+            <a:r>
+              <a:rPr lang="en-US" sz="1600" b="1" dirty="0">
+                <a:solidFill>
+                  <a:srgbClr val="1B3A6B"/>
+                </a:solidFill>
+                <a:latin typeface="Arial" pitchFamily="34" charset="0"/>
+                <a:ea typeface="Arial" pitchFamily="34" charset="-122"/>
+                <a:cs typeface="Arial" pitchFamily="34" charset="-120"/>
+              </a:rPr>
+              <a:t>Exercícios</a:t>
+            </a:r>
+            <a:endParaRPr lang="en-US" sz="1600" dirty="0"/>
+          </a:p>
+        </p:txBody>
+      </p:sp>
+      <p:sp>
+        <p:nvSpPr>
+          <p:cNvPr id="10" name="Text 7"/>
+          <p:cNvSpPr/>
+          <p:nvPr/>
+        </p:nvSpPr>
+        <p:spPr>
+          <a:xfrm>
+            <a:off x="548640" y="1783080"/>
+            <a:ext cx="5394960" cy="4480560"/>
+          </a:xfrm>
+          <a:prstGeom prst="rect">
+            <a:avLst/>
+          </a:prstGeom>
+          <a:noFill/>
+          <a:ln/>
+        </p:spPr>
+        <p:txBody>
+          <a:bodyPr wrap="square" rtlCol="0" anchor="t">
+            <a:normAutofit/>
+          </a:bodyPr>
+          <a:lstStyle/>
+          <a:p>
+            <a:pPr indent="0" marL="0">
+              <a:spcAft>
+                <a:spcPts val="800"/>
+              </a:spcAft>
+              <a:buNone/>
+            </a:pPr>
+            <a:r>
+              <a:rPr lang="en-US" sz="1600" dirty="0">
+                <a:solidFill>
+                  <a:srgbClr val="1F2937"/>
+                </a:solidFill>
+                <a:latin typeface="Arial" pitchFamily="34" charset="0"/>
+                <a:ea typeface="Arial" pitchFamily="34" charset="-122"/>
+                <a:cs typeface="Arial" pitchFamily="34" charset="-120"/>
+              </a:rPr>
+              <a:t>1. Uma academia trifásica com média de 6.200 kWh/mês: cota ideal com margem de 95%? (R: (6.200 − 100) × 0,95 ≈ 5.795 kWh)</a:t>
+            </a:r>
+            <a:endParaRPr lang="en-US" sz="1600" dirty="0"/>
+          </a:p>
+          <a:p>
+            <a:pPr indent="0" marL="0">
+              <a:spcAft>
+                <a:spcPts val="800"/>
+              </a:spcAft>
+              <a:buNone/>
+            </a:pPr>
+            <a:r>
+              <a:rPr lang="en-US" sz="1600" dirty="0">
+                <a:solidFill>
+                  <a:srgbClr val="1F2937"/>
+                </a:solidFill>
+                <a:latin typeface="Arial" pitchFamily="34" charset="0"/>
+                <a:ea typeface="Arial" pitchFamily="34" charset="-122"/>
+                <a:cs typeface="Arial" pitchFamily="34" charset="-120"/>
+              </a:rPr>
+              <a:t>2. Quantas academias como essa cabem na Sol Nascente I (60.000 kWh)?</a:t>
+            </a:r>
+            <a:endParaRPr lang="en-US" sz="1600" dirty="0"/>
+          </a:p>
+          <a:p>
+            <a:pPr indent="0" marL="0">
+              <a:spcAft>
+                <a:spcPts val="800"/>
+              </a:spcAft>
+              <a:buNone/>
+            </a:pPr>
+            <a:r>
+              <a:rPr lang="en-US" sz="1600" dirty="0">
+                <a:solidFill>
+                  <a:srgbClr val="1F2937"/>
+                </a:solidFill>
+                <a:latin typeface="Arial" pitchFamily="34" charset="0"/>
+                <a:ea typeface="Arial" pitchFamily="34" charset="-122"/>
+                <a:cs typeface="Arial" pitchFamily="34" charset="-120"/>
+              </a:rPr>
+              <a:t>3. Escreva a resposta para a objeção "vou pagar duas contas?" em até 3 frases.</a:t>
+            </a:r>
+            <a:endParaRPr lang="en-US" sz="1600" dirty="0"/>
+          </a:p>
+        </p:txBody>
+      </p:sp>
+      <p:sp>
+        <p:nvSpPr>
+          <p:cNvPr id="11" name="Shape 8"/>
+          <p:cNvSpPr/>
+          <p:nvPr/>
+        </p:nvSpPr>
+        <p:spPr>
+          <a:xfrm>
+            <a:off x="6172200" y="1325880"/>
+            <a:ext cx="5468112" cy="4937760"/>
+          </a:xfrm>
+          <a:prstGeom prst="roundRect">
+            <a:avLst>
+              <a:gd name="adj" fmla="val 1852"/>
+            </a:avLst>
+          </a:prstGeom>
+          <a:solidFill>
+            <a:srgbClr val="1B3A6B"/>
+          </a:solidFill>
+          <a:ln/>
+        </p:spPr>
+      </p:sp>
+      <p:sp>
+        <p:nvSpPr>
+          <p:cNvPr id="12" name="Text 9"/>
+          <p:cNvSpPr/>
+          <p:nvPr/>
+        </p:nvSpPr>
+        <p:spPr>
+          <a:xfrm>
+            <a:off x="6492240" y="1554480"/>
+            <a:ext cx="4828032" cy="4480560"/>
+          </a:xfrm>
+          <a:prstGeom prst="rect">
+            <a:avLst/>
+          </a:prstGeom>
+          <a:noFill/>
+          <a:ln/>
+        </p:spPr>
+        <p:txBody>
+          <a:bodyPr wrap="square" rtlCol="0" anchor="t">
+            <a:normAutofit/>
+          </a:bodyPr>
+          <a:lstStyle/>
+          <a:p>
+            <a:pPr indent="0" marL="0">
+              <a:buNone/>
+            </a:pPr>
+            <a:r>
+              <a:rPr lang="en-US" sz="1300" b="1" spc="100" kern="0" dirty="0">
+                <a:solidFill>
+                  <a:srgbClr val="F7A23B"/>
+                </a:solidFill>
+                <a:latin typeface="Arial" pitchFamily="34" charset="0"/>
+                <a:ea typeface="Arial" pitchFamily="34" charset="-122"/>
+                <a:cs typeface="Arial" pitchFamily="34" charset="-120"/>
+              </a:rPr>
+              <a:t>ENTREGÁVEL DO MÓDULO
+</a:t>
+            </a:r>
+            <a:pPr indent="0" marL="0">
+              <a:buNone/>
+            </a:pPr>
+            <a:r>
+              <a:rPr lang="en-US" sz="1600" dirty="0">
+                <a:solidFill>
+                  <a:srgbClr val="FFFFFF"/>
+                </a:solidFill>
+                <a:latin typeface="Arial" pitchFamily="34" charset="0"/>
+                <a:ea typeface="Arial" pitchFamily="34" charset="-122"/>
+                <a:cs typeface="Arial" pitchFamily="34" charset="-120"/>
+              </a:rPr>
+              <a:t>Primeiros clientes da minha empresa: 5 clientes fictícios do seu ICP cadastrados com UC e proposta (pelo menos 2 empresas B3 e 2 residências), com cota calculada e economia estimada; e o roteiro de abordagem do seu vendedor (uma página).</a:t>
+            </a:r>
+            <a:endParaRPr lang="en-US" sz="1300" dirty="0"/>
+          </a:p>
+        </p:txBody>
+      </p:sp>
+      <p:sp>
+        <p:nvSpPr>
+          <p:cNvPr id="25" name="Slide Number Placeholder 0"/>
+          <p:cNvSpPr>
+            <a:spLocks noGrp="1"/>
+          </p:cNvSpPr>
+          <p:nvPr>
+            <p:ph type="sldNum" sz="quarter" idx="4294967295"/>
+          </p:nvPr>
+        </p:nvSpPr>
+        <p:spPr>
+          <a:xfrm>
+            <a:off x="11292840" y="6556248"/>
+            <a:ext cx="548640" cy="256032"/>
+          </a:xfrm>
+          <a:prstGeom prst="rect">
+            <a:avLst/>
+          </a:prstGeom>
+          <a:extLst>
+            <a:ext uri="{C572A759-6A51-4108-AA02-DFA0A04FC94B}">
+              <ma14:wrappingTextBoxFlag xmlns:ma14="http://schemas.microsoft.com/office/mac/drawingml/2011/main" val="0"/>
+            </a:ext>
+          </a:extLst>
+        </p:spPr>
+        <p:txBody>
+          <a:bodyPr/>
+          <a:lstStyle>
+            <a:lvl1pPr>
+              <a:defRPr sz="900">
+                <a:solidFill>
+                  <a:srgbClr val="1B3A6B"/>
+                </a:solidFill>
+                <a:latin typeface="Arial"/>
+                <a:ea typeface="Arial"/>
+                <a:cs typeface="Arial"/>
+              </a:defRPr>
+            </a:lvl1pPr>
+          </a:lstStyle>
+          <a:p>
+            <a:pPr algn="r"/>
+            <a:fld id="{F7021451-1387-4CA6-816F-3879F97B5CBC}" type="slidenum">
+              <a:rPr b="1" lang="en-US"/>
+              <a:t>37</a:t>
             </a:fld>
             <a:endParaRPr lang="en-US"/>
           </a:p>
@@ -19580,7 +26226,7 @@
         <p:spPr>
           <a:xfrm>
             <a:off x="548640" y="1325880"/>
-            <a:ext cx="5486400" cy="4937760"/>
+            <a:ext cx="5486400" cy="3977640"/>
           </a:xfrm>
           <a:prstGeom prst="rect">
             <a:avLst/>
@@ -19730,7 +26376,7 @@
         <p:spPr>
           <a:xfrm>
             <a:off x="6263640" y="1325880"/>
-            <a:ext cx="5486400" cy="4937760"/>
+            <a:ext cx="5486400" cy="3977640"/>
           </a:xfrm>
           <a:prstGeom prst="rect">
             <a:avLst/>
@@ -19847,6 +26493,92 @@
               <a:t>residências de alto consumo</a:t>
             </a:r>
             <a:endParaRPr lang="en-US" sz="1800" dirty="0"/>
+          </a:p>
+        </p:txBody>
+      </p:sp>
+      <p:sp>
+        <p:nvSpPr>
+          <p:cNvPr id="11" name="Shape 8"/>
+          <p:cNvSpPr/>
+          <p:nvPr/>
+        </p:nvSpPr>
+        <p:spPr>
+          <a:xfrm>
+            <a:off x="548640" y="5413248"/>
+            <a:ext cx="11091672" cy="868680"/>
+          </a:xfrm>
+          <a:prstGeom prst="roundRect">
+            <a:avLst>
+              <a:gd name="adj" fmla="val 8421"/>
+            </a:avLst>
+          </a:prstGeom>
+          <a:solidFill>
+            <a:srgbClr val="EEF3FA"/>
+          </a:solidFill>
+          <a:ln w="6350">
+            <a:solidFill>
+              <a:srgbClr val="D8E0EC"/>
+            </a:solidFill>
+            <a:prstDash val="solid"/>
+          </a:ln>
+        </p:spPr>
+      </p:sp>
+      <p:sp>
+        <p:nvSpPr>
+          <p:cNvPr id="12" name="Shape 9"/>
+          <p:cNvSpPr/>
+          <p:nvPr/>
+        </p:nvSpPr>
+        <p:spPr>
+          <a:xfrm>
+            <a:off x="548640" y="5413248"/>
+            <a:ext cx="91440" cy="868680"/>
+          </a:xfrm>
+          <a:prstGeom prst="rect">
+            <a:avLst/>
+          </a:prstGeom>
+          <a:solidFill>
+            <a:srgbClr val="F7A23B"/>
+          </a:solidFill>
+          <a:ln/>
+        </p:spPr>
+      </p:sp>
+      <p:sp>
+        <p:nvSpPr>
+          <p:cNvPr id="13" name="Text 10"/>
+          <p:cNvSpPr/>
+          <p:nvPr/>
+        </p:nvSpPr>
+        <p:spPr>
+          <a:xfrm>
+            <a:off x="777240" y="5458968"/>
+            <a:ext cx="10744200" cy="777240"/>
+          </a:xfrm>
+          <a:prstGeom prst="rect">
+            <a:avLst/>
+          </a:prstGeom>
+          <a:noFill/>
+          <a:ln/>
+        </p:spPr>
+        <p:txBody>
+          <a:bodyPr wrap="square" rtlCol="0" anchor="ctr"/>
+          <a:lstStyle/>
+          <a:p>
+            <a:pPr indent="0" marL="0">
+              <a:buNone/>
+            </a:pPr>
+            <a:r>
+              <a:rPr lang="en-US" sz="1500" dirty="0">
+                <a:solidFill>
+                  <a:srgbClr val="1F2937"/>
+                </a:solidFill>
+                <a:latin typeface="Arial" pitchFamily="34" charset="0"/>
+                <a:ea typeface="Arial" pitchFamily="34" charset="-122"/>
+                <a:cs typeface="Arial" pitchFamily="34" charset="-120"/>
+              </a:rPr>
+              <a:t>Escolha dois ou três segmentos da lista e fique especialista neles. Um cliente indica outro do mesmo setor.</a:t>
+            </a:r>
+            <a:endParaRPr lang="en-US" sz="1500" dirty="0"/>
           </a:p>
         </p:txBody>
       </p:sp>
@@ -20261,7 +26993,7 @@
         <p:spPr>
           <a:xfrm>
             <a:off x="822960" y="2286000"/>
-            <a:ext cx="4860036" cy="3749040"/>
+            <a:ext cx="4860036" cy="2286000"/>
           </a:xfrm>
           <a:prstGeom prst="rect">
             <a:avLst/>
@@ -20384,6 +27116,65 @@
       <p:sp>
         <p:nvSpPr>
           <p:cNvPr id="13" name="Shape 10"/>
+          <p:cNvSpPr/>
+          <p:nvPr/>
+        </p:nvSpPr>
+        <p:spPr>
+          <a:xfrm>
+            <a:off x="822960" y="4663440"/>
+            <a:ext cx="4860036" cy="18288"/>
+          </a:xfrm>
+          <a:prstGeom prst="rect">
+            <a:avLst/>
+          </a:prstGeom>
+          <a:solidFill>
+            <a:srgbClr val="D8E0EC"/>
+          </a:solidFill>
+          <a:ln/>
+        </p:spPr>
+      </p:sp>
+      <p:sp>
+        <p:nvSpPr>
+          <p:cNvPr id="14" name="Text 11"/>
+          <p:cNvSpPr/>
+          <p:nvPr/>
+        </p:nvSpPr>
+        <p:spPr>
+          <a:xfrm>
+            <a:off x="822960" y="4754880"/>
+            <a:ext cx="4860036" cy="1371600"/>
+          </a:xfrm>
+          <a:prstGeom prst="rect">
+            <a:avLst/>
+          </a:prstGeom>
+          <a:noFill/>
+          <a:ln/>
+        </p:spPr>
+        <p:txBody>
+          <a:bodyPr wrap="square" rtlCol="0" anchor="t"/>
+          <a:lstStyle/>
+          <a:p>
+            <a:pPr indent="0" marL="0">
+              <a:buNone/>
+            </a:pPr>
+            <a:r>
+              <a:rPr lang="en-US" sz="1300" i="1" dirty="0">
+                <a:solidFill>
+                  <a:srgbClr val="64748B"/>
+                </a:solidFill>
+                <a:latin typeface="Arial" pitchFamily="34" charset="0"/>
+                <a:ea typeface="Arial" pitchFamily="34" charset="-122"/>
+                <a:cs typeface="Arial" pitchFamily="34" charset="-120"/>
+              </a:rPr>
+              <a:t>Evite, no começo, os perfis da tela. Eles dão trabalho e trazem pouca margem.</a:t>
+            </a:r>
+            <a:endParaRPr lang="en-US" sz="1300" dirty="0"/>
+          </a:p>
+        </p:txBody>
+      </p:sp>
+      <p:sp>
+        <p:nvSpPr>
+          <p:cNvPr id="15" name="Shape 12"/>
           <p:cNvSpPr/>
           <p:nvPr/>
         </p:nvSpPr>
@@ -20417,7 +27208,7 @@
       </p:sp>
       <p:sp>
         <p:nvSpPr>
-          <p:cNvPr id="14" name="Shape 11"/>
+          <p:cNvPr id="16" name="Shape 13"/>
           <p:cNvSpPr/>
           <p:nvPr/>
         </p:nvSpPr>
@@ -20437,7 +27228,7 @@
       </p:sp>
       <p:sp>
         <p:nvSpPr>
-          <p:cNvPr id="15" name="Text 12"/>
+          <p:cNvPr id="17" name="Text 14"/>
           <p:cNvSpPr/>
           <p:nvPr/>
         </p:nvSpPr>
@@ -20478,14 +27269,14 @@
       </p:sp>
       <p:sp>
         <p:nvSpPr>
-          <p:cNvPr id="16" name="Text 13"/>
+          <p:cNvPr id="18" name="Text 15"/>
           <p:cNvSpPr/>
           <p:nvPr/>
         </p:nvSpPr>
         <p:spPr>
           <a:xfrm>
             <a:off x="6505956" y="2286000"/>
-            <a:ext cx="4860036" cy="3749040"/>
+            <a:ext cx="4860036" cy="2286000"/>
           </a:xfrm>
           <a:prstGeom prst="rect">
             <a:avLst/>
@@ -20507,7 +27298,7 @@
               <a:buChar char="●"/>
             </a:pPr>
             <a:r>
-              <a:rPr lang="en-US" sz="1700" dirty="0">
+              <a:rPr lang="en-US" sz="1600" dirty="0">
                 <a:solidFill>
                   <a:srgbClr val="1F2937"/>
                 </a:solidFill>
@@ -20517,7 +27308,7 @@
               </a:rPr>
               <a:t>Indicação</a:t>
             </a:r>
-            <a:endParaRPr lang="en-US" sz="1700" dirty="0"/>
+            <a:endParaRPr lang="en-US" sz="1600" dirty="0"/>
           </a:p>
           <a:p>
             <a:pPr marL="342900" indent="-342900">
@@ -20528,7 +27319,7 @@
               <a:buChar char="●"/>
             </a:pPr>
             <a:r>
-              <a:rPr lang="en-US" sz="1700" dirty="0">
+              <a:rPr lang="en-US" sz="1600" dirty="0">
                 <a:solidFill>
                   <a:srgbClr val="1F2937"/>
                 </a:solidFill>
@@ -20538,7 +27329,7 @@
               </a:rPr>
               <a:t>parceiros (contadores, associações comerciais, imobiliárias)</a:t>
             </a:r>
-            <a:endParaRPr lang="en-US" sz="1700" dirty="0"/>
+            <a:endParaRPr lang="en-US" sz="1600" dirty="0"/>
           </a:p>
           <a:p>
             <a:pPr marL="342900" indent="-342900">
@@ -20549,7 +27340,7 @@
               <a:buChar char="●"/>
             </a:pPr>
             <a:r>
-              <a:rPr lang="en-US" sz="1700" dirty="0">
+              <a:rPr lang="en-US" sz="1600" dirty="0">
                 <a:solidFill>
                   <a:srgbClr val="1F2937"/>
                 </a:solidFill>
@@ -20559,7 +27350,7 @@
               </a:rPr>
               <a:t>porta a porta no comércio</a:t>
             </a:r>
-            <a:endParaRPr lang="en-US" sz="1700" dirty="0"/>
+            <a:endParaRPr lang="en-US" sz="1600" dirty="0"/>
           </a:p>
           <a:p>
             <a:pPr marL="342900" indent="-342900">
@@ -20570,7 +27361,7 @@
               <a:buChar char="●"/>
             </a:pPr>
             <a:r>
-              <a:rPr lang="en-US" sz="1700" dirty="0">
+              <a:rPr lang="en-US" sz="1600" dirty="0">
                 <a:solidFill>
                   <a:srgbClr val="1F2937"/>
                 </a:solidFill>
@@ -20580,7 +27371,7 @@
               </a:rPr>
               <a:t>anúncios locais</a:t>
             </a:r>
-            <a:endParaRPr lang="en-US" sz="1700" dirty="0"/>
+            <a:endParaRPr lang="en-US" sz="1600" dirty="0"/>
           </a:p>
           <a:p>
             <a:pPr marL="342900" indent="-342900">
@@ -20591,7 +27382,7 @@
               <a:buChar char="●"/>
             </a:pPr>
             <a:r>
-              <a:rPr lang="en-US" sz="1700" dirty="0">
+              <a:rPr lang="en-US" sz="1600" dirty="0">
                 <a:solidFill>
                   <a:srgbClr val="1F2937"/>
                 </a:solidFill>
@@ -20601,7 +27392,66 @@
               </a:rPr>
               <a:t>⭐ leads de sistema solar que não compraram</a:t>
             </a:r>
-            <a:endParaRPr lang="en-US" sz="1700" dirty="0"/>
+            <a:endParaRPr lang="en-US" sz="1600" dirty="0"/>
+          </a:p>
+        </p:txBody>
+      </p:sp>
+      <p:sp>
+        <p:nvSpPr>
+          <p:cNvPr id="19" name="Shape 16"/>
+          <p:cNvSpPr/>
+          <p:nvPr/>
+        </p:nvSpPr>
+        <p:spPr>
+          <a:xfrm>
+            <a:off x="6505956" y="4663440"/>
+            <a:ext cx="4860036" cy="18288"/>
+          </a:xfrm>
+          <a:prstGeom prst="rect">
+            <a:avLst/>
+          </a:prstGeom>
+          <a:solidFill>
+            <a:srgbClr val="D8E0EC"/>
+          </a:solidFill>
+          <a:ln/>
+        </p:spPr>
+      </p:sp>
+      <p:sp>
+        <p:nvSpPr>
+          <p:cNvPr id="20" name="Text 17"/>
+          <p:cNvSpPr/>
+          <p:nvPr/>
+        </p:nvSpPr>
+        <p:spPr>
+          <a:xfrm>
+            <a:off x="6505956" y="4754880"/>
+            <a:ext cx="4860036" cy="1371600"/>
+          </a:xfrm>
+          <a:prstGeom prst="rect">
+            <a:avLst/>
+          </a:prstGeom>
+          <a:noFill/>
+          <a:ln/>
+        </p:spPr>
+        <p:txBody>
+          <a:bodyPr wrap="square" rtlCol="0" anchor="t"/>
+          <a:lstStyle/>
+          <a:p>
+            <a:pPr indent="0" marL="0">
+              <a:buNone/>
+            </a:pPr>
+            <a:r>
+              <a:rPr lang="en-US" sz="1300" i="1" dirty="0">
+                <a:solidFill>
+                  <a:srgbClr val="64748B"/>
+                </a:solidFill>
+                <a:latin typeface="Arial" pitchFamily="34" charset="0"/>
+                <a:ea typeface="Arial" pitchFamily="34" charset="-122"/>
+                <a:cs typeface="Arial" pitchFamily="34" charset="-120"/>
+              </a:rPr>
+              <a:t>O canal mais barato é a indicação. E, se você já tem empresa solar, os orçamentos que não fecharam por falta de telhado ou de capital são a sua primeira carteira de assinantes.</a:t>
+            </a:r>
+            <a:endParaRPr lang="en-US" sz="1300" dirty="0"/>
           </a:p>
         </p:txBody>
       </p:sp>
@@ -22052,11 +28902,11 @@
         <p:spPr>
           <a:xfrm>
             <a:off x="548640" y="1325880"/>
-            <a:ext cx="3544824" cy="2331720"/>
+            <a:ext cx="3544824" cy="1874520"/>
           </a:xfrm>
           <a:prstGeom prst="roundRect">
             <a:avLst>
-              <a:gd name="adj" fmla="val 3137"/>
+              <a:gd name="adj" fmla="val 3902"/>
             </a:avLst>
           </a:prstGeom>
           <a:solidFill>
@@ -22145,7 +28995,7 @@
         <p:spPr>
           <a:xfrm>
             <a:off x="1325880" y="1435608"/>
-            <a:ext cx="2630424" cy="2112264"/>
+            <a:ext cx="2630424" cy="1655064"/>
           </a:xfrm>
           <a:prstGeom prst="rect">
             <a:avLst/>
@@ -22186,11 +29036,11 @@
         <p:spPr>
           <a:xfrm>
             <a:off x="4322064" y="1325880"/>
-            <a:ext cx="3544824" cy="2331720"/>
+            <a:ext cx="3544824" cy="1874520"/>
           </a:xfrm>
           <a:prstGeom prst="roundRect">
             <a:avLst>
-              <a:gd name="adj" fmla="val 3137"/>
+              <a:gd name="adj" fmla="val 3902"/>
             </a:avLst>
           </a:prstGeom>
           <a:solidFill>
@@ -22279,7 +29129,7 @@
         <p:spPr>
           <a:xfrm>
             <a:off x="5099304" y="1435608"/>
-            <a:ext cx="2630424" cy="2112264"/>
+            <a:ext cx="2630424" cy="1655064"/>
           </a:xfrm>
           <a:prstGeom prst="rect">
             <a:avLst/>
@@ -22320,11 +29170,11 @@
         <p:spPr>
           <a:xfrm>
             <a:off x="8095488" y="1325880"/>
-            <a:ext cx="3544824" cy="2331720"/>
+            <a:ext cx="3544824" cy="1874520"/>
           </a:xfrm>
           <a:prstGeom prst="roundRect">
             <a:avLst>
-              <a:gd name="adj" fmla="val 3137"/>
+              <a:gd name="adj" fmla="val 3902"/>
             </a:avLst>
           </a:prstGeom>
           <a:solidFill>
@@ -22413,7 +29263,7 @@
         <p:spPr>
           <a:xfrm>
             <a:off x="8872728" y="1435608"/>
-            <a:ext cx="2630424" cy="2112264"/>
+            <a:ext cx="2630424" cy="1655064"/>
           </a:xfrm>
           <a:prstGeom prst="rect">
             <a:avLst/>
@@ -22453,12 +29303,12 @@
         </p:nvSpPr>
         <p:spPr>
           <a:xfrm>
-            <a:off x="548640" y="3886200"/>
-            <a:ext cx="3544824" cy="2331720"/>
+            <a:off x="548640" y="3429000"/>
+            <a:ext cx="3544824" cy="1874520"/>
           </a:xfrm>
           <a:prstGeom prst="roundRect">
             <a:avLst>
-              <a:gd name="adj" fmla="val 3137"/>
+              <a:gd name="adj" fmla="val 3902"/>
             </a:avLst>
           </a:prstGeom>
           <a:solidFill>
@@ -22487,7 +29337,7 @@
         </p:nvSpPr>
         <p:spPr>
           <a:xfrm>
-            <a:off x="731520" y="4069080"/>
+            <a:off x="731520" y="3611880"/>
             <a:ext cx="457200" cy="457200"/>
           </a:xfrm>
           <a:prstGeom prst="ellipse">
@@ -22507,7 +29357,7 @@
         </p:nvSpPr>
         <p:spPr>
           <a:xfrm>
-            <a:off x="731520" y="4069080"/>
+            <a:off x="731520" y="3611880"/>
             <a:ext cx="457200" cy="457200"/>
           </a:xfrm>
           <a:prstGeom prst="rect">
@@ -22546,8 +29396,8 @@
         </p:nvSpPr>
         <p:spPr>
           <a:xfrm>
-            <a:off x="1325880" y="3995928"/>
-            <a:ext cx="2630424" cy="2112264"/>
+            <a:off x="1325880" y="3538728"/>
+            <a:ext cx="2630424" cy="1655064"/>
           </a:xfrm>
           <a:prstGeom prst="rect">
             <a:avLst/>
@@ -22587,12 +29437,12 @@
         </p:nvSpPr>
         <p:spPr>
           <a:xfrm>
-            <a:off x="4322064" y="3886200"/>
-            <a:ext cx="3544824" cy="2331720"/>
+            <a:off x="4322064" y="3429000"/>
+            <a:ext cx="3544824" cy="1874520"/>
           </a:xfrm>
           <a:prstGeom prst="roundRect">
             <a:avLst>
-              <a:gd name="adj" fmla="val 3137"/>
+              <a:gd name="adj" fmla="val 3902"/>
             </a:avLst>
           </a:prstGeom>
           <a:solidFill>
@@ -22621,7 +29471,7 @@
         </p:nvSpPr>
         <p:spPr>
           <a:xfrm>
-            <a:off x="4504944" y="4069080"/>
+            <a:off x="4504944" y="3611880"/>
             <a:ext cx="457200" cy="457200"/>
           </a:xfrm>
           <a:prstGeom prst="ellipse">
@@ -22641,7 +29491,7 @@
         </p:nvSpPr>
         <p:spPr>
           <a:xfrm>
-            <a:off x="4504944" y="4069080"/>
+            <a:off x="4504944" y="3611880"/>
             <a:ext cx="457200" cy="457200"/>
           </a:xfrm>
           <a:prstGeom prst="rect">
@@ -22680,8 +29530,8 @@
         </p:nvSpPr>
         <p:spPr>
           <a:xfrm>
-            <a:off x="5099304" y="3995928"/>
-            <a:ext cx="2630424" cy="2112264"/>
+            <a:off x="5099304" y="3538728"/>
+            <a:ext cx="2630424" cy="1655064"/>
           </a:xfrm>
           <a:prstGeom prst="rect">
             <a:avLst/>
@@ -22721,12 +29571,12 @@
         </p:nvSpPr>
         <p:spPr>
           <a:xfrm>
-            <a:off x="8095488" y="3886200"/>
-            <a:ext cx="3544824" cy="2331720"/>
+            <a:off x="8095488" y="3429000"/>
+            <a:ext cx="3544824" cy="1874520"/>
           </a:xfrm>
           <a:prstGeom prst="roundRect">
             <a:avLst>
-              <a:gd name="adj" fmla="val 3137"/>
+              <a:gd name="adj" fmla="val 3902"/>
             </a:avLst>
           </a:prstGeom>
           <a:solidFill>
@@ -22755,7 +29605,7 @@
         </p:nvSpPr>
         <p:spPr>
           <a:xfrm>
-            <a:off x="8278368" y="4069080"/>
+            <a:off x="8278368" y="3611880"/>
             <a:ext cx="457200" cy="457200"/>
           </a:xfrm>
           <a:prstGeom prst="ellipse">
@@ -22775,7 +29625,7 @@
         </p:nvSpPr>
         <p:spPr>
           <a:xfrm>
-            <a:off x="8278368" y="4069080"/>
+            <a:off x="8278368" y="3611880"/>
             <a:ext cx="457200" cy="457200"/>
           </a:xfrm>
           <a:prstGeom prst="rect">
@@ -22814,8 +29664,8 @@
         </p:nvSpPr>
         <p:spPr>
           <a:xfrm>
-            <a:off x="8872728" y="3995928"/>
-            <a:ext cx="2630424" cy="2112264"/>
+            <a:off x="8872728" y="3538728"/>
+            <a:ext cx="2630424" cy="1655064"/>
           </a:xfrm>
           <a:prstGeom prst="rect">
             <a:avLst/>
@@ -22844,6 +29694,92 @@
               <a:t>valor e tarifa</a:t>
             </a:r>
             <a:endParaRPr lang="en-US" sz="1800" dirty="0"/>
+          </a:p>
+        </p:txBody>
+      </p:sp>
+      <p:sp>
+        <p:nvSpPr>
+          <p:cNvPr id="33" name="Shape 30"/>
+          <p:cNvSpPr/>
+          <p:nvPr/>
+        </p:nvSpPr>
+        <p:spPr>
+          <a:xfrm>
+            <a:off x="548640" y="5413248"/>
+            <a:ext cx="11091672" cy="868680"/>
+          </a:xfrm>
+          <a:prstGeom prst="roundRect">
+            <a:avLst>
+              <a:gd name="adj" fmla="val 8421"/>
+            </a:avLst>
+          </a:prstGeom>
+          <a:solidFill>
+            <a:srgbClr val="EEF3FA"/>
+          </a:solidFill>
+          <a:ln w="6350">
+            <a:solidFill>
+              <a:srgbClr val="D8E0EC"/>
+            </a:solidFill>
+            <a:prstDash val="solid"/>
+          </a:ln>
+        </p:spPr>
+      </p:sp>
+      <p:sp>
+        <p:nvSpPr>
+          <p:cNvPr id="34" name="Shape 31"/>
+          <p:cNvSpPr/>
+          <p:nvPr/>
+        </p:nvSpPr>
+        <p:spPr>
+          <a:xfrm>
+            <a:off x="548640" y="5413248"/>
+            <a:ext cx="91440" cy="868680"/>
+          </a:xfrm>
+          <a:prstGeom prst="rect">
+            <a:avLst/>
+          </a:prstGeom>
+          <a:solidFill>
+            <a:srgbClr val="F7A23B"/>
+          </a:solidFill>
+          <a:ln/>
+        </p:spPr>
+      </p:sp>
+      <p:sp>
+        <p:nvSpPr>
+          <p:cNvPr id="35" name="Text 32"/>
+          <p:cNvSpPr/>
+          <p:nvPr/>
+        </p:nvSpPr>
+        <p:spPr>
+          <a:xfrm>
+            <a:off x="777240" y="5458968"/>
+            <a:ext cx="10744200" cy="777240"/>
+          </a:xfrm>
+          <a:prstGeom prst="rect">
+            <a:avLst/>
+          </a:prstGeom>
+          <a:noFill/>
+          <a:ln/>
+        </p:spPr>
+        <p:txBody>
+          <a:bodyPr wrap="square" rtlCol="0" anchor="ctr"/>
+          <a:lstStyle/>
+          <a:p>
+            <a:pPr indent="0" marL="0">
+              <a:buNone/>
+            </a:pPr>
+            <a:r>
+              <a:rPr lang="en-US" sz="1500" dirty="0">
+                <a:solidFill>
+                  <a:srgbClr val="1F2937"/>
+                </a:solidFill>
+                <a:latin typeface="Arial" pitchFamily="34" charset="0"/>
+                <a:ea typeface="Arial" pitchFamily="34" charset="-122"/>
+                <a:cs typeface="Arial" pitchFamily="34" charset="-120"/>
+              </a:rPr>
+              <a:t>Da conta, você tira os dados da tela, principalmente o histórico de doze meses. Confirme também que o titular da conta é quem vai assinar.</a:t>
+            </a:r>
+            <a:endParaRPr lang="en-US" sz="1500" dirty="0"/>
           </a:p>
         </p:txBody>
       </p:sp>
@@ -23163,11 +30099,11 @@
         <p:spPr>
           <a:xfrm>
             <a:off x="548640" y="1325880"/>
-            <a:ext cx="11091672" cy="4937760"/>
+            <a:ext cx="11091672" cy="3977640"/>
           </a:xfrm>
           <a:prstGeom prst="roundRect">
             <a:avLst>
-              <a:gd name="adj" fmla="val 1852"/>
+              <a:gd name="adj" fmla="val 2299"/>
             </a:avLst>
           </a:prstGeom>
           <a:solidFill>
@@ -23185,7 +30121,7 @@
         <p:spPr>
           <a:xfrm>
             <a:off x="914400" y="1554480"/>
-            <a:ext cx="10360152" cy="4480560"/>
+            <a:ext cx="10360152" cy="3520440"/>
           </a:xfrm>
           <a:prstGeom prst="rect">
             <a:avLst/>
@@ -23257,6 +30193,92 @@
               <a:t>% na Sol Nascente I = 3.705 ÷ 60.000 ≈ 6,2%</a:t>
             </a:r>
             <a:endParaRPr lang="en-US" sz="2400" dirty="0"/>
+          </a:p>
+        </p:txBody>
+      </p:sp>
+      <p:sp>
+        <p:nvSpPr>
+          <p:cNvPr id="11" name="Shape 8"/>
+          <p:cNvSpPr/>
+          <p:nvPr/>
+        </p:nvSpPr>
+        <p:spPr>
+          <a:xfrm>
+            <a:off x="548640" y="5413248"/>
+            <a:ext cx="11091672" cy="868680"/>
+          </a:xfrm>
+          <a:prstGeom prst="roundRect">
+            <a:avLst>
+              <a:gd name="adj" fmla="val 8421"/>
+            </a:avLst>
+          </a:prstGeom>
+          <a:solidFill>
+            <a:srgbClr val="EEF3FA"/>
+          </a:solidFill>
+          <a:ln w="6350">
+            <a:solidFill>
+              <a:srgbClr val="D8E0EC"/>
+            </a:solidFill>
+            <a:prstDash val="solid"/>
+          </a:ln>
+        </p:spPr>
+      </p:sp>
+      <p:sp>
+        <p:nvSpPr>
+          <p:cNvPr id="12" name="Shape 9"/>
+          <p:cNvSpPr/>
+          <p:nvPr/>
+        </p:nvSpPr>
+        <p:spPr>
+          <a:xfrm>
+            <a:off x="548640" y="5413248"/>
+            <a:ext cx="91440" cy="868680"/>
+          </a:xfrm>
+          <a:prstGeom prst="rect">
+            <a:avLst/>
+          </a:prstGeom>
+          <a:solidFill>
+            <a:srgbClr val="F7A23B"/>
+          </a:solidFill>
+          <a:ln/>
+        </p:spPr>
+      </p:sp>
+      <p:sp>
+        <p:nvSpPr>
+          <p:cNvPr id="13" name="Text 10"/>
+          <p:cNvSpPr/>
+          <p:nvPr/>
+        </p:nvSpPr>
+        <p:spPr>
+          <a:xfrm>
+            <a:off x="777240" y="5458968"/>
+            <a:ext cx="10744200" cy="777240"/>
+          </a:xfrm>
+          <a:prstGeom prst="rect">
+            <a:avLst/>
+          </a:prstGeom>
+          <a:noFill/>
+          <a:ln/>
+        </p:spPr>
+        <p:txBody>
+          <a:bodyPr wrap="square" rtlCol="0" anchor="ctr"/>
+          <a:lstStyle/>
+          <a:p>
+            <a:pPr indent="0" marL="0">
+              <a:buNone/>
+            </a:pPr>
+            <a:r>
+              <a:rPr lang="en-US" sz="1500" dirty="0">
+                <a:solidFill>
+                  <a:srgbClr val="1F2937"/>
+                </a:solidFill>
+                <a:latin typeface="Arial" pitchFamily="34" charset="0"/>
+                <a:ea typeface="Arial" pitchFamily="34" charset="-122"/>
+                <a:cs typeface="Arial" pitchFamily="34" charset="-120"/>
+              </a:rPr>
+              <a:t>Calcule a cota com a fórmula da tela e olhe o mês a mês para não gerar sobras nos meses de consumo baixo.</a:t>
+            </a:r>
+            <a:endParaRPr lang="en-US" sz="1500" dirty="0"/>
           </a:p>
         </p:txBody>
       </p:sp>

--- a/docs/curso/slides/m05-comercial.pptx
+++ b/docs/curso/slides/m05-comercial.pptx
@@ -978,8 +978,7 @@
           <a:p>
             <a:r>
               <a:rPr lang="en-US" dirty="0"/>
-              <a:t>Ela responde, nessa ordem, às cinco perguntas da tela.
-O ponto mais importante é explicar as duas contas. O cliente passa a pagar duas contas menores que, somadas, ficam abaixo da de hoje. Quem não entende isso cancela no primeiro mês por susto. Repita na proposta, na reunião e nas boas-vindas.</a:t>
+              <a:t>Ela responde, nessa ordem, às cinco perguntas da tela.</a:t>
             </a:r>
             <a:endParaRPr lang="en-US" dirty="0"/>
           </a:p>
@@ -1067,7 +1066,7 @@
           <a:p>
             <a:r>
               <a:rPr lang="en-US" dirty="0"/>
-              <a:t>As condições da tela precisam estar escritas, sem letras miúdas.</a:t>
+              <a:t>O ponto mais importante é explicar as duas contas. O cliente passa a pagar duas contas menores que, somadas, ficam abaixo da de hoje. Quem não entende isso cancela no primeiro mês por susto. Repita na proposta, na reunião e nas boas-vindas.</a:t>
             </a:r>
             <a:endParaRPr lang="en-US" dirty="0"/>
           </a:p>
@@ -1155,7 +1154,7 @@
           <a:p>
             <a:r>
               <a:rPr lang="en-US" dirty="0"/>
-              <a:t>Apresente a proposta em quinze minutos, seguindo o roteiro da tela, e saia sempre com o próximo passo marcado.</a:t>
+              <a:t>As condições da tela precisam estar escritas, sem letras miúdas.</a:t>
             </a:r>
             <a:endParaRPr lang="en-US" dirty="0"/>
           </a:p>
@@ -1243,7 +1242,7 @@
           <a:p>
             <a:r>
               <a:rPr lang="en-US" dirty="0"/>
-              <a:t/>
+              <a:t>Apresente a proposta em quinze minutos, seguindo o roteiro da tela, e saia sempre com o próximo passo marcado.</a:t>
             </a:r>
             <a:endParaRPr lang="en-US" dirty="0"/>
           </a:p>
@@ -1419,7 +1418,7 @@
           <a:p>
             <a:r>
               <a:rPr lang="en-US" dirty="0"/>
-              <a:t>Nas objeções de confiança, apoie-se na lei, no contrato e em clientes de referência. O fornecimento continua o mesmo e nada muda na instalação.</a:t>
+              <a:t/>
             </a:r>
             <a:endParaRPr lang="en-US" dirty="0"/>
           </a:p>
@@ -1595,7 +1594,7 @@
           <a:p>
             <a:r>
               <a:rPr lang="en-US" dirty="0"/>
-              <a:t>Nas de entendimento, mostre a conta do próprio cliente. E lembre: ele nunca paga por energia que não recebeu, porque a cobrança parte do que foi compensado na fatura.</a:t>
+              <a:t>Nas objeções de confiança, apoie-se na lei, no contrato e em clientes de referência. O fornecimento continua o mesmo e nada muda na instalação.</a:t>
             </a:r>
             <a:endParaRPr lang="en-US" dirty="0"/>
           </a:p>
@@ -1683,7 +1682,7 @@
           <a:p>
             <a:r>
               <a:rPr lang="en-US" dirty="0"/>
-              <a:t>Nas de compromisso, responda exatamente o que o contrato diz. Cancelamento simples, com aviso prévio, vende mais que multa pesada.</a:t>
+              <a:t>Nas de entendimento, mostre a conta do próprio cliente. E lembre: ele nunca paga por energia que não recebeu, porque a cobrança parte do que foi compensado na fatura.</a:t>
             </a:r>
             <a:endParaRPr lang="en-US" dirty="0"/>
           </a:p>
@@ -1771,7 +1770,7 @@
           <a:p>
             <a:r>
               <a:rPr lang="en-US" dirty="0"/>
-              <a:t>E no vou pensar, pergunte o que falta para decidir, combine um retorno e envie a economia anual por escrito.</a:t>
+              <a:t>Nas de compromisso, responda exatamente o que o contrato diz. Cancelamento simples, com aviso prévio, vende mais que multa pesada.</a:t>
             </a:r>
             <a:endParaRPr lang="en-US" dirty="0"/>
           </a:p>
@@ -1859,7 +1858,7 @@
           <a:p>
             <a:r>
               <a:rPr lang="en-US" dirty="0"/>
-              <a:t/>
+              <a:t>E no vou pensar, pergunte o que falta para decidir, combine um retorno e envie a economia anual por escrito.</a:t>
             </a:r>
             <a:endParaRPr lang="en-US" dirty="0"/>
           </a:p>
@@ -2035,7 +2034,7 @@
           <a:p>
             <a:r>
               <a:rPr lang="en-US" dirty="0"/>
-              <a:t>Meça cada etapa do funil desde o primeiro mês. As taxas reais mostram onde ele vaza.</a:t>
+              <a:t/>
             </a:r>
             <a:endParaRPr lang="en-US" dirty="0"/>
           </a:p>
@@ -2123,7 +2122,7 @@
           <a:p>
             <a:r>
               <a:rPr lang="en-US" dirty="0"/>
-              <a:t>Ligue o funil ao plano: do ponto de equilíbrio sai a meta de clientes, e dela os leads e o número de consultores.</a:t>
+              <a:t>Meça cada etapa do funil desde o primeiro mês. As taxas reais mostram onde ele vaza.</a:t>
             </a:r>
             <a:endParaRPr lang="en-US" dirty="0"/>
           </a:p>
@@ -2211,7 +2210,7 @@
           <a:p>
             <a:r>
               <a:rPr lang="en-US" dirty="0"/>
-              <a:t>Pague comissão depois da primeira cobrança paga. Assim o vendedor busca o cliente certo e explica direito.</a:t>
+              <a:t>Ligue o funil ao plano: do ponto de equilíbrio sai a meta de clientes, e dela os leads e o número de consultores.</a:t>
             </a:r>
             <a:endParaRPr lang="en-US" dirty="0"/>
           </a:p>
@@ -2299,7 +2298,8 @@
           <a:p>
             <a:r>
               <a:rPr lang="en-US" dirty="0"/>
-              <a:t>Cada consultor vê só a própria carteira status da proposta = etapa do funil</a:t>
+              <a:t>Pague comissão depois da primeira cobrança paga. Assim o vendedor busca o cliente certo e explica direito.
+</a:t>
             </a:r>
             <a:endParaRPr lang="en-US" dirty="0"/>
           </a:p>
@@ -4496,7 +4496,7 @@
                 <a:ea typeface="Arial" pitchFamily="34" charset="-122"/>
                 <a:cs typeface="Arial" pitchFamily="34" charset="-120"/>
               </a:rPr>
-              <a:t>6. cliente, unidade consumidora e proposta comercial</a:t>
+              <a:t>6. Cliente, unidade consumidora e proposta comercial</a:t>
             </a:r>
             <a:endParaRPr lang="en-US" sz="1400" dirty="0"/>
           </a:p>
@@ -6470,7 +6470,7 @@
             <a:r>
               <a:rPr lang="en-US" sz="11000" b="1" dirty="0">
                 <a:solidFill>
-                  <a:srgbClr val="11396F"/>
+                  <a:srgbClr val="F7A23B"/>
                 </a:solidFill>
                 <a:latin typeface="Arial" pitchFamily="34" charset="0"/>
                 <a:ea typeface="Arial" pitchFamily="34" charset="-122"/>
@@ -6593,7 +6593,7 @@
                 <a:ea typeface="Arial" pitchFamily="34" charset="-122"/>
                 <a:cs typeface="Arial" pitchFamily="34" charset="-120"/>
               </a:rPr>
-              <a:t>Aula</a:t>
+              <a:t>Aula teórica</a:t>
             </a:r>
             <a:endParaRPr lang="en-US" sz="1400" dirty="0"/>
           </a:p>
@@ -7025,7 +7025,7 @@
                 <a:ea typeface="Arial" pitchFamily="34" charset="-122"/>
                 <a:cs typeface="Arial" pitchFamily="34" charset="-120"/>
               </a:rPr>
-              <a:t>AULA 3</a:t>
+              <a:t>AULA 3 · A PROPOSTA COMERCIAL QUE CONVERTE</a:t>
             </a:r>
             <a:endParaRPr lang="en-US" sz="1000" dirty="0"/>
           </a:p>
@@ -7066,7 +7066,7 @@
                 <a:ea typeface="Arial" pitchFamily="34" charset="-122"/>
                 <a:cs typeface="Arial" pitchFamily="34" charset="-120"/>
               </a:rPr>
-              <a:t>A proposta comercial que converte</a:t>
+              <a:t>As cinco perguntas do cliente</a:t>
             </a:r>
             <a:endParaRPr lang="en-US" sz="2600" dirty="0"/>
           </a:p>
@@ -7081,11 +7081,11 @@
         <p:spPr>
           <a:xfrm>
             <a:off x="548640" y="1325880"/>
-            <a:ext cx="5408676" cy="4937760"/>
+            <a:ext cx="3544824" cy="1874520"/>
           </a:xfrm>
           <a:prstGeom prst="roundRect">
             <a:avLst>
-              <a:gd name="adj" fmla="val 1481"/>
+              <a:gd name="adj" fmla="val 3902"/>
             </a:avLst>
           </a:prstGeom>
           <a:solidFill>
@@ -7114,10 +7114,10 @@
         </p:nvSpPr>
         <p:spPr>
           <a:xfrm>
-            <a:off x="548640" y="1325880"/>
-            <a:ext cx="5408676" cy="109728"/>
-          </a:xfrm>
-          <a:prstGeom prst="rect">
+            <a:off x="731520" y="1508760"/>
+            <a:ext cx="457200" cy="457200"/>
+          </a:xfrm>
+          <a:prstGeom prst="ellipse">
             <a:avLst/>
           </a:prstGeom>
           <a:solidFill>
@@ -7134,17 +7134,56 @@
         </p:nvSpPr>
         <p:spPr>
           <a:xfrm>
-            <a:off x="822960" y="1554480"/>
-            <a:ext cx="4860036" cy="685800"/>
-          </a:xfrm>
-          <a:prstGeom prst="rect">
-            <a:avLst/>
-          </a:prstGeom>
-          <a:noFill/>
-          <a:ln/>
-        </p:spPr>
-        <p:txBody>
-          <a:bodyPr wrap="square" rtlCol="0" anchor="t">
+            <a:off x="731520" y="1508760"/>
+            <a:ext cx="457200" cy="457200"/>
+          </a:xfrm>
+          <a:prstGeom prst="rect">
+            <a:avLst/>
+          </a:prstGeom>
+          <a:noFill/>
+          <a:ln/>
+        </p:spPr>
+        <p:txBody>
+          <a:bodyPr wrap="square" rtlCol="0" anchor="ctr"/>
+          <a:lstStyle/>
+          <a:p>
+            <a:pPr algn="ctr" indent="0" marL="0">
+              <a:buNone/>
+            </a:pPr>
+            <a:r>
+              <a:rPr lang="en-US" sz="1400" b="1" dirty="0">
+                <a:solidFill>
+                  <a:srgbClr val="FFFFFF"/>
+                </a:solidFill>
+                <a:latin typeface="Arial" pitchFamily="34" charset="0"/>
+                <a:ea typeface="Arial" pitchFamily="34" charset="-122"/>
+                <a:cs typeface="Arial" pitchFamily="34" charset="-120"/>
+              </a:rPr>
+              <a:t>1</a:t>
+            </a:r>
+            <a:endParaRPr lang="en-US" sz="1400" dirty="0"/>
+          </a:p>
+        </p:txBody>
+      </p:sp>
+      <p:sp>
+        <p:nvSpPr>
+          <p:cNvPr id="12" name="Text 9"/>
+          <p:cNvSpPr/>
+          <p:nvPr/>
+        </p:nvSpPr>
+        <p:spPr>
+          <a:xfrm>
+            <a:off x="1325880" y="1435608"/>
+            <a:ext cx="2630424" cy="1655064"/>
+          </a:xfrm>
+          <a:prstGeom prst="rect">
+            <a:avLst/>
+          </a:prstGeom>
+          <a:noFill/>
+          <a:ln/>
+        </p:spPr>
+        <p:txBody>
+          <a:bodyPr wrap="square" rtlCol="0" anchor="ctr">
             <a:normAutofit/>
           </a:bodyPr>
           <a:lstStyle/>
@@ -7153,51 +7192,7 @@
               <a:buNone/>
             </a:pPr>
             <a:r>
-              <a:rPr lang="en-US" sz="1600" b="1" dirty="0">
-                <a:solidFill>
-                  <a:srgbClr val="1B3A6B"/>
-                </a:solidFill>
-                <a:latin typeface="Arial" pitchFamily="34" charset="0"/>
-                <a:ea typeface="Arial" pitchFamily="34" charset="-122"/>
-                <a:cs typeface="Arial" pitchFamily="34" charset="-120"/>
-              </a:rPr>
-              <a:t>As cinco perguntas do cliente</a:t>
-            </a:r>
-            <a:endParaRPr lang="en-US" sz="1600" dirty="0"/>
-          </a:p>
-        </p:txBody>
-      </p:sp>
-      <p:sp>
-        <p:nvSpPr>
-          <p:cNvPr id="12" name="Text 9"/>
-          <p:cNvSpPr/>
-          <p:nvPr/>
-        </p:nvSpPr>
-        <p:spPr>
-          <a:xfrm>
-            <a:off x="822960" y="2286000"/>
-            <a:ext cx="4860036" cy="2286000"/>
-          </a:xfrm>
-          <a:prstGeom prst="rect">
-            <a:avLst/>
-          </a:prstGeom>
-          <a:noFill/>
-          <a:ln/>
-        </p:spPr>
-        <p:txBody>
-          <a:bodyPr wrap="square" rtlCol="0" anchor="t">
-            <a:normAutofit/>
-          </a:bodyPr>
-          <a:lstStyle/>
-          <a:p>
-            <a:pPr indent="0" marL="0">
-              <a:spcAft>
-                <a:spcPts val="600"/>
-              </a:spcAft>
-              <a:buNone/>
-            </a:pPr>
-            <a:r>
-              <a:rPr lang="en-US" sz="1300" dirty="0">
+              <a:rPr lang="en-US" sz="1800" dirty="0">
                 <a:solidFill>
                   <a:srgbClr val="1F2937"/>
                 </a:solidFill>
@@ -7205,89 +7200,9 @@
                 <a:ea typeface="Arial" pitchFamily="34" charset="-122"/>
                 <a:cs typeface="Arial" pitchFamily="34" charset="-120"/>
               </a:rPr>
-              <a:t>1. Quanto eu economizo? → economia em R$/mês e R$/ano</a:t>
-            </a:r>
-            <a:endParaRPr lang="en-US" sz="1300" dirty="0"/>
-          </a:p>
-          <a:p>
-            <a:pPr indent="0" marL="0">
-              <a:spcAft>
-                <a:spcPts val="600"/>
-              </a:spcAft>
-              <a:buNone/>
-            </a:pPr>
-            <a:r>
-              <a:rPr lang="en-US" sz="1300" dirty="0">
-                <a:solidFill>
-                  <a:srgbClr val="1F2937"/>
-                </a:solidFill>
-                <a:latin typeface="Arial" pitchFamily="34" charset="0"/>
-                <a:ea typeface="Arial" pitchFamily="34" charset="-122"/>
-                <a:cs typeface="Arial" pitchFamily="34" charset="-120"/>
-              </a:rPr>
-              <a:t>2. Quanto eu invisto? → zero, sem obra, sem trocar medidor</a:t>
-            </a:r>
-            <a:endParaRPr lang="en-US" sz="1300" dirty="0"/>
-          </a:p>
-          <a:p>
-            <a:pPr indent="0" marL="0">
-              <a:spcAft>
-                <a:spcPts val="600"/>
-              </a:spcAft>
-              <a:buNone/>
-            </a:pPr>
-            <a:r>
-              <a:rPr lang="en-US" sz="1300" dirty="0">
-                <a:solidFill>
-                  <a:srgbClr val="1F2937"/>
-                </a:solidFill>
-                <a:latin typeface="Arial" pitchFamily="34" charset="0"/>
-                <a:ea typeface="Arial" pitchFamily="34" charset="-122"/>
-                <a:cs typeface="Arial" pitchFamily="34" charset="-120"/>
-              </a:rPr>
-              <a:t>3. Como funciona? → usina + créditos + duas contas</a:t>
-            </a:r>
-            <a:endParaRPr lang="en-US" sz="1300" dirty="0"/>
-          </a:p>
-          <a:p>
-            <a:pPr indent="0" marL="0">
-              <a:spcAft>
-                <a:spcPts val="600"/>
-              </a:spcAft>
-              <a:buNone/>
-            </a:pPr>
-            <a:r>
-              <a:rPr lang="en-US" sz="1300" dirty="0">
-                <a:solidFill>
-                  <a:srgbClr val="1F2937"/>
-                </a:solidFill>
-                <a:latin typeface="Arial" pitchFamily="34" charset="0"/>
-                <a:ea typeface="Arial" pitchFamily="34" charset="-122"/>
-                <a:cs typeface="Arial" pitchFamily="34" charset="-120"/>
-              </a:rPr>
-              <a:t>4. É seguro? → Lei 14.300, empresa, contrato</a:t>
-            </a:r>
-            <a:endParaRPr lang="en-US" sz="1300" dirty="0"/>
-          </a:p>
-          <a:p>
-            <a:pPr indent="0" marL="0">
-              <a:spcAft>
-                <a:spcPts val="600"/>
-              </a:spcAft>
-              <a:buNone/>
-            </a:pPr>
-            <a:r>
-              <a:rPr lang="en-US" sz="1300" dirty="0">
-                <a:solidFill>
-                  <a:srgbClr val="1F2937"/>
-                </a:solidFill>
-                <a:latin typeface="Arial" pitchFamily="34" charset="0"/>
-                <a:ea typeface="Arial" pitchFamily="34" charset="-122"/>
-                <a:cs typeface="Arial" pitchFamily="34" charset="-120"/>
-              </a:rPr>
-              <a:t>5. O que eu preciso fazer? → documentos e próximo passo</a:t>
-            </a:r>
-            <a:endParaRPr lang="en-US" sz="1300" dirty="0"/>
+              <a:t>Quanto eu economizo? → economia em R$/mês e R$/ano</a:t>
+            </a:r>
+            <a:endParaRPr lang="en-US" sz="1800" dirty="0"/>
           </a:p>
         </p:txBody>
       </p:sp>
@@ -7299,71 +7214,12 @@
         </p:nvSpPr>
         <p:spPr>
           <a:xfrm>
-            <a:off x="822960" y="4663440"/>
-            <a:ext cx="4860036" cy="18288"/>
-          </a:xfrm>
-          <a:prstGeom prst="rect">
-            <a:avLst/>
-          </a:prstGeom>
-          <a:solidFill>
-            <a:srgbClr val="D8E0EC"/>
-          </a:solidFill>
-          <a:ln/>
-        </p:spPr>
-      </p:sp>
-      <p:sp>
-        <p:nvSpPr>
-          <p:cNvPr id="14" name="Text 11"/>
-          <p:cNvSpPr/>
-          <p:nvPr/>
-        </p:nvSpPr>
-        <p:spPr>
-          <a:xfrm>
-            <a:off x="822960" y="4754880"/>
-            <a:ext cx="4860036" cy="1371600"/>
-          </a:xfrm>
-          <a:prstGeom prst="rect">
-            <a:avLst/>
-          </a:prstGeom>
-          <a:noFill/>
-          <a:ln/>
-        </p:spPr>
-        <p:txBody>
-          <a:bodyPr wrap="square" rtlCol="0" anchor="t"/>
-          <a:lstStyle/>
-          <a:p>
-            <a:pPr indent="0" marL="0">
-              <a:buNone/>
-            </a:pPr>
-            <a:r>
-              <a:rPr lang="en-US" sz="1300" i="1" dirty="0">
-                <a:solidFill>
-                  <a:srgbClr val="64748B"/>
-                </a:solidFill>
-                <a:latin typeface="Arial" pitchFamily="34" charset="0"/>
-                <a:ea typeface="Arial" pitchFamily="34" charset="-122"/>
-                <a:cs typeface="Arial" pitchFamily="34" charset="-120"/>
-              </a:rPr>
-              <a:t>Ela responde, nessa ordem, às cinco perguntas da tela.</a:t>
-            </a:r>
-            <a:endParaRPr lang="en-US" sz="1300" dirty="0"/>
-          </a:p>
-        </p:txBody>
-      </p:sp>
-      <p:sp>
-        <p:nvSpPr>
-          <p:cNvPr id="15" name="Shape 12"/>
-          <p:cNvSpPr/>
-          <p:nvPr/>
-        </p:nvSpPr>
-        <p:spPr>
-          <a:xfrm>
-            <a:off x="6231636" y="1325880"/>
-            <a:ext cx="5408676" cy="4937760"/>
+            <a:off x="4322064" y="1325880"/>
+            <a:ext cx="3544824" cy="1874520"/>
           </a:xfrm>
           <a:prstGeom prst="roundRect">
             <a:avLst>
-              <a:gd name="adj" fmla="val 1481"/>
+              <a:gd name="adj" fmla="val 3902"/>
             </a:avLst>
           </a:prstGeom>
           <a:solidFill>
@@ -7386,16 +7242,16 @@
       </p:sp>
       <p:sp>
         <p:nvSpPr>
-          <p:cNvPr id="16" name="Shape 13"/>
-          <p:cNvSpPr/>
-          <p:nvPr/>
-        </p:nvSpPr>
-        <p:spPr>
-          <a:xfrm>
-            <a:off x="6231636" y="1325880"/>
-            <a:ext cx="5408676" cy="109728"/>
-          </a:xfrm>
-          <a:prstGeom prst="rect">
+          <p:cNvPr id="14" name="Shape 11"/>
+          <p:cNvSpPr/>
+          <p:nvPr/>
+        </p:nvSpPr>
+        <p:spPr>
+          <a:xfrm>
+            <a:off x="4504944" y="1508760"/>
+            <a:ext cx="457200" cy="457200"/>
+          </a:xfrm>
+          <a:prstGeom prst="ellipse">
             <a:avLst/>
           </a:prstGeom>
           <a:solidFill>
@@ -7406,23 +7262,62 @@
       </p:sp>
       <p:sp>
         <p:nvSpPr>
-          <p:cNvPr id="17" name="Text 14"/>
-          <p:cNvSpPr/>
-          <p:nvPr/>
-        </p:nvSpPr>
-        <p:spPr>
-          <a:xfrm>
-            <a:off x="6505956" y="1554480"/>
-            <a:ext cx="4860036" cy="685800"/>
-          </a:xfrm>
-          <a:prstGeom prst="rect">
-            <a:avLst/>
-          </a:prstGeom>
-          <a:noFill/>
-          <a:ln/>
-        </p:spPr>
-        <p:txBody>
-          <a:bodyPr wrap="square" rtlCol="0" anchor="t">
+          <p:cNvPr id="15" name="Text 12"/>
+          <p:cNvSpPr/>
+          <p:nvPr/>
+        </p:nvSpPr>
+        <p:spPr>
+          <a:xfrm>
+            <a:off x="4504944" y="1508760"/>
+            <a:ext cx="457200" cy="457200"/>
+          </a:xfrm>
+          <a:prstGeom prst="rect">
+            <a:avLst/>
+          </a:prstGeom>
+          <a:noFill/>
+          <a:ln/>
+        </p:spPr>
+        <p:txBody>
+          <a:bodyPr wrap="square" rtlCol="0" anchor="ctr"/>
+          <a:lstStyle/>
+          <a:p>
+            <a:pPr algn="ctr" indent="0" marL="0">
+              <a:buNone/>
+            </a:pPr>
+            <a:r>
+              <a:rPr lang="en-US" sz="1400" b="1" dirty="0">
+                <a:solidFill>
+                  <a:srgbClr val="FFFFFF"/>
+                </a:solidFill>
+                <a:latin typeface="Arial" pitchFamily="34" charset="0"/>
+                <a:ea typeface="Arial" pitchFamily="34" charset="-122"/>
+                <a:cs typeface="Arial" pitchFamily="34" charset="-120"/>
+              </a:rPr>
+              <a:t>2</a:t>
+            </a:r>
+            <a:endParaRPr lang="en-US" sz="1400" dirty="0"/>
+          </a:p>
+        </p:txBody>
+      </p:sp>
+      <p:sp>
+        <p:nvSpPr>
+          <p:cNvPr id="16" name="Text 13"/>
+          <p:cNvSpPr/>
+          <p:nvPr/>
+        </p:nvSpPr>
+        <p:spPr>
+          <a:xfrm>
+            <a:off x="5099304" y="1435608"/>
+            <a:ext cx="2630424" cy="1655064"/>
+          </a:xfrm>
+          <a:prstGeom prst="rect">
+            <a:avLst/>
+          </a:prstGeom>
+          <a:noFill/>
+          <a:ln/>
+        </p:spPr>
+        <p:txBody>
+          <a:bodyPr wrap="square" rtlCol="0" anchor="ctr">
             <a:normAutofit/>
           </a:bodyPr>
           <a:lstStyle/>
@@ -7431,52 +7326,141 @@
               <a:buNone/>
             </a:pPr>
             <a:r>
-              <a:rPr lang="en-US" sz="1600" b="1" dirty="0">
-                <a:solidFill>
-                  <a:srgbClr val="1B3A6B"/>
-                </a:solidFill>
-                <a:latin typeface="Arial" pitchFamily="34" charset="0"/>
-                <a:ea typeface="Arial" pitchFamily="34" charset="-122"/>
-                <a:cs typeface="Arial" pitchFamily="34" charset="-120"/>
-              </a:rPr>
-              <a:t>A explicação das duas contas</a:t>
-            </a:r>
-            <a:endParaRPr lang="en-US" sz="1600" dirty="0"/>
-          </a:p>
-        </p:txBody>
-      </p:sp>
-      <p:sp>
-        <p:nvSpPr>
-          <p:cNvPr id="18" name="Text 15"/>
-          <p:cNvSpPr/>
-          <p:nvPr/>
-        </p:nvSpPr>
-        <p:spPr>
-          <a:xfrm>
-            <a:off x="6505956" y="2286000"/>
-            <a:ext cx="4860036" cy="2286000"/>
-          </a:xfrm>
-          <a:prstGeom prst="rect">
-            <a:avLst/>
-          </a:prstGeom>
-          <a:noFill/>
-          <a:ln/>
-        </p:spPr>
-        <p:txBody>
-          <a:bodyPr wrap="square" rtlCol="0" anchor="t">
+              <a:rPr lang="en-US" sz="1800" dirty="0">
+                <a:solidFill>
+                  <a:srgbClr val="1F2937"/>
+                </a:solidFill>
+                <a:latin typeface="Arial" pitchFamily="34" charset="0"/>
+                <a:ea typeface="Arial" pitchFamily="34" charset="-122"/>
+                <a:cs typeface="Arial" pitchFamily="34" charset="-120"/>
+              </a:rPr>
+              <a:t>Quanto eu invisto? → zero, sem obra, sem trocar medidor</a:t>
+            </a:r>
+            <a:endParaRPr lang="en-US" sz="1800" dirty="0"/>
+          </a:p>
+        </p:txBody>
+      </p:sp>
+      <p:sp>
+        <p:nvSpPr>
+          <p:cNvPr id="17" name="Shape 14"/>
+          <p:cNvSpPr/>
+          <p:nvPr/>
+        </p:nvSpPr>
+        <p:spPr>
+          <a:xfrm>
+            <a:off x="8095488" y="1325880"/>
+            <a:ext cx="3544824" cy="1874520"/>
+          </a:xfrm>
+          <a:prstGeom prst="roundRect">
+            <a:avLst>
+              <a:gd name="adj" fmla="val 3902"/>
+            </a:avLst>
+          </a:prstGeom>
+          <a:solidFill>
+            <a:srgbClr val="FFFFFF"/>
+          </a:solidFill>
+          <a:ln w="9525">
+            <a:solidFill>
+              <a:srgbClr val="D8E0EC"/>
+            </a:solidFill>
+            <a:prstDash val="solid"/>
+          </a:ln>
+          <a:effectLst>
+            <a:outerShdw sx="100000" sy="100000" kx="0" ky="0" algn="bl" rotWithShape="0" blurRad="38100" dist="12700" dir="5400000">
+              <a:srgbClr val="000000">
+                <a:alpha val="8000"/>
+              </a:srgbClr>
+            </a:outerShdw>
+          </a:effectLst>
+        </p:spPr>
+      </p:sp>
+      <p:sp>
+        <p:nvSpPr>
+          <p:cNvPr id="18" name="Shape 15"/>
+          <p:cNvSpPr/>
+          <p:nvPr/>
+        </p:nvSpPr>
+        <p:spPr>
+          <a:xfrm>
+            <a:off x="8278368" y="1508760"/>
+            <a:ext cx="457200" cy="457200"/>
+          </a:xfrm>
+          <a:prstGeom prst="ellipse">
+            <a:avLst/>
+          </a:prstGeom>
+          <a:solidFill>
+            <a:srgbClr val="1B3A6B"/>
+          </a:solidFill>
+          <a:ln/>
+        </p:spPr>
+      </p:sp>
+      <p:sp>
+        <p:nvSpPr>
+          <p:cNvPr id="19" name="Text 16"/>
+          <p:cNvSpPr/>
+          <p:nvPr/>
+        </p:nvSpPr>
+        <p:spPr>
+          <a:xfrm>
+            <a:off x="8278368" y="1508760"/>
+            <a:ext cx="457200" cy="457200"/>
+          </a:xfrm>
+          <a:prstGeom prst="rect">
+            <a:avLst/>
+          </a:prstGeom>
+          <a:noFill/>
+          <a:ln/>
+        </p:spPr>
+        <p:txBody>
+          <a:bodyPr wrap="square" rtlCol="0" anchor="ctr"/>
+          <a:lstStyle/>
+          <a:p>
+            <a:pPr algn="ctr" indent="0" marL="0">
+              <a:buNone/>
+            </a:pPr>
+            <a:r>
+              <a:rPr lang="en-US" sz="1400" b="1" dirty="0">
+                <a:solidFill>
+                  <a:srgbClr val="FFFFFF"/>
+                </a:solidFill>
+                <a:latin typeface="Arial" pitchFamily="34" charset="0"/>
+                <a:ea typeface="Arial" pitchFamily="34" charset="-122"/>
+                <a:cs typeface="Arial" pitchFamily="34" charset="-120"/>
+              </a:rPr>
+              <a:t>3</a:t>
+            </a:r>
+            <a:endParaRPr lang="en-US" sz="1400" dirty="0"/>
+          </a:p>
+        </p:txBody>
+      </p:sp>
+      <p:sp>
+        <p:nvSpPr>
+          <p:cNvPr id="20" name="Text 17"/>
+          <p:cNvSpPr/>
+          <p:nvPr/>
+        </p:nvSpPr>
+        <p:spPr>
+          <a:xfrm>
+            <a:off x="8872728" y="1435608"/>
+            <a:ext cx="2630424" cy="1655064"/>
+          </a:xfrm>
+          <a:prstGeom prst="rect">
+            <a:avLst/>
+          </a:prstGeom>
+          <a:noFill/>
+          <a:ln/>
+        </p:spPr>
+        <p:txBody>
+          <a:bodyPr wrap="square" rtlCol="0" anchor="ctr">
             <a:normAutofit/>
           </a:bodyPr>
           <a:lstStyle/>
           <a:p>
-            <a:pPr marL="342900" indent="-342900">
-              <a:spcAft>
-                <a:spcPts val="600"/>
-              </a:spcAft>
-              <a:buSzPct val="100000"/>
-              <a:buChar char="●"/>
-            </a:pPr>
-            <a:r>
-              <a:rPr lang="en-US" sz="1700" dirty="0">
+            <a:pPr indent="0" marL="0">
+              <a:buNone/>
+            </a:pPr>
+            <a:r>
+              <a:rPr lang="en-US" sz="1800" dirty="0">
                 <a:solidFill>
                   <a:srgbClr val="1F2937"/>
                 </a:solidFill>
@@ -7484,20 +7468,133 @@
                 <a:ea typeface="Arial" pitchFamily="34" charset="-122"/>
                 <a:cs typeface="Arial" pitchFamily="34" charset="-120"/>
               </a:rPr>
-              <a:t>Antes: 1 conta grande</a:t>
-            </a:r>
-            <a:endParaRPr lang="en-US" sz="1700" dirty="0"/>
-          </a:p>
-          <a:p>
-            <a:pPr marL="342900" indent="-342900">
-              <a:spcAft>
-                <a:spcPts val="600"/>
-              </a:spcAft>
-              <a:buSzPct val="100000"/>
-              <a:buChar char="●"/>
-            </a:pPr>
-            <a:r>
-              <a:rPr lang="en-US" sz="1700" dirty="0">
+              <a:t>Como funciona? → usina + créditos + duas contas</a:t>
+            </a:r>
+            <a:endParaRPr lang="en-US" sz="1800" dirty="0"/>
+          </a:p>
+        </p:txBody>
+      </p:sp>
+      <p:sp>
+        <p:nvSpPr>
+          <p:cNvPr id="21" name="Shape 18"/>
+          <p:cNvSpPr/>
+          <p:nvPr/>
+        </p:nvSpPr>
+        <p:spPr>
+          <a:xfrm>
+            <a:off x="548640" y="3429000"/>
+            <a:ext cx="3544824" cy="1874520"/>
+          </a:xfrm>
+          <a:prstGeom prst="roundRect">
+            <a:avLst>
+              <a:gd name="adj" fmla="val 3902"/>
+            </a:avLst>
+          </a:prstGeom>
+          <a:solidFill>
+            <a:srgbClr val="FFFFFF"/>
+          </a:solidFill>
+          <a:ln w="9525">
+            <a:solidFill>
+              <a:srgbClr val="D8E0EC"/>
+            </a:solidFill>
+            <a:prstDash val="solid"/>
+          </a:ln>
+          <a:effectLst>
+            <a:outerShdw sx="100000" sy="100000" kx="0" ky="0" algn="bl" rotWithShape="0" blurRad="38100" dist="12700" dir="5400000">
+              <a:srgbClr val="000000">
+                <a:alpha val="8000"/>
+              </a:srgbClr>
+            </a:outerShdw>
+          </a:effectLst>
+        </p:spPr>
+      </p:sp>
+      <p:sp>
+        <p:nvSpPr>
+          <p:cNvPr id="22" name="Shape 19"/>
+          <p:cNvSpPr/>
+          <p:nvPr/>
+        </p:nvSpPr>
+        <p:spPr>
+          <a:xfrm>
+            <a:off x="731520" y="3611880"/>
+            <a:ext cx="457200" cy="457200"/>
+          </a:xfrm>
+          <a:prstGeom prst="ellipse">
+            <a:avLst/>
+          </a:prstGeom>
+          <a:solidFill>
+            <a:srgbClr val="F7A23B"/>
+          </a:solidFill>
+          <a:ln/>
+        </p:spPr>
+      </p:sp>
+      <p:sp>
+        <p:nvSpPr>
+          <p:cNvPr id="23" name="Text 20"/>
+          <p:cNvSpPr/>
+          <p:nvPr/>
+        </p:nvSpPr>
+        <p:spPr>
+          <a:xfrm>
+            <a:off x="731520" y="3611880"/>
+            <a:ext cx="457200" cy="457200"/>
+          </a:xfrm>
+          <a:prstGeom prst="rect">
+            <a:avLst/>
+          </a:prstGeom>
+          <a:noFill/>
+          <a:ln/>
+        </p:spPr>
+        <p:txBody>
+          <a:bodyPr wrap="square" rtlCol="0" anchor="ctr"/>
+          <a:lstStyle/>
+          <a:p>
+            <a:pPr algn="ctr" indent="0" marL="0">
+              <a:buNone/>
+            </a:pPr>
+            <a:r>
+              <a:rPr lang="en-US" sz="1400" b="1" dirty="0">
+                <a:solidFill>
+                  <a:srgbClr val="FFFFFF"/>
+                </a:solidFill>
+                <a:latin typeface="Arial" pitchFamily="34" charset="0"/>
+                <a:ea typeface="Arial" pitchFamily="34" charset="-122"/>
+                <a:cs typeface="Arial" pitchFamily="34" charset="-120"/>
+              </a:rPr>
+              <a:t>4</a:t>
+            </a:r>
+            <a:endParaRPr lang="en-US" sz="1400" dirty="0"/>
+          </a:p>
+        </p:txBody>
+      </p:sp>
+      <p:sp>
+        <p:nvSpPr>
+          <p:cNvPr id="24" name="Text 21"/>
+          <p:cNvSpPr/>
+          <p:nvPr/>
+        </p:nvSpPr>
+        <p:spPr>
+          <a:xfrm>
+            <a:off x="1325880" y="3538728"/>
+            <a:ext cx="2630424" cy="1655064"/>
+          </a:xfrm>
+          <a:prstGeom prst="rect">
+            <a:avLst/>
+          </a:prstGeom>
+          <a:noFill/>
+          <a:ln/>
+        </p:spPr>
+        <p:txBody>
+          <a:bodyPr wrap="square" rtlCol="0" anchor="ctr">
+            <a:normAutofit/>
+          </a:bodyPr>
+          <a:lstStyle/>
+          <a:p>
+            <a:pPr indent="0" marL="0">
+              <a:buNone/>
+            </a:pPr>
+            <a:r>
+              <a:rPr lang="en-US" sz="1800" dirty="0">
                 <a:solidFill>
                   <a:srgbClr val="1F2937"/>
                 </a:solidFill>
@@ -7505,20 +7602,133 @@
                 <a:ea typeface="Arial" pitchFamily="34" charset="-122"/>
                 <a:cs typeface="Arial" pitchFamily="34" charset="-120"/>
               </a:rPr>
-              <a:t>Depois: 2 contas menores</a:t>
-            </a:r>
-            <a:endParaRPr lang="en-US" sz="1700" dirty="0"/>
-          </a:p>
-          <a:p>
-            <a:pPr marL="342900" indent="-342900">
-              <a:spcAft>
-                <a:spcPts val="600"/>
-              </a:spcAft>
-              <a:buSzPct val="100000"/>
-              <a:buChar char="●"/>
-            </a:pPr>
-            <a:r>
-              <a:rPr lang="en-US" sz="1700" dirty="0">
+              <a:t>É seguro? → Lei 14.300, empresa, contrato</a:t>
+            </a:r>
+            <a:endParaRPr lang="en-US" sz="1800" dirty="0"/>
+          </a:p>
+        </p:txBody>
+      </p:sp>
+      <p:sp>
+        <p:nvSpPr>
+          <p:cNvPr id="25" name="Shape 22"/>
+          <p:cNvSpPr/>
+          <p:nvPr/>
+        </p:nvSpPr>
+        <p:spPr>
+          <a:xfrm>
+            <a:off x="4322064" y="3429000"/>
+            <a:ext cx="3544824" cy="1874520"/>
+          </a:xfrm>
+          <a:prstGeom prst="roundRect">
+            <a:avLst>
+              <a:gd name="adj" fmla="val 3902"/>
+            </a:avLst>
+          </a:prstGeom>
+          <a:solidFill>
+            <a:srgbClr val="FFFFFF"/>
+          </a:solidFill>
+          <a:ln w="9525">
+            <a:solidFill>
+              <a:srgbClr val="D8E0EC"/>
+            </a:solidFill>
+            <a:prstDash val="solid"/>
+          </a:ln>
+          <a:effectLst>
+            <a:outerShdw sx="100000" sy="100000" kx="0" ky="0" algn="bl" rotWithShape="0" blurRad="38100" dist="12700" dir="5400000">
+              <a:srgbClr val="000000">
+                <a:alpha val="8000"/>
+              </a:srgbClr>
+            </a:outerShdw>
+          </a:effectLst>
+        </p:spPr>
+      </p:sp>
+      <p:sp>
+        <p:nvSpPr>
+          <p:cNvPr id="26" name="Shape 23"/>
+          <p:cNvSpPr/>
+          <p:nvPr/>
+        </p:nvSpPr>
+        <p:spPr>
+          <a:xfrm>
+            <a:off x="4504944" y="3611880"/>
+            <a:ext cx="457200" cy="457200"/>
+          </a:xfrm>
+          <a:prstGeom prst="ellipse">
+            <a:avLst/>
+          </a:prstGeom>
+          <a:solidFill>
+            <a:srgbClr val="1B3A6B"/>
+          </a:solidFill>
+          <a:ln/>
+        </p:spPr>
+      </p:sp>
+      <p:sp>
+        <p:nvSpPr>
+          <p:cNvPr id="27" name="Text 24"/>
+          <p:cNvSpPr/>
+          <p:nvPr/>
+        </p:nvSpPr>
+        <p:spPr>
+          <a:xfrm>
+            <a:off x="4504944" y="3611880"/>
+            <a:ext cx="457200" cy="457200"/>
+          </a:xfrm>
+          <a:prstGeom prst="rect">
+            <a:avLst/>
+          </a:prstGeom>
+          <a:noFill/>
+          <a:ln/>
+        </p:spPr>
+        <p:txBody>
+          <a:bodyPr wrap="square" rtlCol="0" anchor="ctr"/>
+          <a:lstStyle/>
+          <a:p>
+            <a:pPr algn="ctr" indent="0" marL="0">
+              <a:buNone/>
+            </a:pPr>
+            <a:r>
+              <a:rPr lang="en-US" sz="1400" b="1" dirty="0">
+                <a:solidFill>
+                  <a:srgbClr val="FFFFFF"/>
+                </a:solidFill>
+                <a:latin typeface="Arial" pitchFamily="34" charset="0"/>
+                <a:ea typeface="Arial" pitchFamily="34" charset="-122"/>
+                <a:cs typeface="Arial" pitchFamily="34" charset="-120"/>
+              </a:rPr>
+              <a:t>5</a:t>
+            </a:r>
+            <a:endParaRPr lang="en-US" sz="1400" dirty="0"/>
+          </a:p>
+        </p:txBody>
+      </p:sp>
+      <p:sp>
+        <p:nvSpPr>
+          <p:cNvPr id="28" name="Text 25"/>
+          <p:cNvSpPr/>
+          <p:nvPr/>
+        </p:nvSpPr>
+        <p:spPr>
+          <a:xfrm>
+            <a:off x="5099304" y="3538728"/>
+            <a:ext cx="2630424" cy="1655064"/>
+          </a:xfrm>
+          <a:prstGeom prst="rect">
+            <a:avLst/>
+          </a:prstGeom>
+          <a:noFill/>
+          <a:ln/>
+        </p:spPr>
+        <p:txBody>
+          <a:bodyPr wrap="square" rtlCol="0" anchor="ctr">
+            <a:normAutofit/>
+          </a:bodyPr>
+          <a:lstStyle/>
+          <a:p>
+            <a:pPr indent="0" marL="0">
+              <a:buNone/>
+            </a:pPr>
+            <a:r>
+              <a:rPr lang="en-US" sz="1800" dirty="0">
                 <a:solidFill>
                   <a:srgbClr val="1F2937"/>
                 </a:solidFill>
@@ -7526,68 +7736,95 @@
                 <a:ea typeface="Arial" pitchFamily="34" charset="-122"/>
                 <a:cs typeface="Arial" pitchFamily="34" charset="-120"/>
               </a:rPr>
-              <a:t>Soma menor = economia</a:t>
-            </a:r>
-            <a:endParaRPr lang="en-US" sz="1700" dirty="0"/>
-          </a:p>
-        </p:txBody>
-      </p:sp>
-      <p:sp>
-        <p:nvSpPr>
-          <p:cNvPr id="19" name="Shape 16"/>
-          <p:cNvSpPr/>
-          <p:nvPr/>
-        </p:nvSpPr>
-        <p:spPr>
-          <a:xfrm>
-            <a:off x="6505956" y="4663440"/>
-            <a:ext cx="4860036" cy="18288"/>
-          </a:xfrm>
-          <a:prstGeom prst="rect">
-            <a:avLst/>
+              <a:t>O que eu preciso fazer? → documentos e próximo passo</a:t>
+            </a:r>
+            <a:endParaRPr lang="en-US" sz="1800" dirty="0"/>
+          </a:p>
+        </p:txBody>
+      </p:sp>
+      <p:sp>
+        <p:nvSpPr>
+          <p:cNvPr id="29" name="Shape 26"/>
+          <p:cNvSpPr/>
+          <p:nvPr/>
+        </p:nvSpPr>
+        <p:spPr>
+          <a:xfrm>
+            <a:off x="548640" y="5413248"/>
+            <a:ext cx="11091672" cy="868680"/>
+          </a:xfrm>
+          <a:prstGeom prst="roundRect">
+            <a:avLst>
+              <a:gd name="adj" fmla="val 8421"/>
+            </a:avLst>
           </a:prstGeom>
           <a:solidFill>
-            <a:srgbClr val="D8E0EC"/>
+            <a:srgbClr val="EEF3FA"/>
           </a:solidFill>
-          <a:ln/>
-        </p:spPr>
-      </p:sp>
-      <p:sp>
-        <p:nvSpPr>
-          <p:cNvPr id="20" name="Text 17"/>
-          <p:cNvSpPr/>
-          <p:nvPr/>
-        </p:nvSpPr>
-        <p:spPr>
-          <a:xfrm>
-            <a:off x="6505956" y="4754880"/>
-            <a:ext cx="4860036" cy="1371600"/>
-          </a:xfrm>
-          <a:prstGeom prst="rect">
-            <a:avLst/>
-          </a:prstGeom>
-          <a:noFill/>
-          <a:ln/>
-        </p:spPr>
-        <p:txBody>
-          <a:bodyPr wrap="square" rtlCol="0" anchor="t"/>
+          <a:ln w="6350">
+            <a:solidFill>
+              <a:srgbClr val="D8E0EC"/>
+            </a:solidFill>
+            <a:prstDash val="solid"/>
+          </a:ln>
+        </p:spPr>
+      </p:sp>
+      <p:sp>
+        <p:nvSpPr>
+          <p:cNvPr id="30" name="Shape 27"/>
+          <p:cNvSpPr/>
+          <p:nvPr/>
+        </p:nvSpPr>
+        <p:spPr>
+          <a:xfrm>
+            <a:off x="548640" y="5413248"/>
+            <a:ext cx="91440" cy="868680"/>
+          </a:xfrm>
+          <a:prstGeom prst="rect">
+            <a:avLst/>
+          </a:prstGeom>
+          <a:solidFill>
+            <a:srgbClr val="F7A23B"/>
+          </a:solidFill>
+          <a:ln/>
+        </p:spPr>
+      </p:sp>
+      <p:sp>
+        <p:nvSpPr>
+          <p:cNvPr id="31" name="Text 28"/>
+          <p:cNvSpPr/>
+          <p:nvPr/>
+        </p:nvSpPr>
+        <p:spPr>
+          <a:xfrm>
+            <a:off x="777240" y="5458968"/>
+            <a:ext cx="10744200" cy="777240"/>
+          </a:xfrm>
+          <a:prstGeom prst="rect">
+            <a:avLst/>
+          </a:prstGeom>
+          <a:noFill/>
+          <a:ln/>
+        </p:spPr>
+        <p:txBody>
+          <a:bodyPr wrap="square" rtlCol="0" anchor="ctr"/>
           <a:lstStyle/>
           <a:p>
             <a:pPr indent="0" marL="0">
               <a:buNone/>
             </a:pPr>
             <a:r>
-              <a:rPr lang="en-US" sz="1300" i="1" dirty="0">
-                <a:solidFill>
-                  <a:srgbClr val="64748B"/>
-                </a:solidFill>
-                <a:latin typeface="Arial" pitchFamily="34" charset="0"/>
-                <a:ea typeface="Arial" pitchFamily="34" charset="-122"/>
-                <a:cs typeface="Arial" pitchFamily="34" charset="-120"/>
-              </a:rPr>
-              <a:t>O ponto mais importante é explicar as duas contas. O cliente passa a pagar duas contas menores que, somadas, ficam abaixo da de hoje. Quem não entende isso cancela no primeiro mês por susto. Repita na proposta, na reunião e nas boas-vindas.</a:t>
-            </a:r>
-            <a:endParaRPr lang="en-US" sz="1300" dirty="0"/>
+              <a:rPr lang="en-US" sz="1500" dirty="0">
+                <a:solidFill>
+                  <a:srgbClr val="1F2937"/>
+                </a:solidFill>
+                <a:latin typeface="Arial" pitchFamily="34" charset="0"/>
+                <a:ea typeface="Arial" pitchFamily="34" charset="-122"/>
+                <a:cs typeface="Arial" pitchFamily="34" charset="-120"/>
+              </a:rPr>
+              <a:t>Ela responde, nessa ordem, às cinco perguntas da tela.</a:t>
+            </a:r>
+            <a:endParaRPr lang="en-US" sz="1500" dirty="0"/>
           </a:p>
         </p:txBody>
       </p:sp>
@@ -7892,7 +8129,7 @@
                 <a:ea typeface="Arial" pitchFamily="34" charset="-122"/>
                 <a:cs typeface="Arial" pitchFamily="34" charset="-120"/>
               </a:rPr>
-              <a:t>Condições que precisam estar claras</a:t>
+              <a:t>A explicação das duas contas</a:t>
             </a:r>
             <a:endParaRPr lang="en-US" sz="2600" dirty="0"/>
           </a:p>
@@ -7907,11 +8144,11 @@
         <p:spPr>
           <a:xfrm>
             <a:off x="548640" y="1325880"/>
-            <a:ext cx="3544824" cy="1874520"/>
+            <a:ext cx="3544824" cy="3977640"/>
           </a:xfrm>
           <a:prstGeom prst="roundRect">
             <a:avLst>
-              <a:gd name="adj" fmla="val 3902"/>
+              <a:gd name="adj" fmla="val 2064"/>
             </a:avLst>
           </a:prstGeom>
           <a:solidFill>
@@ -8000,7 +8237,7 @@
         <p:spPr>
           <a:xfrm>
             <a:off x="1325880" y="1435608"/>
-            <a:ext cx="2630424" cy="1655064"/>
+            <a:ext cx="2630424" cy="3758184"/>
           </a:xfrm>
           <a:prstGeom prst="rect">
             <a:avLst/>
@@ -8026,7 +8263,7 @@
                 <a:ea typeface="Arial" pitchFamily="34" charset="-122"/>
                 <a:cs typeface="Arial" pitchFamily="34" charset="-120"/>
               </a:rPr>
-              <a:t>Prazo</a:t>
+              <a:t>Antes: 1 conta grande</a:t>
             </a:r>
             <a:endParaRPr lang="en-US" sz="1800" dirty="0"/>
           </a:p>
@@ -8041,11 +8278,11 @@
         <p:spPr>
           <a:xfrm>
             <a:off x="4322064" y="1325880"/>
-            <a:ext cx="3544824" cy="1874520"/>
+            <a:ext cx="3544824" cy="3977640"/>
           </a:xfrm>
           <a:prstGeom prst="roundRect">
             <a:avLst>
-              <a:gd name="adj" fmla="val 3902"/>
+              <a:gd name="adj" fmla="val 2064"/>
             </a:avLst>
           </a:prstGeom>
           <a:solidFill>
@@ -8134,7 +8371,7 @@
         <p:spPr>
           <a:xfrm>
             <a:off x="5099304" y="1435608"/>
-            <a:ext cx="2630424" cy="1655064"/>
+            <a:ext cx="2630424" cy="3758184"/>
           </a:xfrm>
           <a:prstGeom prst="rect">
             <a:avLst/>
@@ -8160,7 +8397,7 @@
                 <a:ea typeface="Arial" pitchFamily="34" charset="-122"/>
                 <a:cs typeface="Arial" pitchFamily="34" charset="-120"/>
               </a:rPr>
-              <a:t>início previsto dos créditos</a:t>
+              <a:t>Depois: 2 contas menores</a:t>
             </a:r>
             <a:endParaRPr lang="en-US" sz="1800" dirty="0"/>
           </a:p>
@@ -8175,11 +8412,11 @@
         <p:spPr>
           <a:xfrm>
             <a:off x="8095488" y="1325880"/>
-            <a:ext cx="3544824" cy="1874520"/>
+            <a:ext cx="3544824" cy="3977640"/>
           </a:xfrm>
           <a:prstGeom prst="roundRect">
             <a:avLst>
-              <a:gd name="adj" fmla="val 3902"/>
+              <a:gd name="adj" fmla="val 2064"/>
             </a:avLst>
           </a:prstGeom>
           <a:solidFill>
@@ -8268,7 +8505,7 @@
         <p:spPr>
           <a:xfrm>
             <a:off x="8872728" y="1435608"/>
-            <a:ext cx="2630424" cy="1655064"/>
+            <a:ext cx="2630424" cy="3758184"/>
           </a:xfrm>
           <a:prstGeom prst="rect">
             <a:avLst/>
@@ -8294,7 +8531,7 @@
                 <a:ea typeface="Arial" pitchFamily="34" charset="-122"/>
                 <a:cs typeface="Arial" pitchFamily="34" charset="-120"/>
               </a:rPr>
-              <a:t>como o valor é calculado todo mês</a:t>
+              <a:t>Soma menor = economia</a:t>
             </a:r>
             <a:endParaRPr lang="en-US" sz="1800" dirty="0"/>
           </a:p>
@@ -8303,408 +8540,6 @@
       <p:sp>
         <p:nvSpPr>
           <p:cNvPr id="21" name="Shape 18"/>
-          <p:cNvSpPr/>
-          <p:nvPr/>
-        </p:nvSpPr>
-        <p:spPr>
-          <a:xfrm>
-            <a:off x="548640" y="3429000"/>
-            <a:ext cx="3544824" cy="1874520"/>
-          </a:xfrm>
-          <a:prstGeom prst="roundRect">
-            <a:avLst>
-              <a:gd name="adj" fmla="val 3902"/>
-            </a:avLst>
-          </a:prstGeom>
-          <a:solidFill>
-            <a:srgbClr val="FFFFFF"/>
-          </a:solidFill>
-          <a:ln w="9525">
-            <a:solidFill>
-              <a:srgbClr val="D8E0EC"/>
-            </a:solidFill>
-            <a:prstDash val="solid"/>
-          </a:ln>
-          <a:effectLst>
-            <a:outerShdw sx="100000" sy="100000" kx="0" ky="0" algn="bl" rotWithShape="0" blurRad="38100" dist="12700" dir="5400000">
-              <a:srgbClr val="000000">
-                <a:alpha val="8000"/>
-              </a:srgbClr>
-            </a:outerShdw>
-          </a:effectLst>
-        </p:spPr>
-      </p:sp>
-      <p:sp>
-        <p:nvSpPr>
-          <p:cNvPr id="22" name="Shape 19"/>
-          <p:cNvSpPr/>
-          <p:nvPr/>
-        </p:nvSpPr>
-        <p:spPr>
-          <a:xfrm>
-            <a:off x="731520" y="3611880"/>
-            <a:ext cx="457200" cy="457200"/>
-          </a:xfrm>
-          <a:prstGeom prst="ellipse">
-            <a:avLst/>
-          </a:prstGeom>
-          <a:solidFill>
-            <a:srgbClr val="F7A23B"/>
-          </a:solidFill>
-          <a:ln/>
-        </p:spPr>
-      </p:sp>
-      <p:sp>
-        <p:nvSpPr>
-          <p:cNvPr id="23" name="Text 20"/>
-          <p:cNvSpPr/>
-          <p:nvPr/>
-        </p:nvSpPr>
-        <p:spPr>
-          <a:xfrm>
-            <a:off x="731520" y="3611880"/>
-            <a:ext cx="457200" cy="457200"/>
-          </a:xfrm>
-          <a:prstGeom prst="rect">
-            <a:avLst/>
-          </a:prstGeom>
-          <a:noFill/>
-          <a:ln/>
-        </p:spPr>
-        <p:txBody>
-          <a:bodyPr wrap="square" rtlCol="0" anchor="ctr"/>
-          <a:lstStyle/>
-          <a:p>
-            <a:pPr algn="ctr" indent="0" marL="0">
-              <a:buNone/>
-            </a:pPr>
-            <a:r>
-              <a:rPr lang="en-US" sz="1400" b="1" dirty="0">
-                <a:solidFill>
-                  <a:srgbClr val="FFFFFF"/>
-                </a:solidFill>
-                <a:latin typeface="Arial" pitchFamily="34" charset="0"/>
-                <a:ea typeface="Arial" pitchFamily="34" charset="-122"/>
-                <a:cs typeface="Arial" pitchFamily="34" charset="-120"/>
-              </a:rPr>
-              <a:t>4</a:t>
-            </a:r>
-            <a:endParaRPr lang="en-US" sz="1400" dirty="0"/>
-          </a:p>
-        </p:txBody>
-      </p:sp>
-      <p:sp>
-        <p:nvSpPr>
-          <p:cNvPr id="24" name="Text 21"/>
-          <p:cNvSpPr/>
-          <p:nvPr/>
-        </p:nvSpPr>
-        <p:spPr>
-          <a:xfrm>
-            <a:off x="1325880" y="3538728"/>
-            <a:ext cx="2630424" cy="1655064"/>
-          </a:xfrm>
-          <a:prstGeom prst="rect">
-            <a:avLst/>
-          </a:prstGeom>
-          <a:noFill/>
-          <a:ln/>
-        </p:spPr>
-        <p:txBody>
-          <a:bodyPr wrap="square" rtlCol="0" anchor="ctr">
-            <a:normAutofit/>
-          </a:bodyPr>
-          <a:lstStyle/>
-          <a:p>
-            <a:pPr indent="0" marL="0">
-              <a:buNone/>
-            </a:pPr>
-            <a:r>
-              <a:rPr lang="en-US" sz="1800" dirty="0">
-                <a:solidFill>
-                  <a:srgbClr val="1F2937"/>
-                </a:solidFill>
-                <a:latin typeface="Arial" pitchFamily="34" charset="0"/>
-                <a:ea typeface="Arial" pitchFamily="34" charset="-122"/>
-                <a:cs typeface="Arial" pitchFamily="34" charset="-120"/>
-              </a:rPr>
-              <a:t>reajuste e regras da distribuidora</a:t>
-            </a:r>
-            <a:endParaRPr lang="en-US" sz="1800" dirty="0"/>
-          </a:p>
-        </p:txBody>
-      </p:sp>
-      <p:sp>
-        <p:nvSpPr>
-          <p:cNvPr id="25" name="Shape 22"/>
-          <p:cNvSpPr/>
-          <p:nvPr/>
-        </p:nvSpPr>
-        <p:spPr>
-          <a:xfrm>
-            <a:off x="4322064" y="3429000"/>
-            <a:ext cx="3544824" cy="1874520"/>
-          </a:xfrm>
-          <a:prstGeom prst="roundRect">
-            <a:avLst>
-              <a:gd name="adj" fmla="val 3902"/>
-            </a:avLst>
-          </a:prstGeom>
-          <a:solidFill>
-            <a:srgbClr val="FFFFFF"/>
-          </a:solidFill>
-          <a:ln w="9525">
-            <a:solidFill>
-              <a:srgbClr val="D8E0EC"/>
-            </a:solidFill>
-            <a:prstDash val="solid"/>
-          </a:ln>
-          <a:effectLst>
-            <a:outerShdw sx="100000" sy="100000" kx="0" ky="0" algn="bl" rotWithShape="0" blurRad="38100" dist="12700" dir="5400000">
-              <a:srgbClr val="000000">
-                <a:alpha val="8000"/>
-              </a:srgbClr>
-            </a:outerShdw>
-          </a:effectLst>
-        </p:spPr>
-      </p:sp>
-      <p:sp>
-        <p:nvSpPr>
-          <p:cNvPr id="26" name="Shape 23"/>
-          <p:cNvSpPr/>
-          <p:nvPr/>
-        </p:nvSpPr>
-        <p:spPr>
-          <a:xfrm>
-            <a:off x="4504944" y="3611880"/>
-            <a:ext cx="457200" cy="457200"/>
-          </a:xfrm>
-          <a:prstGeom prst="ellipse">
-            <a:avLst/>
-          </a:prstGeom>
-          <a:solidFill>
-            <a:srgbClr val="1B3A6B"/>
-          </a:solidFill>
-          <a:ln/>
-        </p:spPr>
-      </p:sp>
-      <p:sp>
-        <p:nvSpPr>
-          <p:cNvPr id="27" name="Text 24"/>
-          <p:cNvSpPr/>
-          <p:nvPr/>
-        </p:nvSpPr>
-        <p:spPr>
-          <a:xfrm>
-            <a:off x="4504944" y="3611880"/>
-            <a:ext cx="457200" cy="457200"/>
-          </a:xfrm>
-          <a:prstGeom prst="rect">
-            <a:avLst/>
-          </a:prstGeom>
-          <a:noFill/>
-          <a:ln/>
-        </p:spPr>
-        <p:txBody>
-          <a:bodyPr wrap="square" rtlCol="0" anchor="ctr"/>
-          <a:lstStyle/>
-          <a:p>
-            <a:pPr algn="ctr" indent="0" marL="0">
-              <a:buNone/>
-            </a:pPr>
-            <a:r>
-              <a:rPr lang="en-US" sz="1400" b="1" dirty="0">
-                <a:solidFill>
-                  <a:srgbClr val="FFFFFF"/>
-                </a:solidFill>
-                <a:latin typeface="Arial" pitchFamily="34" charset="0"/>
-                <a:ea typeface="Arial" pitchFamily="34" charset="-122"/>
-                <a:cs typeface="Arial" pitchFamily="34" charset="-120"/>
-              </a:rPr>
-              <a:t>5</a:t>
-            </a:r>
-            <a:endParaRPr lang="en-US" sz="1400" dirty="0"/>
-          </a:p>
-        </p:txBody>
-      </p:sp>
-      <p:sp>
-        <p:nvSpPr>
-          <p:cNvPr id="28" name="Text 25"/>
-          <p:cNvSpPr/>
-          <p:nvPr/>
-        </p:nvSpPr>
-        <p:spPr>
-          <a:xfrm>
-            <a:off x="5099304" y="3538728"/>
-            <a:ext cx="2630424" cy="1655064"/>
-          </a:xfrm>
-          <a:prstGeom prst="rect">
-            <a:avLst/>
-          </a:prstGeom>
-          <a:noFill/>
-          <a:ln/>
-        </p:spPr>
-        <p:txBody>
-          <a:bodyPr wrap="square" rtlCol="0" anchor="ctr">
-            <a:normAutofit/>
-          </a:bodyPr>
-          <a:lstStyle/>
-          <a:p>
-            <a:pPr indent="0" marL="0">
-              <a:buNone/>
-            </a:pPr>
-            <a:r>
-              <a:rPr lang="en-US" sz="1800" dirty="0">
-                <a:solidFill>
-                  <a:srgbClr val="1F2937"/>
-                </a:solidFill>
-                <a:latin typeface="Arial" pitchFamily="34" charset="0"/>
-                <a:ea typeface="Arial" pitchFamily="34" charset="-122"/>
-                <a:cs typeface="Arial" pitchFamily="34" charset="-120"/>
-              </a:rPr>
-              <a:t>cancelamento</a:t>
-            </a:r>
-            <a:endParaRPr lang="en-US" sz="1800" dirty="0"/>
-          </a:p>
-        </p:txBody>
-      </p:sp>
-      <p:sp>
-        <p:nvSpPr>
-          <p:cNvPr id="29" name="Shape 26"/>
-          <p:cNvSpPr/>
-          <p:nvPr/>
-        </p:nvSpPr>
-        <p:spPr>
-          <a:xfrm>
-            <a:off x="8095488" y="3429000"/>
-            <a:ext cx="3544824" cy="1874520"/>
-          </a:xfrm>
-          <a:prstGeom prst="roundRect">
-            <a:avLst>
-              <a:gd name="adj" fmla="val 3902"/>
-            </a:avLst>
-          </a:prstGeom>
-          <a:solidFill>
-            <a:srgbClr val="FFFFFF"/>
-          </a:solidFill>
-          <a:ln w="9525">
-            <a:solidFill>
-              <a:srgbClr val="D8E0EC"/>
-            </a:solidFill>
-            <a:prstDash val="solid"/>
-          </a:ln>
-          <a:effectLst>
-            <a:outerShdw sx="100000" sy="100000" kx="0" ky="0" algn="bl" rotWithShape="0" blurRad="38100" dist="12700" dir="5400000">
-              <a:srgbClr val="000000">
-                <a:alpha val="8000"/>
-              </a:srgbClr>
-            </a:outerShdw>
-          </a:effectLst>
-        </p:spPr>
-      </p:sp>
-      <p:sp>
-        <p:nvSpPr>
-          <p:cNvPr id="30" name="Shape 27"/>
-          <p:cNvSpPr/>
-          <p:nvPr/>
-        </p:nvSpPr>
-        <p:spPr>
-          <a:xfrm>
-            <a:off x="8278368" y="3611880"/>
-            <a:ext cx="457200" cy="457200"/>
-          </a:xfrm>
-          <a:prstGeom prst="ellipse">
-            <a:avLst/>
-          </a:prstGeom>
-          <a:solidFill>
-            <a:srgbClr val="F7A23B"/>
-          </a:solidFill>
-          <a:ln/>
-        </p:spPr>
-      </p:sp>
-      <p:sp>
-        <p:nvSpPr>
-          <p:cNvPr id="31" name="Text 28"/>
-          <p:cNvSpPr/>
-          <p:nvPr/>
-        </p:nvSpPr>
-        <p:spPr>
-          <a:xfrm>
-            <a:off x="8278368" y="3611880"/>
-            <a:ext cx="457200" cy="457200"/>
-          </a:xfrm>
-          <a:prstGeom prst="rect">
-            <a:avLst/>
-          </a:prstGeom>
-          <a:noFill/>
-          <a:ln/>
-        </p:spPr>
-        <p:txBody>
-          <a:bodyPr wrap="square" rtlCol="0" anchor="ctr"/>
-          <a:lstStyle/>
-          <a:p>
-            <a:pPr algn="ctr" indent="0" marL="0">
-              <a:buNone/>
-            </a:pPr>
-            <a:r>
-              <a:rPr lang="en-US" sz="1400" b="1" dirty="0">
-                <a:solidFill>
-                  <a:srgbClr val="FFFFFF"/>
-                </a:solidFill>
-                <a:latin typeface="Arial" pitchFamily="34" charset="0"/>
-                <a:ea typeface="Arial" pitchFamily="34" charset="-122"/>
-                <a:cs typeface="Arial" pitchFamily="34" charset="-120"/>
-              </a:rPr>
-              <a:t>6</a:t>
-            </a:r>
-            <a:endParaRPr lang="en-US" sz="1400" dirty="0"/>
-          </a:p>
-        </p:txBody>
-      </p:sp>
-      <p:sp>
-        <p:nvSpPr>
-          <p:cNvPr id="32" name="Text 29"/>
-          <p:cNvSpPr/>
-          <p:nvPr/>
-        </p:nvSpPr>
-        <p:spPr>
-          <a:xfrm>
-            <a:off x="8872728" y="3538728"/>
-            <a:ext cx="2630424" cy="1655064"/>
-          </a:xfrm>
-          <a:prstGeom prst="rect">
-            <a:avLst/>
-          </a:prstGeom>
-          <a:noFill/>
-          <a:ln/>
-        </p:spPr>
-        <p:txBody>
-          <a:bodyPr wrap="square" rtlCol="0" anchor="ctr">
-            <a:normAutofit/>
-          </a:bodyPr>
-          <a:lstStyle/>
-          <a:p>
-            <a:pPr indent="0" marL="0">
-              <a:buNone/>
-            </a:pPr>
-            <a:r>
-              <a:rPr lang="en-US" sz="1800" dirty="0">
-                <a:solidFill>
-                  <a:srgbClr val="1F2937"/>
-                </a:solidFill>
-                <a:latin typeface="Arial" pitchFamily="34" charset="0"/>
-                <a:ea typeface="Arial" pitchFamily="34" charset="-122"/>
-                <a:cs typeface="Arial" pitchFamily="34" charset="-120"/>
-              </a:rPr>
-              <a:t>validade da proposta</a:t>
-            </a:r>
-            <a:endParaRPr lang="en-US" sz="1800" dirty="0"/>
-          </a:p>
-        </p:txBody>
-      </p:sp>
-      <p:sp>
-        <p:nvSpPr>
-          <p:cNvPr id="33" name="Shape 30"/>
           <p:cNvSpPr/>
           <p:nvPr/>
         </p:nvSpPr>
@@ -8731,7 +8566,7 @@
       </p:sp>
       <p:sp>
         <p:nvSpPr>
-          <p:cNvPr id="34" name="Shape 31"/>
+          <p:cNvPr id="22" name="Shape 19"/>
           <p:cNvSpPr/>
           <p:nvPr/>
         </p:nvSpPr>
@@ -8751,7 +8586,7 @@
       </p:sp>
       <p:sp>
         <p:nvSpPr>
-          <p:cNvPr id="35" name="Text 32"/>
+          <p:cNvPr id="23" name="Text 20"/>
           <p:cNvSpPr/>
           <p:nvPr/>
         </p:nvSpPr>
@@ -8782,7 +8617,7 @@
                 <a:ea typeface="Arial" pitchFamily="34" charset="-122"/>
                 <a:cs typeface="Arial" pitchFamily="34" charset="-120"/>
               </a:rPr>
-              <a:t>As condições da tela precisam estar escritas, sem letras miúdas.</a:t>
+              <a:t>O ponto mais importante é explicar as duas contas. O cliente passa a pagar duas contas menores que, somadas, ficam abaixo da de hoje. Quem não entende isso cancela no primeiro mês por susto. Repita na proposta, na reunião e nas boas-vindas.</a:t>
             </a:r>
             <a:endParaRPr lang="en-US" sz="1500" dirty="0"/>
           </a:p>
@@ -9089,7 +8924,7 @@
                 <a:ea typeface="Arial" pitchFamily="34" charset="-122"/>
                 <a:cs typeface="Arial" pitchFamily="34" charset="-120"/>
               </a:rPr>
-              <a:t>A reunião de apresentação</a:t>
+              <a:t>Condições que precisam estar claras</a:t>
             </a:r>
             <a:endParaRPr lang="en-US" sz="2600" dirty="0"/>
           </a:p>
@@ -9223,7 +9058,7 @@
                 <a:ea typeface="Arial" pitchFamily="34" charset="-122"/>
                 <a:cs typeface="Arial" pitchFamily="34" charset="-120"/>
               </a:rPr>
-              <a:t>0–3 min: a conta dele hoje (dor)</a:t>
+              <a:t>Prazo</a:t>
             </a:r>
             <a:endParaRPr lang="en-US" sz="1800" dirty="0"/>
           </a:p>
@@ -9357,7 +9192,7 @@
                 <a:ea typeface="Arial" pitchFamily="34" charset="-122"/>
                 <a:cs typeface="Arial" pitchFamily="34" charset="-120"/>
               </a:rPr>
-              <a:t>3–7 min: como funciona + duas contas</a:t>
+              <a:t>início previsto dos créditos</a:t>
             </a:r>
             <a:endParaRPr lang="en-US" sz="1800" dirty="0"/>
           </a:p>
@@ -9491,7 +9326,7 @@
                 <a:ea typeface="Arial" pitchFamily="34" charset="-122"/>
                 <a:cs typeface="Arial" pitchFamily="34" charset="-120"/>
               </a:rPr>
-              <a:t>7–10 min: economia em R$ e prova (lei, empresa, clientes)</a:t>
+              <a:t>como o valor é calculado todo mês</a:t>
             </a:r>
             <a:endParaRPr lang="en-US" sz="1800" dirty="0"/>
           </a:p>
@@ -9625,7 +9460,7 @@
                 <a:ea typeface="Arial" pitchFamily="34" charset="-122"/>
                 <a:cs typeface="Arial" pitchFamily="34" charset="-120"/>
               </a:rPr>
-              <a:t>10–13 min: dúvidas e objeções</a:t>
+              <a:t>reajuste e regras da distribuidora</a:t>
             </a:r>
             <a:endParaRPr lang="en-US" sz="1800" dirty="0"/>
           </a:p>
@@ -9759,7 +9594,7 @@
                 <a:ea typeface="Arial" pitchFamily="34" charset="-122"/>
                 <a:cs typeface="Arial" pitchFamily="34" charset="-120"/>
               </a:rPr>
-              <a:t>13–15 min: próximo passo e documentos</a:t>
+              <a:t>cancelamento</a:t>
             </a:r>
             <a:endParaRPr lang="en-US" sz="1800" dirty="0"/>
           </a:p>
@@ -9768,6 +9603,140 @@
       <p:sp>
         <p:nvSpPr>
           <p:cNvPr id="29" name="Shape 26"/>
+          <p:cNvSpPr/>
+          <p:nvPr/>
+        </p:nvSpPr>
+        <p:spPr>
+          <a:xfrm>
+            <a:off x="8095488" y="3429000"/>
+            <a:ext cx="3544824" cy="1874520"/>
+          </a:xfrm>
+          <a:prstGeom prst="roundRect">
+            <a:avLst>
+              <a:gd name="adj" fmla="val 3902"/>
+            </a:avLst>
+          </a:prstGeom>
+          <a:solidFill>
+            <a:srgbClr val="FFFFFF"/>
+          </a:solidFill>
+          <a:ln w="9525">
+            <a:solidFill>
+              <a:srgbClr val="D8E0EC"/>
+            </a:solidFill>
+            <a:prstDash val="solid"/>
+          </a:ln>
+          <a:effectLst>
+            <a:outerShdw sx="100000" sy="100000" kx="0" ky="0" algn="bl" rotWithShape="0" blurRad="38100" dist="12700" dir="5400000">
+              <a:srgbClr val="000000">
+                <a:alpha val="8000"/>
+              </a:srgbClr>
+            </a:outerShdw>
+          </a:effectLst>
+        </p:spPr>
+      </p:sp>
+      <p:sp>
+        <p:nvSpPr>
+          <p:cNvPr id="30" name="Shape 27"/>
+          <p:cNvSpPr/>
+          <p:nvPr/>
+        </p:nvSpPr>
+        <p:spPr>
+          <a:xfrm>
+            <a:off x="8278368" y="3611880"/>
+            <a:ext cx="457200" cy="457200"/>
+          </a:xfrm>
+          <a:prstGeom prst="ellipse">
+            <a:avLst/>
+          </a:prstGeom>
+          <a:solidFill>
+            <a:srgbClr val="F7A23B"/>
+          </a:solidFill>
+          <a:ln/>
+        </p:spPr>
+      </p:sp>
+      <p:sp>
+        <p:nvSpPr>
+          <p:cNvPr id="31" name="Text 28"/>
+          <p:cNvSpPr/>
+          <p:nvPr/>
+        </p:nvSpPr>
+        <p:spPr>
+          <a:xfrm>
+            <a:off x="8278368" y="3611880"/>
+            <a:ext cx="457200" cy="457200"/>
+          </a:xfrm>
+          <a:prstGeom prst="rect">
+            <a:avLst/>
+          </a:prstGeom>
+          <a:noFill/>
+          <a:ln/>
+        </p:spPr>
+        <p:txBody>
+          <a:bodyPr wrap="square" rtlCol="0" anchor="ctr"/>
+          <a:lstStyle/>
+          <a:p>
+            <a:pPr algn="ctr" indent="0" marL="0">
+              <a:buNone/>
+            </a:pPr>
+            <a:r>
+              <a:rPr lang="en-US" sz="1400" b="1" dirty="0">
+                <a:solidFill>
+                  <a:srgbClr val="FFFFFF"/>
+                </a:solidFill>
+                <a:latin typeface="Arial" pitchFamily="34" charset="0"/>
+                <a:ea typeface="Arial" pitchFamily="34" charset="-122"/>
+                <a:cs typeface="Arial" pitchFamily="34" charset="-120"/>
+              </a:rPr>
+              <a:t>6</a:t>
+            </a:r>
+            <a:endParaRPr lang="en-US" sz="1400" dirty="0"/>
+          </a:p>
+        </p:txBody>
+      </p:sp>
+      <p:sp>
+        <p:nvSpPr>
+          <p:cNvPr id="32" name="Text 29"/>
+          <p:cNvSpPr/>
+          <p:nvPr/>
+        </p:nvSpPr>
+        <p:spPr>
+          <a:xfrm>
+            <a:off x="8872728" y="3538728"/>
+            <a:ext cx="2630424" cy="1655064"/>
+          </a:xfrm>
+          <a:prstGeom prst="rect">
+            <a:avLst/>
+          </a:prstGeom>
+          <a:noFill/>
+          <a:ln/>
+        </p:spPr>
+        <p:txBody>
+          <a:bodyPr wrap="square" rtlCol="0" anchor="ctr">
+            <a:normAutofit/>
+          </a:bodyPr>
+          <a:lstStyle/>
+          <a:p>
+            <a:pPr indent="0" marL="0">
+              <a:buNone/>
+            </a:pPr>
+            <a:r>
+              <a:rPr lang="en-US" sz="1800" dirty="0">
+                <a:solidFill>
+                  <a:srgbClr val="1F2937"/>
+                </a:solidFill>
+                <a:latin typeface="Arial" pitchFamily="34" charset="0"/>
+                <a:ea typeface="Arial" pitchFamily="34" charset="-122"/>
+                <a:cs typeface="Arial" pitchFamily="34" charset="-120"/>
+              </a:rPr>
+              <a:t>validade da proposta</a:t>
+            </a:r>
+            <a:endParaRPr lang="en-US" sz="1800" dirty="0"/>
+          </a:p>
+        </p:txBody>
+      </p:sp>
+      <p:sp>
+        <p:nvSpPr>
+          <p:cNvPr id="33" name="Shape 30"/>
           <p:cNvSpPr/>
           <p:nvPr/>
         </p:nvSpPr>
@@ -9794,7 +9763,7 @@
       </p:sp>
       <p:sp>
         <p:nvSpPr>
-          <p:cNvPr id="30" name="Shape 27"/>
+          <p:cNvPr id="34" name="Shape 31"/>
           <p:cNvSpPr/>
           <p:nvPr/>
         </p:nvSpPr>
@@ -9814,7 +9783,7 @@
       </p:sp>
       <p:sp>
         <p:nvSpPr>
-          <p:cNvPr id="31" name="Text 28"/>
+          <p:cNvPr id="35" name="Text 32"/>
           <p:cNvSpPr/>
           <p:nvPr/>
         </p:nvSpPr>
@@ -9845,7 +9814,7 @@
                 <a:ea typeface="Arial" pitchFamily="34" charset="-122"/>
                 <a:cs typeface="Arial" pitchFamily="34" charset="-120"/>
               </a:rPr>
-              <a:t>Apresente a proposta em quinze minutos, seguindo o roteiro da tela, e saia sempre com o próximo passo marcado.</a:t>
+              <a:t>As condições da tela precisam estar escritas, sem letras miúdas.</a:t>
             </a:r>
             <a:endParaRPr lang="en-US" sz="1500" dirty="0"/>
           </a:p>
@@ -9910,6 +9879,1069 @@
 <file path=ppt/slides/slide17.xml><?xml version="1.0" encoding="utf-8"?>
 <p:sld xmlns:a="http://schemas.openxmlformats.org/drawingml/2006/main" xmlns:r="http://schemas.openxmlformats.org/officeDocument/2006/relationships" xmlns:p="http://schemas.openxmlformats.org/presentationml/2006/main">
   <p:cSld name="Slide 17">
+    <p:bg>
+      <p:bgPr>
+        <a:solidFill>
+          <a:srgbClr val="F6F8FB"/>
+        </a:solidFill>
+      </p:bgPr>
+    </p:bg>
+    <p:spTree>
+      <p:nvGrpSpPr>
+        <p:cNvPr id="1" name=""/>
+        <p:cNvGrpSpPr/>
+        <p:nvPr/>
+      </p:nvGrpSpPr>
+      <p:grpSpPr>
+        <a:xfrm>
+          <a:off x="0" y="0"/>
+          <a:ext cx="0" cy="0"/>
+          <a:chOff x="0" y="0"/>
+          <a:chExt cx="0" cy="0"/>
+        </a:xfrm>
+      </p:grpSpPr>
+      <p:sp>
+        <p:nvSpPr>
+          <p:cNvPr id="2" name="Shape 0"/>
+          <p:cNvSpPr/>
+          <p:nvPr/>
+        </p:nvSpPr>
+        <p:spPr>
+          <a:xfrm>
+            <a:off x="0" y="6510528"/>
+            <a:ext cx="12191695" cy="347472"/>
+          </a:xfrm>
+          <a:prstGeom prst="rect">
+            <a:avLst/>
+          </a:prstGeom>
+          <a:solidFill>
+            <a:srgbClr val="FFFFFF"/>
+          </a:solidFill>
+          <a:ln w="6350">
+            <a:solidFill>
+              <a:srgbClr val="D8E0EC"/>
+            </a:solidFill>
+            <a:prstDash val="solid"/>
+          </a:ln>
+        </p:spPr>
+      </p:sp>
+      <p:pic>
+        <p:nvPicPr>
+          <p:cNvPr id="3" name="Image 0" descr="/www/wwwroot/rexar/gdsolar/docs/curso/slides/assets/logo-gdsolar.png">    </p:cNvPr>
+          <p:cNvPicPr>
+            <a:picLocks noChangeAspect="1"/>
+          </p:cNvPicPr>
+          <p:nvPr/>
+        </p:nvPicPr>
+        <p:blipFill>
+          <a:blip r:embed="rId1"/>
+          <a:stretch>
+            <a:fillRect/>
+          </a:stretch>
+        </p:blipFill>
+        <p:spPr>
+          <a:xfrm>
+            <a:off x="548640" y="6547104"/>
+            <a:ext cx="274320" cy="274320"/>
+          </a:xfrm>
+          <a:prstGeom prst="rect">
+            <a:avLst/>
+          </a:prstGeom>
+        </p:spPr>
+      </p:pic>
+      <p:sp>
+        <p:nvSpPr>
+          <p:cNvPr id="4" name="Text 1"/>
+          <p:cNvSpPr/>
+          <p:nvPr/>
+        </p:nvSpPr>
+        <p:spPr>
+          <a:xfrm>
+            <a:off x="886968" y="6528816"/>
+            <a:ext cx="6400800" cy="310896"/>
+          </a:xfrm>
+          <a:prstGeom prst="rect">
+            <a:avLst/>
+          </a:prstGeom>
+          <a:noFill/>
+          <a:ln/>
+        </p:spPr>
+        <p:txBody>
+          <a:bodyPr wrap="square" rtlCol="0" anchor="ctr"/>
+          <a:lstStyle/>
+          <a:p>
+            <a:pPr indent="0" marL="0">
+              <a:buNone/>
+            </a:pPr>
+            <a:r>
+              <a:rPr lang="en-US" sz="900" b="1" dirty="0">
+                <a:solidFill>
+                  <a:srgbClr val="64748B"/>
+                </a:solidFill>
+                <a:latin typeface="Arial" pitchFamily="34" charset="0"/>
+                <a:ea typeface="Arial" pitchFamily="34" charset="-122"/>
+                <a:cs typeface="Arial" pitchFamily="34" charset="-120"/>
+              </a:rPr>
+              <a:t>GD Solar  ·  Formação em Energia por Assinatura</a:t>
+            </a:r>
+            <a:endParaRPr lang="en-US" sz="900" dirty="0"/>
+          </a:p>
+        </p:txBody>
+      </p:sp>
+      <p:sp>
+        <p:nvSpPr>
+          <p:cNvPr id="5" name="Text 2"/>
+          <p:cNvSpPr/>
+          <p:nvPr/>
+        </p:nvSpPr>
+        <p:spPr>
+          <a:xfrm>
+            <a:off x="7132320" y="6528816"/>
+            <a:ext cx="4023360" cy="310896"/>
+          </a:xfrm>
+          <a:prstGeom prst="rect">
+            <a:avLst/>
+          </a:prstGeom>
+          <a:noFill/>
+          <a:ln/>
+        </p:spPr>
+        <p:txBody>
+          <a:bodyPr wrap="square" rtlCol="0" anchor="ctr"/>
+          <a:lstStyle/>
+          <a:p>
+            <a:pPr algn="r" indent="0" marL="0">
+              <a:buNone/>
+            </a:pPr>
+            <a:r>
+              <a:rPr lang="en-US" sz="900" dirty="0">
+                <a:solidFill>
+                  <a:srgbClr val="64748B"/>
+                </a:solidFill>
+                <a:latin typeface="Arial" pitchFamily="34" charset="0"/>
+                <a:ea typeface="Arial" pitchFamily="34" charset="-122"/>
+                <a:cs typeface="Arial" pitchFamily="34" charset="-120"/>
+              </a:rPr>
+              <a:t>M5 · Aula 3</a:t>
+            </a:r>
+            <a:endParaRPr lang="en-US" sz="900" dirty="0"/>
+          </a:p>
+        </p:txBody>
+      </p:sp>
+      <p:sp>
+        <p:nvSpPr>
+          <p:cNvPr id="6" name="Shape 3"/>
+          <p:cNvSpPr/>
+          <p:nvPr/>
+        </p:nvSpPr>
+        <p:spPr>
+          <a:xfrm>
+            <a:off x="548640" y="384048"/>
+            <a:ext cx="82296" cy="658368"/>
+          </a:xfrm>
+          <a:prstGeom prst="rect">
+            <a:avLst/>
+          </a:prstGeom>
+          <a:solidFill>
+            <a:srgbClr val="F7A23B"/>
+          </a:solidFill>
+          <a:ln/>
+        </p:spPr>
+      </p:sp>
+      <p:sp>
+        <p:nvSpPr>
+          <p:cNvPr id="7" name="Text 4"/>
+          <p:cNvSpPr/>
+          <p:nvPr/>
+        </p:nvSpPr>
+        <p:spPr>
+          <a:xfrm>
+            <a:off x="777240" y="292608"/>
+            <a:ext cx="10972800" cy="274320"/>
+          </a:xfrm>
+          <a:prstGeom prst="rect">
+            <a:avLst/>
+          </a:prstGeom>
+          <a:noFill/>
+          <a:ln/>
+        </p:spPr>
+        <p:txBody>
+          <a:bodyPr wrap="square" rtlCol="0" anchor="ctr"/>
+          <a:lstStyle/>
+          <a:p>
+            <a:pPr indent="0" marL="0">
+              <a:buNone/>
+            </a:pPr>
+            <a:r>
+              <a:rPr lang="en-US" sz="1000" b="1" spc="100" kern="0" dirty="0">
+                <a:solidFill>
+                  <a:srgbClr val="F7A23B"/>
+                </a:solidFill>
+                <a:latin typeface="Arial" pitchFamily="34" charset="0"/>
+                <a:ea typeface="Arial" pitchFamily="34" charset="-122"/>
+                <a:cs typeface="Arial" pitchFamily="34" charset="-120"/>
+              </a:rPr>
+              <a:t>AULA 3 · A PROPOSTA COMERCIAL QUE CONVERTE</a:t>
+            </a:r>
+            <a:endParaRPr lang="en-US" sz="1000" dirty="0"/>
+          </a:p>
+        </p:txBody>
+      </p:sp>
+      <p:sp>
+        <p:nvSpPr>
+          <p:cNvPr id="8" name="Text 5"/>
+          <p:cNvSpPr/>
+          <p:nvPr/>
+        </p:nvSpPr>
+        <p:spPr>
+          <a:xfrm>
+            <a:off x="777240" y="530352"/>
+            <a:ext cx="10881360" cy="566928"/>
+          </a:xfrm>
+          <a:prstGeom prst="rect">
+            <a:avLst/>
+          </a:prstGeom>
+          <a:noFill/>
+          <a:ln/>
+        </p:spPr>
+        <p:txBody>
+          <a:bodyPr wrap="square" rtlCol="0" anchor="ctr">
+            <a:normAutofit/>
+          </a:bodyPr>
+          <a:lstStyle/>
+          <a:p>
+            <a:pPr indent="0" marL="0">
+              <a:buNone/>
+            </a:pPr>
+            <a:r>
+              <a:rPr lang="en-US" sz="2600" b="1" dirty="0">
+                <a:solidFill>
+                  <a:srgbClr val="1B3A6B"/>
+                </a:solidFill>
+                <a:latin typeface="Arial" pitchFamily="34" charset="0"/>
+                <a:ea typeface="Arial" pitchFamily="34" charset="-122"/>
+                <a:cs typeface="Arial" pitchFamily="34" charset="-120"/>
+              </a:rPr>
+              <a:t>A reunião de apresentação</a:t>
+            </a:r>
+            <a:endParaRPr lang="en-US" sz="2600" dirty="0"/>
+          </a:p>
+        </p:txBody>
+      </p:sp>
+      <p:sp>
+        <p:nvSpPr>
+          <p:cNvPr id="9" name="Shape 6"/>
+          <p:cNvSpPr/>
+          <p:nvPr/>
+        </p:nvSpPr>
+        <p:spPr>
+          <a:xfrm>
+            <a:off x="548640" y="1325880"/>
+            <a:ext cx="3544824" cy="1874520"/>
+          </a:xfrm>
+          <a:prstGeom prst="roundRect">
+            <a:avLst>
+              <a:gd name="adj" fmla="val 3902"/>
+            </a:avLst>
+          </a:prstGeom>
+          <a:solidFill>
+            <a:srgbClr val="FFFFFF"/>
+          </a:solidFill>
+          <a:ln w="9525">
+            <a:solidFill>
+              <a:srgbClr val="D8E0EC"/>
+            </a:solidFill>
+            <a:prstDash val="solid"/>
+          </a:ln>
+          <a:effectLst>
+            <a:outerShdw sx="100000" sy="100000" kx="0" ky="0" algn="bl" rotWithShape="0" blurRad="38100" dist="12700" dir="5400000">
+              <a:srgbClr val="000000">
+                <a:alpha val="8000"/>
+              </a:srgbClr>
+            </a:outerShdw>
+          </a:effectLst>
+        </p:spPr>
+      </p:sp>
+      <p:sp>
+        <p:nvSpPr>
+          <p:cNvPr id="10" name="Shape 7"/>
+          <p:cNvSpPr/>
+          <p:nvPr/>
+        </p:nvSpPr>
+        <p:spPr>
+          <a:xfrm>
+            <a:off x="731520" y="1508760"/>
+            <a:ext cx="457200" cy="457200"/>
+          </a:xfrm>
+          <a:prstGeom prst="ellipse">
+            <a:avLst/>
+          </a:prstGeom>
+          <a:solidFill>
+            <a:srgbClr val="1B3A6B"/>
+          </a:solidFill>
+          <a:ln/>
+        </p:spPr>
+      </p:sp>
+      <p:sp>
+        <p:nvSpPr>
+          <p:cNvPr id="11" name="Text 8"/>
+          <p:cNvSpPr/>
+          <p:nvPr/>
+        </p:nvSpPr>
+        <p:spPr>
+          <a:xfrm>
+            <a:off x="731520" y="1508760"/>
+            <a:ext cx="457200" cy="457200"/>
+          </a:xfrm>
+          <a:prstGeom prst="rect">
+            <a:avLst/>
+          </a:prstGeom>
+          <a:noFill/>
+          <a:ln/>
+        </p:spPr>
+        <p:txBody>
+          <a:bodyPr wrap="square" rtlCol="0" anchor="ctr"/>
+          <a:lstStyle/>
+          <a:p>
+            <a:pPr algn="ctr" indent="0" marL="0">
+              <a:buNone/>
+            </a:pPr>
+            <a:r>
+              <a:rPr lang="en-US" sz="1400" b="1" dirty="0">
+                <a:solidFill>
+                  <a:srgbClr val="FFFFFF"/>
+                </a:solidFill>
+                <a:latin typeface="Arial" pitchFamily="34" charset="0"/>
+                <a:ea typeface="Arial" pitchFamily="34" charset="-122"/>
+                <a:cs typeface="Arial" pitchFamily="34" charset="-120"/>
+              </a:rPr>
+              <a:t>1</a:t>
+            </a:r>
+            <a:endParaRPr lang="en-US" sz="1400" dirty="0"/>
+          </a:p>
+        </p:txBody>
+      </p:sp>
+      <p:sp>
+        <p:nvSpPr>
+          <p:cNvPr id="12" name="Text 9"/>
+          <p:cNvSpPr/>
+          <p:nvPr/>
+        </p:nvSpPr>
+        <p:spPr>
+          <a:xfrm>
+            <a:off x="1325880" y="1435608"/>
+            <a:ext cx="2630424" cy="1655064"/>
+          </a:xfrm>
+          <a:prstGeom prst="rect">
+            <a:avLst/>
+          </a:prstGeom>
+          <a:noFill/>
+          <a:ln/>
+        </p:spPr>
+        <p:txBody>
+          <a:bodyPr wrap="square" rtlCol="0" anchor="ctr">
+            <a:normAutofit/>
+          </a:bodyPr>
+          <a:lstStyle/>
+          <a:p>
+            <a:pPr indent="0" marL="0">
+              <a:buNone/>
+            </a:pPr>
+            <a:r>
+              <a:rPr lang="en-US" sz="1800" dirty="0">
+                <a:solidFill>
+                  <a:srgbClr val="1F2937"/>
+                </a:solidFill>
+                <a:latin typeface="Arial" pitchFamily="34" charset="0"/>
+                <a:ea typeface="Arial" pitchFamily="34" charset="-122"/>
+                <a:cs typeface="Arial" pitchFamily="34" charset="-120"/>
+              </a:rPr>
+              <a:t>0–3 min: a conta dele hoje (dor)</a:t>
+            </a:r>
+            <a:endParaRPr lang="en-US" sz="1800" dirty="0"/>
+          </a:p>
+        </p:txBody>
+      </p:sp>
+      <p:sp>
+        <p:nvSpPr>
+          <p:cNvPr id="13" name="Shape 10"/>
+          <p:cNvSpPr/>
+          <p:nvPr/>
+        </p:nvSpPr>
+        <p:spPr>
+          <a:xfrm>
+            <a:off x="4322064" y="1325880"/>
+            <a:ext cx="3544824" cy="1874520"/>
+          </a:xfrm>
+          <a:prstGeom prst="roundRect">
+            <a:avLst>
+              <a:gd name="adj" fmla="val 3902"/>
+            </a:avLst>
+          </a:prstGeom>
+          <a:solidFill>
+            <a:srgbClr val="FFFFFF"/>
+          </a:solidFill>
+          <a:ln w="9525">
+            <a:solidFill>
+              <a:srgbClr val="D8E0EC"/>
+            </a:solidFill>
+            <a:prstDash val="solid"/>
+          </a:ln>
+          <a:effectLst>
+            <a:outerShdw sx="100000" sy="100000" kx="0" ky="0" algn="bl" rotWithShape="0" blurRad="38100" dist="12700" dir="5400000">
+              <a:srgbClr val="000000">
+                <a:alpha val="8000"/>
+              </a:srgbClr>
+            </a:outerShdw>
+          </a:effectLst>
+        </p:spPr>
+      </p:sp>
+      <p:sp>
+        <p:nvSpPr>
+          <p:cNvPr id="14" name="Shape 11"/>
+          <p:cNvSpPr/>
+          <p:nvPr/>
+        </p:nvSpPr>
+        <p:spPr>
+          <a:xfrm>
+            <a:off x="4504944" y="1508760"/>
+            <a:ext cx="457200" cy="457200"/>
+          </a:xfrm>
+          <a:prstGeom prst="ellipse">
+            <a:avLst/>
+          </a:prstGeom>
+          <a:solidFill>
+            <a:srgbClr val="F7A23B"/>
+          </a:solidFill>
+          <a:ln/>
+        </p:spPr>
+      </p:sp>
+      <p:sp>
+        <p:nvSpPr>
+          <p:cNvPr id="15" name="Text 12"/>
+          <p:cNvSpPr/>
+          <p:nvPr/>
+        </p:nvSpPr>
+        <p:spPr>
+          <a:xfrm>
+            <a:off x="4504944" y="1508760"/>
+            <a:ext cx="457200" cy="457200"/>
+          </a:xfrm>
+          <a:prstGeom prst="rect">
+            <a:avLst/>
+          </a:prstGeom>
+          <a:noFill/>
+          <a:ln/>
+        </p:spPr>
+        <p:txBody>
+          <a:bodyPr wrap="square" rtlCol="0" anchor="ctr"/>
+          <a:lstStyle/>
+          <a:p>
+            <a:pPr algn="ctr" indent="0" marL="0">
+              <a:buNone/>
+            </a:pPr>
+            <a:r>
+              <a:rPr lang="en-US" sz="1400" b="1" dirty="0">
+                <a:solidFill>
+                  <a:srgbClr val="FFFFFF"/>
+                </a:solidFill>
+                <a:latin typeface="Arial" pitchFamily="34" charset="0"/>
+                <a:ea typeface="Arial" pitchFamily="34" charset="-122"/>
+                <a:cs typeface="Arial" pitchFamily="34" charset="-120"/>
+              </a:rPr>
+              <a:t>2</a:t>
+            </a:r>
+            <a:endParaRPr lang="en-US" sz="1400" dirty="0"/>
+          </a:p>
+        </p:txBody>
+      </p:sp>
+      <p:sp>
+        <p:nvSpPr>
+          <p:cNvPr id="16" name="Text 13"/>
+          <p:cNvSpPr/>
+          <p:nvPr/>
+        </p:nvSpPr>
+        <p:spPr>
+          <a:xfrm>
+            <a:off x="5099304" y="1435608"/>
+            <a:ext cx="2630424" cy="1655064"/>
+          </a:xfrm>
+          <a:prstGeom prst="rect">
+            <a:avLst/>
+          </a:prstGeom>
+          <a:noFill/>
+          <a:ln/>
+        </p:spPr>
+        <p:txBody>
+          <a:bodyPr wrap="square" rtlCol="0" anchor="ctr">
+            <a:normAutofit/>
+          </a:bodyPr>
+          <a:lstStyle/>
+          <a:p>
+            <a:pPr indent="0" marL="0">
+              <a:buNone/>
+            </a:pPr>
+            <a:r>
+              <a:rPr lang="en-US" sz="1800" dirty="0">
+                <a:solidFill>
+                  <a:srgbClr val="1F2937"/>
+                </a:solidFill>
+                <a:latin typeface="Arial" pitchFamily="34" charset="0"/>
+                <a:ea typeface="Arial" pitchFamily="34" charset="-122"/>
+                <a:cs typeface="Arial" pitchFamily="34" charset="-120"/>
+              </a:rPr>
+              <a:t>3–7 min: como funciona + duas contas</a:t>
+            </a:r>
+            <a:endParaRPr lang="en-US" sz="1800" dirty="0"/>
+          </a:p>
+        </p:txBody>
+      </p:sp>
+      <p:sp>
+        <p:nvSpPr>
+          <p:cNvPr id="17" name="Shape 14"/>
+          <p:cNvSpPr/>
+          <p:nvPr/>
+        </p:nvSpPr>
+        <p:spPr>
+          <a:xfrm>
+            <a:off x="8095488" y="1325880"/>
+            <a:ext cx="3544824" cy="1874520"/>
+          </a:xfrm>
+          <a:prstGeom prst="roundRect">
+            <a:avLst>
+              <a:gd name="adj" fmla="val 3902"/>
+            </a:avLst>
+          </a:prstGeom>
+          <a:solidFill>
+            <a:srgbClr val="FFFFFF"/>
+          </a:solidFill>
+          <a:ln w="9525">
+            <a:solidFill>
+              <a:srgbClr val="D8E0EC"/>
+            </a:solidFill>
+            <a:prstDash val="solid"/>
+          </a:ln>
+          <a:effectLst>
+            <a:outerShdw sx="100000" sy="100000" kx="0" ky="0" algn="bl" rotWithShape="0" blurRad="38100" dist="12700" dir="5400000">
+              <a:srgbClr val="000000">
+                <a:alpha val="8000"/>
+              </a:srgbClr>
+            </a:outerShdw>
+          </a:effectLst>
+        </p:spPr>
+      </p:sp>
+      <p:sp>
+        <p:nvSpPr>
+          <p:cNvPr id="18" name="Shape 15"/>
+          <p:cNvSpPr/>
+          <p:nvPr/>
+        </p:nvSpPr>
+        <p:spPr>
+          <a:xfrm>
+            <a:off x="8278368" y="1508760"/>
+            <a:ext cx="457200" cy="457200"/>
+          </a:xfrm>
+          <a:prstGeom prst="ellipse">
+            <a:avLst/>
+          </a:prstGeom>
+          <a:solidFill>
+            <a:srgbClr val="1B3A6B"/>
+          </a:solidFill>
+          <a:ln/>
+        </p:spPr>
+      </p:sp>
+      <p:sp>
+        <p:nvSpPr>
+          <p:cNvPr id="19" name="Text 16"/>
+          <p:cNvSpPr/>
+          <p:nvPr/>
+        </p:nvSpPr>
+        <p:spPr>
+          <a:xfrm>
+            <a:off x="8278368" y="1508760"/>
+            <a:ext cx="457200" cy="457200"/>
+          </a:xfrm>
+          <a:prstGeom prst="rect">
+            <a:avLst/>
+          </a:prstGeom>
+          <a:noFill/>
+          <a:ln/>
+        </p:spPr>
+        <p:txBody>
+          <a:bodyPr wrap="square" rtlCol="0" anchor="ctr"/>
+          <a:lstStyle/>
+          <a:p>
+            <a:pPr algn="ctr" indent="0" marL="0">
+              <a:buNone/>
+            </a:pPr>
+            <a:r>
+              <a:rPr lang="en-US" sz="1400" b="1" dirty="0">
+                <a:solidFill>
+                  <a:srgbClr val="FFFFFF"/>
+                </a:solidFill>
+                <a:latin typeface="Arial" pitchFamily="34" charset="0"/>
+                <a:ea typeface="Arial" pitchFamily="34" charset="-122"/>
+                <a:cs typeface="Arial" pitchFamily="34" charset="-120"/>
+              </a:rPr>
+              <a:t>3</a:t>
+            </a:r>
+            <a:endParaRPr lang="en-US" sz="1400" dirty="0"/>
+          </a:p>
+        </p:txBody>
+      </p:sp>
+      <p:sp>
+        <p:nvSpPr>
+          <p:cNvPr id="20" name="Text 17"/>
+          <p:cNvSpPr/>
+          <p:nvPr/>
+        </p:nvSpPr>
+        <p:spPr>
+          <a:xfrm>
+            <a:off x="8872728" y="1435608"/>
+            <a:ext cx="2630424" cy="1655064"/>
+          </a:xfrm>
+          <a:prstGeom prst="rect">
+            <a:avLst/>
+          </a:prstGeom>
+          <a:noFill/>
+          <a:ln/>
+        </p:spPr>
+        <p:txBody>
+          <a:bodyPr wrap="square" rtlCol="0" anchor="ctr">
+            <a:normAutofit/>
+          </a:bodyPr>
+          <a:lstStyle/>
+          <a:p>
+            <a:pPr indent="0" marL="0">
+              <a:buNone/>
+            </a:pPr>
+            <a:r>
+              <a:rPr lang="en-US" sz="1800" dirty="0">
+                <a:solidFill>
+                  <a:srgbClr val="1F2937"/>
+                </a:solidFill>
+                <a:latin typeface="Arial" pitchFamily="34" charset="0"/>
+                <a:ea typeface="Arial" pitchFamily="34" charset="-122"/>
+                <a:cs typeface="Arial" pitchFamily="34" charset="-120"/>
+              </a:rPr>
+              <a:t>7–10 min: economia em R$ e prova (lei, empresa, clientes)</a:t>
+            </a:r>
+            <a:endParaRPr lang="en-US" sz="1800" dirty="0"/>
+          </a:p>
+        </p:txBody>
+      </p:sp>
+      <p:sp>
+        <p:nvSpPr>
+          <p:cNvPr id="21" name="Shape 18"/>
+          <p:cNvSpPr/>
+          <p:nvPr/>
+        </p:nvSpPr>
+        <p:spPr>
+          <a:xfrm>
+            <a:off x="548640" y="3429000"/>
+            <a:ext cx="3544824" cy="1874520"/>
+          </a:xfrm>
+          <a:prstGeom prst="roundRect">
+            <a:avLst>
+              <a:gd name="adj" fmla="val 3902"/>
+            </a:avLst>
+          </a:prstGeom>
+          <a:solidFill>
+            <a:srgbClr val="FFFFFF"/>
+          </a:solidFill>
+          <a:ln w="9525">
+            <a:solidFill>
+              <a:srgbClr val="D8E0EC"/>
+            </a:solidFill>
+            <a:prstDash val="solid"/>
+          </a:ln>
+          <a:effectLst>
+            <a:outerShdw sx="100000" sy="100000" kx="0" ky="0" algn="bl" rotWithShape="0" blurRad="38100" dist="12700" dir="5400000">
+              <a:srgbClr val="000000">
+                <a:alpha val="8000"/>
+              </a:srgbClr>
+            </a:outerShdw>
+          </a:effectLst>
+        </p:spPr>
+      </p:sp>
+      <p:sp>
+        <p:nvSpPr>
+          <p:cNvPr id="22" name="Shape 19"/>
+          <p:cNvSpPr/>
+          <p:nvPr/>
+        </p:nvSpPr>
+        <p:spPr>
+          <a:xfrm>
+            <a:off x="731520" y="3611880"/>
+            <a:ext cx="457200" cy="457200"/>
+          </a:xfrm>
+          <a:prstGeom prst="ellipse">
+            <a:avLst/>
+          </a:prstGeom>
+          <a:solidFill>
+            <a:srgbClr val="F7A23B"/>
+          </a:solidFill>
+          <a:ln/>
+        </p:spPr>
+      </p:sp>
+      <p:sp>
+        <p:nvSpPr>
+          <p:cNvPr id="23" name="Text 20"/>
+          <p:cNvSpPr/>
+          <p:nvPr/>
+        </p:nvSpPr>
+        <p:spPr>
+          <a:xfrm>
+            <a:off x="731520" y="3611880"/>
+            <a:ext cx="457200" cy="457200"/>
+          </a:xfrm>
+          <a:prstGeom prst="rect">
+            <a:avLst/>
+          </a:prstGeom>
+          <a:noFill/>
+          <a:ln/>
+        </p:spPr>
+        <p:txBody>
+          <a:bodyPr wrap="square" rtlCol="0" anchor="ctr"/>
+          <a:lstStyle/>
+          <a:p>
+            <a:pPr algn="ctr" indent="0" marL="0">
+              <a:buNone/>
+            </a:pPr>
+            <a:r>
+              <a:rPr lang="en-US" sz="1400" b="1" dirty="0">
+                <a:solidFill>
+                  <a:srgbClr val="FFFFFF"/>
+                </a:solidFill>
+                <a:latin typeface="Arial" pitchFamily="34" charset="0"/>
+                <a:ea typeface="Arial" pitchFamily="34" charset="-122"/>
+                <a:cs typeface="Arial" pitchFamily="34" charset="-120"/>
+              </a:rPr>
+              <a:t>4</a:t>
+            </a:r>
+            <a:endParaRPr lang="en-US" sz="1400" dirty="0"/>
+          </a:p>
+        </p:txBody>
+      </p:sp>
+      <p:sp>
+        <p:nvSpPr>
+          <p:cNvPr id="24" name="Text 21"/>
+          <p:cNvSpPr/>
+          <p:nvPr/>
+        </p:nvSpPr>
+        <p:spPr>
+          <a:xfrm>
+            <a:off x="1325880" y="3538728"/>
+            <a:ext cx="2630424" cy="1655064"/>
+          </a:xfrm>
+          <a:prstGeom prst="rect">
+            <a:avLst/>
+          </a:prstGeom>
+          <a:noFill/>
+          <a:ln/>
+        </p:spPr>
+        <p:txBody>
+          <a:bodyPr wrap="square" rtlCol="0" anchor="ctr">
+            <a:normAutofit/>
+          </a:bodyPr>
+          <a:lstStyle/>
+          <a:p>
+            <a:pPr indent="0" marL="0">
+              <a:buNone/>
+            </a:pPr>
+            <a:r>
+              <a:rPr lang="en-US" sz="1800" dirty="0">
+                <a:solidFill>
+                  <a:srgbClr val="1F2937"/>
+                </a:solidFill>
+                <a:latin typeface="Arial" pitchFamily="34" charset="0"/>
+                <a:ea typeface="Arial" pitchFamily="34" charset="-122"/>
+                <a:cs typeface="Arial" pitchFamily="34" charset="-120"/>
+              </a:rPr>
+              <a:t>10–13 min: dúvidas e objeções</a:t>
+            </a:r>
+            <a:endParaRPr lang="en-US" sz="1800" dirty="0"/>
+          </a:p>
+        </p:txBody>
+      </p:sp>
+      <p:sp>
+        <p:nvSpPr>
+          <p:cNvPr id="25" name="Shape 22"/>
+          <p:cNvSpPr/>
+          <p:nvPr/>
+        </p:nvSpPr>
+        <p:spPr>
+          <a:xfrm>
+            <a:off x="4322064" y="3429000"/>
+            <a:ext cx="3544824" cy="1874520"/>
+          </a:xfrm>
+          <a:prstGeom prst="roundRect">
+            <a:avLst>
+              <a:gd name="adj" fmla="val 3902"/>
+            </a:avLst>
+          </a:prstGeom>
+          <a:solidFill>
+            <a:srgbClr val="FFFFFF"/>
+          </a:solidFill>
+          <a:ln w="9525">
+            <a:solidFill>
+              <a:srgbClr val="D8E0EC"/>
+            </a:solidFill>
+            <a:prstDash val="solid"/>
+          </a:ln>
+          <a:effectLst>
+            <a:outerShdw sx="100000" sy="100000" kx="0" ky="0" algn="bl" rotWithShape="0" blurRad="38100" dist="12700" dir="5400000">
+              <a:srgbClr val="000000">
+                <a:alpha val="8000"/>
+              </a:srgbClr>
+            </a:outerShdw>
+          </a:effectLst>
+        </p:spPr>
+      </p:sp>
+      <p:sp>
+        <p:nvSpPr>
+          <p:cNvPr id="26" name="Shape 23"/>
+          <p:cNvSpPr/>
+          <p:nvPr/>
+        </p:nvSpPr>
+        <p:spPr>
+          <a:xfrm>
+            <a:off x="4504944" y="3611880"/>
+            <a:ext cx="457200" cy="457200"/>
+          </a:xfrm>
+          <a:prstGeom prst="ellipse">
+            <a:avLst/>
+          </a:prstGeom>
+          <a:solidFill>
+            <a:srgbClr val="1B3A6B"/>
+          </a:solidFill>
+          <a:ln/>
+        </p:spPr>
+      </p:sp>
+      <p:sp>
+        <p:nvSpPr>
+          <p:cNvPr id="27" name="Text 24"/>
+          <p:cNvSpPr/>
+          <p:nvPr/>
+        </p:nvSpPr>
+        <p:spPr>
+          <a:xfrm>
+            <a:off x="4504944" y="3611880"/>
+            <a:ext cx="457200" cy="457200"/>
+          </a:xfrm>
+          <a:prstGeom prst="rect">
+            <a:avLst/>
+          </a:prstGeom>
+          <a:noFill/>
+          <a:ln/>
+        </p:spPr>
+        <p:txBody>
+          <a:bodyPr wrap="square" rtlCol="0" anchor="ctr"/>
+          <a:lstStyle/>
+          <a:p>
+            <a:pPr algn="ctr" indent="0" marL="0">
+              <a:buNone/>
+            </a:pPr>
+            <a:r>
+              <a:rPr lang="en-US" sz="1400" b="1" dirty="0">
+                <a:solidFill>
+                  <a:srgbClr val="FFFFFF"/>
+                </a:solidFill>
+                <a:latin typeface="Arial" pitchFamily="34" charset="0"/>
+                <a:ea typeface="Arial" pitchFamily="34" charset="-122"/>
+                <a:cs typeface="Arial" pitchFamily="34" charset="-120"/>
+              </a:rPr>
+              <a:t>5</a:t>
+            </a:r>
+            <a:endParaRPr lang="en-US" sz="1400" dirty="0"/>
+          </a:p>
+        </p:txBody>
+      </p:sp>
+      <p:sp>
+        <p:nvSpPr>
+          <p:cNvPr id="28" name="Text 25"/>
+          <p:cNvSpPr/>
+          <p:nvPr/>
+        </p:nvSpPr>
+        <p:spPr>
+          <a:xfrm>
+            <a:off x="5099304" y="3538728"/>
+            <a:ext cx="2630424" cy="1655064"/>
+          </a:xfrm>
+          <a:prstGeom prst="rect">
+            <a:avLst/>
+          </a:prstGeom>
+          <a:noFill/>
+          <a:ln/>
+        </p:spPr>
+        <p:txBody>
+          <a:bodyPr wrap="square" rtlCol="0" anchor="ctr">
+            <a:normAutofit/>
+          </a:bodyPr>
+          <a:lstStyle/>
+          <a:p>
+            <a:pPr indent="0" marL="0">
+              <a:buNone/>
+            </a:pPr>
+            <a:r>
+              <a:rPr lang="en-US" sz="1800" dirty="0">
+                <a:solidFill>
+                  <a:srgbClr val="1F2937"/>
+                </a:solidFill>
+                <a:latin typeface="Arial" pitchFamily="34" charset="0"/>
+                <a:ea typeface="Arial" pitchFamily="34" charset="-122"/>
+                <a:cs typeface="Arial" pitchFamily="34" charset="-120"/>
+              </a:rPr>
+              <a:t>13–15 min: próximo passo e documentos</a:t>
+            </a:r>
+            <a:endParaRPr lang="en-US" sz="1800" dirty="0"/>
+          </a:p>
+        </p:txBody>
+      </p:sp>
+      <p:sp>
+        <p:nvSpPr>
+          <p:cNvPr id="29" name="Shape 26"/>
+          <p:cNvSpPr/>
+          <p:nvPr/>
+        </p:nvSpPr>
+        <p:spPr>
+          <a:xfrm>
+            <a:off x="548640" y="5413248"/>
+            <a:ext cx="11091672" cy="868680"/>
+          </a:xfrm>
+          <a:prstGeom prst="roundRect">
+            <a:avLst>
+              <a:gd name="adj" fmla="val 8421"/>
+            </a:avLst>
+          </a:prstGeom>
+          <a:solidFill>
+            <a:srgbClr val="EEF3FA"/>
+          </a:solidFill>
+          <a:ln w="6350">
+            <a:solidFill>
+              <a:srgbClr val="D8E0EC"/>
+            </a:solidFill>
+            <a:prstDash val="solid"/>
+          </a:ln>
+        </p:spPr>
+      </p:sp>
+      <p:sp>
+        <p:nvSpPr>
+          <p:cNvPr id="30" name="Shape 27"/>
+          <p:cNvSpPr/>
+          <p:nvPr/>
+        </p:nvSpPr>
+        <p:spPr>
+          <a:xfrm>
+            <a:off x="548640" y="5413248"/>
+            <a:ext cx="91440" cy="868680"/>
+          </a:xfrm>
+          <a:prstGeom prst="rect">
+            <a:avLst/>
+          </a:prstGeom>
+          <a:solidFill>
+            <a:srgbClr val="F7A23B"/>
+          </a:solidFill>
+          <a:ln/>
+        </p:spPr>
+      </p:sp>
+      <p:sp>
+        <p:nvSpPr>
+          <p:cNvPr id="31" name="Text 28"/>
+          <p:cNvSpPr/>
+          <p:nvPr/>
+        </p:nvSpPr>
+        <p:spPr>
+          <a:xfrm>
+            <a:off x="777240" y="5458968"/>
+            <a:ext cx="10744200" cy="777240"/>
+          </a:xfrm>
+          <a:prstGeom prst="rect">
+            <a:avLst/>
+          </a:prstGeom>
+          <a:noFill/>
+          <a:ln/>
+        </p:spPr>
+        <p:txBody>
+          <a:bodyPr wrap="square" rtlCol="0" anchor="ctr"/>
+          <a:lstStyle/>
+          <a:p>
+            <a:pPr indent="0" marL="0">
+              <a:buNone/>
+            </a:pPr>
+            <a:r>
+              <a:rPr lang="en-US" sz="1500" dirty="0">
+                <a:solidFill>
+                  <a:srgbClr val="1F2937"/>
+                </a:solidFill>
+                <a:latin typeface="Arial" pitchFamily="34" charset="0"/>
+                <a:ea typeface="Arial" pitchFamily="34" charset="-122"/>
+                <a:cs typeface="Arial" pitchFamily="34" charset="-120"/>
+              </a:rPr>
+              <a:t>Apresente a proposta em quinze minutos, seguindo o roteiro da tela, e saia sempre com o próximo passo marcado.</a:t>
+            </a:r>
+            <a:endParaRPr lang="en-US" sz="1500" dirty="0"/>
+          </a:p>
+        </p:txBody>
+      </p:sp>
+      <p:sp>
+        <p:nvSpPr>
+          <p:cNvPr id="25" name="Slide Number Placeholder 0"/>
+          <p:cNvSpPr>
+            <a:spLocks noGrp="1"/>
+          </p:cNvSpPr>
+          <p:nvPr>
+            <p:ph type="sldNum" sz="quarter" idx="4294967295"/>
+          </p:nvPr>
+        </p:nvSpPr>
+        <p:spPr>
+          <a:xfrm>
+            <a:off x="11292840" y="6556248"/>
+            <a:ext cx="548640" cy="256032"/>
+          </a:xfrm>
+          <a:prstGeom prst="rect">
+            <a:avLst/>
+          </a:prstGeom>
+          <a:extLst>
+            <a:ext uri="{C572A759-6A51-4108-AA02-DFA0A04FC94B}">
+              <ma14:wrappingTextBoxFlag xmlns:ma14="http://schemas.microsoft.com/office/mac/drawingml/2011/main" val="0"/>
+            </a:ext>
+          </a:extLst>
+        </p:spPr>
+        <p:txBody>
+          <a:bodyPr/>
+          <a:lstStyle>
+            <a:lvl1pPr>
+              <a:defRPr sz="900">
+                <a:solidFill>
+                  <a:srgbClr val="1B3A6B"/>
+                </a:solidFill>
+                <a:latin typeface="Arial"/>
+                <a:ea typeface="Arial"/>
+                <a:cs typeface="Arial"/>
+              </a:defRPr>
+            </a:lvl1pPr>
+          </a:lstStyle>
+          <a:p>
+            <a:pPr algn="r"/>
+            <a:fld id="{F7021451-1387-4CA6-816F-3879F97B5CBC}" type="slidenum">
+              <a:rPr b="1" lang="en-US"/>
+              <a:t>17</a:t>
+            </a:fld>
+            <a:endParaRPr lang="en-US"/>
+          </a:p>
+        </p:txBody>
+      </p:sp>
+    </p:spTree>
+  </p:cSld>
+  <p:clrMapOvr>
+    <a:masterClrMapping/>
+  </p:clrMapOvr>
+</p:sld>
+</file>
+
+<file path=ppt/slides/slide18.xml><?xml version="1.0" encoding="utf-8"?>
+<p:sld xmlns:a="http://schemas.openxmlformats.org/drawingml/2006/main" xmlns:r="http://schemas.openxmlformats.org/officeDocument/2006/relationships" xmlns:p="http://schemas.openxmlformats.org/presentationml/2006/main">
+  <p:cSld name="Slide 18">
     <p:bg>
       <p:bgPr>
         <a:solidFill>
@@ -10736,7 +11768,7 @@
             <a:pPr algn="r"/>
             <a:fld id="{F7021451-1387-4CA6-816F-3879F97B5CBC}" type="slidenum">
               <a:rPr b="1" lang="en-US"/>
-              <a:t>17</a:t>
+              <a:t>18</a:t>
             </a:fld>
             <a:endParaRPr lang="en-US"/>
           </a:p>
@@ -10750,9 +11782,9 @@
 </p:sld>
 </file>
 
-<file path=ppt/slides/slide18.xml><?xml version="1.0" encoding="utf-8"?>
+<file path=ppt/slides/slide19.xml><?xml version="1.0" encoding="utf-8"?>
 <p:sld xmlns:a="http://schemas.openxmlformats.org/drawingml/2006/main" xmlns:r="http://schemas.openxmlformats.org/officeDocument/2006/relationships" xmlns:p="http://schemas.openxmlformats.org/presentationml/2006/main">
-  <p:cSld name="Slide 18">
+  <p:cSld name="Slide 19">
     <p:bg>
       <p:bgPr>
         <a:solidFill>
@@ -10821,7 +11853,7 @@
             <a:r>
               <a:rPr lang="en-US" sz="11000" b="1" dirty="0">
                 <a:solidFill>
-                  <a:srgbClr val="11396F"/>
+                  <a:srgbClr val="F7A23B"/>
                 </a:solidFill>
                 <a:latin typeface="Arial" pitchFamily="34" charset="0"/>
                 <a:ea typeface="Arial" pitchFamily="34" charset="-122"/>
@@ -10944,7 +11976,7 @@
                 <a:ea typeface="Arial" pitchFamily="34" charset="-122"/>
                 <a:cs typeface="Arial" pitchFamily="34" charset="-120"/>
               </a:rPr>
-              <a:t>Aula</a:t>
+              <a:t>Aula teórica</a:t>
             </a:r>
             <a:endParaRPr lang="en-US" sz="1400" dirty="0"/>
           </a:p>
@@ -11161,483 +12193,6 @@
               <a:t>Timing</a:t>
             </a:r>
             <a:endParaRPr lang="en-US" sz="1500" dirty="0"/>
-          </a:p>
-        </p:txBody>
-      </p:sp>
-    </p:spTree>
-  </p:cSld>
-  <p:clrMapOvr>
-    <a:masterClrMapping/>
-  </p:clrMapOvr>
-</p:sld>
-</file>
-
-<file path=ppt/slides/slide19.xml><?xml version="1.0" encoding="utf-8"?>
-<p:sld xmlns:a="http://schemas.openxmlformats.org/drawingml/2006/main" xmlns:r="http://schemas.openxmlformats.org/officeDocument/2006/relationships" xmlns:p="http://schemas.openxmlformats.org/presentationml/2006/main">
-  <p:cSld name="Slide 19">
-    <p:bg>
-      <p:bgPr>
-        <a:solidFill>
-          <a:srgbClr val="F6F8FB"/>
-        </a:solidFill>
-      </p:bgPr>
-    </p:bg>
-    <p:spTree>
-      <p:nvGrpSpPr>
-        <p:cNvPr id="1" name=""/>
-        <p:cNvGrpSpPr/>
-        <p:nvPr/>
-      </p:nvGrpSpPr>
-      <p:grpSpPr>
-        <a:xfrm>
-          <a:off x="0" y="0"/>
-          <a:ext cx="0" cy="0"/>
-          <a:chOff x="0" y="0"/>
-          <a:chExt cx="0" cy="0"/>
-        </a:xfrm>
-      </p:grpSpPr>
-      <p:sp>
-        <p:nvSpPr>
-          <p:cNvPr id="2" name="Shape 0"/>
-          <p:cNvSpPr/>
-          <p:nvPr/>
-        </p:nvSpPr>
-        <p:spPr>
-          <a:xfrm>
-            <a:off x="0" y="6510528"/>
-            <a:ext cx="12191695" cy="347472"/>
-          </a:xfrm>
-          <a:prstGeom prst="rect">
-            <a:avLst/>
-          </a:prstGeom>
-          <a:solidFill>
-            <a:srgbClr val="FFFFFF"/>
-          </a:solidFill>
-          <a:ln w="6350">
-            <a:solidFill>
-              <a:srgbClr val="D8E0EC"/>
-            </a:solidFill>
-            <a:prstDash val="solid"/>
-          </a:ln>
-        </p:spPr>
-      </p:sp>
-      <p:pic>
-        <p:nvPicPr>
-          <p:cNvPr id="3" name="Image 0" descr="/www/wwwroot/rexar/gdsolar/docs/curso/slides/assets/logo-gdsolar.png">    </p:cNvPr>
-          <p:cNvPicPr>
-            <a:picLocks noChangeAspect="1"/>
-          </p:cNvPicPr>
-          <p:nvPr/>
-        </p:nvPicPr>
-        <p:blipFill>
-          <a:blip r:embed="rId1"/>
-          <a:stretch>
-            <a:fillRect/>
-          </a:stretch>
-        </p:blipFill>
-        <p:spPr>
-          <a:xfrm>
-            <a:off x="548640" y="6547104"/>
-            <a:ext cx="274320" cy="274320"/>
-          </a:xfrm>
-          <a:prstGeom prst="rect">
-            <a:avLst/>
-          </a:prstGeom>
-        </p:spPr>
-      </p:pic>
-      <p:sp>
-        <p:nvSpPr>
-          <p:cNvPr id="4" name="Text 1"/>
-          <p:cNvSpPr/>
-          <p:nvPr/>
-        </p:nvSpPr>
-        <p:spPr>
-          <a:xfrm>
-            <a:off x="886968" y="6528816"/>
-            <a:ext cx="6400800" cy="310896"/>
-          </a:xfrm>
-          <a:prstGeom prst="rect">
-            <a:avLst/>
-          </a:prstGeom>
-          <a:noFill/>
-          <a:ln/>
-        </p:spPr>
-        <p:txBody>
-          <a:bodyPr wrap="square" rtlCol="0" anchor="ctr"/>
-          <a:lstStyle/>
-          <a:p>
-            <a:pPr indent="0" marL="0">
-              <a:buNone/>
-            </a:pPr>
-            <a:r>
-              <a:rPr lang="en-US" sz="900" b="1" dirty="0">
-                <a:solidFill>
-                  <a:srgbClr val="64748B"/>
-                </a:solidFill>
-                <a:latin typeface="Arial" pitchFamily="34" charset="0"/>
-                <a:ea typeface="Arial" pitchFamily="34" charset="-122"/>
-                <a:cs typeface="Arial" pitchFamily="34" charset="-120"/>
-              </a:rPr>
-              <a:t>GD Solar  ·  Formação em Energia por Assinatura</a:t>
-            </a:r>
-            <a:endParaRPr lang="en-US" sz="900" dirty="0"/>
-          </a:p>
-        </p:txBody>
-      </p:sp>
-      <p:sp>
-        <p:nvSpPr>
-          <p:cNvPr id="5" name="Text 2"/>
-          <p:cNvSpPr/>
-          <p:nvPr/>
-        </p:nvSpPr>
-        <p:spPr>
-          <a:xfrm>
-            <a:off x="7132320" y="6528816"/>
-            <a:ext cx="4023360" cy="310896"/>
-          </a:xfrm>
-          <a:prstGeom prst="rect">
-            <a:avLst/>
-          </a:prstGeom>
-          <a:noFill/>
-          <a:ln/>
-        </p:spPr>
-        <p:txBody>
-          <a:bodyPr wrap="square" rtlCol="0" anchor="ctr"/>
-          <a:lstStyle/>
-          <a:p>
-            <a:pPr algn="r" indent="0" marL="0">
-              <a:buNone/>
-            </a:pPr>
-            <a:r>
-              <a:rPr lang="en-US" sz="900" dirty="0">
-                <a:solidFill>
-                  <a:srgbClr val="64748B"/>
-                </a:solidFill>
-                <a:latin typeface="Arial" pitchFamily="34" charset="0"/>
-                <a:ea typeface="Arial" pitchFamily="34" charset="-122"/>
-                <a:cs typeface="Arial" pitchFamily="34" charset="-120"/>
-              </a:rPr>
-              <a:t>M5 · Aula 4</a:t>
-            </a:r>
-            <a:endParaRPr lang="en-US" sz="900" dirty="0"/>
-          </a:p>
-        </p:txBody>
-      </p:sp>
-      <p:sp>
-        <p:nvSpPr>
-          <p:cNvPr id="6" name="Shape 3"/>
-          <p:cNvSpPr/>
-          <p:nvPr/>
-        </p:nvSpPr>
-        <p:spPr>
-          <a:xfrm>
-            <a:off x="548640" y="384048"/>
-            <a:ext cx="82296" cy="658368"/>
-          </a:xfrm>
-          <a:prstGeom prst="rect">
-            <a:avLst/>
-          </a:prstGeom>
-          <a:solidFill>
-            <a:srgbClr val="F7A23B"/>
-          </a:solidFill>
-          <a:ln/>
-        </p:spPr>
-      </p:sp>
-      <p:sp>
-        <p:nvSpPr>
-          <p:cNvPr id="7" name="Text 4"/>
-          <p:cNvSpPr/>
-          <p:nvPr/>
-        </p:nvSpPr>
-        <p:spPr>
-          <a:xfrm>
-            <a:off x="777240" y="292608"/>
-            <a:ext cx="10972800" cy="274320"/>
-          </a:xfrm>
-          <a:prstGeom prst="rect">
-            <a:avLst/>
-          </a:prstGeom>
-          <a:noFill/>
-          <a:ln/>
-        </p:spPr>
-        <p:txBody>
-          <a:bodyPr wrap="square" rtlCol="0" anchor="ctr"/>
-          <a:lstStyle/>
-          <a:p>
-            <a:pPr indent="0" marL="0">
-              <a:buNone/>
-            </a:pPr>
-            <a:r>
-              <a:rPr lang="en-US" sz="1000" b="1" spc="100" kern="0" dirty="0">
-                <a:solidFill>
-                  <a:srgbClr val="F7A23B"/>
-                </a:solidFill>
-                <a:latin typeface="Arial" pitchFamily="34" charset="0"/>
-                <a:ea typeface="Arial" pitchFamily="34" charset="-122"/>
-                <a:cs typeface="Arial" pitchFamily="34" charset="-120"/>
-              </a:rPr>
-              <a:t>AULA 4 · OBJEÇÕES E ARGUMENTOS</a:t>
-            </a:r>
-            <a:endParaRPr lang="en-US" sz="1000" dirty="0"/>
-          </a:p>
-        </p:txBody>
-      </p:sp>
-      <p:sp>
-        <p:nvSpPr>
-          <p:cNvPr id="8" name="Text 5"/>
-          <p:cNvSpPr/>
-          <p:nvPr/>
-        </p:nvSpPr>
-        <p:spPr>
-          <a:xfrm>
-            <a:off x="777240" y="530352"/>
-            <a:ext cx="10881360" cy="566928"/>
-          </a:xfrm>
-          <a:prstGeom prst="rect">
-            <a:avLst/>
-          </a:prstGeom>
-          <a:noFill/>
-          <a:ln/>
-        </p:spPr>
-        <p:txBody>
-          <a:bodyPr wrap="square" rtlCol="0" anchor="ctr">
-            <a:normAutofit/>
-          </a:bodyPr>
-          <a:lstStyle/>
-          <a:p>
-            <a:pPr indent="0" marL="0">
-              <a:buNone/>
-            </a:pPr>
-            <a:r>
-              <a:rPr lang="en-US" sz="2600" b="1" dirty="0">
-                <a:solidFill>
-                  <a:srgbClr val="1B3A6B"/>
-                </a:solidFill>
-                <a:latin typeface="Arial" pitchFamily="34" charset="0"/>
-                <a:ea typeface="Arial" pitchFamily="34" charset="-122"/>
-                <a:cs typeface="Arial" pitchFamily="34" charset="-120"/>
-              </a:rPr>
-              <a:t>Confiança</a:t>
-            </a:r>
-            <a:endParaRPr lang="en-US" sz="2600" dirty="0"/>
-          </a:p>
-        </p:txBody>
-      </p:sp>
-      <p:sp>
-        <p:nvSpPr>
-          <p:cNvPr id="9" name="Text 6"/>
-          <p:cNvSpPr/>
-          <p:nvPr/>
-        </p:nvSpPr>
-        <p:spPr>
-          <a:xfrm>
-            <a:off x="548640" y="1325880"/>
-            <a:ext cx="11155680" cy="3977640"/>
-          </a:xfrm>
-          <a:prstGeom prst="rect">
-            <a:avLst/>
-          </a:prstGeom>
-          <a:noFill/>
-          <a:ln/>
-        </p:spPr>
-        <p:txBody>
-          <a:bodyPr wrap="square" rtlCol="0" anchor="t">
-            <a:normAutofit/>
-          </a:bodyPr>
-          <a:lstStyle/>
-          <a:p>
-            <a:pPr indent="0" marL="0">
-              <a:spcAft>
-                <a:spcPts val="600"/>
-              </a:spcAft>
-              <a:buNone/>
-            </a:pPr>
-            <a:r>
-              <a:rPr lang="en-US" sz="1400" dirty="0">
-                <a:solidFill>
-                  <a:srgbClr val="1F2937"/>
-                </a:solidFill>
-                <a:latin typeface="Arial" pitchFamily="34" charset="0"/>
-                <a:ea typeface="Arial" pitchFamily="34" charset="-122"/>
-                <a:cs typeface="Arial" pitchFamily="34" charset="-120"/>
-              </a:rPr>
-              <a:t>1. 'Isso é golpe?' → É regulado pela Lei 14.300/2022; você continua cliente da distribuidora; contrato com CNPJ; clientes que já atendemos.</a:t>
-            </a:r>
-            <a:endParaRPr lang="en-US" sz="1400" dirty="0"/>
-          </a:p>
-          <a:p>
-            <a:pPr indent="0" marL="0">
-              <a:spcAft>
-                <a:spcPts val="600"/>
-              </a:spcAft>
-              <a:buNone/>
-            </a:pPr>
-            <a:r>
-              <a:rPr lang="en-US" sz="1400" dirty="0">
-                <a:solidFill>
-                  <a:srgbClr val="1F2937"/>
-                </a:solidFill>
-                <a:latin typeface="Arial" pitchFamily="34" charset="0"/>
-                <a:ea typeface="Arial" pitchFamily="34" charset="-122"/>
-                <a:cs typeface="Arial" pitchFamily="34" charset="-120"/>
-              </a:rPr>
-              <a:t>2. 'A distribuidora vai cortar minha luz?' → Não. O fornecimento é o mesmo; só muda a forma de pagar parte da energia.</a:t>
-            </a:r>
-            <a:endParaRPr lang="en-US" sz="1400" dirty="0"/>
-          </a:p>
-          <a:p>
-            <a:pPr indent="0" marL="0">
-              <a:spcAft>
-                <a:spcPts val="600"/>
-              </a:spcAft>
-              <a:buNone/>
-            </a:pPr>
-            <a:r>
-              <a:rPr lang="en-US" sz="1400" dirty="0">
-                <a:solidFill>
-                  <a:srgbClr val="1F2937"/>
-                </a:solidFill>
-                <a:latin typeface="Arial" pitchFamily="34" charset="0"/>
-                <a:ea typeface="Arial" pitchFamily="34" charset="-122"/>
-                <a:cs typeface="Arial" pitchFamily="34" charset="-120"/>
-              </a:rPr>
-              <a:t>3. 'Preciso trocar medidor ou fazer obra?' → Não. Nada muda na sua instalação.</a:t>
-            </a:r>
-            <a:endParaRPr lang="en-US" sz="1400" dirty="0"/>
-          </a:p>
-        </p:txBody>
-      </p:sp>
-      <p:sp>
-        <p:nvSpPr>
-          <p:cNvPr id="10" name="Shape 7"/>
-          <p:cNvSpPr/>
-          <p:nvPr/>
-        </p:nvSpPr>
-        <p:spPr>
-          <a:xfrm>
-            <a:off x="548640" y="5413248"/>
-            <a:ext cx="11091672" cy="868680"/>
-          </a:xfrm>
-          <a:prstGeom prst="roundRect">
-            <a:avLst>
-              <a:gd name="adj" fmla="val 8421"/>
-            </a:avLst>
-          </a:prstGeom>
-          <a:solidFill>
-            <a:srgbClr val="EEF3FA"/>
-          </a:solidFill>
-          <a:ln w="6350">
-            <a:solidFill>
-              <a:srgbClr val="D8E0EC"/>
-            </a:solidFill>
-            <a:prstDash val="solid"/>
-          </a:ln>
-        </p:spPr>
-      </p:sp>
-      <p:sp>
-        <p:nvSpPr>
-          <p:cNvPr id="11" name="Shape 8"/>
-          <p:cNvSpPr/>
-          <p:nvPr/>
-        </p:nvSpPr>
-        <p:spPr>
-          <a:xfrm>
-            <a:off x="548640" y="5413248"/>
-            <a:ext cx="91440" cy="868680"/>
-          </a:xfrm>
-          <a:prstGeom prst="rect">
-            <a:avLst/>
-          </a:prstGeom>
-          <a:solidFill>
-            <a:srgbClr val="F7A23B"/>
-          </a:solidFill>
-          <a:ln/>
-        </p:spPr>
-      </p:sp>
-      <p:sp>
-        <p:nvSpPr>
-          <p:cNvPr id="12" name="Text 9"/>
-          <p:cNvSpPr/>
-          <p:nvPr/>
-        </p:nvSpPr>
-        <p:spPr>
-          <a:xfrm>
-            <a:off x="777240" y="5458968"/>
-            <a:ext cx="10744200" cy="777240"/>
-          </a:xfrm>
-          <a:prstGeom prst="rect">
-            <a:avLst/>
-          </a:prstGeom>
-          <a:noFill/>
-          <a:ln/>
-        </p:spPr>
-        <p:txBody>
-          <a:bodyPr wrap="square" rtlCol="0" anchor="ctr"/>
-          <a:lstStyle/>
-          <a:p>
-            <a:pPr indent="0" marL="0">
-              <a:buNone/>
-            </a:pPr>
-            <a:r>
-              <a:rPr lang="en-US" sz="1500" dirty="0">
-                <a:solidFill>
-                  <a:srgbClr val="1F2937"/>
-                </a:solidFill>
-                <a:latin typeface="Arial" pitchFamily="34" charset="0"/>
-                <a:ea typeface="Arial" pitchFamily="34" charset="-122"/>
-                <a:cs typeface="Arial" pitchFamily="34" charset="-120"/>
-              </a:rPr>
-              <a:t>Nas objeções de confiança, apoie-se na lei, no contrato e em clientes de referência. O fornecimento continua o mesmo e nada muda na instalação.</a:t>
-            </a:r>
-            <a:endParaRPr lang="en-US" sz="1500" dirty="0"/>
-          </a:p>
-        </p:txBody>
-      </p:sp>
-      <p:sp>
-        <p:nvSpPr>
-          <p:cNvPr id="25" name="Slide Number Placeholder 0"/>
-          <p:cNvSpPr>
-            <a:spLocks noGrp="1"/>
-          </p:cNvSpPr>
-          <p:nvPr>
-            <p:ph type="sldNum" sz="quarter" idx="4294967295"/>
-          </p:nvPr>
-        </p:nvSpPr>
-        <p:spPr>
-          <a:xfrm>
-            <a:off x="11292840" y="6556248"/>
-            <a:ext cx="548640" cy="256032"/>
-          </a:xfrm>
-          <a:prstGeom prst="rect">
-            <a:avLst/>
-          </a:prstGeom>
-          <a:extLst>
-            <a:ext uri="{C572A759-6A51-4108-AA02-DFA0A04FC94B}">
-              <ma14:wrappingTextBoxFlag xmlns:ma14="http://schemas.microsoft.com/office/mac/drawingml/2011/main" val="0"/>
-            </a:ext>
-          </a:extLst>
-        </p:spPr>
-        <p:txBody>
-          <a:bodyPr/>
-          <a:lstStyle>
-            <a:lvl1pPr>
-              <a:defRPr sz="900">
-                <a:solidFill>
-                  <a:srgbClr val="1B3A6B"/>
-                </a:solidFill>
-                <a:latin typeface="Arial"/>
-                <a:ea typeface="Arial"/>
-                <a:cs typeface="Arial"/>
-              </a:defRPr>
-            </a:lvl1pPr>
-          </a:lstStyle>
-          <a:p>
-            <a:pPr algn="r"/>
-            <a:fld id="{F7021451-1387-4CA6-816F-3879F97B5CBC}" type="slidenum">
-              <a:rPr b="1" lang="en-US"/>
-              <a:t>19</a:t>
-            </a:fld>
-            <a:endParaRPr lang="en-US"/>
           </a:p>
         </p:txBody>
       </p:sp>
@@ -11720,7 +12275,7 @@
             <a:r>
               <a:rPr lang="en-US" sz="11000" b="1" dirty="0">
                 <a:solidFill>
-                  <a:srgbClr val="11396F"/>
+                  <a:srgbClr val="F7A23B"/>
                 </a:solidFill>
                 <a:latin typeface="Arial" pitchFamily="34" charset="0"/>
                 <a:ea typeface="Arial" pitchFamily="34" charset="-122"/>
@@ -11843,7 +12398,7 @@
                 <a:ea typeface="Arial" pitchFamily="34" charset="-122"/>
                 <a:cs typeface="Arial" pitchFamily="34" charset="-120"/>
               </a:rPr>
-              <a:t>Aula</a:t>
+              <a:t>Aula teórica</a:t>
             </a:r>
             <a:endParaRPr lang="en-US" sz="1400" dirty="0"/>
           </a:p>
@@ -12316,7 +12871,7 @@
                 <a:ea typeface="Arial" pitchFamily="34" charset="-122"/>
                 <a:cs typeface="Arial" pitchFamily="34" charset="-120"/>
               </a:rPr>
-              <a:t>Entendimento</a:t>
+              <a:t>Confiança</a:t>
             </a:r>
             <a:endParaRPr lang="en-US" sz="2600" dirty="0"/>
           </a:p>
@@ -12352,7 +12907,7 @@
               <a:buNone/>
             </a:pPr>
             <a:r>
-              <a:rPr lang="en-US" sz="1300" dirty="0">
+              <a:rPr lang="en-US" sz="1400" dirty="0">
                 <a:solidFill>
                   <a:srgbClr val="1F2937"/>
                 </a:solidFill>
@@ -12360,9 +12915,9 @@
                 <a:ea typeface="Arial" pitchFamily="34" charset="-122"/>
                 <a:cs typeface="Arial" pitchFamily="34" charset="-120"/>
               </a:rPr>
-              <a:t>4. 'Vou pagar duas contas?' → Sim, duas contas menores que somam menos que a de hoje. (mostrar a conta)</a:t>
-            </a:r>
-            <a:endParaRPr lang="en-US" sz="1300" dirty="0"/>
+              <a:t>1. 'Isso é golpe?' → É regulado pela Lei 14.300/2022; você continua cliente da distribuidora; contrato com CNPJ; clientes que já atendemos.</a:t>
+            </a:r>
+            <a:endParaRPr lang="en-US" sz="1400" dirty="0"/>
           </a:p>
           <a:p>
             <a:pPr indent="0" marL="0">
@@ -12372,7 +12927,7 @@
               <a:buNone/>
             </a:pPr>
             <a:r>
-              <a:rPr lang="en-US" sz="1300" dirty="0">
+              <a:rPr lang="en-US" sz="1400" dirty="0">
                 <a:solidFill>
                   <a:srgbClr val="1F2937"/>
                 </a:solidFill>
@@ -12380,9 +12935,9 @@
                 <a:ea typeface="Arial" pitchFamily="34" charset="-122"/>
                 <a:cs typeface="Arial" pitchFamily="34" charset="-120"/>
               </a:rPr>
-              <a:t>5. 'Por que não 20% na conta toda?' → O desconto é sobre a energia compensada; uma parte da conta é da distribuidora (mínimo e uso da rede). Sua economia real é R$ X.</a:t>
-            </a:r>
-            <a:endParaRPr lang="en-US" sz="1300" dirty="0"/>
+              <a:t>2. 'A distribuidora vai cortar minha luz?' → Não. O fornecimento é o mesmo; só muda a forma de pagar parte da energia.</a:t>
+            </a:r>
+            <a:endParaRPr lang="en-US" sz="1400" dirty="0"/>
           </a:p>
           <a:p>
             <a:pPr indent="0" marL="0">
@@ -12392,7 +12947,7 @@
               <a:buNone/>
             </a:pPr>
             <a:r>
-              <a:rPr lang="en-US" sz="1300" dirty="0">
+              <a:rPr lang="en-US" sz="1400" dirty="0">
                 <a:solidFill>
                   <a:srgbClr val="1F2937"/>
                 </a:solidFill>
@@ -12400,9 +12955,9 @@
                 <a:ea typeface="Arial" pitchFamily="34" charset="-122"/>
                 <a:cs typeface="Arial" pitchFamily="34" charset="-120"/>
               </a:rPr>
-              <a:t>6. 'E se a usina gerar menos?' → Você recebe proporcionalmente menos créditos e paga proporcionalmente menos para nós; nunca paga por energia que não recebeu.</a:t>
-            </a:r>
-            <a:endParaRPr lang="en-US" sz="1300" dirty="0"/>
+              <a:t>3. 'Preciso trocar medidor ou fazer obra?' → Não. Nada muda na sua instalação.</a:t>
+            </a:r>
+            <a:endParaRPr lang="en-US" sz="1400" dirty="0"/>
           </a:p>
         </p:txBody>
       </p:sp>
@@ -12486,7 +13041,7 @@
                 <a:ea typeface="Arial" pitchFamily="34" charset="-122"/>
                 <a:cs typeface="Arial" pitchFamily="34" charset="-120"/>
               </a:rPr>
-              <a:t>Nas de entendimento, mostre a conta do próprio cliente. E lembre: ele nunca paga por energia que não recebeu, porque a cobrança parte do que foi compensado na fatura.</a:t>
+              <a:t>Nas objeções de confiança, apoie-se na lei, no contrato e em clientes de referência. O fornecimento continua o mesmo e nada muda na instalação.</a:t>
             </a:r>
             <a:endParaRPr lang="en-US" sz="1500" dirty="0"/>
           </a:p>
@@ -12793,7 +13348,7 @@
                 <a:ea typeface="Arial" pitchFamily="34" charset="-122"/>
                 <a:cs typeface="Arial" pitchFamily="34" charset="-120"/>
               </a:rPr>
-              <a:t>Compromisso</a:t>
+              <a:t>Entendimento</a:t>
             </a:r>
             <a:endParaRPr lang="en-US" sz="2600" dirty="0"/>
           </a:p>
@@ -12829,7 +13384,7 @@
               <a:buNone/>
             </a:pPr>
             <a:r>
-              <a:rPr lang="en-US" sz="1400" dirty="0">
+              <a:rPr lang="en-US" sz="1300" dirty="0">
                 <a:solidFill>
                   <a:srgbClr val="1F2937"/>
                 </a:solidFill>
@@ -12837,9 +13392,9 @@
                 <a:ea typeface="Arial" pitchFamily="34" charset="-122"/>
                 <a:cs typeface="Arial" pitchFamily="34" charset="-120"/>
               </a:rPr>
-              <a:t>7. 'Tem fidelidade? E multa?' → Prazo X; cancelamento com aviso de Y dias; condições no contrato.</a:t>
-            </a:r>
-            <a:endParaRPr lang="en-US" sz="1400" dirty="0"/>
+              <a:t>4. 'Vou pagar duas contas?' → Sim, duas contas menores que somam menos que a de hoje. (mostrar a conta)</a:t>
+            </a:r>
+            <a:endParaRPr lang="en-US" sz="1300" dirty="0"/>
           </a:p>
           <a:p>
             <a:pPr indent="0" marL="0">
@@ -12849,7 +13404,7 @@
               <a:buNone/>
             </a:pPr>
             <a:r>
-              <a:rPr lang="en-US" sz="1400" dirty="0">
+              <a:rPr lang="en-US" sz="1300" dirty="0">
                 <a:solidFill>
                   <a:srgbClr val="1F2937"/>
                 </a:solidFill>
@@ -12857,9 +13412,9 @@
                 <a:ea typeface="Arial" pitchFamily="34" charset="-122"/>
                 <a:cs typeface="Arial" pitchFamily="34" charset="-120"/>
               </a:rPr>
-              <a:t>8. 'E se eu mudar de endereço?' → Transferimos a cota para a nova UC, se estiver na mesma distribuidora; senão, encerramos conforme contrato.</a:t>
-            </a:r>
-            <a:endParaRPr lang="en-US" sz="1400" dirty="0"/>
+              <a:t>5. 'Por que não 20% na conta toda?' → O desconto é sobre a energia compensada; uma parte da conta é da distribuidora (mínimo e uso da rede). Sua economia real é R$ X.</a:t>
+            </a:r>
+            <a:endParaRPr lang="en-US" sz="1300" dirty="0"/>
           </a:p>
           <a:p>
             <a:pPr indent="0" marL="0">
@@ -12869,7 +13424,7 @@
               <a:buNone/>
             </a:pPr>
             <a:r>
-              <a:rPr lang="en-US" sz="1400" dirty="0">
+              <a:rPr lang="en-US" sz="1300" dirty="0">
                 <a:solidFill>
                   <a:srgbClr val="1F2937"/>
                 </a:solidFill>
@@ -12877,9 +13432,9 @@
                 <a:ea typeface="Arial" pitchFamily="34" charset="-122"/>
                 <a:cs typeface="Arial" pitchFamily="34" charset="-120"/>
               </a:rPr>
-              <a:t>9. 'E essa história de Fio B / mudança de regra?' → A economia acompanha as regras e a tarifa; mostramos a conta; contrato prevê o ajuste.</a:t>
-            </a:r>
-            <a:endParaRPr lang="en-US" sz="1400" dirty="0"/>
+              <a:t>6. 'E se a usina gerar menos?' → Você recebe proporcionalmente menos créditos e paga proporcionalmente menos para nós; nunca paga por energia que não recebeu.</a:t>
+            </a:r>
+            <a:endParaRPr lang="en-US" sz="1300" dirty="0"/>
           </a:p>
         </p:txBody>
       </p:sp>
@@ -12963,7 +13518,7 @@
                 <a:ea typeface="Arial" pitchFamily="34" charset="-122"/>
                 <a:cs typeface="Arial" pitchFamily="34" charset="-120"/>
               </a:rPr>
-              <a:t>Nas de compromisso, responda exatamente o que o contrato diz. Cancelamento simples, com aviso prévio, vende mais que multa pesada.</a:t>
+              <a:t>Nas de entendimento, mostre a conta do próprio cliente. E lembre: ele nunca paga por energia que não recebeu, porque a cobrança parte do que foi compensado na fatura.</a:t>
             </a:r>
             <a:endParaRPr lang="en-US" sz="1500" dirty="0"/>
           </a:p>
@@ -13270,7 +13825,7 @@
                 <a:ea typeface="Arial" pitchFamily="34" charset="-122"/>
                 <a:cs typeface="Arial" pitchFamily="34" charset="-120"/>
               </a:rPr>
-              <a:t>Timing</a:t>
+              <a:t>Compromisso</a:t>
             </a:r>
             <a:endParaRPr lang="en-US" sz="2600" dirty="0"/>
           </a:p>
@@ -13278,139 +13833,91 @@
       </p:sp>
       <p:sp>
         <p:nvSpPr>
-          <p:cNvPr id="9" name="Shape 6"/>
-          <p:cNvSpPr/>
-          <p:nvPr/>
-        </p:nvSpPr>
-        <p:spPr>
-          <a:xfrm>
-            <a:off x="548640" y="2583180"/>
-            <a:ext cx="5596128" cy="1463040"/>
-          </a:xfrm>
-          <a:prstGeom prst="chevron">
-            <a:avLst/>
-          </a:prstGeom>
-          <a:solidFill>
-            <a:srgbClr val="1B3A6B"/>
-          </a:solidFill>
-          <a:ln w="25400">
-            <a:solidFill>
-              <a:srgbClr val="FFFFFF"/>
-            </a:solidFill>
-            <a:prstDash val="solid"/>
-          </a:ln>
-        </p:spPr>
-      </p:sp>
-      <p:sp>
-        <p:nvSpPr>
-          <p:cNvPr id="10" name="Text 7"/>
-          <p:cNvSpPr/>
-          <p:nvPr/>
-        </p:nvSpPr>
-        <p:spPr>
-          <a:xfrm>
-            <a:off x="868680" y="2583180"/>
-            <a:ext cx="5074920" cy="1463040"/>
-          </a:xfrm>
-          <a:prstGeom prst="rect">
-            <a:avLst/>
-          </a:prstGeom>
-          <a:noFill/>
-          <a:ln/>
-        </p:spPr>
-        <p:txBody>
-          <a:bodyPr wrap="square" rtlCol="0" anchor="ctr">
+          <p:cNvPr id="9" name="Text 6"/>
+          <p:cNvSpPr/>
+          <p:nvPr/>
+        </p:nvSpPr>
+        <p:spPr>
+          <a:xfrm>
+            <a:off x="548640" y="1325880"/>
+            <a:ext cx="11155680" cy="3977640"/>
+          </a:xfrm>
+          <a:prstGeom prst="rect">
+            <a:avLst/>
+          </a:prstGeom>
+          <a:noFill/>
+          <a:ln/>
+        </p:spPr>
+        <p:txBody>
+          <a:bodyPr wrap="square" rtlCol="0" anchor="t">
             <a:normAutofit/>
           </a:bodyPr>
           <a:lstStyle/>
           <a:p>
-            <a:pPr algn="ctr" indent="0" marL="0">
-              <a:buNone/>
-            </a:pPr>
-            <a:r>
-              <a:rPr lang="en-US" sz="1500" b="1" dirty="0">
-                <a:solidFill>
-                  <a:srgbClr val="FFFFFF"/>
-                </a:solidFill>
-                <a:latin typeface="Arial" pitchFamily="34" charset="0"/>
-                <a:ea typeface="Arial" pitchFamily="34" charset="-122"/>
-                <a:cs typeface="Arial" pitchFamily="34" charset="-120"/>
-              </a:rPr>
-              <a:t>10. 'Vou pensar.'</a:t>
-            </a:r>
-            <a:endParaRPr lang="en-US" sz="1500" dirty="0"/>
-          </a:p>
-        </p:txBody>
-      </p:sp>
-      <p:sp>
-        <p:nvSpPr>
-          <p:cNvPr id="11" name="Shape 8"/>
-          <p:cNvSpPr/>
-          <p:nvPr/>
-        </p:nvSpPr>
-        <p:spPr>
-          <a:xfrm>
-            <a:off x="6035040" y="2583180"/>
-            <a:ext cx="5596128" cy="1463040"/>
-          </a:xfrm>
-          <a:prstGeom prst="chevron">
-            <a:avLst/>
-          </a:prstGeom>
-          <a:solidFill>
-            <a:srgbClr val="11396F"/>
-          </a:solidFill>
-          <a:ln w="25400">
-            <a:solidFill>
-              <a:srgbClr val="FFFFFF"/>
-            </a:solidFill>
-            <a:prstDash val="solid"/>
-          </a:ln>
-        </p:spPr>
-      </p:sp>
-      <p:sp>
-        <p:nvSpPr>
-          <p:cNvPr id="12" name="Text 9"/>
-          <p:cNvSpPr/>
-          <p:nvPr/>
-        </p:nvSpPr>
-        <p:spPr>
-          <a:xfrm>
-            <a:off x="6355080" y="2583180"/>
-            <a:ext cx="5074920" cy="1463040"/>
-          </a:xfrm>
-          <a:prstGeom prst="rect">
-            <a:avLst/>
-          </a:prstGeom>
-          <a:noFill/>
-          <a:ln/>
-        </p:spPr>
-        <p:txBody>
-          <a:bodyPr wrap="square" rtlCol="0" anchor="ctr">
-            <a:normAutofit/>
-          </a:bodyPr>
-          <a:lstStyle/>
-          <a:p>
-            <a:pPr algn="ctr" indent="0" marL="0">
-              <a:buNone/>
-            </a:pPr>
-            <a:r>
-              <a:rPr lang="en-US" sz="1500" b="1" dirty="0">
-                <a:solidFill>
-                  <a:srgbClr val="FFFFFF"/>
-                </a:solidFill>
-                <a:latin typeface="Arial" pitchFamily="34" charset="0"/>
-                <a:ea typeface="Arial" pitchFamily="34" charset="-122"/>
-                <a:cs typeface="Arial" pitchFamily="34" charset="-120"/>
-              </a:rPr>
-              <a:t>'Claro. O que falta para decidir?' + data de retorno + resumo por escrito com a economia anual.</a:t>
-            </a:r>
-            <a:endParaRPr lang="en-US" sz="1500" dirty="0"/>
-          </a:p>
-        </p:txBody>
-      </p:sp>
-      <p:sp>
-        <p:nvSpPr>
-          <p:cNvPr id="13" name="Shape 10"/>
+            <a:pPr indent="0" marL="0">
+              <a:spcAft>
+                <a:spcPts val="600"/>
+              </a:spcAft>
+              <a:buNone/>
+            </a:pPr>
+            <a:r>
+              <a:rPr lang="en-US" sz="1400" dirty="0">
+                <a:solidFill>
+                  <a:srgbClr val="1F2937"/>
+                </a:solidFill>
+                <a:latin typeface="Arial" pitchFamily="34" charset="0"/>
+                <a:ea typeface="Arial" pitchFamily="34" charset="-122"/>
+                <a:cs typeface="Arial" pitchFamily="34" charset="-120"/>
+              </a:rPr>
+              <a:t>7. 'Tem fidelidade? E multa?' → Prazo X; cancelamento com aviso de Y dias; condições no contrato.</a:t>
+            </a:r>
+            <a:endParaRPr lang="en-US" sz="1400" dirty="0"/>
+          </a:p>
+          <a:p>
+            <a:pPr indent="0" marL="0">
+              <a:spcAft>
+                <a:spcPts val="600"/>
+              </a:spcAft>
+              <a:buNone/>
+            </a:pPr>
+            <a:r>
+              <a:rPr lang="en-US" sz="1400" dirty="0">
+                <a:solidFill>
+                  <a:srgbClr val="1F2937"/>
+                </a:solidFill>
+                <a:latin typeface="Arial" pitchFamily="34" charset="0"/>
+                <a:ea typeface="Arial" pitchFamily="34" charset="-122"/>
+                <a:cs typeface="Arial" pitchFamily="34" charset="-120"/>
+              </a:rPr>
+              <a:t>8. 'E se eu mudar de endereço?' → Transferimos a cota para a nova UC, se estiver na mesma distribuidora; senão, encerramos conforme contrato.</a:t>
+            </a:r>
+            <a:endParaRPr lang="en-US" sz="1400" dirty="0"/>
+          </a:p>
+          <a:p>
+            <a:pPr indent="0" marL="0">
+              <a:spcAft>
+                <a:spcPts val="600"/>
+              </a:spcAft>
+              <a:buNone/>
+            </a:pPr>
+            <a:r>
+              <a:rPr lang="en-US" sz="1400" dirty="0">
+                <a:solidFill>
+                  <a:srgbClr val="1F2937"/>
+                </a:solidFill>
+                <a:latin typeface="Arial" pitchFamily="34" charset="0"/>
+                <a:ea typeface="Arial" pitchFamily="34" charset="-122"/>
+                <a:cs typeface="Arial" pitchFamily="34" charset="-120"/>
+              </a:rPr>
+              <a:t>9. 'E essa história de Fio B / mudança de regra?' → A economia acompanha as regras e a tarifa; mostramos a conta; contrato prevê o ajuste.</a:t>
+            </a:r>
+            <a:endParaRPr lang="en-US" sz="1400" dirty="0"/>
+          </a:p>
+        </p:txBody>
+      </p:sp>
+      <p:sp>
+        <p:nvSpPr>
+          <p:cNvPr id="10" name="Shape 7"/>
           <p:cNvSpPr/>
           <p:nvPr/>
         </p:nvSpPr>
@@ -13437,7 +13944,7 @@
       </p:sp>
       <p:sp>
         <p:nvSpPr>
-          <p:cNvPr id="14" name="Shape 11"/>
+          <p:cNvPr id="11" name="Shape 8"/>
           <p:cNvSpPr/>
           <p:nvPr/>
         </p:nvSpPr>
@@ -13457,7 +13964,7 @@
       </p:sp>
       <p:sp>
         <p:nvSpPr>
-          <p:cNvPr id="15" name="Text 12"/>
+          <p:cNvPr id="12" name="Text 9"/>
           <p:cNvSpPr/>
           <p:nvPr/>
         </p:nvSpPr>
@@ -13488,7 +13995,7 @@
                 <a:ea typeface="Arial" pitchFamily="34" charset="-122"/>
                 <a:cs typeface="Arial" pitchFamily="34" charset="-120"/>
               </a:rPr>
-              <a:t>E no vou pensar, pergunte o que falta para decidir, combine um retorno e envie a economia anual por escrito.</a:t>
+              <a:t>Nas de compromisso, responda exatamente o que o contrato diz. Cancelamento simples, com aviso prévio, vende mais que multa pesada.</a:t>
             </a:r>
             <a:endParaRPr lang="en-US" sz="1500" dirty="0"/>
           </a:p>
@@ -13553,6 +14060,531 @@
 <file path=ppt/slides/slide23.xml><?xml version="1.0" encoding="utf-8"?>
 <p:sld xmlns:a="http://schemas.openxmlformats.org/drawingml/2006/main" xmlns:r="http://schemas.openxmlformats.org/officeDocument/2006/relationships" xmlns:p="http://schemas.openxmlformats.org/presentationml/2006/main">
   <p:cSld name="Slide 23">
+    <p:bg>
+      <p:bgPr>
+        <a:solidFill>
+          <a:srgbClr val="F6F8FB"/>
+        </a:solidFill>
+      </p:bgPr>
+    </p:bg>
+    <p:spTree>
+      <p:nvGrpSpPr>
+        <p:cNvPr id="1" name=""/>
+        <p:cNvGrpSpPr/>
+        <p:nvPr/>
+      </p:nvGrpSpPr>
+      <p:grpSpPr>
+        <a:xfrm>
+          <a:off x="0" y="0"/>
+          <a:ext cx="0" cy="0"/>
+          <a:chOff x="0" y="0"/>
+          <a:chExt cx="0" cy="0"/>
+        </a:xfrm>
+      </p:grpSpPr>
+      <p:sp>
+        <p:nvSpPr>
+          <p:cNvPr id="2" name="Shape 0"/>
+          <p:cNvSpPr/>
+          <p:nvPr/>
+        </p:nvSpPr>
+        <p:spPr>
+          <a:xfrm>
+            <a:off x="0" y="6510528"/>
+            <a:ext cx="12191695" cy="347472"/>
+          </a:xfrm>
+          <a:prstGeom prst="rect">
+            <a:avLst/>
+          </a:prstGeom>
+          <a:solidFill>
+            <a:srgbClr val="FFFFFF"/>
+          </a:solidFill>
+          <a:ln w="6350">
+            <a:solidFill>
+              <a:srgbClr val="D8E0EC"/>
+            </a:solidFill>
+            <a:prstDash val="solid"/>
+          </a:ln>
+        </p:spPr>
+      </p:sp>
+      <p:pic>
+        <p:nvPicPr>
+          <p:cNvPr id="3" name="Image 0" descr="/www/wwwroot/rexar/gdsolar/docs/curso/slides/assets/logo-gdsolar.png">    </p:cNvPr>
+          <p:cNvPicPr>
+            <a:picLocks noChangeAspect="1"/>
+          </p:cNvPicPr>
+          <p:nvPr/>
+        </p:nvPicPr>
+        <p:blipFill>
+          <a:blip r:embed="rId1"/>
+          <a:stretch>
+            <a:fillRect/>
+          </a:stretch>
+        </p:blipFill>
+        <p:spPr>
+          <a:xfrm>
+            <a:off x="548640" y="6547104"/>
+            <a:ext cx="274320" cy="274320"/>
+          </a:xfrm>
+          <a:prstGeom prst="rect">
+            <a:avLst/>
+          </a:prstGeom>
+        </p:spPr>
+      </p:pic>
+      <p:sp>
+        <p:nvSpPr>
+          <p:cNvPr id="4" name="Text 1"/>
+          <p:cNvSpPr/>
+          <p:nvPr/>
+        </p:nvSpPr>
+        <p:spPr>
+          <a:xfrm>
+            <a:off x="886968" y="6528816"/>
+            <a:ext cx="6400800" cy="310896"/>
+          </a:xfrm>
+          <a:prstGeom prst="rect">
+            <a:avLst/>
+          </a:prstGeom>
+          <a:noFill/>
+          <a:ln/>
+        </p:spPr>
+        <p:txBody>
+          <a:bodyPr wrap="square" rtlCol="0" anchor="ctr"/>
+          <a:lstStyle/>
+          <a:p>
+            <a:pPr indent="0" marL="0">
+              <a:buNone/>
+            </a:pPr>
+            <a:r>
+              <a:rPr lang="en-US" sz="900" b="1" dirty="0">
+                <a:solidFill>
+                  <a:srgbClr val="64748B"/>
+                </a:solidFill>
+                <a:latin typeface="Arial" pitchFamily="34" charset="0"/>
+                <a:ea typeface="Arial" pitchFamily="34" charset="-122"/>
+                <a:cs typeface="Arial" pitchFamily="34" charset="-120"/>
+              </a:rPr>
+              <a:t>GD Solar  ·  Formação em Energia por Assinatura</a:t>
+            </a:r>
+            <a:endParaRPr lang="en-US" sz="900" dirty="0"/>
+          </a:p>
+        </p:txBody>
+      </p:sp>
+      <p:sp>
+        <p:nvSpPr>
+          <p:cNvPr id="5" name="Text 2"/>
+          <p:cNvSpPr/>
+          <p:nvPr/>
+        </p:nvSpPr>
+        <p:spPr>
+          <a:xfrm>
+            <a:off x="7132320" y="6528816"/>
+            <a:ext cx="4023360" cy="310896"/>
+          </a:xfrm>
+          <a:prstGeom prst="rect">
+            <a:avLst/>
+          </a:prstGeom>
+          <a:noFill/>
+          <a:ln/>
+        </p:spPr>
+        <p:txBody>
+          <a:bodyPr wrap="square" rtlCol="0" anchor="ctr"/>
+          <a:lstStyle/>
+          <a:p>
+            <a:pPr algn="r" indent="0" marL="0">
+              <a:buNone/>
+            </a:pPr>
+            <a:r>
+              <a:rPr lang="en-US" sz="900" dirty="0">
+                <a:solidFill>
+                  <a:srgbClr val="64748B"/>
+                </a:solidFill>
+                <a:latin typeface="Arial" pitchFamily="34" charset="0"/>
+                <a:ea typeface="Arial" pitchFamily="34" charset="-122"/>
+                <a:cs typeface="Arial" pitchFamily="34" charset="-120"/>
+              </a:rPr>
+              <a:t>M5 · Aula 4</a:t>
+            </a:r>
+            <a:endParaRPr lang="en-US" sz="900" dirty="0"/>
+          </a:p>
+        </p:txBody>
+      </p:sp>
+      <p:sp>
+        <p:nvSpPr>
+          <p:cNvPr id="6" name="Shape 3"/>
+          <p:cNvSpPr/>
+          <p:nvPr/>
+        </p:nvSpPr>
+        <p:spPr>
+          <a:xfrm>
+            <a:off x="548640" y="384048"/>
+            <a:ext cx="82296" cy="658368"/>
+          </a:xfrm>
+          <a:prstGeom prst="rect">
+            <a:avLst/>
+          </a:prstGeom>
+          <a:solidFill>
+            <a:srgbClr val="F7A23B"/>
+          </a:solidFill>
+          <a:ln/>
+        </p:spPr>
+      </p:sp>
+      <p:sp>
+        <p:nvSpPr>
+          <p:cNvPr id="7" name="Text 4"/>
+          <p:cNvSpPr/>
+          <p:nvPr/>
+        </p:nvSpPr>
+        <p:spPr>
+          <a:xfrm>
+            <a:off x="777240" y="292608"/>
+            <a:ext cx="10972800" cy="274320"/>
+          </a:xfrm>
+          <a:prstGeom prst="rect">
+            <a:avLst/>
+          </a:prstGeom>
+          <a:noFill/>
+          <a:ln/>
+        </p:spPr>
+        <p:txBody>
+          <a:bodyPr wrap="square" rtlCol="0" anchor="ctr"/>
+          <a:lstStyle/>
+          <a:p>
+            <a:pPr indent="0" marL="0">
+              <a:buNone/>
+            </a:pPr>
+            <a:r>
+              <a:rPr lang="en-US" sz="1000" b="1" spc="100" kern="0" dirty="0">
+                <a:solidFill>
+                  <a:srgbClr val="F7A23B"/>
+                </a:solidFill>
+                <a:latin typeface="Arial" pitchFamily="34" charset="0"/>
+                <a:ea typeface="Arial" pitchFamily="34" charset="-122"/>
+                <a:cs typeface="Arial" pitchFamily="34" charset="-120"/>
+              </a:rPr>
+              <a:t>AULA 4 · OBJEÇÕES E ARGUMENTOS</a:t>
+            </a:r>
+            <a:endParaRPr lang="en-US" sz="1000" dirty="0"/>
+          </a:p>
+        </p:txBody>
+      </p:sp>
+      <p:sp>
+        <p:nvSpPr>
+          <p:cNvPr id="8" name="Text 5"/>
+          <p:cNvSpPr/>
+          <p:nvPr/>
+        </p:nvSpPr>
+        <p:spPr>
+          <a:xfrm>
+            <a:off x="777240" y="530352"/>
+            <a:ext cx="10881360" cy="566928"/>
+          </a:xfrm>
+          <a:prstGeom prst="rect">
+            <a:avLst/>
+          </a:prstGeom>
+          <a:noFill/>
+          <a:ln/>
+        </p:spPr>
+        <p:txBody>
+          <a:bodyPr wrap="square" rtlCol="0" anchor="ctr">
+            <a:normAutofit/>
+          </a:bodyPr>
+          <a:lstStyle/>
+          <a:p>
+            <a:pPr indent="0" marL="0">
+              <a:buNone/>
+            </a:pPr>
+            <a:r>
+              <a:rPr lang="en-US" sz="2600" b="1" dirty="0">
+                <a:solidFill>
+                  <a:srgbClr val="1B3A6B"/>
+                </a:solidFill>
+                <a:latin typeface="Arial" pitchFamily="34" charset="0"/>
+                <a:ea typeface="Arial" pitchFamily="34" charset="-122"/>
+                <a:cs typeface="Arial" pitchFamily="34" charset="-120"/>
+              </a:rPr>
+              <a:t>Timing</a:t>
+            </a:r>
+            <a:endParaRPr lang="en-US" sz="2600" dirty="0"/>
+          </a:p>
+        </p:txBody>
+      </p:sp>
+      <p:sp>
+        <p:nvSpPr>
+          <p:cNvPr id="9" name="Shape 6"/>
+          <p:cNvSpPr/>
+          <p:nvPr/>
+        </p:nvSpPr>
+        <p:spPr>
+          <a:xfrm>
+            <a:off x="548640" y="2583180"/>
+            <a:ext cx="5596128" cy="1463040"/>
+          </a:xfrm>
+          <a:prstGeom prst="chevron">
+            <a:avLst/>
+          </a:prstGeom>
+          <a:solidFill>
+            <a:srgbClr val="1B3A6B"/>
+          </a:solidFill>
+          <a:ln w="25400">
+            <a:solidFill>
+              <a:srgbClr val="FFFFFF"/>
+            </a:solidFill>
+            <a:prstDash val="solid"/>
+          </a:ln>
+        </p:spPr>
+      </p:sp>
+      <p:sp>
+        <p:nvSpPr>
+          <p:cNvPr id="10" name="Text 7"/>
+          <p:cNvSpPr/>
+          <p:nvPr/>
+        </p:nvSpPr>
+        <p:spPr>
+          <a:xfrm>
+            <a:off x="868680" y="2583180"/>
+            <a:ext cx="5074920" cy="1463040"/>
+          </a:xfrm>
+          <a:prstGeom prst="rect">
+            <a:avLst/>
+          </a:prstGeom>
+          <a:noFill/>
+          <a:ln/>
+        </p:spPr>
+        <p:txBody>
+          <a:bodyPr wrap="square" rtlCol="0" anchor="ctr">
+            <a:normAutofit/>
+          </a:bodyPr>
+          <a:lstStyle/>
+          <a:p>
+            <a:pPr algn="ctr" indent="0" marL="0">
+              <a:buNone/>
+            </a:pPr>
+            <a:r>
+              <a:rPr lang="en-US" sz="1500" b="1" dirty="0">
+                <a:solidFill>
+                  <a:srgbClr val="FFFFFF"/>
+                </a:solidFill>
+                <a:latin typeface="Arial" pitchFamily="34" charset="0"/>
+                <a:ea typeface="Arial" pitchFamily="34" charset="-122"/>
+                <a:cs typeface="Arial" pitchFamily="34" charset="-120"/>
+              </a:rPr>
+              <a:t>10. 'Vou pensar.'</a:t>
+            </a:r>
+            <a:endParaRPr lang="en-US" sz="1500" dirty="0"/>
+          </a:p>
+        </p:txBody>
+      </p:sp>
+      <p:sp>
+        <p:nvSpPr>
+          <p:cNvPr id="11" name="Shape 8"/>
+          <p:cNvSpPr/>
+          <p:nvPr/>
+        </p:nvSpPr>
+        <p:spPr>
+          <a:xfrm>
+            <a:off x="6035040" y="2583180"/>
+            <a:ext cx="5596128" cy="1463040"/>
+          </a:xfrm>
+          <a:prstGeom prst="chevron">
+            <a:avLst/>
+          </a:prstGeom>
+          <a:solidFill>
+            <a:srgbClr val="11396F"/>
+          </a:solidFill>
+          <a:ln w="25400">
+            <a:solidFill>
+              <a:srgbClr val="FFFFFF"/>
+            </a:solidFill>
+            <a:prstDash val="solid"/>
+          </a:ln>
+        </p:spPr>
+      </p:sp>
+      <p:sp>
+        <p:nvSpPr>
+          <p:cNvPr id="12" name="Text 9"/>
+          <p:cNvSpPr/>
+          <p:nvPr/>
+        </p:nvSpPr>
+        <p:spPr>
+          <a:xfrm>
+            <a:off x="6355080" y="2583180"/>
+            <a:ext cx="5074920" cy="1463040"/>
+          </a:xfrm>
+          <a:prstGeom prst="rect">
+            <a:avLst/>
+          </a:prstGeom>
+          <a:noFill/>
+          <a:ln/>
+        </p:spPr>
+        <p:txBody>
+          <a:bodyPr wrap="square" rtlCol="0" anchor="ctr">
+            <a:normAutofit/>
+          </a:bodyPr>
+          <a:lstStyle/>
+          <a:p>
+            <a:pPr algn="ctr" indent="0" marL="0">
+              <a:buNone/>
+            </a:pPr>
+            <a:r>
+              <a:rPr lang="en-US" sz="1500" b="1" dirty="0">
+                <a:solidFill>
+                  <a:srgbClr val="FFFFFF"/>
+                </a:solidFill>
+                <a:latin typeface="Arial" pitchFamily="34" charset="0"/>
+                <a:ea typeface="Arial" pitchFamily="34" charset="-122"/>
+                <a:cs typeface="Arial" pitchFamily="34" charset="-120"/>
+              </a:rPr>
+              <a:t>'Claro. O que falta para decidir?' + data de retorno + resumo por escrito com a economia anual.</a:t>
+            </a:r>
+            <a:endParaRPr lang="en-US" sz="1500" dirty="0"/>
+          </a:p>
+        </p:txBody>
+      </p:sp>
+      <p:sp>
+        <p:nvSpPr>
+          <p:cNvPr id="13" name="Shape 10"/>
+          <p:cNvSpPr/>
+          <p:nvPr/>
+        </p:nvSpPr>
+        <p:spPr>
+          <a:xfrm>
+            <a:off x="548640" y="5413248"/>
+            <a:ext cx="11091672" cy="868680"/>
+          </a:xfrm>
+          <a:prstGeom prst="roundRect">
+            <a:avLst>
+              <a:gd name="adj" fmla="val 8421"/>
+            </a:avLst>
+          </a:prstGeom>
+          <a:solidFill>
+            <a:srgbClr val="EEF3FA"/>
+          </a:solidFill>
+          <a:ln w="6350">
+            <a:solidFill>
+              <a:srgbClr val="D8E0EC"/>
+            </a:solidFill>
+            <a:prstDash val="solid"/>
+          </a:ln>
+        </p:spPr>
+      </p:sp>
+      <p:sp>
+        <p:nvSpPr>
+          <p:cNvPr id="14" name="Shape 11"/>
+          <p:cNvSpPr/>
+          <p:nvPr/>
+        </p:nvSpPr>
+        <p:spPr>
+          <a:xfrm>
+            <a:off x="548640" y="5413248"/>
+            <a:ext cx="91440" cy="868680"/>
+          </a:xfrm>
+          <a:prstGeom prst="rect">
+            <a:avLst/>
+          </a:prstGeom>
+          <a:solidFill>
+            <a:srgbClr val="F7A23B"/>
+          </a:solidFill>
+          <a:ln/>
+        </p:spPr>
+      </p:sp>
+      <p:sp>
+        <p:nvSpPr>
+          <p:cNvPr id="15" name="Text 12"/>
+          <p:cNvSpPr/>
+          <p:nvPr/>
+        </p:nvSpPr>
+        <p:spPr>
+          <a:xfrm>
+            <a:off x="777240" y="5458968"/>
+            <a:ext cx="10744200" cy="777240"/>
+          </a:xfrm>
+          <a:prstGeom prst="rect">
+            <a:avLst/>
+          </a:prstGeom>
+          <a:noFill/>
+          <a:ln/>
+        </p:spPr>
+        <p:txBody>
+          <a:bodyPr wrap="square" rtlCol="0" anchor="ctr"/>
+          <a:lstStyle/>
+          <a:p>
+            <a:pPr indent="0" marL="0">
+              <a:buNone/>
+            </a:pPr>
+            <a:r>
+              <a:rPr lang="en-US" sz="1500" dirty="0">
+                <a:solidFill>
+                  <a:srgbClr val="1F2937"/>
+                </a:solidFill>
+                <a:latin typeface="Arial" pitchFamily="34" charset="0"/>
+                <a:ea typeface="Arial" pitchFamily="34" charset="-122"/>
+                <a:cs typeface="Arial" pitchFamily="34" charset="-120"/>
+              </a:rPr>
+              <a:t>E no vou pensar, pergunte o que falta para decidir, combine um retorno e envie a economia anual por escrito.</a:t>
+            </a:r>
+            <a:endParaRPr lang="en-US" sz="1500" dirty="0"/>
+          </a:p>
+        </p:txBody>
+      </p:sp>
+      <p:sp>
+        <p:nvSpPr>
+          <p:cNvPr id="25" name="Slide Number Placeholder 0"/>
+          <p:cNvSpPr>
+            <a:spLocks noGrp="1"/>
+          </p:cNvSpPr>
+          <p:nvPr>
+            <p:ph type="sldNum" sz="quarter" idx="4294967295"/>
+          </p:nvPr>
+        </p:nvSpPr>
+        <p:spPr>
+          <a:xfrm>
+            <a:off x="11292840" y="6556248"/>
+            <a:ext cx="548640" cy="256032"/>
+          </a:xfrm>
+          <a:prstGeom prst="rect">
+            <a:avLst/>
+          </a:prstGeom>
+          <a:extLst>
+            <a:ext uri="{C572A759-6A51-4108-AA02-DFA0A04FC94B}">
+              <ma14:wrappingTextBoxFlag xmlns:ma14="http://schemas.microsoft.com/office/mac/drawingml/2011/main" val="0"/>
+            </a:ext>
+          </a:extLst>
+        </p:spPr>
+        <p:txBody>
+          <a:bodyPr/>
+          <a:lstStyle>
+            <a:lvl1pPr>
+              <a:defRPr sz="900">
+                <a:solidFill>
+                  <a:srgbClr val="1B3A6B"/>
+                </a:solidFill>
+                <a:latin typeface="Arial"/>
+                <a:ea typeface="Arial"/>
+                <a:cs typeface="Arial"/>
+              </a:defRPr>
+            </a:lvl1pPr>
+          </a:lstStyle>
+          <a:p>
+            <a:pPr algn="r"/>
+            <a:fld id="{F7021451-1387-4CA6-816F-3879F97B5CBC}" type="slidenum">
+              <a:rPr b="1" lang="en-US"/>
+              <a:t>23</a:t>
+            </a:fld>
+            <a:endParaRPr lang="en-US"/>
+          </a:p>
+        </p:txBody>
+      </p:sp>
+    </p:spTree>
+  </p:cSld>
+  <p:clrMapOvr>
+    <a:masterClrMapping/>
+  </p:clrMapOvr>
+</p:sld>
+</file>
+
+<file path=ppt/slides/slide24.xml><?xml version="1.0" encoding="utf-8"?>
+<p:sld xmlns:a="http://schemas.openxmlformats.org/drawingml/2006/main" xmlns:r="http://schemas.openxmlformats.org/officeDocument/2006/relationships" xmlns:p="http://schemas.openxmlformats.org/presentationml/2006/main">
+  <p:cSld name="Slide 24">
     <p:bg>
       <p:bgPr>
         <a:solidFill>
@@ -14379,7 +15411,7 @@
             <a:pPr algn="r"/>
             <a:fld id="{F7021451-1387-4CA6-816F-3879F97B5CBC}" type="slidenum">
               <a:rPr b="1" lang="en-US"/>
-              <a:t>23</a:t>
+              <a:t>24</a:t>
             </a:fld>
             <a:endParaRPr lang="en-US"/>
           </a:p>
@@ -14393,9 +15425,9 @@
 </p:sld>
 </file>
 
-<file path=ppt/slides/slide24.xml><?xml version="1.0" encoding="utf-8"?>
+<file path=ppt/slides/slide25.xml><?xml version="1.0" encoding="utf-8"?>
 <p:sld xmlns:a="http://schemas.openxmlformats.org/drawingml/2006/main" xmlns:r="http://schemas.openxmlformats.org/officeDocument/2006/relationships" xmlns:p="http://schemas.openxmlformats.org/presentationml/2006/main">
-  <p:cSld name="Slide 24">
+  <p:cSld name="Slide 25">
     <p:bg>
       <p:bgPr>
         <a:solidFill>
@@ -14464,7 +15496,7 @@
             <a:r>
               <a:rPr lang="en-US" sz="11000" b="1" dirty="0">
                 <a:solidFill>
-                  <a:srgbClr val="11396F"/>
+                  <a:srgbClr val="F7A23B"/>
                 </a:solidFill>
                 <a:latin typeface="Arial" pitchFamily="34" charset="0"/>
                 <a:ea typeface="Arial" pitchFamily="34" charset="-122"/>
@@ -14587,7 +15619,7 @@
                 <a:ea typeface="Arial" pitchFamily="34" charset="-122"/>
                 <a:cs typeface="Arial" pitchFamily="34" charset="-120"/>
               </a:rPr>
-              <a:t>Aula</a:t>
+              <a:t>Aula teórica</a:t>
             </a:r>
             <a:endParaRPr lang="en-US" sz="1400" dirty="0"/>
           </a:p>
@@ -14801,798 +15833,9 @@
                 <a:ea typeface="Arial" pitchFamily="34" charset="-122"/>
                 <a:cs typeface="Arial" pitchFamily="34" charset="-120"/>
               </a:rPr>
-              <a:t>Passo a passo na plataforma</a:t>
+              <a:t>Carteira e propostas na plataforma</a:t>
             </a:r>
             <a:endParaRPr lang="en-US" sz="1500" dirty="0"/>
-          </a:p>
-        </p:txBody>
-      </p:sp>
-    </p:spTree>
-  </p:cSld>
-  <p:clrMapOvr>
-    <a:masterClrMapping/>
-  </p:clrMapOvr>
-</p:sld>
-</file>
-
-<file path=ppt/slides/slide25.xml><?xml version="1.0" encoding="utf-8"?>
-<p:sld xmlns:a="http://schemas.openxmlformats.org/drawingml/2006/main" xmlns:r="http://schemas.openxmlformats.org/officeDocument/2006/relationships" xmlns:p="http://schemas.openxmlformats.org/presentationml/2006/main">
-  <p:cSld name="Slide 25">
-    <p:bg>
-      <p:bgPr>
-        <a:solidFill>
-          <a:srgbClr val="F6F8FB"/>
-        </a:solidFill>
-      </p:bgPr>
-    </p:bg>
-    <p:spTree>
-      <p:nvGrpSpPr>
-        <p:cNvPr id="1" name=""/>
-        <p:cNvGrpSpPr/>
-        <p:nvPr/>
-      </p:nvGrpSpPr>
-      <p:grpSpPr>
-        <a:xfrm>
-          <a:off x="0" y="0"/>
-          <a:ext cx="0" cy="0"/>
-          <a:chOff x="0" y="0"/>
-          <a:chExt cx="0" cy="0"/>
-        </a:xfrm>
-      </p:grpSpPr>
-      <p:sp>
-        <p:nvSpPr>
-          <p:cNvPr id="2" name="Shape 0"/>
-          <p:cNvSpPr/>
-          <p:nvPr/>
-        </p:nvSpPr>
-        <p:spPr>
-          <a:xfrm>
-            <a:off x="0" y="6510528"/>
-            <a:ext cx="12191695" cy="347472"/>
-          </a:xfrm>
-          <a:prstGeom prst="rect">
-            <a:avLst/>
-          </a:prstGeom>
-          <a:solidFill>
-            <a:srgbClr val="FFFFFF"/>
-          </a:solidFill>
-          <a:ln w="6350">
-            <a:solidFill>
-              <a:srgbClr val="D8E0EC"/>
-            </a:solidFill>
-            <a:prstDash val="solid"/>
-          </a:ln>
-        </p:spPr>
-      </p:sp>
-      <p:pic>
-        <p:nvPicPr>
-          <p:cNvPr id="3" name="Image 0" descr="/www/wwwroot/rexar/gdsolar/docs/curso/slides/assets/logo-gdsolar.png">    </p:cNvPr>
-          <p:cNvPicPr>
-            <a:picLocks noChangeAspect="1"/>
-          </p:cNvPicPr>
-          <p:nvPr/>
-        </p:nvPicPr>
-        <p:blipFill>
-          <a:blip r:embed="rId1"/>
-          <a:stretch>
-            <a:fillRect/>
-          </a:stretch>
-        </p:blipFill>
-        <p:spPr>
-          <a:xfrm>
-            <a:off x="548640" y="6547104"/>
-            <a:ext cx="274320" cy="274320"/>
-          </a:xfrm>
-          <a:prstGeom prst="rect">
-            <a:avLst/>
-          </a:prstGeom>
-        </p:spPr>
-      </p:pic>
-      <p:sp>
-        <p:nvSpPr>
-          <p:cNvPr id="4" name="Text 1"/>
-          <p:cNvSpPr/>
-          <p:nvPr/>
-        </p:nvSpPr>
-        <p:spPr>
-          <a:xfrm>
-            <a:off x="886968" y="6528816"/>
-            <a:ext cx="6400800" cy="310896"/>
-          </a:xfrm>
-          <a:prstGeom prst="rect">
-            <a:avLst/>
-          </a:prstGeom>
-          <a:noFill/>
-          <a:ln/>
-        </p:spPr>
-        <p:txBody>
-          <a:bodyPr wrap="square" rtlCol="0" anchor="ctr"/>
-          <a:lstStyle/>
-          <a:p>
-            <a:pPr indent="0" marL="0">
-              <a:buNone/>
-            </a:pPr>
-            <a:r>
-              <a:rPr lang="en-US" sz="900" b="1" dirty="0">
-                <a:solidFill>
-                  <a:srgbClr val="64748B"/>
-                </a:solidFill>
-                <a:latin typeface="Arial" pitchFamily="34" charset="0"/>
-                <a:ea typeface="Arial" pitchFamily="34" charset="-122"/>
-                <a:cs typeface="Arial" pitchFamily="34" charset="-120"/>
-              </a:rPr>
-              <a:t>GD Solar  ·  Formação em Energia por Assinatura</a:t>
-            </a:r>
-            <a:endParaRPr lang="en-US" sz="900" dirty="0"/>
-          </a:p>
-        </p:txBody>
-      </p:sp>
-      <p:sp>
-        <p:nvSpPr>
-          <p:cNvPr id="5" name="Text 2"/>
-          <p:cNvSpPr/>
-          <p:nvPr/>
-        </p:nvSpPr>
-        <p:spPr>
-          <a:xfrm>
-            <a:off x="7132320" y="6528816"/>
-            <a:ext cx="4023360" cy="310896"/>
-          </a:xfrm>
-          <a:prstGeom prst="rect">
-            <a:avLst/>
-          </a:prstGeom>
-          <a:noFill/>
-          <a:ln/>
-        </p:spPr>
-        <p:txBody>
-          <a:bodyPr wrap="square" rtlCol="0" anchor="ctr"/>
-          <a:lstStyle/>
-          <a:p>
-            <a:pPr algn="r" indent="0" marL="0">
-              <a:buNone/>
-            </a:pPr>
-            <a:r>
-              <a:rPr lang="en-US" sz="900" dirty="0">
-                <a:solidFill>
-                  <a:srgbClr val="64748B"/>
-                </a:solidFill>
-                <a:latin typeface="Arial" pitchFamily="34" charset="0"/>
-                <a:ea typeface="Arial" pitchFamily="34" charset="-122"/>
-                <a:cs typeface="Arial" pitchFamily="34" charset="-120"/>
-              </a:rPr>
-              <a:t>M5 · Aula 5</a:t>
-            </a:r>
-            <a:endParaRPr lang="en-US" sz="900" dirty="0"/>
-          </a:p>
-        </p:txBody>
-      </p:sp>
-      <p:sp>
-        <p:nvSpPr>
-          <p:cNvPr id="6" name="Shape 3"/>
-          <p:cNvSpPr/>
-          <p:nvPr/>
-        </p:nvSpPr>
-        <p:spPr>
-          <a:xfrm>
-            <a:off x="548640" y="384048"/>
-            <a:ext cx="82296" cy="658368"/>
-          </a:xfrm>
-          <a:prstGeom prst="rect">
-            <a:avLst/>
-          </a:prstGeom>
-          <a:solidFill>
-            <a:srgbClr val="F7A23B"/>
-          </a:solidFill>
-          <a:ln/>
-        </p:spPr>
-      </p:sp>
-      <p:sp>
-        <p:nvSpPr>
-          <p:cNvPr id="7" name="Text 4"/>
-          <p:cNvSpPr/>
-          <p:nvPr/>
-        </p:nvSpPr>
-        <p:spPr>
-          <a:xfrm>
-            <a:off x="777240" y="292608"/>
-            <a:ext cx="10972800" cy="274320"/>
-          </a:xfrm>
-          <a:prstGeom prst="rect">
-            <a:avLst/>
-          </a:prstGeom>
-          <a:noFill/>
-          <a:ln/>
-        </p:spPr>
-        <p:txBody>
-          <a:bodyPr wrap="square" rtlCol="0" anchor="ctr"/>
-          <a:lstStyle/>
-          <a:p>
-            <a:pPr indent="0" marL="0">
-              <a:buNone/>
-            </a:pPr>
-            <a:r>
-              <a:rPr lang="en-US" sz="1000" b="1" spc="100" kern="0" dirty="0">
-                <a:solidFill>
-                  <a:srgbClr val="F7A23B"/>
-                </a:solidFill>
-                <a:latin typeface="Arial" pitchFamily="34" charset="0"/>
-                <a:ea typeface="Arial" pitchFamily="34" charset="-122"/>
-                <a:cs typeface="Arial" pitchFamily="34" charset="-120"/>
-              </a:rPr>
-              <a:t>AULA 5 · FUNIL E CARTEIRA DO CONSULTOR</a:t>
-            </a:r>
-            <a:endParaRPr lang="en-US" sz="1000" dirty="0"/>
-          </a:p>
-        </p:txBody>
-      </p:sp>
-      <p:sp>
-        <p:nvSpPr>
-          <p:cNvPr id="8" name="Text 5"/>
-          <p:cNvSpPr/>
-          <p:nvPr/>
-        </p:nvSpPr>
-        <p:spPr>
-          <a:xfrm>
-            <a:off x="777240" y="530352"/>
-            <a:ext cx="10881360" cy="566928"/>
-          </a:xfrm>
-          <a:prstGeom prst="rect">
-            <a:avLst/>
-          </a:prstGeom>
-          <a:noFill/>
-          <a:ln/>
-        </p:spPr>
-        <p:txBody>
-          <a:bodyPr wrap="square" rtlCol="0" anchor="ctr">
-            <a:normAutofit/>
-          </a:bodyPr>
-          <a:lstStyle/>
-          <a:p>
-            <a:pPr indent="0" marL="0">
-              <a:buNone/>
-            </a:pPr>
-            <a:r>
-              <a:rPr lang="en-US" sz="2600" b="1" dirty="0">
-                <a:solidFill>
-                  <a:srgbClr val="1B3A6B"/>
-                </a:solidFill>
-                <a:latin typeface="Arial" pitchFamily="34" charset="0"/>
-                <a:ea typeface="Arial" pitchFamily="34" charset="-122"/>
-                <a:cs typeface="Arial" pitchFamily="34" charset="-120"/>
-              </a:rPr>
-              <a:t>O funil da assinatura</a:t>
-            </a:r>
-            <a:endParaRPr lang="en-US" sz="2600" dirty="0"/>
-          </a:p>
-        </p:txBody>
-      </p:sp>
-      <p:sp>
-        <p:nvSpPr>
-          <p:cNvPr id="9" name="Shape 6"/>
-          <p:cNvSpPr/>
-          <p:nvPr/>
-        </p:nvSpPr>
-        <p:spPr>
-          <a:xfrm>
-            <a:off x="548640" y="2583180"/>
-            <a:ext cx="1938528" cy="1463040"/>
-          </a:xfrm>
-          <a:prstGeom prst="chevron">
-            <a:avLst/>
-          </a:prstGeom>
-          <a:solidFill>
-            <a:srgbClr val="1B3A6B"/>
-          </a:solidFill>
-          <a:ln w="25400">
-            <a:solidFill>
-              <a:srgbClr val="FFFFFF"/>
-            </a:solidFill>
-            <a:prstDash val="solid"/>
-          </a:ln>
-        </p:spPr>
-      </p:sp>
-      <p:sp>
-        <p:nvSpPr>
-          <p:cNvPr id="10" name="Text 7"/>
-          <p:cNvSpPr/>
-          <p:nvPr/>
-        </p:nvSpPr>
-        <p:spPr>
-          <a:xfrm>
-            <a:off x="868680" y="2583180"/>
-            <a:ext cx="1417320" cy="1463040"/>
-          </a:xfrm>
-          <a:prstGeom prst="rect">
-            <a:avLst/>
-          </a:prstGeom>
-          <a:noFill/>
-          <a:ln/>
-        </p:spPr>
-        <p:txBody>
-          <a:bodyPr wrap="square" rtlCol="0" anchor="ctr">
-            <a:normAutofit/>
-          </a:bodyPr>
-          <a:lstStyle/>
-          <a:p>
-            <a:pPr algn="ctr" indent="0" marL="0">
-              <a:buNone/>
-            </a:pPr>
-            <a:r>
-              <a:rPr lang="en-US" sz="1200" b="1" dirty="0">
-                <a:solidFill>
-                  <a:srgbClr val="FFFFFF"/>
-                </a:solidFill>
-                <a:latin typeface="Arial" pitchFamily="34" charset="0"/>
-                <a:ea typeface="Arial" pitchFamily="34" charset="-122"/>
-                <a:cs typeface="Arial" pitchFamily="34" charset="-120"/>
-              </a:rPr>
-              <a:t>Lead</a:t>
-            </a:r>
-            <a:endParaRPr lang="en-US" sz="1200" dirty="0"/>
-          </a:p>
-        </p:txBody>
-      </p:sp>
-      <p:sp>
-        <p:nvSpPr>
-          <p:cNvPr id="11" name="Shape 8"/>
-          <p:cNvSpPr/>
-          <p:nvPr/>
-        </p:nvSpPr>
-        <p:spPr>
-          <a:xfrm>
-            <a:off x="2377440" y="2583180"/>
-            <a:ext cx="1938528" cy="1463040"/>
-          </a:xfrm>
-          <a:prstGeom prst="chevron">
-            <a:avLst/>
-          </a:prstGeom>
-          <a:solidFill>
-            <a:srgbClr val="11396F"/>
-          </a:solidFill>
-          <a:ln w="25400">
-            <a:solidFill>
-              <a:srgbClr val="FFFFFF"/>
-            </a:solidFill>
-            <a:prstDash val="solid"/>
-          </a:ln>
-        </p:spPr>
-      </p:sp>
-      <p:sp>
-        <p:nvSpPr>
-          <p:cNvPr id="12" name="Text 9"/>
-          <p:cNvSpPr/>
-          <p:nvPr/>
-        </p:nvSpPr>
-        <p:spPr>
-          <a:xfrm>
-            <a:off x="2697480" y="2583180"/>
-            <a:ext cx="1417320" cy="1463040"/>
-          </a:xfrm>
-          <a:prstGeom prst="rect">
-            <a:avLst/>
-          </a:prstGeom>
-          <a:noFill/>
-          <a:ln/>
-        </p:spPr>
-        <p:txBody>
-          <a:bodyPr wrap="square" rtlCol="0" anchor="ctr">
-            <a:normAutofit/>
-          </a:bodyPr>
-          <a:lstStyle/>
-          <a:p>
-            <a:pPr algn="ctr" indent="0" marL="0">
-              <a:buNone/>
-            </a:pPr>
-            <a:r>
-              <a:rPr lang="en-US" sz="1200" b="1" dirty="0">
-                <a:solidFill>
-                  <a:srgbClr val="FFFFFF"/>
-                </a:solidFill>
-                <a:latin typeface="Arial" pitchFamily="34" charset="0"/>
-                <a:ea typeface="Arial" pitchFamily="34" charset="-122"/>
-                <a:cs typeface="Arial" pitchFamily="34" charset="-120"/>
-              </a:rPr>
-              <a:t>Conta de luz recebida (50%)</a:t>
-            </a:r>
-            <a:endParaRPr lang="en-US" sz="1200" dirty="0"/>
-          </a:p>
-        </p:txBody>
-      </p:sp>
-      <p:sp>
-        <p:nvSpPr>
-          <p:cNvPr id="13" name="Shape 10"/>
-          <p:cNvSpPr/>
-          <p:nvPr/>
-        </p:nvSpPr>
-        <p:spPr>
-          <a:xfrm>
-            <a:off x="4206240" y="2583180"/>
-            <a:ext cx="1938528" cy="1463040"/>
-          </a:xfrm>
-          <a:prstGeom prst="chevron">
-            <a:avLst/>
-          </a:prstGeom>
-          <a:solidFill>
-            <a:srgbClr val="1B3A6B"/>
-          </a:solidFill>
-          <a:ln w="25400">
-            <a:solidFill>
-              <a:srgbClr val="FFFFFF"/>
-            </a:solidFill>
-            <a:prstDash val="solid"/>
-          </a:ln>
-        </p:spPr>
-      </p:sp>
-      <p:sp>
-        <p:nvSpPr>
-          <p:cNvPr id="14" name="Text 11"/>
-          <p:cNvSpPr/>
-          <p:nvPr/>
-        </p:nvSpPr>
-        <p:spPr>
-          <a:xfrm>
-            <a:off x="4526280" y="2583180"/>
-            <a:ext cx="1417320" cy="1463040"/>
-          </a:xfrm>
-          <a:prstGeom prst="rect">
-            <a:avLst/>
-          </a:prstGeom>
-          <a:noFill/>
-          <a:ln/>
-        </p:spPr>
-        <p:txBody>
-          <a:bodyPr wrap="square" rtlCol="0" anchor="ctr">
-            <a:normAutofit/>
-          </a:bodyPr>
-          <a:lstStyle/>
-          <a:p>
-            <a:pPr algn="ctr" indent="0" marL="0">
-              <a:buNone/>
-            </a:pPr>
-            <a:r>
-              <a:rPr lang="en-US" sz="1200" b="1" dirty="0">
-                <a:solidFill>
-                  <a:srgbClr val="FFFFFF"/>
-                </a:solidFill>
-                <a:latin typeface="Arial" pitchFamily="34" charset="0"/>
-                <a:ea typeface="Arial" pitchFamily="34" charset="-122"/>
-                <a:cs typeface="Arial" pitchFamily="34" charset="-120"/>
-              </a:rPr>
-              <a:t>Proposta apresentada (80%)</a:t>
-            </a:r>
-            <a:endParaRPr lang="en-US" sz="1200" dirty="0"/>
-          </a:p>
-        </p:txBody>
-      </p:sp>
-      <p:sp>
-        <p:nvSpPr>
-          <p:cNvPr id="15" name="Shape 12"/>
-          <p:cNvSpPr/>
-          <p:nvPr/>
-        </p:nvSpPr>
-        <p:spPr>
-          <a:xfrm>
-            <a:off x="6035040" y="2583180"/>
-            <a:ext cx="1938528" cy="1463040"/>
-          </a:xfrm>
-          <a:prstGeom prst="chevron">
-            <a:avLst/>
-          </a:prstGeom>
-          <a:solidFill>
-            <a:srgbClr val="11396F"/>
-          </a:solidFill>
-          <a:ln w="25400">
-            <a:solidFill>
-              <a:srgbClr val="FFFFFF"/>
-            </a:solidFill>
-            <a:prstDash val="solid"/>
-          </a:ln>
-        </p:spPr>
-      </p:sp>
-      <p:sp>
-        <p:nvSpPr>
-          <p:cNvPr id="16" name="Text 13"/>
-          <p:cNvSpPr/>
-          <p:nvPr/>
-        </p:nvSpPr>
-        <p:spPr>
-          <a:xfrm>
-            <a:off x="6355080" y="2583180"/>
-            <a:ext cx="1417320" cy="1463040"/>
-          </a:xfrm>
-          <a:prstGeom prst="rect">
-            <a:avLst/>
-          </a:prstGeom>
-          <a:noFill/>
-          <a:ln/>
-        </p:spPr>
-        <p:txBody>
-          <a:bodyPr wrap="square" rtlCol="0" anchor="ctr">
-            <a:normAutofit/>
-          </a:bodyPr>
-          <a:lstStyle/>
-          <a:p>
-            <a:pPr algn="ctr" indent="0" marL="0">
-              <a:buNone/>
-            </a:pPr>
-            <a:r>
-              <a:rPr lang="en-US" sz="1200" b="1" dirty="0">
-                <a:solidFill>
-                  <a:srgbClr val="FFFFFF"/>
-                </a:solidFill>
-                <a:latin typeface="Arial" pitchFamily="34" charset="0"/>
-                <a:ea typeface="Arial" pitchFamily="34" charset="-122"/>
-                <a:cs typeface="Arial" pitchFamily="34" charset="-120"/>
-              </a:rPr>
-              <a:t>Aceite (40%)</a:t>
-            </a:r>
-            <a:endParaRPr lang="en-US" sz="1200" dirty="0"/>
-          </a:p>
-        </p:txBody>
-      </p:sp>
-      <p:sp>
-        <p:nvSpPr>
-          <p:cNvPr id="17" name="Shape 14"/>
-          <p:cNvSpPr/>
-          <p:nvPr/>
-        </p:nvSpPr>
-        <p:spPr>
-          <a:xfrm>
-            <a:off x="7863840" y="2583180"/>
-            <a:ext cx="1938528" cy="1463040"/>
-          </a:xfrm>
-          <a:prstGeom prst="chevron">
-            <a:avLst/>
-          </a:prstGeom>
-          <a:solidFill>
-            <a:srgbClr val="1B3A6B"/>
-          </a:solidFill>
-          <a:ln w="25400">
-            <a:solidFill>
-              <a:srgbClr val="FFFFFF"/>
-            </a:solidFill>
-            <a:prstDash val="solid"/>
-          </a:ln>
-        </p:spPr>
-      </p:sp>
-      <p:sp>
-        <p:nvSpPr>
-          <p:cNvPr id="18" name="Text 15"/>
-          <p:cNvSpPr/>
-          <p:nvPr/>
-        </p:nvSpPr>
-        <p:spPr>
-          <a:xfrm>
-            <a:off x="8183880" y="2583180"/>
-            <a:ext cx="1417320" cy="1463040"/>
-          </a:xfrm>
-          <a:prstGeom prst="rect">
-            <a:avLst/>
-          </a:prstGeom>
-          <a:noFill/>
-          <a:ln/>
-        </p:spPr>
-        <p:txBody>
-          <a:bodyPr wrap="square" rtlCol="0" anchor="ctr">
-            <a:normAutofit/>
-          </a:bodyPr>
-          <a:lstStyle/>
-          <a:p>
-            <a:pPr algn="ctr" indent="0" marL="0">
-              <a:buNone/>
-            </a:pPr>
-            <a:r>
-              <a:rPr lang="en-US" sz="1200" b="1" dirty="0">
-                <a:solidFill>
-                  <a:srgbClr val="FFFFFF"/>
-                </a:solidFill>
-                <a:latin typeface="Arial" pitchFamily="34" charset="0"/>
-                <a:ea typeface="Arial" pitchFamily="34" charset="-122"/>
-                <a:cs typeface="Arial" pitchFamily="34" charset="-120"/>
-              </a:rPr>
-              <a:t>Contrato e documentos (90%)</a:t>
-            </a:r>
-            <a:endParaRPr lang="en-US" sz="1200" dirty="0"/>
-          </a:p>
-        </p:txBody>
-      </p:sp>
-      <p:sp>
-        <p:nvSpPr>
-          <p:cNvPr id="19" name="Shape 16"/>
-          <p:cNvSpPr/>
-          <p:nvPr/>
-        </p:nvSpPr>
-        <p:spPr>
-          <a:xfrm>
-            <a:off x="9692640" y="2583180"/>
-            <a:ext cx="1938528" cy="1463040"/>
-          </a:xfrm>
-          <a:prstGeom prst="chevron">
-            <a:avLst/>
-          </a:prstGeom>
-          <a:solidFill>
-            <a:srgbClr val="11396F"/>
-          </a:solidFill>
-          <a:ln w="25400">
-            <a:solidFill>
-              <a:srgbClr val="FFFFFF"/>
-            </a:solidFill>
-            <a:prstDash val="solid"/>
-          </a:ln>
-        </p:spPr>
-      </p:sp>
-      <p:sp>
-        <p:nvSpPr>
-          <p:cNvPr id="20" name="Text 17"/>
-          <p:cNvSpPr/>
-          <p:nvPr/>
-        </p:nvSpPr>
-        <p:spPr>
-          <a:xfrm>
-            <a:off x="10012680" y="2583180"/>
-            <a:ext cx="1417320" cy="1463040"/>
-          </a:xfrm>
-          <a:prstGeom prst="rect">
-            <a:avLst/>
-          </a:prstGeom>
-          <a:noFill/>
-          <a:ln/>
-        </p:spPr>
-        <p:txBody>
-          <a:bodyPr wrap="square" rtlCol="0" anchor="ctr">
-            <a:normAutofit/>
-          </a:bodyPr>
-          <a:lstStyle/>
-          <a:p>
-            <a:pPr algn="ctr" indent="0" marL="0">
-              <a:buNone/>
-            </a:pPr>
-            <a:r>
-              <a:rPr lang="en-US" sz="1200" b="1" dirty="0">
-                <a:solidFill>
-                  <a:srgbClr val="FFFFFF"/>
-                </a:solidFill>
-                <a:latin typeface="Arial" pitchFamily="34" charset="0"/>
-                <a:ea typeface="Arial" pitchFamily="34" charset="-122"/>
-                <a:cs typeface="Arial" pitchFamily="34" charset="-120"/>
-              </a:rPr>
-              <a:t>No rateio</a:t>
-            </a:r>
-            <a:endParaRPr lang="en-US" sz="1200" dirty="0"/>
-          </a:p>
-        </p:txBody>
-      </p:sp>
-      <p:sp>
-        <p:nvSpPr>
-          <p:cNvPr id="21" name="Shape 18"/>
-          <p:cNvSpPr/>
-          <p:nvPr/>
-        </p:nvSpPr>
-        <p:spPr>
-          <a:xfrm>
-            <a:off x="548640" y="5413248"/>
-            <a:ext cx="11091672" cy="868680"/>
-          </a:xfrm>
-          <a:prstGeom prst="roundRect">
-            <a:avLst>
-              <a:gd name="adj" fmla="val 8421"/>
-            </a:avLst>
-          </a:prstGeom>
-          <a:solidFill>
-            <a:srgbClr val="EEF3FA"/>
-          </a:solidFill>
-          <a:ln w="6350">
-            <a:solidFill>
-              <a:srgbClr val="D8E0EC"/>
-            </a:solidFill>
-            <a:prstDash val="solid"/>
-          </a:ln>
-        </p:spPr>
-      </p:sp>
-      <p:sp>
-        <p:nvSpPr>
-          <p:cNvPr id="22" name="Shape 19"/>
-          <p:cNvSpPr/>
-          <p:nvPr/>
-        </p:nvSpPr>
-        <p:spPr>
-          <a:xfrm>
-            <a:off x="548640" y="5413248"/>
-            <a:ext cx="91440" cy="868680"/>
-          </a:xfrm>
-          <a:prstGeom prst="rect">
-            <a:avLst/>
-          </a:prstGeom>
-          <a:solidFill>
-            <a:srgbClr val="F7A23B"/>
-          </a:solidFill>
-          <a:ln/>
-        </p:spPr>
-      </p:sp>
-      <p:sp>
-        <p:nvSpPr>
-          <p:cNvPr id="23" name="Text 20"/>
-          <p:cNvSpPr/>
-          <p:nvPr/>
-        </p:nvSpPr>
-        <p:spPr>
-          <a:xfrm>
-            <a:off x="777240" y="5458968"/>
-            <a:ext cx="10744200" cy="777240"/>
-          </a:xfrm>
-          <a:prstGeom prst="rect">
-            <a:avLst/>
-          </a:prstGeom>
-          <a:noFill/>
-          <a:ln/>
-        </p:spPr>
-        <p:txBody>
-          <a:bodyPr wrap="square" rtlCol="0" anchor="ctr"/>
-          <a:lstStyle/>
-          <a:p>
-            <a:pPr indent="0" marL="0">
-              <a:buNone/>
-            </a:pPr>
-            <a:r>
-              <a:rPr lang="en-US" sz="1500" dirty="0">
-                <a:solidFill>
-                  <a:srgbClr val="1F2937"/>
-                </a:solidFill>
-                <a:latin typeface="Arial" pitchFamily="34" charset="0"/>
-                <a:ea typeface="Arial" pitchFamily="34" charset="-122"/>
-                <a:cs typeface="Arial" pitchFamily="34" charset="-120"/>
-              </a:rPr>
-              <a:t>Meça cada etapa do funil desde o primeiro mês. As taxas reais mostram onde ele vaza.</a:t>
-            </a:r>
-            <a:endParaRPr lang="en-US" sz="1500" dirty="0"/>
-          </a:p>
-        </p:txBody>
-      </p:sp>
-      <p:sp>
-        <p:nvSpPr>
-          <p:cNvPr id="25" name="Slide Number Placeholder 0"/>
-          <p:cNvSpPr>
-            <a:spLocks noGrp="1"/>
-          </p:cNvSpPr>
-          <p:nvPr>
-            <p:ph type="sldNum" sz="quarter" idx="4294967295"/>
-          </p:nvPr>
-        </p:nvSpPr>
-        <p:spPr>
-          <a:xfrm>
-            <a:off x="11292840" y="6556248"/>
-            <a:ext cx="548640" cy="256032"/>
-          </a:xfrm>
-          <a:prstGeom prst="rect">
-            <a:avLst/>
-          </a:prstGeom>
-          <a:extLst>
-            <a:ext uri="{C572A759-6A51-4108-AA02-DFA0A04FC94B}">
-              <ma14:wrappingTextBoxFlag xmlns:ma14="http://schemas.microsoft.com/office/mac/drawingml/2011/main" val="0"/>
-            </a:ext>
-          </a:extLst>
-        </p:spPr>
-        <p:txBody>
-          <a:bodyPr/>
-          <a:lstStyle>
-            <a:lvl1pPr>
-              <a:defRPr sz="900">
-                <a:solidFill>
-                  <a:srgbClr val="1B3A6B"/>
-                </a:solidFill>
-                <a:latin typeface="Arial"/>
-                <a:ea typeface="Arial"/>
-                <a:cs typeface="Arial"/>
-              </a:defRPr>
-            </a:lvl1pPr>
-          </a:lstStyle>
-          <a:p>
-            <a:pPr algn="r"/>
-            <a:fld id="{F7021451-1387-4CA6-816F-3879F97B5CBC}" type="slidenum">
-              <a:rPr b="1" lang="en-US"/>
-              <a:t>25</a:t>
-            </a:fld>
-            <a:endParaRPr lang="en-US"/>
           </a:p>
         </p:txBody>
       </p:sp>
@@ -15849,7 +16092,7 @@
                 <a:ea typeface="Arial" pitchFamily="34" charset="-122"/>
                 <a:cs typeface="Arial" pitchFamily="34" charset="-120"/>
               </a:rPr>
-              <a:t>Da meta de negócio à meta de vendas</a:t>
+              <a:t>O funil da assinatura</a:t>
             </a:r>
             <a:endParaRPr lang="en-US" sz="2600" dirty="0"/>
           </a:p>
@@ -15863,18 +16106,21 @@
         </p:nvSpPr>
         <p:spPr>
           <a:xfrm>
-            <a:off x="548640" y="1325880"/>
-            <a:ext cx="11091672" cy="3977640"/>
-          </a:xfrm>
-          <a:prstGeom prst="roundRect">
-            <a:avLst>
-              <a:gd name="adj" fmla="val 2299"/>
-            </a:avLst>
+            <a:off x="548640" y="2583180"/>
+            <a:ext cx="1938528" cy="1463040"/>
+          </a:xfrm>
+          <a:prstGeom prst="chevron">
+            <a:avLst/>
           </a:prstGeom>
           <a:solidFill>
-            <a:srgbClr val="0B1F3A"/>
+            <a:srgbClr val="1B3A6B"/>
           </a:solidFill>
-          <a:ln/>
+          <a:ln w="25400">
+            <a:solidFill>
+              <a:srgbClr val="FFFFFF"/>
+            </a:solidFill>
+            <a:prstDash val="solid"/>
+          </a:ln>
         </p:spPr>
       </p:sp>
       <p:sp>
@@ -15885,8 +16131,8 @@
         </p:nvSpPr>
         <p:spPr>
           <a:xfrm>
-            <a:off x="914400" y="1554480"/>
-            <a:ext cx="10360152" cy="3520440"/>
+            <a:off x="868680" y="2583180"/>
+            <a:ext cx="1417320" cy="1463040"/>
           </a:xfrm>
           <a:prstGeom prst="rect">
             <a:avLst/>
@@ -15900,70 +16146,357 @@
           </a:bodyPr>
           <a:lstStyle/>
           <a:p>
-            <a:pPr indent="0" marL="0">
-              <a:spcAft>
-                <a:spcPts val="1000"/>
-              </a:spcAft>
-              <a:buNone/>
-            </a:pPr>
-            <a:r>
-              <a:rPr lang="en-US" sz="2400" b="1" dirty="0">
+            <a:pPr algn="ctr" indent="0" marL="0">
+              <a:buNone/>
+            </a:pPr>
+            <a:r>
+              <a:rPr lang="en-US" sz="1200" b="1" dirty="0">
                 <a:solidFill>
                   <a:srgbClr val="FFFFFF"/>
                 </a:solidFill>
-                <a:latin typeface="Consolas" pitchFamily="34" charset="0"/>
-                <a:ea typeface="Consolas" pitchFamily="34" charset="-122"/>
-                <a:cs typeface="Consolas" pitchFamily="34" charset="-120"/>
-              </a:rPr>
-              <a:t>Meta: 540 clientes em 18 meses → 30 clientes/mês</a:t>
-            </a:r>
-            <a:endParaRPr lang="en-US" sz="2400" dirty="0"/>
-          </a:p>
-          <a:p>
-            <a:pPr indent="0" marL="0">
-              <a:spcAft>
-                <a:spcPts val="1000"/>
-              </a:spcAft>
-              <a:buNone/>
-            </a:pPr>
-            <a:r>
-              <a:rPr lang="en-US" sz="2400" dirty="0">
+                <a:latin typeface="Arial" pitchFamily="34" charset="0"/>
+                <a:ea typeface="Arial" pitchFamily="34" charset="-122"/>
+                <a:cs typeface="Arial" pitchFamily="34" charset="-120"/>
+              </a:rPr>
+              <a:t>Lead</a:t>
+            </a:r>
+            <a:endParaRPr lang="en-US" sz="1200" dirty="0"/>
+          </a:p>
+        </p:txBody>
+      </p:sp>
+      <p:sp>
+        <p:nvSpPr>
+          <p:cNvPr id="11" name="Shape 8"/>
+          <p:cNvSpPr/>
+          <p:nvPr/>
+        </p:nvSpPr>
+        <p:spPr>
+          <a:xfrm>
+            <a:off x="2377440" y="2583180"/>
+            <a:ext cx="1938528" cy="1463040"/>
+          </a:xfrm>
+          <a:prstGeom prst="chevron">
+            <a:avLst/>
+          </a:prstGeom>
+          <a:solidFill>
+            <a:srgbClr val="11396F"/>
+          </a:solidFill>
+          <a:ln w="25400">
+            <a:solidFill>
+              <a:srgbClr val="FFFFFF"/>
+            </a:solidFill>
+            <a:prstDash val="solid"/>
+          </a:ln>
+        </p:spPr>
+      </p:sp>
+      <p:sp>
+        <p:nvSpPr>
+          <p:cNvPr id="12" name="Text 9"/>
+          <p:cNvSpPr/>
+          <p:nvPr/>
+        </p:nvSpPr>
+        <p:spPr>
+          <a:xfrm>
+            <a:off x="2697480" y="2583180"/>
+            <a:ext cx="1417320" cy="1463040"/>
+          </a:xfrm>
+          <a:prstGeom prst="rect">
+            <a:avLst/>
+          </a:prstGeom>
+          <a:noFill/>
+          <a:ln/>
+        </p:spPr>
+        <p:txBody>
+          <a:bodyPr wrap="square" rtlCol="0" anchor="ctr">
+            <a:normAutofit/>
+          </a:bodyPr>
+          <a:lstStyle/>
+          <a:p>
+            <a:pPr algn="ctr" indent="0" marL="0">
+              <a:buNone/>
+            </a:pPr>
+            <a:r>
+              <a:rPr lang="en-US" sz="1200" b="1" dirty="0">
                 <a:solidFill>
                   <a:srgbClr val="FFFFFF"/>
                 </a:solidFill>
-                <a:latin typeface="Consolas" pitchFamily="34" charset="0"/>
-                <a:ea typeface="Consolas" pitchFamily="34" charset="-122"/>
-                <a:cs typeface="Consolas" pitchFamily="34" charset="-120"/>
-              </a:rPr>
-              <a:t>Conversão lead → cliente ≈ 14% → ~215 leads/mês</a:t>
-            </a:r>
-            <a:endParaRPr lang="en-US" sz="2400" dirty="0"/>
-          </a:p>
-          <a:p>
-            <a:pPr indent="0" marL="0">
-              <a:spcAft>
-                <a:spcPts val="1000"/>
-              </a:spcAft>
-              <a:buNone/>
-            </a:pPr>
-            <a:r>
-              <a:rPr lang="en-US" sz="2400" b="1" dirty="0">
-                <a:solidFill>
-                  <a:srgbClr val="F7A23B"/>
-                </a:solidFill>
-                <a:latin typeface="Consolas" pitchFamily="34" charset="0"/>
-                <a:ea typeface="Consolas" pitchFamily="34" charset="-122"/>
-                <a:cs typeface="Consolas" pitchFamily="34" charset="-120"/>
-              </a:rPr>
-              <a:t>Por consultor (6 clientes/mês) → 5 consultores</a:t>
-            </a:r>
-            <a:endParaRPr lang="en-US" sz="2400" dirty="0"/>
-          </a:p>
-        </p:txBody>
-      </p:sp>
-      <p:sp>
-        <p:nvSpPr>
-          <p:cNvPr id="11" name="Shape 8"/>
+                <a:latin typeface="Arial" pitchFamily="34" charset="0"/>
+                <a:ea typeface="Arial" pitchFamily="34" charset="-122"/>
+                <a:cs typeface="Arial" pitchFamily="34" charset="-120"/>
+              </a:rPr>
+              <a:t>Conta de luz recebida (50%)</a:t>
+            </a:r>
+            <a:endParaRPr lang="en-US" sz="1200" dirty="0"/>
+          </a:p>
+        </p:txBody>
+      </p:sp>
+      <p:sp>
+        <p:nvSpPr>
+          <p:cNvPr id="13" name="Shape 10"/>
+          <p:cNvSpPr/>
+          <p:nvPr/>
+        </p:nvSpPr>
+        <p:spPr>
+          <a:xfrm>
+            <a:off x="4206240" y="2583180"/>
+            <a:ext cx="1938528" cy="1463040"/>
+          </a:xfrm>
+          <a:prstGeom prst="chevron">
+            <a:avLst/>
+          </a:prstGeom>
+          <a:solidFill>
+            <a:srgbClr val="1B3A6B"/>
+          </a:solidFill>
+          <a:ln w="25400">
+            <a:solidFill>
+              <a:srgbClr val="FFFFFF"/>
+            </a:solidFill>
+            <a:prstDash val="solid"/>
+          </a:ln>
+        </p:spPr>
+      </p:sp>
+      <p:sp>
+        <p:nvSpPr>
+          <p:cNvPr id="14" name="Text 11"/>
+          <p:cNvSpPr/>
+          <p:nvPr/>
+        </p:nvSpPr>
+        <p:spPr>
+          <a:xfrm>
+            <a:off x="4526280" y="2583180"/>
+            <a:ext cx="1417320" cy="1463040"/>
+          </a:xfrm>
+          <a:prstGeom prst="rect">
+            <a:avLst/>
+          </a:prstGeom>
+          <a:noFill/>
+          <a:ln/>
+        </p:spPr>
+        <p:txBody>
+          <a:bodyPr wrap="square" rtlCol="0" anchor="ctr">
+            <a:normAutofit/>
+          </a:bodyPr>
+          <a:lstStyle/>
+          <a:p>
+            <a:pPr algn="ctr" indent="0" marL="0">
+              <a:buNone/>
+            </a:pPr>
+            <a:r>
+              <a:rPr lang="en-US" sz="1200" b="1" dirty="0">
+                <a:solidFill>
+                  <a:srgbClr val="FFFFFF"/>
+                </a:solidFill>
+                <a:latin typeface="Arial" pitchFamily="34" charset="0"/>
+                <a:ea typeface="Arial" pitchFamily="34" charset="-122"/>
+                <a:cs typeface="Arial" pitchFamily="34" charset="-120"/>
+              </a:rPr>
+              <a:t>Proposta apresentada (80%)</a:t>
+            </a:r>
+            <a:endParaRPr lang="en-US" sz="1200" dirty="0"/>
+          </a:p>
+        </p:txBody>
+      </p:sp>
+      <p:sp>
+        <p:nvSpPr>
+          <p:cNvPr id="15" name="Shape 12"/>
+          <p:cNvSpPr/>
+          <p:nvPr/>
+        </p:nvSpPr>
+        <p:spPr>
+          <a:xfrm>
+            <a:off x="6035040" y="2583180"/>
+            <a:ext cx="1938528" cy="1463040"/>
+          </a:xfrm>
+          <a:prstGeom prst="chevron">
+            <a:avLst/>
+          </a:prstGeom>
+          <a:solidFill>
+            <a:srgbClr val="11396F"/>
+          </a:solidFill>
+          <a:ln w="25400">
+            <a:solidFill>
+              <a:srgbClr val="FFFFFF"/>
+            </a:solidFill>
+            <a:prstDash val="solid"/>
+          </a:ln>
+        </p:spPr>
+      </p:sp>
+      <p:sp>
+        <p:nvSpPr>
+          <p:cNvPr id="16" name="Text 13"/>
+          <p:cNvSpPr/>
+          <p:nvPr/>
+        </p:nvSpPr>
+        <p:spPr>
+          <a:xfrm>
+            <a:off x="6355080" y="2583180"/>
+            <a:ext cx="1417320" cy="1463040"/>
+          </a:xfrm>
+          <a:prstGeom prst="rect">
+            <a:avLst/>
+          </a:prstGeom>
+          <a:noFill/>
+          <a:ln/>
+        </p:spPr>
+        <p:txBody>
+          <a:bodyPr wrap="square" rtlCol="0" anchor="ctr">
+            <a:normAutofit/>
+          </a:bodyPr>
+          <a:lstStyle/>
+          <a:p>
+            <a:pPr algn="ctr" indent="0" marL="0">
+              <a:buNone/>
+            </a:pPr>
+            <a:r>
+              <a:rPr lang="en-US" sz="1200" b="1" dirty="0">
+                <a:solidFill>
+                  <a:srgbClr val="FFFFFF"/>
+                </a:solidFill>
+                <a:latin typeface="Arial" pitchFamily="34" charset="0"/>
+                <a:ea typeface="Arial" pitchFamily="34" charset="-122"/>
+                <a:cs typeface="Arial" pitchFamily="34" charset="-120"/>
+              </a:rPr>
+              <a:t>Aceite (40%)</a:t>
+            </a:r>
+            <a:endParaRPr lang="en-US" sz="1200" dirty="0"/>
+          </a:p>
+        </p:txBody>
+      </p:sp>
+      <p:sp>
+        <p:nvSpPr>
+          <p:cNvPr id="17" name="Shape 14"/>
+          <p:cNvSpPr/>
+          <p:nvPr/>
+        </p:nvSpPr>
+        <p:spPr>
+          <a:xfrm>
+            <a:off x="7863840" y="2583180"/>
+            <a:ext cx="1938528" cy="1463040"/>
+          </a:xfrm>
+          <a:prstGeom prst="chevron">
+            <a:avLst/>
+          </a:prstGeom>
+          <a:solidFill>
+            <a:srgbClr val="1B3A6B"/>
+          </a:solidFill>
+          <a:ln w="25400">
+            <a:solidFill>
+              <a:srgbClr val="FFFFFF"/>
+            </a:solidFill>
+            <a:prstDash val="solid"/>
+          </a:ln>
+        </p:spPr>
+      </p:sp>
+      <p:sp>
+        <p:nvSpPr>
+          <p:cNvPr id="18" name="Text 15"/>
+          <p:cNvSpPr/>
+          <p:nvPr/>
+        </p:nvSpPr>
+        <p:spPr>
+          <a:xfrm>
+            <a:off x="8183880" y="2583180"/>
+            <a:ext cx="1417320" cy="1463040"/>
+          </a:xfrm>
+          <a:prstGeom prst="rect">
+            <a:avLst/>
+          </a:prstGeom>
+          <a:noFill/>
+          <a:ln/>
+        </p:spPr>
+        <p:txBody>
+          <a:bodyPr wrap="square" rtlCol="0" anchor="ctr">
+            <a:normAutofit/>
+          </a:bodyPr>
+          <a:lstStyle/>
+          <a:p>
+            <a:pPr algn="ctr" indent="0" marL="0">
+              <a:buNone/>
+            </a:pPr>
+            <a:r>
+              <a:rPr lang="en-US" sz="1200" b="1" dirty="0">
+                <a:solidFill>
+                  <a:srgbClr val="FFFFFF"/>
+                </a:solidFill>
+                <a:latin typeface="Arial" pitchFamily="34" charset="0"/>
+                <a:ea typeface="Arial" pitchFamily="34" charset="-122"/>
+                <a:cs typeface="Arial" pitchFamily="34" charset="-120"/>
+              </a:rPr>
+              <a:t>Contrato e documentos (90%)</a:t>
+            </a:r>
+            <a:endParaRPr lang="en-US" sz="1200" dirty="0"/>
+          </a:p>
+        </p:txBody>
+      </p:sp>
+      <p:sp>
+        <p:nvSpPr>
+          <p:cNvPr id="19" name="Shape 16"/>
+          <p:cNvSpPr/>
+          <p:nvPr/>
+        </p:nvSpPr>
+        <p:spPr>
+          <a:xfrm>
+            <a:off x="9692640" y="2583180"/>
+            <a:ext cx="1938528" cy="1463040"/>
+          </a:xfrm>
+          <a:prstGeom prst="chevron">
+            <a:avLst/>
+          </a:prstGeom>
+          <a:solidFill>
+            <a:srgbClr val="11396F"/>
+          </a:solidFill>
+          <a:ln w="25400">
+            <a:solidFill>
+              <a:srgbClr val="FFFFFF"/>
+            </a:solidFill>
+            <a:prstDash val="solid"/>
+          </a:ln>
+        </p:spPr>
+      </p:sp>
+      <p:sp>
+        <p:nvSpPr>
+          <p:cNvPr id="20" name="Text 17"/>
+          <p:cNvSpPr/>
+          <p:nvPr/>
+        </p:nvSpPr>
+        <p:spPr>
+          <a:xfrm>
+            <a:off x="10012680" y="2583180"/>
+            <a:ext cx="1417320" cy="1463040"/>
+          </a:xfrm>
+          <a:prstGeom prst="rect">
+            <a:avLst/>
+          </a:prstGeom>
+          <a:noFill/>
+          <a:ln/>
+        </p:spPr>
+        <p:txBody>
+          <a:bodyPr wrap="square" rtlCol="0" anchor="ctr">
+            <a:normAutofit/>
+          </a:bodyPr>
+          <a:lstStyle/>
+          <a:p>
+            <a:pPr algn="ctr" indent="0" marL="0">
+              <a:buNone/>
+            </a:pPr>
+            <a:r>
+              <a:rPr lang="en-US" sz="1200" b="1" dirty="0">
+                <a:solidFill>
+                  <a:srgbClr val="FFFFFF"/>
+                </a:solidFill>
+                <a:latin typeface="Arial" pitchFamily="34" charset="0"/>
+                <a:ea typeface="Arial" pitchFamily="34" charset="-122"/>
+                <a:cs typeface="Arial" pitchFamily="34" charset="-120"/>
+              </a:rPr>
+              <a:t>No rateio</a:t>
+            </a:r>
+            <a:endParaRPr lang="en-US" sz="1200" dirty="0"/>
+          </a:p>
+        </p:txBody>
+      </p:sp>
+      <p:sp>
+        <p:nvSpPr>
+          <p:cNvPr id="21" name="Shape 18"/>
           <p:cNvSpPr/>
           <p:nvPr/>
         </p:nvSpPr>
@@ -15990,7 +16523,7 @@
       </p:sp>
       <p:sp>
         <p:nvSpPr>
-          <p:cNvPr id="12" name="Shape 9"/>
+          <p:cNvPr id="22" name="Shape 19"/>
           <p:cNvSpPr/>
           <p:nvPr/>
         </p:nvSpPr>
@@ -16010,7 +16543,7 @@
       </p:sp>
       <p:sp>
         <p:nvSpPr>
-          <p:cNvPr id="13" name="Text 10"/>
+          <p:cNvPr id="23" name="Text 20"/>
           <p:cNvSpPr/>
           <p:nvPr/>
         </p:nvSpPr>
@@ -16041,7 +16574,7 @@
                 <a:ea typeface="Arial" pitchFamily="34" charset="-122"/>
                 <a:cs typeface="Arial" pitchFamily="34" charset="-120"/>
               </a:rPr>
-              <a:t>Ligue o funil ao plano: do ponto de equilíbrio sai a meta de clientes, e dela os leads e o número de consultores.</a:t>
+              <a:t>Meça cada etapa do funil desde o primeiro mês. As taxas reais mostram onde ele vaza.</a:t>
             </a:r>
             <a:endParaRPr lang="en-US" sz="1500" dirty="0"/>
           </a:p>
@@ -16348,7 +16881,7 @@
                 <a:ea typeface="Arial" pitchFamily="34" charset="-122"/>
                 <a:cs typeface="Arial" pitchFamily="34" charset="-120"/>
               </a:rPr>
-              <a:t>Comissão que premia o certo</a:t>
+              <a:t>Da meta de negócio à meta de vendas</a:t>
             </a:r>
             <a:endParaRPr lang="en-US" sz="2600" dirty="0"/>
           </a:p>
@@ -16356,73 +16889,113 @@
       </p:sp>
       <p:sp>
         <p:nvSpPr>
-          <p:cNvPr id="9" name="Text 6"/>
+          <p:cNvPr id="9" name="Shape 6"/>
           <p:cNvSpPr/>
           <p:nvPr/>
         </p:nvSpPr>
         <p:spPr>
           <a:xfrm>
             <a:off x="548640" y="1325880"/>
-            <a:ext cx="11155680" cy="3977640"/>
-          </a:xfrm>
-          <a:prstGeom prst="rect">
-            <a:avLst/>
-          </a:prstGeom>
-          <a:noFill/>
-          <a:ln/>
-        </p:spPr>
-        <p:txBody>
-          <a:bodyPr wrap="square" rtlCol="0" anchor="t">
+            <a:ext cx="11091672" cy="3977640"/>
+          </a:xfrm>
+          <a:prstGeom prst="roundRect">
+            <a:avLst>
+              <a:gd name="adj" fmla="val 2299"/>
+            </a:avLst>
+          </a:prstGeom>
+          <a:solidFill>
+            <a:srgbClr val="0B1F3A"/>
+          </a:solidFill>
+          <a:ln/>
+        </p:spPr>
+      </p:sp>
+      <p:sp>
+        <p:nvSpPr>
+          <p:cNvPr id="10" name="Text 7"/>
+          <p:cNvSpPr/>
+          <p:nvPr/>
+        </p:nvSpPr>
+        <p:spPr>
+          <a:xfrm>
+            <a:off x="914400" y="1554480"/>
+            <a:ext cx="10360152" cy="3520440"/>
+          </a:xfrm>
+          <a:prstGeom prst="rect">
+            <a:avLst/>
+          </a:prstGeom>
+          <a:noFill/>
+          <a:ln/>
+        </p:spPr>
+        <p:txBody>
+          <a:bodyPr wrap="square" rtlCol="0" anchor="ctr">
             <a:normAutofit/>
           </a:bodyPr>
           <a:lstStyle/>
           <a:p>
-            <a:pPr marL="342900" indent="-342900">
+            <a:pPr indent="0" marL="0">
               <a:spcAft>
-                <a:spcPts val="600"/>
+                <a:spcPts val="1000"/>
               </a:spcAft>
-              <a:buSzPct val="100000"/>
-              <a:buChar char="●"/>
-            </a:pPr>
-            <a:r>
-              <a:rPr lang="en-US" sz="1800" dirty="0">
-                <a:solidFill>
-                  <a:srgbClr val="1F2937"/>
-                </a:solidFill>
-                <a:latin typeface="Arial" pitchFamily="34" charset="0"/>
-                <a:ea typeface="Arial" pitchFamily="34" charset="-122"/>
-                <a:cs typeface="Arial" pitchFamily="34" charset="-120"/>
-              </a:rPr>
-              <a:t>✗ Comissão por proposta ou por contrato assinado</a:t>
-            </a:r>
-            <a:endParaRPr lang="en-US" sz="1800" dirty="0"/>
-          </a:p>
-          <a:p>
-            <a:pPr marL="342900" indent="-342900">
+              <a:buNone/>
+            </a:pPr>
+            <a:r>
+              <a:rPr lang="en-US" sz="2400" b="1" dirty="0">
+                <a:solidFill>
+                  <a:srgbClr val="FFFFFF"/>
+                </a:solidFill>
+                <a:latin typeface="Consolas" pitchFamily="34" charset="0"/>
+                <a:ea typeface="Consolas" pitchFamily="34" charset="-122"/>
+                <a:cs typeface="Consolas" pitchFamily="34" charset="-120"/>
+              </a:rPr>
+              <a:t>Meta: 540 clientes em 18 meses → 30 clientes/mês</a:t>
+            </a:r>
+            <a:endParaRPr lang="en-US" sz="2400" dirty="0"/>
+          </a:p>
+          <a:p>
+            <a:pPr indent="0" marL="0">
               <a:spcAft>
-                <a:spcPts val="600"/>
+                <a:spcPts val="1000"/>
               </a:spcAft>
-              <a:buSzPct val="100000"/>
-              <a:buChar char="●"/>
-            </a:pPr>
-            <a:r>
-              <a:rPr lang="en-US" sz="1800" dirty="0">
-                <a:solidFill>
-                  <a:srgbClr val="1F2937"/>
-                </a:solidFill>
-                <a:latin typeface="Arial" pitchFamily="34" charset="0"/>
-                <a:ea typeface="Arial" pitchFamily="34" charset="-122"/>
-                <a:cs typeface="Arial" pitchFamily="34" charset="-120"/>
-              </a:rPr>
-              <a:t>✓ Comissão após a 1ª cobrança paga (ex.: 1 mensalidade) + pequena recorrência enquanto o cliente fica (ex.: 2–5% da taxa)</a:t>
-            </a:r>
-            <a:endParaRPr lang="en-US" sz="1800" dirty="0"/>
-          </a:p>
-        </p:txBody>
-      </p:sp>
-      <p:sp>
-        <p:nvSpPr>
-          <p:cNvPr id="10" name="Shape 7"/>
+              <a:buNone/>
+            </a:pPr>
+            <a:r>
+              <a:rPr lang="en-US" sz="2400" dirty="0">
+                <a:solidFill>
+                  <a:srgbClr val="FFFFFF"/>
+                </a:solidFill>
+                <a:latin typeface="Consolas" pitchFamily="34" charset="0"/>
+                <a:ea typeface="Consolas" pitchFamily="34" charset="-122"/>
+                <a:cs typeface="Consolas" pitchFamily="34" charset="-120"/>
+              </a:rPr>
+              <a:t>Conversão lead → cliente ≈ 14% → ~215 leads/mês</a:t>
+            </a:r>
+            <a:endParaRPr lang="en-US" sz="2400" dirty="0"/>
+          </a:p>
+          <a:p>
+            <a:pPr indent="0" marL="0">
+              <a:spcAft>
+                <a:spcPts val="1000"/>
+              </a:spcAft>
+              <a:buNone/>
+            </a:pPr>
+            <a:r>
+              <a:rPr lang="en-US" sz="2400" b="1" dirty="0">
+                <a:solidFill>
+                  <a:srgbClr val="F7A23B"/>
+                </a:solidFill>
+                <a:latin typeface="Consolas" pitchFamily="34" charset="0"/>
+                <a:ea typeface="Consolas" pitchFamily="34" charset="-122"/>
+                <a:cs typeface="Consolas" pitchFamily="34" charset="-120"/>
+              </a:rPr>
+              <a:t>Por consultor (6 clientes/mês) → 5 consultores</a:t>
+            </a:r>
+            <a:endParaRPr lang="en-US" sz="2400" dirty="0"/>
+          </a:p>
+        </p:txBody>
+      </p:sp>
+      <p:sp>
+        <p:nvSpPr>
+          <p:cNvPr id="11" name="Shape 8"/>
           <p:cNvSpPr/>
           <p:nvPr/>
         </p:nvSpPr>
@@ -16449,7 +17022,7 @@
       </p:sp>
       <p:sp>
         <p:nvSpPr>
-          <p:cNvPr id="11" name="Shape 8"/>
+          <p:cNvPr id="12" name="Shape 9"/>
           <p:cNvSpPr/>
           <p:nvPr/>
         </p:nvSpPr>
@@ -16469,7 +17042,7 @@
       </p:sp>
       <p:sp>
         <p:nvSpPr>
-          <p:cNvPr id="12" name="Text 9"/>
+          <p:cNvPr id="13" name="Text 10"/>
           <p:cNvSpPr/>
           <p:nvPr/>
         </p:nvSpPr>
@@ -16500,7 +17073,7 @@
                 <a:ea typeface="Arial" pitchFamily="34" charset="-122"/>
                 <a:cs typeface="Arial" pitchFamily="34" charset="-120"/>
               </a:rPr>
-              <a:t>Pague comissão depois da primeira cobrança paga. Assim o vendedor busca o cliente certo e explica direito.</a:t>
+              <a:t>Ligue o funil ao plano: do ponto de equilíbrio sai a meta de clientes, e dela os leads e o número de consultores.</a:t>
             </a:r>
             <a:endParaRPr lang="en-US" sz="1500" dirty="0"/>
           </a:p>
@@ -16766,7 +17339,7 @@
                 <a:ea typeface="Arial" pitchFamily="34" charset="-122"/>
                 <a:cs typeface="Arial" pitchFamily="34" charset="-120"/>
               </a:rPr>
-              <a:t>AULA 5 · FUNIL E CARTEIRA DO CONSULTOR</a:t>
+              <a:t>AULA 5</a:t>
             </a:r>
             <a:endParaRPr lang="en-US" sz="1000" dirty="0"/>
           </a:p>
@@ -16807,7 +17380,7 @@
                 <a:ea typeface="Arial" pitchFamily="34" charset="-122"/>
                 <a:cs typeface="Arial" pitchFamily="34" charset="-120"/>
               </a:rPr>
-              <a:t>Passo a passo na plataforma</a:t>
+              <a:t>Funil e carteira do consultor</a:t>
             </a:r>
             <a:endParaRPr lang="en-US" sz="2600" dirty="0"/>
           </a:p>
@@ -16822,7 +17395,7 @@
         <p:spPr>
           <a:xfrm>
             <a:off x="548640" y="1325880"/>
-            <a:ext cx="11091672" cy="4937760"/>
+            <a:ext cx="5408676" cy="4937760"/>
           </a:xfrm>
           <a:prstGeom prst="roundRect">
             <a:avLst>
@@ -16838,6 +17411,13 @@
             </a:solidFill>
             <a:prstDash val="solid"/>
           </a:ln>
+          <a:effectLst>
+            <a:outerShdw sx="100000" sy="100000" kx="0" ky="0" algn="bl" rotWithShape="0" blurRad="38100" dist="12700" dir="5400000">
+              <a:srgbClr val="000000">
+                <a:alpha val="8000"/>
+              </a:srgbClr>
+            </a:outerShdw>
+          </a:effectLst>
         </p:spPr>
       </p:sp>
       <p:sp>
@@ -16848,13 +17428,231 @@
         </p:nvSpPr>
         <p:spPr>
           <a:xfrm>
-            <a:off x="731520" y="1508760"/>
-            <a:ext cx="822960" cy="384048"/>
+            <a:off x="548640" y="1325880"/>
+            <a:ext cx="5408676" cy="109728"/>
+          </a:xfrm>
+          <a:prstGeom prst="rect">
+            <a:avLst/>
+          </a:prstGeom>
+          <a:solidFill>
+            <a:srgbClr val="1B3A6B"/>
+          </a:solidFill>
+          <a:ln/>
+        </p:spPr>
+      </p:sp>
+      <p:sp>
+        <p:nvSpPr>
+          <p:cNvPr id="11" name="Text 8"/>
+          <p:cNvSpPr/>
+          <p:nvPr/>
+        </p:nvSpPr>
+        <p:spPr>
+          <a:xfrm>
+            <a:off x="822960" y="1554480"/>
+            <a:ext cx="4860036" cy="685800"/>
+          </a:xfrm>
+          <a:prstGeom prst="rect">
+            <a:avLst/>
+          </a:prstGeom>
+          <a:noFill/>
+          <a:ln/>
+        </p:spPr>
+        <p:txBody>
+          <a:bodyPr wrap="square" rtlCol="0" anchor="t">
+            <a:normAutofit/>
+          </a:bodyPr>
+          <a:lstStyle/>
+          <a:p>
+            <a:pPr indent="0" marL="0">
+              <a:buNone/>
+            </a:pPr>
+            <a:r>
+              <a:rPr lang="en-US" sz="1600" b="1" dirty="0">
+                <a:solidFill>
+                  <a:srgbClr val="1B3A6B"/>
+                </a:solidFill>
+                <a:latin typeface="Arial" pitchFamily="34" charset="0"/>
+                <a:ea typeface="Arial" pitchFamily="34" charset="-122"/>
+                <a:cs typeface="Arial" pitchFamily="34" charset="-120"/>
+              </a:rPr>
+              <a:t>Comissão que premia o certo</a:t>
+            </a:r>
+            <a:endParaRPr lang="en-US" sz="1600" dirty="0"/>
+          </a:p>
+        </p:txBody>
+      </p:sp>
+      <p:sp>
+        <p:nvSpPr>
+          <p:cNvPr id="12" name="Text 9"/>
+          <p:cNvSpPr/>
+          <p:nvPr/>
+        </p:nvSpPr>
+        <p:spPr>
+          <a:xfrm>
+            <a:off x="822960" y="2286000"/>
+            <a:ext cx="4860036" cy="2286000"/>
+          </a:xfrm>
+          <a:prstGeom prst="rect">
+            <a:avLst/>
+          </a:prstGeom>
+          <a:noFill/>
+          <a:ln/>
+        </p:spPr>
+        <p:txBody>
+          <a:bodyPr wrap="square" rtlCol="0" anchor="t">
+            <a:normAutofit/>
+          </a:bodyPr>
+          <a:lstStyle/>
+          <a:p>
+            <a:pPr marL="342900" indent="-342900">
+              <a:spcAft>
+                <a:spcPts val="600"/>
+              </a:spcAft>
+              <a:buSzPct val="100000"/>
+              <a:buChar char="●"/>
+            </a:pPr>
+            <a:r>
+              <a:rPr lang="en-US" sz="1700" dirty="0">
+                <a:solidFill>
+                  <a:srgbClr val="1F2937"/>
+                </a:solidFill>
+                <a:latin typeface="Arial" pitchFamily="34" charset="0"/>
+                <a:ea typeface="Arial" pitchFamily="34" charset="-122"/>
+                <a:cs typeface="Arial" pitchFamily="34" charset="-120"/>
+              </a:rPr>
+              <a:t>✗ Comissão por proposta ou por contrato assinado</a:t>
+            </a:r>
+            <a:endParaRPr lang="en-US" sz="1700" dirty="0"/>
+          </a:p>
+          <a:p>
+            <a:pPr marL="342900" indent="-342900">
+              <a:spcAft>
+                <a:spcPts val="600"/>
+              </a:spcAft>
+              <a:buSzPct val="100000"/>
+              <a:buChar char="●"/>
+            </a:pPr>
+            <a:r>
+              <a:rPr lang="en-US" sz="1700" dirty="0">
+                <a:solidFill>
+                  <a:srgbClr val="1F2937"/>
+                </a:solidFill>
+                <a:latin typeface="Arial" pitchFamily="34" charset="0"/>
+                <a:ea typeface="Arial" pitchFamily="34" charset="-122"/>
+                <a:cs typeface="Arial" pitchFamily="34" charset="-120"/>
+              </a:rPr>
+              <a:t>✓ Comissão após a 1ª cobrança paga (ex.: 1 mensalidade) + pequena recorrência enquanto o cliente fica (ex.: 2–5% da taxa)</a:t>
+            </a:r>
+            <a:endParaRPr lang="en-US" sz="1700" dirty="0"/>
+          </a:p>
+        </p:txBody>
+      </p:sp>
+      <p:sp>
+        <p:nvSpPr>
+          <p:cNvPr id="13" name="Shape 10"/>
+          <p:cNvSpPr/>
+          <p:nvPr/>
+        </p:nvSpPr>
+        <p:spPr>
+          <a:xfrm>
+            <a:off x="822960" y="4663440"/>
+            <a:ext cx="4860036" cy="18288"/>
+          </a:xfrm>
+          <a:prstGeom prst="rect">
+            <a:avLst/>
+          </a:prstGeom>
+          <a:solidFill>
+            <a:srgbClr val="D8E0EC"/>
+          </a:solidFill>
+          <a:ln/>
+        </p:spPr>
+      </p:sp>
+      <p:sp>
+        <p:nvSpPr>
+          <p:cNvPr id="14" name="Text 11"/>
+          <p:cNvSpPr/>
+          <p:nvPr/>
+        </p:nvSpPr>
+        <p:spPr>
+          <a:xfrm>
+            <a:off x="822960" y="4754880"/>
+            <a:ext cx="4860036" cy="1371600"/>
+          </a:xfrm>
+          <a:prstGeom prst="rect">
+            <a:avLst/>
+          </a:prstGeom>
+          <a:noFill/>
+          <a:ln/>
+        </p:spPr>
+        <p:txBody>
+          <a:bodyPr wrap="square" rtlCol="0" anchor="t"/>
+          <a:lstStyle/>
+          <a:p>
+            <a:pPr indent="0" marL="0">
+              <a:buNone/>
+            </a:pPr>
+            <a:r>
+              <a:rPr lang="en-US" sz="1400" i="1" dirty="0">
+                <a:solidFill>
+                  <a:srgbClr val="64748B"/>
+                </a:solidFill>
+                <a:latin typeface="Arial" pitchFamily="34" charset="0"/>
+                <a:ea typeface="Arial" pitchFamily="34" charset="-122"/>
+                <a:cs typeface="Arial" pitchFamily="34" charset="-120"/>
+              </a:rPr>
+              <a:t>Pague comissão depois da primeira cobrança paga. Assim o vendedor busca o cliente certo e explica direito.</a:t>
+            </a:r>
+            <a:endParaRPr lang="en-US" sz="1400" dirty="0"/>
+          </a:p>
+        </p:txBody>
+      </p:sp>
+      <p:sp>
+        <p:nvSpPr>
+          <p:cNvPr id="15" name="Shape 12"/>
+          <p:cNvSpPr/>
+          <p:nvPr/>
+        </p:nvSpPr>
+        <p:spPr>
+          <a:xfrm>
+            <a:off x="6231636" y="1325880"/>
+            <a:ext cx="5408676" cy="4937760"/>
           </a:xfrm>
           <a:prstGeom prst="roundRect">
             <a:avLst>
-              <a:gd name="adj" fmla="val 47619"/>
+              <a:gd name="adj" fmla="val 1481"/>
             </a:avLst>
+          </a:prstGeom>
+          <a:solidFill>
+            <a:srgbClr val="FFFFFF"/>
+          </a:solidFill>
+          <a:ln w="9525">
+            <a:solidFill>
+              <a:srgbClr val="D8E0EC"/>
+            </a:solidFill>
+            <a:prstDash val="solid"/>
+          </a:ln>
+          <a:effectLst>
+            <a:outerShdw sx="100000" sy="100000" kx="0" ky="0" algn="bl" rotWithShape="0" blurRad="38100" dist="12700" dir="5400000">
+              <a:srgbClr val="000000">
+                <a:alpha val="8000"/>
+              </a:srgbClr>
+            </a:outerShdw>
+          </a:effectLst>
+        </p:spPr>
+      </p:sp>
+      <p:sp>
+        <p:nvSpPr>
+          <p:cNvPr id="16" name="Shape 13"/>
+          <p:cNvSpPr/>
+          <p:nvPr/>
+        </p:nvSpPr>
+        <p:spPr>
+          <a:xfrm>
+            <a:off x="6231636" y="1325880"/>
+            <a:ext cx="5408676" cy="109728"/>
+          </a:xfrm>
+          <a:prstGeom prst="rect">
+            <a:avLst/>
           </a:prstGeom>
           <a:solidFill>
             <a:srgbClr val="F7A23B"/>
@@ -16864,94 +17662,14 @@
       </p:sp>
       <p:sp>
         <p:nvSpPr>
-          <p:cNvPr id="11" name="Text 8"/>
-          <p:cNvSpPr/>
-          <p:nvPr/>
-        </p:nvSpPr>
-        <p:spPr>
-          <a:xfrm>
-            <a:off x="731520" y="1508760"/>
-            <a:ext cx="822960" cy="384048"/>
-          </a:xfrm>
-          <a:prstGeom prst="rect">
-            <a:avLst/>
-          </a:prstGeom>
-          <a:noFill/>
-          <a:ln/>
-        </p:spPr>
-        <p:txBody>
-          <a:bodyPr wrap="square" rtlCol="0" anchor="ctr"/>
-          <a:lstStyle/>
-          <a:p>
-            <a:pPr algn="ctr" indent="0" marL="0">
-              <a:buNone/>
-            </a:pPr>
-            <a:r>
-              <a:rPr lang="en-US" sz="1000" b="1" dirty="0">
-                <a:solidFill>
-                  <a:srgbClr val="FFFFFF"/>
-                </a:solidFill>
-                <a:latin typeface="Arial" pitchFamily="34" charset="0"/>
-                <a:ea typeface="Arial" pitchFamily="34" charset="-122"/>
-                <a:cs typeface="Arial" pitchFamily="34" charset="-120"/>
-              </a:rPr>
-              <a:t>PASSO 1</a:t>
-            </a:r>
-            <a:endParaRPr lang="en-US" sz="1000" dirty="0"/>
-          </a:p>
-        </p:txBody>
-      </p:sp>
-      <p:sp>
-        <p:nvSpPr>
-          <p:cNvPr id="12" name="Text 9"/>
-          <p:cNvSpPr/>
-          <p:nvPr/>
-        </p:nvSpPr>
-        <p:spPr>
-          <a:xfrm>
-            <a:off x="1645920" y="1463040"/>
-            <a:ext cx="9857232" cy="502920"/>
-          </a:xfrm>
-          <a:prstGeom prst="rect">
-            <a:avLst/>
-          </a:prstGeom>
-          <a:noFill/>
-          <a:ln/>
-        </p:spPr>
-        <p:txBody>
-          <a:bodyPr wrap="square" rtlCol="0" anchor="ctr">
-            <a:normAutofit/>
-          </a:bodyPr>
-          <a:lstStyle/>
-          <a:p>
-            <a:pPr indent="0" marL="0">
-              <a:buNone/>
-            </a:pPr>
-            <a:r>
-              <a:rPr lang="en-US" sz="1400" b="1" dirty="0">
-                <a:solidFill>
-                  <a:srgbClr val="1B3A6B"/>
-                </a:solidFill>
-                <a:latin typeface="Arial" pitchFamily="34" charset="0"/>
-                <a:ea typeface="Arial" pitchFamily="34" charset="-122"/>
-                <a:cs typeface="Arial" pitchFamily="34" charset="-120"/>
-              </a:rPr>
-              <a:t>Carteira e propostas na plataforma</a:t>
-            </a:r>
-            <a:endParaRPr lang="en-US" sz="1400" dirty="0"/>
-          </a:p>
-        </p:txBody>
-      </p:sp>
-      <p:sp>
-        <p:nvSpPr>
-          <p:cNvPr id="13" name="Text 10"/>
-          <p:cNvSpPr/>
-          <p:nvPr/>
-        </p:nvSpPr>
-        <p:spPr>
-          <a:xfrm>
-            <a:off x="777240" y="2057400"/>
-            <a:ext cx="10634472" cy="4069080"/>
+          <p:cNvPr id="17" name="Text 14"/>
+          <p:cNvSpPr/>
+          <p:nvPr/>
+        </p:nvSpPr>
+        <p:spPr>
+          <a:xfrm>
+            <a:off x="6505956" y="1554480"/>
+            <a:ext cx="4860036" cy="685800"/>
           </a:xfrm>
           <a:prstGeom prst="rect">
             <a:avLst/>
@@ -16969,7 +17687,52 @@
               <a:buNone/>
             </a:pPr>
             <a:r>
-              <a:rPr lang="en-US" sz="1500" dirty="0">
+              <a:rPr lang="en-US" sz="1600" b="1" dirty="0">
+                <a:solidFill>
+                  <a:srgbClr val="1B3A6B"/>
+                </a:solidFill>
+                <a:latin typeface="Arial" pitchFamily="34" charset="0"/>
+                <a:ea typeface="Arial" pitchFamily="34" charset="-122"/>
+                <a:cs typeface="Arial" pitchFamily="34" charset="-120"/>
+              </a:rPr>
+              <a:t>Carteira e propostas na plataforma</a:t>
+            </a:r>
+            <a:endParaRPr lang="en-US" sz="1600" dirty="0"/>
+          </a:p>
+        </p:txBody>
+      </p:sp>
+      <p:sp>
+        <p:nvSpPr>
+          <p:cNvPr id="18" name="Text 15"/>
+          <p:cNvSpPr/>
+          <p:nvPr/>
+        </p:nvSpPr>
+        <p:spPr>
+          <a:xfrm>
+            <a:off x="6505956" y="2286000"/>
+            <a:ext cx="4860036" cy="3749040"/>
+          </a:xfrm>
+          <a:prstGeom prst="rect">
+            <a:avLst/>
+          </a:prstGeom>
+          <a:noFill/>
+          <a:ln/>
+        </p:spPr>
+        <p:txBody>
+          <a:bodyPr wrap="square" rtlCol="0" anchor="t">
+            <a:normAutofit/>
+          </a:bodyPr>
+          <a:lstStyle/>
+          <a:p>
+            <a:pPr marL="342900" indent="-342900">
+              <a:spcAft>
+                <a:spcPts val="600"/>
+              </a:spcAft>
+              <a:buSzPct val="100000"/>
+              <a:buChar char="●"/>
+            </a:pPr>
+            <a:r>
+              <a:rPr lang="en-US" sz="1700" dirty="0">
                 <a:solidFill>
                   <a:srgbClr val="1F2937"/>
                 </a:solidFill>
@@ -16979,14 +17742,18 @@
               </a:rPr>
               <a:t>Cada consultor vê só a própria carteira</a:t>
             </a:r>
-            <a:endParaRPr lang="en-US" sz="1500" dirty="0"/>
-          </a:p>
-          <a:p>
-            <a:pPr indent="0" marL="0">
-              <a:buNone/>
-            </a:pPr>
-            <a:r>
-              <a:rPr lang="en-US" sz="1500" dirty="0">
+            <a:endParaRPr lang="en-US" sz="1700" dirty="0"/>
+          </a:p>
+          <a:p>
+            <a:pPr marL="342900" indent="-342900">
+              <a:spcAft>
+                <a:spcPts val="600"/>
+              </a:spcAft>
+              <a:buSzPct val="100000"/>
+              <a:buChar char="●"/>
+            </a:pPr>
+            <a:r>
+              <a:rPr lang="en-US" sz="1700" dirty="0">
                 <a:solidFill>
                   <a:srgbClr val="1F2937"/>
                 </a:solidFill>
@@ -16996,7 +17763,7 @@
               </a:rPr>
               <a:t>status da proposta = etapa do funil</a:t>
             </a:r>
-            <a:endParaRPr lang="en-US" sz="1500" dirty="0"/>
+            <a:endParaRPr lang="en-US" sz="1700" dirty="0"/>
           </a:p>
         </p:txBody>
       </p:sp>
@@ -19033,7 +19800,7 @@
             <a:r>
               <a:rPr lang="en-US" sz="11000" b="1" dirty="0">
                 <a:solidFill>
-                  <a:srgbClr val="11396F"/>
+                  <a:srgbClr val="F7A23B"/>
                 </a:solidFill>
                 <a:latin typeface="Arial" pitchFamily="34" charset="0"/>
                 <a:ea typeface="Arial" pitchFamily="34" charset="-122"/>
@@ -19221,7 +19988,7 @@
                 <a:ea typeface="Arial" pitchFamily="34" charset="-122"/>
                 <a:cs typeface="Arial" pitchFamily="34" charset="-120"/>
               </a:rPr>
-              <a:t>cliente, unidade consumidora e proposta comercial</a:t>
+              <a:t>Cliente, unidade consumidora e proposta comercial</a:t>
             </a:r>
             <a:endParaRPr lang="en-US" sz="3200" dirty="0"/>
           </a:p>
@@ -27158,7 +27925,7 @@
               <a:buNone/>
             </a:pPr>
             <a:r>
-              <a:rPr lang="en-US" sz="1300" i="1" dirty="0">
+              <a:rPr lang="en-US" sz="1400" i="1" dirty="0">
                 <a:solidFill>
                   <a:srgbClr val="64748B"/>
                 </a:solidFill>
@@ -27168,7 +27935,7 @@
               </a:rPr>
               <a:t>Evite, no começo, os perfis da tela. Eles dão trabalho e trazem pouca margem.</a:t>
             </a:r>
-            <a:endParaRPr lang="en-US" sz="1300" dirty="0"/>
+            <a:endParaRPr lang="en-US" sz="1400" dirty="0"/>
           </a:p>
         </p:txBody>
       </p:sp>
@@ -27441,7 +28208,7 @@
               <a:buNone/>
             </a:pPr>
             <a:r>
-              <a:rPr lang="en-US" sz="1300" i="1" dirty="0">
+              <a:rPr lang="en-US" sz="1400" i="1" dirty="0">
                 <a:solidFill>
                   <a:srgbClr val="64748B"/>
                 </a:solidFill>
@@ -27451,7 +28218,7 @@
               </a:rPr>
               <a:t>O canal mais barato é a indicação. E, se você já tem empresa solar, os orçamentos que não fecharam por falta de telhado ou de capital são a sua primeira carteira de assinantes.</a:t>
             </a:r>
-            <a:endParaRPr lang="en-US" sz="1300" dirty="0"/>
+            <a:endParaRPr lang="en-US" sz="1400" dirty="0"/>
           </a:p>
         </p:txBody>
       </p:sp>
@@ -28291,7 +29058,7 @@
             <a:r>
               <a:rPr lang="en-US" sz="11000" b="1" dirty="0">
                 <a:solidFill>
-                  <a:srgbClr val="11396F"/>
+                  <a:srgbClr val="F7A23B"/>
                 </a:solidFill>
                 <a:latin typeface="Arial" pitchFamily="34" charset="0"/>
                 <a:ea typeface="Arial" pitchFamily="34" charset="-122"/>
@@ -28414,7 +29181,7 @@
                 <a:ea typeface="Arial" pitchFamily="34" charset="-122"/>
                 <a:cs typeface="Arial" pitchFamily="34" charset="-120"/>
               </a:rPr>
-              <a:t>Aula</a:t>
+              <a:t>Aula teórica</a:t>
             </a:r>
             <a:endParaRPr lang="en-US" sz="1400" dirty="0"/>
           </a:p>
